--- a/LabBook_3.pptx
+++ b/LabBook_3.pptx
@@ -5,19 +5,26 @@
     <p:sldMasterId id="2147483648" r:id="rId1"/>
   </p:sldMasterIdLst>
   <p:notesMasterIdLst>
-    <p:notesMasterId r:id="rId9"/>
+    <p:notesMasterId r:id="rId16"/>
   </p:notesMasterIdLst>
   <p:handoutMasterIdLst>
-    <p:handoutMasterId r:id="rId10"/>
+    <p:handoutMasterId r:id="rId17"/>
   </p:handoutMasterIdLst>
   <p:sldIdLst>
     <p:sldId id="256" r:id="rId2"/>
     <p:sldId id="289" r:id="rId3"/>
     <p:sldId id="290" r:id="rId4"/>
-    <p:sldId id="295" r:id="rId5"/>
-    <p:sldId id="296" r:id="rId6"/>
-    <p:sldId id="293" r:id="rId7"/>
-    <p:sldId id="288" r:id="rId8"/>
+    <p:sldId id="297" r:id="rId5"/>
+    <p:sldId id="300" r:id="rId6"/>
+    <p:sldId id="298" r:id="rId7"/>
+    <p:sldId id="301" r:id="rId8"/>
+    <p:sldId id="299" r:id="rId9"/>
+    <p:sldId id="302" r:id="rId10"/>
+    <p:sldId id="303" r:id="rId11"/>
+    <p:sldId id="295" r:id="rId12"/>
+    <p:sldId id="296" r:id="rId13"/>
+    <p:sldId id="293" r:id="rId14"/>
+    <p:sldId id="288" r:id="rId15"/>
   </p:sldIdLst>
   <p:sldSz cx="12192000" cy="6858000"/>
   <p:notesSz cx="12192000" cy="6858000"/>
@@ -849,7 +856,7 @@
           <a:p>
             <a:fld id="{676223B9-C868-4436-87D9-1A3152E1157A}" type="slidenum">
               <a:rPr lang="es-ES" smtClean="0"/>
-              <a:t>4</a:t>
+              <a:t>11</a:t>
             </a:fld>
             <a:endParaRPr lang="es-ES"/>
           </a:p>
@@ -957,7 +964,7 @@
           <a:p>
             <a:fld id="{676223B9-C868-4436-87D9-1A3152E1157A}" type="slidenum">
               <a:rPr lang="es-ES" smtClean="0"/>
-              <a:t>5</a:t>
+              <a:t>12</a:t>
             </a:fld>
             <a:endParaRPr lang="es-ES"/>
           </a:p>
@@ -1065,7 +1072,7 @@
           <a:p>
             <a:fld id="{676223B9-C868-4436-87D9-1A3152E1157A}" type="slidenum">
               <a:rPr lang="es-ES" smtClean="0"/>
-              <a:t>6</a:t>
+              <a:t>13</a:t>
             </a:fld>
             <a:endParaRPr lang="es-ES"/>
           </a:p>
@@ -2702,6 +2709,2230 @@
             <a:fld id="{B6F15528-21DE-4FAA-801E-634DDDAF4B2B}" type="slidenum">
               <a:rPr lang="es-ES" smtClean="0"/>
               <a:t>1</a:t>
+            </a:fld>
+            <a:endParaRPr lang="es-ES"/>
+          </a:p>
+        </p:txBody>
+      </p:sp>
+    </p:spTree>
+  </p:cSld>
+  <p:clrMapOvr>
+    <a:masterClrMapping/>
+  </p:clrMapOvr>
+</p:sld>
+</file>
+
+<file path=ppt/slides/slide10.xml><?xml version="1.0" encoding="utf-8"?>
+<p:sld xmlns:a="http://schemas.openxmlformats.org/drawingml/2006/main" xmlns:r="http://schemas.openxmlformats.org/officeDocument/2006/relationships" xmlns:p="http://schemas.openxmlformats.org/presentationml/2006/main">
+  <p:cSld>
+    <p:spTree>
+      <p:nvGrpSpPr>
+        <p:cNvPr id="1" name="">
+          <a:extLst>
+            <a:ext uri="{FF2B5EF4-FFF2-40B4-BE49-F238E27FC236}">
+              <a16:creationId xmlns:a16="http://schemas.microsoft.com/office/drawing/2014/main" id="{875A42E4-3CE9-A968-9CB0-457829732F41}"/>
+            </a:ext>
+          </a:extLst>
+        </p:cNvPr>
+        <p:cNvGrpSpPr/>
+        <p:nvPr/>
+      </p:nvGrpSpPr>
+      <p:grpSpPr>
+        <a:xfrm>
+          <a:off x="0" y="0"/>
+          <a:ext cx="0" cy="0"/>
+          <a:chOff x="0" y="0"/>
+          <a:chExt cx="0" cy="0"/>
+        </a:xfrm>
+      </p:grpSpPr>
+      <p:sp>
+        <p:nvSpPr>
+          <p:cNvPr id="2" name="Título 1">
+            <a:extLst>
+              <a:ext uri="{FF2B5EF4-FFF2-40B4-BE49-F238E27FC236}">
+                <a16:creationId xmlns:a16="http://schemas.microsoft.com/office/drawing/2014/main" id="{B7F880F7-9720-7871-20EE-314611D95AB3}"/>
+              </a:ext>
+            </a:extLst>
+          </p:cNvPr>
+          <p:cNvSpPr>
+            <a:spLocks noGrp="1"/>
+          </p:cNvSpPr>
+          <p:nvPr>
+            <p:ph type="title"/>
+          </p:nvPr>
+        </p:nvSpPr>
+        <p:spPr/>
+        <p:txBody>
+          <a:bodyPr/>
+          <a:lstStyle/>
+          <a:p>
+            <a:r>
+              <a:rPr lang="es-ES" dirty="0" err="1"/>
+              <a:t>Unbalanced</a:t>
+            </a:r>
+            <a:r>
+              <a:rPr lang="es-ES" dirty="0"/>
+              <a:t> </a:t>
+            </a:r>
+            <a:r>
+              <a:rPr lang="es-ES" dirty="0" err="1"/>
+              <a:t>configuration</a:t>
+            </a:r>
+            <a:r>
+              <a:rPr lang="es-ES" dirty="0"/>
+              <a:t> –</a:t>
+            </a:r>
+            <a:r>
+              <a:rPr lang="es-ES" dirty="0" err="1"/>
+              <a:t>Delay</a:t>
+            </a:r>
+            <a:r>
+              <a:rPr lang="es-ES" dirty="0"/>
+              <a:t> con cambio de % de acoplo</a:t>
+            </a:r>
+          </a:p>
+        </p:txBody>
+      </p:sp>
+      <p:sp>
+        <p:nvSpPr>
+          <p:cNvPr id="4" name="Marcador de pie de página 3">
+            <a:extLst>
+              <a:ext uri="{FF2B5EF4-FFF2-40B4-BE49-F238E27FC236}">
+                <a16:creationId xmlns:a16="http://schemas.microsoft.com/office/drawing/2014/main" id="{814D3694-BDF0-041A-DF34-4EE2322ABCF6}"/>
+              </a:ext>
+            </a:extLst>
+          </p:cNvPr>
+          <p:cNvSpPr>
+            <a:spLocks noGrp="1"/>
+          </p:cNvSpPr>
+          <p:nvPr>
+            <p:ph type="ftr" sz="quarter" idx="5"/>
+          </p:nvPr>
+        </p:nvSpPr>
+        <p:spPr/>
+        <p:txBody>
+          <a:bodyPr/>
+          <a:lstStyle/>
+          <a:p>
+            <a:pPr marL="12700">
+              <a:spcBef>
+                <a:spcPts val="15"/>
+              </a:spcBef>
+            </a:pPr>
+            <a:r>
+              <a:rPr lang="es-ES" spc="-5"/>
+              <a:t>LAB 3. INTERFEROMETERS I</a:t>
+            </a:r>
+            <a:endParaRPr lang="es-ES" spc="-5" dirty="0"/>
+          </a:p>
+        </p:txBody>
+      </p:sp>
+      <p:sp>
+        <p:nvSpPr>
+          <p:cNvPr id="5" name="Marcador de número de diapositiva 4">
+            <a:extLst>
+              <a:ext uri="{FF2B5EF4-FFF2-40B4-BE49-F238E27FC236}">
+                <a16:creationId xmlns:a16="http://schemas.microsoft.com/office/drawing/2014/main" id="{F69316F9-B5A8-C17D-21D7-C87EA0A6D67E}"/>
+              </a:ext>
+            </a:extLst>
+          </p:cNvPr>
+          <p:cNvSpPr>
+            <a:spLocks noGrp="1"/>
+          </p:cNvSpPr>
+          <p:nvPr>
+            <p:ph type="sldNum" sz="quarter" idx="7"/>
+          </p:nvPr>
+        </p:nvSpPr>
+        <p:spPr/>
+        <p:txBody>
+          <a:bodyPr/>
+          <a:lstStyle/>
+          <a:p>
+            <a:fld id="{B6F15528-21DE-4FAA-801E-634DDDAF4B2B}" type="slidenum">
+              <a:rPr lang="es-ES" smtClean="0"/>
+              <a:t>10</a:t>
+            </a:fld>
+            <a:endParaRPr lang="es-ES"/>
+          </a:p>
+        </p:txBody>
+      </p:sp>
+      <p:pic>
+        <p:nvPicPr>
+          <p:cNvPr id="7" name="Imagen 6">
+            <a:extLst>
+              <a:ext uri="{FF2B5EF4-FFF2-40B4-BE49-F238E27FC236}">
+                <a16:creationId xmlns:a16="http://schemas.microsoft.com/office/drawing/2014/main" id="{0A7A7ACB-2707-56ED-131C-1DF4720478F4}"/>
+              </a:ext>
+            </a:extLst>
+          </p:cNvPr>
+          <p:cNvPicPr>
+            <a:picLocks noChangeAspect="1"/>
+          </p:cNvPicPr>
+          <p:nvPr/>
+        </p:nvPicPr>
+        <p:blipFill>
+          <a:blip r:embed="rId2">
+            <a:extLst>
+              <a:ext uri="{28A0092B-C50C-407E-A947-70E740481C1C}">
+                <a14:useLocalDpi xmlns:a14="http://schemas.microsoft.com/office/drawing/2010/main" val="0"/>
+              </a:ext>
+            </a:extLst>
+          </a:blip>
+          <a:srcRect t="427" b="427"/>
+          <a:stretch/>
+        </p:blipFill>
+        <p:spPr>
+          <a:xfrm>
+            <a:off x="493597" y="566477"/>
+            <a:ext cx="4667901" cy="3743847"/>
+          </a:xfrm>
+          <a:prstGeom prst="rect">
+            <a:avLst/>
+          </a:prstGeom>
+        </p:spPr>
+      </p:pic>
+      <p:sp>
+        <p:nvSpPr>
+          <p:cNvPr id="9" name="CuadroTexto 8">
+            <a:extLst>
+              <a:ext uri="{FF2B5EF4-FFF2-40B4-BE49-F238E27FC236}">
+                <a16:creationId xmlns:a16="http://schemas.microsoft.com/office/drawing/2014/main" id="{DB804E56-5DF5-CB07-DBEC-9C63602477AB}"/>
+              </a:ext>
+            </a:extLst>
+          </p:cNvPr>
+          <p:cNvSpPr txBox="1"/>
+          <p:nvPr/>
+        </p:nvSpPr>
+        <p:spPr>
+          <a:xfrm>
+            <a:off x="5715000" y="914400"/>
+            <a:ext cx="6128326" cy="369332"/>
+          </a:xfrm>
+          <a:prstGeom prst="rect">
+            <a:avLst/>
+          </a:prstGeom>
+          <a:noFill/>
+        </p:spPr>
+        <p:txBody>
+          <a:bodyPr wrap="square">
+            <a:spAutoFit/>
+          </a:bodyPr>
+          <a:lstStyle/>
+          <a:p>
+            <a:r>
+              <a:rPr lang="en-US" dirty="0"/>
+              <a:t>Al </a:t>
+            </a:r>
+            <a:r>
+              <a:rPr lang="en-US" dirty="0" err="1"/>
+              <a:t>hacerlo</a:t>
+            </a:r>
+            <a:r>
+              <a:rPr lang="en-US" dirty="0"/>
+              <a:t> 70/30 </a:t>
+            </a:r>
+            <a:r>
+              <a:rPr lang="en-US" dirty="0" err="1"/>
+              <a:t>observamos</a:t>
+            </a:r>
+            <a:r>
+              <a:rPr lang="en-US" dirty="0"/>
+              <a:t> la </a:t>
+            </a:r>
+            <a:r>
+              <a:rPr lang="en-US" dirty="0" err="1"/>
+              <a:t>diferencia</a:t>
+            </a:r>
+            <a:r>
+              <a:rPr lang="en-US" dirty="0"/>
+              <a:t> de </a:t>
+            </a:r>
+            <a:r>
+              <a:rPr lang="en-US" dirty="0" err="1"/>
+              <a:t>comportamiento</a:t>
+            </a:r>
+            <a:r>
+              <a:rPr lang="en-US" dirty="0"/>
+              <a:t>.</a:t>
+            </a:r>
+            <a:endParaRPr lang="es-ES" dirty="0"/>
+          </a:p>
+        </p:txBody>
+      </p:sp>
+    </p:spTree>
+    <p:extLst>
+      <p:ext uri="{BB962C8B-B14F-4D97-AF65-F5344CB8AC3E}">
+        <p14:creationId xmlns:p14="http://schemas.microsoft.com/office/powerpoint/2010/main" val="3128943942"/>
+      </p:ext>
+    </p:extLst>
+  </p:cSld>
+  <p:clrMapOvr>
+    <a:masterClrMapping/>
+  </p:clrMapOvr>
+</p:sld>
+</file>
+
+<file path=ppt/slides/slide11.xml><?xml version="1.0" encoding="utf-8"?>
+<p:sld xmlns:a="http://schemas.openxmlformats.org/drawingml/2006/main" xmlns:r="http://schemas.openxmlformats.org/officeDocument/2006/relationships" xmlns:p="http://schemas.openxmlformats.org/presentationml/2006/main">
+  <p:cSld>
+    <p:spTree>
+      <p:nvGrpSpPr>
+        <p:cNvPr id="1" name="">
+          <a:extLst>
+            <a:ext uri="{FF2B5EF4-FFF2-40B4-BE49-F238E27FC236}">
+              <a16:creationId xmlns:a16="http://schemas.microsoft.com/office/drawing/2014/main" id="{1525AB88-A787-2C84-3A44-2B634D87FB5B}"/>
+            </a:ext>
+          </a:extLst>
+        </p:cNvPr>
+        <p:cNvGrpSpPr/>
+        <p:nvPr/>
+      </p:nvGrpSpPr>
+      <p:grpSpPr>
+        <a:xfrm>
+          <a:off x="0" y="0"/>
+          <a:ext cx="0" cy="0"/>
+          <a:chOff x="0" y="0"/>
+          <a:chExt cx="0" cy="0"/>
+        </a:xfrm>
+      </p:grpSpPr>
+      <mc:AlternateContent xmlns:mc="http://schemas.openxmlformats.org/markup-compatibility/2006" xmlns:a14="http://schemas.microsoft.com/office/drawing/2010/main">
+        <mc:Choice Requires="a14">
+          <p:sp>
+            <p:nvSpPr>
+              <p:cNvPr id="16" name="object 16">
+                <a:extLst>
+                  <a:ext uri="{FF2B5EF4-FFF2-40B4-BE49-F238E27FC236}">
+                    <a16:creationId xmlns:a16="http://schemas.microsoft.com/office/drawing/2014/main" id="{A153D08B-B860-A163-3940-83AD64444D01}"/>
+                  </a:ext>
+                </a:extLst>
+              </p:cNvPr>
+              <p:cNvSpPr txBox="1">
+                <a:spLocks noGrp="1"/>
+              </p:cNvSpPr>
+              <p:nvPr>
+                <p:ph type="title"/>
+              </p:nvPr>
+            </p:nvSpPr>
+            <p:spPr>
+              <a:xfrm>
+                <a:off x="685800" y="408883"/>
+                <a:ext cx="10994410" cy="782265"/>
+              </a:xfrm>
+              <a:prstGeom prst="rect">
+                <a:avLst/>
+              </a:prstGeom>
+            </p:spPr>
+            <p:txBody>
+              <a:bodyPr vert="horz" wrap="square" lIns="0" tIns="12700" rIns="0" bIns="0" rtlCol="0">
+                <a:spAutoFit/>
+              </a:bodyPr>
+              <a:lstStyle/>
+              <a:p>
+                <a:pPr marL="12700">
+                  <a:lnSpc>
+                    <a:spcPct val="100000"/>
+                  </a:lnSpc>
+                  <a:spcBef>
+                    <a:spcPts val="100"/>
+                  </a:spcBef>
+                </a:pPr>
+                <a:r>
+                  <a:rPr lang="en-US" sz="2400" b="1" dirty="0"/>
+                  <a:t>ASSESSMENT #2 </a:t>
+                </a:r>
+                <a:r>
+                  <a:rPr lang="en-US" sz="2500" dirty="0"/>
+                  <a:t>– Recap from theory – Calculation of </a:t>
+                </a:r>
+                <a14:m>
+                  <m:oMath xmlns:m="http://schemas.openxmlformats.org/officeDocument/2006/math">
+                    <m:r>
+                      <a:rPr lang="es-ES" sz="2500" b="1" i="0" smtClean="0">
+                        <a:latin typeface="Cambria Math" panose="02040503050406030204" pitchFamily="18" charset="0"/>
+                      </a:rPr>
+                      <m:t>𝚫</m:t>
+                    </m:r>
+                    <m:r>
+                      <a:rPr lang="es-ES" sz="2500" b="1" i="0" smtClean="0">
+                        <a:latin typeface="Cambria Math" panose="02040503050406030204" pitchFamily="18" charset="0"/>
+                      </a:rPr>
+                      <m:t>𝐋</m:t>
+                    </m:r>
+                  </m:oMath>
+                </a14:m>
+                <a:r>
+                  <a:rPr lang="es-ES" sz="2500" spc="-5" dirty="0">
+                    <a:latin typeface="+mj-lt"/>
+                    <a:cs typeface="Lucida Sans"/>
+                  </a:rPr>
+                  <a:t> </a:t>
+                </a:r>
+                <a:br>
+                  <a:rPr lang="es-ES" sz="2500" spc="-5" dirty="0">
+                    <a:latin typeface="+mj-lt"/>
+                    <a:cs typeface="Lucida Sans"/>
+                  </a:rPr>
+                </a:br>
+                <a:endParaRPr sz="2500" b="0" dirty="0">
+                  <a:latin typeface="+mj-lt"/>
+                  <a:cs typeface="Lucida Sans"/>
+                </a:endParaRPr>
+              </a:p>
+            </p:txBody>
+          </p:sp>
+        </mc:Choice>
+        <mc:Fallback xmlns="">
+          <p:sp>
+            <p:nvSpPr>
+              <p:cNvPr id="16" name="object 16">
+                <a:extLst>
+                  <a:ext uri="{FF2B5EF4-FFF2-40B4-BE49-F238E27FC236}">
+                    <a16:creationId xmlns:a16="http://schemas.microsoft.com/office/drawing/2014/main" id="{A153D08B-B860-A163-3940-83AD64444D01}"/>
+                  </a:ext>
+                </a:extLst>
+              </p:cNvPr>
+              <p:cNvSpPr txBox="1">
+                <a:spLocks noGrp="1" noRot="1" noChangeAspect="1" noMove="1" noResize="1" noEditPoints="1" noAdjustHandles="1" noChangeArrowheads="1" noChangeShapeType="1" noTextEdit="1"/>
+              </p:cNvSpPr>
+              <p:nvPr>
+                <p:ph type="title"/>
+              </p:nvPr>
+            </p:nvSpPr>
+            <p:spPr>
+              <a:xfrm>
+                <a:off x="685800" y="408883"/>
+                <a:ext cx="10994410" cy="782265"/>
+              </a:xfrm>
+              <a:prstGeom prst="rect">
+                <a:avLst/>
+              </a:prstGeom>
+              <a:blipFill>
+                <a:blip r:embed="rId3"/>
+                <a:stretch>
+                  <a:fillRect l="-1608" t="-10156"/>
+                </a:stretch>
+              </a:blipFill>
+            </p:spPr>
+            <p:txBody>
+              <a:bodyPr/>
+              <a:lstStyle/>
+              <a:p>
+                <a:r>
+                  <a:rPr lang="es-ES">
+                    <a:noFill/>
+                  </a:rPr>
+                  <a:t> </a:t>
+                </a:r>
+              </a:p>
+            </p:txBody>
+          </p:sp>
+        </mc:Fallback>
+      </mc:AlternateContent>
+      <p:pic>
+        <p:nvPicPr>
+          <p:cNvPr id="83" name="Gráfico 82">
+            <a:extLst>
+              <a:ext uri="{FF2B5EF4-FFF2-40B4-BE49-F238E27FC236}">
+                <a16:creationId xmlns:a16="http://schemas.microsoft.com/office/drawing/2014/main" id="{333888A9-82BA-4688-F856-37AB661A7D43}"/>
+              </a:ext>
+            </a:extLst>
+          </p:cNvPr>
+          <p:cNvPicPr>
+            <a:picLocks noChangeAspect="1"/>
+          </p:cNvPicPr>
+          <p:nvPr/>
+        </p:nvPicPr>
+        <p:blipFill>
+          <a:blip r:embed="rId4">
+            <a:extLst>
+              <a:ext uri="{96DAC541-7B7A-43D3-8B79-37D633B846F1}">
+                <asvg:svgBlip xmlns:asvg="http://schemas.microsoft.com/office/drawing/2016/SVG/main" r:embed="rId5"/>
+              </a:ext>
+            </a:extLst>
+          </a:blip>
+          <a:stretch>
+            <a:fillRect/>
+          </a:stretch>
+        </p:blipFill>
+        <p:spPr>
+          <a:xfrm>
+            <a:off x="5045006" y="6356057"/>
+            <a:ext cx="6409575" cy="363174"/>
+          </a:xfrm>
+          <a:prstGeom prst="rect">
+            <a:avLst/>
+          </a:prstGeom>
+        </p:spPr>
+      </p:pic>
+      <p:sp>
+        <p:nvSpPr>
+          <p:cNvPr id="84" name="Marcador de número de diapositiva 83">
+            <a:extLst>
+              <a:ext uri="{FF2B5EF4-FFF2-40B4-BE49-F238E27FC236}">
+                <a16:creationId xmlns:a16="http://schemas.microsoft.com/office/drawing/2014/main" id="{F1891475-ED60-D0D2-1AD0-4F80E3D89439}"/>
+              </a:ext>
+            </a:extLst>
+          </p:cNvPr>
+          <p:cNvSpPr>
+            <a:spLocks noGrp="1"/>
+          </p:cNvSpPr>
+          <p:nvPr>
+            <p:ph type="sldNum" sz="quarter" idx="7"/>
+          </p:nvPr>
+        </p:nvSpPr>
+        <p:spPr/>
+        <p:txBody>
+          <a:bodyPr/>
+          <a:lstStyle/>
+          <a:p>
+            <a:fld id="{B6F15528-21DE-4FAA-801E-634DDDAF4B2B}" type="slidenum">
+              <a:rPr lang="es-ES" smtClean="0"/>
+              <a:t>11</a:t>
+            </a:fld>
+            <a:endParaRPr lang="es-ES"/>
+          </a:p>
+        </p:txBody>
+      </p:sp>
+      <mc:AlternateContent xmlns:mc="http://schemas.openxmlformats.org/markup-compatibility/2006" xmlns:a14="http://schemas.microsoft.com/office/drawing/2010/main">
+        <mc:Choice Requires="a14">
+          <p:sp>
+            <p:nvSpPr>
+              <p:cNvPr id="4" name="Marcador de texto 2">
+                <a:extLst>
+                  <a:ext uri="{FF2B5EF4-FFF2-40B4-BE49-F238E27FC236}">
+                    <a16:creationId xmlns:a16="http://schemas.microsoft.com/office/drawing/2014/main" id="{BBBE28D8-49EC-3B49-29AC-FD2FDAF3B0AF}"/>
+                  </a:ext>
+                </a:extLst>
+              </p:cNvPr>
+              <p:cNvSpPr txBox="1">
+                <a:spLocks/>
+              </p:cNvSpPr>
+              <p:nvPr/>
+            </p:nvSpPr>
+            <p:spPr>
+              <a:xfrm>
+                <a:off x="608012" y="1295400"/>
+                <a:ext cx="11048999" cy="4958137"/>
+              </a:xfrm>
+              <a:prstGeom prst="rect">
+                <a:avLst/>
+              </a:prstGeom>
+            </p:spPr>
+            <p:txBody>
+              <a:bodyPr>
+                <a:normAutofit/>
+              </a:bodyPr>
+              <a:lstStyle>
+                <a:lvl1pPr marL="0">
+                  <a:defRPr>
+                    <a:latin typeface="+mn-lt"/>
+                    <a:ea typeface="+mn-ea"/>
+                    <a:cs typeface="+mn-cs"/>
+                  </a:defRPr>
+                </a:lvl1pPr>
+                <a:lvl2pPr marL="457200">
+                  <a:defRPr>
+                    <a:latin typeface="+mn-lt"/>
+                    <a:ea typeface="+mn-ea"/>
+                    <a:cs typeface="+mn-cs"/>
+                  </a:defRPr>
+                </a:lvl2pPr>
+                <a:lvl3pPr marL="914400">
+                  <a:defRPr>
+                    <a:latin typeface="+mn-lt"/>
+                    <a:ea typeface="+mn-ea"/>
+                    <a:cs typeface="+mn-cs"/>
+                  </a:defRPr>
+                </a:lvl3pPr>
+                <a:lvl4pPr marL="1371600">
+                  <a:defRPr>
+                    <a:latin typeface="+mn-lt"/>
+                    <a:ea typeface="+mn-ea"/>
+                    <a:cs typeface="+mn-cs"/>
+                  </a:defRPr>
+                </a:lvl4pPr>
+                <a:lvl5pPr marL="1828800">
+                  <a:defRPr>
+                    <a:latin typeface="+mn-lt"/>
+                    <a:ea typeface="+mn-ea"/>
+                    <a:cs typeface="+mn-cs"/>
+                  </a:defRPr>
+                </a:lvl5pPr>
+                <a:lvl6pPr marL="2286000">
+                  <a:defRPr>
+                    <a:latin typeface="+mn-lt"/>
+                    <a:ea typeface="+mn-ea"/>
+                    <a:cs typeface="+mn-cs"/>
+                  </a:defRPr>
+                </a:lvl6pPr>
+                <a:lvl7pPr marL="2743200">
+                  <a:defRPr>
+                    <a:latin typeface="+mn-lt"/>
+                    <a:ea typeface="+mn-ea"/>
+                    <a:cs typeface="+mn-cs"/>
+                  </a:defRPr>
+                </a:lvl7pPr>
+                <a:lvl8pPr marL="3200400">
+                  <a:defRPr>
+                    <a:latin typeface="+mn-lt"/>
+                    <a:ea typeface="+mn-ea"/>
+                    <a:cs typeface="+mn-cs"/>
+                  </a:defRPr>
+                </a:lvl8pPr>
+                <a:lvl9pPr marL="3657600">
+                  <a:defRPr>
+                    <a:latin typeface="+mn-lt"/>
+                    <a:ea typeface="+mn-ea"/>
+                    <a:cs typeface="+mn-cs"/>
+                  </a:defRPr>
+                </a:lvl9pPr>
+              </a:lstStyle>
+              <a:p>
+                <a:r>
+                  <a:rPr lang="en-US" sz="2000" dirty="0"/>
+                  <a:t>Considering the n_{eff} values for the SOI cross-section, what would be the path difference (</a:t>
+                </a:r>
+                <a14:m>
+                  <m:oMath xmlns:m="http://schemas.openxmlformats.org/officeDocument/2006/math">
+                    <m:r>
+                      <m:rPr>
+                        <m:sty m:val="p"/>
+                      </m:rPr>
+                      <a:rPr lang="es-ES" sz="2000" b="0" i="0" smtClean="0">
+                        <a:latin typeface="Cambria Math" panose="02040503050406030204" pitchFamily="18" charset="0"/>
+                      </a:rPr>
+                      <m:t>ΔL</m:t>
+                    </m:r>
+                    <m:r>
+                      <a:rPr lang="es-ES" sz="2000" b="0" i="1" smtClean="0">
+                        <a:latin typeface="Cambria Math" panose="02040503050406030204" pitchFamily="18" charset="0"/>
+                      </a:rPr>
+                      <m:t>= </m:t>
+                    </m:r>
+                    <m:sSub>
+                      <m:sSubPr>
+                        <m:ctrlPr>
+                          <a:rPr lang="es-ES" sz="2000" i="1" smtClean="0">
+                            <a:latin typeface="Cambria Math" panose="02040503050406030204" pitchFamily="18" charset="0"/>
+                          </a:rPr>
+                        </m:ctrlPr>
+                      </m:sSubPr>
+                      <m:e>
+                        <m:r>
+                          <a:rPr lang="es-ES" sz="2000" b="0" i="1" smtClean="0">
+                            <a:latin typeface="Cambria Math" panose="02040503050406030204" pitchFamily="18" charset="0"/>
+                          </a:rPr>
+                          <m:t>𝐿</m:t>
+                        </m:r>
+                      </m:e>
+                      <m:sub>
+                        <m:r>
+                          <a:rPr lang="es-ES" sz="2000" b="0" i="1" smtClean="0">
+                            <a:latin typeface="Cambria Math" panose="02040503050406030204" pitchFamily="18" charset="0"/>
+                          </a:rPr>
+                          <m:t>𝑢</m:t>
+                        </m:r>
+                      </m:sub>
+                    </m:sSub>
+                    <m:r>
+                      <a:rPr lang="es-ES" sz="2000" b="0" i="1" smtClean="0">
+                        <a:latin typeface="Cambria Math" panose="02040503050406030204" pitchFamily="18" charset="0"/>
+                      </a:rPr>
+                      <m:t> −</m:t>
+                    </m:r>
+                    <m:sSub>
+                      <m:sSubPr>
+                        <m:ctrlPr>
+                          <a:rPr lang="es-ES" sz="2000" i="1">
+                            <a:latin typeface="Cambria Math" panose="02040503050406030204" pitchFamily="18" charset="0"/>
+                          </a:rPr>
+                        </m:ctrlPr>
+                      </m:sSubPr>
+                      <m:e>
+                        <m:r>
+                          <a:rPr lang="es-ES" sz="2000" b="0" i="1">
+                            <a:latin typeface="Cambria Math" panose="02040503050406030204" pitchFamily="18" charset="0"/>
+                          </a:rPr>
+                          <m:t>𝐿</m:t>
+                        </m:r>
+                      </m:e>
+                      <m:sub>
+                        <m:r>
+                          <a:rPr lang="es-ES" sz="2000" b="0" i="1" smtClean="0">
+                            <a:latin typeface="Cambria Math" panose="02040503050406030204" pitchFamily="18" charset="0"/>
+                          </a:rPr>
+                          <m:t>𝑑</m:t>
+                        </m:r>
+                      </m:sub>
+                    </m:sSub>
+                  </m:oMath>
+                </a14:m>
+                <a:r>
+                  <a:rPr lang="en-US" sz="2000" dirty="0"/>
+                  <a:t>) needed to obtain a Free Spectral Range of 40 nm? Introduce the obtained value in the model to check the MZI response. </a:t>
+                </a:r>
+              </a:p>
+              <a:p>
+                <a:endParaRPr lang="en-US" sz="2000" dirty="0"/>
+              </a:p>
+              <a:p>
+                <a:r>
+                  <a:rPr lang="en-US" sz="2000" dirty="0"/>
+                  <a:t>Hint: We assume 1550 nm as the central design wavelength (</a:t>
+                </a:r>
+                <a14:m>
+                  <m:oMath xmlns:m="http://schemas.openxmlformats.org/officeDocument/2006/math">
+                    <m:sSub>
+                      <m:sSubPr>
+                        <m:ctrlPr>
+                          <a:rPr lang="es-ES" sz="2000" i="1" smtClean="0">
+                            <a:latin typeface="Cambria Math" panose="02040503050406030204" pitchFamily="18" charset="0"/>
+                          </a:rPr>
+                        </m:ctrlPr>
+                      </m:sSubPr>
+                      <m:e>
+                        <m:r>
+                          <a:rPr lang="es-ES" sz="2000" i="1">
+                            <a:latin typeface="Cambria Math" panose="02040503050406030204" pitchFamily="18" charset="0"/>
+                          </a:rPr>
+                          <m:t>𝜆</m:t>
+                        </m:r>
+                      </m:e>
+                      <m:sub>
+                        <m:r>
+                          <a:rPr lang="es-ES" sz="2000" b="0" i="1" smtClean="0">
+                            <a:latin typeface="Cambria Math" panose="02040503050406030204" pitchFamily="18" charset="0"/>
+                          </a:rPr>
+                          <m:t>0</m:t>
+                        </m:r>
+                      </m:sub>
+                    </m:sSub>
+                    <m:r>
+                      <a:rPr lang="es-ES" sz="2000" b="0" i="1" smtClean="0">
+                        <a:latin typeface="Cambria Math" panose="02040503050406030204" pitchFamily="18" charset="0"/>
+                      </a:rPr>
+                      <m:t>= </m:t>
+                    </m:r>
+                  </m:oMath>
+                </a14:m>
+                <a:r>
+                  <a:rPr lang="en-US" sz="2000" dirty="0"/>
+                  <a:t>1550 nm).</a:t>
+                </a:r>
+              </a:p>
+              <a:p>
+                <a:endParaRPr lang="en-US" sz="2000" dirty="0"/>
+              </a:p>
+              <a:p>
+                <a:pPr algn="just"/>
+                <a:endParaRPr lang="en-US" sz="2000" dirty="0"/>
+              </a:p>
+              <a:p>
+                <a:pPr algn="just"/>
+                <a:endParaRPr lang="en-US" sz="2000" b="1" i="1" dirty="0"/>
+              </a:p>
+              <a:p>
+                <a:pPr algn="just"/>
+                <a:endParaRPr lang="en-US" sz="2000" kern="0" dirty="0">
+                  <a:solidFill>
+                    <a:sysClr val="windowText" lastClr="000000"/>
+                  </a:solidFill>
+                </a:endParaRPr>
+              </a:p>
+              <a:p>
+                <a:endParaRPr lang="en-US" sz="2000" kern="0" dirty="0">
+                  <a:solidFill>
+                    <a:sysClr val="windowText" lastClr="000000"/>
+                  </a:solidFill>
+                </a:endParaRPr>
+              </a:p>
+            </p:txBody>
+          </p:sp>
+        </mc:Choice>
+        <mc:Fallback xmlns="">
+          <p:sp>
+            <p:nvSpPr>
+              <p:cNvPr id="4" name="Marcador de texto 2">
+                <a:extLst>
+                  <a:ext uri="{FF2B5EF4-FFF2-40B4-BE49-F238E27FC236}">
+                    <a16:creationId xmlns:a16="http://schemas.microsoft.com/office/drawing/2014/main" id="{BBBE28D8-49EC-3B49-29AC-FD2FDAF3B0AF}"/>
+                  </a:ext>
+                </a:extLst>
+              </p:cNvPr>
+              <p:cNvSpPr txBox="1">
+                <a:spLocks noRot="1" noChangeAspect="1" noMove="1" noResize="1" noEditPoints="1" noAdjustHandles="1" noChangeArrowheads="1" noChangeShapeType="1" noTextEdit="1"/>
+              </p:cNvSpPr>
+              <p:nvPr/>
+            </p:nvSpPr>
+            <p:spPr>
+              <a:xfrm>
+                <a:off x="608012" y="1295400"/>
+                <a:ext cx="11048999" cy="4958137"/>
+              </a:xfrm>
+              <a:prstGeom prst="rect">
+                <a:avLst/>
+              </a:prstGeom>
+              <a:blipFill>
+                <a:blip r:embed="rId6"/>
+                <a:stretch>
+                  <a:fillRect l="-607" t="-738"/>
+                </a:stretch>
+              </a:blipFill>
+            </p:spPr>
+            <p:txBody>
+              <a:bodyPr/>
+              <a:lstStyle/>
+              <a:p>
+                <a:r>
+                  <a:rPr lang="es-ES">
+                    <a:noFill/>
+                  </a:rPr>
+                  <a:t> </a:t>
+                </a:r>
+              </a:p>
+            </p:txBody>
+          </p:sp>
+        </mc:Fallback>
+      </mc:AlternateContent>
+      <p:sp>
+        <p:nvSpPr>
+          <p:cNvPr id="2" name="CuadroTexto 1">
+            <a:extLst>
+              <a:ext uri="{FF2B5EF4-FFF2-40B4-BE49-F238E27FC236}">
+                <a16:creationId xmlns:a16="http://schemas.microsoft.com/office/drawing/2014/main" id="{CFDBBA6B-3646-055F-7A9C-EE01830137BE}"/>
+              </a:ext>
+            </a:extLst>
+          </p:cNvPr>
+          <p:cNvSpPr txBox="1"/>
+          <p:nvPr/>
+        </p:nvSpPr>
+        <p:spPr>
+          <a:xfrm>
+            <a:off x="609441" y="4860334"/>
+            <a:ext cx="11199971" cy="1384995"/>
+          </a:xfrm>
+          <a:prstGeom prst="rect">
+            <a:avLst/>
+          </a:prstGeom>
+          <a:solidFill>
+            <a:schemeClr val="bg1">
+              <a:lumMod val="95000"/>
+            </a:schemeClr>
+          </a:solidFill>
+          <a:ln w="28575">
+            <a:solidFill>
+              <a:srgbClr val="E0700D"/>
+            </a:solidFill>
+          </a:ln>
+        </p:spPr>
+        <p:txBody>
+          <a:bodyPr wrap="square" rtlCol="0">
+            <a:spAutoFit/>
+          </a:bodyPr>
+          <a:lstStyle/>
+          <a:p>
+            <a:pPr algn="just"/>
+            <a:r>
+              <a:rPr lang="en-US" sz="1200" dirty="0">
+                <a:latin typeface="Arial" panose="020B0604020202020204" pitchFamily="34" charset="0"/>
+                <a:cs typeface="Arial" panose="020B0604020202020204" pitchFamily="34" charset="0"/>
+              </a:rPr>
+              <a:t>Document all your results (copy here the code employed to obtain the corresponding value)</a:t>
+            </a:r>
+          </a:p>
+          <a:p>
+            <a:pPr algn="just"/>
+            <a:endParaRPr lang="en-US" sz="1200" dirty="0">
+              <a:latin typeface="Arial" panose="020B0604020202020204" pitchFamily="34" charset="0"/>
+              <a:cs typeface="Arial" panose="020B0604020202020204" pitchFamily="34" charset="0"/>
+            </a:endParaRPr>
+          </a:p>
+          <a:p>
+            <a:pPr algn="just"/>
+            <a:endParaRPr lang="en-US" sz="1200" dirty="0">
+              <a:latin typeface="Arial" panose="020B0604020202020204" pitchFamily="34" charset="0"/>
+              <a:cs typeface="Arial" panose="020B0604020202020204" pitchFamily="34" charset="0"/>
+            </a:endParaRPr>
+          </a:p>
+          <a:p>
+            <a:pPr algn="just"/>
+            <a:endParaRPr lang="en-US" sz="1200" dirty="0">
+              <a:latin typeface="Arial" panose="020B0604020202020204" pitchFamily="34" charset="0"/>
+              <a:cs typeface="Arial" panose="020B0604020202020204" pitchFamily="34" charset="0"/>
+            </a:endParaRPr>
+          </a:p>
+          <a:p>
+            <a:pPr algn="just"/>
+            <a:endParaRPr lang="en-US" sz="1200" dirty="0">
+              <a:latin typeface="Arial" panose="020B0604020202020204" pitchFamily="34" charset="0"/>
+              <a:cs typeface="Arial" panose="020B0604020202020204" pitchFamily="34" charset="0"/>
+            </a:endParaRPr>
+          </a:p>
+          <a:p>
+            <a:pPr algn="just"/>
+            <a:endParaRPr lang="en-US" sz="1200" dirty="0">
+              <a:latin typeface="Arial" panose="020B0604020202020204" pitchFamily="34" charset="0"/>
+              <a:cs typeface="Arial" panose="020B0604020202020204" pitchFamily="34" charset="0"/>
+            </a:endParaRPr>
+          </a:p>
+          <a:p>
+            <a:pPr algn="just"/>
+            <a:endParaRPr lang="en-US" sz="1200" dirty="0">
+              <a:latin typeface="Arial" panose="020B0604020202020204" pitchFamily="34" charset="0"/>
+              <a:cs typeface="Arial" panose="020B0604020202020204" pitchFamily="34" charset="0"/>
+            </a:endParaRPr>
+          </a:p>
+        </p:txBody>
+      </p:sp>
+      <p:sp>
+        <p:nvSpPr>
+          <p:cNvPr id="5" name="Marcador de pie de página 2">
+            <a:extLst>
+              <a:ext uri="{FF2B5EF4-FFF2-40B4-BE49-F238E27FC236}">
+                <a16:creationId xmlns:a16="http://schemas.microsoft.com/office/drawing/2014/main" id="{97B81335-0738-3406-18D4-5D88EB0C7954}"/>
+              </a:ext>
+            </a:extLst>
+          </p:cNvPr>
+          <p:cNvSpPr>
+            <a:spLocks noGrp="1"/>
+          </p:cNvSpPr>
+          <p:nvPr>
+            <p:ph type="ftr" sz="quarter" idx="5"/>
+          </p:nvPr>
+        </p:nvSpPr>
+        <p:spPr>
+          <a:xfrm>
+            <a:off x="609600" y="6457057"/>
+            <a:ext cx="2743200" cy="184666"/>
+          </a:xfrm>
+        </p:spPr>
+        <p:txBody>
+          <a:bodyPr/>
+          <a:lstStyle/>
+          <a:p>
+            <a:pPr marL="12700">
+              <a:spcBef>
+                <a:spcPts val="15"/>
+              </a:spcBef>
+            </a:pPr>
+            <a:r>
+              <a:rPr lang="es-ES" spc="-5"/>
+              <a:t>LAB 3. INTERFEROMETERS I</a:t>
+            </a:r>
+            <a:endParaRPr lang="es-ES" spc="-5" dirty="0"/>
+          </a:p>
+        </p:txBody>
+      </p:sp>
+    </p:spTree>
+    <p:extLst>
+      <p:ext uri="{BB962C8B-B14F-4D97-AF65-F5344CB8AC3E}">
+        <p14:creationId xmlns:p14="http://schemas.microsoft.com/office/powerpoint/2010/main" val="2337098194"/>
+      </p:ext>
+    </p:extLst>
+  </p:cSld>
+  <p:clrMapOvr>
+    <a:masterClrMapping/>
+  </p:clrMapOvr>
+</p:sld>
+</file>
+
+<file path=ppt/slides/slide12.xml><?xml version="1.0" encoding="utf-8"?>
+<p:sld xmlns:a="http://schemas.openxmlformats.org/drawingml/2006/main" xmlns:r="http://schemas.openxmlformats.org/officeDocument/2006/relationships" xmlns:p="http://schemas.openxmlformats.org/presentationml/2006/main">
+  <p:cSld>
+    <p:spTree>
+      <p:nvGrpSpPr>
+        <p:cNvPr id="1" name="">
+          <a:extLst>
+            <a:ext uri="{FF2B5EF4-FFF2-40B4-BE49-F238E27FC236}">
+              <a16:creationId xmlns:a16="http://schemas.microsoft.com/office/drawing/2014/main" id="{98CB9552-DF22-1310-10FA-4D2D2AF77601}"/>
+            </a:ext>
+          </a:extLst>
+        </p:cNvPr>
+        <p:cNvGrpSpPr/>
+        <p:nvPr/>
+      </p:nvGrpSpPr>
+      <p:grpSpPr>
+        <a:xfrm>
+          <a:off x="0" y="0"/>
+          <a:ext cx="0" cy="0"/>
+          <a:chOff x="0" y="0"/>
+          <a:chExt cx="0" cy="0"/>
+        </a:xfrm>
+      </p:grpSpPr>
+      <p:sp>
+        <p:nvSpPr>
+          <p:cNvPr id="16" name="object 16">
+            <a:extLst>
+              <a:ext uri="{FF2B5EF4-FFF2-40B4-BE49-F238E27FC236}">
+                <a16:creationId xmlns:a16="http://schemas.microsoft.com/office/drawing/2014/main" id="{B0632A48-0384-0EF1-389E-FBF3F9C3E7CE}"/>
+              </a:ext>
+            </a:extLst>
+          </p:cNvPr>
+          <p:cNvSpPr txBox="1">
+            <a:spLocks noGrp="1"/>
+          </p:cNvSpPr>
+          <p:nvPr>
+            <p:ph type="title"/>
+          </p:nvPr>
+        </p:nvSpPr>
+        <p:spPr>
+          <a:xfrm>
+            <a:off x="685800" y="408883"/>
+            <a:ext cx="10994410" cy="782265"/>
+          </a:xfrm>
+          <a:prstGeom prst="rect">
+            <a:avLst/>
+          </a:prstGeom>
+        </p:spPr>
+        <p:txBody>
+          <a:bodyPr vert="horz" wrap="square" lIns="0" tIns="12700" rIns="0" bIns="0" rtlCol="0">
+            <a:spAutoFit/>
+          </a:bodyPr>
+          <a:lstStyle/>
+          <a:p>
+            <a:pPr marL="12700">
+              <a:lnSpc>
+                <a:spcPct val="100000"/>
+              </a:lnSpc>
+              <a:spcBef>
+                <a:spcPts val="100"/>
+              </a:spcBef>
+            </a:pPr>
+            <a:r>
+              <a:rPr lang="en-US" sz="2400" b="1" dirty="0"/>
+              <a:t>ASSESSMENT #3 </a:t>
+            </a:r>
+            <a:r>
+              <a:rPr lang="en-US" sz="2500" dirty="0"/>
+              <a:t>– SAX implementation </a:t>
+            </a:r>
+            <a:br>
+              <a:rPr lang="es-ES" sz="2500" spc="-5" dirty="0">
+                <a:latin typeface="+mj-lt"/>
+                <a:cs typeface="Lucida Sans"/>
+              </a:rPr>
+            </a:br>
+            <a:endParaRPr sz="2500" b="0" dirty="0">
+              <a:latin typeface="+mj-lt"/>
+              <a:cs typeface="Lucida Sans"/>
+            </a:endParaRPr>
+          </a:p>
+        </p:txBody>
+      </p:sp>
+      <p:pic>
+        <p:nvPicPr>
+          <p:cNvPr id="83" name="Gráfico 82">
+            <a:extLst>
+              <a:ext uri="{FF2B5EF4-FFF2-40B4-BE49-F238E27FC236}">
+                <a16:creationId xmlns:a16="http://schemas.microsoft.com/office/drawing/2014/main" id="{1F43E6A6-5CC3-9B99-14AC-997478150C3D}"/>
+              </a:ext>
+            </a:extLst>
+          </p:cNvPr>
+          <p:cNvPicPr>
+            <a:picLocks noChangeAspect="1"/>
+          </p:cNvPicPr>
+          <p:nvPr/>
+        </p:nvPicPr>
+        <p:blipFill>
+          <a:blip r:embed="rId3">
+            <a:extLst>
+              <a:ext uri="{96DAC541-7B7A-43D3-8B79-37D633B846F1}">
+                <asvg:svgBlip xmlns:asvg="http://schemas.microsoft.com/office/drawing/2016/SVG/main" r:embed="rId4"/>
+              </a:ext>
+            </a:extLst>
+          </a:blip>
+          <a:stretch>
+            <a:fillRect/>
+          </a:stretch>
+        </p:blipFill>
+        <p:spPr>
+          <a:xfrm>
+            <a:off x="5045006" y="6356057"/>
+            <a:ext cx="6409575" cy="363174"/>
+          </a:xfrm>
+          <a:prstGeom prst="rect">
+            <a:avLst/>
+          </a:prstGeom>
+        </p:spPr>
+      </p:pic>
+      <p:sp>
+        <p:nvSpPr>
+          <p:cNvPr id="84" name="Marcador de número de diapositiva 83">
+            <a:extLst>
+              <a:ext uri="{FF2B5EF4-FFF2-40B4-BE49-F238E27FC236}">
+                <a16:creationId xmlns:a16="http://schemas.microsoft.com/office/drawing/2014/main" id="{DFC09DB6-1DF7-C8F9-7414-27BC280DEA0F}"/>
+              </a:ext>
+            </a:extLst>
+          </p:cNvPr>
+          <p:cNvSpPr>
+            <a:spLocks noGrp="1"/>
+          </p:cNvSpPr>
+          <p:nvPr>
+            <p:ph type="sldNum" sz="quarter" idx="7"/>
+          </p:nvPr>
+        </p:nvSpPr>
+        <p:spPr/>
+        <p:txBody>
+          <a:bodyPr/>
+          <a:lstStyle/>
+          <a:p>
+            <a:fld id="{B6F15528-21DE-4FAA-801E-634DDDAF4B2B}" type="slidenum">
+              <a:rPr lang="es-ES" smtClean="0"/>
+              <a:t>12</a:t>
+            </a:fld>
+            <a:endParaRPr lang="es-ES"/>
+          </a:p>
+        </p:txBody>
+      </p:sp>
+      <p:sp>
+        <p:nvSpPr>
+          <p:cNvPr id="4" name="Marcador de texto 2">
+            <a:extLst>
+              <a:ext uri="{FF2B5EF4-FFF2-40B4-BE49-F238E27FC236}">
+                <a16:creationId xmlns:a16="http://schemas.microsoft.com/office/drawing/2014/main" id="{EBC8DCFA-5565-A757-1F8D-F4CCCF573A63}"/>
+              </a:ext>
+            </a:extLst>
+          </p:cNvPr>
+          <p:cNvSpPr txBox="1">
+            <a:spLocks/>
+          </p:cNvSpPr>
+          <p:nvPr/>
+        </p:nvSpPr>
+        <p:spPr>
+          <a:xfrm>
+            <a:off x="571500" y="1066800"/>
+            <a:ext cx="11048999" cy="4958137"/>
+          </a:xfrm>
+          <a:prstGeom prst="rect">
+            <a:avLst/>
+          </a:prstGeom>
+        </p:spPr>
+        <p:txBody>
+          <a:bodyPr>
+            <a:normAutofit/>
+          </a:bodyPr>
+          <a:lstStyle>
+            <a:lvl1pPr marL="0">
+              <a:defRPr>
+                <a:latin typeface="+mn-lt"/>
+                <a:ea typeface="+mn-ea"/>
+                <a:cs typeface="+mn-cs"/>
+              </a:defRPr>
+            </a:lvl1pPr>
+            <a:lvl2pPr marL="457200">
+              <a:defRPr>
+                <a:latin typeface="+mn-lt"/>
+                <a:ea typeface="+mn-ea"/>
+                <a:cs typeface="+mn-cs"/>
+              </a:defRPr>
+            </a:lvl2pPr>
+            <a:lvl3pPr marL="914400">
+              <a:defRPr>
+                <a:latin typeface="+mn-lt"/>
+                <a:ea typeface="+mn-ea"/>
+                <a:cs typeface="+mn-cs"/>
+              </a:defRPr>
+            </a:lvl3pPr>
+            <a:lvl4pPr marL="1371600">
+              <a:defRPr>
+                <a:latin typeface="+mn-lt"/>
+                <a:ea typeface="+mn-ea"/>
+                <a:cs typeface="+mn-cs"/>
+              </a:defRPr>
+            </a:lvl4pPr>
+            <a:lvl5pPr marL="1828800">
+              <a:defRPr>
+                <a:latin typeface="+mn-lt"/>
+                <a:ea typeface="+mn-ea"/>
+                <a:cs typeface="+mn-cs"/>
+              </a:defRPr>
+            </a:lvl5pPr>
+            <a:lvl6pPr marL="2286000">
+              <a:defRPr>
+                <a:latin typeface="+mn-lt"/>
+                <a:ea typeface="+mn-ea"/>
+                <a:cs typeface="+mn-cs"/>
+              </a:defRPr>
+            </a:lvl6pPr>
+            <a:lvl7pPr marL="2743200">
+              <a:defRPr>
+                <a:latin typeface="+mn-lt"/>
+                <a:ea typeface="+mn-ea"/>
+                <a:cs typeface="+mn-cs"/>
+              </a:defRPr>
+            </a:lvl7pPr>
+            <a:lvl8pPr marL="3200400">
+              <a:defRPr>
+                <a:latin typeface="+mn-lt"/>
+                <a:ea typeface="+mn-ea"/>
+                <a:cs typeface="+mn-cs"/>
+              </a:defRPr>
+            </a:lvl8pPr>
+            <a:lvl9pPr marL="3657600">
+              <a:defRPr>
+                <a:latin typeface="+mn-lt"/>
+                <a:ea typeface="+mn-ea"/>
+                <a:cs typeface="+mn-cs"/>
+              </a:defRPr>
+            </a:lvl9pPr>
+          </a:lstStyle>
+          <a:p>
+            <a:r>
+              <a:rPr lang="en-US" dirty="0"/>
+              <a:t>Now, we are going to implement the design parameters in the MZI model developed in SAX and compare the response obtained with the one simulated by mathematical formulation. This will help us to identify any error in the definition of the SAX model single components. </a:t>
+            </a:r>
+          </a:p>
+          <a:p>
+            <a:br>
+              <a:rPr lang="en-US" dirty="0"/>
+            </a:br>
+            <a:r>
+              <a:rPr lang="en-US" dirty="0"/>
+              <a:t>In order to implement the SAX model, take as example the following lines:</a:t>
+            </a:r>
+          </a:p>
+          <a:p>
+            <a:endParaRPr lang="en-US" dirty="0"/>
+          </a:p>
+          <a:p>
+            <a:pPr lvl="2">
+              <a:lnSpc>
+                <a:spcPts val="1425"/>
+              </a:lnSpc>
+            </a:pPr>
+            <a:r>
+              <a:rPr lang="es-ES" sz="1400" b="0" dirty="0">
+                <a:effectLst/>
+                <a:latin typeface="Courier New" panose="02070309020205020404" pitchFamily="49" charset="0"/>
+              </a:rPr>
+              <a:t> </a:t>
+            </a:r>
+            <a:r>
+              <a:rPr lang="es-ES" sz="1400" b="0" dirty="0" err="1">
+                <a:effectLst/>
+                <a:latin typeface="Courier New" panose="02070309020205020404" pitchFamily="49" charset="0"/>
+              </a:rPr>
+              <a:t>mzi_test</a:t>
+            </a:r>
+            <a:r>
+              <a:rPr lang="es-ES" sz="1400" b="0" dirty="0">
+                <a:effectLst/>
+                <a:latin typeface="Courier New" panose="02070309020205020404" pitchFamily="49" charset="0"/>
+              </a:rPr>
+              <a:t> = </a:t>
+            </a:r>
+            <a:r>
+              <a:rPr lang="es-ES" sz="1400" b="0" dirty="0" err="1">
+                <a:effectLst/>
+                <a:latin typeface="Courier New" panose="02070309020205020404" pitchFamily="49" charset="0"/>
+              </a:rPr>
+              <a:t>mzi</a:t>
+            </a:r>
+            <a:r>
+              <a:rPr lang="es-ES" sz="1400" b="0" dirty="0">
+                <a:effectLst/>
+                <a:latin typeface="Courier New" panose="02070309020205020404" pitchFamily="49" charset="0"/>
+              </a:rPr>
+              <a:t>(</a:t>
+            </a:r>
+            <a:r>
+              <a:rPr lang="es-ES" sz="1400" b="0" dirty="0" err="1">
+                <a:effectLst/>
+                <a:latin typeface="Courier New" panose="02070309020205020404" pitchFamily="49" charset="0"/>
+              </a:rPr>
+              <a:t>wl</a:t>
+            </a:r>
+            <a:r>
+              <a:rPr lang="es-ES" sz="1400" b="0" dirty="0">
+                <a:effectLst/>
+                <a:latin typeface="Courier New" panose="02070309020205020404" pitchFamily="49" charset="0"/>
+              </a:rPr>
+              <a:t>=</a:t>
+            </a:r>
+            <a:r>
+              <a:rPr lang="es-ES" sz="1400" b="0" dirty="0" err="1">
+                <a:effectLst/>
+                <a:latin typeface="Courier New" panose="02070309020205020404" pitchFamily="49" charset="0"/>
+              </a:rPr>
+              <a:t>wl</a:t>
+            </a:r>
+            <a:r>
+              <a:rPr lang="es-ES" sz="1400" b="0" dirty="0">
+                <a:effectLst/>
+                <a:latin typeface="Courier New" panose="02070309020205020404" pitchFamily="49" charset="0"/>
+              </a:rPr>
+              <a:t>, </a:t>
+            </a:r>
+          </a:p>
+          <a:p>
+            <a:pPr lvl="2">
+              <a:lnSpc>
+                <a:spcPts val="1425"/>
+              </a:lnSpc>
+            </a:pPr>
+            <a:r>
+              <a:rPr lang="es-ES" sz="1400" b="0" dirty="0">
+                <a:effectLst/>
+                <a:latin typeface="Courier New" panose="02070309020205020404" pitchFamily="49" charset="0"/>
+              </a:rPr>
+              <a:t>    </a:t>
+            </a:r>
+            <a:r>
+              <a:rPr lang="es-ES" sz="1400" b="0" dirty="0" err="1">
+                <a:effectLst/>
+                <a:latin typeface="Courier New" panose="02070309020205020404" pitchFamily="49" charset="0"/>
+              </a:rPr>
+              <a:t>coup_a</a:t>
+            </a:r>
+            <a:r>
+              <a:rPr lang="es-ES" sz="1400" b="0" dirty="0">
+                <a:effectLst/>
+                <a:latin typeface="Courier New" panose="02070309020205020404" pitchFamily="49" charset="0"/>
+              </a:rPr>
+              <a:t> = ...</a:t>
+            </a:r>
+          </a:p>
+          <a:p>
+            <a:pPr lvl="2">
+              <a:lnSpc>
+                <a:spcPts val="1425"/>
+              </a:lnSpc>
+            </a:pPr>
+            <a:r>
+              <a:rPr lang="es-ES" sz="1400" b="0" dirty="0">
+                <a:effectLst/>
+                <a:latin typeface="Courier New" panose="02070309020205020404" pitchFamily="49" charset="0"/>
+              </a:rPr>
+              <a:t>    </a:t>
+            </a:r>
+            <a:r>
+              <a:rPr lang="es-ES" sz="1400" b="0" dirty="0" err="1">
+                <a:effectLst/>
+                <a:latin typeface="Courier New" panose="02070309020205020404" pitchFamily="49" charset="0"/>
+              </a:rPr>
+              <a:t>wvg_d</a:t>
+            </a:r>
+            <a:r>
+              <a:rPr lang="es-ES" sz="1400" b="0" dirty="0">
+                <a:effectLst/>
+                <a:latin typeface="Courier New" panose="02070309020205020404" pitchFamily="49" charset="0"/>
+              </a:rPr>
+              <a:t>={"</a:t>
+            </a:r>
+            <a:r>
+              <a:rPr lang="es-ES" sz="1400" b="0" dirty="0" err="1">
+                <a:effectLst/>
+                <a:latin typeface="Courier New" panose="02070309020205020404" pitchFamily="49" charset="0"/>
+              </a:rPr>
+              <a:t>length</a:t>
+            </a:r>
+            <a:r>
+              <a:rPr lang="es-ES" sz="1400" b="0" dirty="0">
+                <a:effectLst/>
+                <a:latin typeface="Courier New" panose="02070309020205020404" pitchFamily="49" charset="0"/>
+              </a:rPr>
+              <a:t>": </a:t>
+            </a:r>
+            <a:r>
+              <a:rPr lang="es-ES" sz="1400" b="0" dirty="0" err="1">
+                <a:effectLst/>
+                <a:latin typeface="Courier New" panose="02070309020205020404" pitchFamily="49" charset="0"/>
+              </a:rPr>
+              <a:t>l_d</a:t>
+            </a:r>
+            <a:r>
+              <a:rPr lang="es-ES" sz="1400" b="0" dirty="0">
+                <a:effectLst/>
+                <a:latin typeface="Courier New" panose="02070309020205020404" pitchFamily="49" charset="0"/>
+              </a:rPr>
+              <a:t>, "</a:t>
+            </a:r>
+            <a:r>
+              <a:rPr lang="es-ES" sz="1400" b="0" dirty="0" err="1">
+                <a:effectLst/>
+                <a:latin typeface="Courier New" panose="02070309020205020404" pitchFamily="49" charset="0"/>
+              </a:rPr>
+              <a:t>neff</a:t>
+            </a:r>
+            <a:r>
+              <a:rPr lang="es-ES" sz="1400" b="0" dirty="0">
+                <a:effectLst/>
+                <a:latin typeface="Courier New" panose="02070309020205020404" pitchFamily="49" charset="0"/>
+              </a:rPr>
+              <a:t>": ...}, </a:t>
+            </a:r>
+          </a:p>
+          <a:p>
+            <a:pPr lvl="2">
+              <a:lnSpc>
+                <a:spcPts val="1425"/>
+              </a:lnSpc>
+            </a:pPr>
+            <a:r>
+              <a:rPr lang="es-ES" sz="1400" b="0" dirty="0">
+                <a:effectLst/>
+                <a:latin typeface="Courier New" panose="02070309020205020404" pitchFamily="49" charset="0"/>
+              </a:rPr>
+              <a:t>    </a:t>
+            </a:r>
+            <a:r>
+              <a:rPr lang="es-ES" sz="1400" b="0" dirty="0" err="1">
+                <a:effectLst/>
+                <a:latin typeface="Courier New" panose="02070309020205020404" pitchFamily="49" charset="0"/>
+              </a:rPr>
+              <a:t>wvg_u</a:t>
+            </a:r>
+            <a:r>
+              <a:rPr lang="es-ES" sz="1400" b="0" dirty="0">
+                <a:effectLst/>
+                <a:latin typeface="Courier New" panose="02070309020205020404" pitchFamily="49" charset="0"/>
+              </a:rPr>
+              <a:t>={"</a:t>
+            </a:r>
+            <a:r>
+              <a:rPr lang="es-ES" sz="1400" b="0" dirty="0" err="1">
+                <a:effectLst/>
+                <a:latin typeface="Courier New" panose="02070309020205020404" pitchFamily="49" charset="0"/>
+              </a:rPr>
+              <a:t>length</a:t>
+            </a:r>
+            <a:r>
+              <a:rPr lang="es-ES" sz="1400" b="0" dirty="0">
+                <a:effectLst/>
+                <a:latin typeface="Courier New" panose="02070309020205020404" pitchFamily="49" charset="0"/>
+              </a:rPr>
+              <a:t>": </a:t>
+            </a:r>
+            <a:r>
+              <a:rPr lang="es-ES" sz="1400" b="0" dirty="0" err="1">
+                <a:effectLst/>
+                <a:latin typeface="Courier New" panose="02070309020205020404" pitchFamily="49" charset="0"/>
+              </a:rPr>
+              <a:t>l_u</a:t>
+            </a:r>
+            <a:r>
+              <a:rPr lang="es-ES" sz="1400" b="0" dirty="0">
+                <a:effectLst/>
+                <a:latin typeface="Courier New" panose="02070309020205020404" pitchFamily="49" charset="0"/>
+              </a:rPr>
+              <a:t>, "</a:t>
+            </a:r>
+            <a:r>
+              <a:rPr lang="es-ES" sz="1400" b="0" dirty="0" err="1">
+                <a:effectLst/>
+                <a:latin typeface="Courier New" panose="02070309020205020404" pitchFamily="49" charset="0"/>
+              </a:rPr>
+              <a:t>neff</a:t>
+            </a:r>
+            <a:r>
+              <a:rPr lang="es-ES" sz="1400" b="0" dirty="0">
+                <a:effectLst/>
+                <a:latin typeface="Courier New" panose="02070309020205020404" pitchFamily="49" charset="0"/>
+              </a:rPr>
+              <a:t>": ...},</a:t>
+            </a:r>
+          </a:p>
+          <a:p>
+            <a:pPr lvl="2">
+              <a:lnSpc>
+                <a:spcPts val="1425"/>
+              </a:lnSpc>
+            </a:pPr>
+            <a:r>
+              <a:rPr lang="es-ES" sz="1400" b="0" dirty="0">
+                <a:effectLst/>
+                <a:latin typeface="Courier New" panose="02070309020205020404" pitchFamily="49" charset="0"/>
+              </a:rPr>
+              <a:t>    </a:t>
+            </a:r>
+            <a:r>
+              <a:rPr lang="es-ES" sz="1400" b="0" dirty="0" err="1">
+                <a:effectLst/>
+                <a:latin typeface="Courier New" panose="02070309020205020404" pitchFamily="49" charset="0"/>
+              </a:rPr>
+              <a:t>coup_b</a:t>
+            </a:r>
+            <a:r>
+              <a:rPr lang="es-ES" sz="1400" b="0" dirty="0">
+                <a:effectLst/>
+                <a:latin typeface="Courier New" panose="02070309020205020404" pitchFamily="49" charset="0"/>
+              </a:rPr>
+              <a:t> = ... )</a:t>
+            </a:r>
+          </a:p>
+          <a:p>
+            <a:pPr lvl="2">
+              <a:lnSpc>
+                <a:spcPts val="1425"/>
+              </a:lnSpc>
+            </a:pPr>
+            <a:br>
+              <a:rPr lang="es-ES" sz="1400" b="0" dirty="0">
+                <a:effectLst/>
+                <a:latin typeface="Courier New" panose="02070309020205020404" pitchFamily="49" charset="0"/>
+              </a:rPr>
+            </a:br>
+            <a:r>
+              <a:rPr lang="es-ES" sz="1400" b="0" dirty="0">
+                <a:effectLst/>
+                <a:latin typeface="Courier New" panose="02070309020205020404" pitchFamily="49" charset="0"/>
+              </a:rPr>
+              <a:t>    H00 = </a:t>
+            </a:r>
+            <a:r>
+              <a:rPr lang="es-ES" sz="1400" b="0" dirty="0" err="1">
+                <a:effectLst/>
+                <a:latin typeface="Courier New" panose="02070309020205020404" pitchFamily="49" charset="0"/>
+              </a:rPr>
+              <a:t>mzi_test</a:t>
+            </a:r>
+            <a:r>
+              <a:rPr lang="es-ES" sz="1400" b="0" dirty="0">
+                <a:effectLst/>
+                <a:latin typeface="Courier New" panose="02070309020205020404" pitchFamily="49" charset="0"/>
+              </a:rPr>
+              <a:t>["in0", "out0"]</a:t>
+            </a:r>
+          </a:p>
+          <a:p>
+            <a:endParaRPr lang="en-US" sz="2000" dirty="0"/>
+          </a:p>
+          <a:p>
+            <a:pPr algn="just"/>
+            <a:endParaRPr lang="en-US" sz="2000" dirty="0"/>
+          </a:p>
+          <a:p>
+            <a:pPr algn="just"/>
+            <a:endParaRPr lang="en-US" sz="2000" b="1" i="1" dirty="0"/>
+          </a:p>
+          <a:p>
+            <a:pPr algn="just"/>
+            <a:endParaRPr lang="en-US" sz="2000" kern="0" dirty="0">
+              <a:solidFill>
+                <a:sysClr val="windowText" lastClr="000000"/>
+              </a:solidFill>
+            </a:endParaRPr>
+          </a:p>
+          <a:p>
+            <a:endParaRPr lang="en-US" sz="2000" kern="0" dirty="0">
+              <a:solidFill>
+                <a:sysClr val="windowText" lastClr="000000"/>
+              </a:solidFill>
+            </a:endParaRPr>
+          </a:p>
+        </p:txBody>
+      </p:sp>
+      <p:sp>
+        <p:nvSpPr>
+          <p:cNvPr id="2" name="CuadroTexto 1">
+            <a:extLst>
+              <a:ext uri="{FF2B5EF4-FFF2-40B4-BE49-F238E27FC236}">
+                <a16:creationId xmlns:a16="http://schemas.microsoft.com/office/drawing/2014/main" id="{CA4A2D6E-5993-52B3-D251-1ADF2B0C8355}"/>
+              </a:ext>
+            </a:extLst>
+          </p:cNvPr>
+          <p:cNvSpPr txBox="1"/>
+          <p:nvPr/>
+        </p:nvSpPr>
+        <p:spPr>
+          <a:xfrm>
+            <a:off x="609441" y="4860334"/>
+            <a:ext cx="11199971" cy="1384995"/>
+          </a:xfrm>
+          <a:prstGeom prst="rect">
+            <a:avLst/>
+          </a:prstGeom>
+          <a:solidFill>
+            <a:schemeClr val="bg1">
+              <a:lumMod val="95000"/>
+            </a:schemeClr>
+          </a:solidFill>
+          <a:ln w="28575">
+            <a:solidFill>
+              <a:srgbClr val="E0700D"/>
+            </a:solidFill>
+          </a:ln>
+        </p:spPr>
+        <p:txBody>
+          <a:bodyPr wrap="square" rtlCol="0">
+            <a:spAutoFit/>
+          </a:bodyPr>
+          <a:lstStyle/>
+          <a:p>
+            <a:pPr algn="just"/>
+            <a:r>
+              <a:rPr lang="en-US" sz="1200" dirty="0">
+                <a:latin typeface="Arial" panose="020B0604020202020204" pitchFamily="34" charset="0"/>
+                <a:cs typeface="Arial" panose="020B0604020202020204" pitchFamily="34" charset="0"/>
+              </a:rPr>
+              <a:t>Document all your results (copy here the code employed to obtain the transfer function employing SAX modeling and include the comparative plot of the models)</a:t>
+            </a:r>
+          </a:p>
+          <a:p>
+            <a:pPr algn="just"/>
+            <a:endParaRPr lang="en-US" sz="1200" dirty="0">
+              <a:latin typeface="Arial" panose="020B0604020202020204" pitchFamily="34" charset="0"/>
+              <a:cs typeface="Arial" panose="020B0604020202020204" pitchFamily="34" charset="0"/>
+            </a:endParaRPr>
+          </a:p>
+          <a:p>
+            <a:pPr algn="just"/>
+            <a:endParaRPr lang="en-US" sz="1200" dirty="0">
+              <a:latin typeface="Arial" panose="020B0604020202020204" pitchFamily="34" charset="0"/>
+              <a:cs typeface="Arial" panose="020B0604020202020204" pitchFamily="34" charset="0"/>
+            </a:endParaRPr>
+          </a:p>
+          <a:p>
+            <a:pPr algn="just"/>
+            <a:endParaRPr lang="en-US" sz="1200" dirty="0">
+              <a:latin typeface="Arial" panose="020B0604020202020204" pitchFamily="34" charset="0"/>
+              <a:cs typeface="Arial" panose="020B0604020202020204" pitchFamily="34" charset="0"/>
+            </a:endParaRPr>
+          </a:p>
+          <a:p>
+            <a:pPr algn="just"/>
+            <a:endParaRPr lang="en-US" sz="1200" dirty="0">
+              <a:latin typeface="Arial" panose="020B0604020202020204" pitchFamily="34" charset="0"/>
+              <a:cs typeface="Arial" panose="020B0604020202020204" pitchFamily="34" charset="0"/>
+            </a:endParaRPr>
+          </a:p>
+          <a:p>
+            <a:pPr algn="just"/>
+            <a:endParaRPr lang="en-US" sz="1200" dirty="0">
+              <a:latin typeface="Arial" panose="020B0604020202020204" pitchFamily="34" charset="0"/>
+              <a:cs typeface="Arial" panose="020B0604020202020204" pitchFamily="34" charset="0"/>
+            </a:endParaRPr>
+          </a:p>
+          <a:p>
+            <a:pPr algn="just"/>
+            <a:endParaRPr lang="en-US" sz="1200" dirty="0">
+              <a:latin typeface="Arial" panose="020B0604020202020204" pitchFamily="34" charset="0"/>
+              <a:cs typeface="Arial" panose="020B0604020202020204" pitchFamily="34" charset="0"/>
+            </a:endParaRPr>
+          </a:p>
+        </p:txBody>
+      </p:sp>
+      <p:sp>
+        <p:nvSpPr>
+          <p:cNvPr id="5" name="Marcador de pie de página 2">
+            <a:extLst>
+              <a:ext uri="{FF2B5EF4-FFF2-40B4-BE49-F238E27FC236}">
+                <a16:creationId xmlns:a16="http://schemas.microsoft.com/office/drawing/2014/main" id="{ED97C9D0-256C-D4CA-42E7-79330F040B30}"/>
+              </a:ext>
+            </a:extLst>
+          </p:cNvPr>
+          <p:cNvSpPr>
+            <a:spLocks noGrp="1"/>
+          </p:cNvSpPr>
+          <p:nvPr>
+            <p:ph type="ftr" sz="quarter" idx="5"/>
+          </p:nvPr>
+        </p:nvSpPr>
+        <p:spPr>
+          <a:xfrm>
+            <a:off x="609600" y="6457057"/>
+            <a:ext cx="2743200" cy="184666"/>
+          </a:xfrm>
+        </p:spPr>
+        <p:txBody>
+          <a:bodyPr/>
+          <a:lstStyle/>
+          <a:p>
+            <a:pPr marL="12700">
+              <a:spcBef>
+                <a:spcPts val="15"/>
+              </a:spcBef>
+            </a:pPr>
+            <a:r>
+              <a:rPr lang="es-ES" spc="-5"/>
+              <a:t>LAB 3. INTERFEROMETERS I</a:t>
+            </a:r>
+            <a:endParaRPr lang="es-ES" spc="-5" dirty="0"/>
+          </a:p>
+        </p:txBody>
+      </p:sp>
+    </p:spTree>
+    <p:extLst>
+      <p:ext uri="{BB962C8B-B14F-4D97-AF65-F5344CB8AC3E}">
+        <p14:creationId xmlns:p14="http://schemas.microsoft.com/office/powerpoint/2010/main" val="3666436811"/>
+      </p:ext>
+    </p:extLst>
+  </p:cSld>
+  <p:clrMapOvr>
+    <a:masterClrMapping/>
+  </p:clrMapOvr>
+</p:sld>
+</file>
+
+<file path=ppt/slides/slide13.xml><?xml version="1.0" encoding="utf-8"?>
+<p:sld xmlns:a="http://schemas.openxmlformats.org/drawingml/2006/main" xmlns:r="http://schemas.openxmlformats.org/officeDocument/2006/relationships" xmlns:p="http://schemas.openxmlformats.org/presentationml/2006/main">
+  <p:cSld>
+    <p:spTree>
+      <p:nvGrpSpPr>
+        <p:cNvPr id="1" name="">
+          <a:extLst>
+            <a:ext uri="{FF2B5EF4-FFF2-40B4-BE49-F238E27FC236}">
+              <a16:creationId xmlns:a16="http://schemas.microsoft.com/office/drawing/2014/main" id="{25434E70-43B1-3881-1771-20FB4358471D}"/>
+            </a:ext>
+          </a:extLst>
+        </p:cNvPr>
+        <p:cNvGrpSpPr/>
+        <p:nvPr/>
+      </p:nvGrpSpPr>
+      <p:grpSpPr>
+        <a:xfrm>
+          <a:off x="0" y="0"/>
+          <a:ext cx="0" cy="0"/>
+          <a:chOff x="0" y="0"/>
+          <a:chExt cx="0" cy="0"/>
+        </a:xfrm>
+      </p:grpSpPr>
+      <p:sp>
+        <p:nvSpPr>
+          <p:cNvPr id="16" name="object 16">
+            <a:extLst>
+              <a:ext uri="{FF2B5EF4-FFF2-40B4-BE49-F238E27FC236}">
+                <a16:creationId xmlns:a16="http://schemas.microsoft.com/office/drawing/2014/main" id="{742C31CE-19F0-B995-0997-9A2D6A879BF7}"/>
+              </a:ext>
+            </a:extLst>
+          </p:cNvPr>
+          <p:cNvSpPr txBox="1">
+            <a:spLocks noGrp="1"/>
+          </p:cNvSpPr>
+          <p:nvPr>
+            <p:ph type="title"/>
+          </p:nvPr>
+        </p:nvSpPr>
+        <p:spPr>
+          <a:xfrm>
+            <a:off x="685800" y="408883"/>
+            <a:ext cx="10994410" cy="397545"/>
+          </a:xfrm>
+          <a:prstGeom prst="rect">
+            <a:avLst/>
+          </a:prstGeom>
+        </p:spPr>
+        <p:txBody>
+          <a:bodyPr vert="horz" wrap="square" lIns="0" tIns="12700" rIns="0" bIns="0" rtlCol="0">
+            <a:spAutoFit/>
+          </a:bodyPr>
+          <a:lstStyle/>
+          <a:p>
+            <a:pPr marL="12700">
+              <a:lnSpc>
+                <a:spcPct val="100000"/>
+              </a:lnSpc>
+              <a:spcBef>
+                <a:spcPts val="100"/>
+              </a:spcBef>
+            </a:pPr>
+            <a:r>
+              <a:rPr lang="en-US" sz="2500" dirty="0"/>
+              <a:t>Extra assessments </a:t>
+            </a:r>
+            <a:endParaRPr lang="en-US" sz="2500" b="0" dirty="0">
+              <a:latin typeface="+mj-lt"/>
+              <a:cs typeface="Lucida Sans"/>
+            </a:endParaRPr>
+          </a:p>
+        </p:txBody>
+      </p:sp>
+      <p:pic>
+        <p:nvPicPr>
+          <p:cNvPr id="83" name="Gráfico 82">
+            <a:extLst>
+              <a:ext uri="{FF2B5EF4-FFF2-40B4-BE49-F238E27FC236}">
+                <a16:creationId xmlns:a16="http://schemas.microsoft.com/office/drawing/2014/main" id="{D688A609-F3DC-EE34-C536-683E70F32EAE}"/>
+              </a:ext>
+            </a:extLst>
+          </p:cNvPr>
+          <p:cNvPicPr>
+            <a:picLocks noChangeAspect="1"/>
+          </p:cNvPicPr>
+          <p:nvPr/>
+        </p:nvPicPr>
+        <p:blipFill>
+          <a:blip r:embed="rId3">
+            <a:extLst>
+              <a:ext uri="{96DAC541-7B7A-43D3-8B79-37D633B846F1}">
+                <asvg:svgBlip xmlns:asvg="http://schemas.microsoft.com/office/drawing/2016/SVG/main" r:embed="rId4"/>
+              </a:ext>
+            </a:extLst>
+          </a:blip>
+          <a:stretch>
+            <a:fillRect/>
+          </a:stretch>
+        </p:blipFill>
+        <p:spPr>
+          <a:xfrm>
+            <a:off x="5045006" y="6356057"/>
+            <a:ext cx="6409575" cy="363174"/>
+          </a:xfrm>
+          <a:prstGeom prst="rect">
+            <a:avLst/>
+          </a:prstGeom>
+        </p:spPr>
+      </p:pic>
+      <p:sp>
+        <p:nvSpPr>
+          <p:cNvPr id="84" name="Marcador de número de diapositiva 83">
+            <a:extLst>
+              <a:ext uri="{FF2B5EF4-FFF2-40B4-BE49-F238E27FC236}">
+                <a16:creationId xmlns:a16="http://schemas.microsoft.com/office/drawing/2014/main" id="{B6C672C6-89D4-7E67-2B94-811D081786A7}"/>
+              </a:ext>
+            </a:extLst>
+          </p:cNvPr>
+          <p:cNvSpPr>
+            <a:spLocks noGrp="1"/>
+          </p:cNvSpPr>
+          <p:nvPr>
+            <p:ph type="sldNum" sz="quarter" idx="7"/>
+          </p:nvPr>
+        </p:nvSpPr>
+        <p:spPr/>
+        <p:txBody>
+          <a:bodyPr/>
+          <a:lstStyle/>
+          <a:p>
+            <a:fld id="{B6F15528-21DE-4FAA-801E-634DDDAF4B2B}" type="slidenum">
+              <a:rPr lang="es-ES" smtClean="0"/>
+              <a:t>13</a:t>
+            </a:fld>
+            <a:endParaRPr lang="es-ES"/>
+          </a:p>
+        </p:txBody>
+      </p:sp>
+      <p:sp>
+        <p:nvSpPr>
+          <p:cNvPr id="4" name="Marcador de texto 2">
+            <a:extLst>
+              <a:ext uri="{FF2B5EF4-FFF2-40B4-BE49-F238E27FC236}">
+                <a16:creationId xmlns:a16="http://schemas.microsoft.com/office/drawing/2014/main" id="{D838A93A-BFC8-0124-93CE-FDC193435A0C}"/>
+              </a:ext>
+            </a:extLst>
+          </p:cNvPr>
+          <p:cNvSpPr txBox="1">
+            <a:spLocks/>
+          </p:cNvSpPr>
+          <p:nvPr/>
+        </p:nvSpPr>
+        <p:spPr>
+          <a:xfrm>
+            <a:off x="608012" y="1295400"/>
+            <a:ext cx="11048999" cy="4958137"/>
+          </a:xfrm>
+          <a:prstGeom prst="rect">
+            <a:avLst/>
+          </a:prstGeom>
+        </p:spPr>
+        <p:txBody>
+          <a:bodyPr>
+            <a:normAutofit/>
+          </a:bodyPr>
+          <a:lstStyle>
+            <a:lvl1pPr marL="0">
+              <a:defRPr>
+                <a:latin typeface="+mn-lt"/>
+                <a:ea typeface="+mn-ea"/>
+                <a:cs typeface="+mn-cs"/>
+              </a:defRPr>
+            </a:lvl1pPr>
+            <a:lvl2pPr marL="457200">
+              <a:defRPr>
+                <a:latin typeface="+mn-lt"/>
+                <a:ea typeface="+mn-ea"/>
+                <a:cs typeface="+mn-cs"/>
+              </a:defRPr>
+            </a:lvl2pPr>
+            <a:lvl3pPr marL="914400">
+              <a:defRPr>
+                <a:latin typeface="+mn-lt"/>
+                <a:ea typeface="+mn-ea"/>
+                <a:cs typeface="+mn-cs"/>
+              </a:defRPr>
+            </a:lvl3pPr>
+            <a:lvl4pPr marL="1371600">
+              <a:defRPr>
+                <a:latin typeface="+mn-lt"/>
+                <a:ea typeface="+mn-ea"/>
+                <a:cs typeface="+mn-cs"/>
+              </a:defRPr>
+            </a:lvl4pPr>
+            <a:lvl5pPr marL="1828800">
+              <a:defRPr>
+                <a:latin typeface="+mn-lt"/>
+                <a:ea typeface="+mn-ea"/>
+                <a:cs typeface="+mn-cs"/>
+              </a:defRPr>
+            </a:lvl5pPr>
+            <a:lvl6pPr marL="2286000">
+              <a:defRPr>
+                <a:latin typeface="+mn-lt"/>
+                <a:ea typeface="+mn-ea"/>
+                <a:cs typeface="+mn-cs"/>
+              </a:defRPr>
+            </a:lvl6pPr>
+            <a:lvl7pPr marL="2743200">
+              <a:defRPr>
+                <a:latin typeface="+mn-lt"/>
+                <a:ea typeface="+mn-ea"/>
+                <a:cs typeface="+mn-cs"/>
+              </a:defRPr>
+            </a:lvl7pPr>
+            <a:lvl8pPr marL="3200400">
+              <a:defRPr>
+                <a:latin typeface="+mn-lt"/>
+                <a:ea typeface="+mn-ea"/>
+                <a:cs typeface="+mn-cs"/>
+              </a:defRPr>
+            </a:lvl8pPr>
+            <a:lvl9pPr marL="3657600">
+              <a:defRPr>
+                <a:latin typeface="+mn-lt"/>
+                <a:ea typeface="+mn-ea"/>
+                <a:cs typeface="+mn-cs"/>
+              </a:defRPr>
+            </a:lvl9pPr>
+          </a:lstStyle>
+          <a:p>
+            <a:pPr marL="0" indent="0">
+              <a:buNone/>
+            </a:pPr>
+            <a:r>
+              <a:rPr lang="en-US" b="1" dirty="0"/>
+              <a:t>Assessment 4</a:t>
+            </a:r>
+            <a:r>
+              <a:rPr lang="en-US" dirty="0"/>
+              <a:t>. Design an MZI for filtering at a specific wavelength. Calculate and adjust the arm lengths to configure the MZI to have a maximum transmission at 1550 nm.</a:t>
+            </a:r>
+          </a:p>
+          <a:p>
+            <a:endParaRPr lang="en-US" b="1" dirty="0"/>
+          </a:p>
+          <a:p>
+            <a:r>
+              <a:rPr lang="en-US" b="1" dirty="0"/>
+              <a:t>Assessment 5. </a:t>
+            </a:r>
+            <a:r>
+              <a:rPr lang="en-US" dirty="0"/>
+              <a:t>Let's see how the response of the MZI varies with the effective index. Vary the effective index of one of the arms and analyze how the spectrum shifts. To do this, you can use the data provided in the .txt files entitled ‘</a:t>
+            </a:r>
+            <a:r>
+              <a:rPr lang="en-US" dirty="0" err="1"/>
+              <a:t>SiN</a:t>
+            </a:r>
+            <a:r>
+              <a:rPr lang="en-US" dirty="0"/>
+              <a:t>’. Can you give an example of an application where this configuration is used?</a:t>
+            </a:r>
+          </a:p>
+          <a:p>
+            <a:pPr marL="0" indent="0">
+              <a:buNone/>
+            </a:pPr>
+            <a:endParaRPr lang="en-US" dirty="0"/>
+          </a:p>
+          <a:p>
+            <a:r>
+              <a:rPr lang="en-US" b="1" dirty="0"/>
+              <a:t>Advanced level assessment.</a:t>
+            </a:r>
+            <a:r>
+              <a:rPr lang="en-US" dirty="0"/>
+              <a:t> Explore how cascading two MZIs affects the transmission spectrum. To do so, design a system in which two MZIs are cascaded. Simulate and observe the spectrum, explaining how the transmission peaks behave</a:t>
+            </a:r>
+            <a:r>
+              <a:rPr lang="en-US" b="1" dirty="0"/>
+              <a:t>.</a:t>
+            </a:r>
+          </a:p>
+          <a:p>
+            <a:pPr algn="just"/>
+            <a:endParaRPr lang="en-US" sz="2000" kern="0" dirty="0">
+              <a:solidFill>
+                <a:sysClr val="windowText" lastClr="000000"/>
+              </a:solidFill>
+            </a:endParaRPr>
+          </a:p>
+        </p:txBody>
+      </p:sp>
+      <p:sp>
+        <p:nvSpPr>
+          <p:cNvPr id="2" name="CuadroTexto 1">
+            <a:extLst>
+              <a:ext uri="{FF2B5EF4-FFF2-40B4-BE49-F238E27FC236}">
+                <a16:creationId xmlns:a16="http://schemas.microsoft.com/office/drawing/2014/main" id="{FDE3A197-9508-F9F1-1FEB-FF883D78C151}"/>
+              </a:ext>
+            </a:extLst>
+          </p:cNvPr>
+          <p:cNvSpPr txBox="1"/>
+          <p:nvPr/>
+        </p:nvSpPr>
+        <p:spPr>
+          <a:xfrm>
+            <a:off x="609441" y="4860334"/>
+            <a:ext cx="11199971" cy="1200329"/>
+          </a:xfrm>
+          <a:prstGeom prst="rect">
+            <a:avLst/>
+          </a:prstGeom>
+          <a:solidFill>
+            <a:schemeClr val="bg1">
+              <a:lumMod val="95000"/>
+            </a:schemeClr>
+          </a:solidFill>
+          <a:ln w="28575">
+            <a:solidFill>
+              <a:srgbClr val="E0700D"/>
+            </a:solidFill>
+          </a:ln>
+        </p:spPr>
+        <p:txBody>
+          <a:bodyPr wrap="square" rtlCol="0">
+            <a:spAutoFit/>
+          </a:bodyPr>
+          <a:lstStyle/>
+          <a:p>
+            <a:pPr algn="just"/>
+            <a:r>
+              <a:rPr lang="en-US" sz="1200" dirty="0">
+                <a:latin typeface="Arial" panose="020B0604020202020204" pitchFamily="34" charset="0"/>
+                <a:cs typeface="Arial" panose="020B0604020202020204" pitchFamily="34" charset="0"/>
+              </a:rPr>
+              <a:t>Document all your results</a:t>
+            </a:r>
+          </a:p>
+          <a:p>
+            <a:pPr algn="just"/>
+            <a:endParaRPr lang="en-US" sz="1200" dirty="0">
+              <a:latin typeface="Arial" panose="020B0604020202020204" pitchFamily="34" charset="0"/>
+              <a:cs typeface="Arial" panose="020B0604020202020204" pitchFamily="34" charset="0"/>
+            </a:endParaRPr>
+          </a:p>
+          <a:p>
+            <a:pPr algn="just"/>
+            <a:endParaRPr lang="en-US" sz="1200" dirty="0">
+              <a:latin typeface="Arial" panose="020B0604020202020204" pitchFamily="34" charset="0"/>
+              <a:cs typeface="Arial" panose="020B0604020202020204" pitchFamily="34" charset="0"/>
+            </a:endParaRPr>
+          </a:p>
+          <a:p>
+            <a:pPr algn="just"/>
+            <a:endParaRPr lang="en-US" sz="1200" dirty="0">
+              <a:latin typeface="Arial" panose="020B0604020202020204" pitchFamily="34" charset="0"/>
+              <a:cs typeface="Arial" panose="020B0604020202020204" pitchFamily="34" charset="0"/>
+            </a:endParaRPr>
+          </a:p>
+          <a:p>
+            <a:pPr algn="just"/>
+            <a:endParaRPr lang="en-US" sz="1200" dirty="0">
+              <a:latin typeface="Arial" panose="020B0604020202020204" pitchFamily="34" charset="0"/>
+              <a:cs typeface="Arial" panose="020B0604020202020204" pitchFamily="34" charset="0"/>
+            </a:endParaRPr>
+          </a:p>
+          <a:p>
+            <a:pPr algn="just"/>
+            <a:endParaRPr lang="en-US" sz="1200" dirty="0">
+              <a:latin typeface="Arial" panose="020B0604020202020204" pitchFamily="34" charset="0"/>
+              <a:cs typeface="Arial" panose="020B0604020202020204" pitchFamily="34" charset="0"/>
+            </a:endParaRPr>
+          </a:p>
+        </p:txBody>
+      </p:sp>
+      <p:sp>
+        <p:nvSpPr>
+          <p:cNvPr id="6" name="Marcador de pie de página 2">
+            <a:extLst>
+              <a:ext uri="{FF2B5EF4-FFF2-40B4-BE49-F238E27FC236}">
+                <a16:creationId xmlns:a16="http://schemas.microsoft.com/office/drawing/2014/main" id="{04C1A7E9-6C33-172D-E7B9-CCF643221E6A}"/>
+              </a:ext>
+            </a:extLst>
+          </p:cNvPr>
+          <p:cNvSpPr>
+            <a:spLocks noGrp="1"/>
+          </p:cNvSpPr>
+          <p:nvPr>
+            <p:ph type="ftr" sz="quarter" idx="5"/>
+          </p:nvPr>
+        </p:nvSpPr>
+        <p:spPr>
+          <a:xfrm>
+            <a:off x="609600" y="6457057"/>
+            <a:ext cx="2743200" cy="184666"/>
+          </a:xfrm>
+        </p:spPr>
+        <p:txBody>
+          <a:bodyPr/>
+          <a:lstStyle/>
+          <a:p>
+            <a:pPr marL="12700">
+              <a:spcBef>
+                <a:spcPts val="15"/>
+              </a:spcBef>
+            </a:pPr>
+            <a:r>
+              <a:rPr lang="es-ES" spc="-5"/>
+              <a:t>LAB 3. INTERFEROMETERS I</a:t>
+            </a:r>
+            <a:endParaRPr lang="es-ES" spc="-5" dirty="0"/>
+          </a:p>
+        </p:txBody>
+      </p:sp>
+    </p:spTree>
+    <p:extLst>
+      <p:ext uri="{BB962C8B-B14F-4D97-AF65-F5344CB8AC3E}">
+        <p14:creationId xmlns:p14="http://schemas.microsoft.com/office/powerpoint/2010/main" val="3660438245"/>
+      </p:ext>
+    </p:extLst>
+  </p:cSld>
+  <p:clrMapOvr>
+    <a:masterClrMapping/>
+  </p:clrMapOvr>
+</p:sld>
+</file>
+
+<file path=ppt/slides/slide14.xml><?xml version="1.0" encoding="utf-8"?>
+<p:sld xmlns:a="http://schemas.openxmlformats.org/drawingml/2006/main" xmlns:r="http://schemas.openxmlformats.org/officeDocument/2006/relationships" xmlns:p="http://schemas.openxmlformats.org/presentationml/2006/main">
+  <p:cSld>
+    <p:spTree>
+      <p:nvGrpSpPr>
+        <p:cNvPr id="1" name=""/>
+        <p:cNvGrpSpPr/>
+        <p:nvPr/>
+      </p:nvGrpSpPr>
+      <p:grpSpPr>
+        <a:xfrm>
+          <a:off x="0" y="0"/>
+          <a:ext cx="0" cy="0"/>
+          <a:chOff x="0" y="0"/>
+          <a:chExt cx="0" cy="0"/>
+        </a:xfrm>
+      </p:grpSpPr>
+      <p:sp>
+        <p:nvSpPr>
+          <p:cNvPr id="3" name="object 3"/>
+          <p:cNvSpPr/>
+          <p:nvPr/>
+        </p:nvSpPr>
+        <p:spPr>
+          <a:xfrm>
+            <a:off x="3945635" y="2636520"/>
+            <a:ext cx="8246363" cy="1584959"/>
+          </a:xfrm>
+          <a:prstGeom prst="rect">
+            <a:avLst/>
+          </a:prstGeom>
+          <a:blipFill>
+            <a:blip r:embed="rId2" cstate="print"/>
+            <a:stretch>
+              <a:fillRect/>
+            </a:stretch>
+          </a:blipFill>
+        </p:spPr>
+        <p:txBody>
+          <a:bodyPr wrap="square" lIns="0" tIns="0" rIns="0" bIns="0" rtlCol="0"/>
+          <a:lstStyle/>
+          <a:p>
+            <a:endParaRPr/>
+          </a:p>
+        </p:txBody>
+      </p:sp>
+      <p:sp>
+        <p:nvSpPr>
+          <p:cNvPr id="4" name="object 4"/>
+          <p:cNvSpPr txBox="1">
+            <a:spLocks noGrp="1"/>
+          </p:cNvSpPr>
+          <p:nvPr>
+            <p:ph type="title"/>
+          </p:nvPr>
+        </p:nvSpPr>
+        <p:spPr>
+          <a:xfrm>
+            <a:off x="4513326" y="3165729"/>
+            <a:ext cx="2233295" cy="513715"/>
+          </a:xfrm>
+          <a:prstGeom prst="rect">
+            <a:avLst/>
+          </a:prstGeom>
+        </p:spPr>
+        <p:txBody>
+          <a:bodyPr vert="horz" wrap="square" lIns="0" tIns="13335" rIns="0" bIns="0" rtlCol="0">
+            <a:spAutoFit/>
+          </a:bodyPr>
+          <a:lstStyle/>
+          <a:p>
+            <a:pPr marL="12700">
+              <a:lnSpc>
+                <a:spcPct val="100000"/>
+              </a:lnSpc>
+              <a:spcBef>
+                <a:spcPts val="105"/>
+              </a:spcBef>
+            </a:pPr>
+            <a:r>
+              <a:rPr sz="3200" b="1" spc="-5" dirty="0">
+                <a:solidFill>
+                  <a:srgbClr val="FFFFFF"/>
+                </a:solidFill>
+                <a:latin typeface="Lucida Sans"/>
+                <a:cs typeface="Lucida Sans"/>
+              </a:rPr>
+              <a:t>Thank</a:t>
+            </a:r>
+            <a:r>
+              <a:rPr sz="3200" b="1" spc="-55" dirty="0">
+                <a:solidFill>
+                  <a:srgbClr val="FFFFFF"/>
+                </a:solidFill>
+                <a:latin typeface="Lucida Sans"/>
+                <a:cs typeface="Lucida Sans"/>
+              </a:rPr>
+              <a:t> </a:t>
+            </a:r>
+            <a:r>
+              <a:rPr sz="3200" b="1" dirty="0">
+                <a:solidFill>
+                  <a:srgbClr val="FFFFFF"/>
+                </a:solidFill>
+                <a:latin typeface="Lucida Sans"/>
+                <a:cs typeface="Lucida Sans"/>
+              </a:rPr>
+              <a:t>you</a:t>
+            </a:r>
+            <a:endParaRPr sz="3200">
+              <a:latin typeface="Lucida Sans"/>
+              <a:cs typeface="Lucida Sans"/>
+            </a:endParaRPr>
+          </a:p>
+        </p:txBody>
+      </p:sp>
+      <p:sp>
+        <p:nvSpPr>
+          <p:cNvPr id="5" name="Marcador de número de diapositiva 4">
+            <a:extLst>
+              <a:ext uri="{FF2B5EF4-FFF2-40B4-BE49-F238E27FC236}">
+                <a16:creationId xmlns:a16="http://schemas.microsoft.com/office/drawing/2014/main" id="{B052DA19-AD24-7D24-2AE9-51F8F5A7F5E0}"/>
+              </a:ext>
+            </a:extLst>
+          </p:cNvPr>
+          <p:cNvSpPr>
+            <a:spLocks noGrp="1"/>
+          </p:cNvSpPr>
+          <p:nvPr>
+            <p:ph type="sldNum" sz="quarter" idx="7"/>
+          </p:nvPr>
+        </p:nvSpPr>
+        <p:spPr/>
+        <p:txBody>
+          <a:bodyPr/>
+          <a:lstStyle/>
+          <a:p>
+            <a:fld id="{B6F15528-21DE-4FAA-801E-634DDDAF4B2B}" type="slidenum">
+              <a:rPr lang="es-ES" smtClean="0"/>
+              <a:t>14</a:t>
             </a:fld>
             <a:endParaRPr lang="es-ES"/>
           </a:p>
@@ -4872,13 +7103,7 @@
   <p:cSld>
     <p:spTree>
       <p:nvGrpSpPr>
-        <p:cNvPr id="1" name="">
-          <a:extLst>
-            <a:ext uri="{FF2B5EF4-FFF2-40B4-BE49-F238E27FC236}">
-              <a16:creationId xmlns:a16="http://schemas.microsoft.com/office/drawing/2014/main" id="{1525AB88-A787-2C84-3A44-2B634D87FB5B}"/>
-            </a:ext>
-          </a:extLst>
-        </p:cNvPr>
+        <p:cNvPr id="1" name=""/>
         <p:cNvGrpSpPr/>
         <p:nvPr/>
       </p:nvGrpSpPr>
@@ -4890,145 +7115,115 @@
           <a:chExt cx="0" cy="0"/>
         </a:xfrm>
       </p:grpSpPr>
-      <mc:AlternateContent xmlns:mc="http://schemas.openxmlformats.org/markup-compatibility/2006" xmlns:a14="http://schemas.microsoft.com/office/drawing/2010/main">
-        <mc:Choice Requires="a14">
-          <p:sp>
-            <p:nvSpPr>
-              <p:cNvPr id="16" name="object 16">
-                <a:extLst>
-                  <a:ext uri="{FF2B5EF4-FFF2-40B4-BE49-F238E27FC236}">
-                    <a16:creationId xmlns:a16="http://schemas.microsoft.com/office/drawing/2014/main" id="{A153D08B-B860-A163-3940-83AD64444D01}"/>
-                  </a:ext>
-                </a:extLst>
-              </p:cNvPr>
-              <p:cNvSpPr txBox="1">
-                <a:spLocks noGrp="1"/>
-              </p:cNvSpPr>
-              <p:nvPr>
-                <p:ph type="title"/>
-              </p:nvPr>
-            </p:nvSpPr>
-            <p:spPr>
-              <a:xfrm>
-                <a:off x="685800" y="408883"/>
-                <a:ext cx="10994410" cy="782265"/>
-              </a:xfrm>
-              <a:prstGeom prst="rect">
-                <a:avLst/>
-              </a:prstGeom>
-            </p:spPr>
-            <p:txBody>
-              <a:bodyPr vert="horz" wrap="square" lIns="0" tIns="12700" rIns="0" bIns="0" rtlCol="0">
-                <a:spAutoFit/>
-              </a:bodyPr>
-              <a:lstStyle/>
-              <a:p>
-                <a:pPr marL="12700">
-                  <a:lnSpc>
-                    <a:spcPct val="100000"/>
-                  </a:lnSpc>
-                  <a:spcBef>
-                    <a:spcPts val="100"/>
-                  </a:spcBef>
-                </a:pPr>
-                <a:r>
-                  <a:rPr lang="en-US" sz="2400" b="1" dirty="0"/>
-                  <a:t>ASSESSMENT #2 </a:t>
-                </a:r>
-                <a:r>
-                  <a:rPr lang="en-US" sz="2500" dirty="0"/>
-                  <a:t>– Recap from theory – Calculation of </a:t>
-                </a:r>
-                <a14:m>
-                  <m:oMath xmlns:m="http://schemas.openxmlformats.org/officeDocument/2006/math">
-                    <m:r>
-                      <a:rPr lang="es-ES" sz="2500" b="1" i="0" smtClean="0">
-                        <a:latin typeface="Cambria Math" panose="02040503050406030204" pitchFamily="18" charset="0"/>
-                      </a:rPr>
-                      <m:t>𝚫</m:t>
-                    </m:r>
-                    <m:r>
-                      <a:rPr lang="es-ES" sz="2500" b="1" i="0" smtClean="0">
-                        <a:latin typeface="Cambria Math" panose="02040503050406030204" pitchFamily="18" charset="0"/>
-                      </a:rPr>
-                      <m:t>𝐋</m:t>
-                    </m:r>
-                  </m:oMath>
-                </a14:m>
-                <a:r>
-                  <a:rPr lang="es-ES" sz="2500" spc="-5" dirty="0">
-                    <a:latin typeface="+mj-lt"/>
-                    <a:cs typeface="Lucida Sans"/>
-                  </a:rPr>
-                  <a:t> </a:t>
-                </a:r>
-                <a:br>
-                  <a:rPr lang="es-ES" sz="2500" spc="-5" dirty="0">
-                    <a:latin typeface="+mj-lt"/>
-                    <a:cs typeface="Lucida Sans"/>
-                  </a:rPr>
-                </a:br>
-                <a:endParaRPr sz="2500" b="0" dirty="0">
-                  <a:latin typeface="+mj-lt"/>
-                  <a:cs typeface="Lucida Sans"/>
-                </a:endParaRPr>
-              </a:p>
-            </p:txBody>
-          </p:sp>
-        </mc:Choice>
-        <mc:Fallback xmlns="">
-          <p:sp>
-            <p:nvSpPr>
-              <p:cNvPr id="16" name="object 16">
-                <a:extLst>
-                  <a:ext uri="{FF2B5EF4-FFF2-40B4-BE49-F238E27FC236}">
-                    <a16:creationId xmlns:a16="http://schemas.microsoft.com/office/drawing/2014/main" id="{A153D08B-B860-A163-3940-83AD64444D01}"/>
-                  </a:ext>
-                </a:extLst>
-              </p:cNvPr>
-              <p:cNvSpPr txBox="1">
-                <a:spLocks noGrp="1" noRot="1" noChangeAspect="1" noMove="1" noResize="1" noEditPoints="1" noAdjustHandles="1" noChangeArrowheads="1" noChangeShapeType="1" noTextEdit="1"/>
-              </p:cNvSpPr>
-              <p:nvPr>
-                <p:ph type="title"/>
-              </p:nvPr>
-            </p:nvSpPr>
-            <p:spPr>
-              <a:xfrm>
-                <a:off x="685800" y="408883"/>
-                <a:ext cx="10994410" cy="782265"/>
-              </a:xfrm>
-              <a:prstGeom prst="rect">
-                <a:avLst/>
-              </a:prstGeom>
-              <a:blipFill>
-                <a:blip r:embed="rId3"/>
-                <a:stretch>
-                  <a:fillRect l="-1608" t="-10156"/>
-                </a:stretch>
-              </a:blipFill>
-            </p:spPr>
-            <p:txBody>
-              <a:bodyPr/>
-              <a:lstStyle/>
-              <a:p>
-                <a:r>
-                  <a:rPr lang="es-ES">
-                    <a:noFill/>
-                  </a:rPr>
-                  <a:t> </a:t>
-                </a:r>
-              </a:p>
-            </p:txBody>
-          </p:sp>
-        </mc:Fallback>
-      </mc:AlternateContent>
+      <p:sp>
+        <p:nvSpPr>
+          <p:cNvPr id="2" name="Título 1">
+            <a:extLst>
+              <a:ext uri="{FF2B5EF4-FFF2-40B4-BE49-F238E27FC236}">
+                <a16:creationId xmlns:a16="http://schemas.microsoft.com/office/drawing/2014/main" id="{C50A4E7C-278E-DB41-DA08-2D377B315B36}"/>
+              </a:ext>
+            </a:extLst>
+          </p:cNvPr>
+          <p:cNvSpPr>
+            <a:spLocks noGrp="1"/>
+          </p:cNvSpPr>
+          <p:nvPr>
+            <p:ph type="title"/>
+          </p:nvPr>
+        </p:nvSpPr>
+        <p:spPr/>
+        <p:txBody>
+          <a:bodyPr/>
+          <a:lstStyle/>
+          <a:p>
+            <a:r>
+              <a:rPr lang="es-ES" dirty="0" err="1"/>
+              <a:t>Balanced</a:t>
+            </a:r>
+            <a:r>
+              <a:rPr lang="es-ES" dirty="0"/>
+              <a:t> </a:t>
+            </a:r>
+            <a:r>
+              <a:rPr lang="es-ES" dirty="0" err="1"/>
+              <a:t>configuration</a:t>
+            </a:r>
+            <a:r>
+              <a:rPr lang="es-ES" dirty="0"/>
+              <a:t> </a:t>
+            </a:r>
+          </a:p>
+        </p:txBody>
+      </p:sp>
+      <p:sp>
+        <p:nvSpPr>
+          <p:cNvPr id="4" name="Marcador de pie de página 3">
+            <a:extLst>
+              <a:ext uri="{FF2B5EF4-FFF2-40B4-BE49-F238E27FC236}">
+                <a16:creationId xmlns:a16="http://schemas.microsoft.com/office/drawing/2014/main" id="{88FD8AAE-A71B-C203-AA72-0036B8056F25}"/>
+              </a:ext>
+            </a:extLst>
+          </p:cNvPr>
+          <p:cNvSpPr>
+            <a:spLocks noGrp="1"/>
+          </p:cNvSpPr>
+          <p:nvPr>
+            <p:ph type="ftr" sz="quarter" idx="5"/>
+          </p:nvPr>
+        </p:nvSpPr>
+        <p:spPr/>
+        <p:txBody>
+          <a:bodyPr/>
+          <a:lstStyle/>
+          <a:p>
+            <a:pPr marL="12700">
+              <a:spcBef>
+                <a:spcPts val="15"/>
+              </a:spcBef>
+            </a:pPr>
+            <a:r>
+              <a:rPr lang="es-ES" spc="-5"/>
+              <a:t>LAB 3. INTERFEROMETERS I</a:t>
+            </a:r>
+            <a:endParaRPr lang="es-ES" spc="-5" dirty="0"/>
+          </a:p>
+        </p:txBody>
+      </p:sp>
+      <p:sp>
+        <p:nvSpPr>
+          <p:cNvPr id="5" name="Marcador de número de diapositiva 4">
+            <a:extLst>
+              <a:ext uri="{FF2B5EF4-FFF2-40B4-BE49-F238E27FC236}">
+                <a16:creationId xmlns:a16="http://schemas.microsoft.com/office/drawing/2014/main" id="{C5553953-B725-BDD3-8B06-3B007F25DB8F}"/>
+              </a:ext>
+            </a:extLst>
+          </p:cNvPr>
+          <p:cNvSpPr>
+            <a:spLocks noGrp="1"/>
+          </p:cNvSpPr>
+          <p:nvPr>
+            <p:ph type="sldNum" sz="quarter" idx="7"/>
+          </p:nvPr>
+        </p:nvSpPr>
+        <p:spPr/>
+        <p:txBody>
+          <a:bodyPr/>
+          <a:lstStyle/>
+          <a:p>
+            <a:fld id="{B6F15528-21DE-4FAA-801E-634DDDAF4B2B}" type="slidenum">
+              <a:rPr lang="es-ES" smtClean="0"/>
+              <a:t>4</a:t>
+            </a:fld>
+            <a:endParaRPr lang="es-ES"/>
+          </a:p>
+        </p:txBody>
+      </p:sp>
       <p:pic>
         <p:nvPicPr>
-          <p:cNvPr id="83" name="Gráfico 82">
+          <p:cNvPr id="7" name="Imagen 6" descr="Gráfico, Gráfico de líneas&#10;&#10;El contenido generado por IA puede ser incorrecto.">
             <a:extLst>
               <a:ext uri="{FF2B5EF4-FFF2-40B4-BE49-F238E27FC236}">
-                <a16:creationId xmlns:a16="http://schemas.microsoft.com/office/drawing/2014/main" id="{333888A9-82BA-4688-F856-37AB661A7D43}"/>
+                <a16:creationId xmlns:a16="http://schemas.microsoft.com/office/drawing/2014/main" id="{43F7455F-6149-600B-BDD4-A614B8ED9F56}"/>
               </a:ext>
             </a:extLst>
           </p:cNvPr>
@@ -5038,21 +7233,15 @@
           <p:nvPr/>
         </p:nvPicPr>
         <p:blipFill>
-          <a:blip r:embed="rId4">
-            <a:extLst>
-              <a:ext uri="{96DAC541-7B7A-43D3-8B79-37D633B846F1}">
-                <asvg:svgBlip xmlns:asvg="http://schemas.microsoft.com/office/drawing/2016/SVG/main" r:embed="rId5"/>
-              </a:ext>
-            </a:extLst>
-          </a:blip>
+          <a:blip r:embed="rId2"/>
           <a:stretch>
             <a:fillRect/>
           </a:stretch>
         </p:blipFill>
         <p:spPr>
           <a:xfrm>
-            <a:off x="5045006" y="6356057"/>
-            <a:ext cx="6409575" cy="363174"/>
+            <a:off x="533400" y="609600"/>
+            <a:ext cx="4667901" cy="3743847"/>
           </a:xfrm>
           <a:prstGeom prst="rect">
             <a:avLst/>
@@ -5061,340 +7250,10 @@
       </p:pic>
       <p:sp>
         <p:nvSpPr>
-          <p:cNvPr id="84" name="Marcador de número de diapositiva 83">
+          <p:cNvPr id="9" name="CuadroTexto 8">
             <a:extLst>
               <a:ext uri="{FF2B5EF4-FFF2-40B4-BE49-F238E27FC236}">
-                <a16:creationId xmlns:a16="http://schemas.microsoft.com/office/drawing/2014/main" id="{F1891475-ED60-D0D2-1AD0-4F80E3D89439}"/>
-              </a:ext>
-            </a:extLst>
-          </p:cNvPr>
-          <p:cNvSpPr>
-            <a:spLocks noGrp="1"/>
-          </p:cNvSpPr>
-          <p:nvPr>
-            <p:ph type="sldNum" sz="quarter" idx="7"/>
-          </p:nvPr>
-        </p:nvSpPr>
-        <p:spPr/>
-        <p:txBody>
-          <a:bodyPr/>
-          <a:lstStyle/>
-          <a:p>
-            <a:fld id="{B6F15528-21DE-4FAA-801E-634DDDAF4B2B}" type="slidenum">
-              <a:rPr lang="es-ES" smtClean="0"/>
-              <a:t>4</a:t>
-            </a:fld>
-            <a:endParaRPr lang="es-ES"/>
-          </a:p>
-        </p:txBody>
-      </p:sp>
-      <mc:AlternateContent xmlns:mc="http://schemas.openxmlformats.org/markup-compatibility/2006" xmlns:a14="http://schemas.microsoft.com/office/drawing/2010/main">
-        <mc:Choice Requires="a14">
-          <p:sp>
-            <p:nvSpPr>
-              <p:cNvPr id="4" name="Marcador de texto 2">
-                <a:extLst>
-                  <a:ext uri="{FF2B5EF4-FFF2-40B4-BE49-F238E27FC236}">
-                    <a16:creationId xmlns:a16="http://schemas.microsoft.com/office/drawing/2014/main" id="{BBBE28D8-49EC-3B49-29AC-FD2FDAF3B0AF}"/>
-                  </a:ext>
-                </a:extLst>
-              </p:cNvPr>
-              <p:cNvSpPr txBox="1">
-                <a:spLocks/>
-              </p:cNvSpPr>
-              <p:nvPr/>
-            </p:nvSpPr>
-            <p:spPr>
-              <a:xfrm>
-                <a:off x="608012" y="1295400"/>
-                <a:ext cx="11048999" cy="4958137"/>
-              </a:xfrm>
-              <a:prstGeom prst="rect">
-                <a:avLst/>
-              </a:prstGeom>
-            </p:spPr>
-            <p:txBody>
-              <a:bodyPr>
-                <a:normAutofit/>
-              </a:bodyPr>
-              <a:lstStyle>
-                <a:lvl1pPr marL="0">
-                  <a:defRPr>
-                    <a:latin typeface="+mn-lt"/>
-                    <a:ea typeface="+mn-ea"/>
-                    <a:cs typeface="+mn-cs"/>
-                  </a:defRPr>
-                </a:lvl1pPr>
-                <a:lvl2pPr marL="457200">
-                  <a:defRPr>
-                    <a:latin typeface="+mn-lt"/>
-                    <a:ea typeface="+mn-ea"/>
-                    <a:cs typeface="+mn-cs"/>
-                  </a:defRPr>
-                </a:lvl2pPr>
-                <a:lvl3pPr marL="914400">
-                  <a:defRPr>
-                    <a:latin typeface="+mn-lt"/>
-                    <a:ea typeface="+mn-ea"/>
-                    <a:cs typeface="+mn-cs"/>
-                  </a:defRPr>
-                </a:lvl3pPr>
-                <a:lvl4pPr marL="1371600">
-                  <a:defRPr>
-                    <a:latin typeface="+mn-lt"/>
-                    <a:ea typeface="+mn-ea"/>
-                    <a:cs typeface="+mn-cs"/>
-                  </a:defRPr>
-                </a:lvl4pPr>
-                <a:lvl5pPr marL="1828800">
-                  <a:defRPr>
-                    <a:latin typeface="+mn-lt"/>
-                    <a:ea typeface="+mn-ea"/>
-                    <a:cs typeface="+mn-cs"/>
-                  </a:defRPr>
-                </a:lvl5pPr>
-                <a:lvl6pPr marL="2286000">
-                  <a:defRPr>
-                    <a:latin typeface="+mn-lt"/>
-                    <a:ea typeface="+mn-ea"/>
-                    <a:cs typeface="+mn-cs"/>
-                  </a:defRPr>
-                </a:lvl6pPr>
-                <a:lvl7pPr marL="2743200">
-                  <a:defRPr>
-                    <a:latin typeface="+mn-lt"/>
-                    <a:ea typeface="+mn-ea"/>
-                    <a:cs typeface="+mn-cs"/>
-                  </a:defRPr>
-                </a:lvl7pPr>
-                <a:lvl8pPr marL="3200400">
-                  <a:defRPr>
-                    <a:latin typeface="+mn-lt"/>
-                    <a:ea typeface="+mn-ea"/>
-                    <a:cs typeface="+mn-cs"/>
-                  </a:defRPr>
-                </a:lvl8pPr>
-                <a:lvl9pPr marL="3657600">
-                  <a:defRPr>
-                    <a:latin typeface="+mn-lt"/>
-                    <a:ea typeface="+mn-ea"/>
-                    <a:cs typeface="+mn-cs"/>
-                  </a:defRPr>
-                </a:lvl9pPr>
-              </a:lstStyle>
-              <a:p>
-                <a:r>
-                  <a:rPr lang="en-US" sz="2000" dirty="0"/>
-                  <a:t>Considering the n_{eff} values for the SOI cross-section, what would be the path difference (</a:t>
-                </a:r>
-                <a14:m>
-                  <m:oMath xmlns:m="http://schemas.openxmlformats.org/officeDocument/2006/math">
-                    <m:r>
-                      <m:rPr>
-                        <m:sty m:val="p"/>
-                      </m:rPr>
-                      <a:rPr lang="es-ES" sz="2000" b="0" i="0" smtClean="0">
-                        <a:latin typeface="Cambria Math" panose="02040503050406030204" pitchFamily="18" charset="0"/>
-                      </a:rPr>
-                      <m:t>ΔL</m:t>
-                    </m:r>
-                    <m:r>
-                      <a:rPr lang="es-ES" sz="2000" b="0" i="1" smtClean="0">
-                        <a:latin typeface="Cambria Math" panose="02040503050406030204" pitchFamily="18" charset="0"/>
-                      </a:rPr>
-                      <m:t>= </m:t>
-                    </m:r>
-                    <m:sSub>
-                      <m:sSubPr>
-                        <m:ctrlPr>
-                          <a:rPr lang="es-ES" sz="2000" i="1" smtClean="0">
-                            <a:latin typeface="Cambria Math" panose="02040503050406030204" pitchFamily="18" charset="0"/>
-                          </a:rPr>
-                        </m:ctrlPr>
-                      </m:sSubPr>
-                      <m:e>
-                        <m:r>
-                          <a:rPr lang="es-ES" sz="2000" b="0" i="1" smtClean="0">
-                            <a:latin typeface="Cambria Math" panose="02040503050406030204" pitchFamily="18" charset="0"/>
-                          </a:rPr>
-                          <m:t>𝐿</m:t>
-                        </m:r>
-                      </m:e>
-                      <m:sub>
-                        <m:r>
-                          <a:rPr lang="es-ES" sz="2000" b="0" i="1" smtClean="0">
-                            <a:latin typeface="Cambria Math" panose="02040503050406030204" pitchFamily="18" charset="0"/>
-                          </a:rPr>
-                          <m:t>𝑢</m:t>
-                        </m:r>
-                      </m:sub>
-                    </m:sSub>
-                    <m:r>
-                      <a:rPr lang="es-ES" sz="2000" b="0" i="1" smtClean="0">
-                        <a:latin typeface="Cambria Math" panose="02040503050406030204" pitchFamily="18" charset="0"/>
-                      </a:rPr>
-                      <m:t> −</m:t>
-                    </m:r>
-                    <m:sSub>
-                      <m:sSubPr>
-                        <m:ctrlPr>
-                          <a:rPr lang="es-ES" sz="2000" i="1">
-                            <a:latin typeface="Cambria Math" panose="02040503050406030204" pitchFamily="18" charset="0"/>
-                          </a:rPr>
-                        </m:ctrlPr>
-                      </m:sSubPr>
-                      <m:e>
-                        <m:r>
-                          <a:rPr lang="es-ES" sz="2000" b="0" i="1">
-                            <a:latin typeface="Cambria Math" panose="02040503050406030204" pitchFamily="18" charset="0"/>
-                          </a:rPr>
-                          <m:t>𝐿</m:t>
-                        </m:r>
-                      </m:e>
-                      <m:sub>
-                        <m:r>
-                          <a:rPr lang="es-ES" sz="2000" b="0" i="1" smtClean="0">
-                            <a:latin typeface="Cambria Math" panose="02040503050406030204" pitchFamily="18" charset="0"/>
-                          </a:rPr>
-                          <m:t>𝑑</m:t>
-                        </m:r>
-                      </m:sub>
-                    </m:sSub>
-                  </m:oMath>
-                </a14:m>
-                <a:r>
-                  <a:rPr lang="en-US" sz="2000" dirty="0"/>
-                  <a:t>) needed to obtain a Free Spectral Range of 40 nm? Introduce the obtained value in the model to check the MZI response. </a:t>
-                </a:r>
-              </a:p>
-              <a:p>
-                <a:endParaRPr lang="en-US" sz="2000" dirty="0"/>
-              </a:p>
-              <a:p>
-                <a:r>
-                  <a:rPr lang="en-US" sz="2000" dirty="0"/>
-                  <a:t>Hint: We assume 1550 nm as the central design wavelength (</a:t>
-                </a:r>
-                <a14:m>
-                  <m:oMath xmlns:m="http://schemas.openxmlformats.org/officeDocument/2006/math">
-                    <m:sSub>
-                      <m:sSubPr>
-                        <m:ctrlPr>
-                          <a:rPr lang="es-ES" sz="2000" i="1" smtClean="0">
-                            <a:latin typeface="Cambria Math" panose="02040503050406030204" pitchFamily="18" charset="0"/>
-                          </a:rPr>
-                        </m:ctrlPr>
-                      </m:sSubPr>
-                      <m:e>
-                        <m:r>
-                          <a:rPr lang="es-ES" sz="2000" i="1">
-                            <a:latin typeface="Cambria Math" panose="02040503050406030204" pitchFamily="18" charset="0"/>
-                          </a:rPr>
-                          <m:t>𝜆</m:t>
-                        </m:r>
-                      </m:e>
-                      <m:sub>
-                        <m:r>
-                          <a:rPr lang="es-ES" sz="2000" b="0" i="1" smtClean="0">
-                            <a:latin typeface="Cambria Math" panose="02040503050406030204" pitchFamily="18" charset="0"/>
-                          </a:rPr>
-                          <m:t>0</m:t>
-                        </m:r>
-                      </m:sub>
-                    </m:sSub>
-                    <m:r>
-                      <a:rPr lang="es-ES" sz="2000" b="0" i="1" smtClean="0">
-                        <a:latin typeface="Cambria Math" panose="02040503050406030204" pitchFamily="18" charset="0"/>
-                      </a:rPr>
-                      <m:t>= </m:t>
-                    </m:r>
-                  </m:oMath>
-                </a14:m>
-                <a:r>
-                  <a:rPr lang="en-US" sz="2000" dirty="0"/>
-                  <a:t>1550 nm).</a:t>
-                </a:r>
-              </a:p>
-              <a:p>
-                <a:endParaRPr lang="en-US" sz="2000" dirty="0"/>
-              </a:p>
-              <a:p>
-                <a:pPr algn="just"/>
-                <a:endParaRPr lang="en-US" sz="2000" dirty="0"/>
-              </a:p>
-              <a:p>
-                <a:pPr algn="just"/>
-                <a:endParaRPr lang="en-US" sz="2000" b="1" i="1" dirty="0"/>
-              </a:p>
-              <a:p>
-                <a:pPr algn="just"/>
-                <a:endParaRPr lang="en-US" sz="2000" kern="0" dirty="0">
-                  <a:solidFill>
-                    <a:sysClr val="windowText" lastClr="000000"/>
-                  </a:solidFill>
-                </a:endParaRPr>
-              </a:p>
-              <a:p>
-                <a:endParaRPr lang="en-US" sz="2000" kern="0" dirty="0">
-                  <a:solidFill>
-                    <a:sysClr val="windowText" lastClr="000000"/>
-                  </a:solidFill>
-                </a:endParaRPr>
-              </a:p>
-            </p:txBody>
-          </p:sp>
-        </mc:Choice>
-        <mc:Fallback xmlns="">
-          <p:sp>
-            <p:nvSpPr>
-              <p:cNvPr id="4" name="Marcador de texto 2">
-                <a:extLst>
-                  <a:ext uri="{FF2B5EF4-FFF2-40B4-BE49-F238E27FC236}">
-                    <a16:creationId xmlns:a16="http://schemas.microsoft.com/office/drawing/2014/main" id="{BBBE28D8-49EC-3B49-29AC-FD2FDAF3B0AF}"/>
-                  </a:ext>
-                </a:extLst>
-              </p:cNvPr>
-              <p:cNvSpPr txBox="1">
-                <a:spLocks noRot="1" noChangeAspect="1" noMove="1" noResize="1" noEditPoints="1" noAdjustHandles="1" noChangeArrowheads="1" noChangeShapeType="1" noTextEdit="1"/>
-              </p:cNvSpPr>
-              <p:nvPr/>
-            </p:nvSpPr>
-            <p:spPr>
-              <a:xfrm>
-                <a:off x="608012" y="1295400"/>
-                <a:ext cx="11048999" cy="4958137"/>
-              </a:xfrm>
-              <a:prstGeom prst="rect">
-                <a:avLst/>
-              </a:prstGeom>
-              <a:blipFill>
-                <a:blip r:embed="rId6"/>
-                <a:stretch>
-                  <a:fillRect l="-607" t="-738"/>
-                </a:stretch>
-              </a:blipFill>
-            </p:spPr>
-            <p:txBody>
-              <a:bodyPr/>
-              <a:lstStyle/>
-              <a:p>
-                <a:r>
-                  <a:rPr lang="es-ES">
-                    <a:noFill/>
-                  </a:rPr>
-                  <a:t> </a:t>
-                </a:r>
-              </a:p>
-            </p:txBody>
-          </p:sp>
-        </mc:Fallback>
-      </mc:AlternateContent>
-      <p:sp>
-        <p:nvSpPr>
-          <p:cNvPr id="2" name="CuadroTexto 1">
-            <a:extLst>
-              <a:ext uri="{FF2B5EF4-FFF2-40B4-BE49-F238E27FC236}">
-                <a16:creationId xmlns:a16="http://schemas.microsoft.com/office/drawing/2014/main" id="{CFDBBA6B-3646-055F-7A9C-EE01830137BE}"/>
+                <a16:creationId xmlns:a16="http://schemas.microsoft.com/office/drawing/2014/main" id="{A618339F-1EDE-F50C-2117-355861CCF3D9}"/>
               </a:ext>
             </a:extLst>
           </p:cNvPr>
@@ -5403,125 +7262,152 @@
         </p:nvSpPr>
         <p:spPr>
           <a:xfrm>
-            <a:off x="609441" y="4860334"/>
-            <a:ext cx="11199971" cy="1384995"/>
+            <a:off x="5715000" y="914400"/>
+            <a:ext cx="6128326" cy="923330"/>
           </a:xfrm>
           <a:prstGeom prst="rect">
             <a:avLst/>
           </a:prstGeom>
-          <a:solidFill>
-            <a:schemeClr val="bg1">
-              <a:lumMod val="95000"/>
-            </a:schemeClr>
-          </a:solidFill>
-          <a:ln w="28575">
-            <a:solidFill>
-              <a:srgbClr val="E0700D"/>
-            </a:solidFill>
-          </a:ln>
+          <a:noFill/>
         </p:spPr>
         <p:txBody>
-          <a:bodyPr wrap="square" rtlCol="0">
+          <a:bodyPr wrap="square">
             <a:spAutoFit/>
           </a:bodyPr>
           <a:lstStyle/>
           <a:p>
-            <a:pPr algn="just"/>
-            <a:r>
-              <a:rPr lang="en-US" sz="1200" dirty="0">
-                <a:latin typeface="Arial" panose="020B0604020202020204" pitchFamily="34" charset="0"/>
-                <a:cs typeface="Arial" panose="020B0604020202020204" pitchFamily="34" charset="0"/>
-              </a:rPr>
-              <a:t>Document all your results (copy here the code employed to obtain the corresponding value)</a:t>
-            </a:r>
-          </a:p>
-          <a:p>
-            <a:pPr algn="just"/>
-            <a:endParaRPr lang="en-US" sz="1200" dirty="0">
-              <a:latin typeface="Arial" panose="020B0604020202020204" pitchFamily="34" charset="0"/>
-              <a:cs typeface="Arial" panose="020B0604020202020204" pitchFamily="34" charset="0"/>
-            </a:endParaRPr>
-          </a:p>
-          <a:p>
-            <a:pPr algn="just"/>
-            <a:endParaRPr lang="en-US" sz="1200" dirty="0">
-              <a:latin typeface="Arial" panose="020B0604020202020204" pitchFamily="34" charset="0"/>
-              <a:cs typeface="Arial" panose="020B0604020202020204" pitchFamily="34" charset="0"/>
-            </a:endParaRPr>
-          </a:p>
-          <a:p>
-            <a:pPr algn="just"/>
-            <a:endParaRPr lang="en-US" sz="1200" dirty="0">
-              <a:latin typeface="Arial" panose="020B0604020202020204" pitchFamily="34" charset="0"/>
-              <a:cs typeface="Arial" panose="020B0604020202020204" pitchFamily="34" charset="0"/>
-            </a:endParaRPr>
-          </a:p>
-          <a:p>
-            <a:pPr algn="just"/>
-            <a:endParaRPr lang="en-US" sz="1200" dirty="0">
-              <a:latin typeface="Arial" panose="020B0604020202020204" pitchFamily="34" charset="0"/>
-              <a:cs typeface="Arial" panose="020B0604020202020204" pitchFamily="34" charset="0"/>
-            </a:endParaRPr>
-          </a:p>
-          <a:p>
-            <a:pPr algn="just"/>
-            <a:endParaRPr lang="en-US" sz="1200" dirty="0">
-              <a:latin typeface="Arial" panose="020B0604020202020204" pitchFamily="34" charset="0"/>
-              <a:cs typeface="Arial" panose="020B0604020202020204" pitchFamily="34" charset="0"/>
-            </a:endParaRPr>
-          </a:p>
-          <a:p>
-            <a:pPr algn="just"/>
-            <a:endParaRPr lang="en-US" sz="1200" dirty="0">
-              <a:latin typeface="Arial" panose="020B0604020202020204" pitchFamily="34" charset="0"/>
-              <a:cs typeface="Arial" panose="020B0604020202020204" pitchFamily="34" charset="0"/>
-            </a:endParaRPr>
-          </a:p>
-        </p:txBody>
-      </p:sp>
-      <p:sp>
-        <p:nvSpPr>
-          <p:cNvPr id="5" name="Marcador de pie de página 2">
-            <a:extLst>
-              <a:ext uri="{FF2B5EF4-FFF2-40B4-BE49-F238E27FC236}">
-                <a16:creationId xmlns:a16="http://schemas.microsoft.com/office/drawing/2014/main" id="{97B81335-0738-3406-18D4-5D88EB0C7954}"/>
-              </a:ext>
-            </a:extLst>
-          </p:cNvPr>
-          <p:cNvSpPr>
-            <a:spLocks noGrp="1"/>
-          </p:cNvSpPr>
-          <p:nvPr>
-            <p:ph type="ftr" sz="quarter" idx="5"/>
-          </p:nvPr>
-        </p:nvSpPr>
-        <p:spPr>
-          <a:xfrm>
-            <a:off x="609600" y="6457057"/>
-            <a:ext cx="2743200" cy="184666"/>
-          </a:xfrm>
-        </p:spPr>
-        <p:txBody>
-          <a:bodyPr/>
-          <a:lstStyle/>
-          <a:p>
-            <a:pPr marL="12700">
-              <a:spcBef>
-                <a:spcPts val="15"/>
-              </a:spcBef>
-            </a:pPr>
-            <a:r>
-              <a:rPr lang="es-ES" spc="-5"/>
-              <a:t>LAB 3. INTERFEROMETERS I</a:t>
-            </a:r>
-            <a:endParaRPr lang="es-ES" spc="-5" dirty="0"/>
+            <a:r>
+              <a:rPr lang="en-US" dirty="0"/>
+              <a:t>Las </a:t>
+            </a:r>
+            <a:r>
+              <a:rPr lang="en-US" dirty="0" err="1"/>
+              <a:t>característica</a:t>
+            </a:r>
+            <a:r>
+              <a:rPr lang="en-US" dirty="0"/>
+              <a:t> de </a:t>
+            </a:r>
+            <a:r>
+              <a:rPr lang="en-US" dirty="0" err="1"/>
+              <a:t>los</a:t>
+            </a:r>
+            <a:r>
+              <a:rPr lang="en-US" dirty="0"/>
+              <a:t> dos </a:t>
+            </a:r>
+            <a:r>
+              <a:rPr lang="en-US" dirty="0" err="1"/>
+              <a:t>brazos</a:t>
+            </a:r>
+            <a:r>
+              <a:rPr lang="en-US" dirty="0"/>
+              <a:t> son </a:t>
+            </a:r>
+            <a:r>
+              <a:rPr lang="en-US" dirty="0" err="1"/>
+              <a:t>iguales</a:t>
+            </a:r>
+            <a:r>
+              <a:rPr lang="en-US" dirty="0"/>
+              <a:t>, </a:t>
+            </a:r>
+            <a:r>
+              <a:rPr lang="en-US" dirty="0" err="1"/>
+              <a:t>misma</a:t>
+            </a:r>
+            <a:r>
+              <a:rPr lang="en-US" dirty="0"/>
+              <a:t> </a:t>
+            </a:r>
+            <a:r>
+              <a:rPr lang="en-US" dirty="0" err="1"/>
+              <a:t>longitud</a:t>
+            </a:r>
+            <a:r>
+              <a:rPr lang="en-US" dirty="0"/>
+              <a:t> y </a:t>
+            </a:r>
+            <a:r>
+              <a:rPr lang="en-US" dirty="0" err="1"/>
+              <a:t>mismo</a:t>
+            </a:r>
+            <a:r>
+              <a:rPr lang="en-US" dirty="0"/>
+              <a:t> </a:t>
+            </a:r>
+            <a:r>
+              <a:rPr lang="en-US" dirty="0" err="1"/>
+              <a:t>neff</a:t>
+            </a:r>
+            <a:r>
+              <a:rPr lang="en-US" dirty="0"/>
+              <a:t>.  Se </a:t>
+            </a:r>
+            <a:r>
+              <a:rPr lang="en-US" dirty="0" err="1"/>
+              <a:t>comporta</a:t>
+            </a:r>
+            <a:r>
+              <a:rPr lang="en-US" dirty="0"/>
+              <a:t> </a:t>
+            </a:r>
+            <a:r>
+              <a:rPr lang="en-US" dirty="0" err="1"/>
+              <a:t>como</a:t>
+            </a:r>
+            <a:r>
+              <a:rPr lang="en-US" dirty="0"/>
+              <a:t> </a:t>
+            </a:r>
+            <a:r>
+              <a:rPr lang="en-US" dirty="0" err="1"/>
+              <a:t>una</a:t>
+            </a:r>
+            <a:r>
+              <a:rPr lang="en-US" dirty="0"/>
+              <a:t> </a:t>
+            </a:r>
+            <a:r>
+              <a:rPr lang="en-US" dirty="0" err="1"/>
+              <a:t>guia</a:t>
+            </a:r>
+            <a:r>
+              <a:rPr lang="en-US" dirty="0"/>
+              <a:t> recta. Lo </a:t>
+            </a:r>
+            <a:r>
+              <a:rPr lang="en-US" dirty="0" err="1"/>
+              <a:t>que</a:t>
+            </a:r>
+            <a:r>
+              <a:rPr lang="en-US" dirty="0"/>
+              <a:t> </a:t>
+            </a:r>
+            <a:r>
+              <a:rPr lang="en-US" dirty="0" err="1"/>
+              <a:t>entra</a:t>
+            </a:r>
+            <a:r>
+              <a:rPr lang="en-US" dirty="0"/>
+              <a:t> sale </a:t>
+            </a:r>
+            <a:r>
+              <a:rPr lang="en-US" dirty="0" err="1"/>
+              <a:t>en</a:t>
+            </a:r>
+            <a:r>
+              <a:rPr lang="en-US" dirty="0"/>
+              <a:t> bar. </a:t>
+            </a:r>
+            <a:endParaRPr lang="es-ES" dirty="0"/>
           </a:p>
         </p:txBody>
       </p:sp>
     </p:spTree>
     <p:extLst>
       <p:ext uri="{BB962C8B-B14F-4D97-AF65-F5344CB8AC3E}">
-        <p14:creationId xmlns:p14="http://schemas.microsoft.com/office/powerpoint/2010/main" val="2337098194"/>
+        <p14:creationId xmlns:p14="http://schemas.microsoft.com/office/powerpoint/2010/main" val="2410670965"/>
       </p:ext>
     </p:extLst>
   </p:cSld>
@@ -5539,7 +7425,7 @@
         <p:cNvPr id="1" name="">
           <a:extLst>
             <a:ext uri="{FF2B5EF4-FFF2-40B4-BE49-F238E27FC236}">
-              <a16:creationId xmlns:a16="http://schemas.microsoft.com/office/drawing/2014/main" id="{98CB9552-DF22-1310-10FA-4D2D2AF77601}"/>
+              <a16:creationId xmlns:a16="http://schemas.microsoft.com/office/drawing/2014/main" id="{C0A56EDE-87C7-CF19-F9D8-26DA222D85B2}"/>
             </a:ext>
           </a:extLst>
         </p:cNvPr>
@@ -5556,70 +7442,113 @@
       </p:grpSpPr>
       <p:sp>
         <p:nvSpPr>
-          <p:cNvPr id="16" name="object 16">
+          <p:cNvPr id="2" name="Título 1">
             <a:extLst>
               <a:ext uri="{FF2B5EF4-FFF2-40B4-BE49-F238E27FC236}">
-                <a16:creationId xmlns:a16="http://schemas.microsoft.com/office/drawing/2014/main" id="{B0632A48-0384-0EF1-389E-FBF3F9C3E7CE}"/>
+                <a16:creationId xmlns:a16="http://schemas.microsoft.com/office/drawing/2014/main" id="{CF249D62-813C-BB9A-7FE4-0EBB5E40B81C}"/>
               </a:ext>
             </a:extLst>
           </p:cNvPr>
-          <p:cNvSpPr txBox="1">
+          <p:cNvSpPr>
             <a:spLocks noGrp="1"/>
           </p:cNvSpPr>
           <p:nvPr>
             <p:ph type="title"/>
           </p:nvPr>
         </p:nvSpPr>
-        <p:spPr>
-          <a:xfrm>
-            <a:off x="685800" y="408883"/>
-            <a:ext cx="10994410" cy="782265"/>
-          </a:xfrm>
-          <a:prstGeom prst="rect">
-            <a:avLst/>
-          </a:prstGeom>
-        </p:spPr>
-        <p:txBody>
-          <a:bodyPr vert="horz" wrap="square" lIns="0" tIns="12700" rIns="0" bIns="0" rtlCol="0">
-            <a:spAutoFit/>
-          </a:bodyPr>
+        <p:spPr/>
+        <p:txBody>
+          <a:bodyPr/>
           <a:lstStyle/>
           <a:p>
+            <a:r>
+              <a:rPr lang="es-ES" dirty="0" err="1"/>
+              <a:t>Balanced</a:t>
+            </a:r>
+            <a:r>
+              <a:rPr lang="es-ES" dirty="0"/>
+              <a:t> </a:t>
+            </a:r>
+            <a:r>
+              <a:rPr lang="es-ES" dirty="0" err="1"/>
+              <a:t>configuration</a:t>
+            </a:r>
+            <a:r>
+              <a:rPr lang="es-ES" dirty="0"/>
+              <a:t> – Pérdidas variando la longitud y manteniendo las pérdidas de propagación </a:t>
+            </a:r>
+          </a:p>
+        </p:txBody>
+      </p:sp>
+      <p:sp>
+        <p:nvSpPr>
+          <p:cNvPr id="4" name="Marcador de pie de página 3">
+            <a:extLst>
+              <a:ext uri="{FF2B5EF4-FFF2-40B4-BE49-F238E27FC236}">
+                <a16:creationId xmlns:a16="http://schemas.microsoft.com/office/drawing/2014/main" id="{1A43F933-0C01-EFBF-A9FE-E20769F02332}"/>
+              </a:ext>
+            </a:extLst>
+          </p:cNvPr>
+          <p:cNvSpPr>
+            <a:spLocks noGrp="1"/>
+          </p:cNvSpPr>
+          <p:nvPr>
+            <p:ph type="ftr" sz="quarter" idx="5"/>
+          </p:nvPr>
+        </p:nvSpPr>
+        <p:spPr/>
+        <p:txBody>
+          <a:bodyPr/>
+          <a:lstStyle/>
+          <a:p>
             <a:pPr marL="12700">
-              <a:lnSpc>
-                <a:spcPct val="100000"/>
-              </a:lnSpc>
               <a:spcBef>
-                <a:spcPts val="100"/>
+                <a:spcPts val="15"/>
               </a:spcBef>
             </a:pPr>
             <a:r>
-              <a:rPr lang="en-US" sz="2400" b="1" dirty="0"/>
-              <a:t>ASSESSMENT #3 </a:t>
-            </a:r>
-            <a:r>
-              <a:rPr lang="en-US" sz="2500" dirty="0"/>
-              <a:t>– SAX implementation </a:t>
-            </a:r>
-            <a:br>
-              <a:rPr lang="es-ES" sz="2500" spc="-5" dirty="0">
-                <a:latin typeface="+mj-lt"/>
-                <a:cs typeface="Lucida Sans"/>
-              </a:rPr>
-            </a:br>
-            <a:endParaRPr sz="2500" b="0" dirty="0">
-              <a:latin typeface="+mj-lt"/>
-              <a:cs typeface="Lucida Sans"/>
-            </a:endParaRPr>
+              <a:rPr lang="es-ES" spc="-5"/>
+              <a:t>LAB 3. INTERFEROMETERS I</a:t>
+            </a:r>
+            <a:endParaRPr lang="es-ES" spc="-5" dirty="0"/>
+          </a:p>
+        </p:txBody>
+      </p:sp>
+      <p:sp>
+        <p:nvSpPr>
+          <p:cNvPr id="5" name="Marcador de número de diapositiva 4">
+            <a:extLst>
+              <a:ext uri="{FF2B5EF4-FFF2-40B4-BE49-F238E27FC236}">
+                <a16:creationId xmlns:a16="http://schemas.microsoft.com/office/drawing/2014/main" id="{279ECCD8-3ED1-97E8-758C-7195F2010442}"/>
+              </a:ext>
+            </a:extLst>
+          </p:cNvPr>
+          <p:cNvSpPr>
+            <a:spLocks noGrp="1"/>
+          </p:cNvSpPr>
+          <p:nvPr>
+            <p:ph type="sldNum" sz="quarter" idx="7"/>
+          </p:nvPr>
+        </p:nvSpPr>
+        <p:spPr/>
+        <p:txBody>
+          <a:bodyPr/>
+          <a:lstStyle/>
+          <a:p>
+            <a:fld id="{B6F15528-21DE-4FAA-801E-634DDDAF4B2B}" type="slidenum">
+              <a:rPr lang="es-ES" smtClean="0"/>
+              <a:t>5</a:t>
+            </a:fld>
+            <a:endParaRPr lang="es-ES"/>
           </a:p>
         </p:txBody>
       </p:sp>
       <p:pic>
         <p:nvPicPr>
-          <p:cNvPr id="83" name="Gráfico 82">
+          <p:cNvPr id="7" name="Imagen 6">
             <a:extLst>
               <a:ext uri="{FF2B5EF4-FFF2-40B4-BE49-F238E27FC236}">
-                <a16:creationId xmlns:a16="http://schemas.microsoft.com/office/drawing/2014/main" id="{1F43E6A6-5CC3-9B99-14AC-997478150C3D}"/>
+                <a16:creationId xmlns:a16="http://schemas.microsoft.com/office/drawing/2014/main" id="{1C0F582C-54CB-717B-1596-1631BEE69AA6}"/>
               </a:ext>
             </a:extLst>
           </p:cNvPr>
@@ -5629,21 +7558,183 @@
           <p:nvPr/>
         </p:nvPicPr>
         <p:blipFill>
-          <a:blip r:embed="rId3">
-            <a:extLst>
-              <a:ext uri="{96DAC541-7B7A-43D3-8B79-37D633B846F1}">
-                <asvg:svgBlip xmlns:asvg="http://schemas.microsoft.com/office/drawing/2016/SVG/main" r:embed="rId4"/>
+          <a:blip r:embed="rId2">
+            <a:extLst>
+              <a:ext uri="{28A0092B-C50C-407E-A947-70E740481C1C}">
+                <a14:useLocalDpi xmlns:a14="http://schemas.microsoft.com/office/drawing/2010/main" val="0"/>
               </a:ext>
             </a:extLst>
           </a:blip>
+          <a:srcRect/>
+          <a:stretch/>
+        </p:blipFill>
+        <p:spPr>
+          <a:xfrm>
+            <a:off x="533401" y="618167"/>
+            <a:ext cx="3733800" cy="2980956"/>
+          </a:xfrm>
+          <a:prstGeom prst="rect">
+            <a:avLst/>
+          </a:prstGeom>
+        </p:spPr>
+      </p:pic>
+      <p:sp>
+        <p:nvSpPr>
+          <p:cNvPr id="9" name="CuadroTexto 8">
+            <a:extLst>
+              <a:ext uri="{FF2B5EF4-FFF2-40B4-BE49-F238E27FC236}">
+                <a16:creationId xmlns:a16="http://schemas.microsoft.com/office/drawing/2014/main" id="{B599BE8A-B4DD-CDC5-1F7F-80D4F1086F60}"/>
+              </a:ext>
+            </a:extLst>
+          </p:cNvPr>
+          <p:cNvSpPr txBox="1"/>
+          <p:nvPr/>
+        </p:nvSpPr>
+        <p:spPr>
+          <a:xfrm>
+            <a:off x="4585394" y="762000"/>
+            <a:ext cx="6128326" cy="923330"/>
+          </a:xfrm>
+          <a:prstGeom prst="rect">
+            <a:avLst/>
+          </a:prstGeom>
+          <a:noFill/>
+        </p:spPr>
+        <p:txBody>
+          <a:bodyPr wrap="square">
+            <a:spAutoFit/>
+          </a:bodyPr>
+          <a:lstStyle/>
+          <a:p>
+            <a:r>
+              <a:rPr lang="en-US" dirty="0"/>
+              <a:t>Al </a:t>
+            </a:r>
+            <a:r>
+              <a:rPr lang="en-US" dirty="0" err="1"/>
+              <a:t>introducir</a:t>
+            </a:r>
+            <a:r>
+              <a:rPr lang="en-US" dirty="0"/>
+              <a:t> </a:t>
+            </a:r>
+            <a:r>
+              <a:rPr lang="en-US" dirty="0" err="1"/>
+              <a:t>pérdidas</a:t>
+            </a:r>
+            <a:r>
+              <a:rPr lang="en-US" dirty="0"/>
+              <a:t>, </a:t>
+            </a:r>
+            <a:r>
+              <a:rPr lang="en-US" dirty="0" err="1"/>
+              <a:t>claramente</a:t>
+            </a:r>
+            <a:r>
+              <a:rPr lang="en-US" dirty="0"/>
+              <a:t> baja la </a:t>
+            </a:r>
+            <a:r>
+              <a:rPr lang="en-US" dirty="0" err="1"/>
+              <a:t>potencia</a:t>
+            </a:r>
+            <a:r>
+              <a:rPr lang="en-US" dirty="0"/>
+              <a:t> de </a:t>
+            </a:r>
+            <a:r>
+              <a:rPr lang="en-US" dirty="0" err="1"/>
+              <a:t>salida</a:t>
+            </a:r>
+            <a:r>
+              <a:rPr lang="en-US" dirty="0"/>
+              <a:t>,</a:t>
+            </a:r>
+          </a:p>
+          <a:p>
+            <a:r>
+              <a:rPr lang="en-US" dirty="0" err="1"/>
+              <a:t>como</a:t>
+            </a:r>
+            <a:r>
+              <a:rPr lang="en-US" dirty="0"/>
+              <a:t> Podemos </a:t>
+            </a:r>
+            <a:r>
+              <a:rPr lang="en-US" dirty="0" err="1"/>
+              <a:t>ver</a:t>
+            </a:r>
+            <a:r>
+              <a:rPr lang="en-US" dirty="0"/>
+              <a:t> </a:t>
+            </a:r>
+            <a:r>
+              <a:rPr lang="en-US" dirty="0" err="1"/>
+              <a:t>en</a:t>
+            </a:r>
+            <a:r>
+              <a:rPr lang="en-US" dirty="0"/>
+              <a:t> </a:t>
+            </a:r>
+            <a:r>
+              <a:rPr lang="en-US" dirty="0" err="1"/>
+              <a:t>el</a:t>
+            </a:r>
+            <a:r>
+              <a:rPr lang="en-US" dirty="0"/>
+              <a:t> </a:t>
+            </a:r>
+            <a:r>
+              <a:rPr lang="en-US" dirty="0" err="1"/>
+              <a:t>ejemplo</a:t>
+            </a:r>
+            <a:r>
+              <a:rPr lang="en-US" dirty="0"/>
+              <a:t> para 25um y 0.05dB/um de </a:t>
+            </a:r>
+            <a:r>
+              <a:rPr lang="en-US" dirty="0" err="1"/>
+              <a:t>pérdidas</a:t>
+            </a:r>
+            <a:r>
+              <a:rPr lang="en-US" dirty="0"/>
+              <a:t> de </a:t>
+            </a:r>
+            <a:r>
+              <a:rPr lang="en-US" dirty="0" err="1"/>
+              <a:t>propagación</a:t>
+            </a:r>
+            <a:r>
+              <a:rPr lang="en-US" dirty="0"/>
+              <a:t>. </a:t>
+            </a:r>
+          </a:p>
+        </p:txBody>
+      </p:sp>
+      <p:pic>
+        <p:nvPicPr>
+          <p:cNvPr id="6" name="Imagen 5" descr="Gráfico, Gráfico de líneas&#10;&#10;El contenido generado por IA puede ser incorrecto.">
+            <a:extLst>
+              <a:ext uri="{FF2B5EF4-FFF2-40B4-BE49-F238E27FC236}">
+                <a16:creationId xmlns:a16="http://schemas.microsoft.com/office/drawing/2014/main" id="{DD9C5E92-3E84-8ECB-8971-ED1FF7508903}"/>
+              </a:ext>
+            </a:extLst>
+          </p:cNvPr>
+          <p:cNvPicPr>
+            <a:picLocks noChangeAspect="1"/>
+          </p:cNvPicPr>
+          <p:nvPr/>
+        </p:nvPicPr>
+        <p:blipFill>
+          <a:blip r:embed="rId3"/>
           <a:stretch>
             <a:fillRect/>
           </a:stretch>
         </p:blipFill>
         <p:spPr>
           <a:xfrm>
-            <a:off x="5045006" y="6356057"/>
-            <a:ext cx="6409575" cy="363174"/>
+            <a:off x="607291" y="3701155"/>
+            <a:ext cx="3722372" cy="2980955"/>
           </a:xfrm>
           <a:prstGeom prst="rect">
             <a:avLst/>
@@ -5652,604 +7743,141 @@
       </p:pic>
       <p:sp>
         <p:nvSpPr>
-          <p:cNvPr id="84" name="Marcador de número de diapositiva 83">
+          <p:cNvPr id="10" name="CuadroTexto 9">
             <a:extLst>
               <a:ext uri="{FF2B5EF4-FFF2-40B4-BE49-F238E27FC236}">
-                <a16:creationId xmlns:a16="http://schemas.microsoft.com/office/drawing/2014/main" id="{DFC09DB6-1DF7-C8F9-7414-27BC280DEA0F}"/>
+                <a16:creationId xmlns:a16="http://schemas.microsoft.com/office/drawing/2014/main" id="{D7C18C43-9AF6-EC8D-636E-64BD0AFC6823}"/>
               </a:ext>
             </a:extLst>
           </p:cNvPr>
-          <p:cNvSpPr>
-            <a:spLocks noGrp="1"/>
-          </p:cNvSpPr>
-          <p:nvPr>
-            <p:ph type="sldNum" sz="quarter" idx="7"/>
-          </p:nvPr>
-        </p:nvSpPr>
-        <p:spPr/>
-        <p:txBody>
-          <a:bodyPr/>
-          <a:lstStyle/>
-          <a:p>
-            <a:fld id="{B6F15528-21DE-4FAA-801E-634DDDAF4B2B}" type="slidenum">
-              <a:rPr lang="es-ES" smtClean="0"/>
-              <a:t>5</a:t>
-            </a:fld>
-            <a:endParaRPr lang="es-ES"/>
-          </a:p>
-        </p:txBody>
-      </p:sp>
-      <p:sp>
-        <p:nvSpPr>
-          <p:cNvPr id="4" name="Marcador de texto 2">
-            <a:extLst>
-              <a:ext uri="{FF2B5EF4-FFF2-40B4-BE49-F238E27FC236}">
-                <a16:creationId xmlns:a16="http://schemas.microsoft.com/office/drawing/2014/main" id="{EBC8DCFA-5565-A757-1F8D-F4CCCF573A63}"/>
-              </a:ext>
-            </a:extLst>
-          </p:cNvPr>
-          <p:cNvSpPr txBox="1">
-            <a:spLocks/>
-          </p:cNvSpPr>
+          <p:cNvSpPr txBox="1"/>
           <p:nvPr/>
         </p:nvSpPr>
         <p:spPr>
           <a:xfrm>
-            <a:off x="571500" y="1066800"/>
-            <a:ext cx="11048999" cy="4958137"/>
+            <a:off x="4798176" y="3701155"/>
+            <a:ext cx="6128326" cy="923330"/>
           </a:xfrm>
           <a:prstGeom prst="rect">
             <a:avLst/>
           </a:prstGeom>
+          <a:noFill/>
         </p:spPr>
         <p:txBody>
-          <a:bodyPr>
-            <a:normAutofit/>
-          </a:bodyPr>
-          <a:lstStyle>
-            <a:lvl1pPr marL="0">
-              <a:defRPr>
-                <a:latin typeface="+mn-lt"/>
-                <a:ea typeface="+mn-ea"/>
-                <a:cs typeface="+mn-cs"/>
-              </a:defRPr>
-            </a:lvl1pPr>
-            <a:lvl2pPr marL="457200">
-              <a:defRPr>
-                <a:latin typeface="+mn-lt"/>
-                <a:ea typeface="+mn-ea"/>
-                <a:cs typeface="+mn-cs"/>
-              </a:defRPr>
-            </a:lvl2pPr>
-            <a:lvl3pPr marL="914400">
-              <a:defRPr>
-                <a:latin typeface="+mn-lt"/>
-                <a:ea typeface="+mn-ea"/>
-                <a:cs typeface="+mn-cs"/>
-              </a:defRPr>
-            </a:lvl3pPr>
-            <a:lvl4pPr marL="1371600">
-              <a:defRPr>
-                <a:latin typeface="+mn-lt"/>
-                <a:ea typeface="+mn-ea"/>
-                <a:cs typeface="+mn-cs"/>
-              </a:defRPr>
-            </a:lvl4pPr>
-            <a:lvl5pPr marL="1828800">
-              <a:defRPr>
-                <a:latin typeface="+mn-lt"/>
-                <a:ea typeface="+mn-ea"/>
-                <a:cs typeface="+mn-cs"/>
-              </a:defRPr>
-            </a:lvl5pPr>
-            <a:lvl6pPr marL="2286000">
-              <a:defRPr>
-                <a:latin typeface="+mn-lt"/>
-                <a:ea typeface="+mn-ea"/>
-                <a:cs typeface="+mn-cs"/>
-              </a:defRPr>
-            </a:lvl6pPr>
-            <a:lvl7pPr marL="2743200">
-              <a:defRPr>
-                <a:latin typeface="+mn-lt"/>
-                <a:ea typeface="+mn-ea"/>
-                <a:cs typeface="+mn-cs"/>
-              </a:defRPr>
-            </a:lvl7pPr>
-            <a:lvl8pPr marL="3200400">
-              <a:defRPr>
-                <a:latin typeface="+mn-lt"/>
-                <a:ea typeface="+mn-ea"/>
-                <a:cs typeface="+mn-cs"/>
-              </a:defRPr>
-            </a:lvl8pPr>
-            <a:lvl9pPr marL="3657600">
-              <a:defRPr>
-                <a:latin typeface="+mn-lt"/>
-                <a:ea typeface="+mn-ea"/>
-                <a:cs typeface="+mn-cs"/>
-              </a:defRPr>
-            </a:lvl9pPr>
-          </a:lstStyle>
-          <a:p>
-            <a:r>
-              <a:rPr lang="en-US" dirty="0"/>
-              <a:t>Now, we are going to implement the design parameters in the MZI model developed in SAX and compare the response obtained with the one simulated by mathematical formulation. This will help us to identify any error in the definition of the SAX model single components. </a:t>
-            </a:r>
-          </a:p>
-          <a:p>
-            <a:br>
-              <a:rPr lang="en-US" dirty="0"/>
-            </a:br>
-            <a:r>
-              <a:rPr lang="en-US" dirty="0"/>
-              <a:t>In order to implement the SAX model, take as example the following lines:</a:t>
-            </a:r>
-          </a:p>
-          <a:p>
-            <a:endParaRPr lang="en-US" dirty="0"/>
-          </a:p>
-          <a:p>
-            <a:pPr lvl="2">
-              <a:lnSpc>
-                <a:spcPts val="1425"/>
-              </a:lnSpc>
-            </a:pPr>
-            <a:r>
-              <a:rPr lang="es-ES" sz="1400" b="0" dirty="0">
-                <a:effectLst/>
-                <a:latin typeface="Courier New" panose="02070309020205020404" pitchFamily="49" charset="0"/>
-              </a:rPr>
-              <a:t> </a:t>
-            </a:r>
-            <a:r>
-              <a:rPr lang="es-ES" sz="1400" b="0" dirty="0" err="1">
-                <a:effectLst/>
-                <a:latin typeface="Courier New" panose="02070309020205020404" pitchFamily="49" charset="0"/>
-              </a:rPr>
-              <a:t>mzi_test</a:t>
-            </a:r>
-            <a:r>
-              <a:rPr lang="es-ES" sz="1400" b="0" dirty="0">
-                <a:effectLst/>
-                <a:latin typeface="Courier New" panose="02070309020205020404" pitchFamily="49" charset="0"/>
-              </a:rPr>
-              <a:t> = </a:t>
-            </a:r>
-            <a:r>
-              <a:rPr lang="es-ES" sz="1400" b="0" dirty="0" err="1">
-                <a:effectLst/>
-                <a:latin typeface="Courier New" panose="02070309020205020404" pitchFamily="49" charset="0"/>
-              </a:rPr>
-              <a:t>mzi</a:t>
-            </a:r>
-            <a:r>
-              <a:rPr lang="es-ES" sz="1400" b="0" dirty="0">
-                <a:effectLst/>
-                <a:latin typeface="Courier New" panose="02070309020205020404" pitchFamily="49" charset="0"/>
-              </a:rPr>
-              <a:t>(</a:t>
-            </a:r>
-            <a:r>
-              <a:rPr lang="es-ES" sz="1400" b="0" dirty="0" err="1">
-                <a:effectLst/>
-                <a:latin typeface="Courier New" panose="02070309020205020404" pitchFamily="49" charset="0"/>
-              </a:rPr>
-              <a:t>wl</a:t>
-            </a:r>
-            <a:r>
-              <a:rPr lang="es-ES" sz="1400" b="0" dirty="0">
-                <a:effectLst/>
-                <a:latin typeface="Courier New" panose="02070309020205020404" pitchFamily="49" charset="0"/>
-              </a:rPr>
-              <a:t>=</a:t>
-            </a:r>
-            <a:r>
-              <a:rPr lang="es-ES" sz="1400" b="0" dirty="0" err="1">
-                <a:effectLst/>
-                <a:latin typeface="Courier New" panose="02070309020205020404" pitchFamily="49" charset="0"/>
-              </a:rPr>
-              <a:t>wl</a:t>
-            </a:r>
-            <a:r>
-              <a:rPr lang="es-ES" sz="1400" b="0" dirty="0">
-                <a:effectLst/>
-                <a:latin typeface="Courier New" panose="02070309020205020404" pitchFamily="49" charset="0"/>
-              </a:rPr>
-              <a:t>, </a:t>
-            </a:r>
-          </a:p>
-          <a:p>
-            <a:pPr lvl="2">
-              <a:lnSpc>
-                <a:spcPts val="1425"/>
-              </a:lnSpc>
-            </a:pPr>
-            <a:r>
-              <a:rPr lang="es-ES" sz="1400" b="0" dirty="0">
-                <a:effectLst/>
-                <a:latin typeface="Courier New" panose="02070309020205020404" pitchFamily="49" charset="0"/>
-              </a:rPr>
-              <a:t>    </a:t>
-            </a:r>
-            <a:r>
-              <a:rPr lang="es-ES" sz="1400" b="0" dirty="0" err="1">
-                <a:effectLst/>
-                <a:latin typeface="Courier New" panose="02070309020205020404" pitchFamily="49" charset="0"/>
-              </a:rPr>
-              <a:t>coup_a</a:t>
-            </a:r>
-            <a:r>
-              <a:rPr lang="es-ES" sz="1400" b="0" dirty="0">
-                <a:effectLst/>
-                <a:latin typeface="Courier New" panose="02070309020205020404" pitchFamily="49" charset="0"/>
-              </a:rPr>
-              <a:t> = ...</a:t>
-            </a:r>
-          </a:p>
-          <a:p>
-            <a:pPr lvl="2">
-              <a:lnSpc>
-                <a:spcPts val="1425"/>
-              </a:lnSpc>
-            </a:pPr>
-            <a:r>
-              <a:rPr lang="es-ES" sz="1400" b="0" dirty="0">
-                <a:effectLst/>
-                <a:latin typeface="Courier New" panose="02070309020205020404" pitchFamily="49" charset="0"/>
-              </a:rPr>
-              <a:t>    </a:t>
-            </a:r>
-            <a:r>
-              <a:rPr lang="es-ES" sz="1400" b="0" dirty="0" err="1">
-                <a:effectLst/>
-                <a:latin typeface="Courier New" panose="02070309020205020404" pitchFamily="49" charset="0"/>
-              </a:rPr>
-              <a:t>wvg_d</a:t>
-            </a:r>
-            <a:r>
-              <a:rPr lang="es-ES" sz="1400" b="0" dirty="0">
-                <a:effectLst/>
-                <a:latin typeface="Courier New" panose="02070309020205020404" pitchFamily="49" charset="0"/>
-              </a:rPr>
-              <a:t>={"</a:t>
-            </a:r>
-            <a:r>
-              <a:rPr lang="es-ES" sz="1400" b="0" dirty="0" err="1">
-                <a:effectLst/>
-                <a:latin typeface="Courier New" panose="02070309020205020404" pitchFamily="49" charset="0"/>
-              </a:rPr>
-              <a:t>length</a:t>
-            </a:r>
-            <a:r>
-              <a:rPr lang="es-ES" sz="1400" b="0" dirty="0">
-                <a:effectLst/>
-                <a:latin typeface="Courier New" panose="02070309020205020404" pitchFamily="49" charset="0"/>
-              </a:rPr>
-              <a:t>": </a:t>
-            </a:r>
-            <a:r>
-              <a:rPr lang="es-ES" sz="1400" b="0" dirty="0" err="1">
-                <a:effectLst/>
-                <a:latin typeface="Courier New" panose="02070309020205020404" pitchFamily="49" charset="0"/>
-              </a:rPr>
-              <a:t>l_d</a:t>
-            </a:r>
-            <a:r>
-              <a:rPr lang="es-ES" sz="1400" b="0" dirty="0">
-                <a:effectLst/>
-                <a:latin typeface="Courier New" panose="02070309020205020404" pitchFamily="49" charset="0"/>
-              </a:rPr>
-              <a:t>, "</a:t>
-            </a:r>
-            <a:r>
-              <a:rPr lang="es-ES" sz="1400" b="0" dirty="0" err="1">
-                <a:effectLst/>
-                <a:latin typeface="Courier New" panose="02070309020205020404" pitchFamily="49" charset="0"/>
-              </a:rPr>
-              <a:t>neff</a:t>
-            </a:r>
-            <a:r>
-              <a:rPr lang="es-ES" sz="1400" b="0" dirty="0">
-                <a:effectLst/>
-                <a:latin typeface="Courier New" panose="02070309020205020404" pitchFamily="49" charset="0"/>
-              </a:rPr>
-              <a:t>": ...}, </a:t>
-            </a:r>
-          </a:p>
-          <a:p>
-            <a:pPr lvl="2">
-              <a:lnSpc>
-                <a:spcPts val="1425"/>
-              </a:lnSpc>
-            </a:pPr>
-            <a:r>
-              <a:rPr lang="es-ES" sz="1400" b="0" dirty="0">
-                <a:effectLst/>
-                <a:latin typeface="Courier New" panose="02070309020205020404" pitchFamily="49" charset="0"/>
-              </a:rPr>
-              <a:t>    </a:t>
-            </a:r>
-            <a:r>
-              <a:rPr lang="es-ES" sz="1400" b="0" dirty="0" err="1">
-                <a:effectLst/>
-                <a:latin typeface="Courier New" panose="02070309020205020404" pitchFamily="49" charset="0"/>
-              </a:rPr>
-              <a:t>wvg_u</a:t>
-            </a:r>
-            <a:r>
-              <a:rPr lang="es-ES" sz="1400" b="0" dirty="0">
-                <a:effectLst/>
-                <a:latin typeface="Courier New" panose="02070309020205020404" pitchFamily="49" charset="0"/>
-              </a:rPr>
-              <a:t>={"</a:t>
-            </a:r>
-            <a:r>
-              <a:rPr lang="es-ES" sz="1400" b="0" dirty="0" err="1">
-                <a:effectLst/>
-                <a:latin typeface="Courier New" panose="02070309020205020404" pitchFamily="49" charset="0"/>
-              </a:rPr>
-              <a:t>length</a:t>
-            </a:r>
-            <a:r>
-              <a:rPr lang="es-ES" sz="1400" b="0" dirty="0">
-                <a:effectLst/>
-                <a:latin typeface="Courier New" panose="02070309020205020404" pitchFamily="49" charset="0"/>
-              </a:rPr>
-              <a:t>": </a:t>
-            </a:r>
-            <a:r>
-              <a:rPr lang="es-ES" sz="1400" b="0" dirty="0" err="1">
-                <a:effectLst/>
-                <a:latin typeface="Courier New" panose="02070309020205020404" pitchFamily="49" charset="0"/>
-              </a:rPr>
-              <a:t>l_u</a:t>
-            </a:r>
-            <a:r>
-              <a:rPr lang="es-ES" sz="1400" b="0" dirty="0">
-                <a:effectLst/>
-                <a:latin typeface="Courier New" panose="02070309020205020404" pitchFamily="49" charset="0"/>
-              </a:rPr>
-              <a:t>, "</a:t>
-            </a:r>
-            <a:r>
-              <a:rPr lang="es-ES" sz="1400" b="0" dirty="0" err="1">
-                <a:effectLst/>
-                <a:latin typeface="Courier New" panose="02070309020205020404" pitchFamily="49" charset="0"/>
-              </a:rPr>
-              <a:t>neff</a:t>
-            </a:r>
-            <a:r>
-              <a:rPr lang="es-ES" sz="1400" b="0" dirty="0">
-                <a:effectLst/>
-                <a:latin typeface="Courier New" panose="02070309020205020404" pitchFamily="49" charset="0"/>
-              </a:rPr>
-              <a:t>": ...},</a:t>
-            </a:r>
-          </a:p>
-          <a:p>
-            <a:pPr lvl="2">
-              <a:lnSpc>
-                <a:spcPts val="1425"/>
-              </a:lnSpc>
-            </a:pPr>
-            <a:r>
-              <a:rPr lang="es-ES" sz="1400" b="0" dirty="0">
-                <a:effectLst/>
-                <a:latin typeface="Courier New" panose="02070309020205020404" pitchFamily="49" charset="0"/>
-              </a:rPr>
-              <a:t>    </a:t>
-            </a:r>
-            <a:r>
-              <a:rPr lang="es-ES" sz="1400" b="0" dirty="0" err="1">
-                <a:effectLst/>
-                <a:latin typeface="Courier New" panose="02070309020205020404" pitchFamily="49" charset="0"/>
-              </a:rPr>
-              <a:t>coup_b</a:t>
-            </a:r>
-            <a:r>
-              <a:rPr lang="es-ES" sz="1400" b="0" dirty="0">
-                <a:effectLst/>
-                <a:latin typeface="Courier New" panose="02070309020205020404" pitchFamily="49" charset="0"/>
-              </a:rPr>
-              <a:t> = ... )</a:t>
-            </a:r>
-          </a:p>
-          <a:p>
-            <a:pPr lvl="2">
-              <a:lnSpc>
-                <a:spcPts val="1425"/>
-              </a:lnSpc>
-            </a:pPr>
-            <a:br>
-              <a:rPr lang="es-ES" sz="1400" b="0" dirty="0">
-                <a:effectLst/>
-                <a:latin typeface="Courier New" panose="02070309020205020404" pitchFamily="49" charset="0"/>
-              </a:rPr>
-            </a:br>
-            <a:r>
-              <a:rPr lang="es-ES" sz="1400" b="0" dirty="0">
-                <a:effectLst/>
-                <a:latin typeface="Courier New" panose="02070309020205020404" pitchFamily="49" charset="0"/>
-              </a:rPr>
-              <a:t>    H00 = </a:t>
-            </a:r>
-            <a:r>
-              <a:rPr lang="es-ES" sz="1400" b="0" dirty="0" err="1">
-                <a:effectLst/>
-                <a:latin typeface="Courier New" panose="02070309020205020404" pitchFamily="49" charset="0"/>
-              </a:rPr>
-              <a:t>mzi_test</a:t>
-            </a:r>
-            <a:r>
-              <a:rPr lang="es-ES" sz="1400" b="0" dirty="0">
-                <a:effectLst/>
-                <a:latin typeface="Courier New" panose="02070309020205020404" pitchFamily="49" charset="0"/>
-              </a:rPr>
-              <a:t>["in0", "out0"]</a:t>
-            </a:r>
-          </a:p>
-          <a:p>
-            <a:endParaRPr lang="en-US" sz="2000" dirty="0"/>
-          </a:p>
-          <a:p>
-            <a:pPr algn="just"/>
-            <a:endParaRPr lang="en-US" sz="2000" dirty="0"/>
-          </a:p>
-          <a:p>
-            <a:pPr algn="just"/>
-            <a:endParaRPr lang="en-US" sz="2000" b="1" i="1" dirty="0"/>
-          </a:p>
-          <a:p>
-            <a:pPr algn="just"/>
-            <a:endParaRPr lang="en-US" sz="2000" kern="0" dirty="0">
-              <a:solidFill>
-                <a:sysClr val="windowText" lastClr="000000"/>
-              </a:solidFill>
-            </a:endParaRPr>
-          </a:p>
-          <a:p>
-            <a:endParaRPr lang="en-US" sz="2000" kern="0" dirty="0">
-              <a:solidFill>
-                <a:sysClr val="windowText" lastClr="000000"/>
-              </a:solidFill>
-            </a:endParaRPr>
-          </a:p>
-        </p:txBody>
-      </p:sp>
-      <p:sp>
-        <p:nvSpPr>
-          <p:cNvPr id="2" name="CuadroTexto 1">
-            <a:extLst>
-              <a:ext uri="{FF2B5EF4-FFF2-40B4-BE49-F238E27FC236}">
-                <a16:creationId xmlns:a16="http://schemas.microsoft.com/office/drawing/2014/main" id="{CA4A2D6E-5993-52B3-D251-1ADF2B0C8355}"/>
-              </a:ext>
-            </a:extLst>
-          </p:cNvPr>
-          <p:cNvSpPr txBox="1"/>
-          <p:nvPr/>
-        </p:nvSpPr>
-        <p:spPr>
-          <a:xfrm>
-            <a:off x="609441" y="4860334"/>
-            <a:ext cx="11199971" cy="1384995"/>
-          </a:xfrm>
-          <a:prstGeom prst="rect">
-            <a:avLst/>
-          </a:prstGeom>
-          <a:solidFill>
-            <a:schemeClr val="bg1">
-              <a:lumMod val="95000"/>
-            </a:schemeClr>
-          </a:solidFill>
-          <a:ln w="28575">
-            <a:solidFill>
-              <a:srgbClr val="E0700D"/>
-            </a:solidFill>
-          </a:ln>
-        </p:spPr>
-        <p:txBody>
-          <a:bodyPr wrap="square" rtlCol="0">
+          <a:bodyPr wrap="square">
             <a:spAutoFit/>
           </a:bodyPr>
           <a:lstStyle/>
           <a:p>
-            <a:pPr algn="just"/>
-            <a:r>
-              <a:rPr lang="en-US" sz="1200" dirty="0">
-                <a:latin typeface="Arial" panose="020B0604020202020204" pitchFamily="34" charset="0"/>
-                <a:cs typeface="Arial" panose="020B0604020202020204" pitchFamily="34" charset="0"/>
-              </a:rPr>
-              <a:t>Document all your results (copy here the code employed to obtain the transfer function employing SAX modeling and include the comparative plot of the models)</a:t>
-            </a:r>
-          </a:p>
-          <a:p>
-            <a:pPr algn="just"/>
-            <a:endParaRPr lang="en-US" sz="1200" dirty="0">
-              <a:latin typeface="Arial" panose="020B0604020202020204" pitchFamily="34" charset="0"/>
-              <a:cs typeface="Arial" panose="020B0604020202020204" pitchFamily="34" charset="0"/>
-            </a:endParaRPr>
-          </a:p>
-          <a:p>
-            <a:pPr algn="just"/>
-            <a:endParaRPr lang="en-US" sz="1200" dirty="0">
-              <a:latin typeface="Arial" panose="020B0604020202020204" pitchFamily="34" charset="0"/>
-              <a:cs typeface="Arial" panose="020B0604020202020204" pitchFamily="34" charset="0"/>
-            </a:endParaRPr>
-          </a:p>
-          <a:p>
-            <a:pPr algn="just"/>
-            <a:endParaRPr lang="en-US" sz="1200" dirty="0">
-              <a:latin typeface="Arial" panose="020B0604020202020204" pitchFamily="34" charset="0"/>
-              <a:cs typeface="Arial" panose="020B0604020202020204" pitchFamily="34" charset="0"/>
-            </a:endParaRPr>
-          </a:p>
-          <a:p>
-            <a:pPr algn="just"/>
-            <a:endParaRPr lang="en-US" sz="1200" dirty="0">
-              <a:latin typeface="Arial" panose="020B0604020202020204" pitchFamily="34" charset="0"/>
-              <a:cs typeface="Arial" panose="020B0604020202020204" pitchFamily="34" charset="0"/>
-            </a:endParaRPr>
-          </a:p>
-          <a:p>
-            <a:pPr algn="just"/>
-            <a:endParaRPr lang="en-US" sz="1200" dirty="0">
-              <a:latin typeface="Arial" panose="020B0604020202020204" pitchFamily="34" charset="0"/>
-              <a:cs typeface="Arial" panose="020B0604020202020204" pitchFamily="34" charset="0"/>
-            </a:endParaRPr>
-          </a:p>
-          <a:p>
-            <a:pPr algn="just"/>
-            <a:endParaRPr lang="en-US" sz="1200" dirty="0">
-              <a:latin typeface="Arial" panose="020B0604020202020204" pitchFamily="34" charset="0"/>
-              <a:cs typeface="Arial" panose="020B0604020202020204" pitchFamily="34" charset="0"/>
-            </a:endParaRPr>
-          </a:p>
-        </p:txBody>
-      </p:sp>
-      <p:sp>
-        <p:nvSpPr>
-          <p:cNvPr id="5" name="Marcador de pie de página 2">
-            <a:extLst>
-              <a:ext uri="{FF2B5EF4-FFF2-40B4-BE49-F238E27FC236}">
-                <a16:creationId xmlns:a16="http://schemas.microsoft.com/office/drawing/2014/main" id="{ED97C9D0-256C-D4CA-42E7-79330F040B30}"/>
-              </a:ext>
-            </a:extLst>
-          </p:cNvPr>
-          <p:cNvSpPr>
-            <a:spLocks noGrp="1"/>
-          </p:cNvSpPr>
-          <p:nvPr>
-            <p:ph type="ftr" sz="quarter" idx="5"/>
-          </p:nvPr>
-        </p:nvSpPr>
-        <p:spPr>
-          <a:xfrm>
-            <a:off x="609600" y="6457057"/>
-            <a:ext cx="2743200" cy="184666"/>
-          </a:xfrm>
-        </p:spPr>
-        <p:txBody>
-          <a:bodyPr/>
-          <a:lstStyle/>
-          <a:p>
-            <a:pPr marL="12700">
-              <a:spcBef>
-                <a:spcPts val="15"/>
-              </a:spcBef>
-            </a:pPr>
-            <a:r>
-              <a:rPr lang="es-ES" spc="-5"/>
-              <a:t>LAB 3. INTERFEROMETERS I</a:t>
-            </a:r>
-            <a:endParaRPr lang="es-ES" spc="-5" dirty="0"/>
+            <a:r>
+              <a:rPr lang="en-US" dirty="0"/>
+              <a:t>Al </a:t>
+            </a:r>
+            <a:r>
+              <a:rPr lang="en-US" dirty="0" err="1"/>
+              <a:t>introducir</a:t>
+            </a:r>
+            <a:r>
+              <a:rPr lang="en-US" dirty="0"/>
+              <a:t> </a:t>
+            </a:r>
+            <a:r>
+              <a:rPr lang="en-US" dirty="0" err="1"/>
+              <a:t>pérdidas</a:t>
+            </a:r>
+            <a:r>
+              <a:rPr lang="en-US" dirty="0"/>
+              <a:t>, </a:t>
+            </a:r>
+            <a:r>
+              <a:rPr lang="en-US" dirty="0" err="1"/>
+              <a:t>claramente</a:t>
+            </a:r>
+            <a:r>
+              <a:rPr lang="en-US" dirty="0"/>
+              <a:t> baja la </a:t>
+            </a:r>
+            <a:r>
+              <a:rPr lang="en-US" dirty="0" err="1"/>
+              <a:t>potencia</a:t>
+            </a:r>
+            <a:r>
+              <a:rPr lang="en-US" dirty="0"/>
+              <a:t> de </a:t>
+            </a:r>
+            <a:r>
+              <a:rPr lang="en-US" dirty="0" err="1"/>
+              <a:t>salida</a:t>
+            </a:r>
+            <a:r>
+              <a:rPr lang="en-US" dirty="0"/>
+              <a:t>,</a:t>
+            </a:r>
+          </a:p>
+          <a:p>
+            <a:r>
+              <a:rPr lang="en-US" dirty="0" err="1"/>
+              <a:t>como</a:t>
+            </a:r>
+            <a:r>
+              <a:rPr lang="en-US" dirty="0"/>
+              <a:t> Podemos </a:t>
+            </a:r>
+            <a:r>
+              <a:rPr lang="en-US" dirty="0" err="1"/>
+              <a:t>ver</a:t>
+            </a:r>
+            <a:r>
+              <a:rPr lang="en-US" dirty="0"/>
+              <a:t> </a:t>
+            </a:r>
+            <a:r>
+              <a:rPr lang="en-US" dirty="0" err="1"/>
+              <a:t>en</a:t>
+            </a:r>
+            <a:r>
+              <a:rPr lang="en-US" dirty="0"/>
+              <a:t> </a:t>
+            </a:r>
+            <a:r>
+              <a:rPr lang="en-US" dirty="0" err="1"/>
+              <a:t>el</a:t>
+            </a:r>
+            <a:r>
+              <a:rPr lang="en-US" dirty="0"/>
+              <a:t> </a:t>
+            </a:r>
+            <a:r>
+              <a:rPr lang="en-US" dirty="0" err="1"/>
+              <a:t>ejemplo</a:t>
+            </a:r>
+            <a:r>
+              <a:rPr lang="en-US" dirty="0"/>
+              <a:t> para 5um y 0.05dB/um de </a:t>
+            </a:r>
+            <a:r>
+              <a:rPr lang="en-US" dirty="0" err="1"/>
+              <a:t>pérdidas</a:t>
+            </a:r>
+            <a:r>
+              <a:rPr lang="en-US" dirty="0"/>
+              <a:t> de </a:t>
+            </a:r>
+            <a:r>
+              <a:rPr lang="en-US" dirty="0" err="1"/>
+              <a:t>propagación</a:t>
+            </a:r>
+            <a:r>
+              <a:rPr lang="en-US" dirty="0"/>
+              <a:t>. </a:t>
+            </a:r>
           </a:p>
         </p:txBody>
       </p:sp>
     </p:spTree>
     <p:extLst>
       <p:ext uri="{BB962C8B-B14F-4D97-AF65-F5344CB8AC3E}">
-        <p14:creationId xmlns:p14="http://schemas.microsoft.com/office/powerpoint/2010/main" val="3666436811"/>
+        <p14:creationId xmlns:p14="http://schemas.microsoft.com/office/powerpoint/2010/main" val="3801039725"/>
       </p:ext>
     </p:extLst>
   </p:cSld>
@@ -6267,7 +7895,7 @@
         <p:cNvPr id="1" name="">
           <a:extLst>
             <a:ext uri="{FF2B5EF4-FFF2-40B4-BE49-F238E27FC236}">
-              <a16:creationId xmlns:a16="http://schemas.microsoft.com/office/drawing/2014/main" id="{25434E70-43B1-3881-1771-20FB4358471D}"/>
+              <a16:creationId xmlns:a16="http://schemas.microsoft.com/office/drawing/2014/main" id="{E67112E3-AEBE-22EF-5A09-D974C5ABBEAC}"/>
             </a:ext>
           </a:extLst>
         </p:cNvPr>
@@ -6284,60 +7912,129 @@
       </p:grpSpPr>
       <p:sp>
         <p:nvSpPr>
-          <p:cNvPr id="16" name="object 16">
+          <p:cNvPr id="2" name="Título 1">
             <a:extLst>
               <a:ext uri="{FF2B5EF4-FFF2-40B4-BE49-F238E27FC236}">
-                <a16:creationId xmlns:a16="http://schemas.microsoft.com/office/drawing/2014/main" id="{742C31CE-19F0-B995-0997-9A2D6A879BF7}"/>
+                <a16:creationId xmlns:a16="http://schemas.microsoft.com/office/drawing/2014/main" id="{90A0F3D2-5E16-22F4-CA3C-789F09AF51B2}"/>
               </a:ext>
             </a:extLst>
           </p:cNvPr>
-          <p:cNvSpPr txBox="1">
+          <p:cNvSpPr>
             <a:spLocks noGrp="1"/>
           </p:cNvSpPr>
           <p:nvPr>
             <p:ph type="title"/>
           </p:nvPr>
         </p:nvSpPr>
-        <p:spPr>
-          <a:xfrm>
-            <a:off x="685800" y="408883"/>
-            <a:ext cx="10994410" cy="397545"/>
-          </a:xfrm>
-          <a:prstGeom prst="rect">
-            <a:avLst/>
-          </a:prstGeom>
-        </p:spPr>
-        <p:txBody>
-          <a:bodyPr vert="horz" wrap="square" lIns="0" tIns="12700" rIns="0" bIns="0" rtlCol="0">
-            <a:spAutoFit/>
-          </a:bodyPr>
+        <p:spPr/>
+        <p:txBody>
+          <a:bodyPr/>
           <a:lstStyle/>
           <a:p>
+            <a:r>
+              <a:rPr lang="es-ES" dirty="0" err="1"/>
+              <a:t>Unbalanced</a:t>
+            </a:r>
+            <a:r>
+              <a:rPr lang="es-ES" dirty="0"/>
+              <a:t> </a:t>
+            </a:r>
+            <a:r>
+              <a:rPr lang="es-ES" dirty="0" err="1"/>
+              <a:t>configuration</a:t>
+            </a:r>
+            <a:r>
+              <a:rPr lang="es-ES" dirty="0"/>
+              <a:t> –</a:t>
+            </a:r>
+            <a:r>
+              <a:rPr lang="es-ES" dirty="0" err="1"/>
+              <a:t>Phase</a:t>
+            </a:r>
+            <a:r>
+              <a:rPr lang="es-ES" dirty="0"/>
+              <a:t> </a:t>
+            </a:r>
+            <a:r>
+              <a:rPr lang="es-ES" dirty="0" err="1"/>
+              <a:t>Difference</a:t>
+            </a:r>
+            <a:r>
+              <a:rPr lang="es-ES" dirty="0"/>
+              <a:t> </a:t>
+            </a:r>
+          </a:p>
+        </p:txBody>
+      </p:sp>
+      <p:sp>
+        <p:nvSpPr>
+          <p:cNvPr id="4" name="Marcador de pie de página 3">
+            <a:extLst>
+              <a:ext uri="{FF2B5EF4-FFF2-40B4-BE49-F238E27FC236}">
+                <a16:creationId xmlns:a16="http://schemas.microsoft.com/office/drawing/2014/main" id="{CE8D12D6-BF52-CF98-5E51-73E29C4DE096}"/>
+              </a:ext>
+            </a:extLst>
+          </p:cNvPr>
+          <p:cNvSpPr>
+            <a:spLocks noGrp="1"/>
+          </p:cNvSpPr>
+          <p:nvPr>
+            <p:ph type="ftr" sz="quarter" idx="5"/>
+          </p:nvPr>
+        </p:nvSpPr>
+        <p:spPr/>
+        <p:txBody>
+          <a:bodyPr/>
+          <a:lstStyle/>
+          <a:p>
             <a:pPr marL="12700">
-              <a:lnSpc>
-                <a:spcPct val="100000"/>
-              </a:lnSpc>
               <a:spcBef>
-                <a:spcPts val="100"/>
+                <a:spcPts val="15"/>
               </a:spcBef>
             </a:pPr>
             <a:r>
-              <a:rPr lang="en-US" sz="2500" dirty="0"/>
-              <a:t>Extra assessments </a:t>
-            </a:r>
-            <a:endParaRPr lang="en-US" sz="2500" b="0" dirty="0">
-              <a:latin typeface="+mj-lt"/>
-              <a:cs typeface="Lucida Sans"/>
-            </a:endParaRPr>
+              <a:rPr lang="es-ES" spc="-5"/>
+              <a:t>LAB 3. INTERFEROMETERS I</a:t>
+            </a:r>
+            <a:endParaRPr lang="es-ES" spc="-5" dirty="0"/>
+          </a:p>
+        </p:txBody>
+      </p:sp>
+      <p:sp>
+        <p:nvSpPr>
+          <p:cNvPr id="5" name="Marcador de número de diapositiva 4">
+            <a:extLst>
+              <a:ext uri="{FF2B5EF4-FFF2-40B4-BE49-F238E27FC236}">
+                <a16:creationId xmlns:a16="http://schemas.microsoft.com/office/drawing/2014/main" id="{FCC4CFB9-8F3C-E738-5D0F-365052DF47D0}"/>
+              </a:ext>
+            </a:extLst>
+          </p:cNvPr>
+          <p:cNvSpPr>
+            <a:spLocks noGrp="1"/>
+          </p:cNvSpPr>
+          <p:nvPr>
+            <p:ph type="sldNum" sz="quarter" idx="7"/>
+          </p:nvPr>
+        </p:nvSpPr>
+        <p:spPr/>
+        <p:txBody>
+          <a:bodyPr/>
+          <a:lstStyle/>
+          <a:p>
+            <a:fld id="{B6F15528-21DE-4FAA-801E-634DDDAF4B2B}" type="slidenum">
+              <a:rPr lang="es-ES" smtClean="0"/>
+              <a:t>6</a:t>
+            </a:fld>
+            <a:endParaRPr lang="es-ES"/>
           </a:p>
         </p:txBody>
       </p:sp>
       <p:pic>
         <p:nvPicPr>
-          <p:cNvPr id="83" name="Gráfico 82">
+          <p:cNvPr id="7" name="Imagen 6">
             <a:extLst>
               <a:ext uri="{FF2B5EF4-FFF2-40B4-BE49-F238E27FC236}">
-                <a16:creationId xmlns:a16="http://schemas.microsoft.com/office/drawing/2014/main" id="{D688A609-F3DC-EE34-C536-683E70F32EAE}"/>
+                <a16:creationId xmlns:a16="http://schemas.microsoft.com/office/drawing/2014/main" id="{E6663471-EBAB-E164-7428-6C136D3ADB2E}"/>
               </a:ext>
             </a:extLst>
           </p:cNvPr>
@@ -6347,338 +8044,360 @@
           <p:nvPr/>
         </p:nvPicPr>
         <p:blipFill>
-          <a:blip r:embed="rId3">
-            <a:extLst>
-              <a:ext uri="{96DAC541-7B7A-43D3-8B79-37D633B846F1}">
-                <asvg:svgBlip xmlns:asvg="http://schemas.microsoft.com/office/drawing/2016/SVG/main" r:embed="rId4"/>
+          <a:blip r:embed="rId2">
+            <a:extLst>
+              <a:ext uri="{28A0092B-C50C-407E-A947-70E740481C1C}">
+                <a14:useLocalDpi xmlns:a14="http://schemas.microsoft.com/office/drawing/2010/main" val="0"/>
               </a:ext>
             </a:extLst>
           </a:blip>
+          <a:srcRect l="78" r="78"/>
+          <a:stretch/>
+        </p:blipFill>
+        <p:spPr>
+          <a:xfrm>
+            <a:off x="493597" y="566477"/>
+            <a:ext cx="4667901" cy="3743847"/>
+          </a:xfrm>
+          <a:prstGeom prst="rect">
+            <a:avLst/>
+          </a:prstGeom>
+        </p:spPr>
+      </p:pic>
+      <p:sp>
+        <p:nvSpPr>
+          <p:cNvPr id="9" name="CuadroTexto 8">
+            <a:extLst>
+              <a:ext uri="{FF2B5EF4-FFF2-40B4-BE49-F238E27FC236}">
+                <a16:creationId xmlns:a16="http://schemas.microsoft.com/office/drawing/2014/main" id="{EE847FBF-BE40-171E-99DB-9DDABEC42488}"/>
+              </a:ext>
+            </a:extLst>
+          </p:cNvPr>
+          <p:cNvSpPr txBox="1"/>
+          <p:nvPr/>
+        </p:nvSpPr>
+        <p:spPr>
+          <a:xfrm>
+            <a:off x="5715000" y="914400"/>
+            <a:ext cx="6128326" cy="2308324"/>
+          </a:xfrm>
+          <a:prstGeom prst="rect">
+            <a:avLst/>
+          </a:prstGeom>
+          <a:noFill/>
+        </p:spPr>
+        <p:txBody>
+          <a:bodyPr wrap="square">
+            <a:spAutoFit/>
+          </a:bodyPr>
+          <a:lstStyle/>
+          <a:p>
+            <a:r>
+              <a:rPr lang="en-US" dirty="0"/>
+              <a:t>Al </a:t>
+            </a:r>
+            <a:r>
+              <a:rPr lang="en-US" dirty="0" err="1"/>
+              <a:t>variar</a:t>
+            </a:r>
+            <a:r>
+              <a:rPr lang="en-US" dirty="0"/>
+              <a:t> </a:t>
+            </a:r>
+            <a:r>
+              <a:rPr lang="en-US" dirty="0" err="1"/>
+              <a:t>el</a:t>
+            </a:r>
+            <a:r>
+              <a:rPr lang="en-US" dirty="0"/>
+              <a:t> </a:t>
+            </a:r>
+            <a:r>
+              <a:rPr lang="en-US" dirty="0" err="1"/>
+              <a:t>índice</a:t>
+            </a:r>
+            <a:r>
+              <a:rPr lang="en-US" dirty="0"/>
+              <a:t> </a:t>
+            </a:r>
+            <a:r>
+              <a:rPr lang="en-US" dirty="0" err="1"/>
+              <a:t>efectivo</a:t>
+            </a:r>
+            <a:r>
+              <a:rPr lang="en-US" dirty="0"/>
+              <a:t>, la </a:t>
+            </a:r>
+            <a:r>
+              <a:rPr lang="en-US" dirty="0" err="1"/>
+              <a:t>propagación</a:t>
+            </a:r>
+            <a:r>
+              <a:rPr lang="en-US" dirty="0"/>
+              <a:t> varia, lo </a:t>
+            </a:r>
+            <a:r>
+              <a:rPr lang="en-US" dirty="0" err="1"/>
+              <a:t>que</a:t>
+            </a:r>
+            <a:r>
+              <a:rPr lang="en-US" dirty="0"/>
+              <a:t> da </a:t>
+            </a:r>
+            <a:r>
+              <a:rPr lang="en-US" dirty="0" err="1"/>
+              <a:t>como</a:t>
+            </a:r>
+            <a:r>
+              <a:rPr lang="en-US" dirty="0"/>
+              <a:t> </a:t>
+            </a:r>
+            <a:r>
+              <a:rPr lang="en-US" dirty="0" err="1"/>
+              <a:t>resultado</a:t>
+            </a:r>
+            <a:r>
+              <a:rPr lang="en-US" dirty="0"/>
+              <a:t>  </a:t>
+            </a:r>
+            <a:r>
+              <a:rPr lang="en-US" dirty="0" err="1"/>
+              <a:t>que</a:t>
+            </a:r>
+            <a:r>
+              <a:rPr lang="en-US" dirty="0"/>
+              <a:t> </a:t>
+            </a:r>
+            <a:r>
+              <a:rPr lang="en-US" dirty="0" err="1"/>
+              <a:t>lleguen</a:t>
+            </a:r>
+            <a:r>
+              <a:rPr lang="en-US" dirty="0"/>
+              <a:t> con </a:t>
+            </a:r>
+            <a:r>
+              <a:rPr lang="en-US" dirty="0" err="1"/>
+              <a:t>una</a:t>
+            </a:r>
+            <a:r>
+              <a:rPr lang="en-US" dirty="0"/>
+              <a:t> </a:t>
+            </a:r>
+            <a:r>
+              <a:rPr lang="en-US" dirty="0" err="1"/>
+              <a:t>fase</a:t>
+            </a:r>
+            <a:r>
+              <a:rPr lang="en-US" dirty="0"/>
+              <a:t> </a:t>
+            </a:r>
+            <a:r>
+              <a:rPr lang="en-US" dirty="0" err="1"/>
+              <a:t>distinta</a:t>
+            </a:r>
+            <a:r>
+              <a:rPr lang="en-US" dirty="0"/>
+              <a:t> a la hora de </a:t>
+            </a:r>
+            <a:r>
+              <a:rPr lang="en-US" dirty="0" err="1"/>
+              <a:t>recombinarse</a:t>
+            </a:r>
+            <a:r>
+              <a:rPr lang="en-US" dirty="0"/>
+              <a:t>. Como la </a:t>
+            </a:r>
+            <a:r>
+              <a:rPr lang="en-US" dirty="0" err="1"/>
+              <a:t>propagación</a:t>
+            </a:r>
+            <a:r>
+              <a:rPr lang="en-US" dirty="0"/>
+              <a:t> </a:t>
+            </a:r>
+            <a:r>
+              <a:rPr lang="en-US" dirty="0" err="1"/>
+              <a:t>depende</a:t>
+            </a:r>
+            <a:r>
+              <a:rPr lang="en-US" dirty="0"/>
+              <a:t> también de la longitude de </a:t>
+            </a:r>
+            <a:r>
+              <a:rPr lang="en-US" dirty="0" err="1"/>
+              <a:t>onda</a:t>
+            </a:r>
+            <a:r>
+              <a:rPr lang="en-US" dirty="0"/>
+              <a:t> Podemos </a:t>
+            </a:r>
+            <a:r>
+              <a:rPr lang="en-US" dirty="0" err="1"/>
+              <a:t>ver</a:t>
+            </a:r>
+            <a:r>
+              <a:rPr lang="en-US" dirty="0"/>
+              <a:t> </a:t>
+            </a:r>
+            <a:r>
+              <a:rPr lang="en-US" dirty="0" err="1"/>
+              <a:t>como</a:t>
+            </a:r>
+            <a:r>
+              <a:rPr lang="en-US" dirty="0"/>
+              <a:t> varia </a:t>
+            </a:r>
+            <a:r>
+              <a:rPr lang="en-US" dirty="0" err="1"/>
+              <a:t>el</a:t>
+            </a:r>
+            <a:r>
+              <a:rPr lang="en-US" dirty="0"/>
+              <a:t> cross y bar a lo largo de la </a:t>
+            </a:r>
+            <a:r>
+              <a:rPr lang="en-US" dirty="0" err="1"/>
+              <a:t>gráfica</a:t>
+            </a:r>
+            <a:r>
+              <a:rPr lang="en-US" dirty="0"/>
+              <a:t>. </a:t>
+            </a:r>
+          </a:p>
+          <a:p>
+            <a:endParaRPr lang="en-US" dirty="0"/>
+          </a:p>
+          <a:p>
+            <a:r>
+              <a:rPr lang="en-US" dirty="0"/>
+              <a:t>La </a:t>
+            </a:r>
+            <a:r>
+              <a:rPr lang="en-US" dirty="0" err="1"/>
+              <a:t>diferencia</a:t>
+            </a:r>
+            <a:r>
+              <a:rPr lang="en-US" dirty="0"/>
+              <a:t> de </a:t>
+            </a:r>
+            <a:r>
+              <a:rPr lang="en-US" dirty="0" err="1"/>
+              <a:t>indice</a:t>
+            </a:r>
+            <a:r>
+              <a:rPr lang="en-US" dirty="0"/>
+              <a:t> </a:t>
+            </a:r>
+            <a:r>
+              <a:rPr lang="en-US" dirty="0" err="1"/>
+              <a:t>efectivo</a:t>
+            </a:r>
+            <a:r>
+              <a:rPr lang="en-US" dirty="0"/>
+              <a:t> de </a:t>
+            </a:r>
+            <a:r>
+              <a:rPr lang="en-US" dirty="0" err="1"/>
+              <a:t>cada</a:t>
+            </a:r>
+            <a:r>
+              <a:rPr lang="en-US" dirty="0"/>
+              <a:t> </a:t>
+            </a:r>
+            <a:r>
+              <a:rPr lang="en-US" dirty="0" err="1"/>
+              <a:t>guia</a:t>
+            </a:r>
+            <a:r>
+              <a:rPr lang="en-US" dirty="0"/>
+              <a:t> se ha </a:t>
+            </a:r>
+            <a:r>
+              <a:rPr lang="en-US" dirty="0" err="1"/>
+              <a:t>realizado</a:t>
+            </a:r>
+            <a:endParaRPr lang="en-US" dirty="0"/>
+          </a:p>
+          <a:p>
+            <a:r>
+              <a:rPr lang="en-US" dirty="0" err="1"/>
+              <a:t>añadiéndole</a:t>
+            </a:r>
+            <a:r>
+              <a:rPr lang="en-US" dirty="0"/>
+              <a:t> un </a:t>
+            </a:r>
+            <a:r>
+              <a:rPr lang="en-US" dirty="0" err="1"/>
+              <a:t>pequeño</a:t>
+            </a:r>
+            <a:r>
+              <a:rPr lang="en-US" dirty="0"/>
+              <a:t> </a:t>
+            </a:r>
+            <a:r>
+              <a:rPr lang="en-US" dirty="0" err="1"/>
+              <a:t>incremento</a:t>
+            </a:r>
+            <a:r>
+              <a:rPr lang="en-US" dirty="0"/>
+              <a:t> a la </a:t>
+            </a:r>
+            <a:r>
+              <a:rPr lang="en-US" dirty="0" err="1"/>
+              <a:t>guia</a:t>
+            </a:r>
+            <a:r>
+              <a:rPr lang="en-US" dirty="0"/>
+              <a:t> de </a:t>
+            </a:r>
+            <a:r>
+              <a:rPr lang="en-US" dirty="0" err="1"/>
+              <a:t>abajo</a:t>
+            </a:r>
+            <a:r>
+              <a:rPr lang="en-US" dirty="0"/>
+              <a:t>.</a:t>
+            </a:r>
+            <a:endParaRPr lang="es-ES" dirty="0"/>
+          </a:p>
+        </p:txBody>
+      </p:sp>
+      <p:pic>
+        <p:nvPicPr>
+          <p:cNvPr id="6" name="Imagen 5">
+            <a:extLst>
+              <a:ext uri="{FF2B5EF4-FFF2-40B4-BE49-F238E27FC236}">
+                <a16:creationId xmlns:a16="http://schemas.microsoft.com/office/drawing/2014/main" id="{1DEEC6BB-3434-1E7E-74DD-EC9B72FF6222}"/>
+              </a:ext>
+            </a:extLst>
+          </p:cNvPr>
+          <p:cNvPicPr>
+            <a:picLocks noChangeAspect="1"/>
+          </p:cNvPicPr>
+          <p:nvPr/>
+        </p:nvPicPr>
+        <p:blipFill>
+          <a:blip r:embed="rId3"/>
           <a:stretch>
             <a:fillRect/>
           </a:stretch>
         </p:blipFill>
         <p:spPr>
           <a:xfrm>
-            <a:off x="5045006" y="6356057"/>
-            <a:ext cx="6409575" cy="363174"/>
+            <a:off x="5867400" y="3305157"/>
+            <a:ext cx="1486107" cy="247685"/>
           </a:xfrm>
           <a:prstGeom prst="rect">
             <a:avLst/>
           </a:prstGeom>
         </p:spPr>
       </p:pic>
-      <p:sp>
-        <p:nvSpPr>
-          <p:cNvPr id="84" name="Marcador de número de diapositiva 83">
-            <a:extLst>
-              <a:ext uri="{FF2B5EF4-FFF2-40B4-BE49-F238E27FC236}">
-                <a16:creationId xmlns:a16="http://schemas.microsoft.com/office/drawing/2014/main" id="{B6C672C6-89D4-7E67-2B94-811D081786A7}"/>
-              </a:ext>
-            </a:extLst>
-          </p:cNvPr>
-          <p:cNvSpPr>
-            <a:spLocks noGrp="1"/>
-          </p:cNvSpPr>
-          <p:nvPr>
-            <p:ph type="sldNum" sz="quarter" idx="7"/>
-          </p:nvPr>
-        </p:nvSpPr>
-        <p:spPr/>
-        <p:txBody>
-          <a:bodyPr/>
-          <a:lstStyle/>
-          <a:p>
-            <a:fld id="{B6F15528-21DE-4FAA-801E-634DDDAF4B2B}" type="slidenum">
-              <a:rPr lang="es-ES" smtClean="0"/>
-              <a:t>6</a:t>
-            </a:fld>
-            <a:endParaRPr lang="es-ES"/>
-          </a:p>
-        </p:txBody>
-      </p:sp>
-      <p:sp>
-        <p:nvSpPr>
-          <p:cNvPr id="4" name="Marcador de texto 2">
-            <a:extLst>
-              <a:ext uri="{FF2B5EF4-FFF2-40B4-BE49-F238E27FC236}">
-                <a16:creationId xmlns:a16="http://schemas.microsoft.com/office/drawing/2014/main" id="{D838A93A-BFC8-0124-93CE-FDC193435A0C}"/>
-              </a:ext>
-            </a:extLst>
-          </p:cNvPr>
-          <p:cNvSpPr txBox="1">
-            <a:spLocks/>
-          </p:cNvSpPr>
-          <p:nvPr/>
-        </p:nvSpPr>
-        <p:spPr>
-          <a:xfrm>
-            <a:off x="608012" y="1295400"/>
-            <a:ext cx="11048999" cy="4958137"/>
-          </a:xfrm>
-          <a:prstGeom prst="rect">
-            <a:avLst/>
-          </a:prstGeom>
-        </p:spPr>
-        <p:txBody>
-          <a:bodyPr>
-            <a:normAutofit/>
-          </a:bodyPr>
-          <a:lstStyle>
-            <a:lvl1pPr marL="0">
-              <a:defRPr>
-                <a:latin typeface="+mn-lt"/>
-                <a:ea typeface="+mn-ea"/>
-                <a:cs typeface="+mn-cs"/>
-              </a:defRPr>
-            </a:lvl1pPr>
-            <a:lvl2pPr marL="457200">
-              <a:defRPr>
-                <a:latin typeface="+mn-lt"/>
-                <a:ea typeface="+mn-ea"/>
-                <a:cs typeface="+mn-cs"/>
-              </a:defRPr>
-            </a:lvl2pPr>
-            <a:lvl3pPr marL="914400">
-              <a:defRPr>
-                <a:latin typeface="+mn-lt"/>
-                <a:ea typeface="+mn-ea"/>
-                <a:cs typeface="+mn-cs"/>
-              </a:defRPr>
-            </a:lvl3pPr>
-            <a:lvl4pPr marL="1371600">
-              <a:defRPr>
-                <a:latin typeface="+mn-lt"/>
-                <a:ea typeface="+mn-ea"/>
-                <a:cs typeface="+mn-cs"/>
-              </a:defRPr>
-            </a:lvl4pPr>
-            <a:lvl5pPr marL="1828800">
-              <a:defRPr>
-                <a:latin typeface="+mn-lt"/>
-                <a:ea typeface="+mn-ea"/>
-                <a:cs typeface="+mn-cs"/>
-              </a:defRPr>
-            </a:lvl5pPr>
-            <a:lvl6pPr marL="2286000">
-              <a:defRPr>
-                <a:latin typeface="+mn-lt"/>
-                <a:ea typeface="+mn-ea"/>
-                <a:cs typeface="+mn-cs"/>
-              </a:defRPr>
-            </a:lvl6pPr>
-            <a:lvl7pPr marL="2743200">
-              <a:defRPr>
-                <a:latin typeface="+mn-lt"/>
-                <a:ea typeface="+mn-ea"/>
-                <a:cs typeface="+mn-cs"/>
-              </a:defRPr>
-            </a:lvl7pPr>
-            <a:lvl8pPr marL="3200400">
-              <a:defRPr>
-                <a:latin typeface="+mn-lt"/>
-                <a:ea typeface="+mn-ea"/>
-                <a:cs typeface="+mn-cs"/>
-              </a:defRPr>
-            </a:lvl8pPr>
-            <a:lvl9pPr marL="3657600">
-              <a:defRPr>
-                <a:latin typeface="+mn-lt"/>
-                <a:ea typeface="+mn-ea"/>
-                <a:cs typeface="+mn-cs"/>
-              </a:defRPr>
-            </a:lvl9pPr>
-          </a:lstStyle>
-          <a:p>
-            <a:pPr marL="0" indent="0">
-              <a:buNone/>
-            </a:pPr>
-            <a:r>
-              <a:rPr lang="en-US" b="1" dirty="0"/>
-              <a:t>Assessment 4</a:t>
-            </a:r>
-            <a:r>
-              <a:rPr lang="en-US" dirty="0"/>
-              <a:t>. Design an MZI for filtering at a specific wavelength. Calculate and adjust the arm lengths to configure the MZI to have a maximum transmission at 1550 nm.</a:t>
-            </a:r>
-          </a:p>
-          <a:p>
-            <a:endParaRPr lang="en-US" b="1" dirty="0"/>
-          </a:p>
-          <a:p>
-            <a:r>
-              <a:rPr lang="en-US" b="1" dirty="0"/>
-              <a:t>Assessment 5. </a:t>
-            </a:r>
-            <a:r>
-              <a:rPr lang="en-US" dirty="0"/>
-              <a:t>Let's see how the response of the MZI varies with the effective index. Vary the effective index of one of the arms and analyze how the spectrum shifts. To do this, you can use the data provided in the .txt files entitled ‘</a:t>
-            </a:r>
-            <a:r>
-              <a:rPr lang="en-US" dirty="0" err="1"/>
-              <a:t>SiN</a:t>
-            </a:r>
-            <a:r>
-              <a:rPr lang="en-US" dirty="0"/>
-              <a:t>’. Can you give an example of an application where this configuration is used?</a:t>
-            </a:r>
-          </a:p>
-          <a:p>
-            <a:pPr marL="0" indent="0">
-              <a:buNone/>
-            </a:pPr>
-            <a:endParaRPr lang="en-US" dirty="0"/>
-          </a:p>
-          <a:p>
-            <a:r>
-              <a:rPr lang="en-US" b="1" dirty="0"/>
-              <a:t>Advanced level assessment.</a:t>
-            </a:r>
-            <a:r>
-              <a:rPr lang="en-US" dirty="0"/>
-              <a:t> Explore how cascading two MZIs affects the transmission spectrum. To do so, design a system in which two MZIs are cascaded. Simulate and observe the spectrum, explaining how the transmission peaks behave</a:t>
-            </a:r>
-            <a:r>
-              <a:rPr lang="en-US" b="1" dirty="0"/>
-              <a:t>.</a:t>
-            </a:r>
-          </a:p>
-          <a:p>
-            <a:pPr algn="just"/>
-            <a:endParaRPr lang="en-US" sz="2000" kern="0" dirty="0">
-              <a:solidFill>
-                <a:sysClr val="windowText" lastClr="000000"/>
-              </a:solidFill>
-            </a:endParaRPr>
-          </a:p>
-        </p:txBody>
-      </p:sp>
-      <p:sp>
-        <p:nvSpPr>
-          <p:cNvPr id="2" name="CuadroTexto 1">
-            <a:extLst>
-              <a:ext uri="{FF2B5EF4-FFF2-40B4-BE49-F238E27FC236}">
-                <a16:creationId xmlns:a16="http://schemas.microsoft.com/office/drawing/2014/main" id="{FDE3A197-9508-F9F1-1FEB-FF883D78C151}"/>
-              </a:ext>
-            </a:extLst>
-          </p:cNvPr>
-          <p:cNvSpPr txBox="1"/>
-          <p:nvPr/>
-        </p:nvSpPr>
-        <p:spPr>
-          <a:xfrm>
-            <a:off x="609441" y="4860334"/>
-            <a:ext cx="11199971" cy="1200329"/>
-          </a:xfrm>
-          <a:prstGeom prst="rect">
-            <a:avLst/>
-          </a:prstGeom>
-          <a:solidFill>
-            <a:schemeClr val="bg1">
-              <a:lumMod val="95000"/>
-            </a:schemeClr>
-          </a:solidFill>
-          <a:ln w="28575">
-            <a:solidFill>
-              <a:srgbClr val="E0700D"/>
-            </a:solidFill>
-          </a:ln>
-        </p:spPr>
-        <p:txBody>
-          <a:bodyPr wrap="square" rtlCol="0">
-            <a:spAutoFit/>
-          </a:bodyPr>
-          <a:lstStyle/>
-          <a:p>
-            <a:pPr algn="just"/>
-            <a:r>
-              <a:rPr lang="en-US" sz="1200" dirty="0">
-                <a:latin typeface="Arial" panose="020B0604020202020204" pitchFamily="34" charset="0"/>
-                <a:cs typeface="Arial" panose="020B0604020202020204" pitchFamily="34" charset="0"/>
-              </a:rPr>
-              <a:t>Document all your results</a:t>
-            </a:r>
-          </a:p>
-          <a:p>
-            <a:pPr algn="just"/>
-            <a:endParaRPr lang="en-US" sz="1200" dirty="0">
-              <a:latin typeface="Arial" panose="020B0604020202020204" pitchFamily="34" charset="0"/>
-              <a:cs typeface="Arial" panose="020B0604020202020204" pitchFamily="34" charset="0"/>
-            </a:endParaRPr>
-          </a:p>
-          <a:p>
-            <a:pPr algn="just"/>
-            <a:endParaRPr lang="en-US" sz="1200" dirty="0">
-              <a:latin typeface="Arial" panose="020B0604020202020204" pitchFamily="34" charset="0"/>
-              <a:cs typeface="Arial" panose="020B0604020202020204" pitchFamily="34" charset="0"/>
-            </a:endParaRPr>
-          </a:p>
-          <a:p>
-            <a:pPr algn="just"/>
-            <a:endParaRPr lang="en-US" sz="1200" dirty="0">
-              <a:latin typeface="Arial" panose="020B0604020202020204" pitchFamily="34" charset="0"/>
-              <a:cs typeface="Arial" panose="020B0604020202020204" pitchFamily="34" charset="0"/>
-            </a:endParaRPr>
-          </a:p>
-          <a:p>
-            <a:pPr algn="just"/>
-            <a:endParaRPr lang="en-US" sz="1200" dirty="0">
-              <a:latin typeface="Arial" panose="020B0604020202020204" pitchFamily="34" charset="0"/>
-              <a:cs typeface="Arial" panose="020B0604020202020204" pitchFamily="34" charset="0"/>
-            </a:endParaRPr>
-          </a:p>
-          <a:p>
-            <a:pPr algn="just"/>
-            <a:endParaRPr lang="en-US" sz="1200" dirty="0">
-              <a:latin typeface="Arial" panose="020B0604020202020204" pitchFamily="34" charset="0"/>
-              <a:cs typeface="Arial" panose="020B0604020202020204" pitchFamily="34" charset="0"/>
-            </a:endParaRPr>
-          </a:p>
-        </p:txBody>
-      </p:sp>
-      <p:sp>
-        <p:nvSpPr>
-          <p:cNvPr id="6" name="Marcador de pie de página 2">
-            <a:extLst>
-              <a:ext uri="{FF2B5EF4-FFF2-40B4-BE49-F238E27FC236}">
-                <a16:creationId xmlns:a16="http://schemas.microsoft.com/office/drawing/2014/main" id="{04C1A7E9-6C33-172D-E7B9-CCF643221E6A}"/>
-              </a:ext>
-            </a:extLst>
-          </p:cNvPr>
-          <p:cNvSpPr>
-            <a:spLocks noGrp="1"/>
-          </p:cNvSpPr>
-          <p:nvPr>
-            <p:ph type="ftr" sz="quarter" idx="5"/>
-          </p:nvPr>
-        </p:nvSpPr>
-        <p:spPr>
-          <a:xfrm>
-            <a:off x="609600" y="6457057"/>
-            <a:ext cx="2743200" cy="184666"/>
-          </a:xfrm>
-        </p:spPr>
-        <p:txBody>
-          <a:bodyPr/>
-          <a:lstStyle/>
-          <a:p>
-            <a:pPr marL="12700">
-              <a:spcBef>
-                <a:spcPts val="15"/>
-              </a:spcBef>
-            </a:pPr>
-            <a:r>
-              <a:rPr lang="es-ES" spc="-5"/>
-              <a:t>LAB 3. INTERFEROMETERS I</a:t>
-            </a:r>
-            <a:endParaRPr lang="es-ES" spc="-5" dirty="0"/>
-          </a:p>
-        </p:txBody>
-      </p:sp>
     </p:spTree>
     <p:extLst>
       <p:ext uri="{BB962C8B-B14F-4D97-AF65-F5344CB8AC3E}">
-        <p14:creationId xmlns:p14="http://schemas.microsoft.com/office/powerpoint/2010/main" val="3660438245"/>
+        <p14:creationId xmlns:p14="http://schemas.microsoft.com/office/powerpoint/2010/main" val="2634296557"/>
       </p:ext>
     </p:extLst>
   </p:cSld>
@@ -6693,7 +8412,13 @@
   <p:cSld>
     <p:spTree>
       <p:nvGrpSpPr>
-        <p:cNvPr id="1" name=""/>
+        <p:cNvPr id="1" name="">
+          <a:extLst>
+            <a:ext uri="{FF2B5EF4-FFF2-40B4-BE49-F238E27FC236}">
+              <a16:creationId xmlns:a16="http://schemas.microsoft.com/office/drawing/2014/main" id="{34CE9F6C-0F5A-388E-D312-EAB4868C7FF5}"/>
+            </a:ext>
+          </a:extLst>
+        </p:cNvPr>
         <p:cNvGrpSpPr/>
         <p:nvPr/>
       </p:nvGrpSpPr>
@@ -6707,100 +8432,91 @@
       </p:grpSpPr>
       <p:sp>
         <p:nvSpPr>
-          <p:cNvPr id="3" name="object 3"/>
-          <p:cNvSpPr/>
-          <p:nvPr/>
-        </p:nvSpPr>
-        <p:spPr>
-          <a:xfrm>
-            <a:off x="3945635" y="2636520"/>
-            <a:ext cx="8246363" cy="1584959"/>
-          </a:xfrm>
-          <a:prstGeom prst="rect">
-            <a:avLst/>
-          </a:prstGeom>
-          <a:blipFill>
-            <a:blip r:embed="rId2" cstate="print"/>
-            <a:stretch>
-              <a:fillRect/>
-            </a:stretch>
-          </a:blipFill>
-        </p:spPr>
-        <p:txBody>
-          <a:bodyPr wrap="square" lIns="0" tIns="0" rIns="0" bIns="0" rtlCol="0"/>
-          <a:lstStyle/>
-          <a:p>
-            <a:endParaRPr/>
-          </a:p>
-        </p:txBody>
-      </p:sp>
-      <p:sp>
-        <p:nvSpPr>
-          <p:cNvPr id="4" name="object 4"/>
-          <p:cNvSpPr txBox="1">
+          <p:cNvPr id="2" name="Título 1">
+            <a:extLst>
+              <a:ext uri="{FF2B5EF4-FFF2-40B4-BE49-F238E27FC236}">
+                <a16:creationId xmlns:a16="http://schemas.microsoft.com/office/drawing/2014/main" id="{358E604A-5803-8D4B-D935-E9F91CFA27DF}"/>
+              </a:ext>
+            </a:extLst>
+          </p:cNvPr>
+          <p:cNvSpPr>
             <a:spLocks noGrp="1"/>
           </p:cNvSpPr>
           <p:nvPr>
             <p:ph type="title"/>
           </p:nvPr>
         </p:nvSpPr>
-        <p:spPr>
-          <a:xfrm>
-            <a:off x="4513326" y="3165729"/>
-            <a:ext cx="2233295" cy="513715"/>
-          </a:xfrm>
-          <a:prstGeom prst="rect">
-            <a:avLst/>
-          </a:prstGeom>
-        </p:spPr>
-        <p:txBody>
-          <a:bodyPr vert="horz" wrap="square" lIns="0" tIns="13335" rIns="0" bIns="0" rtlCol="0">
-            <a:spAutoFit/>
-          </a:bodyPr>
+        <p:spPr/>
+        <p:txBody>
+          <a:bodyPr/>
           <a:lstStyle/>
           <a:p>
+            <a:r>
+              <a:rPr lang="es-ES" dirty="0" err="1"/>
+              <a:t>Unbalanced</a:t>
+            </a:r>
+            <a:r>
+              <a:rPr lang="es-ES" dirty="0"/>
+              <a:t> </a:t>
+            </a:r>
+            <a:r>
+              <a:rPr lang="es-ES" dirty="0" err="1"/>
+              <a:t>configuration</a:t>
+            </a:r>
+            <a:r>
+              <a:rPr lang="es-ES" dirty="0"/>
+              <a:t> –</a:t>
+            </a:r>
+            <a:r>
+              <a:rPr lang="es-ES" dirty="0" err="1"/>
+              <a:t>Phase</a:t>
+            </a:r>
+            <a:r>
+              <a:rPr lang="es-ES" dirty="0"/>
+              <a:t> </a:t>
+            </a:r>
+            <a:r>
+              <a:rPr lang="es-ES" dirty="0" err="1"/>
+              <a:t>Difference</a:t>
+            </a:r>
+            <a:r>
+              <a:rPr lang="es-ES" dirty="0"/>
+              <a:t> – pérdidas por exceso de 0.075 </a:t>
+            </a:r>
+          </a:p>
+        </p:txBody>
+      </p:sp>
+      <p:sp>
+        <p:nvSpPr>
+          <p:cNvPr id="4" name="Marcador de pie de página 3">
+            <a:extLst>
+              <a:ext uri="{FF2B5EF4-FFF2-40B4-BE49-F238E27FC236}">
+                <a16:creationId xmlns:a16="http://schemas.microsoft.com/office/drawing/2014/main" id="{4C6B85E9-AD4C-6177-A25C-27E82FE225E6}"/>
+              </a:ext>
+            </a:extLst>
+          </p:cNvPr>
+          <p:cNvSpPr>
+            <a:spLocks noGrp="1"/>
+          </p:cNvSpPr>
+          <p:nvPr>
+            <p:ph type="ftr" sz="quarter" idx="5"/>
+          </p:nvPr>
+        </p:nvSpPr>
+        <p:spPr/>
+        <p:txBody>
+          <a:bodyPr/>
+          <a:lstStyle/>
+          <a:p>
             <a:pPr marL="12700">
-              <a:lnSpc>
-                <a:spcPct val="100000"/>
-              </a:lnSpc>
               <a:spcBef>
-                <a:spcPts val="105"/>
+                <a:spcPts val="15"/>
               </a:spcBef>
             </a:pPr>
             <a:r>
-              <a:rPr sz="3200" b="1" spc="-5" dirty="0">
-                <a:solidFill>
-                  <a:srgbClr val="FFFFFF"/>
-                </a:solidFill>
-                <a:latin typeface="Lucida Sans"/>
-                <a:cs typeface="Lucida Sans"/>
-              </a:rPr>
-              <a:t>Thank</a:t>
-            </a:r>
-            <a:r>
-              <a:rPr sz="3200" b="1" spc="-55" dirty="0">
-                <a:solidFill>
-                  <a:srgbClr val="FFFFFF"/>
-                </a:solidFill>
-                <a:latin typeface="Lucida Sans"/>
-                <a:cs typeface="Lucida Sans"/>
-              </a:rPr>
-              <a:t> </a:t>
-            </a:r>
-            <a:r>
-              <a:rPr sz="3200" b="1" dirty="0">
-                <a:solidFill>
-                  <a:srgbClr val="FFFFFF"/>
-                </a:solidFill>
-                <a:latin typeface="Lucida Sans"/>
-                <a:cs typeface="Lucida Sans"/>
-              </a:rPr>
-              <a:t>you</a:t>
-            </a:r>
-            <a:endParaRPr sz="3200">
-              <a:latin typeface="Lucida Sans"/>
-              <a:cs typeface="Lucida Sans"/>
-            </a:endParaRPr>
+              <a:rPr lang="es-ES" spc="-5"/>
+              <a:t>LAB 3. INTERFEROMETERS I</a:t>
+            </a:r>
+            <a:endParaRPr lang="es-ES" spc="-5" dirty="0"/>
           </a:p>
         </p:txBody>
       </p:sp>
@@ -6809,7 +8525,7 @@
           <p:cNvPr id="5" name="Marcador de número de diapositiva 4">
             <a:extLst>
               <a:ext uri="{FF2B5EF4-FFF2-40B4-BE49-F238E27FC236}">
-                <a16:creationId xmlns:a16="http://schemas.microsoft.com/office/drawing/2014/main" id="{B052DA19-AD24-7D24-2AE9-51F8F5A7F5E0}"/>
+                <a16:creationId xmlns:a16="http://schemas.microsoft.com/office/drawing/2014/main" id="{0EE06614-8978-A986-9FDD-E1FA701274A2}"/>
               </a:ext>
             </a:extLst>
           </p:cNvPr>
@@ -6833,7 +8549,777 @@
           </a:p>
         </p:txBody>
       </p:sp>
+      <p:pic>
+        <p:nvPicPr>
+          <p:cNvPr id="7" name="Imagen 6">
+            <a:extLst>
+              <a:ext uri="{FF2B5EF4-FFF2-40B4-BE49-F238E27FC236}">
+                <a16:creationId xmlns:a16="http://schemas.microsoft.com/office/drawing/2014/main" id="{19AE03EC-DAAF-758E-E062-E2E857672B14}"/>
+              </a:ext>
+            </a:extLst>
+          </p:cNvPr>
+          <p:cNvPicPr>
+            <a:picLocks noChangeAspect="1"/>
+          </p:cNvPicPr>
+          <p:nvPr/>
+        </p:nvPicPr>
+        <p:blipFill>
+          <a:blip r:embed="rId2">
+            <a:extLst>
+              <a:ext uri="{28A0092B-C50C-407E-A947-70E740481C1C}">
+                <a14:useLocalDpi xmlns:a14="http://schemas.microsoft.com/office/drawing/2010/main" val="0"/>
+              </a:ext>
+            </a:extLst>
+          </a:blip>
+          <a:srcRect l="1071" r="1071"/>
+          <a:stretch/>
+        </p:blipFill>
+        <p:spPr>
+          <a:xfrm>
+            <a:off x="590550" y="422560"/>
+            <a:ext cx="3352800" cy="2689082"/>
+          </a:xfrm>
+          <a:prstGeom prst="rect">
+            <a:avLst/>
+          </a:prstGeom>
+        </p:spPr>
+      </p:pic>
+      <p:pic>
+        <p:nvPicPr>
+          <p:cNvPr id="11" name="Imagen 10" descr="Gráfico, Gráfico de líneas&#10;&#10;El contenido generado por IA puede ser incorrecto.">
+            <a:extLst>
+              <a:ext uri="{FF2B5EF4-FFF2-40B4-BE49-F238E27FC236}">
+                <a16:creationId xmlns:a16="http://schemas.microsoft.com/office/drawing/2014/main" id="{0DAAE265-FF7B-996E-169A-FA45701F2F24}"/>
+              </a:ext>
+            </a:extLst>
+          </p:cNvPr>
+          <p:cNvPicPr>
+            <a:picLocks noChangeAspect="1"/>
+          </p:cNvPicPr>
+          <p:nvPr/>
+        </p:nvPicPr>
+        <p:blipFill>
+          <a:blip r:embed="rId3"/>
+          <a:stretch>
+            <a:fillRect/>
+          </a:stretch>
+        </p:blipFill>
+        <p:spPr>
+          <a:xfrm>
+            <a:off x="641927" y="3111642"/>
+            <a:ext cx="3352800" cy="2606987"/>
+          </a:xfrm>
+          <a:prstGeom prst="rect">
+            <a:avLst/>
+          </a:prstGeom>
+        </p:spPr>
+      </p:pic>
+      <p:sp>
+        <p:nvSpPr>
+          <p:cNvPr id="13" name="CuadroTexto 12">
+            <a:extLst>
+              <a:ext uri="{FF2B5EF4-FFF2-40B4-BE49-F238E27FC236}">
+                <a16:creationId xmlns:a16="http://schemas.microsoft.com/office/drawing/2014/main" id="{9D539EEC-CC73-CA99-8225-EC5B6D142530}"/>
+              </a:ext>
+            </a:extLst>
+          </p:cNvPr>
+          <p:cNvSpPr txBox="1"/>
+          <p:nvPr/>
+        </p:nvSpPr>
+        <p:spPr>
+          <a:xfrm>
+            <a:off x="4596939" y="2497520"/>
+            <a:ext cx="6128326" cy="646331"/>
+          </a:xfrm>
+          <a:prstGeom prst="rect">
+            <a:avLst/>
+          </a:prstGeom>
+          <a:noFill/>
+        </p:spPr>
+        <p:txBody>
+          <a:bodyPr wrap="square">
+            <a:spAutoFit/>
+          </a:bodyPr>
+          <a:lstStyle/>
+          <a:p>
+            <a:r>
+              <a:rPr lang="en-US" dirty="0" err="1"/>
+              <a:t>Variando</a:t>
+            </a:r>
+            <a:r>
+              <a:rPr lang="en-US" dirty="0"/>
+              <a:t> las </a:t>
+            </a:r>
+            <a:r>
+              <a:rPr lang="en-US" dirty="0" err="1"/>
+              <a:t>pérdidas</a:t>
+            </a:r>
+            <a:r>
+              <a:rPr lang="en-US" dirty="0"/>
+              <a:t> de </a:t>
+            </a:r>
+            <a:r>
+              <a:rPr lang="en-US" dirty="0" err="1"/>
+              <a:t>exceso</a:t>
+            </a:r>
+            <a:r>
+              <a:rPr lang="en-US" dirty="0"/>
+              <a:t>, entre 0.05 y 0.1 </a:t>
+            </a:r>
+            <a:r>
+              <a:rPr lang="en-US" dirty="0" err="1"/>
+              <a:t>vemos</a:t>
+            </a:r>
+            <a:r>
+              <a:rPr lang="en-US" dirty="0"/>
+              <a:t> </a:t>
+            </a:r>
+            <a:r>
+              <a:rPr lang="en-US" dirty="0" err="1"/>
+              <a:t>que</a:t>
+            </a:r>
+            <a:r>
+              <a:rPr lang="en-US" dirty="0"/>
+              <a:t> la </a:t>
+            </a:r>
+            <a:r>
+              <a:rPr lang="en-US" dirty="0" err="1"/>
+              <a:t>potencia</a:t>
+            </a:r>
+            <a:r>
+              <a:rPr lang="en-US" dirty="0"/>
+              <a:t> de </a:t>
+            </a:r>
+            <a:r>
+              <a:rPr lang="en-US" dirty="0" err="1"/>
+              <a:t>salida</a:t>
+            </a:r>
+            <a:r>
+              <a:rPr lang="en-US" dirty="0"/>
+              <a:t> </a:t>
+            </a:r>
+            <a:r>
+              <a:rPr lang="en-US" dirty="0" err="1"/>
+              <a:t>va</a:t>
+            </a:r>
+            <a:r>
+              <a:rPr lang="en-US" dirty="0"/>
+              <a:t> </a:t>
+            </a:r>
+            <a:r>
+              <a:rPr lang="en-US" dirty="0" err="1"/>
+              <a:t>dejadno</a:t>
+            </a:r>
+            <a:r>
+              <a:rPr lang="en-US" dirty="0"/>
+              <a:t> de </a:t>
+            </a:r>
+            <a:r>
+              <a:rPr lang="en-US" dirty="0" err="1"/>
+              <a:t>sumar</a:t>
+            </a:r>
+            <a:r>
+              <a:rPr lang="en-US" dirty="0"/>
+              <a:t> 1.</a:t>
+            </a:r>
+            <a:endParaRPr lang="es-ES" dirty="0"/>
+          </a:p>
+        </p:txBody>
+      </p:sp>
     </p:spTree>
+    <p:extLst>
+      <p:ext uri="{BB962C8B-B14F-4D97-AF65-F5344CB8AC3E}">
+        <p14:creationId xmlns:p14="http://schemas.microsoft.com/office/powerpoint/2010/main" val="2353261971"/>
+      </p:ext>
+    </p:extLst>
+  </p:cSld>
+  <p:clrMapOvr>
+    <a:masterClrMapping/>
+  </p:clrMapOvr>
+</p:sld>
+</file>
+
+<file path=ppt/slides/slide8.xml><?xml version="1.0" encoding="utf-8"?>
+<p:sld xmlns:a="http://schemas.openxmlformats.org/drawingml/2006/main" xmlns:r="http://schemas.openxmlformats.org/officeDocument/2006/relationships" xmlns:p="http://schemas.openxmlformats.org/presentationml/2006/main">
+  <p:cSld>
+    <p:spTree>
+      <p:nvGrpSpPr>
+        <p:cNvPr id="1" name="">
+          <a:extLst>
+            <a:ext uri="{FF2B5EF4-FFF2-40B4-BE49-F238E27FC236}">
+              <a16:creationId xmlns:a16="http://schemas.microsoft.com/office/drawing/2014/main" id="{9E3A11A2-9800-5184-C93E-0AFF72785D49}"/>
+            </a:ext>
+          </a:extLst>
+        </p:cNvPr>
+        <p:cNvGrpSpPr/>
+        <p:nvPr/>
+      </p:nvGrpSpPr>
+      <p:grpSpPr>
+        <a:xfrm>
+          <a:off x="0" y="0"/>
+          <a:ext cx="0" cy="0"/>
+          <a:chOff x="0" y="0"/>
+          <a:chExt cx="0" cy="0"/>
+        </a:xfrm>
+      </p:grpSpPr>
+      <p:sp>
+        <p:nvSpPr>
+          <p:cNvPr id="2" name="Título 1">
+            <a:extLst>
+              <a:ext uri="{FF2B5EF4-FFF2-40B4-BE49-F238E27FC236}">
+                <a16:creationId xmlns:a16="http://schemas.microsoft.com/office/drawing/2014/main" id="{FDD0E60C-D7A4-8418-D3F2-53ABA10FF7DB}"/>
+              </a:ext>
+            </a:extLst>
+          </p:cNvPr>
+          <p:cNvSpPr>
+            <a:spLocks noGrp="1"/>
+          </p:cNvSpPr>
+          <p:nvPr>
+            <p:ph type="title"/>
+          </p:nvPr>
+        </p:nvSpPr>
+        <p:spPr/>
+        <p:txBody>
+          <a:bodyPr/>
+          <a:lstStyle/>
+          <a:p>
+            <a:r>
+              <a:rPr lang="es-ES" dirty="0" err="1"/>
+              <a:t>Unbalanced</a:t>
+            </a:r>
+            <a:r>
+              <a:rPr lang="es-ES" dirty="0"/>
+              <a:t> </a:t>
+            </a:r>
+            <a:r>
+              <a:rPr lang="es-ES" dirty="0" err="1"/>
+              <a:t>configuration</a:t>
+            </a:r>
+            <a:r>
+              <a:rPr lang="es-ES" dirty="0"/>
+              <a:t> –</a:t>
+            </a:r>
+            <a:r>
+              <a:rPr lang="es-ES" dirty="0" err="1"/>
+              <a:t>Delay</a:t>
+            </a:r>
+            <a:r>
+              <a:rPr lang="es-ES" dirty="0"/>
+              <a:t> </a:t>
+            </a:r>
+          </a:p>
+        </p:txBody>
+      </p:sp>
+      <p:sp>
+        <p:nvSpPr>
+          <p:cNvPr id="4" name="Marcador de pie de página 3">
+            <a:extLst>
+              <a:ext uri="{FF2B5EF4-FFF2-40B4-BE49-F238E27FC236}">
+                <a16:creationId xmlns:a16="http://schemas.microsoft.com/office/drawing/2014/main" id="{540CF40C-4100-3EFB-3E58-D0A221370D71}"/>
+              </a:ext>
+            </a:extLst>
+          </p:cNvPr>
+          <p:cNvSpPr>
+            <a:spLocks noGrp="1"/>
+          </p:cNvSpPr>
+          <p:nvPr>
+            <p:ph type="ftr" sz="quarter" idx="5"/>
+          </p:nvPr>
+        </p:nvSpPr>
+        <p:spPr/>
+        <p:txBody>
+          <a:bodyPr/>
+          <a:lstStyle/>
+          <a:p>
+            <a:pPr marL="12700">
+              <a:spcBef>
+                <a:spcPts val="15"/>
+              </a:spcBef>
+            </a:pPr>
+            <a:r>
+              <a:rPr lang="es-ES" spc="-5"/>
+              <a:t>LAB 3. INTERFEROMETERS I</a:t>
+            </a:r>
+            <a:endParaRPr lang="es-ES" spc="-5" dirty="0"/>
+          </a:p>
+        </p:txBody>
+      </p:sp>
+      <p:sp>
+        <p:nvSpPr>
+          <p:cNvPr id="5" name="Marcador de número de diapositiva 4">
+            <a:extLst>
+              <a:ext uri="{FF2B5EF4-FFF2-40B4-BE49-F238E27FC236}">
+                <a16:creationId xmlns:a16="http://schemas.microsoft.com/office/drawing/2014/main" id="{4E2E78C5-06C4-76CD-5975-2D5D7E27CBD5}"/>
+              </a:ext>
+            </a:extLst>
+          </p:cNvPr>
+          <p:cNvSpPr>
+            <a:spLocks noGrp="1"/>
+          </p:cNvSpPr>
+          <p:nvPr>
+            <p:ph type="sldNum" sz="quarter" idx="7"/>
+          </p:nvPr>
+        </p:nvSpPr>
+        <p:spPr/>
+        <p:txBody>
+          <a:bodyPr/>
+          <a:lstStyle/>
+          <a:p>
+            <a:fld id="{B6F15528-21DE-4FAA-801E-634DDDAF4B2B}" type="slidenum">
+              <a:rPr lang="es-ES" smtClean="0"/>
+              <a:t>8</a:t>
+            </a:fld>
+            <a:endParaRPr lang="es-ES"/>
+          </a:p>
+        </p:txBody>
+      </p:sp>
+      <p:pic>
+        <p:nvPicPr>
+          <p:cNvPr id="7" name="Imagen 6">
+            <a:extLst>
+              <a:ext uri="{FF2B5EF4-FFF2-40B4-BE49-F238E27FC236}">
+                <a16:creationId xmlns:a16="http://schemas.microsoft.com/office/drawing/2014/main" id="{46EDE371-EA75-D526-7875-513F25764F73}"/>
+              </a:ext>
+            </a:extLst>
+          </p:cNvPr>
+          <p:cNvPicPr>
+            <a:picLocks noChangeAspect="1"/>
+          </p:cNvPicPr>
+          <p:nvPr/>
+        </p:nvPicPr>
+        <p:blipFill>
+          <a:blip r:embed="rId2">
+            <a:extLst>
+              <a:ext uri="{28A0092B-C50C-407E-A947-70E740481C1C}">
+                <a14:useLocalDpi xmlns:a14="http://schemas.microsoft.com/office/drawing/2010/main" val="0"/>
+              </a:ext>
+            </a:extLst>
+          </a:blip>
+          <a:srcRect l="153" r="153"/>
+          <a:stretch/>
+        </p:blipFill>
+        <p:spPr>
+          <a:xfrm>
+            <a:off x="493597" y="566477"/>
+            <a:ext cx="4667901" cy="3743847"/>
+          </a:xfrm>
+          <a:prstGeom prst="rect">
+            <a:avLst/>
+          </a:prstGeom>
+        </p:spPr>
+      </p:pic>
+      <p:sp>
+        <p:nvSpPr>
+          <p:cNvPr id="9" name="CuadroTexto 8">
+            <a:extLst>
+              <a:ext uri="{FF2B5EF4-FFF2-40B4-BE49-F238E27FC236}">
+                <a16:creationId xmlns:a16="http://schemas.microsoft.com/office/drawing/2014/main" id="{C0574A49-D754-68D7-4EED-2B33987C76AA}"/>
+              </a:ext>
+            </a:extLst>
+          </p:cNvPr>
+          <p:cNvSpPr txBox="1"/>
+          <p:nvPr/>
+        </p:nvSpPr>
+        <p:spPr>
+          <a:xfrm>
+            <a:off x="5715000" y="914400"/>
+            <a:ext cx="6128326" cy="923330"/>
+          </a:xfrm>
+          <a:prstGeom prst="rect">
+            <a:avLst/>
+          </a:prstGeom>
+          <a:noFill/>
+        </p:spPr>
+        <p:txBody>
+          <a:bodyPr wrap="square">
+            <a:spAutoFit/>
+          </a:bodyPr>
+          <a:lstStyle/>
+          <a:p>
+            <a:r>
+              <a:rPr lang="en-US" dirty="0"/>
+              <a:t>Al </a:t>
+            </a:r>
+            <a:r>
+              <a:rPr lang="en-US" dirty="0" err="1"/>
+              <a:t>tener</a:t>
+            </a:r>
+            <a:r>
+              <a:rPr lang="en-US" dirty="0"/>
+              <a:t> </a:t>
+            </a:r>
+            <a:r>
+              <a:rPr lang="en-US" dirty="0" err="1"/>
+              <a:t>los</a:t>
+            </a:r>
+            <a:r>
+              <a:rPr lang="en-US" dirty="0"/>
+              <a:t> dos </a:t>
+            </a:r>
+            <a:r>
+              <a:rPr lang="en-US" dirty="0" err="1"/>
+              <a:t>brazos</a:t>
+            </a:r>
+            <a:r>
+              <a:rPr lang="en-US" dirty="0"/>
+              <a:t> las </a:t>
+            </a:r>
+            <a:r>
+              <a:rPr lang="en-US" dirty="0" err="1"/>
+              <a:t>mismas</a:t>
+            </a:r>
+            <a:r>
+              <a:rPr lang="en-US" dirty="0"/>
+              <a:t> </a:t>
+            </a:r>
+            <a:r>
+              <a:rPr lang="en-US" dirty="0" err="1"/>
+              <a:t>propiedades</a:t>
+            </a:r>
+            <a:r>
+              <a:rPr lang="en-US" dirty="0"/>
+              <a:t> </a:t>
+            </a:r>
+            <a:r>
+              <a:rPr lang="en-US" dirty="0" err="1"/>
+              <a:t>pero</a:t>
+            </a:r>
+            <a:r>
+              <a:rPr lang="en-US" dirty="0"/>
+              <a:t> caminos con </a:t>
+            </a:r>
+            <a:r>
+              <a:rPr lang="en-US" dirty="0" err="1"/>
+              <a:t>distintas</a:t>
+            </a:r>
+            <a:r>
+              <a:rPr lang="en-US" dirty="0"/>
+              <a:t> longitudes </a:t>
+            </a:r>
+            <a:r>
+              <a:rPr lang="en-US" dirty="0" err="1"/>
+              <a:t>provoca</a:t>
+            </a:r>
+            <a:r>
+              <a:rPr lang="en-US" dirty="0"/>
+              <a:t> también </a:t>
+            </a:r>
+            <a:r>
+              <a:rPr lang="en-US" dirty="0" err="1"/>
+              <a:t>que</a:t>
+            </a:r>
+            <a:r>
+              <a:rPr lang="en-US" dirty="0"/>
+              <a:t> se </a:t>
+            </a:r>
+            <a:r>
+              <a:rPr lang="en-US" dirty="0" err="1"/>
+              <a:t>recombinen</a:t>
+            </a:r>
+            <a:r>
+              <a:rPr lang="en-US" dirty="0"/>
+              <a:t> con </a:t>
+            </a:r>
+            <a:r>
+              <a:rPr lang="en-US" dirty="0" err="1"/>
+              <a:t>fases</a:t>
+            </a:r>
+            <a:r>
+              <a:rPr lang="en-US" dirty="0"/>
+              <a:t> </a:t>
+            </a:r>
+            <a:r>
+              <a:rPr lang="en-US" dirty="0" err="1"/>
+              <a:t>distintas</a:t>
+            </a:r>
+            <a:r>
+              <a:rPr lang="en-US" dirty="0"/>
+              <a:t>.</a:t>
+            </a:r>
+            <a:endParaRPr lang="es-ES" dirty="0"/>
+          </a:p>
+        </p:txBody>
+      </p:sp>
+    </p:spTree>
+    <p:extLst>
+      <p:ext uri="{BB962C8B-B14F-4D97-AF65-F5344CB8AC3E}">
+        <p14:creationId xmlns:p14="http://schemas.microsoft.com/office/powerpoint/2010/main" val="2985386375"/>
+      </p:ext>
+    </p:extLst>
+  </p:cSld>
+  <p:clrMapOvr>
+    <a:masterClrMapping/>
+  </p:clrMapOvr>
+</p:sld>
+</file>
+
+<file path=ppt/slides/slide9.xml><?xml version="1.0" encoding="utf-8"?>
+<p:sld xmlns:a="http://schemas.openxmlformats.org/drawingml/2006/main" xmlns:r="http://schemas.openxmlformats.org/officeDocument/2006/relationships" xmlns:p="http://schemas.openxmlformats.org/presentationml/2006/main">
+  <p:cSld>
+    <p:spTree>
+      <p:nvGrpSpPr>
+        <p:cNvPr id="1" name="">
+          <a:extLst>
+            <a:ext uri="{FF2B5EF4-FFF2-40B4-BE49-F238E27FC236}">
+              <a16:creationId xmlns:a16="http://schemas.microsoft.com/office/drawing/2014/main" id="{2FAAF435-7036-2DE9-80B7-3A8B0D151639}"/>
+            </a:ext>
+          </a:extLst>
+        </p:cNvPr>
+        <p:cNvGrpSpPr/>
+        <p:nvPr/>
+      </p:nvGrpSpPr>
+      <p:grpSpPr>
+        <a:xfrm>
+          <a:off x="0" y="0"/>
+          <a:ext cx="0" cy="0"/>
+          <a:chOff x="0" y="0"/>
+          <a:chExt cx="0" cy="0"/>
+        </a:xfrm>
+      </p:grpSpPr>
+      <p:sp>
+        <p:nvSpPr>
+          <p:cNvPr id="2" name="Título 1">
+            <a:extLst>
+              <a:ext uri="{FF2B5EF4-FFF2-40B4-BE49-F238E27FC236}">
+                <a16:creationId xmlns:a16="http://schemas.microsoft.com/office/drawing/2014/main" id="{690A3F34-B253-FC63-847E-768C6A58BAA4}"/>
+              </a:ext>
+            </a:extLst>
+          </p:cNvPr>
+          <p:cNvSpPr>
+            <a:spLocks noGrp="1"/>
+          </p:cNvSpPr>
+          <p:nvPr>
+            <p:ph type="title"/>
+          </p:nvPr>
+        </p:nvSpPr>
+        <p:spPr/>
+        <p:txBody>
+          <a:bodyPr/>
+          <a:lstStyle/>
+          <a:p>
+            <a:r>
+              <a:rPr lang="es-ES" dirty="0" err="1"/>
+              <a:t>Unbalanced</a:t>
+            </a:r>
+            <a:r>
+              <a:rPr lang="es-ES" dirty="0"/>
+              <a:t> </a:t>
+            </a:r>
+            <a:r>
+              <a:rPr lang="es-ES" dirty="0" err="1"/>
+              <a:t>configuration</a:t>
+            </a:r>
+            <a:r>
+              <a:rPr lang="es-ES" dirty="0"/>
+              <a:t> –</a:t>
+            </a:r>
+            <a:r>
+              <a:rPr lang="es-ES" dirty="0" err="1"/>
+              <a:t>Delay</a:t>
+            </a:r>
+            <a:r>
+              <a:rPr lang="es-ES" dirty="0"/>
+              <a:t> con pérdidas de propagación </a:t>
+            </a:r>
+          </a:p>
+        </p:txBody>
+      </p:sp>
+      <p:sp>
+        <p:nvSpPr>
+          <p:cNvPr id="4" name="Marcador de pie de página 3">
+            <a:extLst>
+              <a:ext uri="{FF2B5EF4-FFF2-40B4-BE49-F238E27FC236}">
+                <a16:creationId xmlns:a16="http://schemas.microsoft.com/office/drawing/2014/main" id="{D987503D-E4D7-BC33-D61C-2576088BCAAE}"/>
+              </a:ext>
+            </a:extLst>
+          </p:cNvPr>
+          <p:cNvSpPr>
+            <a:spLocks noGrp="1"/>
+          </p:cNvSpPr>
+          <p:nvPr>
+            <p:ph type="ftr" sz="quarter" idx="5"/>
+          </p:nvPr>
+        </p:nvSpPr>
+        <p:spPr/>
+        <p:txBody>
+          <a:bodyPr/>
+          <a:lstStyle/>
+          <a:p>
+            <a:pPr marL="12700">
+              <a:spcBef>
+                <a:spcPts val="15"/>
+              </a:spcBef>
+            </a:pPr>
+            <a:r>
+              <a:rPr lang="es-ES" spc="-5"/>
+              <a:t>LAB 3. INTERFEROMETERS I</a:t>
+            </a:r>
+            <a:endParaRPr lang="es-ES" spc="-5" dirty="0"/>
+          </a:p>
+        </p:txBody>
+      </p:sp>
+      <p:sp>
+        <p:nvSpPr>
+          <p:cNvPr id="5" name="Marcador de número de diapositiva 4">
+            <a:extLst>
+              <a:ext uri="{FF2B5EF4-FFF2-40B4-BE49-F238E27FC236}">
+                <a16:creationId xmlns:a16="http://schemas.microsoft.com/office/drawing/2014/main" id="{14E84B7C-5D8E-8034-7ACB-F859CB5723FA}"/>
+              </a:ext>
+            </a:extLst>
+          </p:cNvPr>
+          <p:cNvSpPr>
+            <a:spLocks noGrp="1"/>
+          </p:cNvSpPr>
+          <p:nvPr>
+            <p:ph type="sldNum" sz="quarter" idx="7"/>
+          </p:nvPr>
+        </p:nvSpPr>
+        <p:spPr/>
+        <p:txBody>
+          <a:bodyPr/>
+          <a:lstStyle/>
+          <a:p>
+            <a:fld id="{B6F15528-21DE-4FAA-801E-634DDDAF4B2B}" type="slidenum">
+              <a:rPr lang="es-ES" smtClean="0"/>
+              <a:t>9</a:t>
+            </a:fld>
+            <a:endParaRPr lang="es-ES"/>
+          </a:p>
+        </p:txBody>
+      </p:sp>
+      <p:pic>
+        <p:nvPicPr>
+          <p:cNvPr id="7" name="Imagen 6">
+            <a:extLst>
+              <a:ext uri="{FF2B5EF4-FFF2-40B4-BE49-F238E27FC236}">
+                <a16:creationId xmlns:a16="http://schemas.microsoft.com/office/drawing/2014/main" id="{7A25EBD6-DF49-6E65-80E5-500D5F5BB17D}"/>
+              </a:ext>
+            </a:extLst>
+          </p:cNvPr>
+          <p:cNvPicPr>
+            <a:picLocks noChangeAspect="1"/>
+          </p:cNvPicPr>
+          <p:nvPr/>
+        </p:nvPicPr>
+        <p:blipFill>
+          <a:blip r:embed="rId2">
+            <a:extLst>
+              <a:ext uri="{28A0092B-C50C-407E-A947-70E740481C1C}">
+                <a14:useLocalDpi xmlns:a14="http://schemas.microsoft.com/office/drawing/2010/main" val="0"/>
+              </a:ext>
+            </a:extLst>
+          </a:blip>
+          <a:srcRect l="615" r="615"/>
+          <a:stretch/>
+        </p:blipFill>
+        <p:spPr>
+          <a:xfrm>
+            <a:off x="493597" y="566477"/>
+            <a:ext cx="4667901" cy="3743847"/>
+          </a:xfrm>
+          <a:prstGeom prst="rect">
+            <a:avLst/>
+          </a:prstGeom>
+        </p:spPr>
+      </p:pic>
+      <p:sp>
+        <p:nvSpPr>
+          <p:cNvPr id="9" name="CuadroTexto 8">
+            <a:extLst>
+              <a:ext uri="{FF2B5EF4-FFF2-40B4-BE49-F238E27FC236}">
+                <a16:creationId xmlns:a16="http://schemas.microsoft.com/office/drawing/2014/main" id="{3545B410-8BA6-E14B-DE9E-65A44C93E9B3}"/>
+              </a:ext>
+            </a:extLst>
+          </p:cNvPr>
+          <p:cNvSpPr txBox="1"/>
+          <p:nvPr/>
+        </p:nvSpPr>
+        <p:spPr>
+          <a:xfrm>
+            <a:off x="5715000" y="914400"/>
+            <a:ext cx="6128326" cy="646331"/>
+          </a:xfrm>
+          <a:prstGeom prst="rect">
+            <a:avLst/>
+          </a:prstGeom>
+          <a:noFill/>
+        </p:spPr>
+        <p:txBody>
+          <a:bodyPr wrap="square">
+            <a:spAutoFit/>
+          </a:bodyPr>
+          <a:lstStyle/>
+          <a:p>
+            <a:r>
+              <a:rPr lang="en-US" dirty="0"/>
+              <a:t>Al </a:t>
+            </a:r>
+            <a:r>
+              <a:rPr lang="en-US" dirty="0" err="1"/>
+              <a:t>añadir</a:t>
+            </a:r>
+            <a:r>
+              <a:rPr lang="en-US" dirty="0"/>
+              <a:t> </a:t>
+            </a:r>
+            <a:r>
+              <a:rPr lang="en-US" dirty="0" err="1"/>
+              <a:t>pérdidas</a:t>
+            </a:r>
+            <a:r>
+              <a:rPr lang="en-US" dirty="0"/>
+              <a:t> de </a:t>
+            </a:r>
+            <a:r>
+              <a:rPr lang="en-US" dirty="0" err="1"/>
+              <a:t>propagación</a:t>
+            </a:r>
+            <a:r>
+              <a:rPr lang="en-US" dirty="0"/>
+              <a:t> la </a:t>
+            </a:r>
+            <a:r>
+              <a:rPr lang="en-US" dirty="0" err="1"/>
+              <a:t>suma</a:t>
+            </a:r>
+            <a:r>
+              <a:rPr lang="en-US" dirty="0"/>
+              <a:t> de </a:t>
+            </a:r>
+            <a:r>
+              <a:rPr lang="en-US" dirty="0" err="1"/>
+              <a:t>potencias</a:t>
+            </a:r>
+            <a:r>
+              <a:rPr lang="en-US" dirty="0"/>
+              <a:t> </a:t>
+            </a:r>
+            <a:r>
+              <a:rPr lang="en-US" dirty="0" err="1"/>
+              <a:t>ya</a:t>
+            </a:r>
+            <a:r>
+              <a:rPr lang="en-US" dirty="0"/>
+              <a:t> no </a:t>
+            </a:r>
+            <a:r>
+              <a:rPr lang="en-US" dirty="0" err="1"/>
+              <a:t>suma</a:t>
+            </a:r>
+            <a:r>
+              <a:rPr lang="en-US" dirty="0"/>
+              <a:t> 1 . </a:t>
+            </a:r>
+            <a:endParaRPr lang="es-ES" dirty="0"/>
+          </a:p>
+        </p:txBody>
+      </p:sp>
+    </p:spTree>
+    <p:extLst>
+      <p:ext uri="{BB962C8B-B14F-4D97-AF65-F5344CB8AC3E}">
+        <p14:creationId xmlns:p14="http://schemas.microsoft.com/office/powerpoint/2010/main" val="2658856843"/>
+      </p:ext>
+    </p:extLst>
   </p:cSld>
   <p:clrMapOvr>
     <a:masterClrMapping/>

--- a/LabBook_3.pptx
+++ b/LabBook_3.pptx
@@ -5,10 +5,10 @@
     <p:sldMasterId id="2147483648" r:id="rId1"/>
   </p:sldMasterIdLst>
   <p:notesMasterIdLst>
-    <p:notesMasterId r:id="rId16"/>
+    <p:notesMasterId r:id="rId28"/>
   </p:notesMasterIdLst>
   <p:handoutMasterIdLst>
-    <p:handoutMasterId r:id="rId17"/>
+    <p:handoutMasterId r:id="rId29"/>
   </p:handoutMasterIdLst>
   <p:sldIdLst>
     <p:sldId id="256" r:id="rId2"/>
@@ -21,10 +21,22 @@
     <p:sldId id="299" r:id="rId9"/>
     <p:sldId id="302" r:id="rId10"/>
     <p:sldId id="303" r:id="rId11"/>
-    <p:sldId id="295" r:id="rId12"/>
-    <p:sldId id="296" r:id="rId13"/>
-    <p:sldId id="293" r:id="rId14"/>
-    <p:sldId id="288" r:id="rId15"/>
+    <p:sldId id="304" r:id="rId12"/>
+    <p:sldId id="305" r:id="rId13"/>
+    <p:sldId id="306" r:id="rId14"/>
+    <p:sldId id="307" r:id="rId15"/>
+    <p:sldId id="308" r:id="rId16"/>
+    <p:sldId id="309" r:id="rId17"/>
+    <p:sldId id="310" r:id="rId18"/>
+    <p:sldId id="313" r:id="rId19"/>
+    <p:sldId id="312" r:id="rId20"/>
+    <p:sldId id="295" r:id="rId21"/>
+    <p:sldId id="296" r:id="rId22"/>
+    <p:sldId id="314" r:id="rId23"/>
+    <p:sldId id="293" r:id="rId24"/>
+    <p:sldId id="315" r:id="rId25"/>
+    <p:sldId id="316" r:id="rId26"/>
+    <p:sldId id="288" r:id="rId27"/>
   </p:sldIdLst>
   <p:sldSz cx="12192000" cy="6858000"/>
   <p:notesSz cx="12192000" cy="6858000"/>
@@ -856,7 +868,7 @@
           <a:p>
             <a:fld id="{676223B9-C868-4436-87D9-1A3152E1157A}" type="slidenum">
               <a:rPr lang="es-ES" smtClean="0"/>
-              <a:t>11</a:t>
+              <a:t>20</a:t>
             </a:fld>
             <a:endParaRPr lang="es-ES"/>
           </a:p>
@@ -964,7 +976,7 @@
           <a:p>
             <a:fld id="{676223B9-C868-4436-87D9-1A3152E1157A}" type="slidenum">
               <a:rPr lang="es-ES" smtClean="0"/>
-              <a:t>12</a:t>
+              <a:t>21</a:t>
             </a:fld>
             <a:endParaRPr lang="es-ES"/>
           </a:p>
@@ -984,6 +996,114 @@
 </file>
 
 <file path=ppt/notesSlides/notesSlide4.xml><?xml version="1.0" encoding="utf-8"?>
+<p:notes xmlns:a="http://schemas.openxmlformats.org/drawingml/2006/main" xmlns:r="http://schemas.openxmlformats.org/officeDocument/2006/relationships" xmlns:p="http://schemas.openxmlformats.org/presentationml/2006/main">
+  <p:cSld>
+    <p:spTree>
+      <p:nvGrpSpPr>
+        <p:cNvPr id="1" name="">
+          <a:extLst>
+            <a:ext uri="{FF2B5EF4-FFF2-40B4-BE49-F238E27FC236}">
+              <a16:creationId xmlns:a16="http://schemas.microsoft.com/office/drawing/2014/main" id="{25539E33-0F54-BD0D-269E-CB4A54BB7470}"/>
+            </a:ext>
+          </a:extLst>
+        </p:cNvPr>
+        <p:cNvGrpSpPr/>
+        <p:nvPr/>
+      </p:nvGrpSpPr>
+      <p:grpSpPr>
+        <a:xfrm>
+          <a:off x="0" y="0"/>
+          <a:ext cx="0" cy="0"/>
+          <a:chOff x="0" y="0"/>
+          <a:chExt cx="0" cy="0"/>
+        </a:xfrm>
+      </p:grpSpPr>
+      <p:sp>
+        <p:nvSpPr>
+          <p:cNvPr id="2" name="Marcador de imagen de diapositiva 1">
+            <a:extLst>
+              <a:ext uri="{FF2B5EF4-FFF2-40B4-BE49-F238E27FC236}">
+                <a16:creationId xmlns:a16="http://schemas.microsoft.com/office/drawing/2014/main" id="{CF1F192B-1372-7B3C-398F-F71A88131E82}"/>
+              </a:ext>
+            </a:extLst>
+          </p:cNvPr>
+          <p:cNvSpPr>
+            <a:spLocks noGrp="1" noRot="1" noChangeAspect="1"/>
+          </p:cNvSpPr>
+          <p:nvPr>
+            <p:ph type="sldImg"/>
+          </p:nvPr>
+        </p:nvSpPr>
+        <p:spPr/>
+      </p:sp>
+      <p:sp>
+        <p:nvSpPr>
+          <p:cNvPr id="3" name="Marcador de notas 2">
+            <a:extLst>
+              <a:ext uri="{FF2B5EF4-FFF2-40B4-BE49-F238E27FC236}">
+                <a16:creationId xmlns:a16="http://schemas.microsoft.com/office/drawing/2014/main" id="{271F8CAE-D470-6C1A-E5DB-09105326C236}"/>
+              </a:ext>
+            </a:extLst>
+          </p:cNvPr>
+          <p:cNvSpPr>
+            <a:spLocks noGrp="1"/>
+          </p:cNvSpPr>
+          <p:nvPr>
+            <p:ph type="body" idx="1"/>
+          </p:nvPr>
+        </p:nvSpPr>
+        <p:spPr/>
+        <p:txBody>
+          <a:bodyPr/>
+          <a:lstStyle/>
+          <a:p>
+            <a:endParaRPr lang="es-ES" dirty="0"/>
+          </a:p>
+        </p:txBody>
+      </p:sp>
+      <p:sp>
+        <p:nvSpPr>
+          <p:cNvPr id="4" name="Marcador de número de diapositiva 3">
+            <a:extLst>
+              <a:ext uri="{FF2B5EF4-FFF2-40B4-BE49-F238E27FC236}">
+                <a16:creationId xmlns:a16="http://schemas.microsoft.com/office/drawing/2014/main" id="{D618B16C-2A36-BC4C-BE7F-CBA7ED27AEEC}"/>
+              </a:ext>
+            </a:extLst>
+          </p:cNvPr>
+          <p:cNvSpPr>
+            <a:spLocks noGrp="1"/>
+          </p:cNvSpPr>
+          <p:nvPr>
+            <p:ph type="sldNum" sz="quarter" idx="5"/>
+          </p:nvPr>
+        </p:nvSpPr>
+        <p:spPr/>
+        <p:txBody>
+          <a:bodyPr/>
+          <a:lstStyle/>
+          <a:p>
+            <a:fld id="{676223B9-C868-4436-87D9-1A3152E1157A}" type="slidenum">
+              <a:rPr lang="es-ES" smtClean="0"/>
+              <a:t>22</a:t>
+            </a:fld>
+            <a:endParaRPr lang="es-ES"/>
+          </a:p>
+        </p:txBody>
+      </p:sp>
+    </p:spTree>
+    <p:extLst>
+      <p:ext uri="{BB962C8B-B14F-4D97-AF65-F5344CB8AC3E}">
+        <p14:creationId xmlns:p14="http://schemas.microsoft.com/office/powerpoint/2010/main" val="152700574"/>
+      </p:ext>
+    </p:extLst>
+  </p:cSld>
+  <p:clrMapOvr>
+    <a:masterClrMapping/>
+  </p:clrMapOvr>
+</p:notes>
+</file>
+
+<file path=ppt/notesSlides/notesSlide5.xml><?xml version="1.0" encoding="utf-8"?>
 <p:notes xmlns:a="http://schemas.openxmlformats.org/drawingml/2006/main" xmlns:r="http://schemas.openxmlformats.org/officeDocument/2006/relationships" xmlns:p="http://schemas.openxmlformats.org/presentationml/2006/main">
   <p:cSld>
     <p:spTree>
@@ -1072,7 +1192,7 @@
           <a:p>
             <a:fld id="{676223B9-C868-4436-87D9-1A3152E1157A}" type="slidenum">
               <a:rPr lang="es-ES" smtClean="0"/>
-              <a:t>13</a:t>
+              <a:t>23</a:t>
             </a:fld>
             <a:endParaRPr lang="es-ES"/>
           </a:p>
@@ -1082,6 +1202,222 @@
     <p:extLst>
       <p:ext uri="{BB962C8B-B14F-4D97-AF65-F5344CB8AC3E}">
         <p14:creationId xmlns:p14="http://schemas.microsoft.com/office/powerpoint/2010/main" val="2917382716"/>
+      </p:ext>
+    </p:extLst>
+  </p:cSld>
+  <p:clrMapOvr>
+    <a:masterClrMapping/>
+  </p:clrMapOvr>
+</p:notes>
+</file>
+
+<file path=ppt/notesSlides/notesSlide6.xml><?xml version="1.0" encoding="utf-8"?>
+<p:notes xmlns:a="http://schemas.openxmlformats.org/drawingml/2006/main" xmlns:r="http://schemas.openxmlformats.org/officeDocument/2006/relationships" xmlns:p="http://schemas.openxmlformats.org/presentationml/2006/main">
+  <p:cSld>
+    <p:spTree>
+      <p:nvGrpSpPr>
+        <p:cNvPr id="1" name="">
+          <a:extLst>
+            <a:ext uri="{FF2B5EF4-FFF2-40B4-BE49-F238E27FC236}">
+              <a16:creationId xmlns:a16="http://schemas.microsoft.com/office/drawing/2014/main" id="{FEC4E6C5-6855-F1A0-D8D0-56C3AF90C0DF}"/>
+            </a:ext>
+          </a:extLst>
+        </p:cNvPr>
+        <p:cNvGrpSpPr/>
+        <p:nvPr/>
+      </p:nvGrpSpPr>
+      <p:grpSpPr>
+        <a:xfrm>
+          <a:off x="0" y="0"/>
+          <a:ext cx="0" cy="0"/>
+          <a:chOff x="0" y="0"/>
+          <a:chExt cx="0" cy="0"/>
+        </a:xfrm>
+      </p:grpSpPr>
+      <p:sp>
+        <p:nvSpPr>
+          <p:cNvPr id="2" name="Marcador de imagen de diapositiva 1">
+            <a:extLst>
+              <a:ext uri="{FF2B5EF4-FFF2-40B4-BE49-F238E27FC236}">
+                <a16:creationId xmlns:a16="http://schemas.microsoft.com/office/drawing/2014/main" id="{39E5A019-088C-0A7F-9630-07781EE5EAC2}"/>
+              </a:ext>
+            </a:extLst>
+          </p:cNvPr>
+          <p:cNvSpPr>
+            <a:spLocks noGrp="1" noRot="1" noChangeAspect="1"/>
+          </p:cNvSpPr>
+          <p:nvPr>
+            <p:ph type="sldImg"/>
+          </p:nvPr>
+        </p:nvSpPr>
+        <p:spPr/>
+      </p:sp>
+      <p:sp>
+        <p:nvSpPr>
+          <p:cNvPr id="3" name="Marcador de notas 2">
+            <a:extLst>
+              <a:ext uri="{FF2B5EF4-FFF2-40B4-BE49-F238E27FC236}">
+                <a16:creationId xmlns:a16="http://schemas.microsoft.com/office/drawing/2014/main" id="{C773C0A4-7BB0-6298-F2E9-A80EA26537AF}"/>
+              </a:ext>
+            </a:extLst>
+          </p:cNvPr>
+          <p:cNvSpPr>
+            <a:spLocks noGrp="1"/>
+          </p:cNvSpPr>
+          <p:nvPr>
+            <p:ph type="body" idx="1"/>
+          </p:nvPr>
+        </p:nvSpPr>
+        <p:spPr/>
+        <p:txBody>
+          <a:bodyPr/>
+          <a:lstStyle/>
+          <a:p>
+            <a:endParaRPr lang="es-ES" dirty="0"/>
+          </a:p>
+        </p:txBody>
+      </p:sp>
+      <p:sp>
+        <p:nvSpPr>
+          <p:cNvPr id="4" name="Marcador de número de diapositiva 3">
+            <a:extLst>
+              <a:ext uri="{FF2B5EF4-FFF2-40B4-BE49-F238E27FC236}">
+                <a16:creationId xmlns:a16="http://schemas.microsoft.com/office/drawing/2014/main" id="{23B64994-6E1A-B581-2E34-CA7C3C75CE7E}"/>
+              </a:ext>
+            </a:extLst>
+          </p:cNvPr>
+          <p:cNvSpPr>
+            <a:spLocks noGrp="1"/>
+          </p:cNvSpPr>
+          <p:nvPr>
+            <p:ph type="sldNum" sz="quarter" idx="5"/>
+          </p:nvPr>
+        </p:nvSpPr>
+        <p:spPr/>
+        <p:txBody>
+          <a:bodyPr/>
+          <a:lstStyle/>
+          <a:p>
+            <a:fld id="{676223B9-C868-4436-87D9-1A3152E1157A}" type="slidenum">
+              <a:rPr lang="es-ES" smtClean="0"/>
+              <a:t>24</a:t>
+            </a:fld>
+            <a:endParaRPr lang="es-ES"/>
+          </a:p>
+        </p:txBody>
+      </p:sp>
+    </p:spTree>
+    <p:extLst>
+      <p:ext uri="{BB962C8B-B14F-4D97-AF65-F5344CB8AC3E}">
+        <p14:creationId xmlns:p14="http://schemas.microsoft.com/office/powerpoint/2010/main" val="3300330349"/>
+      </p:ext>
+    </p:extLst>
+  </p:cSld>
+  <p:clrMapOvr>
+    <a:masterClrMapping/>
+  </p:clrMapOvr>
+</p:notes>
+</file>
+
+<file path=ppt/notesSlides/notesSlide7.xml><?xml version="1.0" encoding="utf-8"?>
+<p:notes xmlns:a="http://schemas.openxmlformats.org/drawingml/2006/main" xmlns:r="http://schemas.openxmlformats.org/officeDocument/2006/relationships" xmlns:p="http://schemas.openxmlformats.org/presentationml/2006/main">
+  <p:cSld>
+    <p:spTree>
+      <p:nvGrpSpPr>
+        <p:cNvPr id="1" name="">
+          <a:extLst>
+            <a:ext uri="{FF2B5EF4-FFF2-40B4-BE49-F238E27FC236}">
+              <a16:creationId xmlns:a16="http://schemas.microsoft.com/office/drawing/2014/main" id="{C2D2E23A-4399-03CE-714F-6A674F8DBDAC}"/>
+            </a:ext>
+          </a:extLst>
+        </p:cNvPr>
+        <p:cNvGrpSpPr/>
+        <p:nvPr/>
+      </p:nvGrpSpPr>
+      <p:grpSpPr>
+        <a:xfrm>
+          <a:off x="0" y="0"/>
+          <a:ext cx="0" cy="0"/>
+          <a:chOff x="0" y="0"/>
+          <a:chExt cx="0" cy="0"/>
+        </a:xfrm>
+      </p:grpSpPr>
+      <p:sp>
+        <p:nvSpPr>
+          <p:cNvPr id="2" name="Marcador de imagen de diapositiva 1">
+            <a:extLst>
+              <a:ext uri="{FF2B5EF4-FFF2-40B4-BE49-F238E27FC236}">
+                <a16:creationId xmlns:a16="http://schemas.microsoft.com/office/drawing/2014/main" id="{F30F111B-271F-0F28-9580-0B90AA22B038}"/>
+              </a:ext>
+            </a:extLst>
+          </p:cNvPr>
+          <p:cNvSpPr>
+            <a:spLocks noGrp="1" noRot="1" noChangeAspect="1"/>
+          </p:cNvSpPr>
+          <p:nvPr>
+            <p:ph type="sldImg"/>
+          </p:nvPr>
+        </p:nvSpPr>
+        <p:spPr/>
+      </p:sp>
+      <p:sp>
+        <p:nvSpPr>
+          <p:cNvPr id="3" name="Marcador de notas 2">
+            <a:extLst>
+              <a:ext uri="{FF2B5EF4-FFF2-40B4-BE49-F238E27FC236}">
+                <a16:creationId xmlns:a16="http://schemas.microsoft.com/office/drawing/2014/main" id="{FCB511B8-9B2C-780E-1617-88E5DDF8A073}"/>
+              </a:ext>
+            </a:extLst>
+          </p:cNvPr>
+          <p:cNvSpPr>
+            <a:spLocks noGrp="1"/>
+          </p:cNvSpPr>
+          <p:nvPr>
+            <p:ph type="body" idx="1"/>
+          </p:nvPr>
+        </p:nvSpPr>
+        <p:spPr/>
+        <p:txBody>
+          <a:bodyPr/>
+          <a:lstStyle/>
+          <a:p>
+            <a:endParaRPr lang="es-ES" dirty="0"/>
+          </a:p>
+        </p:txBody>
+      </p:sp>
+      <p:sp>
+        <p:nvSpPr>
+          <p:cNvPr id="4" name="Marcador de número de diapositiva 3">
+            <a:extLst>
+              <a:ext uri="{FF2B5EF4-FFF2-40B4-BE49-F238E27FC236}">
+                <a16:creationId xmlns:a16="http://schemas.microsoft.com/office/drawing/2014/main" id="{AA018D95-1CD5-F9E8-91F7-49F2D71C996B}"/>
+              </a:ext>
+            </a:extLst>
+          </p:cNvPr>
+          <p:cNvSpPr>
+            <a:spLocks noGrp="1"/>
+          </p:cNvSpPr>
+          <p:nvPr>
+            <p:ph type="sldNum" sz="quarter" idx="5"/>
+          </p:nvPr>
+        </p:nvSpPr>
+        <p:spPr/>
+        <p:txBody>
+          <a:bodyPr/>
+          <a:lstStyle/>
+          <a:p>
+            <a:fld id="{676223B9-C868-4436-87D9-1A3152E1157A}" type="slidenum">
+              <a:rPr lang="es-ES" smtClean="0"/>
+              <a:t>25</a:t>
+            </a:fld>
+            <a:endParaRPr lang="es-ES"/>
+          </a:p>
+        </p:txBody>
+      </p:sp>
+    </p:spTree>
+    <p:extLst>
+      <p:ext uri="{BB962C8B-B14F-4D97-AF65-F5344CB8AC3E}">
+        <p14:creationId xmlns:p14="http://schemas.microsoft.com/office/powerpoint/2010/main" val="1223695911"/>
       </p:ext>
     </p:extLst>
   </p:cSld>
@@ -2980,7 +3316,7 @@
         <p:cNvPr id="1" name="">
           <a:extLst>
             <a:ext uri="{FF2B5EF4-FFF2-40B4-BE49-F238E27FC236}">
-              <a16:creationId xmlns:a16="http://schemas.microsoft.com/office/drawing/2014/main" id="{1525AB88-A787-2C84-3A44-2B634D87FB5B}"/>
+              <a16:creationId xmlns:a16="http://schemas.microsoft.com/office/drawing/2014/main" id="{860D05E1-3F33-FF98-74A6-5F22328B322B}"/>
             </a:ext>
           </a:extLst>
         </p:cNvPr>
@@ -2995,181 +3331,94 @@
           <a:chExt cx="0" cy="0"/>
         </a:xfrm>
       </p:grpSpPr>
-      <mc:AlternateContent xmlns:mc="http://schemas.openxmlformats.org/markup-compatibility/2006" xmlns:a14="http://schemas.microsoft.com/office/drawing/2010/main">
-        <mc:Choice Requires="a14">
-          <p:sp>
-            <p:nvSpPr>
-              <p:cNvPr id="16" name="object 16">
-                <a:extLst>
-                  <a:ext uri="{FF2B5EF4-FFF2-40B4-BE49-F238E27FC236}">
-                    <a16:creationId xmlns:a16="http://schemas.microsoft.com/office/drawing/2014/main" id="{A153D08B-B860-A163-3940-83AD64444D01}"/>
-                  </a:ext>
-                </a:extLst>
-              </p:cNvPr>
-              <p:cNvSpPr txBox="1">
-                <a:spLocks noGrp="1"/>
-              </p:cNvSpPr>
-              <p:nvPr>
-                <p:ph type="title"/>
-              </p:nvPr>
-            </p:nvSpPr>
-            <p:spPr>
-              <a:xfrm>
-                <a:off x="685800" y="408883"/>
-                <a:ext cx="10994410" cy="782265"/>
-              </a:xfrm>
-              <a:prstGeom prst="rect">
-                <a:avLst/>
-              </a:prstGeom>
-            </p:spPr>
-            <p:txBody>
-              <a:bodyPr vert="horz" wrap="square" lIns="0" tIns="12700" rIns="0" bIns="0" rtlCol="0">
-                <a:spAutoFit/>
-              </a:bodyPr>
-              <a:lstStyle/>
-              <a:p>
-                <a:pPr marL="12700">
-                  <a:lnSpc>
-                    <a:spcPct val="100000"/>
-                  </a:lnSpc>
-                  <a:spcBef>
-                    <a:spcPts val="100"/>
-                  </a:spcBef>
-                </a:pPr>
-                <a:r>
-                  <a:rPr lang="en-US" sz="2400" b="1" dirty="0"/>
-                  <a:t>ASSESSMENT #2 </a:t>
-                </a:r>
-                <a:r>
-                  <a:rPr lang="en-US" sz="2500" dirty="0"/>
-                  <a:t>– Recap from theory – Calculation of </a:t>
-                </a:r>
-                <a14:m>
-                  <m:oMath xmlns:m="http://schemas.openxmlformats.org/officeDocument/2006/math">
-                    <m:r>
-                      <a:rPr lang="es-ES" sz="2500" b="1" i="0" smtClean="0">
-                        <a:latin typeface="Cambria Math" panose="02040503050406030204" pitchFamily="18" charset="0"/>
-                      </a:rPr>
-                      <m:t>𝚫</m:t>
-                    </m:r>
-                    <m:r>
-                      <a:rPr lang="es-ES" sz="2500" b="1" i="0" smtClean="0">
-                        <a:latin typeface="Cambria Math" panose="02040503050406030204" pitchFamily="18" charset="0"/>
-                      </a:rPr>
-                      <m:t>𝐋</m:t>
-                    </m:r>
-                  </m:oMath>
-                </a14:m>
-                <a:r>
-                  <a:rPr lang="es-ES" sz="2500" spc="-5" dirty="0">
-                    <a:latin typeface="+mj-lt"/>
-                    <a:cs typeface="Lucida Sans"/>
-                  </a:rPr>
-                  <a:t> </a:t>
-                </a:r>
-                <a:br>
-                  <a:rPr lang="es-ES" sz="2500" spc="-5" dirty="0">
-                    <a:latin typeface="+mj-lt"/>
-                    <a:cs typeface="Lucida Sans"/>
-                  </a:rPr>
-                </a:br>
-                <a:endParaRPr sz="2500" b="0" dirty="0">
-                  <a:latin typeface="+mj-lt"/>
-                  <a:cs typeface="Lucida Sans"/>
-                </a:endParaRPr>
-              </a:p>
-            </p:txBody>
-          </p:sp>
-        </mc:Choice>
-        <mc:Fallback xmlns="">
-          <p:sp>
-            <p:nvSpPr>
-              <p:cNvPr id="16" name="object 16">
-                <a:extLst>
-                  <a:ext uri="{FF2B5EF4-FFF2-40B4-BE49-F238E27FC236}">
-                    <a16:creationId xmlns:a16="http://schemas.microsoft.com/office/drawing/2014/main" id="{A153D08B-B860-A163-3940-83AD64444D01}"/>
-                  </a:ext>
-                </a:extLst>
-              </p:cNvPr>
-              <p:cNvSpPr txBox="1">
-                <a:spLocks noGrp="1" noRot="1" noChangeAspect="1" noMove="1" noResize="1" noEditPoints="1" noAdjustHandles="1" noChangeArrowheads="1" noChangeShapeType="1" noTextEdit="1"/>
-              </p:cNvSpPr>
-              <p:nvPr>
-                <p:ph type="title"/>
-              </p:nvPr>
-            </p:nvSpPr>
-            <p:spPr>
-              <a:xfrm>
-                <a:off x="685800" y="408883"/>
-                <a:ext cx="10994410" cy="782265"/>
-              </a:xfrm>
-              <a:prstGeom prst="rect">
-                <a:avLst/>
-              </a:prstGeom>
-              <a:blipFill>
-                <a:blip r:embed="rId3"/>
-                <a:stretch>
-                  <a:fillRect l="-1608" t="-10156"/>
-                </a:stretch>
-              </a:blipFill>
-            </p:spPr>
-            <p:txBody>
-              <a:bodyPr/>
-              <a:lstStyle/>
-              <a:p>
-                <a:r>
-                  <a:rPr lang="es-ES">
-                    <a:noFill/>
-                  </a:rPr>
-                  <a:t> </a:t>
-                </a:r>
-              </a:p>
-            </p:txBody>
-          </p:sp>
-        </mc:Fallback>
-      </mc:AlternateContent>
-      <p:pic>
-        <p:nvPicPr>
-          <p:cNvPr id="83" name="Gráfico 82">
-            <a:extLst>
-              <a:ext uri="{FF2B5EF4-FFF2-40B4-BE49-F238E27FC236}">
-                <a16:creationId xmlns:a16="http://schemas.microsoft.com/office/drawing/2014/main" id="{333888A9-82BA-4688-F856-37AB661A7D43}"/>
-              </a:ext>
-            </a:extLst>
-          </p:cNvPr>
-          <p:cNvPicPr>
-            <a:picLocks noChangeAspect="1"/>
-          </p:cNvPicPr>
-          <p:nvPr/>
-        </p:nvPicPr>
-        <p:blipFill>
-          <a:blip r:embed="rId4">
-            <a:extLst>
-              <a:ext uri="{96DAC541-7B7A-43D3-8B79-37D633B846F1}">
-                <asvg:svgBlip xmlns:asvg="http://schemas.microsoft.com/office/drawing/2016/SVG/main" r:embed="rId5"/>
-              </a:ext>
-            </a:extLst>
-          </a:blip>
-          <a:stretch>
-            <a:fillRect/>
-          </a:stretch>
-        </p:blipFill>
-        <p:spPr>
-          <a:xfrm>
-            <a:off x="5045006" y="6356057"/>
-            <a:ext cx="6409575" cy="363174"/>
-          </a:xfrm>
-          <a:prstGeom prst="rect">
-            <a:avLst/>
-          </a:prstGeom>
-        </p:spPr>
-      </p:pic>
-      <p:sp>
-        <p:nvSpPr>
-          <p:cNvPr id="84" name="Marcador de número de diapositiva 83">
-            <a:extLst>
-              <a:ext uri="{FF2B5EF4-FFF2-40B4-BE49-F238E27FC236}">
-                <a16:creationId xmlns:a16="http://schemas.microsoft.com/office/drawing/2014/main" id="{F1891475-ED60-D0D2-1AD0-4F80E3D89439}"/>
+      <p:sp>
+        <p:nvSpPr>
+          <p:cNvPr id="2" name="Título 1">
+            <a:extLst>
+              <a:ext uri="{FF2B5EF4-FFF2-40B4-BE49-F238E27FC236}">
+                <a16:creationId xmlns:a16="http://schemas.microsoft.com/office/drawing/2014/main" id="{F603E3B1-33A6-15BA-C87E-6BA414DA548D}"/>
+              </a:ext>
+            </a:extLst>
+          </p:cNvPr>
+          <p:cNvSpPr>
+            <a:spLocks noGrp="1"/>
+          </p:cNvSpPr>
+          <p:nvPr>
+            <p:ph type="title"/>
+          </p:nvPr>
+        </p:nvSpPr>
+        <p:spPr/>
+        <p:txBody>
+          <a:bodyPr/>
+          <a:lstStyle/>
+          <a:p>
+            <a:r>
+              <a:rPr lang="es-ES" dirty="0" err="1"/>
+              <a:t>Unbalanced</a:t>
+            </a:r>
+            <a:r>
+              <a:rPr lang="es-ES" dirty="0"/>
+              <a:t> </a:t>
+            </a:r>
+            <a:r>
+              <a:rPr lang="es-ES" dirty="0" err="1"/>
+              <a:t>configuration</a:t>
+            </a:r>
+            <a:r>
+              <a:rPr lang="es-ES" dirty="0"/>
+              <a:t> –</a:t>
+            </a:r>
+            <a:r>
+              <a:rPr lang="es-ES" dirty="0" err="1"/>
+              <a:t>Delay</a:t>
+            </a:r>
+            <a:r>
+              <a:rPr lang="es-ES" dirty="0"/>
+              <a:t> con cambio de % de acoplo</a:t>
+            </a:r>
+          </a:p>
+        </p:txBody>
+      </p:sp>
+      <p:sp>
+        <p:nvSpPr>
+          <p:cNvPr id="4" name="Marcador de pie de página 3">
+            <a:extLst>
+              <a:ext uri="{FF2B5EF4-FFF2-40B4-BE49-F238E27FC236}">
+                <a16:creationId xmlns:a16="http://schemas.microsoft.com/office/drawing/2014/main" id="{20136A44-2E85-2FAD-0257-FE5643B7EC92}"/>
+              </a:ext>
+            </a:extLst>
+          </p:cNvPr>
+          <p:cNvSpPr>
+            <a:spLocks noGrp="1"/>
+          </p:cNvSpPr>
+          <p:nvPr>
+            <p:ph type="ftr" sz="quarter" idx="5"/>
+          </p:nvPr>
+        </p:nvSpPr>
+        <p:spPr/>
+        <p:txBody>
+          <a:bodyPr/>
+          <a:lstStyle/>
+          <a:p>
+            <a:pPr marL="12700">
+              <a:spcBef>
+                <a:spcPts val="15"/>
+              </a:spcBef>
+            </a:pPr>
+            <a:r>
+              <a:rPr lang="es-ES" spc="-5"/>
+              <a:t>LAB 3. INTERFEROMETERS I</a:t>
+            </a:r>
+            <a:endParaRPr lang="es-ES" spc="-5" dirty="0"/>
+          </a:p>
+        </p:txBody>
+      </p:sp>
+      <p:sp>
+        <p:nvSpPr>
+          <p:cNvPr id="5" name="Marcador de número de diapositiva 4">
+            <a:extLst>
+              <a:ext uri="{FF2B5EF4-FFF2-40B4-BE49-F238E27FC236}">
+                <a16:creationId xmlns:a16="http://schemas.microsoft.com/office/drawing/2014/main" id="{AB6E20BF-E15F-BB84-314D-E45AEA246660}"/>
               </a:ext>
             </a:extLst>
           </p:cNvPr>
@@ -3193,313 +3442,12 @@
           </a:p>
         </p:txBody>
       </p:sp>
-      <mc:AlternateContent xmlns:mc="http://schemas.openxmlformats.org/markup-compatibility/2006" xmlns:a14="http://schemas.microsoft.com/office/drawing/2010/main">
-        <mc:Choice Requires="a14">
-          <p:sp>
-            <p:nvSpPr>
-              <p:cNvPr id="4" name="Marcador de texto 2">
-                <a:extLst>
-                  <a:ext uri="{FF2B5EF4-FFF2-40B4-BE49-F238E27FC236}">
-                    <a16:creationId xmlns:a16="http://schemas.microsoft.com/office/drawing/2014/main" id="{BBBE28D8-49EC-3B49-29AC-FD2FDAF3B0AF}"/>
-                  </a:ext>
-                </a:extLst>
-              </p:cNvPr>
-              <p:cNvSpPr txBox="1">
-                <a:spLocks/>
-              </p:cNvSpPr>
-              <p:nvPr/>
-            </p:nvSpPr>
-            <p:spPr>
-              <a:xfrm>
-                <a:off x="608012" y="1295400"/>
-                <a:ext cx="11048999" cy="4958137"/>
-              </a:xfrm>
-              <a:prstGeom prst="rect">
-                <a:avLst/>
-              </a:prstGeom>
-            </p:spPr>
-            <p:txBody>
-              <a:bodyPr>
-                <a:normAutofit/>
-              </a:bodyPr>
-              <a:lstStyle>
-                <a:lvl1pPr marL="0">
-                  <a:defRPr>
-                    <a:latin typeface="+mn-lt"/>
-                    <a:ea typeface="+mn-ea"/>
-                    <a:cs typeface="+mn-cs"/>
-                  </a:defRPr>
-                </a:lvl1pPr>
-                <a:lvl2pPr marL="457200">
-                  <a:defRPr>
-                    <a:latin typeface="+mn-lt"/>
-                    <a:ea typeface="+mn-ea"/>
-                    <a:cs typeface="+mn-cs"/>
-                  </a:defRPr>
-                </a:lvl2pPr>
-                <a:lvl3pPr marL="914400">
-                  <a:defRPr>
-                    <a:latin typeface="+mn-lt"/>
-                    <a:ea typeface="+mn-ea"/>
-                    <a:cs typeface="+mn-cs"/>
-                  </a:defRPr>
-                </a:lvl3pPr>
-                <a:lvl4pPr marL="1371600">
-                  <a:defRPr>
-                    <a:latin typeface="+mn-lt"/>
-                    <a:ea typeface="+mn-ea"/>
-                    <a:cs typeface="+mn-cs"/>
-                  </a:defRPr>
-                </a:lvl4pPr>
-                <a:lvl5pPr marL="1828800">
-                  <a:defRPr>
-                    <a:latin typeface="+mn-lt"/>
-                    <a:ea typeface="+mn-ea"/>
-                    <a:cs typeface="+mn-cs"/>
-                  </a:defRPr>
-                </a:lvl5pPr>
-                <a:lvl6pPr marL="2286000">
-                  <a:defRPr>
-                    <a:latin typeface="+mn-lt"/>
-                    <a:ea typeface="+mn-ea"/>
-                    <a:cs typeface="+mn-cs"/>
-                  </a:defRPr>
-                </a:lvl6pPr>
-                <a:lvl7pPr marL="2743200">
-                  <a:defRPr>
-                    <a:latin typeface="+mn-lt"/>
-                    <a:ea typeface="+mn-ea"/>
-                    <a:cs typeface="+mn-cs"/>
-                  </a:defRPr>
-                </a:lvl7pPr>
-                <a:lvl8pPr marL="3200400">
-                  <a:defRPr>
-                    <a:latin typeface="+mn-lt"/>
-                    <a:ea typeface="+mn-ea"/>
-                    <a:cs typeface="+mn-cs"/>
-                  </a:defRPr>
-                </a:lvl8pPr>
-                <a:lvl9pPr marL="3657600">
-                  <a:defRPr>
-                    <a:latin typeface="+mn-lt"/>
-                    <a:ea typeface="+mn-ea"/>
-                    <a:cs typeface="+mn-cs"/>
-                  </a:defRPr>
-                </a:lvl9pPr>
-              </a:lstStyle>
-              <a:p>
-                <a:r>
-                  <a:rPr lang="en-US" sz="2000" dirty="0"/>
-                  <a:t>Considering the n_{eff} values for the SOI cross-section, what would be the path difference (</a:t>
-                </a:r>
-                <a14:m>
-                  <m:oMath xmlns:m="http://schemas.openxmlformats.org/officeDocument/2006/math">
-                    <m:r>
-                      <m:rPr>
-                        <m:sty m:val="p"/>
-                      </m:rPr>
-                      <a:rPr lang="es-ES" sz="2000" b="0" i="0" smtClean="0">
-                        <a:latin typeface="Cambria Math" panose="02040503050406030204" pitchFamily="18" charset="0"/>
-                      </a:rPr>
-                      <m:t>ΔL</m:t>
-                    </m:r>
-                    <m:r>
-                      <a:rPr lang="es-ES" sz="2000" b="0" i="1" smtClean="0">
-                        <a:latin typeface="Cambria Math" panose="02040503050406030204" pitchFamily="18" charset="0"/>
-                      </a:rPr>
-                      <m:t>= </m:t>
-                    </m:r>
-                    <m:sSub>
-                      <m:sSubPr>
-                        <m:ctrlPr>
-                          <a:rPr lang="es-ES" sz="2000" i="1" smtClean="0">
-                            <a:latin typeface="Cambria Math" panose="02040503050406030204" pitchFamily="18" charset="0"/>
-                          </a:rPr>
-                        </m:ctrlPr>
-                      </m:sSubPr>
-                      <m:e>
-                        <m:r>
-                          <a:rPr lang="es-ES" sz="2000" b="0" i="1" smtClean="0">
-                            <a:latin typeface="Cambria Math" panose="02040503050406030204" pitchFamily="18" charset="0"/>
-                          </a:rPr>
-                          <m:t>𝐿</m:t>
-                        </m:r>
-                      </m:e>
-                      <m:sub>
-                        <m:r>
-                          <a:rPr lang="es-ES" sz="2000" b="0" i="1" smtClean="0">
-                            <a:latin typeface="Cambria Math" panose="02040503050406030204" pitchFamily="18" charset="0"/>
-                          </a:rPr>
-                          <m:t>𝑢</m:t>
-                        </m:r>
-                      </m:sub>
-                    </m:sSub>
-                    <m:r>
-                      <a:rPr lang="es-ES" sz="2000" b="0" i="1" smtClean="0">
-                        <a:latin typeface="Cambria Math" panose="02040503050406030204" pitchFamily="18" charset="0"/>
-                      </a:rPr>
-                      <m:t> −</m:t>
-                    </m:r>
-                    <m:sSub>
-                      <m:sSubPr>
-                        <m:ctrlPr>
-                          <a:rPr lang="es-ES" sz="2000" i="1">
-                            <a:latin typeface="Cambria Math" panose="02040503050406030204" pitchFamily="18" charset="0"/>
-                          </a:rPr>
-                        </m:ctrlPr>
-                      </m:sSubPr>
-                      <m:e>
-                        <m:r>
-                          <a:rPr lang="es-ES" sz="2000" b="0" i="1">
-                            <a:latin typeface="Cambria Math" panose="02040503050406030204" pitchFamily="18" charset="0"/>
-                          </a:rPr>
-                          <m:t>𝐿</m:t>
-                        </m:r>
-                      </m:e>
-                      <m:sub>
-                        <m:r>
-                          <a:rPr lang="es-ES" sz="2000" b="0" i="1" smtClean="0">
-                            <a:latin typeface="Cambria Math" panose="02040503050406030204" pitchFamily="18" charset="0"/>
-                          </a:rPr>
-                          <m:t>𝑑</m:t>
-                        </m:r>
-                      </m:sub>
-                    </m:sSub>
-                  </m:oMath>
-                </a14:m>
-                <a:r>
-                  <a:rPr lang="en-US" sz="2000" dirty="0"/>
-                  <a:t>) needed to obtain a Free Spectral Range of 40 nm? Introduce the obtained value in the model to check the MZI response. </a:t>
-                </a:r>
-              </a:p>
-              <a:p>
-                <a:endParaRPr lang="en-US" sz="2000" dirty="0"/>
-              </a:p>
-              <a:p>
-                <a:r>
-                  <a:rPr lang="en-US" sz="2000" dirty="0"/>
-                  <a:t>Hint: We assume 1550 nm as the central design wavelength (</a:t>
-                </a:r>
-                <a14:m>
-                  <m:oMath xmlns:m="http://schemas.openxmlformats.org/officeDocument/2006/math">
-                    <m:sSub>
-                      <m:sSubPr>
-                        <m:ctrlPr>
-                          <a:rPr lang="es-ES" sz="2000" i="1" smtClean="0">
-                            <a:latin typeface="Cambria Math" panose="02040503050406030204" pitchFamily="18" charset="0"/>
-                          </a:rPr>
-                        </m:ctrlPr>
-                      </m:sSubPr>
-                      <m:e>
-                        <m:r>
-                          <a:rPr lang="es-ES" sz="2000" i="1">
-                            <a:latin typeface="Cambria Math" panose="02040503050406030204" pitchFamily="18" charset="0"/>
-                          </a:rPr>
-                          <m:t>𝜆</m:t>
-                        </m:r>
-                      </m:e>
-                      <m:sub>
-                        <m:r>
-                          <a:rPr lang="es-ES" sz="2000" b="0" i="1" smtClean="0">
-                            <a:latin typeface="Cambria Math" panose="02040503050406030204" pitchFamily="18" charset="0"/>
-                          </a:rPr>
-                          <m:t>0</m:t>
-                        </m:r>
-                      </m:sub>
-                    </m:sSub>
-                    <m:r>
-                      <a:rPr lang="es-ES" sz="2000" b="0" i="1" smtClean="0">
-                        <a:latin typeface="Cambria Math" panose="02040503050406030204" pitchFamily="18" charset="0"/>
-                      </a:rPr>
-                      <m:t>= </m:t>
-                    </m:r>
-                  </m:oMath>
-                </a14:m>
-                <a:r>
-                  <a:rPr lang="en-US" sz="2000" dirty="0"/>
-                  <a:t>1550 nm).</a:t>
-                </a:r>
-              </a:p>
-              <a:p>
-                <a:endParaRPr lang="en-US" sz="2000" dirty="0"/>
-              </a:p>
-              <a:p>
-                <a:pPr algn="just"/>
-                <a:endParaRPr lang="en-US" sz="2000" dirty="0"/>
-              </a:p>
-              <a:p>
-                <a:pPr algn="just"/>
-                <a:endParaRPr lang="en-US" sz="2000" b="1" i="1" dirty="0"/>
-              </a:p>
-              <a:p>
-                <a:pPr algn="just"/>
-                <a:endParaRPr lang="en-US" sz="2000" kern="0" dirty="0">
-                  <a:solidFill>
-                    <a:sysClr val="windowText" lastClr="000000"/>
-                  </a:solidFill>
-                </a:endParaRPr>
-              </a:p>
-              <a:p>
-                <a:endParaRPr lang="en-US" sz="2000" kern="0" dirty="0">
-                  <a:solidFill>
-                    <a:sysClr val="windowText" lastClr="000000"/>
-                  </a:solidFill>
-                </a:endParaRPr>
-              </a:p>
-            </p:txBody>
-          </p:sp>
-        </mc:Choice>
-        <mc:Fallback xmlns="">
-          <p:sp>
-            <p:nvSpPr>
-              <p:cNvPr id="4" name="Marcador de texto 2">
-                <a:extLst>
-                  <a:ext uri="{FF2B5EF4-FFF2-40B4-BE49-F238E27FC236}">
-                    <a16:creationId xmlns:a16="http://schemas.microsoft.com/office/drawing/2014/main" id="{BBBE28D8-49EC-3B49-29AC-FD2FDAF3B0AF}"/>
-                  </a:ext>
-                </a:extLst>
-              </p:cNvPr>
-              <p:cNvSpPr txBox="1">
-                <a:spLocks noRot="1" noChangeAspect="1" noMove="1" noResize="1" noEditPoints="1" noAdjustHandles="1" noChangeArrowheads="1" noChangeShapeType="1" noTextEdit="1"/>
-              </p:cNvSpPr>
-              <p:nvPr/>
-            </p:nvSpPr>
-            <p:spPr>
-              <a:xfrm>
-                <a:off x="608012" y="1295400"/>
-                <a:ext cx="11048999" cy="4958137"/>
-              </a:xfrm>
-              <a:prstGeom prst="rect">
-                <a:avLst/>
-              </a:prstGeom>
-              <a:blipFill>
-                <a:blip r:embed="rId6"/>
-                <a:stretch>
-                  <a:fillRect l="-607" t="-738"/>
-                </a:stretch>
-              </a:blipFill>
-            </p:spPr>
-            <p:txBody>
-              <a:bodyPr/>
-              <a:lstStyle/>
-              <a:p>
-                <a:r>
-                  <a:rPr lang="es-ES">
-                    <a:noFill/>
-                  </a:rPr>
-                  <a:t> </a:t>
-                </a:r>
-              </a:p>
-            </p:txBody>
-          </p:sp>
-        </mc:Fallback>
-      </mc:AlternateContent>
-      <p:sp>
-        <p:nvSpPr>
-          <p:cNvPr id="2" name="CuadroTexto 1">
-            <a:extLst>
-              <a:ext uri="{FF2B5EF4-FFF2-40B4-BE49-F238E27FC236}">
-                <a16:creationId xmlns:a16="http://schemas.microsoft.com/office/drawing/2014/main" id="{CFDBBA6B-3646-055F-7A9C-EE01830137BE}"/>
+      <p:sp>
+        <p:nvSpPr>
+          <p:cNvPr id="9" name="CuadroTexto 8">
+            <a:extLst>
+              <a:ext uri="{FF2B5EF4-FFF2-40B4-BE49-F238E27FC236}">
+                <a16:creationId xmlns:a16="http://schemas.microsoft.com/office/drawing/2014/main" id="{59C237E9-2224-C27D-1451-39876FA3E170}"/>
               </a:ext>
             </a:extLst>
           </p:cNvPr>
@@ -3508,125 +3456,39 @@
         </p:nvSpPr>
         <p:spPr>
           <a:xfrm>
-            <a:off x="609441" y="4860334"/>
-            <a:ext cx="11199971" cy="1384995"/>
+            <a:off x="4191000" y="1066800"/>
+            <a:ext cx="3048000" cy="369332"/>
           </a:xfrm>
           <a:prstGeom prst="rect">
             <a:avLst/>
           </a:prstGeom>
-          <a:solidFill>
-            <a:schemeClr val="bg1">
-              <a:lumMod val="95000"/>
-            </a:schemeClr>
-          </a:solidFill>
-          <a:ln w="28575">
-            <a:solidFill>
-              <a:srgbClr val="E0700D"/>
-            </a:solidFill>
-          </a:ln>
+          <a:noFill/>
         </p:spPr>
         <p:txBody>
-          <a:bodyPr wrap="square" rtlCol="0">
+          <a:bodyPr wrap="square">
             <a:spAutoFit/>
           </a:bodyPr>
           <a:lstStyle/>
           <a:p>
-            <a:pPr algn="just"/>
-            <a:r>
-              <a:rPr lang="en-US" sz="1200" dirty="0">
-                <a:latin typeface="Arial" panose="020B0604020202020204" pitchFamily="34" charset="0"/>
-                <a:cs typeface="Arial" panose="020B0604020202020204" pitchFamily="34" charset="0"/>
-              </a:rPr>
-              <a:t>Document all your results (copy here the code employed to obtain the corresponding value)</a:t>
-            </a:r>
-          </a:p>
-          <a:p>
-            <a:pPr algn="just"/>
-            <a:endParaRPr lang="en-US" sz="1200" dirty="0">
-              <a:latin typeface="Arial" panose="020B0604020202020204" pitchFamily="34" charset="0"/>
-              <a:cs typeface="Arial" panose="020B0604020202020204" pitchFamily="34" charset="0"/>
-            </a:endParaRPr>
-          </a:p>
-          <a:p>
-            <a:pPr algn="just"/>
-            <a:endParaRPr lang="en-US" sz="1200" dirty="0">
-              <a:latin typeface="Arial" panose="020B0604020202020204" pitchFamily="34" charset="0"/>
-              <a:cs typeface="Arial" panose="020B0604020202020204" pitchFamily="34" charset="0"/>
-            </a:endParaRPr>
-          </a:p>
-          <a:p>
-            <a:pPr algn="just"/>
-            <a:endParaRPr lang="en-US" sz="1200" dirty="0">
-              <a:latin typeface="Arial" panose="020B0604020202020204" pitchFamily="34" charset="0"/>
-              <a:cs typeface="Arial" panose="020B0604020202020204" pitchFamily="34" charset="0"/>
-            </a:endParaRPr>
-          </a:p>
-          <a:p>
-            <a:pPr algn="just"/>
-            <a:endParaRPr lang="en-US" sz="1200" dirty="0">
-              <a:latin typeface="Arial" panose="020B0604020202020204" pitchFamily="34" charset="0"/>
-              <a:cs typeface="Arial" panose="020B0604020202020204" pitchFamily="34" charset="0"/>
-            </a:endParaRPr>
-          </a:p>
-          <a:p>
-            <a:pPr algn="just"/>
-            <a:endParaRPr lang="en-US" sz="1200" dirty="0">
-              <a:latin typeface="Arial" panose="020B0604020202020204" pitchFamily="34" charset="0"/>
-              <a:cs typeface="Arial" panose="020B0604020202020204" pitchFamily="34" charset="0"/>
-            </a:endParaRPr>
-          </a:p>
-          <a:p>
-            <a:pPr algn="just"/>
-            <a:endParaRPr lang="en-US" sz="1200" dirty="0">
-              <a:latin typeface="Arial" panose="020B0604020202020204" pitchFamily="34" charset="0"/>
-              <a:cs typeface="Arial" panose="020B0604020202020204" pitchFamily="34" charset="0"/>
-            </a:endParaRPr>
-          </a:p>
-        </p:txBody>
-      </p:sp>
-      <p:sp>
-        <p:nvSpPr>
-          <p:cNvPr id="5" name="Marcador de pie de página 2">
-            <a:extLst>
-              <a:ext uri="{FF2B5EF4-FFF2-40B4-BE49-F238E27FC236}">
-                <a16:creationId xmlns:a16="http://schemas.microsoft.com/office/drawing/2014/main" id="{97B81335-0738-3406-18D4-5D88EB0C7954}"/>
-              </a:ext>
-            </a:extLst>
-          </p:cNvPr>
-          <p:cNvSpPr>
-            <a:spLocks noGrp="1"/>
-          </p:cNvSpPr>
-          <p:nvPr>
-            <p:ph type="ftr" sz="quarter" idx="5"/>
-          </p:nvPr>
-        </p:nvSpPr>
-        <p:spPr>
-          <a:xfrm>
-            <a:off x="609600" y="6457057"/>
-            <a:ext cx="2743200" cy="184666"/>
-          </a:xfrm>
-        </p:spPr>
-        <p:txBody>
-          <a:bodyPr/>
-          <a:lstStyle/>
-          <a:p>
-            <a:pPr marL="12700">
-              <a:spcBef>
-                <a:spcPts val="15"/>
-              </a:spcBef>
-            </a:pPr>
-            <a:r>
-              <a:rPr lang="es-ES" spc="-5"/>
-              <a:t>LAB 3. INTERFEROMETERS I</a:t>
-            </a:r>
-            <a:endParaRPr lang="es-ES" spc="-5" dirty="0"/>
+            <a:r>
+              <a:rPr lang="en-US" dirty="0"/>
+              <a:t>Mirar </a:t>
+            </a:r>
+            <a:r>
+              <a:rPr lang="en-US" dirty="0" err="1"/>
+              <a:t>el</a:t>
+            </a:r>
+            <a:r>
+              <a:rPr lang="en-US" dirty="0"/>
+              <a:t> assessment guideline</a:t>
+            </a:r>
           </a:p>
         </p:txBody>
       </p:sp>
     </p:spTree>
     <p:extLst>
       <p:ext uri="{BB962C8B-B14F-4D97-AF65-F5344CB8AC3E}">
-        <p14:creationId xmlns:p14="http://schemas.microsoft.com/office/powerpoint/2010/main" val="2337098194"/>
+        <p14:creationId xmlns:p14="http://schemas.microsoft.com/office/powerpoint/2010/main" val="250300453"/>
       </p:ext>
     </p:extLst>
   </p:cSld>
@@ -3644,7 +3506,7 @@
         <p:cNvPr id="1" name="">
           <a:extLst>
             <a:ext uri="{FF2B5EF4-FFF2-40B4-BE49-F238E27FC236}">
-              <a16:creationId xmlns:a16="http://schemas.microsoft.com/office/drawing/2014/main" id="{98CB9552-DF22-1310-10FA-4D2D2AF77601}"/>
+              <a16:creationId xmlns:a16="http://schemas.microsoft.com/office/drawing/2014/main" id="{D923F582-340E-9B96-CF1D-8C7138583BA8}"/>
             </a:ext>
           </a:extLst>
         </p:cNvPr>
@@ -3661,70 +3523,113 @@
       </p:grpSpPr>
       <p:sp>
         <p:nvSpPr>
-          <p:cNvPr id="16" name="object 16">
-            <a:extLst>
-              <a:ext uri="{FF2B5EF4-FFF2-40B4-BE49-F238E27FC236}">
-                <a16:creationId xmlns:a16="http://schemas.microsoft.com/office/drawing/2014/main" id="{B0632A48-0384-0EF1-389E-FBF3F9C3E7CE}"/>
-              </a:ext>
-            </a:extLst>
-          </p:cNvPr>
-          <p:cNvSpPr txBox="1">
+          <p:cNvPr id="2" name="Título 1">
+            <a:extLst>
+              <a:ext uri="{FF2B5EF4-FFF2-40B4-BE49-F238E27FC236}">
+                <a16:creationId xmlns:a16="http://schemas.microsoft.com/office/drawing/2014/main" id="{9970076C-2C05-99CC-2D5A-2598DDC8B952}"/>
+              </a:ext>
+            </a:extLst>
+          </p:cNvPr>
+          <p:cNvSpPr>
             <a:spLocks noGrp="1"/>
           </p:cNvSpPr>
           <p:nvPr>
             <p:ph type="title"/>
           </p:nvPr>
         </p:nvSpPr>
-        <p:spPr>
-          <a:xfrm>
-            <a:off x="685800" y="408883"/>
-            <a:ext cx="10994410" cy="782265"/>
-          </a:xfrm>
-          <a:prstGeom prst="rect">
-            <a:avLst/>
-          </a:prstGeom>
-        </p:spPr>
-        <p:txBody>
-          <a:bodyPr vert="horz" wrap="square" lIns="0" tIns="12700" rIns="0" bIns="0" rtlCol="0">
-            <a:spAutoFit/>
-          </a:bodyPr>
+        <p:spPr/>
+        <p:txBody>
+          <a:bodyPr/>
           <a:lstStyle/>
           <a:p>
+            <a:r>
+              <a:rPr lang="es-ES" dirty="0" err="1"/>
+              <a:t>Balanced</a:t>
+            </a:r>
+            <a:r>
+              <a:rPr lang="es-ES" dirty="0"/>
+              <a:t> </a:t>
+            </a:r>
+            <a:r>
+              <a:rPr lang="es-ES" dirty="0" err="1"/>
+              <a:t>configuration</a:t>
+            </a:r>
+            <a:r>
+              <a:rPr lang="es-ES" dirty="0"/>
+              <a:t> </a:t>
+            </a:r>
+          </a:p>
+        </p:txBody>
+      </p:sp>
+      <p:sp>
+        <p:nvSpPr>
+          <p:cNvPr id="4" name="Marcador de pie de página 3">
+            <a:extLst>
+              <a:ext uri="{FF2B5EF4-FFF2-40B4-BE49-F238E27FC236}">
+                <a16:creationId xmlns:a16="http://schemas.microsoft.com/office/drawing/2014/main" id="{A9E6AA47-F245-B57B-2C6B-59E0FFADE7B2}"/>
+              </a:ext>
+            </a:extLst>
+          </p:cNvPr>
+          <p:cNvSpPr>
+            <a:spLocks noGrp="1"/>
+          </p:cNvSpPr>
+          <p:nvPr>
+            <p:ph type="ftr" sz="quarter" idx="5"/>
+          </p:nvPr>
+        </p:nvSpPr>
+        <p:spPr/>
+        <p:txBody>
+          <a:bodyPr/>
+          <a:lstStyle/>
+          <a:p>
             <a:pPr marL="12700">
-              <a:lnSpc>
-                <a:spcPct val="100000"/>
-              </a:lnSpc>
               <a:spcBef>
-                <a:spcPts val="100"/>
+                <a:spcPts val="15"/>
               </a:spcBef>
             </a:pPr>
             <a:r>
-              <a:rPr lang="en-US" sz="2400" b="1" dirty="0"/>
-              <a:t>ASSESSMENT #3 </a:t>
-            </a:r>
-            <a:r>
-              <a:rPr lang="en-US" sz="2500" dirty="0"/>
-              <a:t>– SAX implementation </a:t>
-            </a:r>
-            <a:br>
-              <a:rPr lang="es-ES" sz="2500" spc="-5" dirty="0">
-                <a:latin typeface="+mj-lt"/>
-                <a:cs typeface="Lucida Sans"/>
-              </a:rPr>
-            </a:br>
-            <a:endParaRPr sz="2500" b="0" dirty="0">
-              <a:latin typeface="+mj-lt"/>
-              <a:cs typeface="Lucida Sans"/>
-            </a:endParaRPr>
+              <a:rPr lang="es-ES" spc="-5"/>
+              <a:t>LAB 3. INTERFEROMETERS I</a:t>
+            </a:r>
+            <a:endParaRPr lang="es-ES" spc="-5" dirty="0"/>
+          </a:p>
+        </p:txBody>
+      </p:sp>
+      <p:sp>
+        <p:nvSpPr>
+          <p:cNvPr id="5" name="Marcador de número de diapositiva 4">
+            <a:extLst>
+              <a:ext uri="{FF2B5EF4-FFF2-40B4-BE49-F238E27FC236}">
+                <a16:creationId xmlns:a16="http://schemas.microsoft.com/office/drawing/2014/main" id="{336350EA-120E-0A3E-E679-0B5DB5700157}"/>
+              </a:ext>
+            </a:extLst>
+          </p:cNvPr>
+          <p:cNvSpPr>
+            <a:spLocks noGrp="1"/>
+          </p:cNvSpPr>
+          <p:nvPr>
+            <p:ph type="sldNum" sz="quarter" idx="7"/>
+          </p:nvPr>
+        </p:nvSpPr>
+        <p:spPr/>
+        <p:txBody>
+          <a:bodyPr/>
+          <a:lstStyle/>
+          <a:p>
+            <a:fld id="{B6F15528-21DE-4FAA-801E-634DDDAF4B2B}" type="slidenum">
+              <a:rPr lang="es-ES" smtClean="0"/>
+              <a:t>12</a:t>
+            </a:fld>
+            <a:endParaRPr lang="es-ES"/>
           </a:p>
         </p:txBody>
       </p:sp>
       <p:pic>
         <p:nvPicPr>
-          <p:cNvPr id="83" name="Gráfico 82">
-            <a:extLst>
-              <a:ext uri="{FF2B5EF4-FFF2-40B4-BE49-F238E27FC236}">
-                <a16:creationId xmlns:a16="http://schemas.microsoft.com/office/drawing/2014/main" id="{1F43E6A6-5CC3-9B99-14AC-997478150C3D}"/>
+          <p:cNvPr id="7" name="Imagen 6" descr="Gráfico, Gráfico de líneas&#10;&#10;El contenido generado por IA puede ser incorrecto.">
+            <a:extLst>
+              <a:ext uri="{FF2B5EF4-FFF2-40B4-BE49-F238E27FC236}">
+                <a16:creationId xmlns:a16="http://schemas.microsoft.com/office/drawing/2014/main" id="{C3383052-1C49-E03E-EC57-A4185DB1E4CD}"/>
               </a:ext>
             </a:extLst>
           </p:cNvPr>
@@ -3734,21 +3639,15 @@
           <p:nvPr/>
         </p:nvPicPr>
         <p:blipFill>
-          <a:blip r:embed="rId3">
-            <a:extLst>
-              <a:ext uri="{96DAC541-7B7A-43D3-8B79-37D633B846F1}">
-                <asvg:svgBlip xmlns:asvg="http://schemas.microsoft.com/office/drawing/2016/SVG/main" r:embed="rId4"/>
-              </a:ext>
-            </a:extLst>
-          </a:blip>
+          <a:blip r:embed="rId2"/>
           <a:stretch>
             <a:fillRect/>
           </a:stretch>
         </p:blipFill>
         <p:spPr>
           <a:xfrm>
-            <a:off x="5045006" y="6356057"/>
-            <a:ext cx="6409575" cy="363174"/>
+            <a:off x="609600" y="1905000"/>
+            <a:ext cx="4667901" cy="3743847"/>
           </a:xfrm>
           <a:prstGeom prst="rect">
             <a:avLst/>
@@ -3757,604 +3656,73 @@
       </p:pic>
       <p:sp>
         <p:nvSpPr>
-          <p:cNvPr id="84" name="Marcador de número de diapositiva 83">
-            <a:extLst>
-              <a:ext uri="{FF2B5EF4-FFF2-40B4-BE49-F238E27FC236}">
-                <a16:creationId xmlns:a16="http://schemas.microsoft.com/office/drawing/2014/main" id="{DFC09DB6-1DF7-C8F9-7414-27BC280DEA0F}"/>
-              </a:ext>
-            </a:extLst>
-          </p:cNvPr>
-          <p:cNvSpPr>
-            <a:spLocks noGrp="1"/>
-          </p:cNvSpPr>
-          <p:nvPr>
-            <p:ph type="sldNum" sz="quarter" idx="7"/>
-          </p:nvPr>
-        </p:nvSpPr>
-        <p:spPr/>
-        <p:txBody>
-          <a:bodyPr/>
-          <a:lstStyle/>
-          <a:p>
-            <a:fld id="{B6F15528-21DE-4FAA-801E-634DDDAF4B2B}" type="slidenum">
-              <a:rPr lang="es-ES" smtClean="0"/>
-              <a:t>12</a:t>
-            </a:fld>
-            <a:endParaRPr lang="es-ES"/>
-          </a:p>
-        </p:txBody>
-      </p:sp>
-      <p:sp>
-        <p:nvSpPr>
-          <p:cNvPr id="4" name="Marcador de texto 2">
-            <a:extLst>
-              <a:ext uri="{FF2B5EF4-FFF2-40B4-BE49-F238E27FC236}">
-                <a16:creationId xmlns:a16="http://schemas.microsoft.com/office/drawing/2014/main" id="{EBC8DCFA-5565-A757-1F8D-F4CCCF573A63}"/>
-              </a:ext>
-            </a:extLst>
-          </p:cNvPr>
-          <p:cNvSpPr txBox="1">
-            <a:spLocks/>
-          </p:cNvSpPr>
+          <p:cNvPr id="9" name="CuadroTexto 8">
+            <a:extLst>
+              <a:ext uri="{FF2B5EF4-FFF2-40B4-BE49-F238E27FC236}">
+                <a16:creationId xmlns:a16="http://schemas.microsoft.com/office/drawing/2014/main" id="{1ADBDA43-A35D-DD2B-5E00-538D63FC4BC1}"/>
+              </a:ext>
+            </a:extLst>
+          </p:cNvPr>
+          <p:cNvSpPr txBox="1"/>
           <p:nvPr/>
         </p:nvSpPr>
         <p:spPr>
           <a:xfrm>
-            <a:off x="571500" y="1066800"/>
-            <a:ext cx="11048999" cy="4958137"/>
+            <a:off x="5715000" y="2133600"/>
+            <a:ext cx="6128326" cy="1477328"/>
+          </a:xfrm>
+          <a:prstGeom prst="rect">
+            <a:avLst/>
+          </a:prstGeom>
+          <a:noFill/>
+        </p:spPr>
+        <p:txBody>
+          <a:bodyPr wrap="square">
+            <a:spAutoFit/>
+          </a:bodyPr>
+          <a:lstStyle/>
+          <a:p>
+            <a:r>
+              <a:rPr lang="es-ES" dirty="0"/>
+              <a:t>Como la fase acumulada en los dos brazos es idéntica, por lo que su diferencia es 0, y no se produce ni interferencia constructivas ni destructivas por lo que la salida se mantiene constante, y al ser constante no presenta periodicidad espectral. </a:t>
+            </a:r>
+          </a:p>
+        </p:txBody>
+      </p:sp>
+      <p:pic>
+        <p:nvPicPr>
+          <p:cNvPr id="6" name="Imagen 5">
+            <a:extLst>
+              <a:ext uri="{FF2B5EF4-FFF2-40B4-BE49-F238E27FC236}">
+                <a16:creationId xmlns:a16="http://schemas.microsoft.com/office/drawing/2014/main" id="{9C05DC71-9E9C-094D-EEC8-E01FD79B9ED8}"/>
+              </a:ext>
+            </a:extLst>
+          </p:cNvPr>
+          <p:cNvPicPr>
+            <a:picLocks noChangeAspect="1"/>
+          </p:cNvPicPr>
+          <p:nvPr/>
+        </p:nvPicPr>
+        <p:blipFill>
+          <a:blip r:embed="rId3"/>
+          <a:stretch>
+            <a:fillRect/>
+          </a:stretch>
+        </p:blipFill>
+        <p:spPr>
+          <a:xfrm>
+            <a:off x="348674" y="685800"/>
+            <a:ext cx="9678751" cy="847843"/>
           </a:xfrm>
           <a:prstGeom prst="rect">
             <a:avLst/>
           </a:prstGeom>
         </p:spPr>
-        <p:txBody>
-          <a:bodyPr>
-            <a:normAutofit/>
-          </a:bodyPr>
-          <a:lstStyle>
-            <a:lvl1pPr marL="0">
-              <a:defRPr>
-                <a:latin typeface="+mn-lt"/>
-                <a:ea typeface="+mn-ea"/>
-                <a:cs typeface="+mn-cs"/>
-              </a:defRPr>
-            </a:lvl1pPr>
-            <a:lvl2pPr marL="457200">
-              <a:defRPr>
-                <a:latin typeface="+mn-lt"/>
-                <a:ea typeface="+mn-ea"/>
-                <a:cs typeface="+mn-cs"/>
-              </a:defRPr>
-            </a:lvl2pPr>
-            <a:lvl3pPr marL="914400">
-              <a:defRPr>
-                <a:latin typeface="+mn-lt"/>
-                <a:ea typeface="+mn-ea"/>
-                <a:cs typeface="+mn-cs"/>
-              </a:defRPr>
-            </a:lvl3pPr>
-            <a:lvl4pPr marL="1371600">
-              <a:defRPr>
-                <a:latin typeface="+mn-lt"/>
-                <a:ea typeface="+mn-ea"/>
-                <a:cs typeface="+mn-cs"/>
-              </a:defRPr>
-            </a:lvl4pPr>
-            <a:lvl5pPr marL="1828800">
-              <a:defRPr>
-                <a:latin typeface="+mn-lt"/>
-                <a:ea typeface="+mn-ea"/>
-                <a:cs typeface="+mn-cs"/>
-              </a:defRPr>
-            </a:lvl5pPr>
-            <a:lvl6pPr marL="2286000">
-              <a:defRPr>
-                <a:latin typeface="+mn-lt"/>
-                <a:ea typeface="+mn-ea"/>
-                <a:cs typeface="+mn-cs"/>
-              </a:defRPr>
-            </a:lvl6pPr>
-            <a:lvl7pPr marL="2743200">
-              <a:defRPr>
-                <a:latin typeface="+mn-lt"/>
-                <a:ea typeface="+mn-ea"/>
-                <a:cs typeface="+mn-cs"/>
-              </a:defRPr>
-            </a:lvl7pPr>
-            <a:lvl8pPr marL="3200400">
-              <a:defRPr>
-                <a:latin typeface="+mn-lt"/>
-                <a:ea typeface="+mn-ea"/>
-                <a:cs typeface="+mn-cs"/>
-              </a:defRPr>
-            </a:lvl8pPr>
-            <a:lvl9pPr marL="3657600">
-              <a:defRPr>
-                <a:latin typeface="+mn-lt"/>
-                <a:ea typeface="+mn-ea"/>
-                <a:cs typeface="+mn-cs"/>
-              </a:defRPr>
-            </a:lvl9pPr>
-          </a:lstStyle>
-          <a:p>
-            <a:r>
-              <a:rPr lang="en-US" dirty="0"/>
-              <a:t>Now, we are going to implement the design parameters in the MZI model developed in SAX and compare the response obtained with the one simulated by mathematical formulation. This will help us to identify any error in the definition of the SAX model single components. </a:t>
-            </a:r>
-          </a:p>
-          <a:p>
-            <a:br>
-              <a:rPr lang="en-US" dirty="0"/>
-            </a:br>
-            <a:r>
-              <a:rPr lang="en-US" dirty="0"/>
-              <a:t>In order to implement the SAX model, take as example the following lines:</a:t>
-            </a:r>
-          </a:p>
-          <a:p>
-            <a:endParaRPr lang="en-US" dirty="0"/>
-          </a:p>
-          <a:p>
-            <a:pPr lvl="2">
-              <a:lnSpc>
-                <a:spcPts val="1425"/>
-              </a:lnSpc>
-            </a:pPr>
-            <a:r>
-              <a:rPr lang="es-ES" sz="1400" b="0" dirty="0">
-                <a:effectLst/>
-                <a:latin typeface="Courier New" panose="02070309020205020404" pitchFamily="49" charset="0"/>
-              </a:rPr>
-              <a:t> </a:t>
-            </a:r>
-            <a:r>
-              <a:rPr lang="es-ES" sz="1400" b="0" dirty="0" err="1">
-                <a:effectLst/>
-                <a:latin typeface="Courier New" panose="02070309020205020404" pitchFamily="49" charset="0"/>
-              </a:rPr>
-              <a:t>mzi_test</a:t>
-            </a:r>
-            <a:r>
-              <a:rPr lang="es-ES" sz="1400" b="0" dirty="0">
-                <a:effectLst/>
-                <a:latin typeface="Courier New" panose="02070309020205020404" pitchFamily="49" charset="0"/>
-              </a:rPr>
-              <a:t> = </a:t>
-            </a:r>
-            <a:r>
-              <a:rPr lang="es-ES" sz="1400" b="0" dirty="0" err="1">
-                <a:effectLst/>
-                <a:latin typeface="Courier New" panose="02070309020205020404" pitchFamily="49" charset="0"/>
-              </a:rPr>
-              <a:t>mzi</a:t>
-            </a:r>
-            <a:r>
-              <a:rPr lang="es-ES" sz="1400" b="0" dirty="0">
-                <a:effectLst/>
-                <a:latin typeface="Courier New" panose="02070309020205020404" pitchFamily="49" charset="0"/>
-              </a:rPr>
-              <a:t>(</a:t>
-            </a:r>
-            <a:r>
-              <a:rPr lang="es-ES" sz="1400" b="0" dirty="0" err="1">
-                <a:effectLst/>
-                <a:latin typeface="Courier New" panose="02070309020205020404" pitchFamily="49" charset="0"/>
-              </a:rPr>
-              <a:t>wl</a:t>
-            </a:r>
-            <a:r>
-              <a:rPr lang="es-ES" sz="1400" b="0" dirty="0">
-                <a:effectLst/>
-                <a:latin typeface="Courier New" panose="02070309020205020404" pitchFamily="49" charset="0"/>
-              </a:rPr>
-              <a:t>=</a:t>
-            </a:r>
-            <a:r>
-              <a:rPr lang="es-ES" sz="1400" b="0" dirty="0" err="1">
-                <a:effectLst/>
-                <a:latin typeface="Courier New" panose="02070309020205020404" pitchFamily="49" charset="0"/>
-              </a:rPr>
-              <a:t>wl</a:t>
-            </a:r>
-            <a:r>
-              <a:rPr lang="es-ES" sz="1400" b="0" dirty="0">
-                <a:effectLst/>
-                <a:latin typeface="Courier New" panose="02070309020205020404" pitchFamily="49" charset="0"/>
-              </a:rPr>
-              <a:t>, </a:t>
-            </a:r>
-          </a:p>
-          <a:p>
-            <a:pPr lvl="2">
-              <a:lnSpc>
-                <a:spcPts val="1425"/>
-              </a:lnSpc>
-            </a:pPr>
-            <a:r>
-              <a:rPr lang="es-ES" sz="1400" b="0" dirty="0">
-                <a:effectLst/>
-                <a:latin typeface="Courier New" panose="02070309020205020404" pitchFamily="49" charset="0"/>
-              </a:rPr>
-              <a:t>    </a:t>
-            </a:r>
-            <a:r>
-              <a:rPr lang="es-ES" sz="1400" b="0" dirty="0" err="1">
-                <a:effectLst/>
-                <a:latin typeface="Courier New" panose="02070309020205020404" pitchFamily="49" charset="0"/>
-              </a:rPr>
-              <a:t>coup_a</a:t>
-            </a:r>
-            <a:r>
-              <a:rPr lang="es-ES" sz="1400" b="0" dirty="0">
-                <a:effectLst/>
-                <a:latin typeface="Courier New" panose="02070309020205020404" pitchFamily="49" charset="0"/>
-              </a:rPr>
-              <a:t> = ...</a:t>
-            </a:r>
-          </a:p>
-          <a:p>
-            <a:pPr lvl="2">
-              <a:lnSpc>
-                <a:spcPts val="1425"/>
-              </a:lnSpc>
-            </a:pPr>
-            <a:r>
-              <a:rPr lang="es-ES" sz="1400" b="0" dirty="0">
-                <a:effectLst/>
-                <a:latin typeface="Courier New" panose="02070309020205020404" pitchFamily="49" charset="0"/>
-              </a:rPr>
-              <a:t>    </a:t>
-            </a:r>
-            <a:r>
-              <a:rPr lang="es-ES" sz="1400" b="0" dirty="0" err="1">
-                <a:effectLst/>
-                <a:latin typeface="Courier New" panose="02070309020205020404" pitchFamily="49" charset="0"/>
-              </a:rPr>
-              <a:t>wvg_d</a:t>
-            </a:r>
-            <a:r>
-              <a:rPr lang="es-ES" sz="1400" b="0" dirty="0">
-                <a:effectLst/>
-                <a:latin typeface="Courier New" panose="02070309020205020404" pitchFamily="49" charset="0"/>
-              </a:rPr>
-              <a:t>={"</a:t>
-            </a:r>
-            <a:r>
-              <a:rPr lang="es-ES" sz="1400" b="0" dirty="0" err="1">
-                <a:effectLst/>
-                <a:latin typeface="Courier New" panose="02070309020205020404" pitchFamily="49" charset="0"/>
-              </a:rPr>
-              <a:t>length</a:t>
-            </a:r>
-            <a:r>
-              <a:rPr lang="es-ES" sz="1400" b="0" dirty="0">
-                <a:effectLst/>
-                <a:latin typeface="Courier New" panose="02070309020205020404" pitchFamily="49" charset="0"/>
-              </a:rPr>
-              <a:t>": </a:t>
-            </a:r>
-            <a:r>
-              <a:rPr lang="es-ES" sz="1400" b="0" dirty="0" err="1">
-                <a:effectLst/>
-                <a:latin typeface="Courier New" panose="02070309020205020404" pitchFamily="49" charset="0"/>
-              </a:rPr>
-              <a:t>l_d</a:t>
-            </a:r>
-            <a:r>
-              <a:rPr lang="es-ES" sz="1400" b="0" dirty="0">
-                <a:effectLst/>
-                <a:latin typeface="Courier New" panose="02070309020205020404" pitchFamily="49" charset="0"/>
-              </a:rPr>
-              <a:t>, "</a:t>
-            </a:r>
-            <a:r>
-              <a:rPr lang="es-ES" sz="1400" b="0" dirty="0" err="1">
-                <a:effectLst/>
-                <a:latin typeface="Courier New" panose="02070309020205020404" pitchFamily="49" charset="0"/>
-              </a:rPr>
-              <a:t>neff</a:t>
-            </a:r>
-            <a:r>
-              <a:rPr lang="es-ES" sz="1400" b="0" dirty="0">
-                <a:effectLst/>
-                <a:latin typeface="Courier New" panose="02070309020205020404" pitchFamily="49" charset="0"/>
-              </a:rPr>
-              <a:t>": ...}, </a:t>
-            </a:r>
-          </a:p>
-          <a:p>
-            <a:pPr lvl="2">
-              <a:lnSpc>
-                <a:spcPts val="1425"/>
-              </a:lnSpc>
-            </a:pPr>
-            <a:r>
-              <a:rPr lang="es-ES" sz="1400" b="0" dirty="0">
-                <a:effectLst/>
-                <a:latin typeface="Courier New" panose="02070309020205020404" pitchFamily="49" charset="0"/>
-              </a:rPr>
-              <a:t>    </a:t>
-            </a:r>
-            <a:r>
-              <a:rPr lang="es-ES" sz="1400" b="0" dirty="0" err="1">
-                <a:effectLst/>
-                <a:latin typeface="Courier New" panose="02070309020205020404" pitchFamily="49" charset="0"/>
-              </a:rPr>
-              <a:t>wvg_u</a:t>
-            </a:r>
-            <a:r>
-              <a:rPr lang="es-ES" sz="1400" b="0" dirty="0">
-                <a:effectLst/>
-                <a:latin typeface="Courier New" panose="02070309020205020404" pitchFamily="49" charset="0"/>
-              </a:rPr>
-              <a:t>={"</a:t>
-            </a:r>
-            <a:r>
-              <a:rPr lang="es-ES" sz="1400" b="0" dirty="0" err="1">
-                <a:effectLst/>
-                <a:latin typeface="Courier New" panose="02070309020205020404" pitchFamily="49" charset="0"/>
-              </a:rPr>
-              <a:t>length</a:t>
-            </a:r>
-            <a:r>
-              <a:rPr lang="es-ES" sz="1400" b="0" dirty="0">
-                <a:effectLst/>
-                <a:latin typeface="Courier New" panose="02070309020205020404" pitchFamily="49" charset="0"/>
-              </a:rPr>
-              <a:t>": </a:t>
-            </a:r>
-            <a:r>
-              <a:rPr lang="es-ES" sz="1400" b="0" dirty="0" err="1">
-                <a:effectLst/>
-                <a:latin typeface="Courier New" panose="02070309020205020404" pitchFamily="49" charset="0"/>
-              </a:rPr>
-              <a:t>l_u</a:t>
-            </a:r>
-            <a:r>
-              <a:rPr lang="es-ES" sz="1400" b="0" dirty="0">
-                <a:effectLst/>
-                <a:latin typeface="Courier New" panose="02070309020205020404" pitchFamily="49" charset="0"/>
-              </a:rPr>
-              <a:t>, "</a:t>
-            </a:r>
-            <a:r>
-              <a:rPr lang="es-ES" sz="1400" b="0" dirty="0" err="1">
-                <a:effectLst/>
-                <a:latin typeface="Courier New" panose="02070309020205020404" pitchFamily="49" charset="0"/>
-              </a:rPr>
-              <a:t>neff</a:t>
-            </a:r>
-            <a:r>
-              <a:rPr lang="es-ES" sz="1400" b="0" dirty="0">
-                <a:effectLst/>
-                <a:latin typeface="Courier New" panose="02070309020205020404" pitchFamily="49" charset="0"/>
-              </a:rPr>
-              <a:t>": ...},</a:t>
-            </a:r>
-          </a:p>
-          <a:p>
-            <a:pPr lvl="2">
-              <a:lnSpc>
-                <a:spcPts val="1425"/>
-              </a:lnSpc>
-            </a:pPr>
-            <a:r>
-              <a:rPr lang="es-ES" sz="1400" b="0" dirty="0">
-                <a:effectLst/>
-                <a:latin typeface="Courier New" panose="02070309020205020404" pitchFamily="49" charset="0"/>
-              </a:rPr>
-              <a:t>    </a:t>
-            </a:r>
-            <a:r>
-              <a:rPr lang="es-ES" sz="1400" b="0" dirty="0" err="1">
-                <a:effectLst/>
-                <a:latin typeface="Courier New" panose="02070309020205020404" pitchFamily="49" charset="0"/>
-              </a:rPr>
-              <a:t>coup_b</a:t>
-            </a:r>
-            <a:r>
-              <a:rPr lang="es-ES" sz="1400" b="0" dirty="0">
-                <a:effectLst/>
-                <a:latin typeface="Courier New" panose="02070309020205020404" pitchFamily="49" charset="0"/>
-              </a:rPr>
-              <a:t> = ... )</a:t>
-            </a:r>
-          </a:p>
-          <a:p>
-            <a:pPr lvl="2">
-              <a:lnSpc>
-                <a:spcPts val="1425"/>
-              </a:lnSpc>
-            </a:pPr>
-            <a:br>
-              <a:rPr lang="es-ES" sz="1400" b="0" dirty="0">
-                <a:effectLst/>
-                <a:latin typeface="Courier New" panose="02070309020205020404" pitchFamily="49" charset="0"/>
-              </a:rPr>
-            </a:br>
-            <a:r>
-              <a:rPr lang="es-ES" sz="1400" b="0" dirty="0">
-                <a:effectLst/>
-                <a:latin typeface="Courier New" panose="02070309020205020404" pitchFamily="49" charset="0"/>
-              </a:rPr>
-              <a:t>    H00 = </a:t>
-            </a:r>
-            <a:r>
-              <a:rPr lang="es-ES" sz="1400" b="0" dirty="0" err="1">
-                <a:effectLst/>
-                <a:latin typeface="Courier New" panose="02070309020205020404" pitchFamily="49" charset="0"/>
-              </a:rPr>
-              <a:t>mzi_test</a:t>
-            </a:r>
-            <a:r>
-              <a:rPr lang="es-ES" sz="1400" b="0" dirty="0">
-                <a:effectLst/>
-                <a:latin typeface="Courier New" panose="02070309020205020404" pitchFamily="49" charset="0"/>
-              </a:rPr>
-              <a:t>["in0", "out0"]</a:t>
-            </a:r>
-          </a:p>
-          <a:p>
-            <a:endParaRPr lang="en-US" sz="2000" dirty="0"/>
-          </a:p>
-          <a:p>
-            <a:pPr algn="just"/>
-            <a:endParaRPr lang="en-US" sz="2000" dirty="0"/>
-          </a:p>
-          <a:p>
-            <a:pPr algn="just"/>
-            <a:endParaRPr lang="en-US" sz="2000" b="1" i="1" dirty="0"/>
-          </a:p>
-          <a:p>
-            <a:pPr algn="just"/>
-            <a:endParaRPr lang="en-US" sz="2000" kern="0" dirty="0">
-              <a:solidFill>
-                <a:sysClr val="windowText" lastClr="000000"/>
-              </a:solidFill>
-            </a:endParaRPr>
-          </a:p>
-          <a:p>
-            <a:endParaRPr lang="en-US" sz="2000" kern="0" dirty="0">
-              <a:solidFill>
-                <a:sysClr val="windowText" lastClr="000000"/>
-              </a:solidFill>
-            </a:endParaRPr>
-          </a:p>
-        </p:txBody>
-      </p:sp>
-      <p:sp>
-        <p:nvSpPr>
-          <p:cNvPr id="2" name="CuadroTexto 1">
-            <a:extLst>
-              <a:ext uri="{FF2B5EF4-FFF2-40B4-BE49-F238E27FC236}">
-                <a16:creationId xmlns:a16="http://schemas.microsoft.com/office/drawing/2014/main" id="{CA4A2D6E-5993-52B3-D251-1ADF2B0C8355}"/>
-              </a:ext>
-            </a:extLst>
-          </p:cNvPr>
-          <p:cNvSpPr txBox="1"/>
-          <p:nvPr/>
-        </p:nvSpPr>
-        <p:spPr>
-          <a:xfrm>
-            <a:off x="609441" y="4860334"/>
-            <a:ext cx="11199971" cy="1384995"/>
-          </a:xfrm>
-          <a:prstGeom prst="rect">
-            <a:avLst/>
-          </a:prstGeom>
-          <a:solidFill>
-            <a:schemeClr val="bg1">
-              <a:lumMod val="95000"/>
-            </a:schemeClr>
-          </a:solidFill>
-          <a:ln w="28575">
-            <a:solidFill>
-              <a:srgbClr val="E0700D"/>
-            </a:solidFill>
-          </a:ln>
-        </p:spPr>
-        <p:txBody>
-          <a:bodyPr wrap="square" rtlCol="0">
-            <a:spAutoFit/>
-          </a:bodyPr>
-          <a:lstStyle/>
-          <a:p>
-            <a:pPr algn="just"/>
-            <a:r>
-              <a:rPr lang="en-US" sz="1200" dirty="0">
-                <a:latin typeface="Arial" panose="020B0604020202020204" pitchFamily="34" charset="0"/>
-                <a:cs typeface="Arial" panose="020B0604020202020204" pitchFamily="34" charset="0"/>
-              </a:rPr>
-              <a:t>Document all your results (copy here the code employed to obtain the transfer function employing SAX modeling and include the comparative plot of the models)</a:t>
-            </a:r>
-          </a:p>
-          <a:p>
-            <a:pPr algn="just"/>
-            <a:endParaRPr lang="en-US" sz="1200" dirty="0">
-              <a:latin typeface="Arial" panose="020B0604020202020204" pitchFamily="34" charset="0"/>
-              <a:cs typeface="Arial" panose="020B0604020202020204" pitchFamily="34" charset="0"/>
-            </a:endParaRPr>
-          </a:p>
-          <a:p>
-            <a:pPr algn="just"/>
-            <a:endParaRPr lang="en-US" sz="1200" dirty="0">
-              <a:latin typeface="Arial" panose="020B0604020202020204" pitchFamily="34" charset="0"/>
-              <a:cs typeface="Arial" panose="020B0604020202020204" pitchFamily="34" charset="0"/>
-            </a:endParaRPr>
-          </a:p>
-          <a:p>
-            <a:pPr algn="just"/>
-            <a:endParaRPr lang="en-US" sz="1200" dirty="0">
-              <a:latin typeface="Arial" panose="020B0604020202020204" pitchFamily="34" charset="0"/>
-              <a:cs typeface="Arial" panose="020B0604020202020204" pitchFamily="34" charset="0"/>
-            </a:endParaRPr>
-          </a:p>
-          <a:p>
-            <a:pPr algn="just"/>
-            <a:endParaRPr lang="en-US" sz="1200" dirty="0">
-              <a:latin typeface="Arial" panose="020B0604020202020204" pitchFamily="34" charset="0"/>
-              <a:cs typeface="Arial" panose="020B0604020202020204" pitchFamily="34" charset="0"/>
-            </a:endParaRPr>
-          </a:p>
-          <a:p>
-            <a:pPr algn="just"/>
-            <a:endParaRPr lang="en-US" sz="1200" dirty="0">
-              <a:latin typeface="Arial" panose="020B0604020202020204" pitchFamily="34" charset="0"/>
-              <a:cs typeface="Arial" panose="020B0604020202020204" pitchFamily="34" charset="0"/>
-            </a:endParaRPr>
-          </a:p>
-          <a:p>
-            <a:pPr algn="just"/>
-            <a:endParaRPr lang="en-US" sz="1200" dirty="0">
-              <a:latin typeface="Arial" panose="020B0604020202020204" pitchFamily="34" charset="0"/>
-              <a:cs typeface="Arial" panose="020B0604020202020204" pitchFamily="34" charset="0"/>
-            </a:endParaRPr>
-          </a:p>
-        </p:txBody>
-      </p:sp>
-      <p:sp>
-        <p:nvSpPr>
-          <p:cNvPr id="5" name="Marcador de pie de página 2">
-            <a:extLst>
-              <a:ext uri="{FF2B5EF4-FFF2-40B4-BE49-F238E27FC236}">
-                <a16:creationId xmlns:a16="http://schemas.microsoft.com/office/drawing/2014/main" id="{ED97C9D0-256C-D4CA-42E7-79330F040B30}"/>
-              </a:ext>
-            </a:extLst>
-          </p:cNvPr>
-          <p:cNvSpPr>
-            <a:spLocks noGrp="1"/>
-          </p:cNvSpPr>
-          <p:nvPr>
-            <p:ph type="ftr" sz="quarter" idx="5"/>
-          </p:nvPr>
-        </p:nvSpPr>
-        <p:spPr>
-          <a:xfrm>
-            <a:off x="609600" y="6457057"/>
-            <a:ext cx="2743200" cy="184666"/>
-          </a:xfrm>
-        </p:spPr>
-        <p:txBody>
-          <a:bodyPr/>
-          <a:lstStyle/>
-          <a:p>
-            <a:pPr marL="12700">
-              <a:spcBef>
-                <a:spcPts val="15"/>
-              </a:spcBef>
-            </a:pPr>
-            <a:r>
-              <a:rPr lang="es-ES" spc="-5"/>
-              <a:t>LAB 3. INTERFEROMETERS I</a:t>
-            </a:r>
-            <a:endParaRPr lang="es-ES" spc="-5" dirty="0"/>
-          </a:p>
-        </p:txBody>
-      </p:sp>
+      </p:pic>
     </p:spTree>
     <p:extLst>
       <p:ext uri="{BB962C8B-B14F-4D97-AF65-F5344CB8AC3E}">
-        <p14:creationId xmlns:p14="http://schemas.microsoft.com/office/powerpoint/2010/main" val="3666436811"/>
+        <p14:creationId xmlns:p14="http://schemas.microsoft.com/office/powerpoint/2010/main" val="1025983378"/>
       </p:ext>
     </p:extLst>
   </p:cSld>
@@ -4372,7 +3740,7 @@
         <p:cNvPr id="1" name="">
           <a:extLst>
             <a:ext uri="{FF2B5EF4-FFF2-40B4-BE49-F238E27FC236}">
-              <a16:creationId xmlns:a16="http://schemas.microsoft.com/office/drawing/2014/main" id="{25434E70-43B1-3881-1771-20FB4358471D}"/>
+              <a16:creationId xmlns:a16="http://schemas.microsoft.com/office/drawing/2014/main" id="{CE171A0C-9291-8026-EA4C-38418E7FDAFE}"/>
             </a:ext>
           </a:extLst>
         </p:cNvPr>
@@ -4389,60 +3757,191 @@
       </p:grpSpPr>
       <p:sp>
         <p:nvSpPr>
-          <p:cNvPr id="16" name="object 16">
-            <a:extLst>
-              <a:ext uri="{FF2B5EF4-FFF2-40B4-BE49-F238E27FC236}">
-                <a16:creationId xmlns:a16="http://schemas.microsoft.com/office/drawing/2014/main" id="{742C31CE-19F0-B995-0997-9A2D6A879BF7}"/>
-              </a:ext>
-            </a:extLst>
-          </p:cNvPr>
-          <p:cNvSpPr txBox="1">
+          <p:cNvPr id="2" name="Título 1">
+            <a:extLst>
+              <a:ext uri="{FF2B5EF4-FFF2-40B4-BE49-F238E27FC236}">
+                <a16:creationId xmlns:a16="http://schemas.microsoft.com/office/drawing/2014/main" id="{FE6882D1-CFE3-4FFC-2E39-2F19838560D2}"/>
+              </a:ext>
+            </a:extLst>
+          </p:cNvPr>
+          <p:cNvSpPr>
             <a:spLocks noGrp="1"/>
           </p:cNvSpPr>
           <p:nvPr>
             <p:ph type="title"/>
           </p:nvPr>
         </p:nvSpPr>
+        <p:spPr/>
+        <p:txBody>
+          <a:bodyPr/>
+          <a:lstStyle/>
+          <a:p>
+            <a:r>
+              <a:rPr lang="es-ES" dirty="0" err="1"/>
+              <a:t>Balanced</a:t>
+            </a:r>
+            <a:r>
+              <a:rPr lang="es-ES" dirty="0"/>
+              <a:t> </a:t>
+            </a:r>
+            <a:r>
+              <a:rPr lang="es-ES" dirty="0" err="1"/>
+              <a:t>configuration</a:t>
+            </a:r>
+            <a:r>
+              <a:rPr lang="es-ES" dirty="0"/>
+              <a:t> </a:t>
+            </a:r>
+          </a:p>
+        </p:txBody>
+      </p:sp>
+      <p:sp>
+        <p:nvSpPr>
+          <p:cNvPr id="4" name="Marcador de pie de página 3">
+            <a:extLst>
+              <a:ext uri="{FF2B5EF4-FFF2-40B4-BE49-F238E27FC236}">
+                <a16:creationId xmlns:a16="http://schemas.microsoft.com/office/drawing/2014/main" id="{B68A5B3F-5FAB-3C74-08A9-E1A25B378CEC}"/>
+              </a:ext>
+            </a:extLst>
+          </p:cNvPr>
+          <p:cNvSpPr>
+            <a:spLocks noGrp="1"/>
+          </p:cNvSpPr>
+          <p:nvPr>
+            <p:ph type="ftr" sz="quarter" idx="5"/>
+          </p:nvPr>
+        </p:nvSpPr>
+        <p:spPr/>
+        <p:txBody>
+          <a:bodyPr/>
+          <a:lstStyle/>
+          <a:p>
+            <a:pPr marL="12700">
+              <a:spcBef>
+                <a:spcPts val="15"/>
+              </a:spcBef>
+            </a:pPr>
+            <a:r>
+              <a:rPr lang="es-ES" spc="-5"/>
+              <a:t>LAB 3. INTERFEROMETERS I</a:t>
+            </a:r>
+            <a:endParaRPr lang="es-ES" spc="-5" dirty="0"/>
+          </a:p>
+        </p:txBody>
+      </p:sp>
+      <p:sp>
+        <p:nvSpPr>
+          <p:cNvPr id="5" name="Marcador de número de diapositiva 4">
+            <a:extLst>
+              <a:ext uri="{FF2B5EF4-FFF2-40B4-BE49-F238E27FC236}">
+                <a16:creationId xmlns:a16="http://schemas.microsoft.com/office/drawing/2014/main" id="{D09F6A2D-4F6F-BC6D-46F2-E1A6E27B2A57}"/>
+              </a:ext>
+            </a:extLst>
+          </p:cNvPr>
+          <p:cNvSpPr>
+            <a:spLocks noGrp="1"/>
+          </p:cNvSpPr>
+          <p:nvPr>
+            <p:ph type="sldNum" sz="quarter" idx="7"/>
+          </p:nvPr>
+        </p:nvSpPr>
+        <p:spPr/>
+        <p:txBody>
+          <a:bodyPr/>
+          <a:lstStyle/>
+          <a:p>
+            <a:fld id="{B6F15528-21DE-4FAA-801E-634DDDAF4B2B}" type="slidenum">
+              <a:rPr lang="es-ES" smtClean="0"/>
+              <a:t>13</a:t>
+            </a:fld>
+            <a:endParaRPr lang="es-ES"/>
+          </a:p>
+        </p:txBody>
+      </p:sp>
+      <p:pic>
+        <p:nvPicPr>
+          <p:cNvPr id="7" name="Imagen 6">
+            <a:extLst>
+              <a:ext uri="{FF2B5EF4-FFF2-40B4-BE49-F238E27FC236}">
+                <a16:creationId xmlns:a16="http://schemas.microsoft.com/office/drawing/2014/main" id="{34C9539A-4BBC-42F0-2008-A0062E3AE365}"/>
+              </a:ext>
+            </a:extLst>
+          </p:cNvPr>
+          <p:cNvPicPr>
+            <a:picLocks noChangeAspect="1"/>
+          </p:cNvPicPr>
+          <p:nvPr/>
+        </p:nvPicPr>
+        <p:blipFill>
+          <a:blip r:embed="rId2">
+            <a:extLst>
+              <a:ext uri="{28A0092B-C50C-407E-A947-70E740481C1C}">
+                <a14:useLocalDpi xmlns:a14="http://schemas.microsoft.com/office/drawing/2010/main" val="0"/>
+              </a:ext>
+            </a:extLst>
+          </a:blip>
+          <a:srcRect/>
+          <a:stretch/>
+        </p:blipFill>
         <p:spPr>
           <a:xfrm>
-            <a:off x="685800" y="408883"/>
-            <a:ext cx="10994410" cy="397545"/>
+            <a:off x="609600" y="2254791"/>
+            <a:ext cx="4667901" cy="3726715"/>
           </a:xfrm>
           <a:prstGeom prst="rect">
             <a:avLst/>
           </a:prstGeom>
         </p:spPr>
-        <p:txBody>
-          <a:bodyPr vert="horz" wrap="square" lIns="0" tIns="12700" rIns="0" bIns="0" rtlCol="0">
+      </p:pic>
+      <p:sp>
+        <p:nvSpPr>
+          <p:cNvPr id="9" name="CuadroTexto 8">
+            <a:extLst>
+              <a:ext uri="{FF2B5EF4-FFF2-40B4-BE49-F238E27FC236}">
+                <a16:creationId xmlns:a16="http://schemas.microsoft.com/office/drawing/2014/main" id="{56E5C985-6707-78E4-DC17-0BAEC6FA4DAE}"/>
+              </a:ext>
+            </a:extLst>
+          </p:cNvPr>
+          <p:cNvSpPr txBox="1"/>
+          <p:nvPr/>
+        </p:nvSpPr>
+        <p:spPr>
+          <a:xfrm>
+            <a:off x="5715000" y="2133600"/>
+            <a:ext cx="6128326" cy="923330"/>
+          </a:xfrm>
+          <a:prstGeom prst="rect">
+            <a:avLst/>
+          </a:prstGeom>
+          <a:noFill/>
+        </p:spPr>
+        <p:txBody>
+          <a:bodyPr wrap="square">
             <a:spAutoFit/>
           </a:bodyPr>
           <a:lstStyle/>
           <a:p>
-            <a:pPr marL="12700">
-              <a:lnSpc>
-                <a:spcPct val="100000"/>
-              </a:lnSpc>
-              <a:spcBef>
-                <a:spcPts val="100"/>
-              </a:spcBef>
-            </a:pPr>
-            <a:r>
-              <a:rPr lang="en-US" sz="2500" dirty="0"/>
-              <a:t>Extra assessments </a:t>
-            </a:r>
-            <a:endParaRPr lang="en-US" sz="2500" b="0" dirty="0">
-              <a:latin typeface="+mj-lt"/>
-              <a:cs typeface="Lucida Sans"/>
-            </a:endParaRPr>
+            <a:r>
+              <a:rPr lang="es-ES" dirty="0"/>
+              <a:t>Como toda la potencia va a un mismo puerto, aunque cambiemos el </a:t>
+            </a:r>
+            <a:r>
+              <a:rPr lang="es-ES" dirty="0" err="1"/>
+              <a:t>coupling</a:t>
+            </a:r>
+            <a:r>
+              <a:rPr lang="es-ES" dirty="0"/>
+              <a:t> ratio, por eso lo vemos igual que en la gráfica anterior 50:50</a:t>
+            </a:r>
           </a:p>
         </p:txBody>
       </p:sp>
       <p:pic>
         <p:nvPicPr>
-          <p:cNvPr id="83" name="Gráfico 82">
-            <a:extLst>
-              <a:ext uri="{FF2B5EF4-FFF2-40B4-BE49-F238E27FC236}">
-                <a16:creationId xmlns:a16="http://schemas.microsoft.com/office/drawing/2014/main" id="{D688A609-F3DC-EE34-C536-683E70F32EAE}"/>
+          <p:cNvPr id="6" name="Imagen 5">
+            <a:extLst>
+              <a:ext uri="{FF2B5EF4-FFF2-40B4-BE49-F238E27FC236}">
+                <a16:creationId xmlns:a16="http://schemas.microsoft.com/office/drawing/2014/main" id="{A9A164FC-1E7B-45E0-80E0-5FB56AAA12C8}"/>
               </a:ext>
             </a:extLst>
           </p:cNvPr>
@@ -4454,19 +3953,48 @@
         <p:blipFill>
           <a:blip r:embed="rId3">
             <a:extLst>
-              <a:ext uri="{96DAC541-7B7A-43D3-8B79-37D633B846F1}">
-                <asvg:svgBlip xmlns:asvg="http://schemas.microsoft.com/office/drawing/2016/SVG/main" r:embed="rId4"/>
+              <a:ext uri="{28A0092B-C50C-407E-A947-70E740481C1C}">
+                <a14:useLocalDpi xmlns:a14="http://schemas.microsoft.com/office/drawing/2010/main" val="0"/>
               </a:ext>
             </a:extLst>
           </a:blip>
+          <a:srcRect/>
+          <a:stretch/>
+        </p:blipFill>
+        <p:spPr>
+          <a:xfrm>
+            <a:off x="348674" y="717581"/>
+            <a:ext cx="9678751" cy="784281"/>
+          </a:xfrm>
+          <a:prstGeom prst="rect">
+            <a:avLst/>
+          </a:prstGeom>
+        </p:spPr>
+      </p:pic>
+      <p:pic>
+        <p:nvPicPr>
+          <p:cNvPr id="8" name="Imagen 7">
+            <a:extLst>
+              <a:ext uri="{FF2B5EF4-FFF2-40B4-BE49-F238E27FC236}">
+                <a16:creationId xmlns:a16="http://schemas.microsoft.com/office/drawing/2014/main" id="{ECF58007-1D7E-ADC2-2FA0-4F9B69D29E83}"/>
+              </a:ext>
+            </a:extLst>
+          </p:cNvPr>
+          <p:cNvPicPr>
+            <a:picLocks noChangeAspect="1"/>
+          </p:cNvPicPr>
+          <p:nvPr/>
+        </p:nvPicPr>
+        <p:blipFill>
+          <a:blip r:embed="rId4"/>
           <a:stretch>
             <a:fillRect/>
           </a:stretch>
         </p:blipFill>
         <p:spPr>
           <a:xfrm>
-            <a:off x="5045006" y="6356057"/>
-            <a:ext cx="6409575" cy="363174"/>
+            <a:off x="914400" y="1826106"/>
+            <a:ext cx="2257740" cy="428685"/>
           </a:xfrm>
           <a:prstGeom prst="rect">
             <a:avLst/>
@@ -4475,315 +4003,43 @@
       </p:pic>
       <p:sp>
         <p:nvSpPr>
-          <p:cNvPr id="84" name="Marcador de número de diapositiva 83">
-            <a:extLst>
-              <a:ext uri="{FF2B5EF4-FFF2-40B4-BE49-F238E27FC236}">
-                <a16:creationId xmlns:a16="http://schemas.microsoft.com/office/drawing/2014/main" id="{B6C672C6-89D4-7E67-2B94-811D081786A7}"/>
-              </a:ext>
-            </a:extLst>
-          </p:cNvPr>
-          <p:cNvSpPr>
-            <a:spLocks noGrp="1"/>
-          </p:cNvSpPr>
-          <p:nvPr>
-            <p:ph type="sldNum" sz="quarter" idx="7"/>
-          </p:nvPr>
-        </p:nvSpPr>
-        <p:spPr/>
-        <p:txBody>
-          <a:bodyPr/>
-          <a:lstStyle/>
-          <a:p>
-            <a:fld id="{B6F15528-21DE-4FAA-801E-634DDDAF4B2B}" type="slidenum">
-              <a:rPr lang="es-ES" smtClean="0"/>
-              <a:t>13</a:t>
-            </a:fld>
-            <a:endParaRPr lang="es-ES"/>
-          </a:p>
-        </p:txBody>
-      </p:sp>
-      <p:sp>
-        <p:nvSpPr>
-          <p:cNvPr id="4" name="Marcador de texto 2">
-            <a:extLst>
-              <a:ext uri="{FF2B5EF4-FFF2-40B4-BE49-F238E27FC236}">
-                <a16:creationId xmlns:a16="http://schemas.microsoft.com/office/drawing/2014/main" id="{D838A93A-BFC8-0124-93CE-FDC193435A0C}"/>
-              </a:ext>
-            </a:extLst>
-          </p:cNvPr>
-          <p:cNvSpPr txBox="1">
-            <a:spLocks/>
-          </p:cNvSpPr>
+          <p:cNvPr id="11" name="CuadroTexto 10">
+            <a:extLst>
+              <a:ext uri="{FF2B5EF4-FFF2-40B4-BE49-F238E27FC236}">
+                <a16:creationId xmlns:a16="http://schemas.microsoft.com/office/drawing/2014/main" id="{D39FA656-5666-5662-F59A-E01B7174DA84}"/>
+              </a:ext>
+            </a:extLst>
+          </p:cNvPr>
+          <p:cNvSpPr txBox="1"/>
           <p:nvPr/>
         </p:nvSpPr>
         <p:spPr>
           <a:xfrm>
-            <a:off x="608012" y="1295400"/>
-            <a:ext cx="11048999" cy="4958137"/>
+            <a:off x="3352800" y="1842270"/>
+            <a:ext cx="6128326" cy="369332"/>
           </a:xfrm>
           <a:prstGeom prst="rect">
             <a:avLst/>
           </a:prstGeom>
+          <a:noFill/>
         </p:spPr>
         <p:txBody>
-          <a:bodyPr>
-            <a:normAutofit/>
-          </a:bodyPr>
-          <a:lstStyle>
-            <a:lvl1pPr marL="0">
-              <a:defRPr>
-                <a:latin typeface="+mn-lt"/>
-                <a:ea typeface="+mn-ea"/>
-                <a:cs typeface="+mn-cs"/>
-              </a:defRPr>
-            </a:lvl1pPr>
-            <a:lvl2pPr marL="457200">
-              <a:defRPr>
-                <a:latin typeface="+mn-lt"/>
-                <a:ea typeface="+mn-ea"/>
-                <a:cs typeface="+mn-cs"/>
-              </a:defRPr>
-            </a:lvl2pPr>
-            <a:lvl3pPr marL="914400">
-              <a:defRPr>
-                <a:latin typeface="+mn-lt"/>
-                <a:ea typeface="+mn-ea"/>
-                <a:cs typeface="+mn-cs"/>
-              </a:defRPr>
-            </a:lvl3pPr>
-            <a:lvl4pPr marL="1371600">
-              <a:defRPr>
-                <a:latin typeface="+mn-lt"/>
-                <a:ea typeface="+mn-ea"/>
-                <a:cs typeface="+mn-cs"/>
-              </a:defRPr>
-            </a:lvl4pPr>
-            <a:lvl5pPr marL="1828800">
-              <a:defRPr>
-                <a:latin typeface="+mn-lt"/>
-                <a:ea typeface="+mn-ea"/>
-                <a:cs typeface="+mn-cs"/>
-              </a:defRPr>
-            </a:lvl5pPr>
-            <a:lvl6pPr marL="2286000">
-              <a:defRPr>
-                <a:latin typeface="+mn-lt"/>
-                <a:ea typeface="+mn-ea"/>
-                <a:cs typeface="+mn-cs"/>
-              </a:defRPr>
-            </a:lvl6pPr>
-            <a:lvl7pPr marL="2743200">
-              <a:defRPr>
-                <a:latin typeface="+mn-lt"/>
-                <a:ea typeface="+mn-ea"/>
-                <a:cs typeface="+mn-cs"/>
-              </a:defRPr>
-            </a:lvl7pPr>
-            <a:lvl8pPr marL="3200400">
-              <a:defRPr>
-                <a:latin typeface="+mn-lt"/>
-                <a:ea typeface="+mn-ea"/>
-                <a:cs typeface="+mn-cs"/>
-              </a:defRPr>
-            </a:lvl8pPr>
-            <a:lvl9pPr marL="3657600">
-              <a:defRPr>
-                <a:latin typeface="+mn-lt"/>
-                <a:ea typeface="+mn-ea"/>
-                <a:cs typeface="+mn-cs"/>
-              </a:defRPr>
-            </a:lvl9pPr>
-          </a:lstStyle>
-          <a:p>
-            <a:pPr marL="0" indent="0">
-              <a:buNone/>
-            </a:pPr>
-            <a:r>
-              <a:rPr lang="en-US" b="1" dirty="0"/>
-              <a:t>Assessment 4</a:t>
-            </a:r>
-            <a:r>
-              <a:rPr lang="en-US" dirty="0"/>
-              <a:t>. Design an MZI for filtering at a specific wavelength. Calculate and adjust the arm lengths to configure the MZI to have a maximum transmission at 1550 nm.</a:t>
-            </a:r>
-          </a:p>
-          <a:p>
-            <a:endParaRPr lang="en-US" b="1" dirty="0"/>
-          </a:p>
-          <a:p>
-            <a:r>
-              <a:rPr lang="en-US" b="1" dirty="0"/>
-              <a:t>Assessment 5. </a:t>
-            </a:r>
-            <a:r>
-              <a:rPr lang="en-US" dirty="0"/>
-              <a:t>Let's see how the response of the MZI varies with the effective index. Vary the effective index of one of the arms and analyze how the spectrum shifts. To do this, you can use the data provided in the .txt files entitled ‘</a:t>
-            </a:r>
-            <a:r>
-              <a:rPr lang="en-US" dirty="0" err="1"/>
-              <a:t>SiN</a:t>
-            </a:r>
-            <a:r>
-              <a:rPr lang="en-US" dirty="0"/>
-              <a:t>’. Can you give an example of an application where this configuration is used?</a:t>
-            </a:r>
-          </a:p>
-          <a:p>
-            <a:pPr marL="0" indent="0">
-              <a:buNone/>
-            </a:pPr>
-            <a:endParaRPr lang="en-US" dirty="0"/>
-          </a:p>
-          <a:p>
-            <a:r>
-              <a:rPr lang="en-US" b="1" dirty="0"/>
-              <a:t>Advanced level assessment.</a:t>
-            </a:r>
-            <a:r>
-              <a:rPr lang="en-US" dirty="0"/>
-              <a:t> Explore how cascading two MZIs affects the transmission spectrum. To do so, design a system in which two MZIs are cascaded. Simulate and observe the spectrum, explaining how the transmission peaks behave</a:t>
-            </a:r>
-            <a:r>
-              <a:rPr lang="en-US" b="1" dirty="0"/>
-              <a:t>.</a:t>
-            </a:r>
-          </a:p>
-          <a:p>
-            <a:pPr algn="just"/>
-            <a:endParaRPr lang="en-US" sz="2000" kern="0" dirty="0">
-              <a:solidFill>
-                <a:sysClr val="windowText" lastClr="000000"/>
-              </a:solidFill>
-            </a:endParaRPr>
-          </a:p>
-        </p:txBody>
-      </p:sp>
-      <p:sp>
-        <p:nvSpPr>
-          <p:cNvPr id="2" name="CuadroTexto 1">
-            <a:extLst>
-              <a:ext uri="{FF2B5EF4-FFF2-40B4-BE49-F238E27FC236}">
-                <a16:creationId xmlns:a16="http://schemas.microsoft.com/office/drawing/2014/main" id="{FDE3A197-9508-F9F1-1FEB-FF883D78C151}"/>
-              </a:ext>
-            </a:extLst>
-          </p:cNvPr>
-          <p:cNvSpPr txBox="1"/>
-          <p:nvPr/>
-        </p:nvSpPr>
-        <p:spPr>
-          <a:xfrm>
-            <a:off x="609441" y="4860334"/>
-            <a:ext cx="11199971" cy="1200329"/>
-          </a:xfrm>
-          <a:prstGeom prst="rect">
-            <a:avLst/>
-          </a:prstGeom>
-          <a:solidFill>
-            <a:schemeClr val="bg1">
-              <a:lumMod val="95000"/>
-            </a:schemeClr>
-          </a:solidFill>
-          <a:ln w="28575">
-            <a:solidFill>
-              <a:srgbClr val="E0700D"/>
-            </a:solidFill>
-          </a:ln>
-        </p:spPr>
-        <p:txBody>
-          <a:bodyPr wrap="square" rtlCol="0">
+          <a:bodyPr wrap="square">
             <a:spAutoFit/>
           </a:bodyPr>
           <a:lstStyle/>
           <a:p>
-            <a:pPr algn="just"/>
-            <a:r>
-              <a:rPr lang="en-US" sz="1200" dirty="0">
-                <a:latin typeface="Arial" panose="020B0604020202020204" pitchFamily="34" charset="0"/>
-                <a:cs typeface="Arial" panose="020B0604020202020204" pitchFamily="34" charset="0"/>
-              </a:rPr>
-              <a:t>Document all your results</a:t>
-            </a:r>
-          </a:p>
-          <a:p>
-            <a:pPr algn="just"/>
-            <a:endParaRPr lang="en-US" sz="1200" dirty="0">
-              <a:latin typeface="Arial" panose="020B0604020202020204" pitchFamily="34" charset="0"/>
-              <a:cs typeface="Arial" panose="020B0604020202020204" pitchFamily="34" charset="0"/>
-            </a:endParaRPr>
-          </a:p>
-          <a:p>
-            <a:pPr algn="just"/>
-            <a:endParaRPr lang="en-US" sz="1200" dirty="0">
-              <a:latin typeface="Arial" panose="020B0604020202020204" pitchFamily="34" charset="0"/>
-              <a:cs typeface="Arial" panose="020B0604020202020204" pitchFamily="34" charset="0"/>
-            </a:endParaRPr>
-          </a:p>
-          <a:p>
-            <a:pPr algn="just"/>
-            <a:endParaRPr lang="en-US" sz="1200" dirty="0">
-              <a:latin typeface="Arial" panose="020B0604020202020204" pitchFamily="34" charset="0"/>
-              <a:cs typeface="Arial" panose="020B0604020202020204" pitchFamily="34" charset="0"/>
-            </a:endParaRPr>
-          </a:p>
-          <a:p>
-            <a:pPr algn="just"/>
-            <a:endParaRPr lang="en-US" sz="1200" dirty="0">
-              <a:latin typeface="Arial" panose="020B0604020202020204" pitchFamily="34" charset="0"/>
-              <a:cs typeface="Arial" panose="020B0604020202020204" pitchFamily="34" charset="0"/>
-            </a:endParaRPr>
-          </a:p>
-          <a:p>
-            <a:pPr algn="just"/>
-            <a:endParaRPr lang="en-US" sz="1200" dirty="0">
-              <a:latin typeface="Arial" panose="020B0604020202020204" pitchFamily="34" charset="0"/>
-              <a:cs typeface="Arial" panose="020B0604020202020204" pitchFamily="34" charset="0"/>
-            </a:endParaRPr>
-          </a:p>
-        </p:txBody>
-      </p:sp>
-      <p:sp>
-        <p:nvSpPr>
-          <p:cNvPr id="6" name="Marcador de pie de página 2">
-            <a:extLst>
-              <a:ext uri="{FF2B5EF4-FFF2-40B4-BE49-F238E27FC236}">
-                <a16:creationId xmlns:a16="http://schemas.microsoft.com/office/drawing/2014/main" id="{04C1A7E9-6C33-172D-E7B9-CCF643221E6A}"/>
-              </a:ext>
-            </a:extLst>
-          </p:cNvPr>
-          <p:cNvSpPr>
-            <a:spLocks noGrp="1"/>
-          </p:cNvSpPr>
-          <p:nvPr>
-            <p:ph type="ftr" sz="quarter" idx="5"/>
-          </p:nvPr>
-        </p:nvSpPr>
-        <p:spPr>
-          <a:xfrm>
-            <a:off x="609600" y="6457057"/>
-            <a:ext cx="2743200" cy="184666"/>
-          </a:xfrm>
-        </p:spPr>
-        <p:txBody>
-          <a:bodyPr/>
-          <a:lstStyle/>
-          <a:p>
-            <a:pPr marL="12700">
-              <a:spcBef>
-                <a:spcPts val="15"/>
-              </a:spcBef>
-            </a:pPr>
-            <a:r>
-              <a:rPr lang="es-ES" spc="-5"/>
-              <a:t>LAB 3. INTERFEROMETERS I</a:t>
-            </a:r>
-            <a:endParaRPr lang="es-ES" spc="-5" dirty="0"/>
+            <a:r>
+              <a:rPr lang="es-ES" dirty="0"/>
+              <a:t>Lo ponemos 70:30</a:t>
+            </a:r>
           </a:p>
         </p:txBody>
       </p:sp>
     </p:spTree>
     <p:extLst>
       <p:ext uri="{BB962C8B-B14F-4D97-AF65-F5344CB8AC3E}">
-        <p14:creationId xmlns:p14="http://schemas.microsoft.com/office/powerpoint/2010/main" val="3660438245"/>
+        <p14:creationId xmlns:p14="http://schemas.microsoft.com/office/powerpoint/2010/main" val="1849514454"/>
       </p:ext>
     </p:extLst>
   </p:cSld>
@@ -4798,7 +4054,13 @@
   <p:cSld>
     <p:spTree>
       <p:nvGrpSpPr>
-        <p:cNvPr id="1" name=""/>
+        <p:cNvPr id="1" name="">
+          <a:extLst>
+            <a:ext uri="{FF2B5EF4-FFF2-40B4-BE49-F238E27FC236}">
+              <a16:creationId xmlns:a16="http://schemas.microsoft.com/office/drawing/2014/main" id="{66A833D2-6EBA-2EAA-708B-BB93CE3E4866}"/>
+            </a:ext>
+          </a:extLst>
+        </p:cNvPr>
         <p:cNvGrpSpPr/>
         <p:nvPr/>
       </p:nvGrpSpPr>
@@ -4812,100 +4074,75 @@
       </p:grpSpPr>
       <p:sp>
         <p:nvSpPr>
-          <p:cNvPr id="3" name="object 3"/>
-          <p:cNvSpPr/>
-          <p:nvPr/>
-        </p:nvSpPr>
-        <p:spPr>
-          <a:xfrm>
-            <a:off x="3945635" y="2636520"/>
-            <a:ext cx="8246363" cy="1584959"/>
-          </a:xfrm>
-          <a:prstGeom prst="rect">
-            <a:avLst/>
-          </a:prstGeom>
-          <a:blipFill>
-            <a:blip r:embed="rId2" cstate="print"/>
-            <a:stretch>
-              <a:fillRect/>
-            </a:stretch>
-          </a:blipFill>
-        </p:spPr>
-        <p:txBody>
-          <a:bodyPr wrap="square" lIns="0" tIns="0" rIns="0" bIns="0" rtlCol="0"/>
-          <a:lstStyle/>
-          <a:p>
-            <a:endParaRPr/>
-          </a:p>
-        </p:txBody>
-      </p:sp>
-      <p:sp>
-        <p:nvSpPr>
-          <p:cNvPr id="4" name="object 4"/>
-          <p:cNvSpPr txBox="1">
+          <p:cNvPr id="2" name="Título 1">
+            <a:extLst>
+              <a:ext uri="{FF2B5EF4-FFF2-40B4-BE49-F238E27FC236}">
+                <a16:creationId xmlns:a16="http://schemas.microsoft.com/office/drawing/2014/main" id="{AAD5429C-DCC6-5EC0-DFFB-C6ED9CD17B7A}"/>
+              </a:ext>
+            </a:extLst>
+          </p:cNvPr>
+          <p:cNvSpPr>
             <a:spLocks noGrp="1"/>
           </p:cNvSpPr>
           <p:nvPr>
             <p:ph type="title"/>
           </p:nvPr>
         </p:nvSpPr>
-        <p:spPr>
-          <a:xfrm>
-            <a:off x="4513326" y="3165729"/>
-            <a:ext cx="2233295" cy="513715"/>
-          </a:xfrm>
-          <a:prstGeom prst="rect">
-            <a:avLst/>
-          </a:prstGeom>
-        </p:spPr>
-        <p:txBody>
-          <a:bodyPr vert="horz" wrap="square" lIns="0" tIns="13335" rIns="0" bIns="0" rtlCol="0">
-            <a:spAutoFit/>
-          </a:bodyPr>
+        <p:spPr/>
+        <p:txBody>
+          <a:bodyPr/>
           <a:lstStyle/>
           <a:p>
+            <a:r>
+              <a:rPr lang="es-ES" dirty="0" err="1"/>
+              <a:t>Balanced</a:t>
+            </a:r>
+            <a:r>
+              <a:rPr lang="es-ES" dirty="0"/>
+              <a:t> </a:t>
+            </a:r>
+            <a:r>
+              <a:rPr lang="es-ES" dirty="0" err="1"/>
+              <a:t>configuration</a:t>
+            </a:r>
+            <a:r>
+              <a:rPr lang="es-ES" dirty="0"/>
+              <a:t> </a:t>
+            </a:r>
+          </a:p>
+        </p:txBody>
+      </p:sp>
+      <p:sp>
+        <p:nvSpPr>
+          <p:cNvPr id="4" name="Marcador de pie de página 3">
+            <a:extLst>
+              <a:ext uri="{FF2B5EF4-FFF2-40B4-BE49-F238E27FC236}">
+                <a16:creationId xmlns:a16="http://schemas.microsoft.com/office/drawing/2014/main" id="{0EE9A738-49A4-52B8-70BB-BF90A577E363}"/>
+              </a:ext>
+            </a:extLst>
+          </p:cNvPr>
+          <p:cNvSpPr>
+            <a:spLocks noGrp="1"/>
+          </p:cNvSpPr>
+          <p:nvPr>
+            <p:ph type="ftr" sz="quarter" idx="5"/>
+          </p:nvPr>
+        </p:nvSpPr>
+        <p:spPr/>
+        <p:txBody>
+          <a:bodyPr/>
+          <a:lstStyle/>
+          <a:p>
             <a:pPr marL="12700">
-              <a:lnSpc>
-                <a:spcPct val="100000"/>
-              </a:lnSpc>
               <a:spcBef>
-                <a:spcPts val="105"/>
+                <a:spcPts val="15"/>
               </a:spcBef>
             </a:pPr>
             <a:r>
-              <a:rPr sz="3200" b="1" spc="-5" dirty="0">
-                <a:solidFill>
-                  <a:srgbClr val="FFFFFF"/>
-                </a:solidFill>
-                <a:latin typeface="Lucida Sans"/>
-                <a:cs typeface="Lucida Sans"/>
-              </a:rPr>
-              <a:t>Thank</a:t>
-            </a:r>
-            <a:r>
-              <a:rPr sz="3200" b="1" spc="-55" dirty="0">
-                <a:solidFill>
-                  <a:srgbClr val="FFFFFF"/>
-                </a:solidFill>
-                <a:latin typeface="Lucida Sans"/>
-                <a:cs typeface="Lucida Sans"/>
-              </a:rPr>
-              <a:t> </a:t>
-            </a:r>
-            <a:r>
-              <a:rPr sz="3200" b="1" dirty="0">
-                <a:solidFill>
-                  <a:srgbClr val="FFFFFF"/>
-                </a:solidFill>
-                <a:latin typeface="Lucida Sans"/>
-                <a:cs typeface="Lucida Sans"/>
-              </a:rPr>
-              <a:t>you</a:t>
-            </a:r>
-            <a:endParaRPr sz="3200">
-              <a:latin typeface="Lucida Sans"/>
-              <a:cs typeface="Lucida Sans"/>
-            </a:endParaRPr>
+              <a:rPr lang="es-ES" spc="-5"/>
+              <a:t>LAB 3. INTERFEROMETERS I</a:t>
+            </a:r>
+            <a:endParaRPr lang="es-ES" spc="-5" dirty="0"/>
           </a:p>
         </p:txBody>
       </p:sp>
@@ -4914,7 +4151,7 @@
           <p:cNvPr id="5" name="Marcador de número de diapositiva 4">
             <a:extLst>
               <a:ext uri="{FF2B5EF4-FFF2-40B4-BE49-F238E27FC236}">
-                <a16:creationId xmlns:a16="http://schemas.microsoft.com/office/drawing/2014/main" id="{B052DA19-AD24-7D24-2AE9-51F8F5A7F5E0}"/>
+                <a16:creationId xmlns:a16="http://schemas.microsoft.com/office/drawing/2014/main" id="{817F1DAC-3AA9-7040-7AD1-3FC0D1176A8B}"/>
               </a:ext>
             </a:extLst>
           </p:cNvPr>
@@ -4938,7 +4175,2392 @@
           </a:p>
         </p:txBody>
       </p:sp>
+      <p:pic>
+        <p:nvPicPr>
+          <p:cNvPr id="7" name="Imagen 6">
+            <a:extLst>
+              <a:ext uri="{FF2B5EF4-FFF2-40B4-BE49-F238E27FC236}">
+                <a16:creationId xmlns:a16="http://schemas.microsoft.com/office/drawing/2014/main" id="{1F4381CF-5362-564E-E62A-0C7870FB6F23}"/>
+              </a:ext>
+            </a:extLst>
+          </p:cNvPr>
+          <p:cNvPicPr>
+            <a:picLocks noChangeAspect="1"/>
+          </p:cNvPicPr>
+          <p:nvPr/>
+        </p:nvPicPr>
+        <p:blipFill>
+          <a:blip r:embed="rId2">
+            <a:extLst>
+              <a:ext uri="{28A0092B-C50C-407E-A947-70E740481C1C}">
+                <a14:useLocalDpi xmlns:a14="http://schemas.microsoft.com/office/drawing/2010/main" val="0"/>
+              </a:ext>
+            </a:extLst>
+          </a:blip>
+          <a:srcRect/>
+          <a:stretch/>
+        </p:blipFill>
+        <p:spPr>
+          <a:xfrm>
+            <a:off x="632409" y="2254791"/>
+            <a:ext cx="4622282" cy="3726715"/>
+          </a:xfrm>
+          <a:prstGeom prst="rect">
+            <a:avLst/>
+          </a:prstGeom>
+        </p:spPr>
+      </p:pic>
+      <p:sp>
+        <p:nvSpPr>
+          <p:cNvPr id="9" name="CuadroTexto 8">
+            <a:extLst>
+              <a:ext uri="{FF2B5EF4-FFF2-40B4-BE49-F238E27FC236}">
+                <a16:creationId xmlns:a16="http://schemas.microsoft.com/office/drawing/2014/main" id="{647114DB-5FF6-1E01-F2AF-51C721C6B545}"/>
+              </a:ext>
+            </a:extLst>
+          </p:cNvPr>
+          <p:cNvSpPr txBox="1"/>
+          <p:nvPr/>
+        </p:nvSpPr>
+        <p:spPr>
+          <a:xfrm>
+            <a:off x="5715000" y="2133600"/>
+            <a:ext cx="6128326" cy="646331"/>
+          </a:xfrm>
+          <a:prstGeom prst="rect">
+            <a:avLst/>
+          </a:prstGeom>
+          <a:noFill/>
+        </p:spPr>
+        <p:txBody>
+          <a:bodyPr wrap="square">
+            <a:spAutoFit/>
+          </a:bodyPr>
+          <a:lstStyle/>
+          <a:p>
+            <a:r>
+              <a:rPr lang="es-ES" dirty="0"/>
+              <a:t>Como era de esperar, al añadir pérdidas de exceso la potencia disminuye en el puerto de salida. </a:t>
+            </a:r>
+          </a:p>
+        </p:txBody>
+      </p:sp>
+      <p:pic>
+        <p:nvPicPr>
+          <p:cNvPr id="6" name="Imagen 5">
+            <a:extLst>
+              <a:ext uri="{FF2B5EF4-FFF2-40B4-BE49-F238E27FC236}">
+                <a16:creationId xmlns:a16="http://schemas.microsoft.com/office/drawing/2014/main" id="{153B3BD4-4EA4-FA30-C910-259ACC9E44C4}"/>
+              </a:ext>
+            </a:extLst>
+          </p:cNvPr>
+          <p:cNvPicPr>
+            <a:picLocks noChangeAspect="1"/>
+          </p:cNvPicPr>
+          <p:nvPr/>
+        </p:nvPicPr>
+        <p:blipFill>
+          <a:blip r:embed="rId3">
+            <a:extLst>
+              <a:ext uri="{28A0092B-C50C-407E-A947-70E740481C1C}">
+                <a14:useLocalDpi xmlns:a14="http://schemas.microsoft.com/office/drawing/2010/main" val="0"/>
+              </a:ext>
+            </a:extLst>
+          </a:blip>
+          <a:srcRect/>
+          <a:stretch/>
+        </p:blipFill>
+        <p:spPr>
+          <a:xfrm>
+            <a:off x="348674" y="799856"/>
+            <a:ext cx="9678751" cy="619731"/>
+          </a:xfrm>
+          <a:prstGeom prst="rect">
+            <a:avLst/>
+          </a:prstGeom>
+        </p:spPr>
+      </p:pic>
+      <p:pic>
+        <p:nvPicPr>
+          <p:cNvPr id="10" name="Imagen 9">
+            <a:extLst>
+              <a:ext uri="{FF2B5EF4-FFF2-40B4-BE49-F238E27FC236}">
+                <a16:creationId xmlns:a16="http://schemas.microsoft.com/office/drawing/2014/main" id="{BA1440DE-6745-4357-5A9D-319EE6DF05C0}"/>
+              </a:ext>
+            </a:extLst>
+          </p:cNvPr>
+          <p:cNvPicPr>
+            <a:picLocks noChangeAspect="1"/>
+          </p:cNvPicPr>
+          <p:nvPr/>
+        </p:nvPicPr>
+        <p:blipFill>
+          <a:blip r:embed="rId4"/>
+          <a:srcRect r="55403" b="3075"/>
+          <a:stretch>
+            <a:fillRect/>
+          </a:stretch>
+        </p:blipFill>
+        <p:spPr>
+          <a:xfrm>
+            <a:off x="1152218" y="1801038"/>
+            <a:ext cx="981382" cy="369333"/>
+          </a:xfrm>
+          <a:prstGeom prst="rect">
+            <a:avLst/>
+          </a:prstGeom>
+        </p:spPr>
+      </p:pic>
     </p:spTree>
+    <p:extLst>
+      <p:ext uri="{BB962C8B-B14F-4D97-AF65-F5344CB8AC3E}">
+        <p14:creationId xmlns:p14="http://schemas.microsoft.com/office/powerpoint/2010/main" val="416924155"/>
+      </p:ext>
+    </p:extLst>
+  </p:cSld>
+  <p:clrMapOvr>
+    <a:masterClrMapping/>
+  </p:clrMapOvr>
+</p:sld>
+</file>
+
+<file path=ppt/slides/slide15.xml><?xml version="1.0" encoding="utf-8"?>
+<p:sld xmlns:a="http://schemas.openxmlformats.org/drawingml/2006/main" xmlns:r="http://schemas.openxmlformats.org/officeDocument/2006/relationships" xmlns:p="http://schemas.openxmlformats.org/presentationml/2006/main">
+  <p:cSld>
+    <p:spTree>
+      <p:nvGrpSpPr>
+        <p:cNvPr id="1" name="">
+          <a:extLst>
+            <a:ext uri="{FF2B5EF4-FFF2-40B4-BE49-F238E27FC236}">
+              <a16:creationId xmlns:a16="http://schemas.microsoft.com/office/drawing/2014/main" id="{A17DB6BE-3310-ECAE-7B2C-024EA7D965AD}"/>
+            </a:ext>
+          </a:extLst>
+        </p:cNvPr>
+        <p:cNvGrpSpPr/>
+        <p:nvPr/>
+      </p:nvGrpSpPr>
+      <p:grpSpPr>
+        <a:xfrm>
+          <a:off x="0" y="0"/>
+          <a:ext cx="0" cy="0"/>
+          <a:chOff x="0" y="0"/>
+          <a:chExt cx="0" cy="0"/>
+        </a:xfrm>
+      </p:grpSpPr>
+      <p:sp>
+        <p:nvSpPr>
+          <p:cNvPr id="2" name="Título 1">
+            <a:extLst>
+              <a:ext uri="{FF2B5EF4-FFF2-40B4-BE49-F238E27FC236}">
+                <a16:creationId xmlns:a16="http://schemas.microsoft.com/office/drawing/2014/main" id="{2F94AB4B-CDF3-E4BE-DF1A-92754FE1D30E}"/>
+              </a:ext>
+            </a:extLst>
+          </p:cNvPr>
+          <p:cNvSpPr>
+            <a:spLocks noGrp="1"/>
+          </p:cNvSpPr>
+          <p:nvPr>
+            <p:ph type="title"/>
+          </p:nvPr>
+        </p:nvSpPr>
+        <p:spPr/>
+        <p:txBody>
+          <a:bodyPr/>
+          <a:lstStyle/>
+          <a:p>
+            <a:r>
+              <a:rPr lang="es-ES" dirty="0" err="1"/>
+              <a:t>Balanced</a:t>
+            </a:r>
+            <a:r>
+              <a:rPr lang="es-ES" dirty="0"/>
+              <a:t> </a:t>
+            </a:r>
+            <a:r>
+              <a:rPr lang="es-ES" dirty="0" err="1"/>
+              <a:t>configuration</a:t>
+            </a:r>
+            <a:r>
+              <a:rPr lang="es-ES" dirty="0"/>
+              <a:t> </a:t>
+            </a:r>
+          </a:p>
+        </p:txBody>
+      </p:sp>
+      <p:sp>
+        <p:nvSpPr>
+          <p:cNvPr id="4" name="Marcador de pie de página 3">
+            <a:extLst>
+              <a:ext uri="{FF2B5EF4-FFF2-40B4-BE49-F238E27FC236}">
+                <a16:creationId xmlns:a16="http://schemas.microsoft.com/office/drawing/2014/main" id="{2263DFF4-392E-022E-3D6D-979032274C02}"/>
+              </a:ext>
+            </a:extLst>
+          </p:cNvPr>
+          <p:cNvSpPr>
+            <a:spLocks noGrp="1"/>
+          </p:cNvSpPr>
+          <p:nvPr>
+            <p:ph type="ftr" sz="quarter" idx="5"/>
+          </p:nvPr>
+        </p:nvSpPr>
+        <p:spPr/>
+        <p:txBody>
+          <a:bodyPr/>
+          <a:lstStyle/>
+          <a:p>
+            <a:pPr marL="12700">
+              <a:spcBef>
+                <a:spcPts val="15"/>
+              </a:spcBef>
+            </a:pPr>
+            <a:r>
+              <a:rPr lang="es-ES" spc="-5"/>
+              <a:t>LAB 3. INTERFEROMETERS I</a:t>
+            </a:r>
+            <a:endParaRPr lang="es-ES" spc="-5" dirty="0"/>
+          </a:p>
+        </p:txBody>
+      </p:sp>
+      <p:sp>
+        <p:nvSpPr>
+          <p:cNvPr id="5" name="Marcador de número de diapositiva 4">
+            <a:extLst>
+              <a:ext uri="{FF2B5EF4-FFF2-40B4-BE49-F238E27FC236}">
+                <a16:creationId xmlns:a16="http://schemas.microsoft.com/office/drawing/2014/main" id="{B3E6FF68-E21D-B705-161B-F8572DC68D36}"/>
+              </a:ext>
+            </a:extLst>
+          </p:cNvPr>
+          <p:cNvSpPr>
+            <a:spLocks noGrp="1"/>
+          </p:cNvSpPr>
+          <p:nvPr>
+            <p:ph type="sldNum" sz="quarter" idx="7"/>
+          </p:nvPr>
+        </p:nvSpPr>
+        <p:spPr/>
+        <p:txBody>
+          <a:bodyPr/>
+          <a:lstStyle/>
+          <a:p>
+            <a:fld id="{B6F15528-21DE-4FAA-801E-634DDDAF4B2B}" type="slidenum">
+              <a:rPr lang="es-ES" smtClean="0"/>
+              <a:t>15</a:t>
+            </a:fld>
+            <a:endParaRPr lang="es-ES"/>
+          </a:p>
+        </p:txBody>
+      </p:sp>
+      <p:pic>
+        <p:nvPicPr>
+          <p:cNvPr id="7" name="Imagen 6">
+            <a:extLst>
+              <a:ext uri="{FF2B5EF4-FFF2-40B4-BE49-F238E27FC236}">
+                <a16:creationId xmlns:a16="http://schemas.microsoft.com/office/drawing/2014/main" id="{4D34BC03-E676-1C49-BB63-EEA0B2FC2D54}"/>
+              </a:ext>
+            </a:extLst>
+          </p:cNvPr>
+          <p:cNvPicPr>
+            <a:picLocks noChangeAspect="1"/>
+          </p:cNvPicPr>
+          <p:nvPr/>
+        </p:nvPicPr>
+        <p:blipFill>
+          <a:blip r:embed="rId2">
+            <a:extLst>
+              <a:ext uri="{28A0092B-C50C-407E-A947-70E740481C1C}">
+                <a14:useLocalDpi xmlns:a14="http://schemas.microsoft.com/office/drawing/2010/main" val="0"/>
+              </a:ext>
+            </a:extLst>
+          </a:blip>
+          <a:srcRect/>
+          <a:stretch/>
+        </p:blipFill>
+        <p:spPr>
+          <a:xfrm>
+            <a:off x="632409" y="2254791"/>
+            <a:ext cx="4622282" cy="3726715"/>
+          </a:xfrm>
+          <a:prstGeom prst="rect">
+            <a:avLst/>
+          </a:prstGeom>
+        </p:spPr>
+      </p:pic>
+      <p:sp>
+        <p:nvSpPr>
+          <p:cNvPr id="9" name="CuadroTexto 8">
+            <a:extLst>
+              <a:ext uri="{FF2B5EF4-FFF2-40B4-BE49-F238E27FC236}">
+                <a16:creationId xmlns:a16="http://schemas.microsoft.com/office/drawing/2014/main" id="{DAE37E88-CA3E-5195-9116-7394904664B1}"/>
+              </a:ext>
+            </a:extLst>
+          </p:cNvPr>
+          <p:cNvSpPr txBox="1"/>
+          <p:nvPr/>
+        </p:nvSpPr>
+        <p:spPr>
+          <a:xfrm>
+            <a:off x="5715000" y="2133600"/>
+            <a:ext cx="6128326" cy="646331"/>
+          </a:xfrm>
+          <a:prstGeom prst="rect">
+            <a:avLst/>
+          </a:prstGeom>
+          <a:noFill/>
+        </p:spPr>
+        <p:txBody>
+          <a:bodyPr wrap="square">
+            <a:spAutoFit/>
+          </a:bodyPr>
+          <a:lstStyle/>
+          <a:p>
+            <a:r>
+              <a:rPr lang="es-ES" dirty="0"/>
+              <a:t>Como era de esperar, al añadir pérdidas de exceso la potencia disminuye en el puerto de salida. </a:t>
+            </a:r>
+          </a:p>
+        </p:txBody>
+      </p:sp>
+      <p:pic>
+        <p:nvPicPr>
+          <p:cNvPr id="6" name="Imagen 5">
+            <a:extLst>
+              <a:ext uri="{FF2B5EF4-FFF2-40B4-BE49-F238E27FC236}">
+                <a16:creationId xmlns:a16="http://schemas.microsoft.com/office/drawing/2014/main" id="{8928E6A6-3BD7-9E8A-0105-1DA8E6F80A49}"/>
+              </a:ext>
+            </a:extLst>
+          </p:cNvPr>
+          <p:cNvPicPr>
+            <a:picLocks noChangeAspect="1"/>
+          </p:cNvPicPr>
+          <p:nvPr/>
+        </p:nvPicPr>
+        <p:blipFill>
+          <a:blip r:embed="rId3">
+            <a:extLst>
+              <a:ext uri="{28A0092B-C50C-407E-A947-70E740481C1C}">
+                <a14:useLocalDpi xmlns:a14="http://schemas.microsoft.com/office/drawing/2010/main" val="0"/>
+              </a:ext>
+            </a:extLst>
+          </a:blip>
+          <a:srcRect/>
+          <a:stretch/>
+        </p:blipFill>
+        <p:spPr>
+          <a:xfrm>
+            <a:off x="348674" y="799856"/>
+            <a:ext cx="9678751" cy="619731"/>
+          </a:xfrm>
+          <a:prstGeom prst="rect">
+            <a:avLst/>
+          </a:prstGeom>
+        </p:spPr>
+      </p:pic>
+      <p:pic>
+        <p:nvPicPr>
+          <p:cNvPr id="10" name="Imagen 9">
+            <a:extLst>
+              <a:ext uri="{FF2B5EF4-FFF2-40B4-BE49-F238E27FC236}">
+                <a16:creationId xmlns:a16="http://schemas.microsoft.com/office/drawing/2014/main" id="{9B1B5E16-AD51-F1A4-89AB-2AE411EDE9F3}"/>
+              </a:ext>
+            </a:extLst>
+          </p:cNvPr>
+          <p:cNvPicPr>
+            <a:picLocks noChangeAspect="1"/>
+          </p:cNvPicPr>
+          <p:nvPr/>
+        </p:nvPicPr>
+        <p:blipFill>
+          <a:blip r:embed="rId4"/>
+          <a:srcRect r="55403" b="3075"/>
+          <a:stretch>
+            <a:fillRect/>
+          </a:stretch>
+        </p:blipFill>
+        <p:spPr>
+          <a:xfrm>
+            <a:off x="1152218" y="1801038"/>
+            <a:ext cx="981382" cy="369333"/>
+          </a:xfrm>
+          <a:prstGeom prst="rect">
+            <a:avLst/>
+          </a:prstGeom>
+        </p:spPr>
+      </p:pic>
+    </p:spTree>
+    <p:extLst>
+      <p:ext uri="{BB962C8B-B14F-4D97-AF65-F5344CB8AC3E}">
+        <p14:creationId xmlns:p14="http://schemas.microsoft.com/office/powerpoint/2010/main" val="640049631"/>
+      </p:ext>
+    </p:extLst>
+  </p:cSld>
+  <p:clrMapOvr>
+    <a:masterClrMapping/>
+  </p:clrMapOvr>
+</p:sld>
+</file>
+
+<file path=ppt/slides/slide16.xml><?xml version="1.0" encoding="utf-8"?>
+<p:sld xmlns:a="http://schemas.openxmlformats.org/drawingml/2006/main" xmlns:r="http://schemas.openxmlformats.org/officeDocument/2006/relationships" xmlns:p="http://schemas.openxmlformats.org/presentationml/2006/main">
+  <p:cSld>
+    <p:spTree>
+      <p:nvGrpSpPr>
+        <p:cNvPr id="1" name="">
+          <a:extLst>
+            <a:ext uri="{FF2B5EF4-FFF2-40B4-BE49-F238E27FC236}">
+              <a16:creationId xmlns:a16="http://schemas.microsoft.com/office/drawing/2014/main" id="{7A51299C-FF0E-DA44-56A9-C6874344379F}"/>
+            </a:ext>
+          </a:extLst>
+        </p:cNvPr>
+        <p:cNvGrpSpPr/>
+        <p:nvPr/>
+      </p:nvGrpSpPr>
+      <p:grpSpPr>
+        <a:xfrm>
+          <a:off x="0" y="0"/>
+          <a:ext cx="0" cy="0"/>
+          <a:chOff x="0" y="0"/>
+          <a:chExt cx="0" cy="0"/>
+        </a:xfrm>
+      </p:grpSpPr>
+      <p:sp>
+        <p:nvSpPr>
+          <p:cNvPr id="2" name="Título 1">
+            <a:extLst>
+              <a:ext uri="{FF2B5EF4-FFF2-40B4-BE49-F238E27FC236}">
+                <a16:creationId xmlns:a16="http://schemas.microsoft.com/office/drawing/2014/main" id="{016E4D7A-F67F-770C-D08E-17DE446887BF}"/>
+              </a:ext>
+            </a:extLst>
+          </p:cNvPr>
+          <p:cNvSpPr>
+            <a:spLocks noGrp="1"/>
+          </p:cNvSpPr>
+          <p:nvPr>
+            <p:ph type="title"/>
+          </p:nvPr>
+        </p:nvSpPr>
+        <p:spPr/>
+        <p:txBody>
+          <a:bodyPr/>
+          <a:lstStyle/>
+          <a:p>
+            <a:r>
+              <a:rPr lang="es-ES" dirty="0" err="1"/>
+              <a:t>Unbalanced</a:t>
+            </a:r>
+            <a:r>
+              <a:rPr lang="es-ES" dirty="0"/>
+              <a:t> </a:t>
+            </a:r>
+            <a:r>
+              <a:rPr lang="es-ES" dirty="0" err="1"/>
+              <a:t>configuration</a:t>
+            </a:r>
+            <a:r>
+              <a:rPr lang="es-ES" dirty="0"/>
+              <a:t> –</a:t>
+            </a:r>
+            <a:r>
+              <a:rPr lang="es-ES" dirty="0" err="1"/>
+              <a:t>Phase</a:t>
+            </a:r>
+            <a:r>
+              <a:rPr lang="es-ES" dirty="0"/>
+              <a:t> </a:t>
+            </a:r>
+            <a:r>
+              <a:rPr lang="es-ES" dirty="0" err="1"/>
+              <a:t>Difference</a:t>
+            </a:r>
+            <a:r>
+              <a:rPr lang="es-ES" dirty="0"/>
+              <a:t> </a:t>
+            </a:r>
+          </a:p>
+        </p:txBody>
+      </p:sp>
+      <p:sp>
+        <p:nvSpPr>
+          <p:cNvPr id="4" name="Marcador de pie de página 3">
+            <a:extLst>
+              <a:ext uri="{FF2B5EF4-FFF2-40B4-BE49-F238E27FC236}">
+                <a16:creationId xmlns:a16="http://schemas.microsoft.com/office/drawing/2014/main" id="{9F337382-B2FF-7232-405D-A1AA57C4FC1F}"/>
+              </a:ext>
+            </a:extLst>
+          </p:cNvPr>
+          <p:cNvSpPr>
+            <a:spLocks noGrp="1"/>
+          </p:cNvSpPr>
+          <p:nvPr>
+            <p:ph type="ftr" sz="quarter" idx="5"/>
+          </p:nvPr>
+        </p:nvSpPr>
+        <p:spPr/>
+        <p:txBody>
+          <a:bodyPr/>
+          <a:lstStyle/>
+          <a:p>
+            <a:pPr marL="12700">
+              <a:spcBef>
+                <a:spcPts val="15"/>
+              </a:spcBef>
+            </a:pPr>
+            <a:r>
+              <a:rPr lang="es-ES" spc="-5"/>
+              <a:t>LAB 3. INTERFEROMETERS I</a:t>
+            </a:r>
+            <a:endParaRPr lang="es-ES" spc="-5" dirty="0"/>
+          </a:p>
+        </p:txBody>
+      </p:sp>
+      <p:sp>
+        <p:nvSpPr>
+          <p:cNvPr id="5" name="Marcador de número de diapositiva 4">
+            <a:extLst>
+              <a:ext uri="{FF2B5EF4-FFF2-40B4-BE49-F238E27FC236}">
+                <a16:creationId xmlns:a16="http://schemas.microsoft.com/office/drawing/2014/main" id="{E4E59C47-D7EA-4A3D-4103-5964C7B8CE9B}"/>
+              </a:ext>
+            </a:extLst>
+          </p:cNvPr>
+          <p:cNvSpPr>
+            <a:spLocks noGrp="1"/>
+          </p:cNvSpPr>
+          <p:nvPr>
+            <p:ph type="sldNum" sz="quarter" idx="7"/>
+          </p:nvPr>
+        </p:nvSpPr>
+        <p:spPr/>
+        <p:txBody>
+          <a:bodyPr/>
+          <a:lstStyle/>
+          <a:p>
+            <a:fld id="{B6F15528-21DE-4FAA-801E-634DDDAF4B2B}" type="slidenum">
+              <a:rPr lang="es-ES" smtClean="0"/>
+              <a:t>16</a:t>
+            </a:fld>
+            <a:endParaRPr lang="es-ES"/>
+          </a:p>
+        </p:txBody>
+      </p:sp>
+      <p:pic>
+        <p:nvPicPr>
+          <p:cNvPr id="7" name="Imagen 6">
+            <a:extLst>
+              <a:ext uri="{FF2B5EF4-FFF2-40B4-BE49-F238E27FC236}">
+                <a16:creationId xmlns:a16="http://schemas.microsoft.com/office/drawing/2014/main" id="{2BE39AC6-ABD6-258C-4AA6-E7B6DC5D6566}"/>
+              </a:ext>
+            </a:extLst>
+          </p:cNvPr>
+          <p:cNvPicPr>
+            <a:picLocks noChangeAspect="1"/>
+          </p:cNvPicPr>
+          <p:nvPr/>
+        </p:nvPicPr>
+        <p:blipFill>
+          <a:blip r:embed="rId2">
+            <a:extLst>
+              <a:ext uri="{28A0092B-C50C-407E-A947-70E740481C1C}">
+                <a14:useLocalDpi xmlns:a14="http://schemas.microsoft.com/office/drawing/2010/main" val="0"/>
+              </a:ext>
+            </a:extLst>
+          </a:blip>
+          <a:srcRect t="384" b="384"/>
+          <a:stretch/>
+        </p:blipFill>
+        <p:spPr>
+          <a:xfrm>
+            <a:off x="348674" y="2133600"/>
+            <a:ext cx="4667901" cy="3743847"/>
+          </a:xfrm>
+          <a:prstGeom prst="rect">
+            <a:avLst/>
+          </a:prstGeom>
+        </p:spPr>
+      </p:pic>
+      <p:sp>
+        <p:nvSpPr>
+          <p:cNvPr id="9" name="CuadroTexto 8">
+            <a:extLst>
+              <a:ext uri="{FF2B5EF4-FFF2-40B4-BE49-F238E27FC236}">
+                <a16:creationId xmlns:a16="http://schemas.microsoft.com/office/drawing/2014/main" id="{5605D7A0-A247-A34F-8ADA-7629BCACEFEE}"/>
+              </a:ext>
+            </a:extLst>
+          </p:cNvPr>
+          <p:cNvSpPr txBox="1"/>
+          <p:nvPr/>
+        </p:nvSpPr>
+        <p:spPr>
+          <a:xfrm>
+            <a:off x="5426365" y="2133600"/>
+            <a:ext cx="6128326" cy="2308324"/>
+          </a:xfrm>
+          <a:prstGeom prst="rect">
+            <a:avLst/>
+          </a:prstGeom>
+          <a:noFill/>
+        </p:spPr>
+        <p:txBody>
+          <a:bodyPr wrap="square">
+            <a:spAutoFit/>
+          </a:bodyPr>
+          <a:lstStyle/>
+          <a:p>
+            <a:r>
+              <a:rPr lang="en-US" dirty="0"/>
+              <a:t>Al </a:t>
+            </a:r>
+            <a:r>
+              <a:rPr lang="en-US" dirty="0" err="1"/>
+              <a:t>variar</a:t>
+            </a:r>
+            <a:r>
+              <a:rPr lang="en-US" dirty="0"/>
+              <a:t> </a:t>
+            </a:r>
+            <a:r>
+              <a:rPr lang="en-US" dirty="0" err="1"/>
+              <a:t>el</a:t>
+            </a:r>
+            <a:r>
+              <a:rPr lang="en-US" dirty="0"/>
+              <a:t> </a:t>
+            </a:r>
+            <a:r>
+              <a:rPr lang="en-US" dirty="0" err="1"/>
+              <a:t>índice</a:t>
+            </a:r>
+            <a:r>
+              <a:rPr lang="en-US" dirty="0"/>
+              <a:t> </a:t>
+            </a:r>
+            <a:r>
+              <a:rPr lang="en-US" dirty="0" err="1"/>
+              <a:t>efectivo</a:t>
+            </a:r>
+            <a:r>
+              <a:rPr lang="en-US" dirty="0"/>
+              <a:t>, la </a:t>
+            </a:r>
+            <a:r>
+              <a:rPr lang="en-US" dirty="0" err="1"/>
+              <a:t>propagación</a:t>
+            </a:r>
+            <a:r>
+              <a:rPr lang="en-US" dirty="0"/>
+              <a:t> varia, lo </a:t>
+            </a:r>
+            <a:r>
+              <a:rPr lang="en-US" dirty="0" err="1"/>
+              <a:t>que</a:t>
+            </a:r>
+            <a:r>
+              <a:rPr lang="en-US" dirty="0"/>
+              <a:t> da </a:t>
+            </a:r>
+            <a:r>
+              <a:rPr lang="en-US" dirty="0" err="1"/>
+              <a:t>como</a:t>
+            </a:r>
+            <a:r>
+              <a:rPr lang="en-US" dirty="0"/>
+              <a:t> </a:t>
+            </a:r>
+            <a:r>
+              <a:rPr lang="en-US" dirty="0" err="1"/>
+              <a:t>resultado</a:t>
+            </a:r>
+            <a:r>
+              <a:rPr lang="en-US" dirty="0"/>
+              <a:t>  </a:t>
+            </a:r>
+            <a:r>
+              <a:rPr lang="en-US" dirty="0" err="1"/>
+              <a:t>que</a:t>
+            </a:r>
+            <a:r>
+              <a:rPr lang="en-US" dirty="0"/>
+              <a:t> </a:t>
+            </a:r>
+            <a:r>
+              <a:rPr lang="en-US" dirty="0" err="1"/>
+              <a:t>lleguen</a:t>
+            </a:r>
+            <a:r>
+              <a:rPr lang="en-US" dirty="0"/>
+              <a:t> con </a:t>
+            </a:r>
+            <a:r>
+              <a:rPr lang="en-US" dirty="0" err="1"/>
+              <a:t>una</a:t>
+            </a:r>
+            <a:r>
+              <a:rPr lang="en-US" dirty="0"/>
+              <a:t> </a:t>
+            </a:r>
+            <a:r>
+              <a:rPr lang="en-US" dirty="0" err="1"/>
+              <a:t>fase</a:t>
+            </a:r>
+            <a:r>
+              <a:rPr lang="en-US" dirty="0"/>
+              <a:t> </a:t>
+            </a:r>
+            <a:r>
+              <a:rPr lang="en-US" dirty="0" err="1"/>
+              <a:t>distinta</a:t>
+            </a:r>
+            <a:r>
+              <a:rPr lang="en-US" dirty="0"/>
+              <a:t> a la hora de </a:t>
+            </a:r>
+            <a:r>
+              <a:rPr lang="en-US" dirty="0" err="1"/>
+              <a:t>recombinarse</a:t>
+            </a:r>
+            <a:r>
+              <a:rPr lang="en-US" dirty="0"/>
+              <a:t>. Como la </a:t>
+            </a:r>
+            <a:r>
+              <a:rPr lang="en-US" dirty="0" err="1"/>
+              <a:t>propagación</a:t>
+            </a:r>
+            <a:r>
+              <a:rPr lang="en-US" dirty="0"/>
+              <a:t> </a:t>
+            </a:r>
+            <a:r>
+              <a:rPr lang="en-US" dirty="0" err="1"/>
+              <a:t>depende</a:t>
+            </a:r>
+            <a:r>
+              <a:rPr lang="en-US" dirty="0"/>
+              <a:t> también de la longitude de </a:t>
+            </a:r>
+            <a:r>
+              <a:rPr lang="en-US" dirty="0" err="1"/>
+              <a:t>onda</a:t>
+            </a:r>
+            <a:r>
+              <a:rPr lang="en-US" dirty="0"/>
+              <a:t> Podemos </a:t>
+            </a:r>
+            <a:r>
+              <a:rPr lang="en-US" dirty="0" err="1"/>
+              <a:t>ver</a:t>
+            </a:r>
+            <a:r>
+              <a:rPr lang="en-US" dirty="0"/>
+              <a:t> </a:t>
+            </a:r>
+            <a:r>
+              <a:rPr lang="en-US" dirty="0" err="1"/>
+              <a:t>como</a:t>
+            </a:r>
+            <a:r>
+              <a:rPr lang="en-US" dirty="0"/>
+              <a:t> varia </a:t>
+            </a:r>
+            <a:r>
+              <a:rPr lang="en-US" dirty="0" err="1"/>
+              <a:t>el</a:t>
+            </a:r>
+            <a:r>
+              <a:rPr lang="en-US" dirty="0"/>
+              <a:t> cross y bar a lo largo de la </a:t>
+            </a:r>
+            <a:r>
+              <a:rPr lang="en-US" dirty="0" err="1"/>
+              <a:t>gráfica</a:t>
+            </a:r>
+            <a:r>
+              <a:rPr lang="en-US" dirty="0"/>
+              <a:t>. </a:t>
+            </a:r>
+          </a:p>
+          <a:p>
+            <a:endParaRPr lang="en-US" dirty="0"/>
+          </a:p>
+          <a:p>
+            <a:r>
+              <a:rPr lang="en-US" dirty="0"/>
+              <a:t>La </a:t>
+            </a:r>
+            <a:r>
+              <a:rPr lang="en-US" dirty="0" err="1"/>
+              <a:t>diferencia</a:t>
+            </a:r>
+            <a:r>
+              <a:rPr lang="en-US" dirty="0"/>
+              <a:t> de </a:t>
+            </a:r>
+            <a:r>
+              <a:rPr lang="en-US" dirty="0" err="1"/>
+              <a:t>indice</a:t>
+            </a:r>
+            <a:r>
+              <a:rPr lang="en-US" dirty="0"/>
+              <a:t> </a:t>
+            </a:r>
+            <a:r>
+              <a:rPr lang="en-US" dirty="0" err="1"/>
+              <a:t>efectivo</a:t>
+            </a:r>
+            <a:r>
+              <a:rPr lang="en-US" dirty="0"/>
+              <a:t> de </a:t>
+            </a:r>
+            <a:r>
+              <a:rPr lang="en-US" dirty="0" err="1"/>
+              <a:t>cada</a:t>
+            </a:r>
+            <a:r>
+              <a:rPr lang="en-US" dirty="0"/>
+              <a:t> </a:t>
+            </a:r>
+            <a:r>
+              <a:rPr lang="en-US" dirty="0" err="1"/>
+              <a:t>guia</a:t>
+            </a:r>
+            <a:r>
+              <a:rPr lang="en-US" dirty="0"/>
+              <a:t> se ha </a:t>
+            </a:r>
+            <a:r>
+              <a:rPr lang="en-US" dirty="0" err="1"/>
+              <a:t>realizado</a:t>
+            </a:r>
+            <a:endParaRPr lang="en-US" dirty="0"/>
+          </a:p>
+          <a:p>
+            <a:r>
+              <a:rPr lang="en-US" dirty="0" err="1"/>
+              <a:t>añadiéndole</a:t>
+            </a:r>
+            <a:r>
+              <a:rPr lang="en-US" dirty="0"/>
+              <a:t> un </a:t>
+            </a:r>
+            <a:r>
+              <a:rPr lang="en-US" dirty="0" err="1"/>
+              <a:t>pequeño</a:t>
+            </a:r>
+            <a:r>
+              <a:rPr lang="en-US" dirty="0"/>
+              <a:t> </a:t>
+            </a:r>
+            <a:r>
+              <a:rPr lang="en-US" dirty="0" err="1"/>
+              <a:t>incremento</a:t>
+            </a:r>
+            <a:r>
+              <a:rPr lang="en-US" dirty="0"/>
+              <a:t> a la </a:t>
+            </a:r>
+            <a:r>
+              <a:rPr lang="en-US" dirty="0" err="1"/>
+              <a:t>guia</a:t>
+            </a:r>
+            <a:r>
+              <a:rPr lang="en-US" dirty="0"/>
+              <a:t> de </a:t>
+            </a:r>
+            <a:r>
+              <a:rPr lang="en-US" dirty="0" err="1"/>
+              <a:t>abajo</a:t>
+            </a:r>
+            <a:r>
+              <a:rPr lang="en-US" dirty="0"/>
+              <a:t>.</a:t>
+            </a:r>
+            <a:endParaRPr lang="es-ES" dirty="0"/>
+          </a:p>
+        </p:txBody>
+      </p:sp>
+      <p:pic>
+        <p:nvPicPr>
+          <p:cNvPr id="6" name="Imagen 5">
+            <a:extLst>
+              <a:ext uri="{FF2B5EF4-FFF2-40B4-BE49-F238E27FC236}">
+                <a16:creationId xmlns:a16="http://schemas.microsoft.com/office/drawing/2014/main" id="{080E6C45-BA87-8943-2325-351CFFD9BD97}"/>
+              </a:ext>
+            </a:extLst>
+          </p:cNvPr>
+          <p:cNvPicPr>
+            <a:picLocks noChangeAspect="1"/>
+          </p:cNvPicPr>
+          <p:nvPr/>
+        </p:nvPicPr>
+        <p:blipFill>
+          <a:blip r:embed="rId3"/>
+          <a:stretch>
+            <a:fillRect/>
+          </a:stretch>
+        </p:blipFill>
+        <p:spPr>
+          <a:xfrm>
+            <a:off x="609600" y="1723882"/>
+            <a:ext cx="2091878" cy="348647"/>
+          </a:xfrm>
+          <a:prstGeom prst="rect">
+            <a:avLst/>
+          </a:prstGeom>
+        </p:spPr>
+      </p:pic>
+      <p:pic>
+        <p:nvPicPr>
+          <p:cNvPr id="8" name="Imagen 7">
+            <a:extLst>
+              <a:ext uri="{FF2B5EF4-FFF2-40B4-BE49-F238E27FC236}">
+                <a16:creationId xmlns:a16="http://schemas.microsoft.com/office/drawing/2014/main" id="{11A46D6F-C465-7C3B-3BD9-626910705B21}"/>
+              </a:ext>
+            </a:extLst>
+          </p:cNvPr>
+          <p:cNvPicPr>
+            <a:picLocks noChangeAspect="1"/>
+          </p:cNvPicPr>
+          <p:nvPr/>
+        </p:nvPicPr>
+        <p:blipFill>
+          <a:blip r:embed="rId4"/>
+          <a:stretch>
+            <a:fillRect/>
+          </a:stretch>
+        </p:blipFill>
+        <p:spPr>
+          <a:xfrm>
+            <a:off x="457200" y="609547"/>
+            <a:ext cx="9545382" cy="1019317"/>
+          </a:xfrm>
+          <a:prstGeom prst="rect">
+            <a:avLst/>
+          </a:prstGeom>
+        </p:spPr>
+      </p:pic>
+    </p:spTree>
+    <p:extLst>
+      <p:ext uri="{BB962C8B-B14F-4D97-AF65-F5344CB8AC3E}">
+        <p14:creationId xmlns:p14="http://schemas.microsoft.com/office/powerpoint/2010/main" val="2903868039"/>
+      </p:ext>
+    </p:extLst>
+  </p:cSld>
+  <p:clrMapOvr>
+    <a:masterClrMapping/>
+  </p:clrMapOvr>
+</p:sld>
+</file>
+
+<file path=ppt/slides/slide17.xml><?xml version="1.0" encoding="utf-8"?>
+<p:sld xmlns:a="http://schemas.openxmlformats.org/drawingml/2006/main" xmlns:r="http://schemas.openxmlformats.org/officeDocument/2006/relationships" xmlns:p="http://schemas.openxmlformats.org/presentationml/2006/main">
+  <p:cSld>
+    <p:spTree>
+      <p:nvGrpSpPr>
+        <p:cNvPr id="1" name="">
+          <a:extLst>
+            <a:ext uri="{FF2B5EF4-FFF2-40B4-BE49-F238E27FC236}">
+              <a16:creationId xmlns:a16="http://schemas.microsoft.com/office/drawing/2014/main" id="{E218D4CB-2890-25F5-447C-921D5ED844DD}"/>
+            </a:ext>
+          </a:extLst>
+        </p:cNvPr>
+        <p:cNvGrpSpPr/>
+        <p:nvPr/>
+      </p:nvGrpSpPr>
+      <p:grpSpPr>
+        <a:xfrm>
+          <a:off x="0" y="0"/>
+          <a:ext cx="0" cy="0"/>
+          <a:chOff x="0" y="0"/>
+          <a:chExt cx="0" cy="0"/>
+        </a:xfrm>
+      </p:grpSpPr>
+      <p:sp>
+        <p:nvSpPr>
+          <p:cNvPr id="2" name="Título 1">
+            <a:extLst>
+              <a:ext uri="{FF2B5EF4-FFF2-40B4-BE49-F238E27FC236}">
+                <a16:creationId xmlns:a16="http://schemas.microsoft.com/office/drawing/2014/main" id="{2CBE9C3E-85C2-85E7-4E7E-944D01C09226}"/>
+              </a:ext>
+            </a:extLst>
+          </p:cNvPr>
+          <p:cNvSpPr>
+            <a:spLocks noGrp="1"/>
+          </p:cNvSpPr>
+          <p:nvPr>
+            <p:ph type="title"/>
+          </p:nvPr>
+        </p:nvSpPr>
+        <p:spPr/>
+        <p:txBody>
+          <a:bodyPr/>
+          <a:lstStyle/>
+          <a:p>
+            <a:r>
+              <a:rPr lang="es-ES" dirty="0" err="1"/>
+              <a:t>Unbalanced</a:t>
+            </a:r>
+            <a:r>
+              <a:rPr lang="es-ES" dirty="0"/>
+              <a:t> </a:t>
+            </a:r>
+            <a:r>
+              <a:rPr lang="es-ES" dirty="0" err="1"/>
+              <a:t>configuration</a:t>
+            </a:r>
+            <a:r>
+              <a:rPr lang="es-ES" dirty="0"/>
+              <a:t> –</a:t>
+            </a:r>
+            <a:r>
+              <a:rPr lang="es-ES" dirty="0" err="1"/>
+              <a:t>Phase</a:t>
+            </a:r>
+            <a:r>
+              <a:rPr lang="es-ES" dirty="0"/>
+              <a:t> </a:t>
+            </a:r>
+            <a:r>
+              <a:rPr lang="es-ES" dirty="0" err="1"/>
+              <a:t>Difference</a:t>
+            </a:r>
+            <a:r>
+              <a:rPr lang="es-ES" dirty="0"/>
+              <a:t> </a:t>
+            </a:r>
+          </a:p>
+        </p:txBody>
+      </p:sp>
+      <p:sp>
+        <p:nvSpPr>
+          <p:cNvPr id="4" name="Marcador de pie de página 3">
+            <a:extLst>
+              <a:ext uri="{FF2B5EF4-FFF2-40B4-BE49-F238E27FC236}">
+                <a16:creationId xmlns:a16="http://schemas.microsoft.com/office/drawing/2014/main" id="{8EBBC86A-D5D7-DABC-CC56-4B540C7EA45A}"/>
+              </a:ext>
+            </a:extLst>
+          </p:cNvPr>
+          <p:cNvSpPr>
+            <a:spLocks noGrp="1"/>
+          </p:cNvSpPr>
+          <p:nvPr>
+            <p:ph type="ftr" sz="quarter" idx="5"/>
+          </p:nvPr>
+        </p:nvSpPr>
+        <p:spPr/>
+        <p:txBody>
+          <a:bodyPr/>
+          <a:lstStyle/>
+          <a:p>
+            <a:pPr marL="12700">
+              <a:spcBef>
+                <a:spcPts val="15"/>
+              </a:spcBef>
+            </a:pPr>
+            <a:r>
+              <a:rPr lang="es-ES" spc="-5"/>
+              <a:t>LAB 3. INTERFEROMETERS I</a:t>
+            </a:r>
+            <a:endParaRPr lang="es-ES" spc="-5" dirty="0"/>
+          </a:p>
+        </p:txBody>
+      </p:sp>
+      <p:sp>
+        <p:nvSpPr>
+          <p:cNvPr id="5" name="Marcador de número de diapositiva 4">
+            <a:extLst>
+              <a:ext uri="{FF2B5EF4-FFF2-40B4-BE49-F238E27FC236}">
+                <a16:creationId xmlns:a16="http://schemas.microsoft.com/office/drawing/2014/main" id="{06866E8A-F531-5D09-ECB8-1D850C4379F5}"/>
+              </a:ext>
+            </a:extLst>
+          </p:cNvPr>
+          <p:cNvSpPr>
+            <a:spLocks noGrp="1"/>
+          </p:cNvSpPr>
+          <p:nvPr>
+            <p:ph type="sldNum" sz="quarter" idx="7"/>
+          </p:nvPr>
+        </p:nvSpPr>
+        <p:spPr/>
+        <p:txBody>
+          <a:bodyPr/>
+          <a:lstStyle/>
+          <a:p>
+            <a:fld id="{B6F15528-21DE-4FAA-801E-634DDDAF4B2B}" type="slidenum">
+              <a:rPr lang="es-ES" smtClean="0"/>
+              <a:t>17</a:t>
+            </a:fld>
+            <a:endParaRPr lang="es-ES"/>
+          </a:p>
+        </p:txBody>
+      </p:sp>
+      <p:pic>
+        <p:nvPicPr>
+          <p:cNvPr id="7" name="Imagen 6">
+            <a:extLst>
+              <a:ext uri="{FF2B5EF4-FFF2-40B4-BE49-F238E27FC236}">
+                <a16:creationId xmlns:a16="http://schemas.microsoft.com/office/drawing/2014/main" id="{5CC3B88B-B723-A9A7-DF09-3807235273B1}"/>
+              </a:ext>
+            </a:extLst>
+          </p:cNvPr>
+          <p:cNvPicPr>
+            <a:picLocks noChangeAspect="1"/>
+          </p:cNvPicPr>
+          <p:nvPr/>
+        </p:nvPicPr>
+        <p:blipFill>
+          <a:blip r:embed="rId2">
+            <a:extLst>
+              <a:ext uri="{28A0092B-C50C-407E-A947-70E740481C1C}">
+                <a14:useLocalDpi xmlns:a14="http://schemas.microsoft.com/office/drawing/2010/main" val="0"/>
+              </a:ext>
+            </a:extLst>
+          </a:blip>
+          <a:srcRect l="30" r="30"/>
+          <a:stretch/>
+        </p:blipFill>
+        <p:spPr>
+          <a:xfrm>
+            <a:off x="348674" y="2133600"/>
+            <a:ext cx="4667901" cy="3743847"/>
+          </a:xfrm>
+          <a:prstGeom prst="rect">
+            <a:avLst/>
+          </a:prstGeom>
+        </p:spPr>
+      </p:pic>
+      <p:sp>
+        <p:nvSpPr>
+          <p:cNvPr id="9" name="CuadroTexto 8">
+            <a:extLst>
+              <a:ext uri="{FF2B5EF4-FFF2-40B4-BE49-F238E27FC236}">
+                <a16:creationId xmlns:a16="http://schemas.microsoft.com/office/drawing/2014/main" id="{55902C51-8DBD-CF19-7FE4-EA59378F4C75}"/>
+              </a:ext>
+            </a:extLst>
+          </p:cNvPr>
+          <p:cNvSpPr txBox="1"/>
+          <p:nvPr/>
+        </p:nvSpPr>
+        <p:spPr>
+          <a:xfrm>
+            <a:off x="5426365" y="2133600"/>
+            <a:ext cx="6128326" cy="2031325"/>
+          </a:xfrm>
+          <a:prstGeom prst="rect">
+            <a:avLst/>
+          </a:prstGeom>
+          <a:noFill/>
+        </p:spPr>
+        <p:txBody>
+          <a:bodyPr wrap="square">
+            <a:spAutoFit/>
+          </a:bodyPr>
+          <a:lstStyle/>
+          <a:p>
+            <a:r>
+              <a:rPr lang="en-US" dirty="0"/>
+              <a:t>La </a:t>
+            </a:r>
+            <a:r>
+              <a:rPr lang="en-US" dirty="0" err="1"/>
+              <a:t>diferencia</a:t>
+            </a:r>
+            <a:r>
+              <a:rPr lang="en-US" dirty="0"/>
+              <a:t> de </a:t>
+            </a:r>
+            <a:r>
+              <a:rPr lang="en-US" dirty="0" err="1"/>
+              <a:t>fase</a:t>
+            </a:r>
+            <a:r>
+              <a:rPr lang="en-US" dirty="0"/>
+              <a:t> </a:t>
+            </a:r>
+            <a:r>
+              <a:rPr lang="en-US" dirty="0" err="1"/>
+              <a:t>distribuye</a:t>
+            </a:r>
+            <a:r>
+              <a:rPr lang="en-US" dirty="0"/>
+              <a:t> la </a:t>
+            </a:r>
+            <a:r>
+              <a:rPr lang="en-US" dirty="0" err="1"/>
+              <a:t>potencia</a:t>
+            </a:r>
+            <a:r>
+              <a:rPr lang="en-US" dirty="0"/>
+              <a:t> entre </a:t>
+            </a:r>
+            <a:r>
+              <a:rPr lang="en-US" dirty="0" err="1"/>
+              <a:t>los</a:t>
+            </a:r>
+            <a:r>
+              <a:rPr lang="en-US" dirty="0"/>
+              <a:t> dos </a:t>
+            </a:r>
+            <a:r>
+              <a:rPr lang="en-US" dirty="0" err="1"/>
+              <a:t>brazos</a:t>
+            </a:r>
+            <a:r>
+              <a:rPr lang="en-US" dirty="0"/>
+              <a:t>, solo </a:t>
+            </a:r>
+            <a:r>
+              <a:rPr lang="en-US" dirty="0" err="1"/>
+              <a:t>haciendo</a:t>
+            </a:r>
+            <a:r>
+              <a:rPr lang="en-US" dirty="0"/>
+              <a:t> </a:t>
+            </a:r>
+            <a:r>
+              <a:rPr lang="en-US" dirty="0" err="1"/>
+              <a:t>caso</a:t>
+            </a:r>
+            <a:r>
+              <a:rPr lang="en-US" dirty="0"/>
+              <a:t> a las formulas del </a:t>
+            </a:r>
+            <a:r>
+              <a:rPr lang="en-US" dirty="0" err="1"/>
+              <a:t>encunciado</a:t>
+            </a:r>
+            <a:r>
+              <a:rPr lang="en-US" dirty="0"/>
+              <a:t>, temenos dos </a:t>
+            </a:r>
+            <a:r>
+              <a:rPr lang="en-US" dirty="0" err="1"/>
+              <a:t>ecuaciones</a:t>
+            </a:r>
+            <a:r>
+              <a:rPr lang="en-US" dirty="0"/>
+              <a:t> </a:t>
+            </a:r>
+            <a:r>
+              <a:rPr lang="en-US" dirty="0" err="1"/>
+              <a:t>complementarias</a:t>
+            </a:r>
+            <a:r>
+              <a:rPr lang="en-US" dirty="0"/>
+              <a:t> </a:t>
+            </a:r>
+            <a:r>
+              <a:rPr lang="en-US" dirty="0" err="1"/>
+              <a:t>que</a:t>
+            </a:r>
+            <a:r>
+              <a:rPr lang="en-US" dirty="0"/>
+              <a:t> </a:t>
+            </a:r>
+            <a:r>
+              <a:rPr lang="en-US" dirty="0" err="1"/>
+              <a:t>oscilan</a:t>
+            </a:r>
+            <a:r>
+              <a:rPr lang="en-US" dirty="0"/>
+              <a:t> entre 1 y 0, </a:t>
+            </a:r>
+            <a:r>
+              <a:rPr lang="en-US" dirty="0" err="1"/>
+              <a:t>dependientes</a:t>
+            </a:r>
+            <a:r>
+              <a:rPr lang="en-US" dirty="0"/>
+              <a:t> de la </a:t>
+            </a:r>
+            <a:r>
+              <a:rPr lang="en-US" dirty="0" err="1"/>
+              <a:t>diferencia</a:t>
+            </a:r>
+            <a:r>
+              <a:rPr lang="en-US" dirty="0"/>
+              <a:t> de </a:t>
+            </a:r>
+            <a:r>
+              <a:rPr lang="en-US" dirty="0" err="1"/>
+              <a:t>fase</a:t>
+            </a:r>
+            <a:r>
+              <a:rPr lang="en-US" dirty="0"/>
+              <a:t>, </a:t>
+            </a:r>
+            <a:r>
+              <a:rPr lang="en-US" dirty="0" err="1"/>
+              <a:t>dando</a:t>
+            </a:r>
+            <a:r>
+              <a:rPr lang="en-US" dirty="0"/>
+              <a:t> </a:t>
+            </a:r>
+            <a:r>
+              <a:rPr lang="en-US" dirty="0" err="1"/>
+              <a:t>lugar</a:t>
+            </a:r>
+            <a:r>
+              <a:rPr lang="en-US" dirty="0"/>
+              <a:t> a </a:t>
+            </a:r>
+            <a:r>
+              <a:rPr lang="en-US" dirty="0" err="1"/>
+              <a:t>que</a:t>
+            </a:r>
+            <a:r>
+              <a:rPr lang="en-US" dirty="0"/>
+              <a:t> lo </a:t>
+            </a:r>
+            <a:r>
+              <a:rPr lang="en-US" dirty="0" err="1"/>
+              <a:t>que</a:t>
+            </a:r>
+            <a:r>
+              <a:rPr lang="en-US" dirty="0"/>
+              <a:t> no </a:t>
+            </a:r>
+            <a:r>
+              <a:rPr lang="en-US" dirty="0" err="1"/>
+              <a:t>tiene</a:t>
+            </a:r>
+            <a:r>
+              <a:rPr lang="en-US" dirty="0"/>
+              <a:t> uno lo </a:t>
+            </a:r>
+            <a:r>
+              <a:rPr lang="en-US" dirty="0" err="1"/>
+              <a:t>tiene</a:t>
+            </a:r>
+            <a:r>
+              <a:rPr lang="en-US" dirty="0"/>
+              <a:t> </a:t>
+            </a:r>
+            <a:r>
+              <a:rPr lang="en-US" dirty="0" err="1"/>
+              <a:t>el</a:t>
+            </a:r>
+            <a:r>
+              <a:rPr lang="en-US" dirty="0"/>
+              <a:t> </a:t>
+            </a:r>
+            <a:r>
+              <a:rPr lang="en-US" dirty="0" err="1"/>
+              <a:t>otro</a:t>
+            </a:r>
+            <a:r>
+              <a:rPr lang="en-US" dirty="0"/>
+              <a:t>.    </a:t>
+            </a:r>
+          </a:p>
+          <a:p>
+            <a:endParaRPr lang="en-US" dirty="0"/>
+          </a:p>
+          <a:p>
+            <a:endParaRPr lang="es-ES" dirty="0"/>
+          </a:p>
+        </p:txBody>
+      </p:sp>
+      <p:pic>
+        <p:nvPicPr>
+          <p:cNvPr id="6" name="Imagen 5">
+            <a:extLst>
+              <a:ext uri="{FF2B5EF4-FFF2-40B4-BE49-F238E27FC236}">
+                <a16:creationId xmlns:a16="http://schemas.microsoft.com/office/drawing/2014/main" id="{D54EE494-29A5-67B1-7007-E4360932F85E}"/>
+              </a:ext>
+            </a:extLst>
+          </p:cNvPr>
+          <p:cNvPicPr>
+            <a:picLocks noChangeAspect="1"/>
+          </p:cNvPicPr>
+          <p:nvPr/>
+        </p:nvPicPr>
+        <p:blipFill>
+          <a:blip r:embed="rId3"/>
+          <a:stretch>
+            <a:fillRect/>
+          </a:stretch>
+        </p:blipFill>
+        <p:spPr>
+          <a:xfrm>
+            <a:off x="609600" y="1723882"/>
+            <a:ext cx="2091878" cy="348647"/>
+          </a:xfrm>
+          <a:prstGeom prst="rect">
+            <a:avLst/>
+          </a:prstGeom>
+        </p:spPr>
+      </p:pic>
+      <p:pic>
+        <p:nvPicPr>
+          <p:cNvPr id="8" name="Imagen 7">
+            <a:extLst>
+              <a:ext uri="{FF2B5EF4-FFF2-40B4-BE49-F238E27FC236}">
+                <a16:creationId xmlns:a16="http://schemas.microsoft.com/office/drawing/2014/main" id="{7702ED9B-0ECF-98CC-6F8B-286A4668E399}"/>
+              </a:ext>
+            </a:extLst>
+          </p:cNvPr>
+          <p:cNvPicPr>
+            <a:picLocks noChangeAspect="1"/>
+          </p:cNvPicPr>
+          <p:nvPr/>
+        </p:nvPicPr>
+        <p:blipFill>
+          <a:blip r:embed="rId4">
+            <a:extLst>
+              <a:ext uri="{28A0092B-C50C-407E-A947-70E740481C1C}">
+                <a14:useLocalDpi xmlns:a14="http://schemas.microsoft.com/office/drawing/2010/main" val="0"/>
+              </a:ext>
+            </a:extLst>
+          </a:blip>
+          <a:srcRect/>
+          <a:stretch/>
+        </p:blipFill>
+        <p:spPr>
+          <a:xfrm>
+            <a:off x="457200" y="752076"/>
+            <a:ext cx="9545382" cy="734259"/>
+          </a:xfrm>
+          <a:prstGeom prst="rect">
+            <a:avLst/>
+          </a:prstGeom>
+        </p:spPr>
+      </p:pic>
+    </p:spTree>
+    <p:extLst>
+      <p:ext uri="{BB962C8B-B14F-4D97-AF65-F5344CB8AC3E}">
+        <p14:creationId xmlns:p14="http://schemas.microsoft.com/office/powerpoint/2010/main" val="2971445483"/>
+      </p:ext>
+    </p:extLst>
+  </p:cSld>
+  <p:clrMapOvr>
+    <a:masterClrMapping/>
+  </p:clrMapOvr>
+</p:sld>
+</file>
+
+<file path=ppt/slides/slide18.xml><?xml version="1.0" encoding="utf-8"?>
+<p:sld xmlns:a="http://schemas.openxmlformats.org/drawingml/2006/main" xmlns:r="http://schemas.openxmlformats.org/officeDocument/2006/relationships" xmlns:p="http://schemas.openxmlformats.org/presentationml/2006/main">
+  <p:cSld>
+    <p:spTree>
+      <p:nvGrpSpPr>
+        <p:cNvPr id="1" name="">
+          <a:extLst>
+            <a:ext uri="{FF2B5EF4-FFF2-40B4-BE49-F238E27FC236}">
+              <a16:creationId xmlns:a16="http://schemas.microsoft.com/office/drawing/2014/main" id="{A9FFCAF2-4CAF-3724-5E41-A350B5EDA2FD}"/>
+            </a:ext>
+          </a:extLst>
+        </p:cNvPr>
+        <p:cNvGrpSpPr/>
+        <p:nvPr/>
+      </p:nvGrpSpPr>
+      <p:grpSpPr>
+        <a:xfrm>
+          <a:off x="0" y="0"/>
+          <a:ext cx="0" cy="0"/>
+          <a:chOff x="0" y="0"/>
+          <a:chExt cx="0" cy="0"/>
+        </a:xfrm>
+      </p:grpSpPr>
+      <p:sp>
+        <p:nvSpPr>
+          <p:cNvPr id="2" name="Título 1">
+            <a:extLst>
+              <a:ext uri="{FF2B5EF4-FFF2-40B4-BE49-F238E27FC236}">
+                <a16:creationId xmlns:a16="http://schemas.microsoft.com/office/drawing/2014/main" id="{4337D877-2605-BB40-43D4-940E277FCE45}"/>
+              </a:ext>
+            </a:extLst>
+          </p:cNvPr>
+          <p:cNvSpPr>
+            <a:spLocks noGrp="1"/>
+          </p:cNvSpPr>
+          <p:nvPr>
+            <p:ph type="title"/>
+          </p:nvPr>
+        </p:nvSpPr>
+        <p:spPr/>
+        <p:txBody>
+          <a:bodyPr/>
+          <a:lstStyle/>
+          <a:p>
+            <a:r>
+              <a:rPr lang="es-ES" dirty="0" err="1"/>
+              <a:t>Unbalanced</a:t>
+            </a:r>
+            <a:r>
+              <a:rPr lang="es-ES" dirty="0"/>
+              <a:t> </a:t>
+            </a:r>
+            <a:r>
+              <a:rPr lang="es-ES" dirty="0" err="1"/>
+              <a:t>configuration</a:t>
+            </a:r>
+            <a:r>
+              <a:rPr lang="es-ES" dirty="0"/>
+              <a:t> –</a:t>
+            </a:r>
+            <a:r>
+              <a:rPr lang="es-ES" dirty="0" err="1"/>
+              <a:t>Phase</a:t>
+            </a:r>
+            <a:r>
+              <a:rPr lang="es-ES" dirty="0"/>
+              <a:t> </a:t>
+            </a:r>
+            <a:r>
+              <a:rPr lang="es-ES" dirty="0" err="1"/>
+              <a:t>Difference</a:t>
+            </a:r>
+            <a:r>
+              <a:rPr lang="es-ES" dirty="0"/>
+              <a:t> </a:t>
+            </a:r>
+          </a:p>
+        </p:txBody>
+      </p:sp>
+      <p:sp>
+        <p:nvSpPr>
+          <p:cNvPr id="4" name="Marcador de pie de página 3">
+            <a:extLst>
+              <a:ext uri="{FF2B5EF4-FFF2-40B4-BE49-F238E27FC236}">
+                <a16:creationId xmlns:a16="http://schemas.microsoft.com/office/drawing/2014/main" id="{E952A2EF-B619-D84B-C41B-713072E0CB84}"/>
+              </a:ext>
+            </a:extLst>
+          </p:cNvPr>
+          <p:cNvSpPr>
+            <a:spLocks noGrp="1"/>
+          </p:cNvSpPr>
+          <p:nvPr>
+            <p:ph type="ftr" sz="quarter" idx="5"/>
+          </p:nvPr>
+        </p:nvSpPr>
+        <p:spPr/>
+        <p:txBody>
+          <a:bodyPr/>
+          <a:lstStyle/>
+          <a:p>
+            <a:pPr marL="12700">
+              <a:spcBef>
+                <a:spcPts val="15"/>
+              </a:spcBef>
+            </a:pPr>
+            <a:r>
+              <a:rPr lang="es-ES" spc="-5"/>
+              <a:t>LAB 3. INTERFEROMETERS I</a:t>
+            </a:r>
+            <a:endParaRPr lang="es-ES" spc="-5" dirty="0"/>
+          </a:p>
+        </p:txBody>
+      </p:sp>
+      <p:sp>
+        <p:nvSpPr>
+          <p:cNvPr id="5" name="Marcador de número de diapositiva 4">
+            <a:extLst>
+              <a:ext uri="{FF2B5EF4-FFF2-40B4-BE49-F238E27FC236}">
+                <a16:creationId xmlns:a16="http://schemas.microsoft.com/office/drawing/2014/main" id="{DBA817EB-9F2F-0DD7-3B41-D3F255B2C785}"/>
+              </a:ext>
+            </a:extLst>
+          </p:cNvPr>
+          <p:cNvSpPr>
+            <a:spLocks noGrp="1"/>
+          </p:cNvSpPr>
+          <p:nvPr>
+            <p:ph type="sldNum" sz="quarter" idx="7"/>
+          </p:nvPr>
+        </p:nvSpPr>
+        <p:spPr/>
+        <p:txBody>
+          <a:bodyPr/>
+          <a:lstStyle/>
+          <a:p>
+            <a:fld id="{B6F15528-21DE-4FAA-801E-634DDDAF4B2B}" type="slidenum">
+              <a:rPr lang="es-ES" smtClean="0"/>
+              <a:t>18</a:t>
+            </a:fld>
+            <a:endParaRPr lang="es-ES"/>
+          </a:p>
+        </p:txBody>
+      </p:sp>
+      <p:pic>
+        <p:nvPicPr>
+          <p:cNvPr id="7" name="Imagen 6">
+            <a:extLst>
+              <a:ext uri="{FF2B5EF4-FFF2-40B4-BE49-F238E27FC236}">
+                <a16:creationId xmlns:a16="http://schemas.microsoft.com/office/drawing/2014/main" id="{D2674D72-5B20-76AB-8F5E-B237363188C7}"/>
+              </a:ext>
+            </a:extLst>
+          </p:cNvPr>
+          <p:cNvPicPr>
+            <a:picLocks noChangeAspect="1"/>
+          </p:cNvPicPr>
+          <p:nvPr/>
+        </p:nvPicPr>
+        <p:blipFill>
+          <a:blip r:embed="rId2">
+            <a:extLst>
+              <a:ext uri="{28A0092B-C50C-407E-A947-70E740481C1C}">
+                <a14:useLocalDpi xmlns:a14="http://schemas.microsoft.com/office/drawing/2010/main" val="0"/>
+              </a:ext>
+            </a:extLst>
+          </a:blip>
+          <a:srcRect l="30" r="30"/>
+          <a:stretch/>
+        </p:blipFill>
+        <p:spPr>
+          <a:xfrm>
+            <a:off x="348674" y="2133600"/>
+            <a:ext cx="4667901" cy="3743847"/>
+          </a:xfrm>
+          <a:prstGeom prst="rect">
+            <a:avLst/>
+          </a:prstGeom>
+        </p:spPr>
+      </p:pic>
+      <p:sp>
+        <p:nvSpPr>
+          <p:cNvPr id="9" name="CuadroTexto 8">
+            <a:extLst>
+              <a:ext uri="{FF2B5EF4-FFF2-40B4-BE49-F238E27FC236}">
+                <a16:creationId xmlns:a16="http://schemas.microsoft.com/office/drawing/2014/main" id="{B1B56D5A-D857-F6BF-9581-DE217714D775}"/>
+              </a:ext>
+            </a:extLst>
+          </p:cNvPr>
+          <p:cNvSpPr txBox="1"/>
+          <p:nvPr/>
+        </p:nvSpPr>
+        <p:spPr>
+          <a:xfrm>
+            <a:off x="5426365" y="2133600"/>
+            <a:ext cx="6128326" cy="646331"/>
+          </a:xfrm>
+          <a:prstGeom prst="rect">
+            <a:avLst/>
+          </a:prstGeom>
+          <a:noFill/>
+        </p:spPr>
+        <p:txBody>
+          <a:bodyPr wrap="square">
+            <a:spAutoFit/>
+          </a:bodyPr>
+          <a:lstStyle/>
+          <a:p>
+            <a:endParaRPr lang="en-US" dirty="0"/>
+          </a:p>
+          <a:p>
+            <a:endParaRPr lang="es-ES" dirty="0"/>
+          </a:p>
+        </p:txBody>
+      </p:sp>
+      <p:pic>
+        <p:nvPicPr>
+          <p:cNvPr id="6" name="Imagen 5">
+            <a:extLst>
+              <a:ext uri="{FF2B5EF4-FFF2-40B4-BE49-F238E27FC236}">
+                <a16:creationId xmlns:a16="http://schemas.microsoft.com/office/drawing/2014/main" id="{455D7F26-33E8-BB1B-C96C-0DFDFD61B6A1}"/>
+              </a:ext>
+            </a:extLst>
+          </p:cNvPr>
+          <p:cNvPicPr>
+            <a:picLocks noChangeAspect="1"/>
+          </p:cNvPicPr>
+          <p:nvPr/>
+        </p:nvPicPr>
+        <p:blipFill>
+          <a:blip r:embed="rId3"/>
+          <a:stretch>
+            <a:fillRect/>
+          </a:stretch>
+        </p:blipFill>
+        <p:spPr>
+          <a:xfrm>
+            <a:off x="609600" y="1723882"/>
+            <a:ext cx="2091878" cy="348647"/>
+          </a:xfrm>
+          <a:prstGeom prst="rect">
+            <a:avLst/>
+          </a:prstGeom>
+        </p:spPr>
+      </p:pic>
+      <p:pic>
+        <p:nvPicPr>
+          <p:cNvPr id="8" name="Imagen 7">
+            <a:extLst>
+              <a:ext uri="{FF2B5EF4-FFF2-40B4-BE49-F238E27FC236}">
+                <a16:creationId xmlns:a16="http://schemas.microsoft.com/office/drawing/2014/main" id="{8FEC3C99-BB92-EE36-CF0A-51CF71688A9E}"/>
+              </a:ext>
+            </a:extLst>
+          </p:cNvPr>
+          <p:cNvPicPr>
+            <a:picLocks noChangeAspect="1"/>
+          </p:cNvPicPr>
+          <p:nvPr/>
+        </p:nvPicPr>
+        <p:blipFill>
+          <a:blip r:embed="rId4">
+            <a:extLst>
+              <a:ext uri="{28A0092B-C50C-407E-A947-70E740481C1C}">
+                <a14:useLocalDpi xmlns:a14="http://schemas.microsoft.com/office/drawing/2010/main" val="0"/>
+              </a:ext>
+            </a:extLst>
+          </a:blip>
+          <a:srcRect/>
+          <a:stretch/>
+        </p:blipFill>
+        <p:spPr>
+          <a:xfrm>
+            <a:off x="305161" y="575600"/>
+            <a:ext cx="10044841" cy="872200"/>
+          </a:xfrm>
+          <a:prstGeom prst="rect">
+            <a:avLst/>
+          </a:prstGeom>
+        </p:spPr>
+      </p:pic>
+      <p:sp>
+        <p:nvSpPr>
+          <p:cNvPr id="10" name="CuadroTexto 9">
+            <a:extLst>
+              <a:ext uri="{FF2B5EF4-FFF2-40B4-BE49-F238E27FC236}">
+                <a16:creationId xmlns:a16="http://schemas.microsoft.com/office/drawing/2014/main" id="{2DB85571-0C8A-62B2-4D04-46C7FCF54DA6}"/>
+              </a:ext>
+            </a:extLst>
+          </p:cNvPr>
+          <p:cNvSpPr txBox="1"/>
+          <p:nvPr/>
+        </p:nvSpPr>
+        <p:spPr>
+          <a:xfrm>
+            <a:off x="5426365" y="2133600"/>
+            <a:ext cx="6128326" cy="1754326"/>
+          </a:xfrm>
+          <a:prstGeom prst="rect">
+            <a:avLst/>
+          </a:prstGeom>
+          <a:noFill/>
+        </p:spPr>
+        <p:txBody>
+          <a:bodyPr wrap="square">
+            <a:spAutoFit/>
+          </a:bodyPr>
+          <a:lstStyle/>
+          <a:p>
+            <a:r>
+              <a:rPr lang="en-US" dirty="0"/>
+              <a:t>Al </a:t>
+            </a:r>
+            <a:r>
+              <a:rPr lang="en-US" dirty="0" err="1"/>
+              <a:t>varirar</a:t>
+            </a:r>
+            <a:r>
+              <a:rPr lang="en-US" dirty="0"/>
+              <a:t> </a:t>
+            </a:r>
+            <a:r>
+              <a:rPr lang="en-US" dirty="0" err="1"/>
+              <a:t>ligeramente</a:t>
+            </a:r>
+            <a:r>
+              <a:rPr lang="en-US" dirty="0"/>
+              <a:t> </a:t>
+            </a:r>
+            <a:r>
+              <a:rPr lang="en-US" dirty="0" err="1"/>
+              <a:t>el</a:t>
+            </a:r>
+            <a:r>
+              <a:rPr lang="en-US" dirty="0"/>
+              <a:t> </a:t>
+            </a:r>
+            <a:r>
+              <a:rPr lang="en-US" dirty="0" err="1"/>
+              <a:t>índice</a:t>
+            </a:r>
+            <a:r>
+              <a:rPr lang="en-US" dirty="0"/>
+              <a:t> </a:t>
+            </a:r>
+            <a:r>
+              <a:rPr lang="en-US" dirty="0" err="1"/>
+              <a:t>efectivo</a:t>
+            </a:r>
+            <a:r>
+              <a:rPr lang="en-US" dirty="0"/>
+              <a:t> </a:t>
+            </a:r>
+            <a:r>
+              <a:rPr lang="en-US" dirty="0" err="1"/>
+              <a:t>en</a:t>
+            </a:r>
+            <a:r>
+              <a:rPr lang="en-US" dirty="0"/>
+              <a:t> mayor o </a:t>
+            </a:r>
+            <a:r>
+              <a:rPr lang="en-US" dirty="0" err="1"/>
+              <a:t>menor</a:t>
+            </a:r>
+            <a:r>
+              <a:rPr lang="en-US" dirty="0"/>
+              <a:t> </a:t>
+            </a:r>
+            <a:r>
+              <a:rPr lang="en-US" dirty="0" err="1"/>
+              <a:t>medida</a:t>
+            </a:r>
+            <a:r>
+              <a:rPr lang="en-US" dirty="0"/>
+              <a:t> de uno de </a:t>
+            </a:r>
+            <a:r>
+              <a:rPr lang="en-US" dirty="0" err="1"/>
+              <a:t>los</a:t>
+            </a:r>
+            <a:r>
+              <a:rPr lang="en-US" dirty="0"/>
+              <a:t> </a:t>
+            </a:r>
+            <a:r>
+              <a:rPr lang="en-US" dirty="0" err="1"/>
+              <a:t>brazos</a:t>
+            </a:r>
+            <a:r>
+              <a:rPr lang="en-US" dirty="0"/>
+              <a:t>, </a:t>
+            </a:r>
+            <a:r>
+              <a:rPr lang="en-US" dirty="0" err="1"/>
+              <a:t>podemos</a:t>
+            </a:r>
+            <a:r>
+              <a:rPr lang="en-US" dirty="0"/>
+              <a:t> </a:t>
+            </a:r>
+            <a:r>
+              <a:rPr lang="en-US" dirty="0" err="1"/>
+              <a:t>controlar</a:t>
+            </a:r>
+            <a:r>
+              <a:rPr lang="en-US" dirty="0"/>
+              <a:t> la </a:t>
+            </a:r>
+            <a:r>
+              <a:rPr lang="en-US" dirty="0" err="1"/>
+              <a:t>potencia</a:t>
+            </a:r>
+            <a:r>
+              <a:rPr lang="en-US" dirty="0"/>
+              <a:t> </a:t>
+            </a:r>
+            <a:r>
+              <a:rPr lang="en-US" dirty="0" err="1"/>
+              <a:t>que</a:t>
+            </a:r>
+            <a:r>
+              <a:rPr lang="en-US" dirty="0"/>
+              <a:t> sale de </a:t>
+            </a:r>
+            <a:r>
+              <a:rPr lang="en-US" dirty="0" err="1"/>
+              <a:t>los</a:t>
+            </a:r>
+            <a:r>
+              <a:rPr lang="en-US" dirty="0"/>
+              <a:t> </a:t>
+            </a:r>
+            <a:r>
+              <a:rPr lang="en-US" dirty="0" err="1"/>
+              <a:t>puertos</a:t>
+            </a:r>
+            <a:r>
+              <a:rPr lang="en-US" dirty="0"/>
+              <a:t> para </a:t>
+            </a:r>
+            <a:r>
+              <a:rPr lang="en-US" dirty="0" err="1"/>
+              <a:t>una</a:t>
+            </a:r>
+            <a:r>
+              <a:rPr lang="en-US" dirty="0"/>
+              <a:t> </a:t>
+            </a:r>
+            <a:r>
+              <a:rPr lang="en-US" dirty="0" err="1"/>
+              <a:t>determinada</a:t>
+            </a:r>
+            <a:r>
+              <a:rPr lang="en-US" dirty="0"/>
+              <a:t> </a:t>
+            </a:r>
+            <a:r>
+              <a:rPr lang="en-US" dirty="0" err="1"/>
+              <a:t>longitud</a:t>
+            </a:r>
+            <a:r>
+              <a:rPr lang="en-US" dirty="0"/>
+              <a:t> de </a:t>
+            </a:r>
+            <a:r>
+              <a:rPr lang="en-US" dirty="0" err="1"/>
+              <a:t>onda</a:t>
+            </a:r>
+            <a:r>
+              <a:rPr lang="en-US" dirty="0"/>
+              <a:t>.   </a:t>
+            </a:r>
+          </a:p>
+          <a:p>
+            <a:endParaRPr lang="en-US" dirty="0"/>
+          </a:p>
+          <a:p>
+            <a:endParaRPr lang="es-ES" dirty="0"/>
+          </a:p>
+        </p:txBody>
+      </p:sp>
+    </p:spTree>
+    <p:extLst>
+      <p:ext uri="{BB962C8B-B14F-4D97-AF65-F5344CB8AC3E}">
+        <p14:creationId xmlns:p14="http://schemas.microsoft.com/office/powerpoint/2010/main" val="1338821209"/>
+      </p:ext>
+    </p:extLst>
+  </p:cSld>
+  <p:clrMapOvr>
+    <a:masterClrMapping/>
+  </p:clrMapOvr>
+</p:sld>
+</file>
+
+<file path=ppt/slides/slide19.xml><?xml version="1.0" encoding="utf-8"?>
+<p:sld xmlns:a="http://schemas.openxmlformats.org/drawingml/2006/main" xmlns:r="http://schemas.openxmlformats.org/officeDocument/2006/relationships" xmlns:p="http://schemas.openxmlformats.org/presentationml/2006/main">
+  <p:cSld>
+    <p:spTree>
+      <p:nvGrpSpPr>
+        <p:cNvPr id="1" name="">
+          <a:extLst>
+            <a:ext uri="{FF2B5EF4-FFF2-40B4-BE49-F238E27FC236}">
+              <a16:creationId xmlns:a16="http://schemas.microsoft.com/office/drawing/2014/main" id="{5E9815FD-F704-9D26-960A-7D9E91DB3D5C}"/>
+            </a:ext>
+          </a:extLst>
+        </p:cNvPr>
+        <p:cNvGrpSpPr/>
+        <p:nvPr/>
+      </p:nvGrpSpPr>
+      <p:grpSpPr>
+        <a:xfrm>
+          <a:off x="0" y="0"/>
+          <a:ext cx="0" cy="0"/>
+          <a:chOff x="0" y="0"/>
+          <a:chExt cx="0" cy="0"/>
+        </a:xfrm>
+      </p:grpSpPr>
+      <p:sp>
+        <p:nvSpPr>
+          <p:cNvPr id="2" name="Título 1">
+            <a:extLst>
+              <a:ext uri="{FF2B5EF4-FFF2-40B4-BE49-F238E27FC236}">
+                <a16:creationId xmlns:a16="http://schemas.microsoft.com/office/drawing/2014/main" id="{461E5218-1286-DAEA-AB8F-8AC5556E9E48}"/>
+              </a:ext>
+            </a:extLst>
+          </p:cNvPr>
+          <p:cNvSpPr>
+            <a:spLocks noGrp="1"/>
+          </p:cNvSpPr>
+          <p:nvPr>
+            <p:ph type="title"/>
+          </p:nvPr>
+        </p:nvSpPr>
+        <p:spPr/>
+        <p:txBody>
+          <a:bodyPr/>
+          <a:lstStyle/>
+          <a:p>
+            <a:r>
+              <a:rPr lang="es-ES" dirty="0" err="1"/>
+              <a:t>Unbalanced</a:t>
+            </a:r>
+            <a:r>
+              <a:rPr lang="es-ES" dirty="0"/>
+              <a:t> </a:t>
+            </a:r>
+            <a:r>
+              <a:rPr lang="es-ES" dirty="0" err="1"/>
+              <a:t>configuration</a:t>
+            </a:r>
+            <a:r>
+              <a:rPr lang="es-ES" dirty="0"/>
+              <a:t> –</a:t>
+            </a:r>
+            <a:r>
+              <a:rPr lang="es-ES" dirty="0" err="1"/>
+              <a:t>Delay</a:t>
+            </a:r>
+            <a:r>
+              <a:rPr lang="es-ES" dirty="0"/>
+              <a:t> </a:t>
+            </a:r>
+          </a:p>
+        </p:txBody>
+      </p:sp>
+      <p:sp>
+        <p:nvSpPr>
+          <p:cNvPr id="4" name="Marcador de pie de página 3">
+            <a:extLst>
+              <a:ext uri="{FF2B5EF4-FFF2-40B4-BE49-F238E27FC236}">
+                <a16:creationId xmlns:a16="http://schemas.microsoft.com/office/drawing/2014/main" id="{B5A7F22D-BC98-AE80-12FE-5452256579DA}"/>
+              </a:ext>
+            </a:extLst>
+          </p:cNvPr>
+          <p:cNvSpPr>
+            <a:spLocks noGrp="1"/>
+          </p:cNvSpPr>
+          <p:nvPr>
+            <p:ph type="ftr" sz="quarter" idx="5"/>
+          </p:nvPr>
+        </p:nvSpPr>
+        <p:spPr/>
+        <p:txBody>
+          <a:bodyPr/>
+          <a:lstStyle/>
+          <a:p>
+            <a:pPr marL="12700">
+              <a:spcBef>
+                <a:spcPts val="15"/>
+              </a:spcBef>
+            </a:pPr>
+            <a:r>
+              <a:rPr lang="es-ES" spc="-5"/>
+              <a:t>LAB 3. INTERFEROMETERS I</a:t>
+            </a:r>
+            <a:endParaRPr lang="es-ES" spc="-5" dirty="0"/>
+          </a:p>
+        </p:txBody>
+      </p:sp>
+      <p:sp>
+        <p:nvSpPr>
+          <p:cNvPr id="5" name="Marcador de número de diapositiva 4">
+            <a:extLst>
+              <a:ext uri="{FF2B5EF4-FFF2-40B4-BE49-F238E27FC236}">
+                <a16:creationId xmlns:a16="http://schemas.microsoft.com/office/drawing/2014/main" id="{CA199457-8A8A-C682-0926-61B2889A8D2D}"/>
+              </a:ext>
+            </a:extLst>
+          </p:cNvPr>
+          <p:cNvSpPr>
+            <a:spLocks noGrp="1"/>
+          </p:cNvSpPr>
+          <p:nvPr>
+            <p:ph type="sldNum" sz="quarter" idx="7"/>
+          </p:nvPr>
+        </p:nvSpPr>
+        <p:spPr/>
+        <p:txBody>
+          <a:bodyPr/>
+          <a:lstStyle/>
+          <a:p>
+            <a:fld id="{B6F15528-21DE-4FAA-801E-634DDDAF4B2B}" type="slidenum">
+              <a:rPr lang="es-ES" smtClean="0"/>
+              <a:t>19</a:t>
+            </a:fld>
+            <a:endParaRPr lang="es-ES"/>
+          </a:p>
+        </p:txBody>
+      </p:sp>
+      <p:pic>
+        <p:nvPicPr>
+          <p:cNvPr id="7" name="Imagen 6">
+            <a:extLst>
+              <a:ext uri="{FF2B5EF4-FFF2-40B4-BE49-F238E27FC236}">
+                <a16:creationId xmlns:a16="http://schemas.microsoft.com/office/drawing/2014/main" id="{6E890FE9-C18C-6BA1-5C83-E61D0D4C2E3D}"/>
+              </a:ext>
+            </a:extLst>
+          </p:cNvPr>
+          <p:cNvPicPr>
+            <a:picLocks noChangeAspect="1"/>
+          </p:cNvPicPr>
+          <p:nvPr/>
+        </p:nvPicPr>
+        <p:blipFill>
+          <a:blip r:embed="rId2">
+            <a:extLst>
+              <a:ext uri="{28A0092B-C50C-407E-A947-70E740481C1C}">
+                <a14:useLocalDpi xmlns:a14="http://schemas.microsoft.com/office/drawing/2010/main" val="0"/>
+              </a:ext>
+            </a:extLst>
+          </a:blip>
+          <a:srcRect t="154" b="154"/>
+          <a:stretch/>
+        </p:blipFill>
+        <p:spPr>
+          <a:xfrm>
+            <a:off x="3810000" y="1668738"/>
+            <a:ext cx="3759066" cy="3014924"/>
+          </a:xfrm>
+          <a:prstGeom prst="rect">
+            <a:avLst/>
+          </a:prstGeom>
+        </p:spPr>
+      </p:pic>
+      <p:sp>
+        <p:nvSpPr>
+          <p:cNvPr id="9" name="CuadroTexto 8">
+            <a:extLst>
+              <a:ext uri="{FF2B5EF4-FFF2-40B4-BE49-F238E27FC236}">
+                <a16:creationId xmlns:a16="http://schemas.microsoft.com/office/drawing/2014/main" id="{7B1A4DD2-51C5-9C0F-35A6-3A55F6E7ED53}"/>
+              </a:ext>
+            </a:extLst>
+          </p:cNvPr>
+          <p:cNvSpPr txBox="1"/>
+          <p:nvPr/>
+        </p:nvSpPr>
+        <p:spPr>
+          <a:xfrm>
+            <a:off x="3183314" y="5229804"/>
+            <a:ext cx="6128326" cy="369332"/>
+          </a:xfrm>
+          <a:prstGeom prst="rect">
+            <a:avLst/>
+          </a:prstGeom>
+          <a:noFill/>
+        </p:spPr>
+        <p:txBody>
+          <a:bodyPr wrap="square">
+            <a:spAutoFit/>
+          </a:bodyPr>
+          <a:lstStyle/>
+          <a:p>
+            <a:r>
+              <a:rPr lang="en-US" dirty="0"/>
+              <a:t>Al </a:t>
+            </a:r>
+            <a:r>
+              <a:rPr lang="en-US" dirty="0" err="1"/>
+              <a:t>aumentar</a:t>
+            </a:r>
+            <a:r>
+              <a:rPr lang="en-US" dirty="0"/>
+              <a:t> la </a:t>
+            </a:r>
+            <a:r>
+              <a:rPr lang="en-US" dirty="0" err="1"/>
+              <a:t>longitud</a:t>
+            </a:r>
+            <a:r>
+              <a:rPr lang="en-US" dirty="0"/>
+              <a:t>, </a:t>
+            </a:r>
+            <a:r>
+              <a:rPr lang="en-US" dirty="0" err="1"/>
+              <a:t>cada</a:t>
+            </a:r>
+            <a:r>
+              <a:rPr lang="en-US" dirty="0"/>
+              <a:t> ....</a:t>
+            </a:r>
+            <a:endParaRPr lang="es-ES" dirty="0"/>
+          </a:p>
+        </p:txBody>
+      </p:sp>
+      <p:pic>
+        <p:nvPicPr>
+          <p:cNvPr id="6" name="Imagen 5">
+            <a:extLst>
+              <a:ext uri="{FF2B5EF4-FFF2-40B4-BE49-F238E27FC236}">
+                <a16:creationId xmlns:a16="http://schemas.microsoft.com/office/drawing/2014/main" id="{B7F89E63-6169-17B1-814C-9F418393B821}"/>
+              </a:ext>
+            </a:extLst>
+          </p:cNvPr>
+          <p:cNvPicPr>
+            <a:picLocks noChangeAspect="1"/>
+          </p:cNvPicPr>
+          <p:nvPr/>
+        </p:nvPicPr>
+        <p:blipFill>
+          <a:blip r:embed="rId3"/>
+          <a:stretch>
+            <a:fillRect/>
+          </a:stretch>
+        </p:blipFill>
+        <p:spPr>
+          <a:xfrm>
+            <a:off x="583623" y="582933"/>
+            <a:ext cx="8852170" cy="858792"/>
+          </a:xfrm>
+          <a:prstGeom prst="rect">
+            <a:avLst/>
+          </a:prstGeom>
+        </p:spPr>
+      </p:pic>
+      <p:sp>
+        <p:nvSpPr>
+          <p:cNvPr id="10" name="CuadroTexto 9">
+            <a:extLst>
+              <a:ext uri="{FF2B5EF4-FFF2-40B4-BE49-F238E27FC236}">
+                <a16:creationId xmlns:a16="http://schemas.microsoft.com/office/drawing/2014/main" id="{0F9E83A2-3AD9-BF71-E346-7EA290887604}"/>
+              </a:ext>
+            </a:extLst>
+          </p:cNvPr>
+          <p:cNvSpPr txBox="1"/>
+          <p:nvPr/>
+        </p:nvSpPr>
+        <p:spPr>
+          <a:xfrm>
+            <a:off x="5101747" y="1327181"/>
+            <a:ext cx="6128326" cy="369332"/>
+          </a:xfrm>
+          <a:prstGeom prst="rect">
+            <a:avLst/>
+          </a:prstGeom>
+          <a:noFill/>
+        </p:spPr>
+        <p:txBody>
+          <a:bodyPr wrap="square">
+            <a:spAutoFit/>
+          </a:bodyPr>
+          <a:lstStyle/>
+          <a:p>
+            <a:r>
+              <a:rPr lang="en-US" dirty="0"/>
+              <a:t>25um/5um</a:t>
+            </a:r>
+            <a:endParaRPr lang="es-ES" dirty="0"/>
+          </a:p>
+        </p:txBody>
+      </p:sp>
+      <p:pic>
+        <p:nvPicPr>
+          <p:cNvPr id="12" name="Imagen 11" descr="Gráfico, Gráfico de líneas&#10;&#10;El contenido generado por IA puede ser incorrecto.">
+            <a:extLst>
+              <a:ext uri="{FF2B5EF4-FFF2-40B4-BE49-F238E27FC236}">
+                <a16:creationId xmlns:a16="http://schemas.microsoft.com/office/drawing/2014/main" id="{82B3A02E-C78F-29F0-CC88-23069DFB2364}"/>
+              </a:ext>
+            </a:extLst>
+          </p:cNvPr>
+          <p:cNvPicPr>
+            <a:picLocks noChangeAspect="1"/>
+          </p:cNvPicPr>
+          <p:nvPr/>
+        </p:nvPicPr>
+        <p:blipFill>
+          <a:blip r:embed="rId4"/>
+          <a:stretch>
+            <a:fillRect/>
+          </a:stretch>
+        </p:blipFill>
+        <p:spPr>
+          <a:xfrm>
+            <a:off x="7772400" y="1668738"/>
+            <a:ext cx="3713037" cy="3014924"/>
+          </a:xfrm>
+          <a:prstGeom prst="rect">
+            <a:avLst/>
+          </a:prstGeom>
+        </p:spPr>
+      </p:pic>
+      <p:pic>
+        <p:nvPicPr>
+          <p:cNvPr id="14" name="Imagen 13" descr="Gráfico, Gráfico de líneas&#10;&#10;El contenido generado por IA puede ser incorrecto.">
+            <a:extLst>
+              <a:ext uri="{FF2B5EF4-FFF2-40B4-BE49-F238E27FC236}">
+                <a16:creationId xmlns:a16="http://schemas.microsoft.com/office/drawing/2014/main" id="{BFE2E76B-11BE-D7E6-F6DF-FEA3525CEA59}"/>
+              </a:ext>
+            </a:extLst>
+          </p:cNvPr>
+          <p:cNvPicPr>
+            <a:picLocks noChangeAspect="1"/>
+          </p:cNvPicPr>
+          <p:nvPr/>
+        </p:nvPicPr>
+        <p:blipFill>
+          <a:blip r:embed="rId5"/>
+          <a:stretch>
+            <a:fillRect/>
+          </a:stretch>
+        </p:blipFill>
+        <p:spPr>
+          <a:xfrm>
+            <a:off x="285343" y="1771907"/>
+            <a:ext cx="3524657" cy="2873284"/>
+          </a:xfrm>
+          <a:prstGeom prst="rect">
+            <a:avLst/>
+          </a:prstGeom>
+        </p:spPr>
+      </p:pic>
+      <p:sp>
+        <p:nvSpPr>
+          <p:cNvPr id="16" name="CuadroTexto 15">
+            <a:extLst>
+              <a:ext uri="{FF2B5EF4-FFF2-40B4-BE49-F238E27FC236}">
+                <a16:creationId xmlns:a16="http://schemas.microsoft.com/office/drawing/2014/main" id="{8CE74FE9-9EAB-A57E-F182-00FB141DF988}"/>
+              </a:ext>
+            </a:extLst>
+          </p:cNvPr>
+          <p:cNvSpPr txBox="1"/>
+          <p:nvPr/>
+        </p:nvSpPr>
+        <p:spPr>
+          <a:xfrm>
+            <a:off x="1349044" y="1424680"/>
+            <a:ext cx="6128326" cy="369332"/>
+          </a:xfrm>
+          <a:prstGeom prst="rect">
+            <a:avLst/>
+          </a:prstGeom>
+          <a:noFill/>
+        </p:spPr>
+        <p:txBody>
+          <a:bodyPr wrap="square">
+            <a:spAutoFit/>
+          </a:bodyPr>
+          <a:lstStyle/>
+          <a:p>
+            <a:r>
+              <a:rPr lang="en-US" dirty="0"/>
+              <a:t>15um/5um</a:t>
+            </a:r>
+            <a:endParaRPr lang="es-ES" dirty="0"/>
+          </a:p>
+        </p:txBody>
+      </p:sp>
+      <p:sp>
+        <p:nvSpPr>
+          <p:cNvPr id="17" name="CuadroTexto 16">
+            <a:extLst>
+              <a:ext uri="{FF2B5EF4-FFF2-40B4-BE49-F238E27FC236}">
+                <a16:creationId xmlns:a16="http://schemas.microsoft.com/office/drawing/2014/main" id="{CBCC002E-692E-3AC2-A962-52BBC7D15A83}"/>
+              </a:ext>
+            </a:extLst>
+          </p:cNvPr>
+          <p:cNvSpPr txBox="1"/>
+          <p:nvPr/>
+        </p:nvSpPr>
+        <p:spPr>
+          <a:xfrm>
+            <a:off x="9316258" y="1293333"/>
+            <a:ext cx="6128326" cy="369332"/>
+          </a:xfrm>
+          <a:prstGeom prst="rect">
+            <a:avLst/>
+          </a:prstGeom>
+          <a:noFill/>
+        </p:spPr>
+        <p:txBody>
+          <a:bodyPr wrap="square">
+            <a:spAutoFit/>
+          </a:bodyPr>
+          <a:lstStyle/>
+          <a:p>
+            <a:r>
+              <a:rPr lang="en-US" dirty="0"/>
+              <a:t>35um/5um</a:t>
+            </a:r>
+            <a:endParaRPr lang="es-ES" dirty="0"/>
+          </a:p>
+        </p:txBody>
+      </p:sp>
+    </p:spTree>
+    <p:extLst>
+      <p:ext uri="{BB962C8B-B14F-4D97-AF65-F5344CB8AC3E}">
+        <p14:creationId xmlns:p14="http://schemas.microsoft.com/office/powerpoint/2010/main" val="765719526"/>
+      </p:ext>
+    </p:extLst>
   </p:cSld>
   <p:clrMapOvr>
     <a:masterClrMapping/>
@@ -6534,6 +8156,3554 @@
         <p14:creationId xmlns:p14="http://schemas.microsoft.com/office/powerpoint/2010/main" val="560234623"/>
       </p:ext>
     </p:extLst>
+  </p:cSld>
+  <p:clrMapOvr>
+    <a:masterClrMapping/>
+  </p:clrMapOvr>
+</p:sld>
+</file>
+
+<file path=ppt/slides/slide20.xml><?xml version="1.0" encoding="utf-8"?>
+<p:sld xmlns:a="http://schemas.openxmlformats.org/drawingml/2006/main" xmlns:r="http://schemas.openxmlformats.org/officeDocument/2006/relationships" xmlns:p="http://schemas.openxmlformats.org/presentationml/2006/main">
+  <p:cSld>
+    <p:spTree>
+      <p:nvGrpSpPr>
+        <p:cNvPr id="1" name="">
+          <a:extLst>
+            <a:ext uri="{FF2B5EF4-FFF2-40B4-BE49-F238E27FC236}">
+              <a16:creationId xmlns:a16="http://schemas.microsoft.com/office/drawing/2014/main" id="{1525AB88-A787-2C84-3A44-2B634D87FB5B}"/>
+            </a:ext>
+          </a:extLst>
+        </p:cNvPr>
+        <p:cNvGrpSpPr/>
+        <p:nvPr/>
+      </p:nvGrpSpPr>
+      <p:grpSpPr>
+        <a:xfrm>
+          <a:off x="0" y="0"/>
+          <a:ext cx="0" cy="0"/>
+          <a:chOff x="0" y="0"/>
+          <a:chExt cx="0" cy="0"/>
+        </a:xfrm>
+      </p:grpSpPr>
+      <mc:AlternateContent xmlns:mc="http://schemas.openxmlformats.org/markup-compatibility/2006" xmlns:a14="http://schemas.microsoft.com/office/drawing/2010/main">
+        <mc:Choice Requires="a14">
+          <p:sp>
+            <p:nvSpPr>
+              <p:cNvPr id="16" name="object 16">
+                <a:extLst>
+                  <a:ext uri="{FF2B5EF4-FFF2-40B4-BE49-F238E27FC236}">
+                    <a16:creationId xmlns:a16="http://schemas.microsoft.com/office/drawing/2014/main" id="{A153D08B-B860-A163-3940-83AD64444D01}"/>
+                  </a:ext>
+                </a:extLst>
+              </p:cNvPr>
+              <p:cNvSpPr txBox="1">
+                <a:spLocks noGrp="1"/>
+              </p:cNvSpPr>
+              <p:nvPr>
+                <p:ph type="title"/>
+              </p:nvPr>
+            </p:nvSpPr>
+            <p:spPr>
+              <a:xfrm>
+                <a:off x="685800" y="408883"/>
+                <a:ext cx="10994410" cy="782265"/>
+              </a:xfrm>
+              <a:prstGeom prst="rect">
+                <a:avLst/>
+              </a:prstGeom>
+            </p:spPr>
+            <p:txBody>
+              <a:bodyPr vert="horz" wrap="square" lIns="0" tIns="12700" rIns="0" bIns="0" rtlCol="0">
+                <a:spAutoFit/>
+              </a:bodyPr>
+              <a:lstStyle/>
+              <a:p>
+                <a:pPr marL="12700">
+                  <a:lnSpc>
+                    <a:spcPct val="100000"/>
+                  </a:lnSpc>
+                  <a:spcBef>
+                    <a:spcPts val="100"/>
+                  </a:spcBef>
+                </a:pPr>
+                <a:r>
+                  <a:rPr lang="en-US" sz="2400" b="1" dirty="0"/>
+                  <a:t>ASSESSMENT #2 </a:t>
+                </a:r>
+                <a:r>
+                  <a:rPr lang="en-US" sz="2500" dirty="0"/>
+                  <a:t>– Recap from theory – Calculation of </a:t>
+                </a:r>
+                <a14:m>
+                  <m:oMath xmlns:m="http://schemas.openxmlformats.org/officeDocument/2006/math">
+                    <m:r>
+                      <a:rPr lang="es-ES" sz="2500" b="1" i="0" smtClean="0">
+                        <a:latin typeface="Cambria Math" panose="02040503050406030204" pitchFamily="18" charset="0"/>
+                      </a:rPr>
+                      <m:t>𝚫</m:t>
+                    </m:r>
+                    <m:r>
+                      <a:rPr lang="es-ES" sz="2500" b="1" i="0" smtClean="0">
+                        <a:latin typeface="Cambria Math" panose="02040503050406030204" pitchFamily="18" charset="0"/>
+                      </a:rPr>
+                      <m:t>𝐋</m:t>
+                    </m:r>
+                  </m:oMath>
+                </a14:m>
+                <a:r>
+                  <a:rPr lang="es-ES" sz="2500" spc="-5" dirty="0">
+                    <a:latin typeface="+mj-lt"/>
+                    <a:cs typeface="Lucida Sans"/>
+                  </a:rPr>
+                  <a:t> </a:t>
+                </a:r>
+                <a:br>
+                  <a:rPr lang="es-ES" sz="2500" spc="-5" dirty="0">
+                    <a:latin typeface="+mj-lt"/>
+                    <a:cs typeface="Lucida Sans"/>
+                  </a:rPr>
+                </a:br>
+                <a:endParaRPr sz="2500" b="0" dirty="0">
+                  <a:latin typeface="+mj-lt"/>
+                  <a:cs typeface="Lucida Sans"/>
+                </a:endParaRPr>
+              </a:p>
+            </p:txBody>
+          </p:sp>
+        </mc:Choice>
+        <mc:Fallback xmlns="">
+          <p:sp>
+            <p:nvSpPr>
+              <p:cNvPr id="16" name="object 16">
+                <a:extLst>
+                  <a:ext uri="{FF2B5EF4-FFF2-40B4-BE49-F238E27FC236}">
+                    <a16:creationId xmlns:a16="http://schemas.microsoft.com/office/drawing/2014/main" id="{A153D08B-B860-A163-3940-83AD64444D01}"/>
+                  </a:ext>
+                </a:extLst>
+              </p:cNvPr>
+              <p:cNvSpPr txBox="1">
+                <a:spLocks noGrp="1" noRot="1" noChangeAspect="1" noMove="1" noResize="1" noEditPoints="1" noAdjustHandles="1" noChangeArrowheads="1" noChangeShapeType="1" noTextEdit="1"/>
+              </p:cNvSpPr>
+              <p:nvPr>
+                <p:ph type="title"/>
+              </p:nvPr>
+            </p:nvSpPr>
+            <p:spPr>
+              <a:xfrm>
+                <a:off x="685800" y="408883"/>
+                <a:ext cx="10994410" cy="782265"/>
+              </a:xfrm>
+              <a:prstGeom prst="rect">
+                <a:avLst/>
+              </a:prstGeom>
+              <a:blipFill>
+                <a:blip r:embed="rId3"/>
+                <a:stretch>
+                  <a:fillRect l="-1608" t="-10156"/>
+                </a:stretch>
+              </a:blipFill>
+            </p:spPr>
+            <p:txBody>
+              <a:bodyPr/>
+              <a:lstStyle/>
+              <a:p>
+                <a:r>
+                  <a:rPr lang="es-ES">
+                    <a:noFill/>
+                  </a:rPr>
+                  <a:t> </a:t>
+                </a:r>
+              </a:p>
+            </p:txBody>
+          </p:sp>
+        </mc:Fallback>
+      </mc:AlternateContent>
+      <p:pic>
+        <p:nvPicPr>
+          <p:cNvPr id="83" name="Gráfico 82">
+            <a:extLst>
+              <a:ext uri="{FF2B5EF4-FFF2-40B4-BE49-F238E27FC236}">
+                <a16:creationId xmlns:a16="http://schemas.microsoft.com/office/drawing/2014/main" id="{333888A9-82BA-4688-F856-37AB661A7D43}"/>
+              </a:ext>
+            </a:extLst>
+          </p:cNvPr>
+          <p:cNvPicPr>
+            <a:picLocks noChangeAspect="1"/>
+          </p:cNvPicPr>
+          <p:nvPr/>
+        </p:nvPicPr>
+        <p:blipFill>
+          <a:blip r:embed="rId4">
+            <a:extLst>
+              <a:ext uri="{96DAC541-7B7A-43D3-8B79-37D633B846F1}">
+                <asvg:svgBlip xmlns:asvg="http://schemas.microsoft.com/office/drawing/2016/SVG/main" r:embed="rId5"/>
+              </a:ext>
+            </a:extLst>
+          </a:blip>
+          <a:stretch>
+            <a:fillRect/>
+          </a:stretch>
+        </p:blipFill>
+        <p:spPr>
+          <a:xfrm>
+            <a:off x="5045006" y="6356057"/>
+            <a:ext cx="6409575" cy="363174"/>
+          </a:xfrm>
+          <a:prstGeom prst="rect">
+            <a:avLst/>
+          </a:prstGeom>
+        </p:spPr>
+      </p:pic>
+      <p:sp>
+        <p:nvSpPr>
+          <p:cNvPr id="84" name="Marcador de número de diapositiva 83">
+            <a:extLst>
+              <a:ext uri="{FF2B5EF4-FFF2-40B4-BE49-F238E27FC236}">
+                <a16:creationId xmlns:a16="http://schemas.microsoft.com/office/drawing/2014/main" id="{F1891475-ED60-D0D2-1AD0-4F80E3D89439}"/>
+              </a:ext>
+            </a:extLst>
+          </p:cNvPr>
+          <p:cNvSpPr>
+            <a:spLocks noGrp="1"/>
+          </p:cNvSpPr>
+          <p:nvPr>
+            <p:ph type="sldNum" sz="quarter" idx="7"/>
+          </p:nvPr>
+        </p:nvSpPr>
+        <p:spPr/>
+        <p:txBody>
+          <a:bodyPr/>
+          <a:lstStyle/>
+          <a:p>
+            <a:fld id="{B6F15528-21DE-4FAA-801E-634DDDAF4B2B}" type="slidenum">
+              <a:rPr lang="es-ES" smtClean="0"/>
+              <a:t>20</a:t>
+            </a:fld>
+            <a:endParaRPr lang="es-ES"/>
+          </a:p>
+        </p:txBody>
+      </p:sp>
+      <mc:AlternateContent xmlns:mc="http://schemas.openxmlformats.org/markup-compatibility/2006" xmlns:a14="http://schemas.microsoft.com/office/drawing/2010/main">
+        <mc:Choice Requires="a14">
+          <p:sp>
+            <p:nvSpPr>
+              <p:cNvPr id="4" name="Marcador de texto 2">
+                <a:extLst>
+                  <a:ext uri="{FF2B5EF4-FFF2-40B4-BE49-F238E27FC236}">
+                    <a16:creationId xmlns:a16="http://schemas.microsoft.com/office/drawing/2014/main" id="{BBBE28D8-49EC-3B49-29AC-FD2FDAF3B0AF}"/>
+                  </a:ext>
+                </a:extLst>
+              </p:cNvPr>
+              <p:cNvSpPr txBox="1">
+                <a:spLocks/>
+              </p:cNvSpPr>
+              <p:nvPr/>
+            </p:nvSpPr>
+            <p:spPr>
+              <a:xfrm>
+                <a:off x="608012" y="1295400"/>
+                <a:ext cx="11048999" cy="4958137"/>
+              </a:xfrm>
+              <a:prstGeom prst="rect">
+                <a:avLst/>
+              </a:prstGeom>
+            </p:spPr>
+            <p:txBody>
+              <a:bodyPr>
+                <a:normAutofit/>
+              </a:bodyPr>
+              <a:lstStyle>
+                <a:lvl1pPr marL="0">
+                  <a:defRPr>
+                    <a:latin typeface="+mn-lt"/>
+                    <a:ea typeface="+mn-ea"/>
+                    <a:cs typeface="+mn-cs"/>
+                  </a:defRPr>
+                </a:lvl1pPr>
+                <a:lvl2pPr marL="457200">
+                  <a:defRPr>
+                    <a:latin typeface="+mn-lt"/>
+                    <a:ea typeface="+mn-ea"/>
+                    <a:cs typeface="+mn-cs"/>
+                  </a:defRPr>
+                </a:lvl2pPr>
+                <a:lvl3pPr marL="914400">
+                  <a:defRPr>
+                    <a:latin typeface="+mn-lt"/>
+                    <a:ea typeface="+mn-ea"/>
+                    <a:cs typeface="+mn-cs"/>
+                  </a:defRPr>
+                </a:lvl3pPr>
+                <a:lvl4pPr marL="1371600">
+                  <a:defRPr>
+                    <a:latin typeface="+mn-lt"/>
+                    <a:ea typeface="+mn-ea"/>
+                    <a:cs typeface="+mn-cs"/>
+                  </a:defRPr>
+                </a:lvl4pPr>
+                <a:lvl5pPr marL="1828800">
+                  <a:defRPr>
+                    <a:latin typeface="+mn-lt"/>
+                    <a:ea typeface="+mn-ea"/>
+                    <a:cs typeface="+mn-cs"/>
+                  </a:defRPr>
+                </a:lvl5pPr>
+                <a:lvl6pPr marL="2286000">
+                  <a:defRPr>
+                    <a:latin typeface="+mn-lt"/>
+                    <a:ea typeface="+mn-ea"/>
+                    <a:cs typeface="+mn-cs"/>
+                  </a:defRPr>
+                </a:lvl6pPr>
+                <a:lvl7pPr marL="2743200">
+                  <a:defRPr>
+                    <a:latin typeface="+mn-lt"/>
+                    <a:ea typeface="+mn-ea"/>
+                    <a:cs typeface="+mn-cs"/>
+                  </a:defRPr>
+                </a:lvl7pPr>
+                <a:lvl8pPr marL="3200400">
+                  <a:defRPr>
+                    <a:latin typeface="+mn-lt"/>
+                    <a:ea typeface="+mn-ea"/>
+                    <a:cs typeface="+mn-cs"/>
+                  </a:defRPr>
+                </a:lvl8pPr>
+                <a:lvl9pPr marL="3657600">
+                  <a:defRPr>
+                    <a:latin typeface="+mn-lt"/>
+                    <a:ea typeface="+mn-ea"/>
+                    <a:cs typeface="+mn-cs"/>
+                  </a:defRPr>
+                </a:lvl9pPr>
+              </a:lstStyle>
+              <a:p>
+                <a:r>
+                  <a:rPr lang="en-US" sz="2000" dirty="0"/>
+                  <a:t>Considering the n_{eff} values for the SOI cross-section, what would be the path difference (</a:t>
+                </a:r>
+                <a14:m>
+                  <m:oMath xmlns:m="http://schemas.openxmlformats.org/officeDocument/2006/math">
+                    <m:r>
+                      <m:rPr>
+                        <m:sty m:val="p"/>
+                      </m:rPr>
+                      <a:rPr lang="es-ES" sz="2000" b="0" i="0" smtClean="0">
+                        <a:latin typeface="Cambria Math" panose="02040503050406030204" pitchFamily="18" charset="0"/>
+                      </a:rPr>
+                      <m:t>ΔL</m:t>
+                    </m:r>
+                    <m:r>
+                      <a:rPr lang="es-ES" sz="2000" b="0" i="1" smtClean="0">
+                        <a:latin typeface="Cambria Math" panose="02040503050406030204" pitchFamily="18" charset="0"/>
+                      </a:rPr>
+                      <m:t>= </m:t>
+                    </m:r>
+                    <m:sSub>
+                      <m:sSubPr>
+                        <m:ctrlPr>
+                          <a:rPr lang="es-ES" sz="2000" i="1" smtClean="0">
+                            <a:latin typeface="Cambria Math" panose="02040503050406030204" pitchFamily="18" charset="0"/>
+                          </a:rPr>
+                        </m:ctrlPr>
+                      </m:sSubPr>
+                      <m:e>
+                        <m:r>
+                          <a:rPr lang="es-ES" sz="2000" b="0" i="1" smtClean="0">
+                            <a:latin typeface="Cambria Math" panose="02040503050406030204" pitchFamily="18" charset="0"/>
+                          </a:rPr>
+                          <m:t>𝐿</m:t>
+                        </m:r>
+                      </m:e>
+                      <m:sub>
+                        <m:r>
+                          <a:rPr lang="es-ES" sz="2000" b="0" i="1" smtClean="0">
+                            <a:latin typeface="Cambria Math" panose="02040503050406030204" pitchFamily="18" charset="0"/>
+                          </a:rPr>
+                          <m:t>𝑢</m:t>
+                        </m:r>
+                      </m:sub>
+                    </m:sSub>
+                    <m:r>
+                      <a:rPr lang="es-ES" sz="2000" b="0" i="1" smtClean="0">
+                        <a:latin typeface="Cambria Math" panose="02040503050406030204" pitchFamily="18" charset="0"/>
+                      </a:rPr>
+                      <m:t> −</m:t>
+                    </m:r>
+                    <m:sSub>
+                      <m:sSubPr>
+                        <m:ctrlPr>
+                          <a:rPr lang="es-ES" sz="2000" i="1">
+                            <a:latin typeface="Cambria Math" panose="02040503050406030204" pitchFamily="18" charset="0"/>
+                          </a:rPr>
+                        </m:ctrlPr>
+                      </m:sSubPr>
+                      <m:e>
+                        <m:r>
+                          <a:rPr lang="es-ES" sz="2000" b="0" i="1">
+                            <a:latin typeface="Cambria Math" panose="02040503050406030204" pitchFamily="18" charset="0"/>
+                          </a:rPr>
+                          <m:t>𝐿</m:t>
+                        </m:r>
+                      </m:e>
+                      <m:sub>
+                        <m:r>
+                          <a:rPr lang="es-ES" sz="2000" b="0" i="1" smtClean="0">
+                            <a:latin typeface="Cambria Math" panose="02040503050406030204" pitchFamily="18" charset="0"/>
+                          </a:rPr>
+                          <m:t>𝑑</m:t>
+                        </m:r>
+                      </m:sub>
+                    </m:sSub>
+                  </m:oMath>
+                </a14:m>
+                <a:r>
+                  <a:rPr lang="en-US" sz="2000" dirty="0"/>
+                  <a:t>) needed to obtain a Free Spectral Range of 40 nm? Introduce the obtained value in the model to check the MZI response. </a:t>
+                </a:r>
+              </a:p>
+              <a:p>
+                <a:endParaRPr lang="en-US" sz="2000" dirty="0"/>
+              </a:p>
+              <a:p>
+                <a:r>
+                  <a:rPr lang="en-US" sz="2000" dirty="0"/>
+                  <a:t>Hint: We assume 1550 nm as the central design wavelength (</a:t>
+                </a:r>
+                <a14:m>
+                  <m:oMath xmlns:m="http://schemas.openxmlformats.org/officeDocument/2006/math">
+                    <m:sSub>
+                      <m:sSubPr>
+                        <m:ctrlPr>
+                          <a:rPr lang="es-ES" sz="2000" i="1" smtClean="0">
+                            <a:latin typeface="Cambria Math" panose="02040503050406030204" pitchFamily="18" charset="0"/>
+                          </a:rPr>
+                        </m:ctrlPr>
+                      </m:sSubPr>
+                      <m:e>
+                        <m:r>
+                          <a:rPr lang="es-ES" sz="2000" i="1">
+                            <a:latin typeface="Cambria Math" panose="02040503050406030204" pitchFamily="18" charset="0"/>
+                          </a:rPr>
+                          <m:t>𝜆</m:t>
+                        </m:r>
+                      </m:e>
+                      <m:sub>
+                        <m:r>
+                          <a:rPr lang="es-ES" sz="2000" b="0" i="1" smtClean="0">
+                            <a:latin typeface="Cambria Math" panose="02040503050406030204" pitchFamily="18" charset="0"/>
+                          </a:rPr>
+                          <m:t>0</m:t>
+                        </m:r>
+                      </m:sub>
+                    </m:sSub>
+                    <m:r>
+                      <a:rPr lang="es-ES" sz="2000" b="0" i="1" smtClean="0">
+                        <a:latin typeface="Cambria Math" panose="02040503050406030204" pitchFamily="18" charset="0"/>
+                      </a:rPr>
+                      <m:t>= </m:t>
+                    </m:r>
+                  </m:oMath>
+                </a14:m>
+                <a:r>
+                  <a:rPr lang="en-US" sz="2000" dirty="0"/>
+                  <a:t>1550 nm).</a:t>
+                </a:r>
+              </a:p>
+              <a:p>
+                <a:endParaRPr lang="en-US" sz="2000" dirty="0"/>
+              </a:p>
+              <a:p>
+                <a:pPr algn="just"/>
+                <a:endParaRPr lang="en-US" sz="2000" dirty="0"/>
+              </a:p>
+              <a:p>
+                <a:pPr algn="just"/>
+                <a:endParaRPr lang="en-US" sz="2000" b="1" i="1" dirty="0"/>
+              </a:p>
+              <a:p>
+                <a:pPr algn="just"/>
+                <a:endParaRPr lang="en-US" sz="2000" kern="0" dirty="0">
+                  <a:solidFill>
+                    <a:sysClr val="windowText" lastClr="000000"/>
+                  </a:solidFill>
+                </a:endParaRPr>
+              </a:p>
+              <a:p>
+                <a:endParaRPr lang="en-US" sz="2000" kern="0" dirty="0">
+                  <a:solidFill>
+                    <a:sysClr val="windowText" lastClr="000000"/>
+                  </a:solidFill>
+                </a:endParaRPr>
+              </a:p>
+            </p:txBody>
+          </p:sp>
+        </mc:Choice>
+        <mc:Fallback xmlns="">
+          <p:sp>
+            <p:nvSpPr>
+              <p:cNvPr id="4" name="Marcador de texto 2">
+                <a:extLst>
+                  <a:ext uri="{FF2B5EF4-FFF2-40B4-BE49-F238E27FC236}">
+                    <a16:creationId xmlns:a16="http://schemas.microsoft.com/office/drawing/2014/main" id="{BBBE28D8-49EC-3B49-29AC-FD2FDAF3B0AF}"/>
+                  </a:ext>
+                </a:extLst>
+              </p:cNvPr>
+              <p:cNvSpPr txBox="1">
+                <a:spLocks noRot="1" noChangeAspect="1" noMove="1" noResize="1" noEditPoints="1" noAdjustHandles="1" noChangeArrowheads="1" noChangeShapeType="1" noTextEdit="1"/>
+              </p:cNvSpPr>
+              <p:nvPr/>
+            </p:nvSpPr>
+            <p:spPr>
+              <a:xfrm>
+                <a:off x="608012" y="1295400"/>
+                <a:ext cx="11048999" cy="4958137"/>
+              </a:xfrm>
+              <a:prstGeom prst="rect">
+                <a:avLst/>
+              </a:prstGeom>
+              <a:blipFill>
+                <a:blip r:embed="rId6"/>
+                <a:stretch>
+                  <a:fillRect l="-607" t="-738"/>
+                </a:stretch>
+              </a:blipFill>
+            </p:spPr>
+            <p:txBody>
+              <a:bodyPr/>
+              <a:lstStyle/>
+              <a:p>
+                <a:r>
+                  <a:rPr lang="es-ES">
+                    <a:noFill/>
+                  </a:rPr>
+                  <a:t> </a:t>
+                </a:r>
+              </a:p>
+            </p:txBody>
+          </p:sp>
+        </mc:Fallback>
+      </mc:AlternateContent>
+      <p:sp>
+        <p:nvSpPr>
+          <p:cNvPr id="2" name="CuadroTexto 1">
+            <a:extLst>
+              <a:ext uri="{FF2B5EF4-FFF2-40B4-BE49-F238E27FC236}">
+                <a16:creationId xmlns:a16="http://schemas.microsoft.com/office/drawing/2014/main" id="{CFDBBA6B-3646-055F-7A9C-EE01830137BE}"/>
+              </a:ext>
+            </a:extLst>
+          </p:cNvPr>
+          <p:cNvSpPr txBox="1"/>
+          <p:nvPr/>
+        </p:nvSpPr>
+        <p:spPr>
+          <a:xfrm>
+            <a:off x="609441" y="4860334"/>
+            <a:ext cx="11199971" cy="1384995"/>
+          </a:xfrm>
+          <a:prstGeom prst="rect">
+            <a:avLst/>
+          </a:prstGeom>
+          <a:solidFill>
+            <a:schemeClr val="bg1">
+              <a:lumMod val="95000"/>
+            </a:schemeClr>
+          </a:solidFill>
+          <a:ln w="28575">
+            <a:solidFill>
+              <a:srgbClr val="E0700D"/>
+            </a:solidFill>
+          </a:ln>
+        </p:spPr>
+        <p:txBody>
+          <a:bodyPr wrap="square" rtlCol="0">
+            <a:spAutoFit/>
+          </a:bodyPr>
+          <a:lstStyle/>
+          <a:p>
+            <a:pPr algn="just"/>
+            <a:r>
+              <a:rPr lang="en-US" sz="1200" dirty="0">
+                <a:latin typeface="Arial" panose="020B0604020202020204" pitchFamily="34" charset="0"/>
+                <a:cs typeface="Arial" panose="020B0604020202020204" pitchFamily="34" charset="0"/>
+              </a:rPr>
+              <a:t>Document all your results (copy here the code employed to obtain the corresponding value)</a:t>
+            </a:r>
+          </a:p>
+          <a:p>
+            <a:pPr algn="just"/>
+            <a:endParaRPr lang="en-US" sz="1200" dirty="0">
+              <a:latin typeface="Arial" panose="020B0604020202020204" pitchFamily="34" charset="0"/>
+              <a:cs typeface="Arial" panose="020B0604020202020204" pitchFamily="34" charset="0"/>
+            </a:endParaRPr>
+          </a:p>
+          <a:p>
+            <a:pPr algn="just"/>
+            <a:endParaRPr lang="en-US" sz="1200" dirty="0">
+              <a:latin typeface="Arial" panose="020B0604020202020204" pitchFamily="34" charset="0"/>
+              <a:cs typeface="Arial" panose="020B0604020202020204" pitchFamily="34" charset="0"/>
+            </a:endParaRPr>
+          </a:p>
+          <a:p>
+            <a:pPr algn="just"/>
+            <a:endParaRPr lang="en-US" sz="1200" dirty="0">
+              <a:latin typeface="Arial" panose="020B0604020202020204" pitchFamily="34" charset="0"/>
+              <a:cs typeface="Arial" panose="020B0604020202020204" pitchFamily="34" charset="0"/>
+            </a:endParaRPr>
+          </a:p>
+          <a:p>
+            <a:pPr algn="just"/>
+            <a:endParaRPr lang="en-US" sz="1200" dirty="0">
+              <a:latin typeface="Arial" panose="020B0604020202020204" pitchFamily="34" charset="0"/>
+              <a:cs typeface="Arial" panose="020B0604020202020204" pitchFamily="34" charset="0"/>
+            </a:endParaRPr>
+          </a:p>
+          <a:p>
+            <a:pPr algn="just"/>
+            <a:endParaRPr lang="en-US" sz="1200" dirty="0">
+              <a:latin typeface="Arial" panose="020B0604020202020204" pitchFamily="34" charset="0"/>
+              <a:cs typeface="Arial" panose="020B0604020202020204" pitchFamily="34" charset="0"/>
+            </a:endParaRPr>
+          </a:p>
+          <a:p>
+            <a:pPr algn="just"/>
+            <a:endParaRPr lang="en-US" sz="1200" dirty="0">
+              <a:latin typeface="Arial" panose="020B0604020202020204" pitchFamily="34" charset="0"/>
+              <a:cs typeface="Arial" panose="020B0604020202020204" pitchFamily="34" charset="0"/>
+            </a:endParaRPr>
+          </a:p>
+        </p:txBody>
+      </p:sp>
+      <p:sp>
+        <p:nvSpPr>
+          <p:cNvPr id="5" name="Marcador de pie de página 2">
+            <a:extLst>
+              <a:ext uri="{FF2B5EF4-FFF2-40B4-BE49-F238E27FC236}">
+                <a16:creationId xmlns:a16="http://schemas.microsoft.com/office/drawing/2014/main" id="{97B81335-0738-3406-18D4-5D88EB0C7954}"/>
+              </a:ext>
+            </a:extLst>
+          </p:cNvPr>
+          <p:cNvSpPr>
+            <a:spLocks noGrp="1"/>
+          </p:cNvSpPr>
+          <p:nvPr>
+            <p:ph type="ftr" sz="quarter" idx="5"/>
+          </p:nvPr>
+        </p:nvSpPr>
+        <p:spPr>
+          <a:xfrm>
+            <a:off x="609600" y="6457057"/>
+            <a:ext cx="2743200" cy="184666"/>
+          </a:xfrm>
+        </p:spPr>
+        <p:txBody>
+          <a:bodyPr/>
+          <a:lstStyle/>
+          <a:p>
+            <a:pPr marL="12700">
+              <a:spcBef>
+                <a:spcPts val="15"/>
+              </a:spcBef>
+            </a:pPr>
+            <a:r>
+              <a:rPr lang="es-ES" spc="-5"/>
+              <a:t>LAB 3. INTERFEROMETERS I</a:t>
+            </a:r>
+            <a:endParaRPr lang="es-ES" spc="-5" dirty="0"/>
+          </a:p>
+        </p:txBody>
+      </p:sp>
+    </p:spTree>
+    <p:extLst>
+      <p:ext uri="{BB962C8B-B14F-4D97-AF65-F5344CB8AC3E}">
+        <p14:creationId xmlns:p14="http://schemas.microsoft.com/office/powerpoint/2010/main" val="2337098194"/>
+      </p:ext>
+    </p:extLst>
+  </p:cSld>
+  <p:clrMapOvr>
+    <a:masterClrMapping/>
+  </p:clrMapOvr>
+</p:sld>
+</file>
+
+<file path=ppt/slides/slide21.xml><?xml version="1.0" encoding="utf-8"?>
+<p:sld xmlns:a="http://schemas.openxmlformats.org/drawingml/2006/main" xmlns:r="http://schemas.openxmlformats.org/officeDocument/2006/relationships" xmlns:p="http://schemas.openxmlformats.org/presentationml/2006/main">
+  <p:cSld>
+    <p:spTree>
+      <p:nvGrpSpPr>
+        <p:cNvPr id="1" name="">
+          <a:extLst>
+            <a:ext uri="{FF2B5EF4-FFF2-40B4-BE49-F238E27FC236}">
+              <a16:creationId xmlns:a16="http://schemas.microsoft.com/office/drawing/2014/main" id="{98CB9552-DF22-1310-10FA-4D2D2AF77601}"/>
+            </a:ext>
+          </a:extLst>
+        </p:cNvPr>
+        <p:cNvGrpSpPr/>
+        <p:nvPr/>
+      </p:nvGrpSpPr>
+      <p:grpSpPr>
+        <a:xfrm>
+          <a:off x="0" y="0"/>
+          <a:ext cx="0" cy="0"/>
+          <a:chOff x="0" y="0"/>
+          <a:chExt cx="0" cy="0"/>
+        </a:xfrm>
+      </p:grpSpPr>
+      <p:sp>
+        <p:nvSpPr>
+          <p:cNvPr id="16" name="object 16">
+            <a:extLst>
+              <a:ext uri="{FF2B5EF4-FFF2-40B4-BE49-F238E27FC236}">
+                <a16:creationId xmlns:a16="http://schemas.microsoft.com/office/drawing/2014/main" id="{B0632A48-0384-0EF1-389E-FBF3F9C3E7CE}"/>
+              </a:ext>
+            </a:extLst>
+          </p:cNvPr>
+          <p:cNvSpPr txBox="1">
+            <a:spLocks noGrp="1"/>
+          </p:cNvSpPr>
+          <p:nvPr>
+            <p:ph type="title"/>
+          </p:nvPr>
+        </p:nvSpPr>
+        <p:spPr>
+          <a:xfrm>
+            <a:off x="685800" y="408883"/>
+            <a:ext cx="10994410" cy="782265"/>
+          </a:xfrm>
+          <a:prstGeom prst="rect">
+            <a:avLst/>
+          </a:prstGeom>
+        </p:spPr>
+        <p:txBody>
+          <a:bodyPr vert="horz" wrap="square" lIns="0" tIns="12700" rIns="0" bIns="0" rtlCol="0">
+            <a:spAutoFit/>
+          </a:bodyPr>
+          <a:lstStyle/>
+          <a:p>
+            <a:pPr marL="12700">
+              <a:lnSpc>
+                <a:spcPct val="100000"/>
+              </a:lnSpc>
+              <a:spcBef>
+                <a:spcPts val="100"/>
+              </a:spcBef>
+            </a:pPr>
+            <a:r>
+              <a:rPr lang="en-US" sz="2400" b="1" dirty="0"/>
+              <a:t>ASSESSMENT #3 </a:t>
+            </a:r>
+            <a:r>
+              <a:rPr lang="en-US" sz="2500" dirty="0"/>
+              <a:t>– SAX implementation </a:t>
+            </a:r>
+            <a:br>
+              <a:rPr lang="es-ES" sz="2500" spc="-5" dirty="0">
+                <a:latin typeface="+mj-lt"/>
+                <a:cs typeface="Lucida Sans"/>
+              </a:rPr>
+            </a:br>
+            <a:endParaRPr sz="2500" b="0" dirty="0">
+              <a:latin typeface="+mj-lt"/>
+              <a:cs typeface="Lucida Sans"/>
+            </a:endParaRPr>
+          </a:p>
+        </p:txBody>
+      </p:sp>
+      <p:pic>
+        <p:nvPicPr>
+          <p:cNvPr id="83" name="Gráfico 82">
+            <a:extLst>
+              <a:ext uri="{FF2B5EF4-FFF2-40B4-BE49-F238E27FC236}">
+                <a16:creationId xmlns:a16="http://schemas.microsoft.com/office/drawing/2014/main" id="{1F43E6A6-5CC3-9B99-14AC-997478150C3D}"/>
+              </a:ext>
+            </a:extLst>
+          </p:cNvPr>
+          <p:cNvPicPr>
+            <a:picLocks noChangeAspect="1"/>
+          </p:cNvPicPr>
+          <p:nvPr/>
+        </p:nvPicPr>
+        <p:blipFill>
+          <a:blip r:embed="rId3">
+            <a:extLst>
+              <a:ext uri="{96DAC541-7B7A-43D3-8B79-37D633B846F1}">
+                <asvg:svgBlip xmlns:asvg="http://schemas.microsoft.com/office/drawing/2016/SVG/main" r:embed="rId4"/>
+              </a:ext>
+            </a:extLst>
+          </a:blip>
+          <a:stretch>
+            <a:fillRect/>
+          </a:stretch>
+        </p:blipFill>
+        <p:spPr>
+          <a:xfrm>
+            <a:off x="5045006" y="6356057"/>
+            <a:ext cx="6409575" cy="363174"/>
+          </a:xfrm>
+          <a:prstGeom prst="rect">
+            <a:avLst/>
+          </a:prstGeom>
+        </p:spPr>
+      </p:pic>
+      <p:sp>
+        <p:nvSpPr>
+          <p:cNvPr id="84" name="Marcador de número de diapositiva 83">
+            <a:extLst>
+              <a:ext uri="{FF2B5EF4-FFF2-40B4-BE49-F238E27FC236}">
+                <a16:creationId xmlns:a16="http://schemas.microsoft.com/office/drawing/2014/main" id="{DFC09DB6-1DF7-C8F9-7414-27BC280DEA0F}"/>
+              </a:ext>
+            </a:extLst>
+          </p:cNvPr>
+          <p:cNvSpPr>
+            <a:spLocks noGrp="1"/>
+          </p:cNvSpPr>
+          <p:nvPr>
+            <p:ph type="sldNum" sz="quarter" idx="7"/>
+          </p:nvPr>
+        </p:nvSpPr>
+        <p:spPr/>
+        <p:txBody>
+          <a:bodyPr/>
+          <a:lstStyle/>
+          <a:p>
+            <a:fld id="{B6F15528-21DE-4FAA-801E-634DDDAF4B2B}" type="slidenum">
+              <a:rPr lang="es-ES" smtClean="0"/>
+              <a:t>21</a:t>
+            </a:fld>
+            <a:endParaRPr lang="es-ES"/>
+          </a:p>
+        </p:txBody>
+      </p:sp>
+      <p:sp>
+        <p:nvSpPr>
+          <p:cNvPr id="4" name="Marcador de texto 2">
+            <a:extLst>
+              <a:ext uri="{FF2B5EF4-FFF2-40B4-BE49-F238E27FC236}">
+                <a16:creationId xmlns:a16="http://schemas.microsoft.com/office/drawing/2014/main" id="{EBC8DCFA-5565-A757-1F8D-F4CCCF573A63}"/>
+              </a:ext>
+            </a:extLst>
+          </p:cNvPr>
+          <p:cNvSpPr txBox="1">
+            <a:spLocks/>
+          </p:cNvSpPr>
+          <p:nvPr/>
+        </p:nvSpPr>
+        <p:spPr>
+          <a:xfrm>
+            <a:off x="571500" y="1066800"/>
+            <a:ext cx="11048999" cy="4958137"/>
+          </a:xfrm>
+          <a:prstGeom prst="rect">
+            <a:avLst/>
+          </a:prstGeom>
+        </p:spPr>
+        <p:txBody>
+          <a:bodyPr>
+            <a:normAutofit/>
+          </a:bodyPr>
+          <a:lstStyle>
+            <a:lvl1pPr marL="0">
+              <a:defRPr>
+                <a:latin typeface="+mn-lt"/>
+                <a:ea typeface="+mn-ea"/>
+                <a:cs typeface="+mn-cs"/>
+              </a:defRPr>
+            </a:lvl1pPr>
+            <a:lvl2pPr marL="457200">
+              <a:defRPr>
+                <a:latin typeface="+mn-lt"/>
+                <a:ea typeface="+mn-ea"/>
+                <a:cs typeface="+mn-cs"/>
+              </a:defRPr>
+            </a:lvl2pPr>
+            <a:lvl3pPr marL="914400">
+              <a:defRPr>
+                <a:latin typeface="+mn-lt"/>
+                <a:ea typeface="+mn-ea"/>
+                <a:cs typeface="+mn-cs"/>
+              </a:defRPr>
+            </a:lvl3pPr>
+            <a:lvl4pPr marL="1371600">
+              <a:defRPr>
+                <a:latin typeface="+mn-lt"/>
+                <a:ea typeface="+mn-ea"/>
+                <a:cs typeface="+mn-cs"/>
+              </a:defRPr>
+            </a:lvl4pPr>
+            <a:lvl5pPr marL="1828800">
+              <a:defRPr>
+                <a:latin typeface="+mn-lt"/>
+                <a:ea typeface="+mn-ea"/>
+                <a:cs typeface="+mn-cs"/>
+              </a:defRPr>
+            </a:lvl5pPr>
+            <a:lvl6pPr marL="2286000">
+              <a:defRPr>
+                <a:latin typeface="+mn-lt"/>
+                <a:ea typeface="+mn-ea"/>
+                <a:cs typeface="+mn-cs"/>
+              </a:defRPr>
+            </a:lvl6pPr>
+            <a:lvl7pPr marL="2743200">
+              <a:defRPr>
+                <a:latin typeface="+mn-lt"/>
+                <a:ea typeface="+mn-ea"/>
+                <a:cs typeface="+mn-cs"/>
+              </a:defRPr>
+            </a:lvl7pPr>
+            <a:lvl8pPr marL="3200400">
+              <a:defRPr>
+                <a:latin typeface="+mn-lt"/>
+                <a:ea typeface="+mn-ea"/>
+                <a:cs typeface="+mn-cs"/>
+              </a:defRPr>
+            </a:lvl8pPr>
+            <a:lvl9pPr marL="3657600">
+              <a:defRPr>
+                <a:latin typeface="+mn-lt"/>
+                <a:ea typeface="+mn-ea"/>
+                <a:cs typeface="+mn-cs"/>
+              </a:defRPr>
+            </a:lvl9pPr>
+          </a:lstStyle>
+          <a:p>
+            <a:r>
+              <a:rPr lang="en-US" dirty="0"/>
+              <a:t>Now, we are going to implement the design parameters in the MZI model developed in SAX and compare the response obtained with the one simulated by mathematical formulation. This will help us to identify any error in the definition of the SAX model single components. </a:t>
+            </a:r>
+          </a:p>
+          <a:p>
+            <a:br>
+              <a:rPr lang="en-US" dirty="0"/>
+            </a:br>
+            <a:r>
+              <a:rPr lang="en-US" dirty="0"/>
+              <a:t>In order to implement the SAX model, take as example the following lines:</a:t>
+            </a:r>
+          </a:p>
+          <a:p>
+            <a:endParaRPr lang="en-US" dirty="0"/>
+          </a:p>
+          <a:p>
+            <a:pPr lvl="2">
+              <a:lnSpc>
+                <a:spcPts val="1425"/>
+              </a:lnSpc>
+            </a:pPr>
+            <a:r>
+              <a:rPr lang="es-ES" sz="1400" b="0" dirty="0">
+                <a:effectLst/>
+                <a:latin typeface="Courier New" panose="02070309020205020404" pitchFamily="49" charset="0"/>
+              </a:rPr>
+              <a:t> </a:t>
+            </a:r>
+            <a:r>
+              <a:rPr lang="es-ES" sz="1400" b="0" dirty="0" err="1">
+                <a:effectLst/>
+                <a:latin typeface="Courier New" panose="02070309020205020404" pitchFamily="49" charset="0"/>
+              </a:rPr>
+              <a:t>mzi_test</a:t>
+            </a:r>
+            <a:r>
+              <a:rPr lang="es-ES" sz="1400" b="0" dirty="0">
+                <a:effectLst/>
+                <a:latin typeface="Courier New" panose="02070309020205020404" pitchFamily="49" charset="0"/>
+              </a:rPr>
+              <a:t> = </a:t>
+            </a:r>
+            <a:r>
+              <a:rPr lang="es-ES" sz="1400" b="0" dirty="0" err="1">
+                <a:effectLst/>
+                <a:latin typeface="Courier New" panose="02070309020205020404" pitchFamily="49" charset="0"/>
+              </a:rPr>
+              <a:t>mzi</a:t>
+            </a:r>
+            <a:r>
+              <a:rPr lang="es-ES" sz="1400" b="0" dirty="0">
+                <a:effectLst/>
+                <a:latin typeface="Courier New" panose="02070309020205020404" pitchFamily="49" charset="0"/>
+              </a:rPr>
+              <a:t>(</a:t>
+            </a:r>
+            <a:r>
+              <a:rPr lang="es-ES" sz="1400" b="0" dirty="0" err="1">
+                <a:effectLst/>
+                <a:latin typeface="Courier New" panose="02070309020205020404" pitchFamily="49" charset="0"/>
+              </a:rPr>
+              <a:t>wl</a:t>
+            </a:r>
+            <a:r>
+              <a:rPr lang="es-ES" sz="1400" b="0" dirty="0">
+                <a:effectLst/>
+                <a:latin typeface="Courier New" panose="02070309020205020404" pitchFamily="49" charset="0"/>
+              </a:rPr>
+              <a:t>=</a:t>
+            </a:r>
+            <a:r>
+              <a:rPr lang="es-ES" sz="1400" b="0" dirty="0" err="1">
+                <a:effectLst/>
+                <a:latin typeface="Courier New" panose="02070309020205020404" pitchFamily="49" charset="0"/>
+              </a:rPr>
+              <a:t>wl</a:t>
+            </a:r>
+            <a:r>
+              <a:rPr lang="es-ES" sz="1400" b="0" dirty="0">
+                <a:effectLst/>
+                <a:latin typeface="Courier New" panose="02070309020205020404" pitchFamily="49" charset="0"/>
+              </a:rPr>
+              <a:t>, </a:t>
+            </a:r>
+          </a:p>
+          <a:p>
+            <a:pPr lvl="2">
+              <a:lnSpc>
+                <a:spcPts val="1425"/>
+              </a:lnSpc>
+            </a:pPr>
+            <a:r>
+              <a:rPr lang="es-ES" sz="1400" b="0" dirty="0">
+                <a:effectLst/>
+                <a:latin typeface="Courier New" panose="02070309020205020404" pitchFamily="49" charset="0"/>
+              </a:rPr>
+              <a:t>    </a:t>
+            </a:r>
+            <a:r>
+              <a:rPr lang="es-ES" sz="1400" b="0" dirty="0" err="1">
+                <a:effectLst/>
+                <a:latin typeface="Courier New" panose="02070309020205020404" pitchFamily="49" charset="0"/>
+              </a:rPr>
+              <a:t>coup_a</a:t>
+            </a:r>
+            <a:r>
+              <a:rPr lang="es-ES" sz="1400" b="0" dirty="0">
+                <a:effectLst/>
+                <a:latin typeface="Courier New" panose="02070309020205020404" pitchFamily="49" charset="0"/>
+              </a:rPr>
+              <a:t> = ...</a:t>
+            </a:r>
+          </a:p>
+          <a:p>
+            <a:pPr lvl="2">
+              <a:lnSpc>
+                <a:spcPts val="1425"/>
+              </a:lnSpc>
+            </a:pPr>
+            <a:r>
+              <a:rPr lang="es-ES" sz="1400" b="0" dirty="0">
+                <a:effectLst/>
+                <a:latin typeface="Courier New" panose="02070309020205020404" pitchFamily="49" charset="0"/>
+              </a:rPr>
+              <a:t>    </a:t>
+            </a:r>
+            <a:r>
+              <a:rPr lang="es-ES" sz="1400" b="0" dirty="0" err="1">
+                <a:effectLst/>
+                <a:latin typeface="Courier New" panose="02070309020205020404" pitchFamily="49" charset="0"/>
+              </a:rPr>
+              <a:t>wvg_d</a:t>
+            </a:r>
+            <a:r>
+              <a:rPr lang="es-ES" sz="1400" b="0" dirty="0">
+                <a:effectLst/>
+                <a:latin typeface="Courier New" panose="02070309020205020404" pitchFamily="49" charset="0"/>
+              </a:rPr>
+              <a:t>={"</a:t>
+            </a:r>
+            <a:r>
+              <a:rPr lang="es-ES" sz="1400" b="0" dirty="0" err="1">
+                <a:effectLst/>
+                <a:latin typeface="Courier New" panose="02070309020205020404" pitchFamily="49" charset="0"/>
+              </a:rPr>
+              <a:t>length</a:t>
+            </a:r>
+            <a:r>
+              <a:rPr lang="es-ES" sz="1400" b="0" dirty="0">
+                <a:effectLst/>
+                <a:latin typeface="Courier New" panose="02070309020205020404" pitchFamily="49" charset="0"/>
+              </a:rPr>
+              <a:t>": </a:t>
+            </a:r>
+            <a:r>
+              <a:rPr lang="es-ES" sz="1400" b="0" dirty="0" err="1">
+                <a:effectLst/>
+                <a:latin typeface="Courier New" panose="02070309020205020404" pitchFamily="49" charset="0"/>
+              </a:rPr>
+              <a:t>l_d</a:t>
+            </a:r>
+            <a:r>
+              <a:rPr lang="es-ES" sz="1400" b="0" dirty="0">
+                <a:effectLst/>
+                <a:latin typeface="Courier New" panose="02070309020205020404" pitchFamily="49" charset="0"/>
+              </a:rPr>
+              <a:t>, "</a:t>
+            </a:r>
+            <a:r>
+              <a:rPr lang="es-ES" sz="1400" b="0" dirty="0" err="1">
+                <a:effectLst/>
+                <a:latin typeface="Courier New" panose="02070309020205020404" pitchFamily="49" charset="0"/>
+              </a:rPr>
+              <a:t>neff</a:t>
+            </a:r>
+            <a:r>
+              <a:rPr lang="es-ES" sz="1400" b="0" dirty="0">
+                <a:effectLst/>
+                <a:latin typeface="Courier New" panose="02070309020205020404" pitchFamily="49" charset="0"/>
+              </a:rPr>
+              <a:t>": ...}, </a:t>
+            </a:r>
+          </a:p>
+          <a:p>
+            <a:pPr lvl="2">
+              <a:lnSpc>
+                <a:spcPts val="1425"/>
+              </a:lnSpc>
+            </a:pPr>
+            <a:r>
+              <a:rPr lang="es-ES" sz="1400" b="0" dirty="0">
+                <a:effectLst/>
+                <a:latin typeface="Courier New" panose="02070309020205020404" pitchFamily="49" charset="0"/>
+              </a:rPr>
+              <a:t>    </a:t>
+            </a:r>
+            <a:r>
+              <a:rPr lang="es-ES" sz="1400" b="0" dirty="0" err="1">
+                <a:effectLst/>
+                <a:latin typeface="Courier New" panose="02070309020205020404" pitchFamily="49" charset="0"/>
+              </a:rPr>
+              <a:t>wvg_u</a:t>
+            </a:r>
+            <a:r>
+              <a:rPr lang="es-ES" sz="1400" b="0" dirty="0">
+                <a:effectLst/>
+                <a:latin typeface="Courier New" panose="02070309020205020404" pitchFamily="49" charset="0"/>
+              </a:rPr>
+              <a:t>={"</a:t>
+            </a:r>
+            <a:r>
+              <a:rPr lang="es-ES" sz="1400" b="0" dirty="0" err="1">
+                <a:effectLst/>
+                <a:latin typeface="Courier New" panose="02070309020205020404" pitchFamily="49" charset="0"/>
+              </a:rPr>
+              <a:t>length</a:t>
+            </a:r>
+            <a:r>
+              <a:rPr lang="es-ES" sz="1400" b="0" dirty="0">
+                <a:effectLst/>
+                <a:latin typeface="Courier New" panose="02070309020205020404" pitchFamily="49" charset="0"/>
+              </a:rPr>
+              <a:t>": </a:t>
+            </a:r>
+            <a:r>
+              <a:rPr lang="es-ES" sz="1400" b="0" dirty="0" err="1">
+                <a:effectLst/>
+                <a:latin typeface="Courier New" panose="02070309020205020404" pitchFamily="49" charset="0"/>
+              </a:rPr>
+              <a:t>l_u</a:t>
+            </a:r>
+            <a:r>
+              <a:rPr lang="es-ES" sz="1400" b="0" dirty="0">
+                <a:effectLst/>
+                <a:latin typeface="Courier New" panose="02070309020205020404" pitchFamily="49" charset="0"/>
+              </a:rPr>
+              <a:t>, "</a:t>
+            </a:r>
+            <a:r>
+              <a:rPr lang="es-ES" sz="1400" b="0" dirty="0" err="1">
+                <a:effectLst/>
+                <a:latin typeface="Courier New" panose="02070309020205020404" pitchFamily="49" charset="0"/>
+              </a:rPr>
+              <a:t>neff</a:t>
+            </a:r>
+            <a:r>
+              <a:rPr lang="es-ES" sz="1400" b="0" dirty="0">
+                <a:effectLst/>
+                <a:latin typeface="Courier New" panose="02070309020205020404" pitchFamily="49" charset="0"/>
+              </a:rPr>
+              <a:t>": ...},</a:t>
+            </a:r>
+          </a:p>
+          <a:p>
+            <a:pPr lvl="2">
+              <a:lnSpc>
+                <a:spcPts val="1425"/>
+              </a:lnSpc>
+            </a:pPr>
+            <a:r>
+              <a:rPr lang="es-ES" sz="1400" b="0" dirty="0">
+                <a:effectLst/>
+                <a:latin typeface="Courier New" panose="02070309020205020404" pitchFamily="49" charset="0"/>
+              </a:rPr>
+              <a:t>    </a:t>
+            </a:r>
+            <a:r>
+              <a:rPr lang="es-ES" sz="1400" b="0" dirty="0" err="1">
+                <a:effectLst/>
+                <a:latin typeface="Courier New" panose="02070309020205020404" pitchFamily="49" charset="0"/>
+              </a:rPr>
+              <a:t>coup_b</a:t>
+            </a:r>
+            <a:r>
+              <a:rPr lang="es-ES" sz="1400" b="0" dirty="0">
+                <a:effectLst/>
+                <a:latin typeface="Courier New" panose="02070309020205020404" pitchFamily="49" charset="0"/>
+              </a:rPr>
+              <a:t> = ... )</a:t>
+            </a:r>
+          </a:p>
+          <a:p>
+            <a:pPr lvl="2">
+              <a:lnSpc>
+                <a:spcPts val="1425"/>
+              </a:lnSpc>
+            </a:pPr>
+            <a:br>
+              <a:rPr lang="es-ES" sz="1400" b="0" dirty="0">
+                <a:effectLst/>
+                <a:latin typeface="Courier New" panose="02070309020205020404" pitchFamily="49" charset="0"/>
+              </a:rPr>
+            </a:br>
+            <a:r>
+              <a:rPr lang="es-ES" sz="1400" b="0" dirty="0">
+                <a:effectLst/>
+                <a:latin typeface="Courier New" panose="02070309020205020404" pitchFamily="49" charset="0"/>
+              </a:rPr>
+              <a:t>    H00 = </a:t>
+            </a:r>
+            <a:r>
+              <a:rPr lang="es-ES" sz="1400" b="0" dirty="0" err="1">
+                <a:effectLst/>
+                <a:latin typeface="Courier New" panose="02070309020205020404" pitchFamily="49" charset="0"/>
+              </a:rPr>
+              <a:t>mzi_test</a:t>
+            </a:r>
+            <a:r>
+              <a:rPr lang="es-ES" sz="1400" b="0" dirty="0">
+                <a:effectLst/>
+                <a:latin typeface="Courier New" panose="02070309020205020404" pitchFamily="49" charset="0"/>
+              </a:rPr>
+              <a:t>["in0", "out0"]</a:t>
+            </a:r>
+          </a:p>
+          <a:p>
+            <a:endParaRPr lang="en-US" sz="2000" dirty="0"/>
+          </a:p>
+          <a:p>
+            <a:pPr algn="just"/>
+            <a:endParaRPr lang="en-US" sz="2000" dirty="0"/>
+          </a:p>
+          <a:p>
+            <a:pPr algn="just"/>
+            <a:endParaRPr lang="en-US" sz="2000" b="1" i="1" dirty="0"/>
+          </a:p>
+          <a:p>
+            <a:pPr algn="just"/>
+            <a:endParaRPr lang="en-US" sz="2000" kern="0" dirty="0">
+              <a:solidFill>
+                <a:sysClr val="windowText" lastClr="000000"/>
+              </a:solidFill>
+            </a:endParaRPr>
+          </a:p>
+          <a:p>
+            <a:endParaRPr lang="en-US" sz="2000" kern="0" dirty="0">
+              <a:solidFill>
+                <a:sysClr val="windowText" lastClr="000000"/>
+              </a:solidFill>
+            </a:endParaRPr>
+          </a:p>
+        </p:txBody>
+      </p:sp>
+      <p:sp>
+        <p:nvSpPr>
+          <p:cNvPr id="2" name="CuadroTexto 1">
+            <a:extLst>
+              <a:ext uri="{FF2B5EF4-FFF2-40B4-BE49-F238E27FC236}">
+                <a16:creationId xmlns:a16="http://schemas.microsoft.com/office/drawing/2014/main" id="{CA4A2D6E-5993-52B3-D251-1ADF2B0C8355}"/>
+              </a:ext>
+            </a:extLst>
+          </p:cNvPr>
+          <p:cNvSpPr txBox="1"/>
+          <p:nvPr/>
+        </p:nvSpPr>
+        <p:spPr>
+          <a:xfrm>
+            <a:off x="609441" y="4860334"/>
+            <a:ext cx="11199971" cy="1384995"/>
+          </a:xfrm>
+          <a:prstGeom prst="rect">
+            <a:avLst/>
+          </a:prstGeom>
+          <a:solidFill>
+            <a:schemeClr val="bg1">
+              <a:lumMod val="95000"/>
+            </a:schemeClr>
+          </a:solidFill>
+          <a:ln w="28575">
+            <a:solidFill>
+              <a:srgbClr val="E0700D"/>
+            </a:solidFill>
+          </a:ln>
+        </p:spPr>
+        <p:txBody>
+          <a:bodyPr wrap="square" rtlCol="0">
+            <a:spAutoFit/>
+          </a:bodyPr>
+          <a:lstStyle/>
+          <a:p>
+            <a:pPr algn="just"/>
+            <a:r>
+              <a:rPr lang="en-US" sz="1200" dirty="0">
+                <a:latin typeface="Arial" panose="020B0604020202020204" pitchFamily="34" charset="0"/>
+                <a:cs typeface="Arial" panose="020B0604020202020204" pitchFamily="34" charset="0"/>
+              </a:rPr>
+              <a:t>Document all your results (copy here the code employed to obtain the transfer function employing SAX modeling and include the comparative plot of the models)</a:t>
+            </a:r>
+          </a:p>
+          <a:p>
+            <a:pPr algn="just"/>
+            <a:endParaRPr lang="en-US" sz="1200" dirty="0">
+              <a:latin typeface="Arial" panose="020B0604020202020204" pitchFamily="34" charset="0"/>
+              <a:cs typeface="Arial" panose="020B0604020202020204" pitchFamily="34" charset="0"/>
+            </a:endParaRPr>
+          </a:p>
+          <a:p>
+            <a:pPr algn="just"/>
+            <a:endParaRPr lang="en-US" sz="1200" dirty="0">
+              <a:latin typeface="Arial" panose="020B0604020202020204" pitchFamily="34" charset="0"/>
+              <a:cs typeface="Arial" panose="020B0604020202020204" pitchFamily="34" charset="0"/>
+            </a:endParaRPr>
+          </a:p>
+          <a:p>
+            <a:pPr algn="just"/>
+            <a:endParaRPr lang="en-US" sz="1200" dirty="0">
+              <a:latin typeface="Arial" panose="020B0604020202020204" pitchFamily="34" charset="0"/>
+              <a:cs typeface="Arial" panose="020B0604020202020204" pitchFamily="34" charset="0"/>
+            </a:endParaRPr>
+          </a:p>
+          <a:p>
+            <a:pPr algn="just"/>
+            <a:endParaRPr lang="en-US" sz="1200" dirty="0">
+              <a:latin typeface="Arial" panose="020B0604020202020204" pitchFamily="34" charset="0"/>
+              <a:cs typeface="Arial" panose="020B0604020202020204" pitchFamily="34" charset="0"/>
+            </a:endParaRPr>
+          </a:p>
+          <a:p>
+            <a:pPr algn="just"/>
+            <a:endParaRPr lang="en-US" sz="1200" dirty="0">
+              <a:latin typeface="Arial" panose="020B0604020202020204" pitchFamily="34" charset="0"/>
+              <a:cs typeface="Arial" panose="020B0604020202020204" pitchFamily="34" charset="0"/>
+            </a:endParaRPr>
+          </a:p>
+          <a:p>
+            <a:pPr algn="just"/>
+            <a:endParaRPr lang="en-US" sz="1200" dirty="0">
+              <a:latin typeface="Arial" panose="020B0604020202020204" pitchFamily="34" charset="0"/>
+              <a:cs typeface="Arial" panose="020B0604020202020204" pitchFamily="34" charset="0"/>
+            </a:endParaRPr>
+          </a:p>
+        </p:txBody>
+      </p:sp>
+      <p:sp>
+        <p:nvSpPr>
+          <p:cNvPr id="5" name="Marcador de pie de página 2">
+            <a:extLst>
+              <a:ext uri="{FF2B5EF4-FFF2-40B4-BE49-F238E27FC236}">
+                <a16:creationId xmlns:a16="http://schemas.microsoft.com/office/drawing/2014/main" id="{ED97C9D0-256C-D4CA-42E7-79330F040B30}"/>
+              </a:ext>
+            </a:extLst>
+          </p:cNvPr>
+          <p:cNvSpPr>
+            <a:spLocks noGrp="1"/>
+          </p:cNvSpPr>
+          <p:nvPr>
+            <p:ph type="ftr" sz="quarter" idx="5"/>
+          </p:nvPr>
+        </p:nvSpPr>
+        <p:spPr>
+          <a:xfrm>
+            <a:off x="609600" y="6457057"/>
+            <a:ext cx="2743200" cy="184666"/>
+          </a:xfrm>
+        </p:spPr>
+        <p:txBody>
+          <a:bodyPr/>
+          <a:lstStyle/>
+          <a:p>
+            <a:pPr marL="12700">
+              <a:spcBef>
+                <a:spcPts val="15"/>
+              </a:spcBef>
+            </a:pPr>
+            <a:r>
+              <a:rPr lang="es-ES" spc="-5"/>
+              <a:t>LAB 3. INTERFEROMETERS I</a:t>
+            </a:r>
+            <a:endParaRPr lang="es-ES" spc="-5" dirty="0"/>
+          </a:p>
+        </p:txBody>
+      </p:sp>
+    </p:spTree>
+    <p:extLst>
+      <p:ext uri="{BB962C8B-B14F-4D97-AF65-F5344CB8AC3E}">
+        <p14:creationId xmlns:p14="http://schemas.microsoft.com/office/powerpoint/2010/main" val="3666436811"/>
+      </p:ext>
+    </p:extLst>
+  </p:cSld>
+  <p:clrMapOvr>
+    <a:masterClrMapping/>
+  </p:clrMapOvr>
+</p:sld>
+</file>
+
+<file path=ppt/slides/slide22.xml><?xml version="1.0" encoding="utf-8"?>
+<p:sld xmlns:a="http://schemas.openxmlformats.org/drawingml/2006/main" xmlns:r="http://schemas.openxmlformats.org/officeDocument/2006/relationships" xmlns:p="http://schemas.openxmlformats.org/presentationml/2006/main">
+  <p:cSld>
+    <p:spTree>
+      <p:nvGrpSpPr>
+        <p:cNvPr id="1" name="">
+          <a:extLst>
+            <a:ext uri="{FF2B5EF4-FFF2-40B4-BE49-F238E27FC236}">
+              <a16:creationId xmlns:a16="http://schemas.microsoft.com/office/drawing/2014/main" id="{8C6E35A3-9BF1-5F47-9801-DFF295E8E389}"/>
+            </a:ext>
+          </a:extLst>
+        </p:cNvPr>
+        <p:cNvGrpSpPr/>
+        <p:nvPr/>
+      </p:nvGrpSpPr>
+      <p:grpSpPr>
+        <a:xfrm>
+          <a:off x="0" y="0"/>
+          <a:ext cx="0" cy="0"/>
+          <a:chOff x="0" y="0"/>
+          <a:chExt cx="0" cy="0"/>
+        </a:xfrm>
+      </p:grpSpPr>
+      <p:sp>
+        <p:nvSpPr>
+          <p:cNvPr id="16" name="object 16">
+            <a:extLst>
+              <a:ext uri="{FF2B5EF4-FFF2-40B4-BE49-F238E27FC236}">
+                <a16:creationId xmlns:a16="http://schemas.microsoft.com/office/drawing/2014/main" id="{EEAC3089-0AD5-0B13-E615-6C4B1CB912F8}"/>
+              </a:ext>
+            </a:extLst>
+          </p:cNvPr>
+          <p:cNvSpPr txBox="1">
+            <a:spLocks noGrp="1"/>
+          </p:cNvSpPr>
+          <p:nvPr>
+            <p:ph type="title"/>
+          </p:nvPr>
+        </p:nvSpPr>
+        <p:spPr>
+          <a:xfrm>
+            <a:off x="685800" y="408883"/>
+            <a:ext cx="10994410" cy="782265"/>
+          </a:xfrm>
+          <a:prstGeom prst="rect">
+            <a:avLst/>
+          </a:prstGeom>
+        </p:spPr>
+        <p:txBody>
+          <a:bodyPr vert="horz" wrap="square" lIns="0" tIns="12700" rIns="0" bIns="0" rtlCol="0">
+            <a:spAutoFit/>
+          </a:bodyPr>
+          <a:lstStyle/>
+          <a:p>
+            <a:pPr marL="12700">
+              <a:lnSpc>
+                <a:spcPct val="100000"/>
+              </a:lnSpc>
+              <a:spcBef>
+                <a:spcPts val="100"/>
+              </a:spcBef>
+            </a:pPr>
+            <a:r>
+              <a:rPr lang="en-US" sz="2400" b="1" dirty="0"/>
+              <a:t>ASSESSMENT #3 </a:t>
+            </a:r>
+            <a:r>
+              <a:rPr lang="en-US" sz="2500" dirty="0"/>
+              <a:t>– SAX implementation – COMPARACION UNBALNCED DELAY</a:t>
+            </a:r>
+            <a:br>
+              <a:rPr lang="es-ES" sz="2500" spc="-5" dirty="0">
+                <a:latin typeface="+mj-lt"/>
+                <a:cs typeface="Lucida Sans"/>
+              </a:rPr>
+            </a:br>
+            <a:endParaRPr sz="2500" b="0" dirty="0">
+              <a:latin typeface="+mj-lt"/>
+              <a:cs typeface="Lucida Sans"/>
+            </a:endParaRPr>
+          </a:p>
+        </p:txBody>
+      </p:sp>
+      <p:pic>
+        <p:nvPicPr>
+          <p:cNvPr id="83" name="Gráfico 82">
+            <a:extLst>
+              <a:ext uri="{FF2B5EF4-FFF2-40B4-BE49-F238E27FC236}">
+                <a16:creationId xmlns:a16="http://schemas.microsoft.com/office/drawing/2014/main" id="{0A8BB54B-DEB2-B2FA-378D-E79C6602241B}"/>
+              </a:ext>
+            </a:extLst>
+          </p:cNvPr>
+          <p:cNvPicPr>
+            <a:picLocks noChangeAspect="1"/>
+          </p:cNvPicPr>
+          <p:nvPr/>
+        </p:nvPicPr>
+        <p:blipFill>
+          <a:blip r:embed="rId3">
+            <a:extLst>
+              <a:ext uri="{96DAC541-7B7A-43D3-8B79-37D633B846F1}">
+                <asvg:svgBlip xmlns:asvg="http://schemas.microsoft.com/office/drawing/2016/SVG/main" r:embed="rId4"/>
+              </a:ext>
+            </a:extLst>
+          </a:blip>
+          <a:stretch>
+            <a:fillRect/>
+          </a:stretch>
+        </p:blipFill>
+        <p:spPr>
+          <a:xfrm>
+            <a:off x="5045006" y="6356057"/>
+            <a:ext cx="6409575" cy="363174"/>
+          </a:xfrm>
+          <a:prstGeom prst="rect">
+            <a:avLst/>
+          </a:prstGeom>
+        </p:spPr>
+      </p:pic>
+      <p:sp>
+        <p:nvSpPr>
+          <p:cNvPr id="84" name="Marcador de número de diapositiva 83">
+            <a:extLst>
+              <a:ext uri="{FF2B5EF4-FFF2-40B4-BE49-F238E27FC236}">
+                <a16:creationId xmlns:a16="http://schemas.microsoft.com/office/drawing/2014/main" id="{2B2F4FC1-6E2C-FC7B-0232-565FF94B9D52}"/>
+              </a:ext>
+            </a:extLst>
+          </p:cNvPr>
+          <p:cNvSpPr>
+            <a:spLocks noGrp="1"/>
+          </p:cNvSpPr>
+          <p:nvPr>
+            <p:ph type="sldNum" sz="quarter" idx="7"/>
+          </p:nvPr>
+        </p:nvSpPr>
+        <p:spPr/>
+        <p:txBody>
+          <a:bodyPr/>
+          <a:lstStyle/>
+          <a:p>
+            <a:fld id="{B6F15528-21DE-4FAA-801E-634DDDAF4B2B}" type="slidenum">
+              <a:rPr lang="es-ES" smtClean="0"/>
+              <a:t>22</a:t>
+            </a:fld>
+            <a:endParaRPr lang="es-ES"/>
+          </a:p>
+        </p:txBody>
+      </p:sp>
+      <p:sp>
+        <p:nvSpPr>
+          <p:cNvPr id="5" name="Marcador de pie de página 2">
+            <a:extLst>
+              <a:ext uri="{FF2B5EF4-FFF2-40B4-BE49-F238E27FC236}">
+                <a16:creationId xmlns:a16="http://schemas.microsoft.com/office/drawing/2014/main" id="{0B187D9F-4617-CAA1-AB5F-A1A1DF376686}"/>
+              </a:ext>
+            </a:extLst>
+          </p:cNvPr>
+          <p:cNvSpPr>
+            <a:spLocks noGrp="1"/>
+          </p:cNvSpPr>
+          <p:nvPr>
+            <p:ph type="ftr" sz="quarter" idx="5"/>
+          </p:nvPr>
+        </p:nvSpPr>
+        <p:spPr>
+          <a:xfrm>
+            <a:off x="609600" y="6457057"/>
+            <a:ext cx="2743200" cy="184666"/>
+          </a:xfrm>
+        </p:spPr>
+        <p:txBody>
+          <a:bodyPr/>
+          <a:lstStyle/>
+          <a:p>
+            <a:pPr marL="12700">
+              <a:spcBef>
+                <a:spcPts val="15"/>
+              </a:spcBef>
+            </a:pPr>
+            <a:r>
+              <a:rPr lang="es-ES" spc="-5"/>
+              <a:t>LAB 3. INTERFEROMETERS I</a:t>
+            </a:r>
+            <a:endParaRPr lang="es-ES" spc="-5" dirty="0"/>
+          </a:p>
+        </p:txBody>
+      </p:sp>
+      <p:pic>
+        <p:nvPicPr>
+          <p:cNvPr id="6" name="Imagen 5" descr="Gráfico, Gráfico de líneas&#10;&#10;El contenido generado por IA puede ser incorrecto.">
+            <a:extLst>
+              <a:ext uri="{FF2B5EF4-FFF2-40B4-BE49-F238E27FC236}">
+                <a16:creationId xmlns:a16="http://schemas.microsoft.com/office/drawing/2014/main" id="{39B777BC-CA70-04DA-B486-32038DED4083}"/>
+              </a:ext>
+            </a:extLst>
+          </p:cNvPr>
+          <p:cNvPicPr>
+            <a:picLocks noChangeAspect="1"/>
+          </p:cNvPicPr>
+          <p:nvPr/>
+        </p:nvPicPr>
+        <p:blipFill>
+          <a:blip r:embed="rId5"/>
+          <a:stretch>
+            <a:fillRect/>
+          </a:stretch>
+        </p:blipFill>
+        <p:spPr>
+          <a:xfrm>
+            <a:off x="381000" y="2057400"/>
+            <a:ext cx="4588528" cy="3689072"/>
+          </a:xfrm>
+          <a:prstGeom prst="rect">
+            <a:avLst/>
+          </a:prstGeom>
+        </p:spPr>
+      </p:pic>
+      <p:pic>
+        <p:nvPicPr>
+          <p:cNvPr id="7" name="Imagen 6">
+            <a:extLst>
+              <a:ext uri="{FF2B5EF4-FFF2-40B4-BE49-F238E27FC236}">
+                <a16:creationId xmlns:a16="http://schemas.microsoft.com/office/drawing/2014/main" id="{FDC1DC3C-AF70-B556-A85C-BC2BC1BF23A0}"/>
+              </a:ext>
+            </a:extLst>
+          </p:cNvPr>
+          <p:cNvPicPr>
+            <a:picLocks noChangeAspect="1"/>
+          </p:cNvPicPr>
+          <p:nvPr/>
+        </p:nvPicPr>
+        <p:blipFill>
+          <a:blip r:embed="rId6">
+            <a:extLst>
+              <a:ext uri="{28A0092B-C50C-407E-A947-70E740481C1C}">
+                <a14:useLocalDpi xmlns:a14="http://schemas.microsoft.com/office/drawing/2010/main" val="0"/>
+              </a:ext>
+            </a:extLst>
+          </a:blip>
+          <a:srcRect t="154" b="154"/>
+          <a:stretch/>
+        </p:blipFill>
+        <p:spPr>
+          <a:xfrm>
+            <a:off x="5257800" y="2147563"/>
+            <a:ext cx="4343400" cy="3483584"/>
+          </a:xfrm>
+          <a:prstGeom prst="rect">
+            <a:avLst/>
+          </a:prstGeom>
+        </p:spPr>
+      </p:pic>
+      <p:pic>
+        <p:nvPicPr>
+          <p:cNvPr id="9" name="Imagen 8" descr="Texto&#10;&#10;El contenido generado por IA puede ser incorrecto.">
+            <a:extLst>
+              <a:ext uri="{FF2B5EF4-FFF2-40B4-BE49-F238E27FC236}">
+                <a16:creationId xmlns:a16="http://schemas.microsoft.com/office/drawing/2014/main" id="{04861998-0FEC-F76F-BD2B-686867E5EEC9}"/>
+              </a:ext>
+            </a:extLst>
+          </p:cNvPr>
+          <p:cNvPicPr>
+            <a:picLocks noChangeAspect="1"/>
+          </p:cNvPicPr>
+          <p:nvPr/>
+        </p:nvPicPr>
+        <p:blipFill>
+          <a:blip r:embed="rId7"/>
+          <a:stretch>
+            <a:fillRect/>
+          </a:stretch>
+        </p:blipFill>
+        <p:spPr>
+          <a:xfrm>
+            <a:off x="511790" y="781782"/>
+            <a:ext cx="5993339" cy="1255193"/>
+          </a:xfrm>
+          <a:prstGeom prst="rect">
+            <a:avLst/>
+          </a:prstGeom>
+        </p:spPr>
+      </p:pic>
+      <p:sp>
+        <p:nvSpPr>
+          <p:cNvPr id="11" name="CuadroTexto 10">
+            <a:extLst>
+              <a:ext uri="{FF2B5EF4-FFF2-40B4-BE49-F238E27FC236}">
+                <a16:creationId xmlns:a16="http://schemas.microsoft.com/office/drawing/2014/main" id="{2428D1E7-CAAA-F44F-B9B2-9E81AC066D01}"/>
+              </a:ext>
+            </a:extLst>
+          </p:cNvPr>
+          <p:cNvSpPr txBox="1"/>
+          <p:nvPr/>
+        </p:nvSpPr>
+        <p:spPr>
+          <a:xfrm>
+            <a:off x="6934200" y="1093557"/>
+            <a:ext cx="6128326" cy="923330"/>
+          </a:xfrm>
+          <a:prstGeom prst="rect">
+            <a:avLst/>
+          </a:prstGeom>
+          <a:noFill/>
+        </p:spPr>
+        <p:txBody>
+          <a:bodyPr wrap="square">
+            <a:spAutoFit/>
+          </a:bodyPr>
+          <a:lstStyle/>
+          <a:p>
+            <a:r>
+              <a:rPr lang="en-US" dirty="0"/>
+              <a:t>Una </a:t>
+            </a:r>
+            <a:r>
+              <a:rPr lang="en-US" dirty="0" err="1"/>
+              <a:t>diferencia</a:t>
+            </a:r>
+            <a:r>
+              <a:rPr lang="en-US" dirty="0"/>
+              <a:t> de longitude de 20um entre </a:t>
+            </a:r>
+            <a:r>
+              <a:rPr lang="en-US" dirty="0" err="1"/>
+              <a:t>los</a:t>
+            </a:r>
+            <a:r>
+              <a:rPr lang="en-US" dirty="0"/>
+              <a:t> </a:t>
+            </a:r>
+            <a:r>
+              <a:rPr lang="en-US" dirty="0" err="1"/>
+              <a:t>brazos</a:t>
+            </a:r>
+            <a:r>
+              <a:rPr lang="en-US" dirty="0"/>
+              <a:t>.</a:t>
+            </a:r>
+          </a:p>
+          <a:p>
+            <a:r>
+              <a:rPr lang="en-US" dirty="0"/>
+              <a:t>Como </a:t>
+            </a:r>
+            <a:r>
+              <a:rPr lang="en-US" dirty="0" err="1"/>
+              <a:t>podemos</a:t>
+            </a:r>
+            <a:r>
+              <a:rPr lang="en-US" dirty="0"/>
+              <a:t> </a:t>
+            </a:r>
+            <a:r>
+              <a:rPr lang="en-US" dirty="0" err="1"/>
+              <a:t>observar</a:t>
+            </a:r>
+            <a:r>
+              <a:rPr lang="en-US" dirty="0"/>
+              <a:t> </a:t>
+            </a:r>
+            <a:r>
+              <a:rPr lang="en-US" dirty="0" err="1"/>
+              <a:t>el</a:t>
+            </a:r>
+            <a:r>
+              <a:rPr lang="en-US" dirty="0"/>
+              <a:t> </a:t>
+            </a:r>
+            <a:r>
+              <a:rPr lang="en-US" dirty="0" err="1"/>
+              <a:t>comportamiento</a:t>
+            </a:r>
+            <a:r>
+              <a:rPr lang="en-US" dirty="0"/>
+              <a:t> a </a:t>
+            </a:r>
+            <a:r>
+              <a:rPr lang="en-US" dirty="0" err="1"/>
+              <a:t>primera</a:t>
+            </a:r>
+            <a:endParaRPr lang="en-US" dirty="0"/>
+          </a:p>
+          <a:p>
+            <a:r>
+              <a:rPr lang="en-US" dirty="0"/>
+              <a:t>vista es </a:t>
+            </a:r>
+            <a:r>
+              <a:rPr lang="en-US" dirty="0" err="1"/>
+              <a:t>el</a:t>
+            </a:r>
+            <a:r>
+              <a:rPr lang="en-US" dirty="0"/>
+              <a:t> </a:t>
+            </a:r>
+            <a:r>
+              <a:rPr lang="en-US" dirty="0" err="1"/>
+              <a:t>mismo</a:t>
+            </a:r>
+            <a:r>
+              <a:rPr lang="en-US" dirty="0"/>
+              <a:t>.</a:t>
+            </a:r>
+            <a:endParaRPr lang="es-ES" dirty="0"/>
+          </a:p>
+        </p:txBody>
+      </p:sp>
+    </p:spTree>
+    <p:extLst>
+      <p:ext uri="{BB962C8B-B14F-4D97-AF65-F5344CB8AC3E}">
+        <p14:creationId xmlns:p14="http://schemas.microsoft.com/office/powerpoint/2010/main" val="3653090420"/>
+      </p:ext>
+    </p:extLst>
+  </p:cSld>
+  <p:clrMapOvr>
+    <a:masterClrMapping/>
+  </p:clrMapOvr>
+</p:sld>
+</file>
+
+<file path=ppt/slides/slide23.xml><?xml version="1.0" encoding="utf-8"?>
+<p:sld xmlns:a="http://schemas.openxmlformats.org/drawingml/2006/main" xmlns:r="http://schemas.openxmlformats.org/officeDocument/2006/relationships" xmlns:p="http://schemas.openxmlformats.org/presentationml/2006/main">
+  <p:cSld>
+    <p:spTree>
+      <p:nvGrpSpPr>
+        <p:cNvPr id="1" name="">
+          <a:extLst>
+            <a:ext uri="{FF2B5EF4-FFF2-40B4-BE49-F238E27FC236}">
+              <a16:creationId xmlns:a16="http://schemas.microsoft.com/office/drawing/2014/main" id="{25434E70-43B1-3881-1771-20FB4358471D}"/>
+            </a:ext>
+          </a:extLst>
+        </p:cNvPr>
+        <p:cNvGrpSpPr/>
+        <p:nvPr/>
+      </p:nvGrpSpPr>
+      <p:grpSpPr>
+        <a:xfrm>
+          <a:off x="0" y="0"/>
+          <a:ext cx="0" cy="0"/>
+          <a:chOff x="0" y="0"/>
+          <a:chExt cx="0" cy="0"/>
+        </a:xfrm>
+      </p:grpSpPr>
+      <p:sp>
+        <p:nvSpPr>
+          <p:cNvPr id="16" name="object 16">
+            <a:extLst>
+              <a:ext uri="{FF2B5EF4-FFF2-40B4-BE49-F238E27FC236}">
+                <a16:creationId xmlns:a16="http://schemas.microsoft.com/office/drawing/2014/main" id="{742C31CE-19F0-B995-0997-9A2D6A879BF7}"/>
+              </a:ext>
+            </a:extLst>
+          </p:cNvPr>
+          <p:cNvSpPr txBox="1">
+            <a:spLocks noGrp="1"/>
+          </p:cNvSpPr>
+          <p:nvPr>
+            <p:ph type="title"/>
+          </p:nvPr>
+        </p:nvSpPr>
+        <p:spPr>
+          <a:xfrm>
+            <a:off x="685800" y="408883"/>
+            <a:ext cx="10994410" cy="397545"/>
+          </a:xfrm>
+          <a:prstGeom prst="rect">
+            <a:avLst/>
+          </a:prstGeom>
+        </p:spPr>
+        <p:txBody>
+          <a:bodyPr vert="horz" wrap="square" lIns="0" tIns="12700" rIns="0" bIns="0" rtlCol="0">
+            <a:spAutoFit/>
+          </a:bodyPr>
+          <a:lstStyle/>
+          <a:p>
+            <a:pPr marL="12700">
+              <a:lnSpc>
+                <a:spcPct val="100000"/>
+              </a:lnSpc>
+              <a:spcBef>
+                <a:spcPts val="100"/>
+              </a:spcBef>
+            </a:pPr>
+            <a:r>
+              <a:rPr lang="en-US" sz="2500" dirty="0"/>
+              <a:t>Extra assessments </a:t>
+            </a:r>
+            <a:endParaRPr lang="en-US" sz="2500" b="0" dirty="0">
+              <a:latin typeface="+mj-lt"/>
+              <a:cs typeface="Lucida Sans"/>
+            </a:endParaRPr>
+          </a:p>
+        </p:txBody>
+      </p:sp>
+      <p:pic>
+        <p:nvPicPr>
+          <p:cNvPr id="83" name="Gráfico 82">
+            <a:extLst>
+              <a:ext uri="{FF2B5EF4-FFF2-40B4-BE49-F238E27FC236}">
+                <a16:creationId xmlns:a16="http://schemas.microsoft.com/office/drawing/2014/main" id="{D688A609-F3DC-EE34-C536-683E70F32EAE}"/>
+              </a:ext>
+            </a:extLst>
+          </p:cNvPr>
+          <p:cNvPicPr>
+            <a:picLocks noChangeAspect="1"/>
+          </p:cNvPicPr>
+          <p:nvPr/>
+        </p:nvPicPr>
+        <p:blipFill>
+          <a:blip r:embed="rId3">
+            <a:extLst>
+              <a:ext uri="{96DAC541-7B7A-43D3-8B79-37D633B846F1}">
+                <asvg:svgBlip xmlns:asvg="http://schemas.microsoft.com/office/drawing/2016/SVG/main" r:embed="rId4"/>
+              </a:ext>
+            </a:extLst>
+          </a:blip>
+          <a:stretch>
+            <a:fillRect/>
+          </a:stretch>
+        </p:blipFill>
+        <p:spPr>
+          <a:xfrm>
+            <a:off x="5045006" y="6356057"/>
+            <a:ext cx="6409575" cy="363174"/>
+          </a:xfrm>
+          <a:prstGeom prst="rect">
+            <a:avLst/>
+          </a:prstGeom>
+        </p:spPr>
+      </p:pic>
+      <p:sp>
+        <p:nvSpPr>
+          <p:cNvPr id="84" name="Marcador de número de diapositiva 83">
+            <a:extLst>
+              <a:ext uri="{FF2B5EF4-FFF2-40B4-BE49-F238E27FC236}">
+                <a16:creationId xmlns:a16="http://schemas.microsoft.com/office/drawing/2014/main" id="{B6C672C6-89D4-7E67-2B94-811D081786A7}"/>
+              </a:ext>
+            </a:extLst>
+          </p:cNvPr>
+          <p:cNvSpPr>
+            <a:spLocks noGrp="1"/>
+          </p:cNvSpPr>
+          <p:nvPr>
+            <p:ph type="sldNum" sz="quarter" idx="7"/>
+          </p:nvPr>
+        </p:nvSpPr>
+        <p:spPr/>
+        <p:txBody>
+          <a:bodyPr/>
+          <a:lstStyle/>
+          <a:p>
+            <a:fld id="{B6F15528-21DE-4FAA-801E-634DDDAF4B2B}" type="slidenum">
+              <a:rPr lang="es-ES" smtClean="0"/>
+              <a:t>23</a:t>
+            </a:fld>
+            <a:endParaRPr lang="es-ES"/>
+          </a:p>
+        </p:txBody>
+      </p:sp>
+      <p:sp>
+        <p:nvSpPr>
+          <p:cNvPr id="4" name="Marcador de texto 2">
+            <a:extLst>
+              <a:ext uri="{FF2B5EF4-FFF2-40B4-BE49-F238E27FC236}">
+                <a16:creationId xmlns:a16="http://schemas.microsoft.com/office/drawing/2014/main" id="{D838A93A-BFC8-0124-93CE-FDC193435A0C}"/>
+              </a:ext>
+            </a:extLst>
+          </p:cNvPr>
+          <p:cNvSpPr txBox="1">
+            <a:spLocks/>
+          </p:cNvSpPr>
+          <p:nvPr/>
+        </p:nvSpPr>
+        <p:spPr>
+          <a:xfrm>
+            <a:off x="608012" y="1295400"/>
+            <a:ext cx="11048999" cy="4958137"/>
+          </a:xfrm>
+          <a:prstGeom prst="rect">
+            <a:avLst/>
+          </a:prstGeom>
+        </p:spPr>
+        <p:txBody>
+          <a:bodyPr>
+            <a:normAutofit/>
+          </a:bodyPr>
+          <a:lstStyle>
+            <a:lvl1pPr marL="0">
+              <a:defRPr>
+                <a:latin typeface="+mn-lt"/>
+                <a:ea typeface="+mn-ea"/>
+                <a:cs typeface="+mn-cs"/>
+              </a:defRPr>
+            </a:lvl1pPr>
+            <a:lvl2pPr marL="457200">
+              <a:defRPr>
+                <a:latin typeface="+mn-lt"/>
+                <a:ea typeface="+mn-ea"/>
+                <a:cs typeface="+mn-cs"/>
+              </a:defRPr>
+            </a:lvl2pPr>
+            <a:lvl3pPr marL="914400">
+              <a:defRPr>
+                <a:latin typeface="+mn-lt"/>
+                <a:ea typeface="+mn-ea"/>
+                <a:cs typeface="+mn-cs"/>
+              </a:defRPr>
+            </a:lvl3pPr>
+            <a:lvl4pPr marL="1371600">
+              <a:defRPr>
+                <a:latin typeface="+mn-lt"/>
+                <a:ea typeface="+mn-ea"/>
+                <a:cs typeface="+mn-cs"/>
+              </a:defRPr>
+            </a:lvl4pPr>
+            <a:lvl5pPr marL="1828800">
+              <a:defRPr>
+                <a:latin typeface="+mn-lt"/>
+                <a:ea typeface="+mn-ea"/>
+                <a:cs typeface="+mn-cs"/>
+              </a:defRPr>
+            </a:lvl5pPr>
+            <a:lvl6pPr marL="2286000">
+              <a:defRPr>
+                <a:latin typeface="+mn-lt"/>
+                <a:ea typeface="+mn-ea"/>
+                <a:cs typeface="+mn-cs"/>
+              </a:defRPr>
+            </a:lvl6pPr>
+            <a:lvl7pPr marL="2743200">
+              <a:defRPr>
+                <a:latin typeface="+mn-lt"/>
+                <a:ea typeface="+mn-ea"/>
+                <a:cs typeface="+mn-cs"/>
+              </a:defRPr>
+            </a:lvl7pPr>
+            <a:lvl8pPr marL="3200400">
+              <a:defRPr>
+                <a:latin typeface="+mn-lt"/>
+                <a:ea typeface="+mn-ea"/>
+                <a:cs typeface="+mn-cs"/>
+              </a:defRPr>
+            </a:lvl8pPr>
+            <a:lvl9pPr marL="3657600">
+              <a:defRPr>
+                <a:latin typeface="+mn-lt"/>
+                <a:ea typeface="+mn-ea"/>
+                <a:cs typeface="+mn-cs"/>
+              </a:defRPr>
+            </a:lvl9pPr>
+          </a:lstStyle>
+          <a:p>
+            <a:pPr marL="0" indent="0">
+              <a:buNone/>
+            </a:pPr>
+            <a:r>
+              <a:rPr lang="en-US" b="1" dirty="0"/>
+              <a:t>Assessment 4</a:t>
+            </a:r>
+            <a:r>
+              <a:rPr lang="en-US" dirty="0"/>
+              <a:t>. Design an MZI for filtering at a specific wavelength. Calculate and adjust the arm lengths to configure the MZI to have a maximum transmission at 1550 nm.</a:t>
+            </a:r>
+          </a:p>
+          <a:p>
+            <a:endParaRPr lang="en-US" b="1" dirty="0"/>
+          </a:p>
+          <a:p>
+            <a:r>
+              <a:rPr lang="en-US" b="1" dirty="0"/>
+              <a:t>Assessment 5. </a:t>
+            </a:r>
+            <a:r>
+              <a:rPr lang="en-US" dirty="0"/>
+              <a:t>Let's see how the response of the MZI varies with the effective index. Vary the effective index of one of the arms and analyze how the spectrum shifts. To do this, you can use the data provided in the .txt files entitled ‘</a:t>
+            </a:r>
+            <a:r>
+              <a:rPr lang="en-US" dirty="0" err="1"/>
+              <a:t>SiN</a:t>
+            </a:r>
+            <a:r>
+              <a:rPr lang="en-US" dirty="0"/>
+              <a:t>’. Can you give an example of an application where this configuration is used?</a:t>
+            </a:r>
+          </a:p>
+          <a:p>
+            <a:pPr marL="0" indent="0">
+              <a:buNone/>
+            </a:pPr>
+            <a:endParaRPr lang="en-US" dirty="0"/>
+          </a:p>
+          <a:p>
+            <a:r>
+              <a:rPr lang="en-US" b="1" dirty="0"/>
+              <a:t>Advanced level assessment.</a:t>
+            </a:r>
+            <a:r>
+              <a:rPr lang="en-US" dirty="0"/>
+              <a:t> Explore how cascading two MZIs affects the transmission spectrum. To do so, design a system in which two MZIs are cascaded. Simulate and observe the spectrum, explaining how the transmission peaks behave</a:t>
+            </a:r>
+            <a:r>
+              <a:rPr lang="en-US" b="1" dirty="0"/>
+              <a:t>.</a:t>
+            </a:r>
+          </a:p>
+          <a:p>
+            <a:pPr algn="just"/>
+            <a:endParaRPr lang="en-US" sz="2000" kern="0" dirty="0">
+              <a:solidFill>
+                <a:sysClr val="windowText" lastClr="000000"/>
+              </a:solidFill>
+            </a:endParaRPr>
+          </a:p>
+        </p:txBody>
+      </p:sp>
+      <p:sp>
+        <p:nvSpPr>
+          <p:cNvPr id="2" name="CuadroTexto 1">
+            <a:extLst>
+              <a:ext uri="{FF2B5EF4-FFF2-40B4-BE49-F238E27FC236}">
+                <a16:creationId xmlns:a16="http://schemas.microsoft.com/office/drawing/2014/main" id="{FDE3A197-9508-F9F1-1FEB-FF883D78C151}"/>
+              </a:ext>
+            </a:extLst>
+          </p:cNvPr>
+          <p:cNvSpPr txBox="1"/>
+          <p:nvPr/>
+        </p:nvSpPr>
+        <p:spPr>
+          <a:xfrm>
+            <a:off x="609441" y="4860334"/>
+            <a:ext cx="11199971" cy="1200329"/>
+          </a:xfrm>
+          <a:prstGeom prst="rect">
+            <a:avLst/>
+          </a:prstGeom>
+          <a:solidFill>
+            <a:schemeClr val="bg1">
+              <a:lumMod val="95000"/>
+            </a:schemeClr>
+          </a:solidFill>
+          <a:ln w="28575">
+            <a:solidFill>
+              <a:srgbClr val="E0700D"/>
+            </a:solidFill>
+          </a:ln>
+        </p:spPr>
+        <p:txBody>
+          <a:bodyPr wrap="square" rtlCol="0">
+            <a:spAutoFit/>
+          </a:bodyPr>
+          <a:lstStyle/>
+          <a:p>
+            <a:pPr algn="just"/>
+            <a:r>
+              <a:rPr lang="en-US" sz="1200" dirty="0">
+                <a:latin typeface="Arial" panose="020B0604020202020204" pitchFamily="34" charset="0"/>
+                <a:cs typeface="Arial" panose="020B0604020202020204" pitchFamily="34" charset="0"/>
+              </a:rPr>
+              <a:t>Document all your results</a:t>
+            </a:r>
+          </a:p>
+          <a:p>
+            <a:pPr algn="just"/>
+            <a:endParaRPr lang="en-US" sz="1200" dirty="0">
+              <a:latin typeface="Arial" panose="020B0604020202020204" pitchFamily="34" charset="0"/>
+              <a:cs typeface="Arial" panose="020B0604020202020204" pitchFamily="34" charset="0"/>
+            </a:endParaRPr>
+          </a:p>
+          <a:p>
+            <a:pPr algn="just"/>
+            <a:endParaRPr lang="en-US" sz="1200" dirty="0">
+              <a:latin typeface="Arial" panose="020B0604020202020204" pitchFamily="34" charset="0"/>
+              <a:cs typeface="Arial" panose="020B0604020202020204" pitchFamily="34" charset="0"/>
+            </a:endParaRPr>
+          </a:p>
+          <a:p>
+            <a:pPr algn="just"/>
+            <a:endParaRPr lang="en-US" sz="1200" dirty="0">
+              <a:latin typeface="Arial" panose="020B0604020202020204" pitchFamily="34" charset="0"/>
+              <a:cs typeface="Arial" panose="020B0604020202020204" pitchFamily="34" charset="0"/>
+            </a:endParaRPr>
+          </a:p>
+          <a:p>
+            <a:pPr algn="just"/>
+            <a:endParaRPr lang="en-US" sz="1200" dirty="0">
+              <a:latin typeface="Arial" panose="020B0604020202020204" pitchFamily="34" charset="0"/>
+              <a:cs typeface="Arial" panose="020B0604020202020204" pitchFamily="34" charset="0"/>
+            </a:endParaRPr>
+          </a:p>
+          <a:p>
+            <a:pPr algn="just"/>
+            <a:endParaRPr lang="en-US" sz="1200" dirty="0">
+              <a:latin typeface="Arial" panose="020B0604020202020204" pitchFamily="34" charset="0"/>
+              <a:cs typeface="Arial" panose="020B0604020202020204" pitchFamily="34" charset="0"/>
+            </a:endParaRPr>
+          </a:p>
+        </p:txBody>
+      </p:sp>
+      <p:sp>
+        <p:nvSpPr>
+          <p:cNvPr id="6" name="Marcador de pie de página 2">
+            <a:extLst>
+              <a:ext uri="{FF2B5EF4-FFF2-40B4-BE49-F238E27FC236}">
+                <a16:creationId xmlns:a16="http://schemas.microsoft.com/office/drawing/2014/main" id="{04C1A7E9-6C33-172D-E7B9-CCF643221E6A}"/>
+              </a:ext>
+            </a:extLst>
+          </p:cNvPr>
+          <p:cNvSpPr>
+            <a:spLocks noGrp="1"/>
+          </p:cNvSpPr>
+          <p:nvPr>
+            <p:ph type="ftr" sz="quarter" idx="5"/>
+          </p:nvPr>
+        </p:nvSpPr>
+        <p:spPr>
+          <a:xfrm>
+            <a:off x="609600" y="6457057"/>
+            <a:ext cx="2743200" cy="184666"/>
+          </a:xfrm>
+        </p:spPr>
+        <p:txBody>
+          <a:bodyPr/>
+          <a:lstStyle/>
+          <a:p>
+            <a:pPr marL="12700">
+              <a:spcBef>
+                <a:spcPts val="15"/>
+              </a:spcBef>
+            </a:pPr>
+            <a:r>
+              <a:rPr lang="es-ES" spc="-5"/>
+              <a:t>LAB 3. INTERFEROMETERS I</a:t>
+            </a:r>
+            <a:endParaRPr lang="es-ES" spc="-5" dirty="0"/>
+          </a:p>
+        </p:txBody>
+      </p:sp>
+    </p:spTree>
+    <p:extLst>
+      <p:ext uri="{BB962C8B-B14F-4D97-AF65-F5344CB8AC3E}">
+        <p14:creationId xmlns:p14="http://schemas.microsoft.com/office/powerpoint/2010/main" val="3660438245"/>
+      </p:ext>
+    </p:extLst>
+  </p:cSld>
+  <p:clrMapOvr>
+    <a:masterClrMapping/>
+  </p:clrMapOvr>
+</p:sld>
+</file>
+
+<file path=ppt/slides/slide24.xml><?xml version="1.0" encoding="utf-8"?>
+<p:sld xmlns:a="http://schemas.openxmlformats.org/drawingml/2006/main" xmlns:r="http://schemas.openxmlformats.org/officeDocument/2006/relationships" xmlns:p="http://schemas.openxmlformats.org/presentationml/2006/main">
+  <p:cSld>
+    <p:spTree>
+      <p:nvGrpSpPr>
+        <p:cNvPr id="1" name="">
+          <a:extLst>
+            <a:ext uri="{FF2B5EF4-FFF2-40B4-BE49-F238E27FC236}">
+              <a16:creationId xmlns:a16="http://schemas.microsoft.com/office/drawing/2014/main" id="{03B0A3F0-EA15-DCE9-5C9B-2750BC4FFEE1}"/>
+            </a:ext>
+          </a:extLst>
+        </p:cNvPr>
+        <p:cNvGrpSpPr/>
+        <p:nvPr/>
+      </p:nvGrpSpPr>
+      <p:grpSpPr>
+        <a:xfrm>
+          <a:off x="0" y="0"/>
+          <a:ext cx="0" cy="0"/>
+          <a:chOff x="0" y="0"/>
+          <a:chExt cx="0" cy="0"/>
+        </a:xfrm>
+      </p:grpSpPr>
+      <p:sp>
+        <p:nvSpPr>
+          <p:cNvPr id="16" name="object 16">
+            <a:extLst>
+              <a:ext uri="{FF2B5EF4-FFF2-40B4-BE49-F238E27FC236}">
+                <a16:creationId xmlns:a16="http://schemas.microsoft.com/office/drawing/2014/main" id="{460F6957-F761-CCA5-0129-63FB8B3EAAC8}"/>
+              </a:ext>
+            </a:extLst>
+          </p:cNvPr>
+          <p:cNvSpPr txBox="1">
+            <a:spLocks noGrp="1"/>
+          </p:cNvSpPr>
+          <p:nvPr>
+            <p:ph type="title"/>
+          </p:nvPr>
+        </p:nvSpPr>
+        <p:spPr>
+          <a:xfrm>
+            <a:off x="685800" y="408883"/>
+            <a:ext cx="10994410" cy="397545"/>
+          </a:xfrm>
+          <a:prstGeom prst="rect">
+            <a:avLst/>
+          </a:prstGeom>
+        </p:spPr>
+        <p:txBody>
+          <a:bodyPr vert="horz" wrap="square" lIns="0" tIns="12700" rIns="0" bIns="0" rtlCol="0">
+            <a:spAutoFit/>
+          </a:bodyPr>
+          <a:lstStyle/>
+          <a:p>
+            <a:pPr marL="12700">
+              <a:lnSpc>
+                <a:spcPct val="100000"/>
+              </a:lnSpc>
+              <a:spcBef>
+                <a:spcPts val="100"/>
+              </a:spcBef>
+            </a:pPr>
+            <a:r>
+              <a:rPr lang="en-US" sz="2500" dirty="0"/>
+              <a:t>Extra assessments </a:t>
+            </a:r>
+            <a:endParaRPr lang="en-US" sz="2500" b="0" dirty="0">
+              <a:latin typeface="+mj-lt"/>
+              <a:cs typeface="Lucida Sans"/>
+            </a:endParaRPr>
+          </a:p>
+        </p:txBody>
+      </p:sp>
+      <p:pic>
+        <p:nvPicPr>
+          <p:cNvPr id="83" name="Gráfico 82">
+            <a:extLst>
+              <a:ext uri="{FF2B5EF4-FFF2-40B4-BE49-F238E27FC236}">
+                <a16:creationId xmlns:a16="http://schemas.microsoft.com/office/drawing/2014/main" id="{3D5FE5B5-FEB9-F348-DAE0-40A4075F5C9D}"/>
+              </a:ext>
+            </a:extLst>
+          </p:cNvPr>
+          <p:cNvPicPr>
+            <a:picLocks noChangeAspect="1"/>
+          </p:cNvPicPr>
+          <p:nvPr/>
+        </p:nvPicPr>
+        <p:blipFill>
+          <a:blip r:embed="rId3">
+            <a:extLst>
+              <a:ext uri="{96DAC541-7B7A-43D3-8B79-37D633B846F1}">
+                <asvg:svgBlip xmlns:asvg="http://schemas.microsoft.com/office/drawing/2016/SVG/main" r:embed="rId4"/>
+              </a:ext>
+            </a:extLst>
+          </a:blip>
+          <a:stretch>
+            <a:fillRect/>
+          </a:stretch>
+        </p:blipFill>
+        <p:spPr>
+          <a:xfrm>
+            <a:off x="5045006" y="6356057"/>
+            <a:ext cx="6409575" cy="363174"/>
+          </a:xfrm>
+          <a:prstGeom prst="rect">
+            <a:avLst/>
+          </a:prstGeom>
+        </p:spPr>
+      </p:pic>
+      <p:sp>
+        <p:nvSpPr>
+          <p:cNvPr id="84" name="Marcador de número de diapositiva 83">
+            <a:extLst>
+              <a:ext uri="{FF2B5EF4-FFF2-40B4-BE49-F238E27FC236}">
+                <a16:creationId xmlns:a16="http://schemas.microsoft.com/office/drawing/2014/main" id="{6D33B171-C6AB-9CDE-9E9C-941BC4D40F6A}"/>
+              </a:ext>
+            </a:extLst>
+          </p:cNvPr>
+          <p:cNvSpPr>
+            <a:spLocks noGrp="1"/>
+          </p:cNvSpPr>
+          <p:nvPr>
+            <p:ph type="sldNum" sz="quarter" idx="7"/>
+          </p:nvPr>
+        </p:nvSpPr>
+        <p:spPr/>
+        <p:txBody>
+          <a:bodyPr/>
+          <a:lstStyle/>
+          <a:p>
+            <a:fld id="{B6F15528-21DE-4FAA-801E-634DDDAF4B2B}" type="slidenum">
+              <a:rPr lang="es-ES" smtClean="0"/>
+              <a:t>24</a:t>
+            </a:fld>
+            <a:endParaRPr lang="es-ES"/>
+          </a:p>
+        </p:txBody>
+      </p:sp>
+      <p:sp>
+        <p:nvSpPr>
+          <p:cNvPr id="4" name="Marcador de texto 2">
+            <a:extLst>
+              <a:ext uri="{FF2B5EF4-FFF2-40B4-BE49-F238E27FC236}">
+                <a16:creationId xmlns:a16="http://schemas.microsoft.com/office/drawing/2014/main" id="{D12749E7-883C-CDA1-4D7A-8BBE32465926}"/>
+              </a:ext>
+            </a:extLst>
+          </p:cNvPr>
+          <p:cNvSpPr txBox="1">
+            <a:spLocks/>
+          </p:cNvSpPr>
+          <p:nvPr/>
+        </p:nvSpPr>
+        <p:spPr>
+          <a:xfrm>
+            <a:off x="608012" y="1295400"/>
+            <a:ext cx="11048999" cy="4958137"/>
+          </a:xfrm>
+          <a:prstGeom prst="rect">
+            <a:avLst/>
+          </a:prstGeom>
+        </p:spPr>
+        <p:txBody>
+          <a:bodyPr>
+            <a:normAutofit/>
+          </a:bodyPr>
+          <a:lstStyle>
+            <a:lvl1pPr marL="0">
+              <a:defRPr>
+                <a:latin typeface="+mn-lt"/>
+                <a:ea typeface="+mn-ea"/>
+                <a:cs typeface="+mn-cs"/>
+              </a:defRPr>
+            </a:lvl1pPr>
+            <a:lvl2pPr marL="457200">
+              <a:defRPr>
+                <a:latin typeface="+mn-lt"/>
+                <a:ea typeface="+mn-ea"/>
+                <a:cs typeface="+mn-cs"/>
+              </a:defRPr>
+            </a:lvl2pPr>
+            <a:lvl3pPr marL="914400">
+              <a:defRPr>
+                <a:latin typeface="+mn-lt"/>
+                <a:ea typeface="+mn-ea"/>
+                <a:cs typeface="+mn-cs"/>
+              </a:defRPr>
+            </a:lvl3pPr>
+            <a:lvl4pPr marL="1371600">
+              <a:defRPr>
+                <a:latin typeface="+mn-lt"/>
+                <a:ea typeface="+mn-ea"/>
+                <a:cs typeface="+mn-cs"/>
+              </a:defRPr>
+            </a:lvl4pPr>
+            <a:lvl5pPr marL="1828800">
+              <a:defRPr>
+                <a:latin typeface="+mn-lt"/>
+                <a:ea typeface="+mn-ea"/>
+                <a:cs typeface="+mn-cs"/>
+              </a:defRPr>
+            </a:lvl5pPr>
+            <a:lvl6pPr marL="2286000">
+              <a:defRPr>
+                <a:latin typeface="+mn-lt"/>
+                <a:ea typeface="+mn-ea"/>
+                <a:cs typeface="+mn-cs"/>
+              </a:defRPr>
+            </a:lvl6pPr>
+            <a:lvl7pPr marL="2743200">
+              <a:defRPr>
+                <a:latin typeface="+mn-lt"/>
+                <a:ea typeface="+mn-ea"/>
+                <a:cs typeface="+mn-cs"/>
+              </a:defRPr>
+            </a:lvl7pPr>
+            <a:lvl8pPr marL="3200400">
+              <a:defRPr>
+                <a:latin typeface="+mn-lt"/>
+                <a:ea typeface="+mn-ea"/>
+                <a:cs typeface="+mn-cs"/>
+              </a:defRPr>
+            </a:lvl8pPr>
+            <a:lvl9pPr marL="3657600">
+              <a:defRPr>
+                <a:latin typeface="+mn-lt"/>
+                <a:ea typeface="+mn-ea"/>
+                <a:cs typeface="+mn-cs"/>
+              </a:defRPr>
+            </a:lvl9pPr>
+          </a:lstStyle>
+          <a:p>
+            <a:pPr marL="0" indent="0">
+              <a:buNone/>
+            </a:pPr>
+            <a:r>
+              <a:rPr lang="en-US" b="1" dirty="0"/>
+              <a:t>Assessment 4</a:t>
+            </a:r>
+            <a:r>
+              <a:rPr lang="en-US" dirty="0"/>
+              <a:t>. Design an MZI for filtering at a specific wavelength. Calculate and adjust the arm lengths to configure the MZI to have a maximum transmission at 1550 nm.</a:t>
+            </a:r>
+          </a:p>
+          <a:p>
+            <a:endParaRPr lang="en-US" b="1" dirty="0"/>
+          </a:p>
+          <a:p>
+            <a:pPr algn="just"/>
+            <a:endParaRPr lang="en-US" sz="2000" kern="0" dirty="0">
+              <a:solidFill>
+                <a:sysClr val="windowText" lastClr="000000"/>
+              </a:solidFill>
+            </a:endParaRPr>
+          </a:p>
+        </p:txBody>
+      </p:sp>
+      <p:sp>
+        <p:nvSpPr>
+          <p:cNvPr id="2" name="CuadroTexto 1">
+            <a:extLst>
+              <a:ext uri="{FF2B5EF4-FFF2-40B4-BE49-F238E27FC236}">
+                <a16:creationId xmlns:a16="http://schemas.microsoft.com/office/drawing/2014/main" id="{1BBA90A7-082E-209D-381D-9F95474BF838}"/>
+              </a:ext>
+            </a:extLst>
+          </p:cNvPr>
+          <p:cNvSpPr txBox="1"/>
+          <p:nvPr/>
+        </p:nvSpPr>
+        <p:spPr>
+          <a:xfrm>
+            <a:off x="609441" y="4860334"/>
+            <a:ext cx="11199971" cy="1200329"/>
+          </a:xfrm>
+          <a:prstGeom prst="rect">
+            <a:avLst/>
+          </a:prstGeom>
+          <a:solidFill>
+            <a:schemeClr val="bg1">
+              <a:lumMod val="95000"/>
+            </a:schemeClr>
+          </a:solidFill>
+          <a:ln w="28575">
+            <a:solidFill>
+              <a:srgbClr val="E0700D"/>
+            </a:solidFill>
+          </a:ln>
+        </p:spPr>
+        <p:txBody>
+          <a:bodyPr wrap="square" rtlCol="0">
+            <a:spAutoFit/>
+          </a:bodyPr>
+          <a:lstStyle/>
+          <a:p>
+            <a:pPr algn="just"/>
+            <a:r>
+              <a:rPr lang="en-US" sz="1200" dirty="0">
+                <a:latin typeface="Arial" panose="020B0604020202020204" pitchFamily="34" charset="0"/>
+                <a:cs typeface="Arial" panose="020B0604020202020204" pitchFamily="34" charset="0"/>
+              </a:rPr>
+              <a:t>Document all your results</a:t>
+            </a:r>
+          </a:p>
+          <a:p>
+            <a:pPr algn="just"/>
+            <a:endParaRPr lang="en-US" sz="1200" dirty="0">
+              <a:latin typeface="Arial" panose="020B0604020202020204" pitchFamily="34" charset="0"/>
+              <a:cs typeface="Arial" panose="020B0604020202020204" pitchFamily="34" charset="0"/>
+            </a:endParaRPr>
+          </a:p>
+          <a:p>
+            <a:pPr algn="just"/>
+            <a:endParaRPr lang="en-US" sz="1200" dirty="0">
+              <a:latin typeface="Arial" panose="020B0604020202020204" pitchFamily="34" charset="0"/>
+              <a:cs typeface="Arial" panose="020B0604020202020204" pitchFamily="34" charset="0"/>
+            </a:endParaRPr>
+          </a:p>
+          <a:p>
+            <a:pPr algn="just"/>
+            <a:endParaRPr lang="en-US" sz="1200" dirty="0">
+              <a:latin typeface="Arial" panose="020B0604020202020204" pitchFamily="34" charset="0"/>
+              <a:cs typeface="Arial" panose="020B0604020202020204" pitchFamily="34" charset="0"/>
+            </a:endParaRPr>
+          </a:p>
+          <a:p>
+            <a:pPr algn="just"/>
+            <a:endParaRPr lang="en-US" sz="1200" dirty="0">
+              <a:latin typeface="Arial" panose="020B0604020202020204" pitchFamily="34" charset="0"/>
+              <a:cs typeface="Arial" panose="020B0604020202020204" pitchFamily="34" charset="0"/>
+            </a:endParaRPr>
+          </a:p>
+          <a:p>
+            <a:pPr algn="just"/>
+            <a:endParaRPr lang="en-US" sz="1200" dirty="0">
+              <a:latin typeface="Arial" panose="020B0604020202020204" pitchFamily="34" charset="0"/>
+              <a:cs typeface="Arial" panose="020B0604020202020204" pitchFamily="34" charset="0"/>
+            </a:endParaRPr>
+          </a:p>
+        </p:txBody>
+      </p:sp>
+      <p:sp>
+        <p:nvSpPr>
+          <p:cNvPr id="6" name="Marcador de pie de página 2">
+            <a:extLst>
+              <a:ext uri="{FF2B5EF4-FFF2-40B4-BE49-F238E27FC236}">
+                <a16:creationId xmlns:a16="http://schemas.microsoft.com/office/drawing/2014/main" id="{53B85258-834C-3C60-485C-EF3CD80F9B3B}"/>
+              </a:ext>
+            </a:extLst>
+          </p:cNvPr>
+          <p:cNvSpPr>
+            <a:spLocks noGrp="1"/>
+          </p:cNvSpPr>
+          <p:nvPr>
+            <p:ph type="ftr" sz="quarter" idx="5"/>
+          </p:nvPr>
+        </p:nvSpPr>
+        <p:spPr>
+          <a:xfrm>
+            <a:off x="609600" y="6457057"/>
+            <a:ext cx="2743200" cy="184666"/>
+          </a:xfrm>
+        </p:spPr>
+        <p:txBody>
+          <a:bodyPr/>
+          <a:lstStyle/>
+          <a:p>
+            <a:pPr marL="12700">
+              <a:spcBef>
+                <a:spcPts val="15"/>
+              </a:spcBef>
+            </a:pPr>
+            <a:r>
+              <a:rPr lang="es-ES" spc="-5"/>
+              <a:t>LAB 3. INTERFEROMETERS I</a:t>
+            </a:r>
+            <a:endParaRPr lang="es-ES" spc="-5" dirty="0"/>
+          </a:p>
+        </p:txBody>
+      </p:sp>
+      <p:pic>
+        <p:nvPicPr>
+          <p:cNvPr id="5" name="Imagen 4" descr="Gráfico, Gráfico de líneas&#10;&#10;El contenido generado por IA puede ser incorrecto.">
+            <a:extLst>
+              <a:ext uri="{FF2B5EF4-FFF2-40B4-BE49-F238E27FC236}">
+                <a16:creationId xmlns:a16="http://schemas.microsoft.com/office/drawing/2014/main" id="{12AB92E1-9E51-F8CB-D88E-6A37C8F1A1CE}"/>
+              </a:ext>
+            </a:extLst>
+          </p:cNvPr>
+          <p:cNvPicPr>
+            <a:picLocks noChangeAspect="1"/>
+          </p:cNvPicPr>
+          <p:nvPr/>
+        </p:nvPicPr>
+        <p:blipFill>
+          <a:blip r:embed="rId5"/>
+          <a:stretch>
+            <a:fillRect/>
+          </a:stretch>
+        </p:blipFill>
+        <p:spPr>
+          <a:xfrm>
+            <a:off x="642648" y="1960721"/>
+            <a:ext cx="3511202" cy="2787141"/>
+          </a:xfrm>
+          <a:prstGeom prst="rect">
+            <a:avLst/>
+          </a:prstGeom>
+        </p:spPr>
+      </p:pic>
+      <p:pic>
+        <p:nvPicPr>
+          <p:cNvPr id="8" name="Imagen 7" descr="Texto&#10;&#10;El contenido generado por IA puede ser incorrecto.">
+            <a:extLst>
+              <a:ext uri="{FF2B5EF4-FFF2-40B4-BE49-F238E27FC236}">
+                <a16:creationId xmlns:a16="http://schemas.microsoft.com/office/drawing/2014/main" id="{693E8B91-EBFC-D0F7-5B7D-512F8C4BB5D3}"/>
+              </a:ext>
+            </a:extLst>
+          </p:cNvPr>
+          <p:cNvPicPr>
+            <a:picLocks noChangeAspect="1"/>
+          </p:cNvPicPr>
+          <p:nvPr/>
+        </p:nvPicPr>
+        <p:blipFill>
+          <a:blip r:embed="rId6"/>
+          <a:stretch>
+            <a:fillRect/>
+          </a:stretch>
+        </p:blipFill>
+        <p:spPr>
+          <a:xfrm>
+            <a:off x="4343400" y="2080801"/>
+            <a:ext cx="6077798" cy="752580"/>
+          </a:xfrm>
+          <a:prstGeom prst="rect">
+            <a:avLst/>
+          </a:prstGeom>
+        </p:spPr>
+      </p:pic>
+      <p:sp>
+        <p:nvSpPr>
+          <p:cNvPr id="10" name="CuadroTexto 9">
+            <a:extLst>
+              <a:ext uri="{FF2B5EF4-FFF2-40B4-BE49-F238E27FC236}">
+                <a16:creationId xmlns:a16="http://schemas.microsoft.com/office/drawing/2014/main" id="{7274EF89-FD25-B48D-AEED-63FF006839DD}"/>
+              </a:ext>
+            </a:extLst>
+          </p:cNvPr>
+          <p:cNvSpPr txBox="1"/>
+          <p:nvPr/>
+        </p:nvSpPr>
+        <p:spPr>
+          <a:xfrm>
+            <a:off x="4343400" y="3137687"/>
+            <a:ext cx="6128326" cy="646331"/>
+          </a:xfrm>
+          <a:prstGeom prst="rect">
+            <a:avLst/>
+          </a:prstGeom>
+          <a:noFill/>
+        </p:spPr>
+        <p:txBody>
+          <a:bodyPr wrap="square">
+            <a:spAutoFit/>
+          </a:bodyPr>
+          <a:lstStyle/>
+          <a:p>
+            <a:r>
+              <a:rPr lang="es-ES" dirty="0"/>
+              <a:t>Con una diferencia de longitudes de 25 </a:t>
+            </a:r>
+            <a:r>
+              <a:rPr lang="es-ES" dirty="0" err="1"/>
+              <a:t>um</a:t>
+            </a:r>
+            <a:r>
+              <a:rPr lang="es-ES" dirty="0"/>
+              <a:t>, teniendo un máximo en </a:t>
+            </a:r>
+            <a:r>
+              <a:rPr lang="es-ES" dirty="0" err="1"/>
+              <a:t>cross</a:t>
+            </a:r>
+            <a:r>
+              <a:rPr lang="es-ES" dirty="0"/>
+              <a:t> en 1550nm  </a:t>
+            </a:r>
+          </a:p>
+        </p:txBody>
+      </p:sp>
+    </p:spTree>
+    <p:extLst>
+      <p:ext uri="{BB962C8B-B14F-4D97-AF65-F5344CB8AC3E}">
+        <p14:creationId xmlns:p14="http://schemas.microsoft.com/office/powerpoint/2010/main" val="1359720573"/>
+      </p:ext>
+    </p:extLst>
+  </p:cSld>
+  <p:clrMapOvr>
+    <a:masterClrMapping/>
+  </p:clrMapOvr>
+</p:sld>
+</file>
+
+<file path=ppt/slides/slide25.xml><?xml version="1.0" encoding="utf-8"?>
+<p:sld xmlns:a="http://schemas.openxmlformats.org/drawingml/2006/main" xmlns:r="http://schemas.openxmlformats.org/officeDocument/2006/relationships" xmlns:p="http://schemas.openxmlformats.org/presentationml/2006/main">
+  <p:cSld>
+    <p:spTree>
+      <p:nvGrpSpPr>
+        <p:cNvPr id="1" name="">
+          <a:extLst>
+            <a:ext uri="{FF2B5EF4-FFF2-40B4-BE49-F238E27FC236}">
+              <a16:creationId xmlns:a16="http://schemas.microsoft.com/office/drawing/2014/main" id="{63986E8E-397B-1841-9BD3-C75A054EA27F}"/>
+            </a:ext>
+          </a:extLst>
+        </p:cNvPr>
+        <p:cNvGrpSpPr/>
+        <p:nvPr/>
+      </p:nvGrpSpPr>
+      <p:grpSpPr>
+        <a:xfrm>
+          <a:off x="0" y="0"/>
+          <a:ext cx="0" cy="0"/>
+          <a:chOff x="0" y="0"/>
+          <a:chExt cx="0" cy="0"/>
+        </a:xfrm>
+      </p:grpSpPr>
+      <p:sp>
+        <p:nvSpPr>
+          <p:cNvPr id="16" name="object 16">
+            <a:extLst>
+              <a:ext uri="{FF2B5EF4-FFF2-40B4-BE49-F238E27FC236}">
+                <a16:creationId xmlns:a16="http://schemas.microsoft.com/office/drawing/2014/main" id="{716E3C5C-841C-5D62-2A1D-32F5A91EA371}"/>
+              </a:ext>
+            </a:extLst>
+          </p:cNvPr>
+          <p:cNvSpPr txBox="1">
+            <a:spLocks noGrp="1"/>
+          </p:cNvSpPr>
+          <p:nvPr>
+            <p:ph type="title"/>
+          </p:nvPr>
+        </p:nvSpPr>
+        <p:spPr>
+          <a:xfrm>
+            <a:off x="685800" y="408883"/>
+            <a:ext cx="10994410" cy="397545"/>
+          </a:xfrm>
+          <a:prstGeom prst="rect">
+            <a:avLst/>
+          </a:prstGeom>
+        </p:spPr>
+        <p:txBody>
+          <a:bodyPr vert="horz" wrap="square" lIns="0" tIns="12700" rIns="0" bIns="0" rtlCol="0">
+            <a:spAutoFit/>
+          </a:bodyPr>
+          <a:lstStyle/>
+          <a:p>
+            <a:pPr marL="12700">
+              <a:lnSpc>
+                <a:spcPct val="100000"/>
+              </a:lnSpc>
+              <a:spcBef>
+                <a:spcPts val="100"/>
+              </a:spcBef>
+            </a:pPr>
+            <a:r>
+              <a:rPr lang="en-US" sz="2500" dirty="0"/>
+              <a:t>Extra assessments </a:t>
+            </a:r>
+            <a:endParaRPr lang="en-US" sz="2500" b="0" dirty="0">
+              <a:latin typeface="+mj-lt"/>
+              <a:cs typeface="Lucida Sans"/>
+            </a:endParaRPr>
+          </a:p>
+        </p:txBody>
+      </p:sp>
+      <p:pic>
+        <p:nvPicPr>
+          <p:cNvPr id="83" name="Gráfico 82">
+            <a:extLst>
+              <a:ext uri="{FF2B5EF4-FFF2-40B4-BE49-F238E27FC236}">
+                <a16:creationId xmlns:a16="http://schemas.microsoft.com/office/drawing/2014/main" id="{043AAB1D-F7FD-2F8E-6EC0-DDC970F20DF0}"/>
+              </a:ext>
+            </a:extLst>
+          </p:cNvPr>
+          <p:cNvPicPr>
+            <a:picLocks noChangeAspect="1"/>
+          </p:cNvPicPr>
+          <p:nvPr/>
+        </p:nvPicPr>
+        <p:blipFill>
+          <a:blip r:embed="rId3">
+            <a:extLst>
+              <a:ext uri="{96DAC541-7B7A-43D3-8B79-37D633B846F1}">
+                <asvg:svgBlip xmlns:asvg="http://schemas.microsoft.com/office/drawing/2016/SVG/main" r:embed="rId4"/>
+              </a:ext>
+            </a:extLst>
+          </a:blip>
+          <a:stretch>
+            <a:fillRect/>
+          </a:stretch>
+        </p:blipFill>
+        <p:spPr>
+          <a:xfrm>
+            <a:off x="5045006" y="6356057"/>
+            <a:ext cx="6409575" cy="363174"/>
+          </a:xfrm>
+          <a:prstGeom prst="rect">
+            <a:avLst/>
+          </a:prstGeom>
+        </p:spPr>
+      </p:pic>
+      <p:sp>
+        <p:nvSpPr>
+          <p:cNvPr id="84" name="Marcador de número de diapositiva 83">
+            <a:extLst>
+              <a:ext uri="{FF2B5EF4-FFF2-40B4-BE49-F238E27FC236}">
+                <a16:creationId xmlns:a16="http://schemas.microsoft.com/office/drawing/2014/main" id="{B4B7AD11-1FD3-6AC4-BF09-4D589E8382B3}"/>
+              </a:ext>
+            </a:extLst>
+          </p:cNvPr>
+          <p:cNvSpPr>
+            <a:spLocks noGrp="1"/>
+          </p:cNvSpPr>
+          <p:nvPr>
+            <p:ph type="sldNum" sz="quarter" idx="7"/>
+          </p:nvPr>
+        </p:nvSpPr>
+        <p:spPr/>
+        <p:txBody>
+          <a:bodyPr/>
+          <a:lstStyle/>
+          <a:p>
+            <a:fld id="{B6F15528-21DE-4FAA-801E-634DDDAF4B2B}" type="slidenum">
+              <a:rPr lang="es-ES" smtClean="0"/>
+              <a:t>25</a:t>
+            </a:fld>
+            <a:endParaRPr lang="es-ES"/>
+          </a:p>
+        </p:txBody>
+      </p:sp>
+      <p:sp>
+        <p:nvSpPr>
+          <p:cNvPr id="4" name="Marcador de texto 2">
+            <a:extLst>
+              <a:ext uri="{FF2B5EF4-FFF2-40B4-BE49-F238E27FC236}">
+                <a16:creationId xmlns:a16="http://schemas.microsoft.com/office/drawing/2014/main" id="{44469A6A-D3DB-60FE-3A74-3CF213032E6A}"/>
+              </a:ext>
+            </a:extLst>
+          </p:cNvPr>
+          <p:cNvSpPr txBox="1">
+            <a:spLocks/>
+          </p:cNvSpPr>
+          <p:nvPr/>
+        </p:nvSpPr>
+        <p:spPr>
+          <a:xfrm>
+            <a:off x="608012" y="1295400"/>
+            <a:ext cx="11048999" cy="4958137"/>
+          </a:xfrm>
+          <a:prstGeom prst="rect">
+            <a:avLst/>
+          </a:prstGeom>
+        </p:spPr>
+        <p:txBody>
+          <a:bodyPr>
+            <a:normAutofit/>
+          </a:bodyPr>
+          <a:lstStyle>
+            <a:lvl1pPr marL="0">
+              <a:defRPr>
+                <a:latin typeface="+mn-lt"/>
+                <a:ea typeface="+mn-ea"/>
+                <a:cs typeface="+mn-cs"/>
+              </a:defRPr>
+            </a:lvl1pPr>
+            <a:lvl2pPr marL="457200">
+              <a:defRPr>
+                <a:latin typeface="+mn-lt"/>
+                <a:ea typeface="+mn-ea"/>
+                <a:cs typeface="+mn-cs"/>
+              </a:defRPr>
+            </a:lvl2pPr>
+            <a:lvl3pPr marL="914400">
+              <a:defRPr>
+                <a:latin typeface="+mn-lt"/>
+                <a:ea typeface="+mn-ea"/>
+                <a:cs typeface="+mn-cs"/>
+              </a:defRPr>
+            </a:lvl3pPr>
+            <a:lvl4pPr marL="1371600">
+              <a:defRPr>
+                <a:latin typeface="+mn-lt"/>
+                <a:ea typeface="+mn-ea"/>
+                <a:cs typeface="+mn-cs"/>
+              </a:defRPr>
+            </a:lvl4pPr>
+            <a:lvl5pPr marL="1828800">
+              <a:defRPr>
+                <a:latin typeface="+mn-lt"/>
+                <a:ea typeface="+mn-ea"/>
+                <a:cs typeface="+mn-cs"/>
+              </a:defRPr>
+            </a:lvl5pPr>
+            <a:lvl6pPr marL="2286000">
+              <a:defRPr>
+                <a:latin typeface="+mn-lt"/>
+                <a:ea typeface="+mn-ea"/>
+                <a:cs typeface="+mn-cs"/>
+              </a:defRPr>
+            </a:lvl6pPr>
+            <a:lvl7pPr marL="2743200">
+              <a:defRPr>
+                <a:latin typeface="+mn-lt"/>
+                <a:ea typeface="+mn-ea"/>
+                <a:cs typeface="+mn-cs"/>
+              </a:defRPr>
+            </a:lvl7pPr>
+            <a:lvl8pPr marL="3200400">
+              <a:defRPr>
+                <a:latin typeface="+mn-lt"/>
+                <a:ea typeface="+mn-ea"/>
+                <a:cs typeface="+mn-cs"/>
+              </a:defRPr>
+            </a:lvl8pPr>
+            <a:lvl9pPr marL="3657600">
+              <a:defRPr>
+                <a:latin typeface="+mn-lt"/>
+                <a:ea typeface="+mn-ea"/>
+                <a:cs typeface="+mn-cs"/>
+              </a:defRPr>
+            </a:lvl9pPr>
+          </a:lstStyle>
+          <a:p>
+            <a:r>
+              <a:rPr lang="en-US" b="1" dirty="0"/>
+              <a:t>Assessment 5. </a:t>
+            </a:r>
+            <a:r>
+              <a:rPr lang="en-US" dirty="0"/>
+              <a:t>Let's see how the response of the MZI varies with the effective index. Vary the effective index of one of the arms and analyze how the spectrum shifts. To do this, you can use the data provided in the .txt files entitled ‘</a:t>
+            </a:r>
+            <a:r>
+              <a:rPr lang="en-US" dirty="0" err="1"/>
+              <a:t>SiN</a:t>
+            </a:r>
+            <a:r>
+              <a:rPr lang="en-US" dirty="0"/>
+              <a:t>’. Can you give an example of an application where this configuration is used?</a:t>
+            </a:r>
+          </a:p>
+          <a:p>
+            <a:pPr marL="0" indent="0">
+              <a:buNone/>
+            </a:pPr>
+            <a:endParaRPr lang="en-US" dirty="0"/>
+          </a:p>
+          <a:p>
+            <a:pPr algn="just"/>
+            <a:endParaRPr lang="en-US" sz="2000" kern="0" dirty="0">
+              <a:solidFill>
+                <a:sysClr val="windowText" lastClr="000000"/>
+              </a:solidFill>
+            </a:endParaRPr>
+          </a:p>
+        </p:txBody>
+      </p:sp>
+      <p:sp>
+        <p:nvSpPr>
+          <p:cNvPr id="6" name="Marcador de pie de página 2">
+            <a:extLst>
+              <a:ext uri="{FF2B5EF4-FFF2-40B4-BE49-F238E27FC236}">
+                <a16:creationId xmlns:a16="http://schemas.microsoft.com/office/drawing/2014/main" id="{1B0E7D77-C21A-0F71-C8AE-878763F261D0}"/>
+              </a:ext>
+            </a:extLst>
+          </p:cNvPr>
+          <p:cNvSpPr>
+            <a:spLocks noGrp="1"/>
+          </p:cNvSpPr>
+          <p:nvPr>
+            <p:ph type="ftr" sz="quarter" idx="5"/>
+          </p:nvPr>
+        </p:nvSpPr>
+        <p:spPr>
+          <a:xfrm>
+            <a:off x="609600" y="6457057"/>
+            <a:ext cx="2743200" cy="184666"/>
+          </a:xfrm>
+        </p:spPr>
+        <p:txBody>
+          <a:bodyPr/>
+          <a:lstStyle/>
+          <a:p>
+            <a:pPr marL="12700">
+              <a:spcBef>
+                <a:spcPts val="15"/>
+              </a:spcBef>
+            </a:pPr>
+            <a:r>
+              <a:rPr lang="es-ES" spc="-5"/>
+              <a:t>LAB 3. INTERFEROMETERS I</a:t>
+            </a:r>
+            <a:endParaRPr lang="es-ES" spc="-5" dirty="0"/>
+          </a:p>
+        </p:txBody>
+      </p:sp>
+      <p:pic>
+        <p:nvPicPr>
+          <p:cNvPr id="5" name="Imagen 4" descr="Gráfico, Gráfico de líneas&#10;&#10;El contenido generado por IA puede ser incorrecto.">
+            <a:extLst>
+              <a:ext uri="{FF2B5EF4-FFF2-40B4-BE49-F238E27FC236}">
+                <a16:creationId xmlns:a16="http://schemas.microsoft.com/office/drawing/2014/main" id="{8F3F4BED-B61B-1C9A-F3CC-1970B22EBED1}"/>
+              </a:ext>
+            </a:extLst>
+          </p:cNvPr>
+          <p:cNvPicPr>
+            <a:picLocks noChangeAspect="1"/>
+          </p:cNvPicPr>
+          <p:nvPr/>
+        </p:nvPicPr>
+        <p:blipFill>
+          <a:blip r:embed="rId5"/>
+          <a:stretch>
+            <a:fillRect/>
+          </a:stretch>
+        </p:blipFill>
+        <p:spPr>
+          <a:xfrm>
+            <a:off x="5867399" y="2313629"/>
+            <a:ext cx="3706183" cy="2970167"/>
+          </a:xfrm>
+          <a:prstGeom prst="rect">
+            <a:avLst/>
+          </a:prstGeom>
+        </p:spPr>
+      </p:pic>
+      <p:pic>
+        <p:nvPicPr>
+          <p:cNvPr id="8" name="Imagen 7" descr="Gráfico, Gráfico de líneas&#10;&#10;El contenido generado por IA puede ser incorrecto.">
+            <a:extLst>
+              <a:ext uri="{FF2B5EF4-FFF2-40B4-BE49-F238E27FC236}">
+                <a16:creationId xmlns:a16="http://schemas.microsoft.com/office/drawing/2014/main" id="{91345F26-98A5-C035-E772-CEA063AE2862}"/>
+              </a:ext>
+            </a:extLst>
+          </p:cNvPr>
+          <p:cNvPicPr>
+            <a:picLocks noChangeAspect="1"/>
+          </p:cNvPicPr>
+          <p:nvPr/>
+        </p:nvPicPr>
+        <p:blipFill>
+          <a:blip r:embed="rId6"/>
+          <a:stretch>
+            <a:fillRect/>
+          </a:stretch>
+        </p:blipFill>
+        <p:spPr>
+          <a:xfrm>
+            <a:off x="1841248" y="2265138"/>
+            <a:ext cx="3753498" cy="3018658"/>
+          </a:xfrm>
+          <a:prstGeom prst="rect">
+            <a:avLst/>
+          </a:prstGeom>
+        </p:spPr>
+      </p:pic>
+      <p:sp>
+        <p:nvSpPr>
+          <p:cNvPr id="10" name="CuadroTexto 9">
+            <a:extLst>
+              <a:ext uri="{FF2B5EF4-FFF2-40B4-BE49-F238E27FC236}">
+                <a16:creationId xmlns:a16="http://schemas.microsoft.com/office/drawing/2014/main" id="{7D74DF8F-76E3-0798-6389-07D257E70727}"/>
+              </a:ext>
+            </a:extLst>
+          </p:cNvPr>
+          <p:cNvSpPr txBox="1"/>
+          <p:nvPr/>
+        </p:nvSpPr>
+        <p:spPr>
+          <a:xfrm>
+            <a:off x="381000" y="5487316"/>
+            <a:ext cx="10896600" cy="923330"/>
+          </a:xfrm>
+          <a:prstGeom prst="rect">
+            <a:avLst/>
+          </a:prstGeom>
+          <a:noFill/>
+        </p:spPr>
+        <p:txBody>
+          <a:bodyPr wrap="square">
+            <a:spAutoFit/>
+          </a:bodyPr>
+          <a:lstStyle/>
+          <a:p>
+            <a:r>
+              <a:rPr lang="en-US" dirty="0"/>
+              <a:t>Se produce un </a:t>
+            </a:r>
+            <a:r>
+              <a:rPr lang="en-US" dirty="0" err="1"/>
+              <a:t>desplazamiento</a:t>
+            </a:r>
+            <a:r>
+              <a:rPr lang="en-US" dirty="0"/>
+              <a:t> del </a:t>
+            </a:r>
+            <a:r>
+              <a:rPr lang="en-US" dirty="0" err="1"/>
+              <a:t>espectro</a:t>
+            </a:r>
+            <a:r>
+              <a:rPr lang="en-US" dirty="0"/>
+              <a:t>. Como se ha </a:t>
+            </a:r>
+            <a:r>
+              <a:rPr lang="en-US" dirty="0" err="1"/>
+              <a:t>comentado</a:t>
+            </a:r>
+            <a:r>
+              <a:rPr lang="en-US" dirty="0"/>
+              <a:t> </a:t>
+            </a:r>
+            <a:r>
+              <a:rPr lang="en-US" dirty="0" err="1"/>
+              <a:t>en</a:t>
+            </a:r>
+            <a:r>
+              <a:rPr lang="en-US" dirty="0"/>
+              <a:t> </a:t>
+            </a:r>
+            <a:r>
+              <a:rPr lang="en-US" dirty="0" err="1"/>
+              <a:t>clase</a:t>
+            </a:r>
+            <a:r>
+              <a:rPr lang="en-US" dirty="0"/>
+              <a:t> </a:t>
+            </a:r>
+            <a:r>
+              <a:rPr lang="en-US" dirty="0" err="1"/>
+              <a:t>en</a:t>
+            </a:r>
+            <a:r>
+              <a:rPr lang="en-US" dirty="0"/>
+              <a:t> </a:t>
+            </a:r>
+            <a:r>
+              <a:rPr lang="en-US" dirty="0" err="1"/>
+              <a:t>diferentes</a:t>
+            </a:r>
+            <a:r>
+              <a:rPr lang="en-US" dirty="0"/>
+              <a:t> </a:t>
+            </a:r>
+            <a:r>
+              <a:rPr lang="en-US" dirty="0" err="1"/>
+              <a:t>ocasiones</a:t>
+            </a:r>
+            <a:r>
+              <a:rPr lang="en-US" dirty="0"/>
+              <a:t> se </a:t>
+            </a:r>
+            <a:r>
+              <a:rPr lang="en-US" dirty="0" err="1"/>
+              <a:t>puede</a:t>
+            </a:r>
+            <a:r>
+              <a:rPr lang="en-US" dirty="0"/>
+              <a:t> </a:t>
+            </a:r>
+            <a:r>
+              <a:rPr lang="en-US" dirty="0" err="1"/>
+              <a:t>utilizar</a:t>
+            </a:r>
+            <a:r>
+              <a:rPr lang="en-US" dirty="0"/>
+              <a:t> </a:t>
+            </a:r>
+            <a:r>
+              <a:rPr lang="en-US" dirty="0" err="1"/>
+              <a:t>como</a:t>
+            </a:r>
+            <a:r>
+              <a:rPr lang="en-US" dirty="0"/>
+              <a:t> detector de </a:t>
+            </a:r>
+            <a:r>
+              <a:rPr lang="en-US" dirty="0" err="1"/>
+              <a:t>substancias</a:t>
+            </a:r>
+            <a:r>
+              <a:rPr lang="en-US" dirty="0"/>
+              <a:t>, </a:t>
+            </a:r>
+            <a:r>
+              <a:rPr lang="en-US" dirty="0" err="1"/>
+              <a:t>ya</a:t>
+            </a:r>
+            <a:r>
+              <a:rPr lang="en-US" dirty="0"/>
+              <a:t> </a:t>
+            </a:r>
+            <a:r>
+              <a:rPr lang="en-US" dirty="0" err="1"/>
+              <a:t>que</a:t>
+            </a:r>
+            <a:r>
+              <a:rPr lang="en-US" dirty="0"/>
+              <a:t> la </a:t>
+            </a:r>
+            <a:r>
+              <a:rPr lang="en-US" dirty="0" err="1"/>
+              <a:t>presencia</a:t>
+            </a:r>
+            <a:r>
+              <a:rPr lang="en-US" dirty="0"/>
+              <a:t> de </a:t>
+            </a:r>
+            <a:r>
+              <a:rPr lang="en-US" dirty="0" err="1"/>
+              <a:t>cierta</a:t>
+            </a:r>
+            <a:r>
+              <a:rPr lang="en-US" dirty="0"/>
+              <a:t> </a:t>
+            </a:r>
+            <a:r>
+              <a:rPr lang="en-US" dirty="0" err="1"/>
+              <a:t>substancia</a:t>
+            </a:r>
+            <a:r>
+              <a:rPr lang="en-US" dirty="0"/>
+              <a:t> altera </a:t>
+            </a:r>
+            <a:r>
+              <a:rPr lang="en-US" dirty="0" err="1"/>
+              <a:t>el</a:t>
+            </a:r>
+            <a:r>
+              <a:rPr lang="en-US" dirty="0"/>
+              <a:t> </a:t>
+            </a:r>
+            <a:r>
+              <a:rPr lang="en-US" dirty="0" err="1"/>
+              <a:t>neff</a:t>
+            </a:r>
+            <a:r>
+              <a:rPr lang="en-US" dirty="0"/>
+              <a:t>, y gracias a </a:t>
+            </a:r>
+            <a:r>
+              <a:rPr lang="en-US" dirty="0" err="1"/>
+              <a:t>eso</a:t>
+            </a:r>
+            <a:r>
+              <a:rPr lang="en-US" dirty="0"/>
+              <a:t> </a:t>
+            </a:r>
+            <a:r>
+              <a:rPr lang="en-US" dirty="0" err="1"/>
+              <a:t>posteriormente</a:t>
+            </a:r>
+            <a:r>
+              <a:rPr lang="en-US" dirty="0"/>
+              <a:t> con la </a:t>
+            </a:r>
+            <a:r>
+              <a:rPr lang="en-US" dirty="0" err="1"/>
+              <a:t>respuesta</a:t>
+            </a:r>
+            <a:r>
+              <a:rPr lang="en-US" dirty="0"/>
+              <a:t>, </a:t>
+            </a:r>
+            <a:r>
+              <a:rPr lang="en-US" dirty="0" err="1"/>
+              <a:t>sirviendo</a:t>
+            </a:r>
+            <a:r>
+              <a:rPr lang="en-US" dirty="0"/>
+              <a:t> </a:t>
+            </a:r>
+            <a:r>
+              <a:rPr lang="en-US" dirty="0" err="1"/>
+              <a:t>como</a:t>
+            </a:r>
+            <a:r>
+              <a:rPr lang="en-US" dirty="0"/>
+              <a:t> </a:t>
+            </a:r>
+            <a:r>
+              <a:rPr lang="en-US" dirty="0" err="1"/>
+              <a:t>filtro</a:t>
+            </a:r>
+            <a:r>
+              <a:rPr lang="en-US" dirty="0"/>
+              <a:t> para </a:t>
+            </a:r>
+            <a:r>
+              <a:rPr lang="en-US" dirty="0" err="1"/>
+              <a:t>una</a:t>
+            </a:r>
+            <a:r>
+              <a:rPr lang="en-US" dirty="0"/>
+              <a:t> </a:t>
+            </a:r>
+            <a:r>
+              <a:rPr lang="en-US" dirty="0" err="1"/>
+              <a:t>cierta</a:t>
+            </a:r>
+            <a:r>
+              <a:rPr lang="en-US" dirty="0"/>
+              <a:t> </a:t>
+            </a:r>
+            <a:r>
+              <a:rPr lang="en-US" dirty="0" err="1"/>
+              <a:t>frecuencia</a:t>
+            </a:r>
+            <a:r>
+              <a:rPr lang="en-US" dirty="0"/>
+              <a:t> </a:t>
+            </a:r>
+            <a:r>
+              <a:rPr lang="en-US" dirty="0" err="1"/>
+              <a:t>por</a:t>
+            </a:r>
+            <a:r>
+              <a:rPr lang="en-US" dirty="0"/>
+              <a:t> </a:t>
+            </a:r>
+            <a:r>
+              <a:rPr lang="en-US" dirty="0" err="1"/>
+              <a:t>ejemplo</a:t>
+            </a:r>
+            <a:r>
+              <a:rPr lang="en-US" dirty="0"/>
+              <a:t>. </a:t>
+            </a:r>
+            <a:endParaRPr lang="es-ES" dirty="0"/>
+          </a:p>
+        </p:txBody>
+      </p:sp>
+    </p:spTree>
+    <p:extLst>
+      <p:ext uri="{BB962C8B-B14F-4D97-AF65-F5344CB8AC3E}">
+        <p14:creationId xmlns:p14="http://schemas.microsoft.com/office/powerpoint/2010/main" val="3577319862"/>
+      </p:ext>
+    </p:extLst>
+  </p:cSld>
+  <p:clrMapOvr>
+    <a:masterClrMapping/>
+  </p:clrMapOvr>
+</p:sld>
+</file>
+
+<file path=ppt/slides/slide26.xml><?xml version="1.0" encoding="utf-8"?>
+<p:sld xmlns:a="http://schemas.openxmlformats.org/drawingml/2006/main" xmlns:r="http://schemas.openxmlformats.org/officeDocument/2006/relationships" xmlns:p="http://schemas.openxmlformats.org/presentationml/2006/main">
+  <p:cSld>
+    <p:spTree>
+      <p:nvGrpSpPr>
+        <p:cNvPr id="1" name=""/>
+        <p:cNvGrpSpPr/>
+        <p:nvPr/>
+      </p:nvGrpSpPr>
+      <p:grpSpPr>
+        <a:xfrm>
+          <a:off x="0" y="0"/>
+          <a:ext cx="0" cy="0"/>
+          <a:chOff x="0" y="0"/>
+          <a:chExt cx="0" cy="0"/>
+        </a:xfrm>
+      </p:grpSpPr>
+      <p:sp>
+        <p:nvSpPr>
+          <p:cNvPr id="3" name="object 3"/>
+          <p:cNvSpPr/>
+          <p:nvPr/>
+        </p:nvSpPr>
+        <p:spPr>
+          <a:xfrm>
+            <a:off x="3945635" y="2636520"/>
+            <a:ext cx="8246363" cy="1584959"/>
+          </a:xfrm>
+          <a:prstGeom prst="rect">
+            <a:avLst/>
+          </a:prstGeom>
+          <a:blipFill>
+            <a:blip r:embed="rId2" cstate="print"/>
+            <a:stretch>
+              <a:fillRect/>
+            </a:stretch>
+          </a:blipFill>
+        </p:spPr>
+        <p:txBody>
+          <a:bodyPr wrap="square" lIns="0" tIns="0" rIns="0" bIns="0" rtlCol="0"/>
+          <a:lstStyle/>
+          <a:p>
+            <a:endParaRPr/>
+          </a:p>
+        </p:txBody>
+      </p:sp>
+      <p:sp>
+        <p:nvSpPr>
+          <p:cNvPr id="4" name="object 4"/>
+          <p:cNvSpPr txBox="1">
+            <a:spLocks noGrp="1"/>
+          </p:cNvSpPr>
+          <p:nvPr>
+            <p:ph type="title"/>
+          </p:nvPr>
+        </p:nvSpPr>
+        <p:spPr>
+          <a:xfrm>
+            <a:off x="4513326" y="3165729"/>
+            <a:ext cx="2233295" cy="513715"/>
+          </a:xfrm>
+          <a:prstGeom prst="rect">
+            <a:avLst/>
+          </a:prstGeom>
+        </p:spPr>
+        <p:txBody>
+          <a:bodyPr vert="horz" wrap="square" lIns="0" tIns="13335" rIns="0" bIns="0" rtlCol="0">
+            <a:spAutoFit/>
+          </a:bodyPr>
+          <a:lstStyle/>
+          <a:p>
+            <a:pPr marL="12700">
+              <a:lnSpc>
+                <a:spcPct val="100000"/>
+              </a:lnSpc>
+              <a:spcBef>
+                <a:spcPts val="105"/>
+              </a:spcBef>
+            </a:pPr>
+            <a:r>
+              <a:rPr sz="3200" b="1" spc="-5" dirty="0">
+                <a:solidFill>
+                  <a:srgbClr val="FFFFFF"/>
+                </a:solidFill>
+                <a:latin typeface="Lucida Sans"/>
+                <a:cs typeface="Lucida Sans"/>
+              </a:rPr>
+              <a:t>Thank</a:t>
+            </a:r>
+            <a:r>
+              <a:rPr sz="3200" b="1" spc="-55" dirty="0">
+                <a:solidFill>
+                  <a:srgbClr val="FFFFFF"/>
+                </a:solidFill>
+                <a:latin typeface="Lucida Sans"/>
+                <a:cs typeface="Lucida Sans"/>
+              </a:rPr>
+              <a:t> </a:t>
+            </a:r>
+            <a:r>
+              <a:rPr sz="3200" b="1" dirty="0">
+                <a:solidFill>
+                  <a:srgbClr val="FFFFFF"/>
+                </a:solidFill>
+                <a:latin typeface="Lucida Sans"/>
+                <a:cs typeface="Lucida Sans"/>
+              </a:rPr>
+              <a:t>you</a:t>
+            </a:r>
+            <a:endParaRPr sz="3200">
+              <a:latin typeface="Lucida Sans"/>
+              <a:cs typeface="Lucida Sans"/>
+            </a:endParaRPr>
+          </a:p>
+        </p:txBody>
+      </p:sp>
+      <p:sp>
+        <p:nvSpPr>
+          <p:cNvPr id="5" name="Marcador de número de diapositiva 4">
+            <a:extLst>
+              <a:ext uri="{FF2B5EF4-FFF2-40B4-BE49-F238E27FC236}">
+                <a16:creationId xmlns:a16="http://schemas.microsoft.com/office/drawing/2014/main" id="{B052DA19-AD24-7D24-2AE9-51F8F5A7F5E0}"/>
+              </a:ext>
+            </a:extLst>
+          </p:cNvPr>
+          <p:cNvSpPr>
+            <a:spLocks noGrp="1"/>
+          </p:cNvSpPr>
+          <p:nvPr>
+            <p:ph type="sldNum" sz="quarter" idx="7"/>
+          </p:nvPr>
+        </p:nvSpPr>
+        <p:spPr/>
+        <p:txBody>
+          <a:bodyPr/>
+          <a:lstStyle/>
+          <a:p>
+            <a:fld id="{B6F15528-21DE-4FAA-801E-634DDDAF4B2B}" type="slidenum">
+              <a:rPr lang="es-ES" smtClean="0"/>
+              <a:t>26</a:t>
+            </a:fld>
+            <a:endParaRPr lang="es-ES"/>
+          </a:p>
+        </p:txBody>
+      </p:sp>
+    </p:spTree>
   </p:cSld>
   <p:clrMapOvr>
     <a:masterClrMapping/>

--- a/LabBook_3.pptx
+++ b/LabBook_3.pptx
@@ -5,32 +5,33 @@
     <p:sldMasterId id="2147483648" r:id="rId1"/>
   </p:sldMasterIdLst>
   <p:notesMasterIdLst>
-    <p:notesMasterId r:id="rId22"/>
+    <p:notesMasterId r:id="rId23"/>
   </p:notesMasterIdLst>
   <p:handoutMasterIdLst>
-    <p:handoutMasterId r:id="rId23"/>
+    <p:handoutMasterId r:id="rId24"/>
   </p:handoutMasterIdLst>
   <p:sldIdLst>
     <p:sldId id="256" r:id="rId2"/>
     <p:sldId id="289" r:id="rId3"/>
     <p:sldId id="290" r:id="rId4"/>
-    <p:sldId id="305" r:id="rId5"/>
-    <p:sldId id="306" r:id="rId6"/>
-    <p:sldId id="307" r:id="rId7"/>
-    <p:sldId id="309" r:id="rId8"/>
-    <p:sldId id="310" r:id="rId9"/>
-    <p:sldId id="313" r:id="rId10"/>
-    <p:sldId id="312" r:id="rId11"/>
-    <p:sldId id="295" r:id="rId12"/>
-    <p:sldId id="319" r:id="rId13"/>
-    <p:sldId id="317" r:id="rId14"/>
-    <p:sldId id="318" r:id="rId15"/>
-    <p:sldId id="296" r:id="rId16"/>
-    <p:sldId id="314" r:id="rId17"/>
-    <p:sldId id="293" r:id="rId18"/>
-    <p:sldId id="315" r:id="rId19"/>
-    <p:sldId id="316" r:id="rId20"/>
-    <p:sldId id="288" r:id="rId21"/>
+    <p:sldId id="320" r:id="rId5"/>
+    <p:sldId id="305" r:id="rId6"/>
+    <p:sldId id="306" r:id="rId7"/>
+    <p:sldId id="307" r:id="rId8"/>
+    <p:sldId id="309" r:id="rId9"/>
+    <p:sldId id="310" r:id="rId10"/>
+    <p:sldId id="313" r:id="rId11"/>
+    <p:sldId id="312" r:id="rId12"/>
+    <p:sldId id="295" r:id="rId13"/>
+    <p:sldId id="319" r:id="rId14"/>
+    <p:sldId id="317" r:id="rId15"/>
+    <p:sldId id="318" r:id="rId16"/>
+    <p:sldId id="296" r:id="rId17"/>
+    <p:sldId id="314" r:id="rId18"/>
+    <p:sldId id="293" r:id="rId19"/>
+    <p:sldId id="315" r:id="rId20"/>
+    <p:sldId id="316" r:id="rId21"/>
+    <p:sldId id="288" r:id="rId22"/>
   </p:sldIdLst>
   <p:sldSz cx="12192000" cy="6858000"/>
   <p:notesSz cx="12192000" cy="6858000"/>
@@ -245,7 +246,7 @@
           <a:p>
             <a:fld id="{8438F8DC-35B0-48E6-A86E-42F1F08DD00F}" type="datetimeFigureOut">
               <a:rPr lang="es-ES" smtClean="0"/>
-              <a:t>09/03/2026</a:t>
+              <a:t>12/03/2026</a:t>
             </a:fld>
             <a:endParaRPr lang="es-ES"/>
           </a:p>
@@ -422,7 +423,7 @@
           <a:p>
             <a:fld id="{FACBDC12-F39B-4B97-8F4D-6734F9D366FF}" type="datetimeFigureOut">
               <a:rPr lang="es-ES" smtClean="0"/>
-              <a:t>09/03/2026</a:t>
+              <a:t>12/03/2026</a:t>
             </a:fld>
             <a:endParaRPr lang="es-ES"/>
           </a:p>
@@ -781,6 +782,114 @@
         <p:cNvPr id="1" name="">
           <a:extLst>
             <a:ext uri="{FF2B5EF4-FFF2-40B4-BE49-F238E27FC236}">
+              <a16:creationId xmlns:a16="http://schemas.microsoft.com/office/drawing/2014/main" id="{FEC4E6C5-6855-F1A0-D8D0-56C3AF90C0DF}"/>
+            </a:ext>
+          </a:extLst>
+        </p:cNvPr>
+        <p:cNvGrpSpPr/>
+        <p:nvPr/>
+      </p:nvGrpSpPr>
+      <p:grpSpPr>
+        <a:xfrm>
+          <a:off x="0" y="0"/>
+          <a:ext cx="0" cy="0"/>
+          <a:chOff x="0" y="0"/>
+          <a:chExt cx="0" cy="0"/>
+        </a:xfrm>
+      </p:grpSpPr>
+      <p:sp>
+        <p:nvSpPr>
+          <p:cNvPr id="2" name="Marcador de imagen de diapositiva 1">
+            <a:extLst>
+              <a:ext uri="{FF2B5EF4-FFF2-40B4-BE49-F238E27FC236}">
+                <a16:creationId xmlns:a16="http://schemas.microsoft.com/office/drawing/2014/main" id="{39E5A019-088C-0A7F-9630-07781EE5EAC2}"/>
+              </a:ext>
+            </a:extLst>
+          </p:cNvPr>
+          <p:cNvSpPr>
+            <a:spLocks noGrp="1" noRot="1" noChangeAspect="1"/>
+          </p:cNvSpPr>
+          <p:nvPr>
+            <p:ph type="sldImg"/>
+          </p:nvPr>
+        </p:nvSpPr>
+        <p:spPr/>
+      </p:sp>
+      <p:sp>
+        <p:nvSpPr>
+          <p:cNvPr id="3" name="Marcador de notas 2">
+            <a:extLst>
+              <a:ext uri="{FF2B5EF4-FFF2-40B4-BE49-F238E27FC236}">
+                <a16:creationId xmlns:a16="http://schemas.microsoft.com/office/drawing/2014/main" id="{C773C0A4-7BB0-6298-F2E9-A80EA26537AF}"/>
+              </a:ext>
+            </a:extLst>
+          </p:cNvPr>
+          <p:cNvSpPr>
+            <a:spLocks noGrp="1"/>
+          </p:cNvSpPr>
+          <p:nvPr>
+            <p:ph type="body" idx="1"/>
+          </p:nvPr>
+        </p:nvSpPr>
+        <p:spPr/>
+        <p:txBody>
+          <a:bodyPr/>
+          <a:lstStyle/>
+          <a:p>
+            <a:endParaRPr lang="es-ES" dirty="0"/>
+          </a:p>
+        </p:txBody>
+      </p:sp>
+      <p:sp>
+        <p:nvSpPr>
+          <p:cNvPr id="4" name="Marcador de número de diapositiva 3">
+            <a:extLst>
+              <a:ext uri="{FF2B5EF4-FFF2-40B4-BE49-F238E27FC236}">
+                <a16:creationId xmlns:a16="http://schemas.microsoft.com/office/drawing/2014/main" id="{23B64994-6E1A-B581-2E34-CA7C3C75CE7E}"/>
+              </a:ext>
+            </a:extLst>
+          </p:cNvPr>
+          <p:cNvSpPr>
+            <a:spLocks noGrp="1"/>
+          </p:cNvSpPr>
+          <p:nvPr>
+            <p:ph type="sldNum" sz="quarter" idx="5"/>
+          </p:nvPr>
+        </p:nvSpPr>
+        <p:spPr/>
+        <p:txBody>
+          <a:bodyPr/>
+          <a:lstStyle/>
+          <a:p>
+            <a:fld id="{676223B9-C868-4436-87D9-1A3152E1157A}" type="slidenum">
+              <a:rPr lang="es-ES" smtClean="0"/>
+              <a:t>19</a:t>
+            </a:fld>
+            <a:endParaRPr lang="es-ES"/>
+          </a:p>
+        </p:txBody>
+      </p:sp>
+    </p:spTree>
+    <p:extLst>
+      <p:ext uri="{BB962C8B-B14F-4D97-AF65-F5344CB8AC3E}">
+        <p14:creationId xmlns:p14="http://schemas.microsoft.com/office/powerpoint/2010/main" val="3300330349"/>
+      </p:ext>
+    </p:extLst>
+  </p:cSld>
+  <p:clrMapOvr>
+    <a:masterClrMapping/>
+  </p:clrMapOvr>
+</p:notes>
+</file>
+
+<file path=ppt/notesSlides/notesSlide11.xml><?xml version="1.0" encoding="utf-8"?>
+<p:notes xmlns:a="http://schemas.openxmlformats.org/drawingml/2006/main" xmlns:r="http://schemas.openxmlformats.org/officeDocument/2006/relationships" xmlns:p="http://schemas.openxmlformats.org/presentationml/2006/main">
+  <p:cSld>
+    <p:spTree>
+      <p:nvGrpSpPr>
+        <p:cNvPr id="1" name="">
+          <a:extLst>
+            <a:ext uri="{FF2B5EF4-FFF2-40B4-BE49-F238E27FC236}">
               <a16:creationId xmlns:a16="http://schemas.microsoft.com/office/drawing/2014/main" id="{C2D2E23A-4399-03CE-714F-6A674F8DBDAC}"/>
             </a:ext>
           </a:extLst>
@@ -862,7 +971,7 @@
           <a:p>
             <a:fld id="{676223B9-C868-4436-87D9-1A3152E1157A}" type="slidenum">
               <a:rPr lang="es-ES" smtClean="0"/>
-              <a:t>19</a:t>
+              <a:t>20</a:t>
             </a:fld>
             <a:endParaRPr lang="es-ES"/>
           </a:p>
@@ -882,6 +991,114 @@
 </file>
 
 <file path=ppt/notesSlides/notesSlide2.xml><?xml version="1.0" encoding="utf-8"?>
+<p:notes xmlns:a="http://schemas.openxmlformats.org/drawingml/2006/main" xmlns:r="http://schemas.openxmlformats.org/officeDocument/2006/relationships" xmlns:p="http://schemas.openxmlformats.org/presentationml/2006/main">
+  <p:cSld>
+    <p:spTree>
+      <p:nvGrpSpPr>
+        <p:cNvPr id="1" name="">
+          <a:extLst>
+            <a:ext uri="{FF2B5EF4-FFF2-40B4-BE49-F238E27FC236}">
+              <a16:creationId xmlns:a16="http://schemas.microsoft.com/office/drawing/2014/main" id="{36ADFB9C-03BF-189F-4B7D-96A8609DEB31}"/>
+            </a:ext>
+          </a:extLst>
+        </p:cNvPr>
+        <p:cNvGrpSpPr/>
+        <p:nvPr/>
+      </p:nvGrpSpPr>
+      <p:grpSpPr>
+        <a:xfrm>
+          <a:off x="0" y="0"/>
+          <a:ext cx="0" cy="0"/>
+          <a:chOff x="0" y="0"/>
+          <a:chExt cx="0" cy="0"/>
+        </a:xfrm>
+      </p:grpSpPr>
+      <p:sp>
+        <p:nvSpPr>
+          <p:cNvPr id="2" name="Marcador de imagen de diapositiva 1">
+            <a:extLst>
+              <a:ext uri="{FF2B5EF4-FFF2-40B4-BE49-F238E27FC236}">
+                <a16:creationId xmlns:a16="http://schemas.microsoft.com/office/drawing/2014/main" id="{99063C73-9002-7ABE-B66A-8BAF50655087}"/>
+              </a:ext>
+            </a:extLst>
+          </p:cNvPr>
+          <p:cNvSpPr>
+            <a:spLocks noGrp="1" noRot="1" noChangeAspect="1"/>
+          </p:cNvSpPr>
+          <p:nvPr>
+            <p:ph type="sldImg"/>
+          </p:nvPr>
+        </p:nvSpPr>
+        <p:spPr/>
+      </p:sp>
+      <p:sp>
+        <p:nvSpPr>
+          <p:cNvPr id="3" name="Marcador de notas 2">
+            <a:extLst>
+              <a:ext uri="{FF2B5EF4-FFF2-40B4-BE49-F238E27FC236}">
+                <a16:creationId xmlns:a16="http://schemas.microsoft.com/office/drawing/2014/main" id="{B0BCFE0A-E55D-2E46-AFF3-F808EB942341}"/>
+              </a:ext>
+            </a:extLst>
+          </p:cNvPr>
+          <p:cNvSpPr>
+            <a:spLocks noGrp="1"/>
+          </p:cNvSpPr>
+          <p:nvPr>
+            <p:ph type="body" idx="1"/>
+          </p:nvPr>
+        </p:nvSpPr>
+        <p:spPr/>
+        <p:txBody>
+          <a:bodyPr/>
+          <a:lstStyle/>
+          <a:p>
+            <a:endParaRPr lang="es-ES" dirty="0"/>
+          </a:p>
+        </p:txBody>
+      </p:sp>
+      <p:sp>
+        <p:nvSpPr>
+          <p:cNvPr id="4" name="Marcador de número de diapositiva 3">
+            <a:extLst>
+              <a:ext uri="{FF2B5EF4-FFF2-40B4-BE49-F238E27FC236}">
+                <a16:creationId xmlns:a16="http://schemas.microsoft.com/office/drawing/2014/main" id="{7764D7AD-5C62-B1B4-40D5-3DBB613EB923}"/>
+              </a:ext>
+            </a:extLst>
+          </p:cNvPr>
+          <p:cNvSpPr>
+            <a:spLocks noGrp="1"/>
+          </p:cNvSpPr>
+          <p:nvPr>
+            <p:ph type="sldNum" sz="quarter" idx="5"/>
+          </p:nvPr>
+        </p:nvSpPr>
+        <p:spPr/>
+        <p:txBody>
+          <a:bodyPr/>
+          <a:lstStyle/>
+          <a:p>
+            <a:fld id="{676223B9-C868-4436-87D9-1A3152E1157A}" type="slidenum">
+              <a:rPr lang="es-ES" smtClean="0"/>
+              <a:t>4</a:t>
+            </a:fld>
+            <a:endParaRPr lang="es-ES"/>
+          </a:p>
+        </p:txBody>
+      </p:sp>
+    </p:spTree>
+    <p:extLst>
+      <p:ext uri="{BB962C8B-B14F-4D97-AF65-F5344CB8AC3E}">
+        <p14:creationId xmlns:p14="http://schemas.microsoft.com/office/powerpoint/2010/main" val="546609528"/>
+      </p:ext>
+    </p:extLst>
+  </p:cSld>
+  <p:clrMapOvr>
+    <a:masterClrMapping/>
+  </p:clrMapOvr>
+</p:notes>
+</file>
+
+<file path=ppt/notesSlides/notesSlide3.xml><?xml version="1.0" encoding="utf-8"?>
 <p:notes xmlns:a="http://schemas.openxmlformats.org/drawingml/2006/main" xmlns:r="http://schemas.openxmlformats.org/officeDocument/2006/relationships" xmlns:p="http://schemas.openxmlformats.org/presentationml/2006/main">
   <p:cSld>
     <p:spTree>
@@ -970,7 +1187,7 @@
           <a:p>
             <a:fld id="{676223B9-C868-4436-87D9-1A3152E1157A}" type="slidenum">
               <a:rPr lang="es-ES" smtClean="0"/>
-              <a:t>11</a:t>
+              <a:t>12</a:t>
             </a:fld>
             <a:endParaRPr lang="es-ES"/>
           </a:p>
@@ -989,7 +1206,7 @@
 </p:notes>
 </file>
 
-<file path=ppt/notesSlides/notesSlide3.xml><?xml version="1.0" encoding="utf-8"?>
+<file path=ppt/notesSlides/notesSlide4.xml><?xml version="1.0" encoding="utf-8"?>
 <p:notes xmlns:a="http://schemas.openxmlformats.org/drawingml/2006/main" xmlns:r="http://schemas.openxmlformats.org/officeDocument/2006/relationships" xmlns:p="http://schemas.openxmlformats.org/presentationml/2006/main">
   <p:cSld>
     <p:spTree>
@@ -1078,7 +1295,7 @@
           <a:p>
             <a:fld id="{676223B9-C868-4436-87D9-1A3152E1157A}" type="slidenum">
               <a:rPr lang="es-ES" smtClean="0"/>
-              <a:t>12</a:t>
+              <a:t>13</a:t>
             </a:fld>
             <a:endParaRPr lang="es-ES"/>
           </a:p>
@@ -1097,7 +1314,7 @@
 </p:notes>
 </file>
 
-<file path=ppt/notesSlides/notesSlide4.xml><?xml version="1.0" encoding="utf-8"?>
+<file path=ppt/notesSlides/notesSlide5.xml><?xml version="1.0" encoding="utf-8"?>
 <p:notes xmlns:a="http://schemas.openxmlformats.org/drawingml/2006/main" xmlns:r="http://schemas.openxmlformats.org/officeDocument/2006/relationships" xmlns:p="http://schemas.openxmlformats.org/presentationml/2006/main">
   <p:cSld>
     <p:spTree>
@@ -1186,7 +1403,7 @@
           <a:p>
             <a:fld id="{676223B9-C868-4436-87D9-1A3152E1157A}" type="slidenum">
               <a:rPr lang="es-ES" smtClean="0"/>
-              <a:t>13</a:t>
+              <a:t>14</a:t>
             </a:fld>
             <a:endParaRPr lang="es-ES"/>
           </a:p>
@@ -1205,7 +1422,7 @@
 </p:notes>
 </file>
 
-<file path=ppt/notesSlides/notesSlide5.xml><?xml version="1.0" encoding="utf-8"?>
+<file path=ppt/notesSlides/notesSlide6.xml><?xml version="1.0" encoding="utf-8"?>
 <p:notes xmlns:a="http://schemas.openxmlformats.org/drawingml/2006/main" xmlns:r="http://schemas.openxmlformats.org/officeDocument/2006/relationships" xmlns:p="http://schemas.openxmlformats.org/presentationml/2006/main">
   <p:cSld>
     <p:spTree>
@@ -1294,7 +1511,7 @@
           <a:p>
             <a:fld id="{676223B9-C868-4436-87D9-1A3152E1157A}" type="slidenum">
               <a:rPr lang="es-ES" smtClean="0"/>
-              <a:t>14</a:t>
+              <a:t>15</a:t>
             </a:fld>
             <a:endParaRPr lang="es-ES"/>
           </a:p>
@@ -1313,7 +1530,7 @@
 </p:notes>
 </file>
 
-<file path=ppt/notesSlides/notesSlide6.xml><?xml version="1.0" encoding="utf-8"?>
+<file path=ppt/notesSlides/notesSlide7.xml><?xml version="1.0" encoding="utf-8"?>
 <p:notes xmlns:a="http://schemas.openxmlformats.org/drawingml/2006/main" xmlns:r="http://schemas.openxmlformats.org/officeDocument/2006/relationships" xmlns:p="http://schemas.openxmlformats.org/presentationml/2006/main">
   <p:cSld>
     <p:spTree>
@@ -1402,7 +1619,7 @@
           <a:p>
             <a:fld id="{676223B9-C868-4436-87D9-1A3152E1157A}" type="slidenum">
               <a:rPr lang="es-ES" smtClean="0"/>
-              <a:t>15</a:t>
+              <a:t>16</a:t>
             </a:fld>
             <a:endParaRPr lang="es-ES"/>
           </a:p>
@@ -1421,7 +1638,7 @@
 </p:notes>
 </file>
 
-<file path=ppt/notesSlides/notesSlide7.xml><?xml version="1.0" encoding="utf-8"?>
+<file path=ppt/notesSlides/notesSlide8.xml><?xml version="1.0" encoding="utf-8"?>
 <p:notes xmlns:a="http://schemas.openxmlformats.org/drawingml/2006/main" xmlns:r="http://schemas.openxmlformats.org/officeDocument/2006/relationships" xmlns:p="http://schemas.openxmlformats.org/presentationml/2006/main">
   <p:cSld>
     <p:spTree>
@@ -1510,7 +1727,7 @@
           <a:p>
             <a:fld id="{676223B9-C868-4436-87D9-1A3152E1157A}" type="slidenum">
               <a:rPr lang="es-ES" smtClean="0"/>
-              <a:t>16</a:t>
+              <a:t>17</a:t>
             </a:fld>
             <a:endParaRPr lang="es-ES"/>
           </a:p>
@@ -1529,7 +1746,7 @@
 </p:notes>
 </file>
 
-<file path=ppt/notesSlides/notesSlide8.xml><?xml version="1.0" encoding="utf-8"?>
+<file path=ppt/notesSlides/notesSlide9.xml><?xml version="1.0" encoding="utf-8"?>
 <p:notes xmlns:a="http://schemas.openxmlformats.org/drawingml/2006/main" xmlns:r="http://schemas.openxmlformats.org/officeDocument/2006/relationships" xmlns:p="http://schemas.openxmlformats.org/presentationml/2006/main">
   <p:cSld>
     <p:spTree>
@@ -1618,7 +1835,7 @@
           <a:p>
             <a:fld id="{676223B9-C868-4436-87D9-1A3152E1157A}" type="slidenum">
               <a:rPr lang="es-ES" smtClean="0"/>
-              <a:t>17</a:t>
+              <a:t>18</a:t>
             </a:fld>
             <a:endParaRPr lang="es-ES"/>
           </a:p>
@@ -1628,114 +1845,6 @@
     <p:extLst>
       <p:ext uri="{BB962C8B-B14F-4D97-AF65-F5344CB8AC3E}">
         <p14:creationId xmlns:p14="http://schemas.microsoft.com/office/powerpoint/2010/main" val="2917382716"/>
-      </p:ext>
-    </p:extLst>
-  </p:cSld>
-  <p:clrMapOvr>
-    <a:masterClrMapping/>
-  </p:clrMapOvr>
-</p:notes>
-</file>
-
-<file path=ppt/notesSlides/notesSlide9.xml><?xml version="1.0" encoding="utf-8"?>
-<p:notes xmlns:a="http://schemas.openxmlformats.org/drawingml/2006/main" xmlns:r="http://schemas.openxmlformats.org/officeDocument/2006/relationships" xmlns:p="http://schemas.openxmlformats.org/presentationml/2006/main">
-  <p:cSld>
-    <p:spTree>
-      <p:nvGrpSpPr>
-        <p:cNvPr id="1" name="">
-          <a:extLst>
-            <a:ext uri="{FF2B5EF4-FFF2-40B4-BE49-F238E27FC236}">
-              <a16:creationId xmlns:a16="http://schemas.microsoft.com/office/drawing/2014/main" id="{FEC4E6C5-6855-F1A0-D8D0-56C3AF90C0DF}"/>
-            </a:ext>
-          </a:extLst>
-        </p:cNvPr>
-        <p:cNvGrpSpPr/>
-        <p:nvPr/>
-      </p:nvGrpSpPr>
-      <p:grpSpPr>
-        <a:xfrm>
-          <a:off x="0" y="0"/>
-          <a:ext cx="0" cy="0"/>
-          <a:chOff x="0" y="0"/>
-          <a:chExt cx="0" cy="0"/>
-        </a:xfrm>
-      </p:grpSpPr>
-      <p:sp>
-        <p:nvSpPr>
-          <p:cNvPr id="2" name="Marcador de imagen de diapositiva 1">
-            <a:extLst>
-              <a:ext uri="{FF2B5EF4-FFF2-40B4-BE49-F238E27FC236}">
-                <a16:creationId xmlns:a16="http://schemas.microsoft.com/office/drawing/2014/main" id="{39E5A019-088C-0A7F-9630-07781EE5EAC2}"/>
-              </a:ext>
-            </a:extLst>
-          </p:cNvPr>
-          <p:cNvSpPr>
-            <a:spLocks noGrp="1" noRot="1" noChangeAspect="1"/>
-          </p:cNvSpPr>
-          <p:nvPr>
-            <p:ph type="sldImg"/>
-          </p:nvPr>
-        </p:nvSpPr>
-        <p:spPr/>
-      </p:sp>
-      <p:sp>
-        <p:nvSpPr>
-          <p:cNvPr id="3" name="Marcador de notas 2">
-            <a:extLst>
-              <a:ext uri="{FF2B5EF4-FFF2-40B4-BE49-F238E27FC236}">
-                <a16:creationId xmlns:a16="http://schemas.microsoft.com/office/drawing/2014/main" id="{C773C0A4-7BB0-6298-F2E9-A80EA26537AF}"/>
-              </a:ext>
-            </a:extLst>
-          </p:cNvPr>
-          <p:cNvSpPr>
-            <a:spLocks noGrp="1"/>
-          </p:cNvSpPr>
-          <p:nvPr>
-            <p:ph type="body" idx="1"/>
-          </p:nvPr>
-        </p:nvSpPr>
-        <p:spPr/>
-        <p:txBody>
-          <a:bodyPr/>
-          <a:lstStyle/>
-          <a:p>
-            <a:endParaRPr lang="es-ES" dirty="0"/>
-          </a:p>
-        </p:txBody>
-      </p:sp>
-      <p:sp>
-        <p:nvSpPr>
-          <p:cNvPr id="4" name="Marcador de número de diapositiva 3">
-            <a:extLst>
-              <a:ext uri="{FF2B5EF4-FFF2-40B4-BE49-F238E27FC236}">
-                <a16:creationId xmlns:a16="http://schemas.microsoft.com/office/drawing/2014/main" id="{23B64994-6E1A-B581-2E34-CA7C3C75CE7E}"/>
-              </a:ext>
-            </a:extLst>
-          </p:cNvPr>
-          <p:cNvSpPr>
-            <a:spLocks noGrp="1"/>
-          </p:cNvSpPr>
-          <p:nvPr>
-            <p:ph type="sldNum" sz="quarter" idx="5"/>
-          </p:nvPr>
-        </p:nvSpPr>
-        <p:spPr/>
-        <p:txBody>
-          <a:bodyPr/>
-          <a:lstStyle/>
-          <a:p>
-            <a:fld id="{676223B9-C868-4436-87D9-1A3152E1157A}" type="slidenum">
-              <a:rPr lang="es-ES" smtClean="0"/>
-              <a:t>18</a:t>
-            </a:fld>
-            <a:endParaRPr lang="es-ES"/>
-          </a:p>
-        </p:txBody>
-      </p:sp>
-    </p:spTree>
-    <p:extLst>
-      <p:ext uri="{BB962C8B-B14F-4D97-AF65-F5344CB8AC3E}">
-        <p14:creationId xmlns:p14="http://schemas.microsoft.com/office/powerpoint/2010/main" val="3300330349"/>
       </p:ext>
     </p:extLst>
   </p:cSld>
@@ -3294,14 +3403,14 @@
                 <a:latin typeface="Arial"/>
                 <a:cs typeface="Arial"/>
               </a:rPr>
-              <a:t>Student</a:t>
+              <a:t>Student:Roberto</a:t>
             </a:r>
             <a:r>
               <a:rPr lang="es-ES" spc="165" dirty="0">
                 <a:latin typeface="Arial"/>
                 <a:cs typeface="Arial"/>
               </a:rPr>
-              <a:t>: </a:t>
+              <a:t> Fernández Sevilla </a:t>
             </a:r>
             <a:endParaRPr sz="1800" dirty="0">
               <a:latin typeface="Arial"/>
@@ -3377,6 +3486,489 @@
 </file>
 
 <file path=ppt/slides/slide10.xml><?xml version="1.0" encoding="utf-8"?>
+<p:sld xmlns:a="http://schemas.openxmlformats.org/drawingml/2006/main" xmlns:r="http://schemas.openxmlformats.org/officeDocument/2006/relationships" xmlns:p="http://schemas.openxmlformats.org/presentationml/2006/main">
+  <p:cSld>
+    <p:spTree>
+      <p:nvGrpSpPr>
+        <p:cNvPr id="1" name="">
+          <a:extLst>
+            <a:ext uri="{FF2B5EF4-FFF2-40B4-BE49-F238E27FC236}">
+              <a16:creationId xmlns:a16="http://schemas.microsoft.com/office/drawing/2014/main" id="{A9FFCAF2-4CAF-3724-5E41-A350B5EDA2FD}"/>
+            </a:ext>
+          </a:extLst>
+        </p:cNvPr>
+        <p:cNvGrpSpPr/>
+        <p:nvPr/>
+      </p:nvGrpSpPr>
+      <p:grpSpPr>
+        <a:xfrm>
+          <a:off x="0" y="0"/>
+          <a:ext cx="0" cy="0"/>
+          <a:chOff x="0" y="0"/>
+          <a:chExt cx="0" cy="0"/>
+        </a:xfrm>
+      </p:grpSpPr>
+      <p:sp>
+        <p:nvSpPr>
+          <p:cNvPr id="2" name="Título 1">
+            <a:extLst>
+              <a:ext uri="{FF2B5EF4-FFF2-40B4-BE49-F238E27FC236}">
+                <a16:creationId xmlns:a16="http://schemas.microsoft.com/office/drawing/2014/main" id="{4337D877-2605-BB40-43D4-940E277FCE45}"/>
+              </a:ext>
+            </a:extLst>
+          </p:cNvPr>
+          <p:cNvSpPr>
+            <a:spLocks noGrp="1"/>
+          </p:cNvSpPr>
+          <p:nvPr>
+            <p:ph type="title"/>
+          </p:nvPr>
+        </p:nvSpPr>
+        <p:spPr/>
+        <p:txBody>
+          <a:bodyPr/>
+          <a:lstStyle/>
+          <a:p>
+            <a:r>
+              <a:rPr lang="es-ES" dirty="0" err="1"/>
+              <a:t>Unbalanced</a:t>
+            </a:r>
+            <a:r>
+              <a:rPr lang="es-ES" dirty="0"/>
+              <a:t> </a:t>
+            </a:r>
+            <a:r>
+              <a:rPr lang="es-ES" dirty="0" err="1"/>
+              <a:t>configuration</a:t>
+            </a:r>
+            <a:r>
+              <a:rPr lang="es-ES" dirty="0"/>
+              <a:t> –</a:t>
+            </a:r>
+            <a:r>
+              <a:rPr lang="es-ES" dirty="0" err="1"/>
+              <a:t>Phase</a:t>
+            </a:r>
+            <a:r>
+              <a:rPr lang="es-ES" dirty="0"/>
+              <a:t> </a:t>
+            </a:r>
+            <a:r>
+              <a:rPr lang="es-ES" dirty="0" err="1"/>
+              <a:t>Difference</a:t>
+            </a:r>
+            <a:r>
+              <a:rPr lang="es-ES" dirty="0"/>
+              <a:t> </a:t>
+            </a:r>
+          </a:p>
+        </p:txBody>
+      </p:sp>
+      <p:sp>
+        <p:nvSpPr>
+          <p:cNvPr id="4" name="Marcador de pie de página 3">
+            <a:extLst>
+              <a:ext uri="{FF2B5EF4-FFF2-40B4-BE49-F238E27FC236}">
+                <a16:creationId xmlns:a16="http://schemas.microsoft.com/office/drawing/2014/main" id="{E952A2EF-B619-D84B-C41B-713072E0CB84}"/>
+              </a:ext>
+            </a:extLst>
+          </p:cNvPr>
+          <p:cNvSpPr>
+            <a:spLocks noGrp="1"/>
+          </p:cNvSpPr>
+          <p:nvPr>
+            <p:ph type="ftr" sz="quarter" idx="5"/>
+          </p:nvPr>
+        </p:nvSpPr>
+        <p:spPr/>
+        <p:txBody>
+          <a:bodyPr/>
+          <a:lstStyle/>
+          <a:p>
+            <a:pPr marL="12700">
+              <a:spcBef>
+                <a:spcPts val="15"/>
+              </a:spcBef>
+            </a:pPr>
+            <a:r>
+              <a:rPr lang="es-ES" spc="-5"/>
+              <a:t>LAB 3. INTERFEROMETERS I</a:t>
+            </a:r>
+            <a:endParaRPr lang="es-ES" spc="-5" dirty="0"/>
+          </a:p>
+        </p:txBody>
+      </p:sp>
+      <p:sp>
+        <p:nvSpPr>
+          <p:cNvPr id="5" name="Marcador de número de diapositiva 4">
+            <a:extLst>
+              <a:ext uri="{FF2B5EF4-FFF2-40B4-BE49-F238E27FC236}">
+                <a16:creationId xmlns:a16="http://schemas.microsoft.com/office/drawing/2014/main" id="{DBA817EB-9F2F-0DD7-3B41-D3F255B2C785}"/>
+              </a:ext>
+            </a:extLst>
+          </p:cNvPr>
+          <p:cNvSpPr>
+            <a:spLocks noGrp="1"/>
+          </p:cNvSpPr>
+          <p:nvPr>
+            <p:ph type="sldNum" sz="quarter" idx="7"/>
+          </p:nvPr>
+        </p:nvSpPr>
+        <p:spPr/>
+        <p:txBody>
+          <a:bodyPr/>
+          <a:lstStyle/>
+          <a:p>
+            <a:fld id="{B6F15528-21DE-4FAA-801E-634DDDAF4B2B}" type="slidenum">
+              <a:rPr lang="es-ES" smtClean="0"/>
+              <a:t>10</a:t>
+            </a:fld>
+            <a:endParaRPr lang="es-ES"/>
+          </a:p>
+        </p:txBody>
+      </p:sp>
+      <p:sp>
+        <p:nvSpPr>
+          <p:cNvPr id="9" name="CuadroTexto 8">
+            <a:extLst>
+              <a:ext uri="{FF2B5EF4-FFF2-40B4-BE49-F238E27FC236}">
+                <a16:creationId xmlns:a16="http://schemas.microsoft.com/office/drawing/2014/main" id="{B1B56D5A-D857-F6BF-9581-DE217714D775}"/>
+              </a:ext>
+            </a:extLst>
+          </p:cNvPr>
+          <p:cNvSpPr txBox="1"/>
+          <p:nvPr/>
+        </p:nvSpPr>
+        <p:spPr>
+          <a:xfrm>
+            <a:off x="5426365" y="2133600"/>
+            <a:ext cx="6128326" cy="646331"/>
+          </a:xfrm>
+          <a:prstGeom prst="rect">
+            <a:avLst/>
+          </a:prstGeom>
+          <a:noFill/>
+        </p:spPr>
+        <p:txBody>
+          <a:bodyPr wrap="square">
+            <a:spAutoFit/>
+          </a:bodyPr>
+          <a:lstStyle/>
+          <a:p>
+            <a:endParaRPr lang="en-US" dirty="0"/>
+          </a:p>
+          <a:p>
+            <a:endParaRPr lang="es-ES" dirty="0"/>
+          </a:p>
+        </p:txBody>
+      </p:sp>
+      <p:pic>
+        <p:nvPicPr>
+          <p:cNvPr id="8" name="Imagen 7">
+            <a:extLst>
+              <a:ext uri="{FF2B5EF4-FFF2-40B4-BE49-F238E27FC236}">
+                <a16:creationId xmlns:a16="http://schemas.microsoft.com/office/drawing/2014/main" id="{8FEC3C99-BB92-EE36-CF0A-51CF71688A9E}"/>
+              </a:ext>
+            </a:extLst>
+          </p:cNvPr>
+          <p:cNvPicPr>
+            <a:picLocks noChangeAspect="1"/>
+          </p:cNvPicPr>
+          <p:nvPr/>
+        </p:nvPicPr>
+        <p:blipFill>
+          <a:blip r:embed="rId2">
+            <a:extLst>
+              <a:ext uri="{28A0092B-C50C-407E-A947-70E740481C1C}">
+                <a14:useLocalDpi xmlns:a14="http://schemas.microsoft.com/office/drawing/2010/main" val="0"/>
+              </a:ext>
+            </a:extLst>
+          </a:blip>
+          <a:srcRect/>
+          <a:stretch/>
+        </p:blipFill>
+        <p:spPr>
+          <a:xfrm>
+            <a:off x="305161" y="575600"/>
+            <a:ext cx="10044841" cy="872200"/>
+          </a:xfrm>
+          <a:prstGeom prst="rect">
+            <a:avLst/>
+          </a:prstGeom>
+        </p:spPr>
+      </p:pic>
+      <p:sp>
+        <p:nvSpPr>
+          <p:cNvPr id="10" name="CuadroTexto 9">
+            <a:extLst>
+              <a:ext uri="{FF2B5EF4-FFF2-40B4-BE49-F238E27FC236}">
+                <a16:creationId xmlns:a16="http://schemas.microsoft.com/office/drawing/2014/main" id="{2DB85571-0C8A-62B2-4D04-46C7FCF54DA6}"/>
+              </a:ext>
+            </a:extLst>
+          </p:cNvPr>
+          <p:cNvSpPr txBox="1"/>
+          <p:nvPr/>
+        </p:nvSpPr>
+        <p:spPr>
+          <a:xfrm>
+            <a:off x="609600" y="5061554"/>
+            <a:ext cx="10439400" cy="1200329"/>
+          </a:xfrm>
+          <a:prstGeom prst="rect">
+            <a:avLst/>
+          </a:prstGeom>
+          <a:noFill/>
+        </p:spPr>
+        <p:txBody>
+          <a:bodyPr wrap="square">
+            <a:spAutoFit/>
+          </a:bodyPr>
+          <a:lstStyle/>
+          <a:p>
+            <a:r>
+              <a:rPr lang="en-US" dirty="0"/>
+              <a:t>Al </a:t>
+            </a:r>
+            <a:r>
+              <a:rPr lang="en-US" dirty="0" err="1"/>
+              <a:t>varirar</a:t>
+            </a:r>
+            <a:r>
+              <a:rPr lang="en-US" dirty="0"/>
+              <a:t> </a:t>
+            </a:r>
+            <a:r>
+              <a:rPr lang="en-US" dirty="0" err="1"/>
+              <a:t>el</a:t>
+            </a:r>
+            <a:r>
+              <a:rPr lang="en-US" dirty="0"/>
+              <a:t> </a:t>
+            </a:r>
+            <a:r>
+              <a:rPr lang="en-US" dirty="0" err="1"/>
+              <a:t>índice</a:t>
+            </a:r>
+            <a:r>
+              <a:rPr lang="en-US" dirty="0"/>
+              <a:t> </a:t>
+            </a:r>
+            <a:r>
+              <a:rPr lang="en-US" dirty="0" err="1"/>
+              <a:t>efectivo</a:t>
+            </a:r>
+            <a:r>
+              <a:rPr lang="en-US" dirty="0"/>
+              <a:t> </a:t>
+            </a:r>
+            <a:r>
+              <a:rPr lang="en-US" dirty="0" err="1"/>
+              <a:t>en</a:t>
+            </a:r>
+            <a:r>
+              <a:rPr lang="en-US" dirty="0"/>
+              <a:t> mayor o </a:t>
+            </a:r>
+            <a:r>
+              <a:rPr lang="en-US" dirty="0" err="1"/>
+              <a:t>menor</a:t>
+            </a:r>
+            <a:r>
+              <a:rPr lang="en-US" dirty="0"/>
+              <a:t> </a:t>
+            </a:r>
+            <a:r>
+              <a:rPr lang="en-US" dirty="0" err="1"/>
+              <a:t>medida</a:t>
+            </a:r>
+            <a:r>
+              <a:rPr lang="en-US" dirty="0"/>
+              <a:t> de uno de </a:t>
+            </a:r>
+            <a:r>
+              <a:rPr lang="en-US" dirty="0" err="1"/>
+              <a:t>los</a:t>
+            </a:r>
+            <a:r>
+              <a:rPr lang="en-US" dirty="0"/>
+              <a:t> </a:t>
+            </a:r>
+            <a:r>
+              <a:rPr lang="en-US" dirty="0" err="1"/>
+              <a:t>brazos</a:t>
+            </a:r>
+            <a:r>
+              <a:rPr lang="en-US" dirty="0"/>
+              <a:t>, </a:t>
+            </a:r>
+            <a:r>
+              <a:rPr lang="en-US" dirty="0" err="1"/>
+              <a:t>podemos</a:t>
+            </a:r>
+            <a:r>
+              <a:rPr lang="en-US" dirty="0"/>
+              <a:t> </a:t>
+            </a:r>
+            <a:r>
+              <a:rPr lang="en-US" dirty="0" err="1"/>
+              <a:t>controlar</a:t>
+            </a:r>
+            <a:r>
+              <a:rPr lang="en-US" dirty="0"/>
+              <a:t> la </a:t>
+            </a:r>
+            <a:r>
+              <a:rPr lang="en-US" dirty="0" err="1"/>
+              <a:t>potencia</a:t>
+            </a:r>
+            <a:r>
+              <a:rPr lang="en-US" dirty="0"/>
+              <a:t> </a:t>
+            </a:r>
+            <a:r>
+              <a:rPr lang="en-US" dirty="0" err="1"/>
+              <a:t>que</a:t>
+            </a:r>
+            <a:r>
+              <a:rPr lang="en-US" dirty="0"/>
+              <a:t> sale de </a:t>
+            </a:r>
+            <a:r>
+              <a:rPr lang="en-US" dirty="0" err="1"/>
+              <a:t>los</a:t>
+            </a:r>
+            <a:r>
+              <a:rPr lang="en-US" dirty="0"/>
+              <a:t> </a:t>
+            </a:r>
+            <a:r>
+              <a:rPr lang="en-US" dirty="0" err="1"/>
+              <a:t>puertos</a:t>
+            </a:r>
+            <a:r>
+              <a:rPr lang="en-US" dirty="0"/>
+              <a:t> para </a:t>
+            </a:r>
+            <a:r>
+              <a:rPr lang="en-US" dirty="0" err="1"/>
+              <a:t>una</a:t>
+            </a:r>
+            <a:r>
+              <a:rPr lang="en-US" dirty="0"/>
+              <a:t> </a:t>
+            </a:r>
+            <a:r>
+              <a:rPr lang="en-US" dirty="0" err="1"/>
+              <a:t>determinada</a:t>
+            </a:r>
+            <a:r>
+              <a:rPr lang="en-US" dirty="0"/>
+              <a:t> </a:t>
+            </a:r>
+            <a:r>
+              <a:rPr lang="en-US" dirty="0" err="1"/>
+              <a:t>longitud</a:t>
+            </a:r>
+            <a:r>
+              <a:rPr lang="en-US" dirty="0"/>
+              <a:t> de </a:t>
+            </a:r>
+            <a:r>
+              <a:rPr lang="en-US" dirty="0" err="1"/>
+              <a:t>onda</a:t>
+            </a:r>
+            <a:r>
+              <a:rPr lang="en-US" dirty="0"/>
+              <a:t>.   </a:t>
+            </a:r>
+          </a:p>
+          <a:p>
+            <a:endParaRPr lang="en-US" dirty="0"/>
+          </a:p>
+          <a:p>
+            <a:endParaRPr lang="es-ES" dirty="0"/>
+          </a:p>
+        </p:txBody>
+      </p:sp>
+      <p:pic>
+        <p:nvPicPr>
+          <p:cNvPr id="3" name="Imagen 2">
+            <a:extLst>
+              <a:ext uri="{FF2B5EF4-FFF2-40B4-BE49-F238E27FC236}">
+                <a16:creationId xmlns:a16="http://schemas.microsoft.com/office/drawing/2014/main" id="{0763DAF3-932E-71E0-53E4-8B79009188C8}"/>
+              </a:ext>
+            </a:extLst>
+          </p:cNvPr>
+          <p:cNvPicPr>
+            <a:picLocks noChangeAspect="1"/>
+          </p:cNvPicPr>
+          <p:nvPr/>
+        </p:nvPicPr>
+        <p:blipFill>
+          <a:blip r:embed="rId3"/>
+          <a:stretch>
+            <a:fillRect/>
+          </a:stretch>
+        </p:blipFill>
+        <p:spPr>
+          <a:xfrm>
+            <a:off x="6471228" y="1574149"/>
+            <a:ext cx="4038600" cy="3190214"/>
+          </a:xfrm>
+          <a:prstGeom prst="rect">
+            <a:avLst/>
+          </a:prstGeom>
+        </p:spPr>
+      </p:pic>
+      <p:pic>
+        <p:nvPicPr>
+          <p:cNvPr id="11" name="Imagen 10">
+            <a:extLst>
+              <a:ext uri="{FF2B5EF4-FFF2-40B4-BE49-F238E27FC236}">
+                <a16:creationId xmlns:a16="http://schemas.microsoft.com/office/drawing/2014/main" id="{2F5C511F-3413-3D2F-3F95-259AFCFBCC2C}"/>
+              </a:ext>
+            </a:extLst>
+          </p:cNvPr>
+          <p:cNvPicPr>
+            <a:picLocks noChangeAspect="1"/>
+          </p:cNvPicPr>
+          <p:nvPr/>
+        </p:nvPicPr>
+        <p:blipFill>
+          <a:blip r:embed="rId4">
+            <a:extLst>
+              <a:ext uri="{28A0092B-C50C-407E-A947-70E740481C1C}">
+                <a14:useLocalDpi xmlns:a14="http://schemas.microsoft.com/office/drawing/2010/main" val="0"/>
+              </a:ext>
+            </a:extLst>
+          </a:blip>
+          <a:srcRect t="384" b="384"/>
+          <a:stretch/>
+        </p:blipFill>
+        <p:spPr>
+          <a:xfrm>
+            <a:off x="1066800" y="1508871"/>
+            <a:ext cx="4038599" cy="3239122"/>
+          </a:xfrm>
+          <a:prstGeom prst="rect">
+            <a:avLst/>
+          </a:prstGeom>
+        </p:spPr>
+      </p:pic>
+    </p:spTree>
+    <p:extLst>
+      <p:ext uri="{BB962C8B-B14F-4D97-AF65-F5344CB8AC3E}">
+        <p14:creationId xmlns:p14="http://schemas.microsoft.com/office/powerpoint/2010/main" val="1338821209"/>
+      </p:ext>
+    </p:extLst>
+  </p:cSld>
+  <p:clrMapOvr>
+    <a:masterClrMapping/>
+  </p:clrMapOvr>
+</p:sld>
+</file>
+
+<file path=ppt/slides/slide11.xml><?xml version="1.0" encoding="utf-8"?>
 <p:sld xmlns:a="http://schemas.openxmlformats.org/drawingml/2006/main" xmlns:r="http://schemas.openxmlformats.org/officeDocument/2006/relationships" xmlns:p="http://schemas.openxmlformats.org/presentationml/2006/main">
   <p:cSld>
     <p:spTree>
@@ -3504,7 +4096,7 @@
           <a:p>
             <a:fld id="{B6F15528-21DE-4FAA-801E-634DDDAF4B2B}" type="slidenum">
               <a:rPr lang="es-ES" smtClean="0"/>
-              <a:t>10</a:t>
+              <a:t>11</a:t>
             </a:fld>
             <a:endParaRPr lang="es-ES"/>
           </a:p>
@@ -3781,7 +4373,15 @@
             </a:r>
             <a:r>
               <a:rPr lang="en-US" dirty="0"/>
-              <a:t> la longitude de uno de </a:t>
+              <a:t> la </a:t>
+            </a:r>
+            <a:r>
+              <a:rPr lang="en-US" dirty="0" err="1"/>
+              <a:t>longitud</a:t>
+            </a:r>
+            <a:r>
+              <a:rPr lang="en-US" dirty="0"/>
+              <a:t> de uno de </a:t>
             </a:r>
             <a:r>
               <a:rPr lang="en-US" dirty="0" err="1"/>
@@ -3925,7 +4525,15 @@
             </a:r>
             <a:r>
               <a:rPr lang="en-US" dirty="0"/>
-              <a:t> de longitude </a:t>
+              <a:t> de </a:t>
+            </a:r>
+            <a:r>
+              <a:rPr lang="en-US" dirty="0" err="1"/>
+              <a:t>longitud</a:t>
+            </a:r>
+            <a:r>
+              <a:rPr lang="en-US" dirty="0"/>
+              <a:t> </a:t>
             </a:r>
             <a:r>
               <a:rPr lang="en-US" dirty="0" err="1"/>
@@ -4015,7 +4623,7 @@
 </p:sld>
 </file>
 
-<file path=ppt/slides/slide11.xml><?xml version="1.0" encoding="utf-8"?>
+<file path=ppt/slides/slide12.xml><?xml version="1.0" encoding="utf-8"?>
 <p:sld xmlns:a="http://schemas.openxmlformats.org/drawingml/2006/main" xmlns:r="http://schemas.openxmlformats.org/officeDocument/2006/relationships" xmlns:p="http://schemas.openxmlformats.org/presentationml/2006/main">
   <p:cSld>
     <p:spTree>
@@ -4230,7 +4838,7 @@
           <a:p>
             <a:fld id="{B6F15528-21DE-4FAA-801E-634DDDAF4B2B}" type="slidenum">
               <a:rPr lang="es-ES" smtClean="0"/>
-              <a:t>11</a:t>
+              <a:t>12</a:t>
             </a:fld>
             <a:endParaRPr lang="es-ES"/>
           </a:p>
@@ -4793,7 +5401,7 @@
 </p:sld>
 </file>
 
-<file path=ppt/slides/slide12.xml><?xml version="1.0" encoding="utf-8"?>
+<file path=ppt/slides/slide13.xml><?xml version="1.0" encoding="utf-8"?>
 <p:sld xmlns:a="http://schemas.openxmlformats.org/drawingml/2006/main" xmlns:r="http://schemas.openxmlformats.org/officeDocument/2006/relationships" xmlns:p="http://schemas.openxmlformats.org/presentationml/2006/main">
   <p:cSld>
     <p:spTree>
@@ -4816,8 +5424,8 @@
           <a:chExt cx="0" cy="0"/>
         </a:xfrm>
       </p:grpSpPr>
-      <mc:AlternateContent xmlns:mc="http://schemas.openxmlformats.org/markup-compatibility/2006">
-        <mc:Choice xmlns:a14="http://schemas.microsoft.com/office/drawing/2010/main" Requires="a14">
+      <mc:AlternateContent xmlns:mc="http://schemas.openxmlformats.org/markup-compatibility/2006" xmlns:a14="http://schemas.microsoft.com/office/drawing/2010/main">
+        <mc:Choice Requires="a14">
           <p:sp>
             <p:nvSpPr>
               <p:cNvPr id="16" name="object 16">
@@ -4902,7 +5510,7 @@
             </p:txBody>
           </p:sp>
         </mc:Choice>
-        <mc:Fallback>
+        <mc:Fallback xmlns="">
           <p:sp>
             <p:nvSpPr>
               <p:cNvPr id="16" name="object 16">
@@ -5008,7 +5616,7 @@
           <a:p>
             <a:fld id="{B6F15528-21DE-4FAA-801E-634DDDAF4B2B}" type="slidenum">
               <a:rPr lang="es-ES" smtClean="0"/>
-              <a:t>12</a:t>
+              <a:t>13</a:t>
             </a:fld>
             <a:endParaRPr lang="es-ES"/>
           </a:p>
@@ -6823,7 +7431,7 @@
 </p:sld>
 </file>
 
-<file path=ppt/slides/slide13.xml><?xml version="1.0" encoding="utf-8"?>
+<file path=ppt/slides/slide14.xml><?xml version="1.0" encoding="utf-8"?>
 <p:sld xmlns:a="http://schemas.openxmlformats.org/drawingml/2006/main" xmlns:r="http://schemas.openxmlformats.org/officeDocument/2006/relationships" xmlns:p="http://schemas.openxmlformats.org/presentationml/2006/main">
   <p:cSld>
     <p:spTree>
@@ -6846,8 +7454,8 @@
           <a:chExt cx="0" cy="0"/>
         </a:xfrm>
       </p:grpSpPr>
-      <mc:AlternateContent xmlns:mc="http://schemas.openxmlformats.org/markup-compatibility/2006">
-        <mc:Choice xmlns:a14="http://schemas.microsoft.com/office/drawing/2010/main" Requires="a14">
+      <mc:AlternateContent xmlns:mc="http://schemas.openxmlformats.org/markup-compatibility/2006" xmlns:a14="http://schemas.microsoft.com/office/drawing/2010/main">
+        <mc:Choice Requires="a14">
           <p:sp>
             <p:nvSpPr>
               <p:cNvPr id="16" name="object 16">
@@ -6932,7 +7540,7 @@
             </p:txBody>
           </p:sp>
         </mc:Choice>
-        <mc:Fallback>
+        <mc:Fallback xmlns="">
           <p:sp>
             <p:nvSpPr>
               <p:cNvPr id="16" name="object 16">
@@ -7038,14 +7646,14 @@
           <a:p>
             <a:fld id="{B6F15528-21DE-4FAA-801E-634DDDAF4B2B}" type="slidenum">
               <a:rPr lang="es-ES" smtClean="0"/>
-              <a:t>13</a:t>
+              <a:t>14</a:t>
             </a:fld>
             <a:endParaRPr lang="es-ES"/>
           </a:p>
         </p:txBody>
       </p:sp>
-      <mc:AlternateContent xmlns:mc="http://schemas.openxmlformats.org/markup-compatibility/2006">
-        <mc:Choice xmlns:a14="http://schemas.microsoft.com/office/drawing/2010/main" Requires="a14">
+      <mc:AlternateContent xmlns:mc="http://schemas.openxmlformats.org/markup-compatibility/2006" xmlns:a14="http://schemas.microsoft.com/office/drawing/2010/main">
+        <mc:Choice Requires="a14">
           <p:sp>
             <p:nvSpPr>
               <p:cNvPr id="4" name="Marcador de texto 2">
@@ -7300,7 +7908,7 @@
             </p:txBody>
           </p:sp>
         </mc:Choice>
-        <mc:Fallback>
+        <mc:Fallback xmlns="">
           <p:sp>
             <p:nvSpPr>
               <p:cNvPr id="4" name="Marcador de texto 2">
@@ -7462,7 +8070,7 @@
 </p:sld>
 </file>
 
-<file path=ppt/slides/slide14.xml><?xml version="1.0" encoding="utf-8"?>
+<file path=ppt/slides/slide15.xml><?xml version="1.0" encoding="utf-8"?>
 <p:sld xmlns:a="http://schemas.openxmlformats.org/drawingml/2006/main" xmlns:r="http://schemas.openxmlformats.org/officeDocument/2006/relationships" xmlns:p="http://schemas.openxmlformats.org/presentationml/2006/main">
   <p:cSld>
     <p:spTree>
@@ -7485,8 +8093,8 @@
           <a:chExt cx="0" cy="0"/>
         </a:xfrm>
       </p:grpSpPr>
-      <mc:AlternateContent xmlns:mc="http://schemas.openxmlformats.org/markup-compatibility/2006">
-        <mc:Choice xmlns:a14="http://schemas.microsoft.com/office/drawing/2010/main" Requires="a14">
+      <mc:AlternateContent xmlns:mc="http://schemas.openxmlformats.org/markup-compatibility/2006" xmlns:a14="http://schemas.microsoft.com/office/drawing/2010/main">
+        <mc:Choice Requires="a14">
           <p:sp>
             <p:nvSpPr>
               <p:cNvPr id="16" name="object 16">
@@ -7571,7 +8179,7 @@
             </p:txBody>
           </p:sp>
         </mc:Choice>
-        <mc:Fallback>
+        <mc:Fallback xmlns="">
           <p:sp>
             <p:nvSpPr>
               <p:cNvPr id="16" name="object 16">
@@ -7677,14 +8285,14 @@
           <a:p>
             <a:fld id="{B6F15528-21DE-4FAA-801E-634DDDAF4B2B}" type="slidenum">
               <a:rPr lang="es-ES" smtClean="0"/>
-              <a:t>14</a:t>
+              <a:t>15</a:t>
             </a:fld>
             <a:endParaRPr lang="es-ES"/>
           </a:p>
         </p:txBody>
       </p:sp>
-      <mc:AlternateContent xmlns:mc="http://schemas.openxmlformats.org/markup-compatibility/2006">
-        <mc:Choice xmlns:a14="http://schemas.microsoft.com/office/drawing/2010/main" Requires="a14">
+      <mc:AlternateContent xmlns:mc="http://schemas.openxmlformats.org/markup-compatibility/2006" xmlns:a14="http://schemas.microsoft.com/office/drawing/2010/main">
+        <mc:Choice Requires="a14">
           <p:sp>
             <p:nvSpPr>
               <p:cNvPr id="4" name="Marcador de texto 2">
@@ -7943,7 +8551,7 @@
             </p:txBody>
           </p:sp>
         </mc:Choice>
-        <mc:Fallback>
+        <mc:Fallback xmlns="">
           <p:sp>
             <p:nvSpPr>
               <p:cNvPr id="4" name="Marcador de texto 2">
@@ -8166,7 +8774,7 @@
 </p:sld>
 </file>
 
-<file path=ppt/slides/slide15.xml><?xml version="1.0" encoding="utf-8"?>
+<file path=ppt/slides/slide16.xml><?xml version="1.0" encoding="utf-8"?>
 <p:sld xmlns:a="http://schemas.openxmlformats.org/drawingml/2006/main" xmlns:r="http://schemas.openxmlformats.org/officeDocument/2006/relationships" xmlns:p="http://schemas.openxmlformats.org/presentationml/2006/main">
   <p:cSld>
     <p:spTree>
@@ -8308,7 +8916,7 @@
           <a:p>
             <a:fld id="{B6F15528-21DE-4FAA-801E-634DDDAF4B2B}" type="slidenum">
               <a:rPr lang="es-ES" smtClean="0"/>
-              <a:t>15</a:t>
+              <a:t>16</a:t>
             </a:fld>
             <a:endParaRPr lang="es-ES"/>
           </a:p>
@@ -8894,7 +9502,7 @@
 </p:sld>
 </file>
 
-<file path=ppt/slides/slide16.xml><?xml version="1.0" encoding="utf-8"?>
+<file path=ppt/slides/slide17.xml><?xml version="1.0" encoding="utf-8"?>
 <p:sld xmlns:a="http://schemas.openxmlformats.org/drawingml/2006/main" xmlns:r="http://schemas.openxmlformats.org/officeDocument/2006/relationships" xmlns:p="http://schemas.openxmlformats.org/presentationml/2006/main">
   <p:cSld>
     <p:spTree>
@@ -9036,7 +9644,7 @@
           <a:p>
             <a:fld id="{B6F15528-21DE-4FAA-801E-634DDDAF4B2B}" type="slidenum">
               <a:rPr lang="es-ES" smtClean="0"/>
-              <a:t>16</a:t>
+              <a:t>17</a:t>
             </a:fld>
             <a:endParaRPr lang="es-ES"/>
           </a:p>
@@ -9434,7 +10042,7 @@
 </p:sld>
 </file>
 
-<file path=ppt/slides/slide17.xml><?xml version="1.0" encoding="utf-8"?>
+<file path=ppt/slides/slide18.xml><?xml version="1.0" encoding="utf-8"?>
 <p:sld xmlns:a="http://schemas.openxmlformats.org/drawingml/2006/main" xmlns:r="http://schemas.openxmlformats.org/officeDocument/2006/relationships" xmlns:p="http://schemas.openxmlformats.org/presentationml/2006/main">
   <p:cSld>
     <p:spTree>
@@ -9566,7 +10174,7 @@
           <a:p>
             <a:fld id="{B6F15528-21DE-4FAA-801E-634DDDAF4B2B}" type="slidenum">
               <a:rPr lang="es-ES" smtClean="0"/>
-              <a:t>17</a:t>
+              <a:t>18</a:t>
             </a:fld>
             <a:endParaRPr lang="es-ES"/>
           </a:p>
@@ -9919,7 +10527,7 @@
 </p:sld>
 </file>
 
-<file path=ppt/slides/slide18.xml><?xml version="1.0" encoding="utf-8"?>
+<file path=ppt/slides/slide19.xml><?xml version="1.0" encoding="utf-8"?>
 <p:sld xmlns:a="http://schemas.openxmlformats.org/drawingml/2006/main" xmlns:r="http://schemas.openxmlformats.org/officeDocument/2006/relationships" xmlns:p="http://schemas.openxmlformats.org/presentationml/2006/main">
   <p:cSld>
     <p:spTree>
@@ -10051,7 +10659,7 @@
           <a:p>
             <a:fld id="{B6F15528-21DE-4FAA-801E-634DDDAF4B2B}" type="slidenum">
               <a:rPr lang="es-ES" smtClean="0"/>
-              <a:t>18</a:t>
+              <a:t>19</a:t>
             </a:fld>
             <a:endParaRPr lang="es-ES"/>
           </a:p>
@@ -10329,642 +10937,6 @@
     <p:extLst>
       <p:ext uri="{BB962C8B-B14F-4D97-AF65-F5344CB8AC3E}">
         <p14:creationId xmlns:p14="http://schemas.microsoft.com/office/powerpoint/2010/main" val="1359720573"/>
-      </p:ext>
-    </p:extLst>
-  </p:cSld>
-  <p:clrMapOvr>
-    <a:masterClrMapping/>
-  </p:clrMapOvr>
-</p:sld>
-</file>
-
-<file path=ppt/slides/slide19.xml><?xml version="1.0" encoding="utf-8"?>
-<p:sld xmlns:a="http://schemas.openxmlformats.org/drawingml/2006/main" xmlns:r="http://schemas.openxmlformats.org/officeDocument/2006/relationships" xmlns:p="http://schemas.openxmlformats.org/presentationml/2006/main">
-  <p:cSld>
-    <p:spTree>
-      <p:nvGrpSpPr>
-        <p:cNvPr id="1" name="">
-          <a:extLst>
-            <a:ext uri="{FF2B5EF4-FFF2-40B4-BE49-F238E27FC236}">
-              <a16:creationId xmlns:a16="http://schemas.microsoft.com/office/drawing/2014/main" id="{63986E8E-397B-1841-9BD3-C75A054EA27F}"/>
-            </a:ext>
-          </a:extLst>
-        </p:cNvPr>
-        <p:cNvGrpSpPr/>
-        <p:nvPr/>
-      </p:nvGrpSpPr>
-      <p:grpSpPr>
-        <a:xfrm>
-          <a:off x="0" y="0"/>
-          <a:ext cx="0" cy="0"/>
-          <a:chOff x="0" y="0"/>
-          <a:chExt cx="0" cy="0"/>
-        </a:xfrm>
-      </p:grpSpPr>
-      <p:sp>
-        <p:nvSpPr>
-          <p:cNvPr id="16" name="object 16">
-            <a:extLst>
-              <a:ext uri="{FF2B5EF4-FFF2-40B4-BE49-F238E27FC236}">
-                <a16:creationId xmlns:a16="http://schemas.microsoft.com/office/drawing/2014/main" id="{716E3C5C-841C-5D62-2A1D-32F5A91EA371}"/>
-              </a:ext>
-            </a:extLst>
-          </p:cNvPr>
-          <p:cNvSpPr txBox="1">
-            <a:spLocks noGrp="1"/>
-          </p:cNvSpPr>
-          <p:nvPr>
-            <p:ph type="title"/>
-          </p:nvPr>
-        </p:nvSpPr>
-        <p:spPr>
-          <a:xfrm>
-            <a:off x="685800" y="408883"/>
-            <a:ext cx="10994410" cy="397545"/>
-          </a:xfrm>
-          <a:prstGeom prst="rect">
-            <a:avLst/>
-          </a:prstGeom>
-        </p:spPr>
-        <p:txBody>
-          <a:bodyPr vert="horz" wrap="square" lIns="0" tIns="12700" rIns="0" bIns="0" rtlCol="0">
-            <a:spAutoFit/>
-          </a:bodyPr>
-          <a:lstStyle/>
-          <a:p>
-            <a:pPr marL="12700">
-              <a:lnSpc>
-                <a:spcPct val="100000"/>
-              </a:lnSpc>
-              <a:spcBef>
-                <a:spcPts val="100"/>
-              </a:spcBef>
-            </a:pPr>
-            <a:r>
-              <a:rPr lang="en-US" sz="2500" dirty="0"/>
-              <a:t>Extra assessments </a:t>
-            </a:r>
-            <a:endParaRPr lang="en-US" sz="2500" b="0" dirty="0">
-              <a:latin typeface="+mj-lt"/>
-              <a:cs typeface="Lucida Sans"/>
-            </a:endParaRPr>
-          </a:p>
-        </p:txBody>
-      </p:sp>
-      <p:pic>
-        <p:nvPicPr>
-          <p:cNvPr id="83" name="Gráfico 82">
-            <a:extLst>
-              <a:ext uri="{FF2B5EF4-FFF2-40B4-BE49-F238E27FC236}">
-                <a16:creationId xmlns:a16="http://schemas.microsoft.com/office/drawing/2014/main" id="{043AAB1D-F7FD-2F8E-6EC0-DDC970F20DF0}"/>
-              </a:ext>
-            </a:extLst>
-          </p:cNvPr>
-          <p:cNvPicPr>
-            <a:picLocks noChangeAspect="1"/>
-          </p:cNvPicPr>
-          <p:nvPr/>
-        </p:nvPicPr>
-        <p:blipFill>
-          <a:blip r:embed="rId3">
-            <a:extLst>
-              <a:ext uri="{96DAC541-7B7A-43D3-8B79-37D633B846F1}">
-                <asvg:svgBlip xmlns:asvg="http://schemas.microsoft.com/office/drawing/2016/SVG/main" r:embed="rId4"/>
-              </a:ext>
-            </a:extLst>
-          </a:blip>
-          <a:stretch>
-            <a:fillRect/>
-          </a:stretch>
-        </p:blipFill>
-        <p:spPr>
-          <a:xfrm>
-            <a:off x="5045006" y="6356057"/>
-            <a:ext cx="6409575" cy="363174"/>
-          </a:xfrm>
-          <a:prstGeom prst="rect">
-            <a:avLst/>
-          </a:prstGeom>
-        </p:spPr>
-      </p:pic>
-      <p:sp>
-        <p:nvSpPr>
-          <p:cNvPr id="84" name="Marcador de número de diapositiva 83">
-            <a:extLst>
-              <a:ext uri="{FF2B5EF4-FFF2-40B4-BE49-F238E27FC236}">
-                <a16:creationId xmlns:a16="http://schemas.microsoft.com/office/drawing/2014/main" id="{B4B7AD11-1FD3-6AC4-BF09-4D589E8382B3}"/>
-              </a:ext>
-            </a:extLst>
-          </p:cNvPr>
-          <p:cNvSpPr>
-            <a:spLocks noGrp="1"/>
-          </p:cNvSpPr>
-          <p:nvPr>
-            <p:ph type="sldNum" sz="quarter" idx="7"/>
-          </p:nvPr>
-        </p:nvSpPr>
-        <p:spPr/>
-        <p:txBody>
-          <a:bodyPr/>
-          <a:lstStyle/>
-          <a:p>
-            <a:fld id="{B6F15528-21DE-4FAA-801E-634DDDAF4B2B}" type="slidenum">
-              <a:rPr lang="es-ES" smtClean="0"/>
-              <a:t>19</a:t>
-            </a:fld>
-            <a:endParaRPr lang="es-ES"/>
-          </a:p>
-        </p:txBody>
-      </p:sp>
-      <p:sp>
-        <p:nvSpPr>
-          <p:cNvPr id="4" name="Marcador de texto 2">
-            <a:extLst>
-              <a:ext uri="{FF2B5EF4-FFF2-40B4-BE49-F238E27FC236}">
-                <a16:creationId xmlns:a16="http://schemas.microsoft.com/office/drawing/2014/main" id="{44469A6A-D3DB-60FE-3A74-3CF213032E6A}"/>
-              </a:ext>
-            </a:extLst>
-          </p:cNvPr>
-          <p:cNvSpPr txBox="1">
-            <a:spLocks/>
-          </p:cNvSpPr>
-          <p:nvPr/>
-        </p:nvSpPr>
-        <p:spPr>
-          <a:xfrm>
-            <a:off x="608012" y="1295400"/>
-            <a:ext cx="11048999" cy="4958137"/>
-          </a:xfrm>
-          <a:prstGeom prst="rect">
-            <a:avLst/>
-          </a:prstGeom>
-        </p:spPr>
-        <p:txBody>
-          <a:bodyPr>
-            <a:normAutofit/>
-          </a:bodyPr>
-          <a:lstStyle>
-            <a:lvl1pPr marL="0">
-              <a:defRPr>
-                <a:latin typeface="+mn-lt"/>
-                <a:ea typeface="+mn-ea"/>
-                <a:cs typeface="+mn-cs"/>
-              </a:defRPr>
-            </a:lvl1pPr>
-            <a:lvl2pPr marL="457200">
-              <a:defRPr>
-                <a:latin typeface="+mn-lt"/>
-                <a:ea typeface="+mn-ea"/>
-                <a:cs typeface="+mn-cs"/>
-              </a:defRPr>
-            </a:lvl2pPr>
-            <a:lvl3pPr marL="914400">
-              <a:defRPr>
-                <a:latin typeface="+mn-lt"/>
-                <a:ea typeface="+mn-ea"/>
-                <a:cs typeface="+mn-cs"/>
-              </a:defRPr>
-            </a:lvl3pPr>
-            <a:lvl4pPr marL="1371600">
-              <a:defRPr>
-                <a:latin typeface="+mn-lt"/>
-                <a:ea typeface="+mn-ea"/>
-                <a:cs typeface="+mn-cs"/>
-              </a:defRPr>
-            </a:lvl4pPr>
-            <a:lvl5pPr marL="1828800">
-              <a:defRPr>
-                <a:latin typeface="+mn-lt"/>
-                <a:ea typeface="+mn-ea"/>
-                <a:cs typeface="+mn-cs"/>
-              </a:defRPr>
-            </a:lvl5pPr>
-            <a:lvl6pPr marL="2286000">
-              <a:defRPr>
-                <a:latin typeface="+mn-lt"/>
-                <a:ea typeface="+mn-ea"/>
-                <a:cs typeface="+mn-cs"/>
-              </a:defRPr>
-            </a:lvl6pPr>
-            <a:lvl7pPr marL="2743200">
-              <a:defRPr>
-                <a:latin typeface="+mn-lt"/>
-                <a:ea typeface="+mn-ea"/>
-                <a:cs typeface="+mn-cs"/>
-              </a:defRPr>
-            </a:lvl7pPr>
-            <a:lvl8pPr marL="3200400">
-              <a:defRPr>
-                <a:latin typeface="+mn-lt"/>
-                <a:ea typeface="+mn-ea"/>
-                <a:cs typeface="+mn-cs"/>
-              </a:defRPr>
-            </a:lvl8pPr>
-            <a:lvl9pPr marL="3657600">
-              <a:defRPr>
-                <a:latin typeface="+mn-lt"/>
-                <a:ea typeface="+mn-ea"/>
-                <a:cs typeface="+mn-cs"/>
-              </a:defRPr>
-            </a:lvl9pPr>
-          </a:lstStyle>
-          <a:p>
-            <a:r>
-              <a:rPr lang="en-US" b="1" dirty="0"/>
-              <a:t>Assessment 5. </a:t>
-            </a:r>
-            <a:r>
-              <a:rPr lang="en-US" dirty="0"/>
-              <a:t>Let's see how the response of the MZI varies with the effective index. Vary the effective index of one of the arms and analyze how the spectrum shifts. To do this, you can use the data provided in the .txt files entitled ‘</a:t>
-            </a:r>
-            <a:r>
-              <a:rPr lang="en-US" dirty="0" err="1"/>
-              <a:t>SiN</a:t>
-            </a:r>
-            <a:r>
-              <a:rPr lang="en-US" dirty="0"/>
-              <a:t>’. Can you give an example of an application where this configuration is used?</a:t>
-            </a:r>
-          </a:p>
-          <a:p>
-            <a:pPr marL="0" indent="0">
-              <a:buNone/>
-            </a:pPr>
-            <a:endParaRPr lang="en-US" dirty="0"/>
-          </a:p>
-          <a:p>
-            <a:pPr algn="just"/>
-            <a:endParaRPr lang="en-US" sz="2000" kern="0" dirty="0">
-              <a:solidFill>
-                <a:sysClr val="windowText" lastClr="000000"/>
-              </a:solidFill>
-            </a:endParaRPr>
-          </a:p>
-        </p:txBody>
-      </p:sp>
-      <p:sp>
-        <p:nvSpPr>
-          <p:cNvPr id="6" name="Marcador de pie de página 2">
-            <a:extLst>
-              <a:ext uri="{FF2B5EF4-FFF2-40B4-BE49-F238E27FC236}">
-                <a16:creationId xmlns:a16="http://schemas.microsoft.com/office/drawing/2014/main" id="{1B0E7D77-C21A-0F71-C8AE-878763F261D0}"/>
-              </a:ext>
-            </a:extLst>
-          </p:cNvPr>
-          <p:cNvSpPr>
-            <a:spLocks noGrp="1"/>
-          </p:cNvSpPr>
-          <p:nvPr>
-            <p:ph type="ftr" sz="quarter" idx="5"/>
-          </p:nvPr>
-        </p:nvSpPr>
-        <p:spPr>
-          <a:xfrm>
-            <a:off x="609600" y="6457057"/>
-            <a:ext cx="2743200" cy="184666"/>
-          </a:xfrm>
-        </p:spPr>
-        <p:txBody>
-          <a:bodyPr/>
-          <a:lstStyle/>
-          <a:p>
-            <a:pPr marL="12700">
-              <a:spcBef>
-                <a:spcPts val="15"/>
-              </a:spcBef>
-            </a:pPr>
-            <a:r>
-              <a:rPr lang="es-ES" spc="-5"/>
-              <a:t>LAB 3. INTERFEROMETERS I</a:t>
-            </a:r>
-            <a:endParaRPr lang="es-ES" spc="-5" dirty="0"/>
-          </a:p>
-        </p:txBody>
-      </p:sp>
-      <p:pic>
-        <p:nvPicPr>
-          <p:cNvPr id="5" name="Imagen 4" descr="Gráfico, Gráfico de líneas&#10;&#10;El contenido generado por IA puede ser incorrecto.">
-            <a:extLst>
-              <a:ext uri="{FF2B5EF4-FFF2-40B4-BE49-F238E27FC236}">
-                <a16:creationId xmlns:a16="http://schemas.microsoft.com/office/drawing/2014/main" id="{8F3F4BED-B61B-1C9A-F3CC-1970B22EBED1}"/>
-              </a:ext>
-            </a:extLst>
-          </p:cNvPr>
-          <p:cNvPicPr>
-            <a:picLocks noChangeAspect="1"/>
-          </p:cNvPicPr>
-          <p:nvPr/>
-        </p:nvPicPr>
-        <p:blipFill>
-          <a:blip r:embed="rId5"/>
-          <a:stretch>
-            <a:fillRect/>
-          </a:stretch>
-        </p:blipFill>
-        <p:spPr>
-          <a:xfrm>
-            <a:off x="5867399" y="2313629"/>
-            <a:ext cx="3706183" cy="2970167"/>
-          </a:xfrm>
-          <a:prstGeom prst="rect">
-            <a:avLst/>
-          </a:prstGeom>
-        </p:spPr>
-      </p:pic>
-      <p:pic>
-        <p:nvPicPr>
-          <p:cNvPr id="8" name="Imagen 7" descr="Gráfico, Gráfico de líneas&#10;&#10;El contenido generado por IA puede ser incorrecto.">
-            <a:extLst>
-              <a:ext uri="{FF2B5EF4-FFF2-40B4-BE49-F238E27FC236}">
-                <a16:creationId xmlns:a16="http://schemas.microsoft.com/office/drawing/2014/main" id="{91345F26-98A5-C035-E772-CEA063AE2862}"/>
-              </a:ext>
-            </a:extLst>
-          </p:cNvPr>
-          <p:cNvPicPr>
-            <a:picLocks noChangeAspect="1"/>
-          </p:cNvPicPr>
-          <p:nvPr/>
-        </p:nvPicPr>
-        <p:blipFill>
-          <a:blip r:embed="rId6"/>
-          <a:stretch>
-            <a:fillRect/>
-          </a:stretch>
-        </p:blipFill>
-        <p:spPr>
-          <a:xfrm>
-            <a:off x="1841248" y="2265138"/>
-            <a:ext cx="3753498" cy="3018658"/>
-          </a:xfrm>
-          <a:prstGeom prst="rect">
-            <a:avLst/>
-          </a:prstGeom>
-        </p:spPr>
-      </p:pic>
-      <p:sp>
-        <p:nvSpPr>
-          <p:cNvPr id="10" name="CuadroTexto 9">
-            <a:extLst>
-              <a:ext uri="{FF2B5EF4-FFF2-40B4-BE49-F238E27FC236}">
-                <a16:creationId xmlns:a16="http://schemas.microsoft.com/office/drawing/2014/main" id="{7D74DF8F-76E3-0798-6389-07D257E70727}"/>
-              </a:ext>
-            </a:extLst>
-          </p:cNvPr>
-          <p:cNvSpPr txBox="1"/>
-          <p:nvPr/>
-        </p:nvSpPr>
-        <p:spPr>
-          <a:xfrm>
-            <a:off x="381000" y="5487316"/>
-            <a:ext cx="10896600" cy="923330"/>
-          </a:xfrm>
-          <a:prstGeom prst="rect">
-            <a:avLst/>
-          </a:prstGeom>
-          <a:noFill/>
-        </p:spPr>
-        <p:txBody>
-          <a:bodyPr wrap="square">
-            <a:spAutoFit/>
-          </a:bodyPr>
-          <a:lstStyle/>
-          <a:p>
-            <a:r>
-              <a:rPr lang="en-US" dirty="0"/>
-              <a:t>Se produce un </a:t>
-            </a:r>
-            <a:r>
-              <a:rPr lang="en-US" dirty="0" err="1"/>
-              <a:t>desplazamiento</a:t>
-            </a:r>
-            <a:r>
-              <a:rPr lang="en-US" dirty="0"/>
-              <a:t> del </a:t>
-            </a:r>
-            <a:r>
-              <a:rPr lang="en-US" dirty="0" err="1"/>
-              <a:t>espectro</a:t>
-            </a:r>
-            <a:r>
-              <a:rPr lang="en-US" dirty="0"/>
-              <a:t>. Como se ha </a:t>
-            </a:r>
-            <a:r>
-              <a:rPr lang="en-US" dirty="0" err="1"/>
-              <a:t>comentado</a:t>
-            </a:r>
-            <a:r>
-              <a:rPr lang="en-US" dirty="0"/>
-              <a:t> </a:t>
-            </a:r>
-            <a:r>
-              <a:rPr lang="en-US" dirty="0" err="1"/>
-              <a:t>en</a:t>
-            </a:r>
-            <a:r>
-              <a:rPr lang="en-US" dirty="0"/>
-              <a:t> </a:t>
-            </a:r>
-            <a:r>
-              <a:rPr lang="en-US" dirty="0" err="1"/>
-              <a:t>clase</a:t>
-            </a:r>
-            <a:r>
-              <a:rPr lang="en-US" dirty="0"/>
-              <a:t> </a:t>
-            </a:r>
-            <a:r>
-              <a:rPr lang="en-US" dirty="0" err="1"/>
-              <a:t>en</a:t>
-            </a:r>
-            <a:r>
-              <a:rPr lang="en-US" dirty="0"/>
-              <a:t> </a:t>
-            </a:r>
-            <a:r>
-              <a:rPr lang="en-US" dirty="0" err="1"/>
-              <a:t>diferentes</a:t>
-            </a:r>
-            <a:r>
-              <a:rPr lang="en-US" dirty="0"/>
-              <a:t> </a:t>
-            </a:r>
-            <a:r>
-              <a:rPr lang="en-US" dirty="0" err="1"/>
-              <a:t>ocasiones</a:t>
-            </a:r>
-            <a:r>
-              <a:rPr lang="en-US" dirty="0"/>
-              <a:t> se </a:t>
-            </a:r>
-            <a:r>
-              <a:rPr lang="en-US" dirty="0" err="1"/>
-              <a:t>puede</a:t>
-            </a:r>
-            <a:r>
-              <a:rPr lang="en-US" dirty="0"/>
-              <a:t> </a:t>
-            </a:r>
-            <a:r>
-              <a:rPr lang="en-US" dirty="0" err="1"/>
-              <a:t>utilizar</a:t>
-            </a:r>
-            <a:r>
-              <a:rPr lang="en-US" dirty="0"/>
-              <a:t> </a:t>
-            </a:r>
-            <a:r>
-              <a:rPr lang="en-US" dirty="0" err="1"/>
-              <a:t>como</a:t>
-            </a:r>
-            <a:r>
-              <a:rPr lang="en-US" dirty="0"/>
-              <a:t> detector de </a:t>
-            </a:r>
-            <a:r>
-              <a:rPr lang="en-US" dirty="0" err="1"/>
-              <a:t>substancias</a:t>
-            </a:r>
-            <a:r>
-              <a:rPr lang="en-US" dirty="0"/>
-              <a:t>, </a:t>
-            </a:r>
-            <a:r>
-              <a:rPr lang="en-US" dirty="0" err="1"/>
-              <a:t>ya</a:t>
-            </a:r>
-            <a:r>
-              <a:rPr lang="en-US" dirty="0"/>
-              <a:t> </a:t>
-            </a:r>
-            <a:r>
-              <a:rPr lang="en-US" dirty="0" err="1"/>
-              <a:t>que</a:t>
-            </a:r>
-            <a:r>
-              <a:rPr lang="en-US" dirty="0"/>
-              <a:t> la </a:t>
-            </a:r>
-            <a:r>
-              <a:rPr lang="en-US" dirty="0" err="1"/>
-              <a:t>presencia</a:t>
-            </a:r>
-            <a:r>
-              <a:rPr lang="en-US" dirty="0"/>
-              <a:t> de </a:t>
-            </a:r>
-            <a:r>
-              <a:rPr lang="en-US" dirty="0" err="1"/>
-              <a:t>cierta</a:t>
-            </a:r>
-            <a:r>
-              <a:rPr lang="en-US" dirty="0"/>
-              <a:t> </a:t>
-            </a:r>
-            <a:r>
-              <a:rPr lang="en-US" dirty="0" err="1"/>
-              <a:t>substancia</a:t>
-            </a:r>
-            <a:r>
-              <a:rPr lang="en-US" dirty="0"/>
-              <a:t> altera </a:t>
-            </a:r>
-            <a:r>
-              <a:rPr lang="en-US" dirty="0" err="1"/>
-              <a:t>el</a:t>
-            </a:r>
-            <a:r>
-              <a:rPr lang="en-US" dirty="0"/>
-              <a:t> </a:t>
-            </a:r>
-            <a:r>
-              <a:rPr lang="en-US" dirty="0" err="1"/>
-              <a:t>neff</a:t>
-            </a:r>
-            <a:r>
-              <a:rPr lang="en-US" dirty="0"/>
-              <a:t>, y gracias a </a:t>
-            </a:r>
-            <a:r>
-              <a:rPr lang="en-US" dirty="0" err="1"/>
-              <a:t>eso</a:t>
-            </a:r>
-            <a:r>
-              <a:rPr lang="en-US" dirty="0"/>
-              <a:t> </a:t>
-            </a:r>
-            <a:r>
-              <a:rPr lang="en-US" dirty="0" err="1"/>
-              <a:t>posteriormente</a:t>
-            </a:r>
-            <a:r>
-              <a:rPr lang="en-US" dirty="0"/>
-              <a:t> con la </a:t>
-            </a:r>
-            <a:r>
-              <a:rPr lang="en-US" dirty="0" err="1"/>
-              <a:t>respuesta</a:t>
-            </a:r>
-            <a:r>
-              <a:rPr lang="en-US" dirty="0"/>
-              <a:t>, y </a:t>
-            </a:r>
-            <a:r>
-              <a:rPr lang="en-US" dirty="0" err="1"/>
-              <a:t>midiendo</a:t>
-            </a:r>
-            <a:r>
-              <a:rPr lang="en-US" dirty="0"/>
-              <a:t> </a:t>
-            </a:r>
-            <a:r>
-              <a:rPr lang="en-US" dirty="0" err="1"/>
-              <a:t>así</a:t>
-            </a:r>
-            <a:r>
-              <a:rPr lang="en-US" dirty="0"/>
-              <a:t> la </a:t>
-            </a:r>
-            <a:r>
-              <a:rPr lang="en-US" dirty="0" err="1"/>
-              <a:t>alteraciónd</a:t>
-            </a:r>
-            <a:r>
-              <a:rPr lang="en-US" dirty="0"/>
-              <a:t> de la </a:t>
-            </a:r>
-            <a:r>
-              <a:rPr lang="en-US" dirty="0" err="1"/>
-              <a:t>respuesta</a:t>
-            </a:r>
-            <a:r>
-              <a:rPr lang="en-US" dirty="0"/>
-              <a:t> se </a:t>
-            </a:r>
-            <a:r>
-              <a:rPr lang="en-US" dirty="0" err="1"/>
-              <a:t>obtiene</a:t>
-            </a:r>
-            <a:r>
-              <a:rPr lang="en-US" dirty="0"/>
-              <a:t> </a:t>
-            </a:r>
-            <a:r>
-              <a:rPr lang="en-US" dirty="0" err="1"/>
-              <a:t>información</a:t>
-            </a:r>
-            <a:r>
-              <a:rPr lang="en-US" dirty="0"/>
-              <a:t>. </a:t>
-            </a:r>
-            <a:endParaRPr lang="es-ES" dirty="0"/>
-          </a:p>
-        </p:txBody>
-      </p:sp>
-    </p:spTree>
-    <p:extLst>
-      <p:ext uri="{BB962C8B-B14F-4D97-AF65-F5344CB8AC3E}">
-        <p14:creationId xmlns:p14="http://schemas.microsoft.com/office/powerpoint/2010/main" val="3577319862"/>
       </p:ext>
     </p:extLst>
   </p:cSld>
@@ -12574,6 +12546,626 @@
   <p:cSld>
     <p:spTree>
       <p:nvGrpSpPr>
+        <p:cNvPr id="1" name="">
+          <a:extLst>
+            <a:ext uri="{FF2B5EF4-FFF2-40B4-BE49-F238E27FC236}">
+              <a16:creationId xmlns:a16="http://schemas.microsoft.com/office/drawing/2014/main" id="{63986E8E-397B-1841-9BD3-C75A054EA27F}"/>
+            </a:ext>
+          </a:extLst>
+        </p:cNvPr>
+        <p:cNvGrpSpPr/>
+        <p:nvPr/>
+      </p:nvGrpSpPr>
+      <p:grpSpPr>
+        <a:xfrm>
+          <a:off x="0" y="0"/>
+          <a:ext cx="0" cy="0"/>
+          <a:chOff x="0" y="0"/>
+          <a:chExt cx="0" cy="0"/>
+        </a:xfrm>
+      </p:grpSpPr>
+      <p:sp>
+        <p:nvSpPr>
+          <p:cNvPr id="16" name="object 16">
+            <a:extLst>
+              <a:ext uri="{FF2B5EF4-FFF2-40B4-BE49-F238E27FC236}">
+                <a16:creationId xmlns:a16="http://schemas.microsoft.com/office/drawing/2014/main" id="{716E3C5C-841C-5D62-2A1D-32F5A91EA371}"/>
+              </a:ext>
+            </a:extLst>
+          </p:cNvPr>
+          <p:cNvSpPr txBox="1">
+            <a:spLocks noGrp="1"/>
+          </p:cNvSpPr>
+          <p:nvPr>
+            <p:ph type="title"/>
+          </p:nvPr>
+        </p:nvSpPr>
+        <p:spPr>
+          <a:xfrm>
+            <a:off x="685800" y="408883"/>
+            <a:ext cx="10994410" cy="397545"/>
+          </a:xfrm>
+          <a:prstGeom prst="rect">
+            <a:avLst/>
+          </a:prstGeom>
+        </p:spPr>
+        <p:txBody>
+          <a:bodyPr vert="horz" wrap="square" lIns="0" tIns="12700" rIns="0" bIns="0" rtlCol="0">
+            <a:spAutoFit/>
+          </a:bodyPr>
+          <a:lstStyle/>
+          <a:p>
+            <a:pPr marL="12700">
+              <a:lnSpc>
+                <a:spcPct val="100000"/>
+              </a:lnSpc>
+              <a:spcBef>
+                <a:spcPts val="100"/>
+              </a:spcBef>
+            </a:pPr>
+            <a:r>
+              <a:rPr lang="en-US" sz="2500" dirty="0"/>
+              <a:t>Extra assessments </a:t>
+            </a:r>
+            <a:endParaRPr lang="en-US" sz="2500" b="0" dirty="0">
+              <a:latin typeface="+mj-lt"/>
+              <a:cs typeface="Lucida Sans"/>
+            </a:endParaRPr>
+          </a:p>
+        </p:txBody>
+      </p:sp>
+      <p:pic>
+        <p:nvPicPr>
+          <p:cNvPr id="83" name="Gráfico 82">
+            <a:extLst>
+              <a:ext uri="{FF2B5EF4-FFF2-40B4-BE49-F238E27FC236}">
+                <a16:creationId xmlns:a16="http://schemas.microsoft.com/office/drawing/2014/main" id="{043AAB1D-F7FD-2F8E-6EC0-DDC970F20DF0}"/>
+              </a:ext>
+            </a:extLst>
+          </p:cNvPr>
+          <p:cNvPicPr>
+            <a:picLocks noChangeAspect="1"/>
+          </p:cNvPicPr>
+          <p:nvPr/>
+        </p:nvPicPr>
+        <p:blipFill>
+          <a:blip r:embed="rId3">
+            <a:extLst>
+              <a:ext uri="{96DAC541-7B7A-43D3-8B79-37D633B846F1}">
+                <asvg:svgBlip xmlns:asvg="http://schemas.microsoft.com/office/drawing/2016/SVG/main" r:embed="rId4"/>
+              </a:ext>
+            </a:extLst>
+          </a:blip>
+          <a:stretch>
+            <a:fillRect/>
+          </a:stretch>
+        </p:blipFill>
+        <p:spPr>
+          <a:xfrm>
+            <a:off x="5045006" y="6356057"/>
+            <a:ext cx="6409575" cy="363174"/>
+          </a:xfrm>
+          <a:prstGeom prst="rect">
+            <a:avLst/>
+          </a:prstGeom>
+        </p:spPr>
+      </p:pic>
+      <p:sp>
+        <p:nvSpPr>
+          <p:cNvPr id="84" name="Marcador de número de diapositiva 83">
+            <a:extLst>
+              <a:ext uri="{FF2B5EF4-FFF2-40B4-BE49-F238E27FC236}">
+                <a16:creationId xmlns:a16="http://schemas.microsoft.com/office/drawing/2014/main" id="{B4B7AD11-1FD3-6AC4-BF09-4D589E8382B3}"/>
+              </a:ext>
+            </a:extLst>
+          </p:cNvPr>
+          <p:cNvSpPr>
+            <a:spLocks noGrp="1"/>
+          </p:cNvSpPr>
+          <p:nvPr>
+            <p:ph type="sldNum" sz="quarter" idx="7"/>
+          </p:nvPr>
+        </p:nvSpPr>
+        <p:spPr/>
+        <p:txBody>
+          <a:bodyPr/>
+          <a:lstStyle/>
+          <a:p>
+            <a:fld id="{B6F15528-21DE-4FAA-801E-634DDDAF4B2B}" type="slidenum">
+              <a:rPr lang="es-ES" smtClean="0"/>
+              <a:t>20</a:t>
+            </a:fld>
+            <a:endParaRPr lang="es-ES"/>
+          </a:p>
+        </p:txBody>
+      </p:sp>
+      <p:sp>
+        <p:nvSpPr>
+          <p:cNvPr id="4" name="Marcador de texto 2">
+            <a:extLst>
+              <a:ext uri="{FF2B5EF4-FFF2-40B4-BE49-F238E27FC236}">
+                <a16:creationId xmlns:a16="http://schemas.microsoft.com/office/drawing/2014/main" id="{44469A6A-D3DB-60FE-3A74-3CF213032E6A}"/>
+              </a:ext>
+            </a:extLst>
+          </p:cNvPr>
+          <p:cNvSpPr txBox="1">
+            <a:spLocks/>
+          </p:cNvSpPr>
+          <p:nvPr/>
+        </p:nvSpPr>
+        <p:spPr>
+          <a:xfrm>
+            <a:off x="608012" y="1295400"/>
+            <a:ext cx="11048999" cy="4958137"/>
+          </a:xfrm>
+          <a:prstGeom prst="rect">
+            <a:avLst/>
+          </a:prstGeom>
+        </p:spPr>
+        <p:txBody>
+          <a:bodyPr>
+            <a:normAutofit/>
+          </a:bodyPr>
+          <a:lstStyle>
+            <a:lvl1pPr marL="0">
+              <a:defRPr>
+                <a:latin typeface="+mn-lt"/>
+                <a:ea typeface="+mn-ea"/>
+                <a:cs typeface="+mn-cs"/>
+              </a:defRPr>
+            </a:lvl1pPr>
+            <a:lvl2pPr marL="457200">
+              <a:defRPr>
+                <a:latin typeface="+mn-lt"/>
+                <a:ea typeface="+mn-ea"/>
+                <a:cs typeface="+mn-cs"/>
+              </a:defRPr>
+            </a:lvl2pPr>
+            <a:lvl3pPr marL="914400">
+              <a:defRPr>
+                <a:latin typeface="+mn-lt"/>
+                <a:ea typeface="+mn-ea"/>
+                <a:cs typeface="+mn-cs"/>
+              </a:defRPr>
+            </a:lvl3pPr>
+            <a:lvl4pPr marL="1371600">
+              <a:defRPr>
+                <a:latin typeface="+mn-lt"/>
+                <a:ea typeface="+mn-ea"/>
+                <a:cs typeface="+mn-cs"/>
+              </a:defRPr>
+            </a:lvl4pPr>
+            <a:lvl5pPr marL="1828800">
+              <a:defRPr>
+                <a:latin typeface="+mn-lt"/>
+                <a:ea typeface="+mn-ea"/>
+                <a:cs typeface="+mn-cs"/>
+              </a:defRPr>
+            </a:lvl5pPr>
+            <a:lvl6pPr marL="2286000">
+              <a:defRPr>
+                <a:latin typeface="+mn-lt"/>
+                <a:ea typeface="+mn-ea"/>
+                <a:cs typeface="+mn-cs"/>
+              </a:defRPr>
+            </a:lvl6pPr>
+            <a:lvl7pPr marL="2743200">
+              <a:defRPr>
+                <a:latin typeface="+mn-lt"/>
+                <a:ea typeface="+mn-ea"/>
+                <a:cs typeface="+mn-cs"/>
+              </a:defRPr>
+            </a:lvl7pPr>
+            <a:lvl8pPr marL="3200400">
+              <a:defRPr>
+                <a:latin typeface="+mn-lt"/>
+                <a:ea typeface="+mn-ea"/>
+                <a:cs typeface="+mn-cs"/>
+              </a:defRPr>
+            </a:lvl8pPr>
+            <a:lvl9pPr marL="3657600">
+              <a:defRPr>
+                <a:latin typeface="+mn-lt"/>
+                <a:ea typeface="+mn-ea"/>
+                <a:cs typeface="+mn-cs"/>
+              </a:defRPr>
+            </a:lvl9pPr>
+          </a:lstStyle>
+          <a:p>
+            <a:r>
+              <a:rPr lang="en-US" b="1" dirty="0"/>
+              <a:t>Assessment 5. </a:t>
+            </a:r>
+            <a:r>
+              <a:rPr lang="en-US" dirty="0"/>
+              <a:t>Let's see how the response of the MZI varies with the effective index. Vary the effective index of one of the arms and analyze how the spectrum shifts. To do this, you can use the data provided in the .txt files entitled ‘</a:t>
+            </a:r>
+            <a:r>
+              <a:rPr lang="en-US" dirty="0" err="1"/>
+              <a:t>SiN</a:t>
+            </a:r>
+            <a:r>
+              <a:rPr lang="en-US" dirty="0"/>
+              <a:t>’. Can you give an example of an application where this configuration is used?</a:t>
+            </a:r>
+          </a:p>
+          <a:p>
+            <a:pPr marL="0" indent="0">
+              <a:buNone/>
+            </a:pPr>
+            <a:endParaRPr lang="en-US" dirty="0"/>
+          </a:p>
+          <a:p>
+            <a:pPr algn="just"/>
+            <a:endParaRPr lang="en-US" sz="2000" kern="0" dirty="0">
+              <a:solidFill>
+                <a:sysClr val="windowText" lastClr="000000"/>
+              </a:solidFill>
+            </a:endParaRPr>
+          </a:p>
+        </p:txBody>
+      </p:sp>
+      <p:sp>
+        <p:nvSpPr>
+          <p:cNvPr id="6" name="Marcador de pie de página 2">
+            <a:extLst>
+              <a:ext uri="{FF2B5EF4-FFF2-40B4-BE49-F238E27FC236}">
+                <a16:creationId xmlns:a16="http://schemas.microsoft.com/office/drawing/2014/main" id="{1B0E7D77-C21A-0F71-C8AE-878763F261D0}"/>
+              </a:ext>
+            </a:extLst>
+          </p:cNvPr>
+          <p:cNvSpPr>
+            <a:spLocks noGrp="1"/>
+          </p:cNvSpPr>
+          <p:nvPr>
+            <p:ph type="ftr" sz="quarter" idx="5"/>
+          </p:nvPr>
+        </p:nvSpPr>
+        <p:spPr>
+          <a:xfrm>
+            <a:off x="609600" y="6457057"/>
+            <a:ext cx="2743200" cy="184666"/>
+          </a:xfrm>
+        </p:spPr>
+        <p:txBody>
+          <a:bodyPr/>
+          <a:lstStyle/>
+          <a:p>
+            <a:pPr marL="12700">
+              <a:spcBef>
+                <a:spcPts val="15"/>
+              </a:spcBef>
+            </a:pPr>
+            <a:r>
+              <a:rPr lang="es-ES" spc="-5"/>
+              <a:t>LAB 3. INTERFEROMETERS I</a:t>
+            </a:r>
+            <a:endParaRPr lang="es-ES" spc="-5" dirty="0"/>
+          </a:p>
+        </p:txBody>
+      </p:sp>
+      <p:pic>
+        <p:nvPicPr>
+          <p:cNvPr id="5" name="Imagen 4" descr="Gráfico, Gráfico de líneas&#10;&#10;El contenido generado por IA puede ser incorrecto.">
+            <a:extLst>
+              <a:ext uri="{FF2B5EF4-FFF2-40B4-BE49-F238E27FC236}">
+                <a16:creationId xmlns:a16="http://schemas.microsoft.com/office/drawing/2014/main" id="{8F3F4BED-B61B-1C9A-F3CC-1970B22EBED1}"/>
+              </a:ext>
+            </a:extLst>
+          </p:cNvPr>
+          <p:cNvPicPr>
+            <a:picLocks noChangeAspect="1"/>
+          </p:cNvPicPr>
+          <p:nvPr/>
+        </p:nvPicPr>
+        <p:blipFill>
+          <a:blip r:embed="rId5"/>
+          <a:stretch>
+            <a:fillRect/>
+          </a:stretch>
+        </p:blipFill>
+        <p:spPr>
+          <a:xfrm>
+            <a:off x="5867399" y="2313629"/>
+            <a:ext cx="3706183" cy="2970167"/>
+          </a:xfrm>
+          <a:prstGeom prst="rect">
+            <a:avLst/>
+          </a:prstGeom>
+        </p:spPr>
+      </p:pic>
+      <p:pic>
+        <p:nvPicPr>
+          <p:cNvPr id="8" name="Imagen 7" descr="Gráfico, Gráfico de líneas&#10;&#10;El contenido generado por IA puede ser incorrecto.">
+            <a:extLst>
+              <a:ext uri="{FF2B5EF4-FFF2-40B4-BE49-F238E27FC236}">
+                <a16:creationId xmlns:a16="http://schemas.microsoft.com/office/drawing/2014/main" id="{91345F26-98A5-C035-E772-CEA063AE2862}"/>
+              </a:ext>
+            </a:extLst>
+          </p:cNvPr>
+          <p:cNvPicPr>
+            <a:picLocks noChangeAspect="1"/>
+          </p:cNvPicPr>
+          <p:nvPr/>
+        </p:nvPicPr>
+        <p:blipFill>
+          <a:blip r:embed="rId6"/>
+          <a:stretch>
+            <a:fillRect/>
+          </a:stretch>
+        </p:blipFill>
+        <p:spPr>
+          <a:xfrm>
+            <a:off x="1841248" y="2265138"/>
+            <a:ext cx="3753498" cy="3018658"/>
+          </a:xfrm>
+          <a:prstGeom prst="rect">
+            <a:avLst/>
+          </a:prstGeom>
+        </p:spPr>
+      </p:pic>
+      <p:sp>
+        <p:nvSpPr>
+          <p:cNvPr id="10" name="CuadroTexto 9">
+            <a:extLst>
+              <a:ext uri="{FF2B5EF4-FFF2-40B4-BE49-F238E27FC236}">
+                <a16:creationId xmlns:a16="http://schemas.microsoft.com/office/drawing/2014/main" id="{7D74DF8F-76E3-0798-6389-07D257E70727}"/>
+              </a:ext>
+            </a:extLst>
+          </p:cNvPr>
+          <p:cNvSpPr txBox="1"/>
+          <p:nvPr/>
+        </p:nvSpPr>
+        <p:spPr>
+          <a:xfrm>
+            <a:off x="381000" y="5487316"/>
+            <a:ext cx="10896600" cy="923330"/>
+          </a:xfrm>
+          <a:prstGeom prst="rect">
+            <a:avLst/>
+          </a:prstGeom>
+          <a:noFill/>
+        </p:spPr>
+        <p:txBody>
+          <a:bodyPr wrap="square">
+            <a:spAutoFit/>
+          </a:bodyPr>
+          <a:lstStyle/>
+          <a:p>
+            <a:r>
+              <a:rPr lang="en-US" dirty="0"/>
+              <a:t>Se produce un </a:t>
+            </a:r>
+            <a:r>
+              <a:rPr lang="en-US" dirty="0" err="1"/>
+              <a:t>desplazamiento</a:t>
+            </a:r>
+            <a:r>
+              <a:rPr lang="en-US" dirty="0"/>
+              <a:t> del </a:t>
+            </a:r>
+            <a:r>
+              <a:rPr lang="en-US" dirty="0" err="1"/>
+              <a:t>espectro</a:t>
+            </a:r>
+            <a:r>
+              <a:rPr lang="en-US" dirty="0"/>
+              <a:t>. Como se ha </a:t>
+            </a:r>
+            <a:r>
+              <a:rPr lang="en-US" dirty="0" err="1"/>
+              <a:t>comentado</a:t>
+            </a:r>
+            <a:r>
+              <a:rPr lang="en-US" dirty="0"/>
+              <a:t> </a:t>
+            </a:r>
+            <a:r>
+              <a:rPr lang="en-US" dirty="0" err="1"/>
+              <a:t>en</a:t>
+            </a:r>
+            <a:r>
+              <a:rPr lang="en-US" dirty="0"/>
+              <a:t> </a:t>
+            </a:r>
+            <a:r>
+              <a:rPr lang="en-US" dirty="0" err="1"/>
+              <a:t>clase</a:t>
+            </a:r>
+            <a:r>
+              <a:rPr lang="en-US" dirty="0"/>
+              <a:t> </a:t>
+            </a:r>
+            <a:r>
+              <a:rPr lang="en-US" dirty="0" err="1"/>
+              <a:t>en</a:t>
+            </a:r>
+            <a:r>
+              <a:rPr lang="en-US" dirty="0"/>
+              <a:t> </a:t>
+            </a:r>
+            <a:r>
+              <a:rPr lang="en-US" dirty="0" err="1"/>
+              <a:t>diferentes</a:t>
+            </a:r>
+            <a:r>
+              <a:rPr lang="en-US" dirty="0"/>
+              <a:t> </a:t>
+            </a:r>
+            <a:r>
+              <a:rPr lang="en-US" dirty="0" err="1"/>
+              <a:t>ocasiones</a:t>
+            </a:r>
+            <a:r>
+              <a:rPr lang="en-US" dirty="0"/>
+              <a:t> se </a:t>
+            </a:r>
+            <a:r>
+              <a:rPr lang="en-US" dirty="0" err="1"/>
+              <a:t>puede</a:t>
+            </a:r>
+            <a:r>
+              <a:rPr lang="en-US" dirty="0"/>
+              <a:t> </a:t>
+            </a:r>
+            <a:r>
+              <a:rPr lang="en-US" dirty="0" err="1"/>
+              <a:t>utilizar</a:t>
+            </a:r>
+            <a:r>
+              <a:rPr lang="en-US" dirty="0"/>
+              <a:t> </a:t>
+            </a:r>
+            <a:r>
+              <a:rPr lang="en-US" dirty="0" err="1"/>
+              <a:t>como</a:t>
+            </a:r>
+            <a:r>
+              <a:rPr lang="en-US" dirty="0"/>
+              <a:t> detector de </a:t>
+            </a:r>
+            <a:r>
+              <a:rPr lang="en-US" dirty="0" err="1"/>
+              <a:t>substancias</a:t>
+            </a:r>
+            <a:r>
+              <a:rPr lang="en-US" dirty="0"/>
+              <a:t>, </a:t>
+            </a:r>
+            <a:r>
+              <a:rPr lang="en-US" dirty="0" err="1"/>
+              <a:t>ya</a:t>
+            </a:r>
+            <a:r>
+              <a:rPr lang="en-US" dirty="0"/>
+              <a:t> </a:t>
+            </a:r>
+            <a:r>
+              <a:rPr lang="en-US" dirty="0" err="1"/>
+              <a:t>que</a:t>
+            </a:r>
+            <a:r>
+              <a:rPr lang="en-US" dirty="0"/>
+              <a:t> la </a:t>
+            </a:r>
+            <a:r>
+              <a:rPr lang="en-US" dirty="0" err="1"/>
+              <a:t>presencia</a:t>
+            </a:r>
+            <a:r>
+              <a:rPr lang="en-US" dirty="0"/>
+              <a:t> de </a:t>
+            </a:r>
+            <a:r>
+              <a:rPr lang="en-US" dirty="0" err="1"/>
+              <a:t>cierta</a:t>
+            </a:r>
+            <a:r>
+              <a:rPr lang="en-US" dirty="0"/>
+              <a:t> </a:t>
+            </a:r>
+            <a:r>
+              <a:rPr lang="en-US" dirty="0" err="1"/>
+              <a:t>substancia</a:t>
+            </a:r>
+            <a:r>
+              <a:rPr lang="en-US" dirty="0"/>
+              <a:t> altera </a:t>
+            </a:r>
+            <a:r>
+              <a:rPr lang="en-US" dirty="0" err="1"/>
+              <a:t>el</a:t>
+            </a:r>
+            <a:r>
+              <a:rPr lang="en-US" dirty="0"/>
+              <a:t> </a:t>
+            </a:r>
+            <a:r>
+              <a:rPr lang="en-US" dirty="0" err="1"/>
+              <a:t>neff</a:t>
+            </a:r>
+            <a:r>
+              <a:rPr lang="en-US" dirty="0"/>
+              <a:t>, y </a:t>
+            </a:r>
+            <a:r>
+              <a:rPr lang="en-US" dirty="0" err="1"/>
+              <a:t>por</a:t>
+            </a:r>
+            <a:r>
+              <a:rPr lang="en-US" dirty="0"/>
+              <a:t> </a:t>
+            </a:r>
+            <a:r>
+              <a:rPr lang="en-US" dirty="0" err="1"/>
+              <a:t>ende</a:t>
+            </a:r>
+            <a:r>
+              <a:rPr lang="en-US" dirty="0"/>
+              <a:t> la </a:t>
+            </a:r>
+            <a:r>
+              <a:rPr lang="en-US" dirty="0" err="1"/>
+              <a:t>respuesta</a:t>
+            </a:r>
+            <a:r>
+              <a:rPr lang="en-US" dirty="0"/>
+              <a:t>, </a:t>
+            </a:r>
+            <a:r>
+              <a:rPr lang="en-US" dirty="0" err="1"/>
+              <a:t>pudiendo</a:t>
+            </a:r>
+            <a:r>
+              <a:rPr lang="en-US" dirty="0"/>
+              <a:t> </a:t>
+            </a:r>
+            <a:r>
+              <a:rPr lang="en-US" dirty="0" err="1"/>
+              <a:t>así</a:t>
+            </a:r>
+            <a:r>
+              <a:rPr lang="en-US" dirty="0"/>
+              <a:t> </a:t>
+            </a:r>
+            <a:r>
+              <a:rPr lang="en-US" dirty="0" err="1"/>
+              <a:t>obtener</a:t>
+            </a:r>
+            <a:r>
+              <a:rPr lang="en-US" dirty="0"/>
+              <a:t> </a:t>
+            </a:r>
+            <a:r>
+              <a:rPr lang="en-US" dirty="0" err="1"/>
+              <a:t>información</a:t>
+            </a:r>
+            <a:r>
+              <a:rPr lang="en-US" dirty="0"/>
+              <a:t>. </a:t>
+            </a:r>
+            <a:endParaRPr lang="es-ES" dirty="0"/>
+          </a:p>
+        </p:txBody>
+      </p:sp>
+    </p:spTree>
+    <p:extLst>
+      <p:ext uri="{BB962C8B-B14F-4D97-AF65-F5344CB8AC3E}">
+        <p14:creationId xmlns:p14="http://schemas.microsoft.com/office/powerpoint/2010/main" val="3577319862"/>
+      </p:ext>
+    </p:extLst>
+  </p:cSld>
+  <p:clrMapOvr>
+    <a:masterClrMapping/>
+  </p:clrMapOvr>
+</p:sld>
+</file>
+
+<file path=ppt/slides/slide21.xml><?xml version="1.0" encoding="utf-8"?>
+<p:sld xmlns:a="http://schemas.openxmlformats.org/drawingml/2006/main" xmlns:r="http://schemas.openxmlformats.org/officeDocument/2006/relationships" xmlns:p="http://schemas.openxmlformats.org/presentationml/2006/main">
+  <p:cSld>
+    <p:spTree>
+      <p:nvGrpSpPr>
         <p:cNvPr id="1" name=""/>
         <p:cNvGrpSpPr/>
         <p:nvPr/>
@@ -12708,7 +13300,7 @@
           <a:p>
             <a:fld id="{B6F15528-21DE-4FAA-801E-634DDDAF4B2B}" type="slidenum">
               <a:rPr lang="es-ES" smtClean="0"/>
-              <a:t>20</a:t>
+              <a:t>21</a:t>
             </a:fld>
             <a:endParaRPr lang="es-ES"/>
           </a:p>
@@ -13287,6 +13879,469 @@
         <p:cNvPr id="1" name="">
           <a:extLst>
             <a:ext uri="{FF2B5EF4-FFF2-40B4-BE49-F238E27FC236}">
+              <a16:creationId xmlns:a16="http://schemas.microsoft.com/office/drawing/2014/main" id="{874C5730-D260-7D68-D0E4-1843EA66C000}"/>
+            </a:ext>
+          </a:extLst>
+        </p:cNvPr>
+        <p:cNvGrpSpPr/>
+        <p:nvPr/>
+      </p:nvGrpSpPr>
+      <p:grpSpPr>
+        <a:xfrm>
+          <a:off x="0" y="0"/>
+          <a:ext cx="0" cy="0"/>
+          <a:chOff x="0" y="0"/>
+          <a:chExt cx="0" cy="0"/>
+        </a:xfrm>
+      </p:grpSpPr>
+      <p:sp>
+        <p:nvSpPr>
+          <p:cNvPr id="16" name="object 16">
+            <a:extLst>
+              <a:ext uri="{FF2B5EF4-FFF2-40B4-BE49-F238E27FC236}">
+                <a16:creationId xmlns:a16="http://schemas.microsoft.com/office/drawing/2014/main" id="{E5455A44-AED2-5EB4-2AEC-F450E1C062AC}"/>
+              </a:ext>
+            </a:extLst>
+          </p:cNvPr>
+          <p:cNvSpPr txBox="1">
+            <a:spLocks noGrp="1"/>
+          </p:cNvSpPr>
+          <p:nvPr>
+            <p:ph type="title"/>
+          </p:nvPr>
+        </p:nvSpPr>
+        <p:spPr>
+          <a:xfrm>
+            <a:off x="685800" y="408883"/>
+            <a:ext cx="10994410" cy="782265"/>
+          </a:xfrm>
+          <a:prstGeom prst="rect">
+            <a:avLst/>
+          </a:prstGeom>
+        </p:spPr>
+        <p:txBody>
+          <a:bodyPr vert="horz" wrap="square" lIns="0" tIns="12700" rIns="0" bIns="0" rtlCol="0">
+            <a:spAutoFit/>
+          </a:bodyPr>
+          <a:lstStyle/>
+          <a:p>
+            <a:pPr marL="12700">
+              <a:lnSpc>
+                <a:spcPct val="100000"/>
+              </a:lnSpc>
+              <a:spcBef>
+                <a:spcPts val="100"/>
+              </a:spcBef>
+            </a:pPr>
+            <a:r>
+              <a:rPr lang="en-US" sz="2400" b="1" dirty="0">
+                <a:solidFill>
+                  <a:srgbClr val="FF0000"/>
+                </a:solidFill>
+              </a:rPr>
+              <a:t>AVISO</a:t>
+            </a:r>
+            <a:br>
+              <a:rPr lang="es-ES" sz="2500" spc="-5" dirty="0">
+                <a:latin typeface="+mj-lt"/>
+                <a:cs typeface="Lucida Sans"/>
+              </a:rPr>
+            </a:br>
+            <a:endParaRPr sz="2500" b="0" dirty="0">
+              <a:latin typeface="+mj-lt"/>
+              <a:cs typeface="Lucida Sans"/>
+            </a:endParaRPr>
+          </a:p>
+        </p:txBody>
+      </p:sp>
+      <p:pic>
+        <p:nvPicPr>
+          <p:cNvPr id="83" name="Gráfico 82">
+            <a:extLst>
+              <a:ext uri="{FF2B5EF4-FFF2-40B4-BE49-F238E27FC236}">
+                <a16:creationId xmlns:a16="http://schemas.microsoft.com/office/drawing/2014/main" id="{42DDFE63-EF43-E1E3-8AA6-8627BB9A494F}"/>
+              </a:ext>
+            </a:extLst>
+          </p:cNvPr>
+          <p:cNvPicPr>
+            <a:picLocks noChangeAspect="1"/>
+          </p:cNvPicPr>
+          <p:nvPr/>
+        </p:nvPicPr>
+        <p:blipFill>
+          <a:blip r:embed="rId3">
+            <a:extLst>
+              <a:ext uri="{96DAC541-7B7A-43D3-8B79-37D633B846F1}">
+                <asvg:svgBlip xmlns:asvg="http://schemas.microsoft.com/office/drawing/2016/SVG/main" r:embed="rId4"/>
+              </a:ext>
+            </a:extLst>
+          </a:blip>
+          <a:stretch>
+            <a:fillRect/>
+          </a:stretch>
+        </p:blipFill>
+        <p:spPr>
+          <a:xfrm>
+            <a:off x="5045006" y="6356057"/>
+            <a:ext cx="6409575" cy="363174"/>
+          </a:xfrm>
+          <a:prstGeom prst="rect">
+            <a:avLst/>
+          </a:prstGeom>
+        </p:spPr>
+      </p:pic>
+      <p:sp>
+        <p:nvSpPr>
+          <p:cNvPr id="84" name="Marcador de número de diapositiva 83">
+            <a:extLst>
+              <a:ext uri="{FF2B5EF4-FFF2-40B4-BE49-F238E27FC236}">
+                <a16:creationId xmlns:a16="http://schemas.microsoft.com/office/drawing/2014/main" id="{A39F5085-AAE1-5079-C135-A48EED0B0CA1}"/>
+              </a:ext>
+            </a:extLst>
+          </p:cNvPr>
+          <p:cNvSpPr>
+            <a:spLocks noGrp="1"/>
+          </p:cNvSpPr>
+          <p:nvPr>
+            <p:ph type="sldNum" sz="quarter" idx="7"/>
+          </p:nvPr>
+        </p:nvSpPr>
+        <p:spPr/>
+        <p:txBody>
+          <a:bodyPr/>
+          <a:lstStyle/>
+          <a:p>
+            <a:fld id="{B6F15528-21DE-4FAA-801E-634DDDAF4B2B}" type="slidenum">
+              <a:rPr lang="es-ES" smtClean="0"/>
+              <a:t>4</a:t>
+            </a:fld>
+            <a:endParaRPr lang="es-ES"/>
+          </a:p>
+        </p:txBody>
+      </p:sp>
+      <p:sp>
+        <p:nvSpPr>
+          <p:cNvPr id="4" name="Marcador de texto 2">
+            <a:extLst>
+              <a:ext uri="{FF2B5EF4-FFF2-40B4-BE49-F238E27FC236}">
+                <a16:creationId xmlns:a16="http://schemas.microsoft.com/office/drawing/2014/main" id="{CFF91A30-7BFC-BAF3-6451-A19C30730A23}"/>
+              </a:ext>
+            </a:extLst>
+          </p:cNvPr>
+          <p:cNvSpPr txBox="1">
+            <a:spLocks/>
+          </p:cNvSpPr>
+          <p:nvPr/>
+        </p:nvSpPr>
+        <p:spPr>
+          <a:xfrm>
+            <a:off x="608012" y="1295400"/>
+            <a:ext cx="11048999" cy="4958137"/>
+          </a:xfrm>
+          <a:prstGeom prst="rect">
+            <a:avLst/>
+          </a:prstGeom>
+        </p:spPr>
+        <p:txBody>
+          <a:bodyPr>
+            <a:normAutofit/>
+          </a:bodyPr>
+          <a:lstStyle>
+            <a:lvl1pPr marL="0">
+              <a:defRPr>
+                <a:latin typeface="+mn-lt"/>
+                <a:ea typeface="+mn-ea"/>
+                <a:cs typeface="+mn-cs"/>
+              </a:defRPr>
+            </a:lvl1pPr>
+            <a:lvl2pPr marL="457200">
+              <a:defRPr>
+                <a:latin typeface="+mn-lt"/>
+                <a:ea typeface="+mn-ea"/>
+                <a:cs typeface="+mn-cs"/>
+              </a:defRPr>
+            </a:lvl2pPr>
+            <a:lvl3pPr marL="914400">
+              <a:defRPr>
+                <a:latin typeface="+mn-lt"/>
+                <a:ea typeface="+mn-ea"/>
+                <a:cs typeface="+mn-cs"/>
+              </a:defRPr>
+            </a:lvl3pPr>
+            <a:lvl4pPr marL="1371600">
+              <a:defRPr>
+                <a:latin typeface="+mn-lt"/>
+                <a:ea typeface="+mn-ea"/>
+                <a:cs typeface="+mn-cs"/>
+              </a:defRPr>
+            </a:lvl4pPr>
+            <a:lvl5pPr marL="1828800">
+              <a:defRPr>
+                <a:latin typeface="+mn-lt"/>
+                <a:ea typeface="+mn-ea"/>
+                <a:cs typeface="+mn-cs"/>
+              </a:defRPr>
+            </a:lvl5pPr>
+            <a:lvl6pPr marL="2286000">
+              <a:defRPr>
+                <a:latin typeface="+mn-lt"/>
+                <a:ea typeface="+mn-ea"/>
+                <a:cs typeface="+mn-cs"/>
+              </a:defRPr>
+            </a:lvl6pPr>
+            <a:lvl7pPr marL="2743200">
+              <a:defRPr>
+                <a:latin typeface="+mn-lt"/>
+                <a:ea typeface="+mn-ea"/>
+                <a:cs typeface="+mn-cs"/>
+              </a:defRPr>
+            </a:lvl7pPr>
+            <a:lvl8pPr marL="3200400">
+              <a:defRPr>
+                <a:latin typeface="+mn-lt"/>
+                <a:ea typeface="+mn-ea"/>
+                <a:cs typeface="+mn-cs"/>
+              </a:defRPr>
+            </a:lvl8pPr>
+            <a:lvl9pPr marL="3657600">
+              <a:defRPr>
+                <a:latin typeface="+mn-lt"/>
+                <a:ea typeface="+mn-ea"/>
+                <a:cs typeface="+mn-cs"/>
+              </a:defRPr>
+            </a:lvl9pPr>
+          </a:lstStyle>
+          <a:p>
+            <a:r>
+              <a:rPr lang="en-US" sz="2000" dirty="0"/>
+              <a:t> </a:t>
+            </a:r>
+          </a:p>
+          <a:p>
+            <a:pPr algn="just"/>
+            <a:endParaRPr lang="en-US" sz="2000" dirty="0"/>
+          </a:p>
+          <a:p>
+            <a:pPr algn="just"/>
+            <a:endParaRPr lang="en-US" sz="2000" b="1" i="1" dirty="0"/>
+          </a:p>
+          <a:p>
+            <a:pPr algn="just"/>
+            <a:endParaRPr lang="en-US" sz="2000" kern="0" dirty="0">
+              <a:solidFill>
+                <a:sysClr val="windowText" lastClr="000000"/>
+              </a:solidFill>
+            </a:endParaRPr>
+          </a:p>
+          <a:p>
+            <a:endParaRPr lang="en-US" sz="2000" kern="0" dirty="0">
+              <a:solidFill>
+                <a:sysClr val="windowText" lastClr="000000"/>
+              </a:solidFill>
+            </a:endParaRPr>
+          </a:p>
+        </p:txBody>
+      </p:sp>
+      <p:sp>
+        <p:nvSpPr>
+          <p:cNvPr id="5" name="Marcador de pie de página 2">
+            <a:extLst>
+              <a:ext uri="{FF2B5EF4-FFF2-40B4-BE49-F238E27FC236}">
+                <a16:creationId xmlns:a16="http://schemas.microsoft.com/office/drawing/2014/main" id="{4D59972F-9803-FEC0-FFF5-F0494C510B38}"/>
+              </a:ext>
+            </a:extLst>
+          </p:cNvPr>
+          <p:cNvSpPr>
+            <a:spLocks noGrp="1"/>
+          </p:cNvSpPr>
+          <p:nvPr>
+            <p:ph type="ftr" sz="quarter" idx="5"/>
+          </p:nvPr>
+        </p:nvSpPr>
+        <p:spPr>
+          <a:xfrm>
+            <a:off x="609600" y="6457057"/>
+            <a:ext cx="2743200" cy="184666"/>
+          </a:xfrm>
+        </p:spPr>
+        <p:txBody>
+          <a:bodyPr/>
+          <a:lstStyle/>
+          <a:p>
+            <a:pPr marL="12700">
+              <a:spcBef>
+                <a:spcPts val="15"/>
+              </a:spcBef>
+            </a:pPr>
+            <a:r>
+              <a:rPr lang="es-ES" spc="-5"/>
+              <a:t>LAB 3. INTERFEROMETERS I</a:t>
+            </a:r>
+            <a:endParaRPr lang="es-ES" spc="-5" dirty="0"/>
+          </a:p>
+        </p:txBody>
+      </p:sp>
+      <p:sp>
+        <p:nvSpPr>
+          <p:cNvPr id="6" name="CuadroTexto 5">
+            <a:extLst>
+              <a:ext uri="{FF2B5EF4-FFF2-40B4-BE49-F238E27FC236}">
+                <a16:creationId xmlns:a16="http://schemas.microsoft.com/office/drawing/2014/main" id="{005BC3B3-D2A2-8533-E92A-F93E406086A3}"/>
+              </a:ext>
+            </a:extLst>
+          </p:cNvPr>
+          <p:cNvSpPr txBox="1"/>
+          <p:nvPr/>
+        </p:nvSpPr>
+        <p:spPr>
+          <a:xfrm>
+            <a:off x="733423" y="1524000"/>
+            <a:ext cx="10898188" cy="646331"/>
+          </a:xfrm>
+          <a:prstGeom prst="rect">
+            <a:avLst/>
+          </a:prstGeom>
+          <a:noFill/>
+        </p:spPr>
+        <p:txBody>
+          <a:bodyPr wrap="square">
+            <a:spAutoFit/>
+          </a:bodyPr>
+          <a:lstStyle/>
+          <a:p>
+            <a:r>
+              <a:rPr lang="en-US" sz="1800" dirty="0"/>
+              <a:t>A la hora de </a:t>
+            </a:r>
+            <a:r>
+              <a:rPr lang="en-US" sz="1800" dirty="0" err="1"/>
+              <a:t>subir</a:t>
+            </a:r>
+            <a:r>
+              <a:rPr lang="en-US" sz="1800" dirty="0"/>
+              <a:t> la </a:t>
+            </a:r>
+            <a:r>
+              <a:rPr lang="en-US" sz="1800" dirty="0" err="1"/>
+              <a:t>tarea</a:t>
+            </a:r>
+            <a:r>
+              <a:rPr lang="en-US" sz="1800" dirty="0"/>
+              <a:t> me he dado </a:t>
+            </a:r>
+            <a:r>
+              <a:rPr lang="en-US" sz="1800" dirty="0" err="1"/>
+              <a:t>cuenta</a:t>
+            </a:r>
+            <a:r>
+              <a:rPr lang="en-US" sz="1800" dirty="0"/>
+              <a:t> de </a:t>
+            </a:r>
+            <a:r>
+              <a:rPr lang="en-US" sz="1800" dirty="0" err="1"/>
+              <a:t>que</a:t>
+            </a:r>
+            <a:r>
+              <a:rPr lang="en-US" sz="1800" dirty="0"/>
+              <a:t> </a:t>
+            </a:r>
+            <a:r>
+              <a:rPr lang="en-US" sz="1800" dirty="0" err="1"/>
+              <a:t>en</a:t>
+            </a:r>
+            <a:r>
+              <a:rPr lang="en-US" sz="1800" dirty="0"/>
+              <a:t> </a:t>
+            </a:r>
+            <a:r>
+              <a:rPr lang="en-US" sz="1800" dirty="0" err="1"/>
+              <a:t>todas</a:t>
+            </a:r>
+            <a:r>
+              <a:rPr lang="en-US" sz="1800" dirty="0"/>
+              <a:t> las </a:t>
+            </a:r>
+            <a:r>
+              <a:rPr lang="en-US" sz="1800" dirty="0" err="1"/>
+              <a:t>gráficas</a:t>
+            </a:r>
+            <a:r>
+              <a:rPr lang="en-US" sz="1800" dirty="0"/>
+              <a:t> he </a:t>
+            </a:r>
+            <a:r>
+              <a:rPr lang="en-US" sz="1800" dirty="0" err="1"/>
+              <a:t>puesto</a:t>
+            </a:r>
+            <a:r>
+              <a:rPr lang="en-US" sz="1800" dirty="0"/>
+              <a:t> </a:t>
+            </a:r>
+            <a:r>
+              <a:rPr lang="en-US" sz="1800" dirty="0" err="1"/>
+              <a:t>el</a:t>
+            </a:r>
+            <a:r>
+              <a:rPr lang="en-US" sz="1800" dirty="0"/>
+              <a:t> </a:t>
+            </a:r>
+            <a:r>
+              <a:rPr lang="en-US" sz="1800" dirty="0" err="1"/>
+              <a:t>eje</a:t>
+            </a:r>
+            <a:r>
+              <a:rPr lang="en-US" sz="1800" dirty="0"/>
+              <a:t> x </a:t>
+            </a:r>
+            <a:r>
+              <a:rPr lang="en-US" sz="1800" dirty="0" err="1"/>
+              <a:t>en</a:t>
+            </a:r>
+            <a:r>
+              <a:rPr lang="en-US" sz="1800" dirty="0"/>
+              <a:t> um, </a:t>
+            </a:r>
+            <a:r>
+              <a:rPr lang="en-US" sz="1800" dirty="0" err="1"/>
+              <a:t>cuando</a:t>
+            </a:r>
+            <a:r>
+              <a:rPr lang="en-US" sz="1800" dirty="0"/>
+              <a:t> </a:t>
+            </a:r>
+            <a:r>
+              <a:rPr lang="en-US" sz="1800" dirty="0" err="1"/>
+              <a:t>deberían</a:t>
+            </a:r>
+            <a:r>
+              <a:rPr lang="en-US" sz="1800" dirty="0"/>
+              <a:t> ser nm. </a:t>
+            </a:r>
+            <a:endParaRPr lang="es-ES" dirty="0"/>
+          </a:p>
+        </p:txBody>
+      </p:sp>
+    </p:spTree>
+    <p:extLst>
+      <p:ext uri="{BB962C8B-B14F-4D97-AF65-F5344CB8AC3E}">
+        <p14:creationId xmlns:p14="http://schemas.microsoft.com/office/powerpoint/2010/main" val="3622345811"/>
+      </p:ext>
+    </p:extLst>
+  </p:cSld>
+  <p:clrMapOvr>
+    <a:masterClrMapping/>
+  </p:clrMapOvr>
+</p:sld>
+</file>
+
+<file path=ppt/slides/slide5.xml><?xml version="1.0" encoding="utf-8"?>
+<p:sld xmlns:a="http://schemas.openxmlformats.org/drawingml/2006/main" xmlns:r="http://schemas.openxmlformats.org/officeDocument/2006/relationships" xmlns:p="http://schemas.openxmlformats.org/presentationml/2006/main">
+  <p:cSld>
+    <p:spTree>
+      <p:nvGrpSpPr>
+        <p:cNvPr id="1" name="">
+          <a:extLst>
+            <a:ext uri="{FF2B5EF4-FFF2-40B4-BE49-F238E27FC236}">
               <a16:creationId xmlns:a16="http://schemas.microsoft.com/office/drawing/2014/main" id="{D923F582-340E-9B96-CF1D-8C7138583BA8}"/>
             </a:ext>
           </a:extLst>
@@ -13399,7 +14454,7 @@
           <a:p>
             <a:fld id="{B6F15528-21DE-4FAA-801E-634DDDAF4B2B}" type="slidenum">
               <a:rPr lang="es-ES" smtClean="0"/>
-              <a:t>4</a:t>
+              <a:t>5</a:t>
             </a:fld>
             <a:endParaRPr lang="es-ES"/>
           </a:p>
@@ -13513,7 +14568,7 @@
 </p:sld>
 </file>
 
-<file path=ppt/slides/slide5.xml><?xml version="1.0" encoding="utf-8"?>
+<file path=ppt/slides/slide6.xml><?xml version="1.0" encoding="utf-8"?>
 <p:sld xmlns:a="http://schemas.openxmlformats.org/drawingml/2006/main" xmlns:r="http://schemas.openxmlformats.org/officeDocument/2006/relationships" xmlns:p="http://schemas.openxmlformats.org/presentationml/2006/main">
   <p:cSld>
     <p:spTree>
@@ -13633,7 +14688,7 @@
           <a:p>
             <a:fld id="{B6F15528-21DE-4FAA-801E-634DDDAF4B2B}" type="slidenum">
               <a:rPr lang="es-ES" smtClean="0"/>
-              <a:t>5</a:t>
+              <a:t>6</a:t>
             </a:fld>
             <a:endParaRPr lang="es-ES"/>
           </a:p>
@@ -13838,7 +14893,7 @@
 </p:sld>
 </file>
 
-<file path=ppt/slides/slide6.xml><?xml version="1.0" encoding="utf-8"?>
+<file path=ppt/slides/slide7.xml><?xml version="1.0" encoding="utf-8"?>
 <p:sld xmlns:a="http://schemas.openxmlformats.org/drawingml/2006/main" xmlns:r="http://schemas.openxmlformats.org/officeDocument/2006/relationships" xmlns:p="http://schemas.openxmlformats.org/presentationml/2006/main">
   <p:cSld>
     <p:spTree>
@@ -13958,7 +15013,7 @@
           <a:p>
             <a:fld id="{B6F15528-21DE-4FAA-801E-634DDDAF4B2B}" type="slidenum">
               <a:rPr lang="es-ES" smtClean="0"/>
-              <a:t>6</a:t>
+              <a:t>7</a:t>
             </a:fld>
             <a:endParaRPr lang="es-ES"/>
           </a:p>
@@ -14113,7 +15168,7 @@
 </p:sld>
 </file>
 
-<file path=ppt/slides/slide7.xml><?xml version="1.0" encoding="utf-8"?>
+<file path=ppt/slides/slide8.xml><?xml version="1.0" encoding="utf-8"?>
 <p:sld xmlns:a="http://schemas.openxmlformats.org/drawingml/2006/main" xmlns:r="http://schemas.openxmlformats.org/officeDocument/2006/relationships" xmlns:p="http://schemas.openxmlformats.org/presentationml/2006/main">
   <p:cSld>
     <p:spTree>
@@ -14249,7 +15304,7 @@
           <a:p>
             <a:fld id="{B6F15528-21DE-4FAA-801E-634DDDAF4B2B}" type="slidenum">
               <a:rPr lang="es-ES" smtClean="0"/>
-              <a:t>7</a:t>
+              <a:t>8</a:t>
             </a:fld>
             <a:endParaRPr lang="es-ES"/>
           </a:p>
@@ -14678,7 +15733,15 @@
             </a:r>
             <a:r>
               <a:rPr lang="en-US" dirty="0"/>
-              <a:t> de la longitude de </a:t>
+              <a:t> de la </a:t>
+            </a:r>
+            <a:r>
+              <a:rPr lang="en-US" dirty="0" err="1"/>
+              <a:t>longitud</a:t>
+            </a:r>
+            <a:r>
+              <a:rPr lang="en-US" dirty="0"/>
+              <a:t> de </a:t>
             </a:r>
             <a:r>
               <a:rPr lang="en-US" dirty="0" err="1"/>
@@ -14825,7 +15888,7 @@
 </p:sld>
 </file>
 
-<file path=ppt/slides/slide8.xml><?xml version="1.0" encoding="utf-8"?>
+<file path=ppt/slides/slide9.xml><?xml version="1.0" encoding="utf-8"?>
 <p:sld xmlns:a="http://schemas.openxmlformats.org/drawingml/2006/main" xmlns:r="http://schemas.openxmlformats.org/officeDocument/2006/relationships" xmlns:p="http://schemas.openxmlformats.org/presentationml/2006/main">
   <p:cSld>
     <p:spTree>
@@ -14961,7 +16024,7 @@
           <a:p>
             <a:fld id="{B6F15528-21DE-4FAA-801E-634DDDAF4B2B}" type="slidenum">
               <a:rPr lang="es-ES" smtClean="0"/>
-              <a:t>8</a:t>
+              <a:t>9</a:t>
             </a:fld>
             <a:endParaRPr lang="es-ES"/>
           </a:p>
@@ -15304,489 +16367,6 @@
     <p:extLst>
       <p:ext uri="{BB962C8B-B14F-4D97-AF65-F5344CB8AC3E}">
         <p14:creationId xmlns:p14="http://schemas.microsoft.com/office/powerpoint/2010/main" val="2971445483"/>
-      </p:ext>
-    </p:extLst>
-  </p:cSld>
-  <p:clrMapOvr>
-    <a:masterClrMapping/>
-  </p:clrMapOvr>
-</p:sld>
-</file>
-
-<file path=ppt/slides/slide9.xml><?xml version="1.0" encoding="utf-8"?>
-<p:sld xmlns:a="http://schemas.openxmlformats.org/drawingml/2006/main" xmlns:r="http://schemas.openxmlformats.org/officeDocument/2006/relationships" xmlns:p="http://schemas.openxmlformats.org/presentationml/2006/main">
-  <p:cSld>
-    <p:spTree>
-      <p:nvGrpSpPr>
-        <p:cNvPr id="1" name="">
-          <a:extLst>
-            <a:ext uri="{FF2B5EF4-FFF2-40B4-BE49-F238E27FC236}">
-              <a16:creationId xmlns:a16="http://schemas.microsoft.com/office/drawing/2014/main" id="{A9FFCAF2-4CAF-3724-5E41-A350B5EDA2FD}"/>
-            </a:ext>
-          </a:extLst>
-        </p:cNvPr>
-        <p:cNvGrpSpPr/>
-        <p:nvPr/>
-      </p:nvGrpSpPr>
-      <p:grpSpPr>
-        <a:xfrm>
-          <a:off x="0" y="0"/>
-          <a:ext cx="0" cy="0"/>
-          <a:chOff x="0" y="0"/>
-          <a:chExt cx="0" cy="0"/>
-        </a:xfrm>
-      </p:grpSpPr>
-      <p:sp>
-        <p:nvSpPr>
-          <p:cNvPr id="2" name="Título 1">
-            <a:extLst>
-              <a:ext uri="{FF2B5EF4-FFF2-40B4-BE49-F238E27FC236}">
-                <a16:creationId xmlns:a16="http://schemas.microsoft.com/office/drawing/2014/main" id="{4337D877-2605-BB40-43D4-940E277FCE45}"/>
-              </a:ext>
-            </a:extLst>
-          </p:cNvPr>
-          <p:cNvSpPr>
-            <a:spLocks noGrp="1"/>
-          </p:cNvSpPr>
-          <p:nvPr>
-            <p:ph type="title"/>
-          </p:nvPr>
-        </p:nvSpPr>
-        <p:spPr/>
-        <p:txBody>
-          <a:bodyPr/>
-          <a:lstStyle/>
-          <a:p>
-            <a:r>
-              <a:rPr lang="es-ES" dirty="0" err="1"/>
-              <a:t>Unbalanced</a:t>
-            </a:r>
-            <a:r>
-              <a:rPr lang="es-ES" dirty="0"/>
-              <a:t> </a:t>
-            </a:r>
-            <a:r>
-              <a:rPr lang="es-ES" dirty="0" err="1"/>
-              <a:t>configuration</a:t>
-            </a:r>
-            <a:r>
-              <a:rPr lang="es-ES" dirty="0"/>
-              <a:t> –</a:t>
-            </a:r>
-            <a:r>
-              <a:rPr lang="es-ES" dirty="0" err="1"/>
-              <a:t>Phase</a:t>
-            </a:r>
-            <a:r>
-              <a:rPr lang="es-ES" dirty="0"/>
-              <a:t> </a:t>
-            </a:r>
-            <a:r>
-              <a:rPr lang="es-ES" dirty="0" err="1"/>
-              <a:t>Difference</a:t>
-            </a:r>
-            <a:r>
-              <a:rPr lang="es-ES" dirty="0"/>
-              <a:t> </a:t>
-            </a:r>
-          </a:p>
-        </p:txBody>
-      </p:sp>
-      <p:sp>
-        <p:nvSpPr>
-          <p:cNvPr id="4" name="Marcador de pie de página 3">
-            <a:extLst>
-              <a:ext uri="{FF2B5EF4-FFF2-40B4-BE49-F238E27FC236}">
-                <a16:creationId xmlns:a16="http://schemas.microsoft.com/office/drawing/2014/main" id="{E952A2EF-B619-D84B-C41B-713072E0CB84}"/>
-              </a:ext>
-            </a:extLst>
-          </p:cNvPr>
-          <p:cNvSpPr>
-            <a:spLocks noGrp="1"/>
-          </p:cNvSpPr>
-          <p:nvPr>
-            <p:ph type="ftr" sz="quarter" idx="5"/>
-          </p:nvPr>
-        </p:nvSpPr>
-        <p:spPr/>
-        <p:txBody>
-          <a:bodyPr/>
-          <a:lstStyle/>
-          <a:p>
-            <a:pPr marL="12700">
-              <a:spcBef>
-                <a:spcPts val="15"/>
-              </a:spcBef>
-            </a:pPr>
-            <a:r>
-              <a:rPr lang="es-ES" spc="-5"/>
-              <a:t>LAB 3. INTERFEROMETERS I</a:t>
-            </a:r>
-            <a:endParaRPr lang="es-ES" spc="-5" dirty="0"/>
-          </a:p>
-        </p:txBody>
-      </p:sp>
-      <p:sp>
-        <p:nvSpPr>
-          <p:cNvPr id="5" name="Marcador de número de diapositiva 4">
-            <a:extLst>
-              <a:ext uri="{FF2B5EF4-FFF2-40B4-BE49-F238E27FC236}">
-                <a16:creationId xmlns:a16="http://schemas.microsoft.com/office/drawing/2014/main" id="{DBA817EB-9F2F-0DD7-3B41-D3F255B2C785}"/>
-              </a:ext>
-            </a:extLst>
-          </p:cNvPr>
-          <p:cNvSpPr>
-            <a:spLocks noGrp="1"/>
-          </p:cNvSpPr>
-          <p:nvPr>
-            <p:ph type="sldNum" sz="quarter" idx="7"/>
-          </p:nvPr>
-        </p:nvSpPr>
-        <p:spPr/>
-        <p:txBody>
-          <a:bodyPr/>
-          <a:lstStyle/>
-          <a:p>
-            <a:fld id="{B6F15528-21DE-4FAA-801E-634DDDAF4B2B}" type="slidenum">
-              <a:rPr lang="es-ES" smtClean="0"/>
-              <a:t>9</a:t>
-            </a:fld>
-            <a:endParaRPr lang="es-ES"/>
-          </a:p>
-        </p:txBody>
-      </p:sp>
-      <p:sp>
-        <p:nvSpPr>
-          <p:cNvPr id="9" name="CuadroTexto 8">
-            <a:extLst>
-              <a:ext uri="{FF2B5EF4-FFF2-40B4-BE49-F238E27FC236}">
-                <a16:creationId xmlns:a16="http://schemas.microsoft.com/office/drawing/2014/main" id="{B1B56D5A-D857-F6BF-9581-DE217714D775}"/>
-              </a:ext>
-            </a:extLst>
-          </p:cNvPr>
-          <p:cNvSpPr txBox="1"/>
-          <p:nvPr/>
-        </p:nvSpPr>
-        <p:spPr>
-          <a:xfrm>
-            <a:off x="5426365" y="2133600"/>
-            <a:ext cx="6128326" cy="646331"/>
-          </a:xfrm>
-          <a:prstGeom prst="rect">
-            <a:avLst/>
-          </a:prstGeom>
-          <a:noFill/>
-        </p:spPr>
-        <p:txBody>
-          <a:bodyPr wrap="square">
-            <a:spAutoFit/>
-          </a:bodyPr>
-          <a:lstStyle/>
-          <a:p>
-            <a:endParaRPr lang="en-US" dirty="0"/>
-          </a:p>
-          <a:p>
-            <a:endParaRPr lang="es-ES" dirty="0"/>
-          </a:p>
-        </p:txBody>
-      </p:sp>
-      <p:pic>
-        <p:nvPicPr>
-          <p:cNvPr id="8" name="Imagen 7">
-            <a:extLst>
-              <a:ext uri="{FF2B5EF4-FFF2-40B4-BE49-F238E27FC236}">
-                <a16:creationId xmlns:a16="http://schemas.microsoft.com/office/drawing/2014/main" id="{8FEC3C99-BB92-EE36-CF0A-51CF71688A9E}"/>
-              </a:ext>
-            </a:extLst>
-          </p:cNvPr>
-          <p:cNvPicPr>
-            <a:picLocks noChangeAspect="1"/>
-          </p:cNvPicPr>
-          <p:nvPr/>
-        </p:nvPicPr>
-        <p:blipFill>
-          <a:blip r:embed="rId2">
-            <a:extLst>
-              <a:ext uri="{28A0092B-C50C-407E-A947-70E740481C1C}">
-                <a14:useLocalDpi xmlns:a14="http://schemas.microsoft.com/office/drawing/2010/main" val="0"/>
-              </a:ext>
-            </a:extLst>
-          </a:blip>
-          <a:srcRect/>
-          <a:stretch/>
-        </p:blipFill>
-        <p:spPr>
-          <a:xfrm>
-            <a:off x="305161" y="575600"/>
-            <a:ext cx="10044841" cy="872200"/>
-          </a:xfrm>
-          <a:prstGeom prst="rect">
-            <a:avLst/>
-          </a:prstGeom>
-        </p:spPr>
-      </p:pic>
-      <p:sp>
-        <p:nvSpPr>
-          <p:cNvPr id="10" name="CuadroTexto 9">
-            <a:extLst>
-              <a:ext uri="{FF2B5EF4-FFF2-40B4-BE49-F238E27FC236}">
-                <a16:creationId xmlns:a16="http://schemas.microsoft.com/office/drawing/2014/main" id="{2DB85571-0C8A-62B2-4D04-46C7FCF54DA6}"/>
-              </a:ext>
-            </a:extLst>
-          </p:cNvPr>
-          <p:cNvSpPr txBox="1"/>
-          <p:nvPr/>
-        </p:nvSpPr>
-        <p:spPr>
-          <a:xfrm>
-            <a:off x="609600" y="5061554"/>
-            <a:ext cx="10439400" cy="1200329"/>
-          </a:xfrm>
-          <a:prstGeom prst="rect">
-            <a:avLst/>
-          </a:prstGeom>
-          <a:noFill/>
-        </p:spPr>
-        <p:txBody>
-          <a:bodyPr wrap="square">
-            <a:spAutoFit/>
-          </a:bodyPr>
-          <a:lstStyle/>
-          <a:p>
-            <a:r>
-              <a:rPr lang="en-US" dirty="0"/>
-              <a:t>Al </a:t>
-            </a:r>
-            <a:r>
-              <a:rPr lang="en-US" dirty="0" err="1"/>
-              <a:t>varirar</a:t>
-            </a:r>
-            <a:r>
-              <a:rPr lang="en-US" dirty="0"/>
-              <a:t> </a:t>
-            </a:r>
-            <a:r>
-              <a:rPr lang="en-US" dirty="0" err="1"/>
-              <a:t>el</a:t>
-            </a:r>
-            <a:r>
-              <a:rPr lang="en-US" dirty="0"/>
-              <a:t> </a:t>
-            </a:r>
-            <a:r>
-              <a:rPr lang="en-US" dirty="0" err="1"/>
-              <a:t>índice</a:t>
-            </a:r>
-            <a:r>
-              <a:rPr lang="en-US" dirty="0"/>
-              <a:t> </a:t>
-            </a:r>
-            <a:r>
-              <a:rPr lang="en-US" dirty="0" err="1"/>
-              <a:t>efectivo</a:t>
-            </a:r>
-            <a:r>
-              <a:rPr lang="en-US" dirty="0"/>
-              <a:t> </a:t>
-            </a:r>
-            <a:r>
-              <a:rPr lang="en-US" dirty="0" err="1"/>
-              <a:t>en</a:t>
-            </a:r>
-            <a:r>
-              <a:rPr lang="en-US" dirty="0"/>
-              <a:t> mayor o </a:t>
-            </a:r>
-            <a:r>
-              <a:rPr lang="en-US" dirty="0" err="1"/>
-              <a:t>menor</a:t>
-            </a:r>
-            <a:r>
-              <a:rPr lang="en-US" dirty="0"/>
-              <a:t> </a:t>
-            </a:r>
-            <a:r>
-              <a:rPr lang="en-US" dirty="0" err="1"/>
-              <a:t>medida</a:t>
-            </a:r>
-            <a:r>
-              <a:rPr lang="en-US" dirty="0"/>
-              <a:t> de uno de </a:t>
-            </a:r>
-            <a:r>
-              <a:rPr lang="en-US" dirty="0" err="1"/>
-              <a:t>los</a:t>
-            </a:r>
-            <a:r>
-              <a:rPr lang="en-US" dirty="0"/>
-              <a:t> </a:t>
-            </a:r>
-            <a:r>
-              <a:rPr lang="en-US" dirty="0" err="1"/>
-              <a:t>brazos</a:t>
-            </a:r>
-            <a:r>
-              <a:rPr lang="en-US" dirty="0"/>
-              <a:t>, </a:t>
-            </a:r>
-            <a:r>
-              <a:rPr lang="en-US" dirty="0" err="1"/>
-              <a:t>podemos</a:t>
-            </a:r>
-            <a:r>
-              <a:rPr lang="en-US" dirty="0"/>
-              <a:t> </a:t>
-            </a:r>
-            <a:r>
-              <a:rPr lang="en-US" dirty="0" err="1"/>
-              <a:t>controlar</a:t>
-            </a:r>
-            <a:r>
-              <a:rPr lang="en-US" dirty="0"/>
-              <a:t> la </a:t>
-            </a:r>
-            <a:r>
-              <a:rPr lang="en-US" dirty="0" err="1"/>
-              <a:t>potencia</a:t>
-            </a:r>
-            <a:r>
-              <a:rPr lang="en-US" dirty="0"/>
-              <a:t> </a:t>
-            </a:r>
-            <a:r>
-              <a:rPr lang="en-US" dirty="0" err="1"/>
-              <a:t>que</a:t>
-            </a:r>
-            <a:r>
-              <a:rPr lang="en-US" dirty="0"/>
-              <a:t> sale de </a:t>
-            </a:r>
-            <a:r>
-              <a:rPr lang="en-US" dirty="0" err="1"/>
-              <a:t>los</a:t>
-            </a:r>
-            <a:r>
-              <a:rPr lang="en-US" dirty="0"/>
-              <a:t> </a:t>
-            </a:r>
-            <a:r>
-              <a:rPr lang="en-US" dirty="0" err="1"/>
-              <a:t>puertos</a:t>
-            </a:r>
-            <a:r>
-              <a:rPr lang="en-US" dirty="0"/>
-              <a:t> para </a:t>
-            </a:r>
-            <a:r>
-              <a:rPr lang="en-US" dirty="0" err="1"/>
-              <a:t>una</a:t>
-            </a:r>
-            <a:r>
-              <a:rPr lang="en-US" dirty="0"/>
-              <a:t> </a:t>
-            </a:r>
-            <a:r>
-              <a:rPr lang="en-US" dirty="0" err="1"/>
-              <a:t>determinada</a:t>
-            </a:r>
-            <a:r>
-              <a:rPr lang="en-US" dirty="0"/>
-              <a:t> </a:t>
-            </a:r>
-            <a:r>
-              <a:rPr lang="en-US" dirty="0" err="1"/>
-              <a:t>longitud</a:t>
-            </a:r>
-            <a:r>
-              <a:rPr lang="en-US" dirty="0"/>
-              <a:t> de </a:t>
-            </a:r>
-            <a:r>
-              <a:rPr lang="en-US" dirty="0" err="1"/>
-              <a:t>onda</a:t>
-            </a:r>
-            <a:r>
-              <a:rPr lang="en-US" dirty="0"/>
-              <a:t>.   </a:t>
-            </a:r>
-          </a:p>
-          <a:p>
-            <a:endParaRPr lang="en-US" dirty="0"/>
-          </a:p>
-          <a:p>
-            <a:endParaRPr lang="es-ES" dirty="0"/>
-          </a:p>
-        </p:txBody>
-      </p:sp>
-      <p:pic>
-        <p:nvPicPr>
-          <p:cNvPr id="3" name="Imagen 2">
-            <a:extLst>
-              <a:ext uri="{FF2B5EF4-FFF2-40B4-BE49-F238E27FC236}">
-                <a16:creationId xmlns:a16="http://schemas.microsoft.com/office/drawing/2014/main" id="{0763DAF3-932E-71E0-53E4-8B79009188C8}"/>
-              </a:ext>
-            </a:extLst>
-          </p:cNvPr>
-          <p:cNvPicPr>
-            <a:picLocks noChangeAspect="1"/>
-          </p:cNvPicPr>
-          <p:nvPr/>
-        </p:nvPicPr>
-        <p:blipFill>
-          <a:blip r:embed="rId3"/>
-          <a:stretch>
-            <a:fillRect/>
-          </a:stretch>
-        </p:blipFill>
-        <p:spPr>
-          <a:xfrm>
-            <a:off x="6471228" y="1574149"/>
-            <a:ext cx="4038600" cy="3190214"/>
-          </a:xfrm>
-          <a:prstGeom prst="rect">
-            <a:avLst/>
-          </a:prstGeom>
-        </p:spPr>
-      </p:pic>
-      <p:pic>
-        <p:nvPicPr>
-          <p:cNvPr id="11" name="Imagen 10">
-            <a:extLst>
-              <a:ext uri="{FF2B5EF4-FFF2-40B4-BE49-F238E27FC236}">
-                <a16:creationId xmlns:a16="http://schemas.microsoft.com/office/drawing/2014/main" id="{2F5C511F-3413-3D2F-3F95-259AFCFBCC2C}"/>
-              </a:ext>
-            </a:extLst>
-          </p:cNvPr>
-          <p:cNvPicPr>
-            <a:picLocks noChangeAspect="1"/>
-          </p:cNvPicPr>
-          <p:nvPr/>
-        </p:nvPicPr>
-        <p:blipFill>
-          <a:blip r:embed="rId4">
-            <a:extLst>
-              <a:ext uri="{28A0092B-C50C-407E-A947-70E740481C1C}">
-                <a14:useLocalDpi xmlns:a14="http://schemas.microsoft.com/office/drawing/2010/main" val="0"/>
-              </a:ext>
-            </a:extLst>
-          </a:blip>
-          <a:srcRect t="384" b="384"/>
-          <a:stretch/>
-        </p:blipFill>
-        <p:spPr>
-          <a:xfrm>
-            <a:off x="1066800" y="1508871"/>
-            <a:ext cx="4038599" cy="3239122"/>
-          </a:xfrm>
-          <a:prstGeom prst="rect">
-            <a:avLst/>
-          </a:prstGeom>
-        </p:spPr>
-      </p:pic>
-    </p:spTree>
-    <p:extLst>
-      <p:ext uri="{BB962C8B-B14F-4D97-AF65-F5344CB8AC3E}">
-        <p14:creationId xmlns:p14="http://schemas.microsoft.com/office/powerpoint/2010/main" val="1338821209"/>
       </p:ext>
     </p:extLst>
   </p:cSld>

--- a/LabBook_3.pptx
+++ b/LabBook_3.pptx
@@ -5,33 +5,32 @@
     <p:sldMasterId id="2147483648" r:id="rId1"/>
   </p:sldMasterIdLst>
   <p:notesMasterIdLst>
-    <p:notesMasterId r:id="rId23"/>
+    <p:notesMasterId r:id="rId22"/>
   </p:notesMasterIdLst>
   <p:handoutMasterIdLst>
-    <p:handoutMasterId r:id="rId24"/>
+    <p:handoutMasterId r:id="rId23"/>
   </p:handoutMasterIdLst>
   <p:sldIdLst>
     <p:sldId id="256" r:id="rId2"/>
     <p:sldId id="289" r:id="rId3"/>
     <p:sldId id="290" r:id="rId4"/>
-    <p:sldId id="320" r:id="rId5"/>
-    <p:sldId id="305" r:id="rId6"/>
-    <p:sldId id="306" r:id="rId7"/>
-    <p:sldId id="307" r:id="rId8"/>
-    <p:sldId id="309" r:id="rId9"/>
-    <p:sldId id="310" r:id="rId10"/>
-    <p:sldId id="313" r:id="rId11"/>
-    <p:sldId id="312" r:id="rId12"/>
-    <p:sldId id="295" r:id="rId13"/>
-    <p:sldId id="319" r:id="rId14"/>
-    <p:sldId id="317" r:id="rId15"/>
-    <p:sldId id="318" r:id="rId16"/>
-    <p:sldId id="296" r:id="rId17"/>
-    <p:sldId id="314" r:id="rId18"/>
-    <p:sldId id="293" r:id="rId19"/>
-    <p:sldId id="315" r:id="rId20"/>
-    <p:sldId id="316" r:id="rId21"/>
-    <p:sldId id="288" r:id="rId22"/>
+    <p:sldId id="305" r:id="rId5"/>
+    <p:sldId id="306" r:id="rId6"/>
+    <p:sldId id="307" r:id="rId7"/>
+    <p:sldId id="309" r:id="rId8"/>
+    <p:sldId id="310" r:id="rId9"/>
+    <p:sldId id="313" r:id="rId10"/>
+    <p:sldId id="312" r:id="rId11"/>
+    <p:sldId id="295" r:id="rId12"/>
+    <p:sldId id="319" r:id="rId13"/>
+    <p:sldId id="317" r:id="rId14"/>
+    <p:sldId id="318" r:id="rId15"/>
+    <p:sldId id="296" r:id="rId16"/>
+    <p:sldId id="314" r:id="rId17"/>
+    <p:sldId id="293" r:id="rId18"/>
+    <p:sldId id="315" r:id="rId19"/>
+    <p:sldId id="316" r:id="rId20"/>
+    <p:sldId id="288" r:id="rId21"/>
   </p:sldIdLst>
   <p:sldSz cx="12192000" cy="6858000"/>
   <p:notesSz cx="12192000" cy="6858000"/>
@@ -782,114 +781,6 @@
         <p:cNvPr id="1" name="">
           <a:extLst>
             <a:ext uri="{FF2B5EF4-FFF2-40B4-BE49-F238E27FC236}">
-              <a16:creationId xmlns:a16="http://schemas.microsoft.com/office/drawing/2014/main" id="{FEC4E6C5-6855-F1A0-D8D0-56C3AF90C0DF}"/>
-            </a:ext>
-          </a:extLst>
-        </p:cNvPr>
-        <p:cNvGrpSpPr/>
-        <p:nvPr/>
-      </p:nvGrpSpPr>
-      <p:grpSpPr>
-        <a:xfrm>
-          <a:off x="0" y="0"/>
-          <a:ext cx="0" cy="0"/>
-          <a:chOff x="0" y="0"/>
-          <a:chExt cx="0" cy="0"/>
-        </a:xfrm>
-      </p:grpSpPr>
-      <p:sp>
-        <p:nvSpPr>
-          <p:cNvPr id="2" name="Marcador de imagen de diapositiva 1">
-            <a:extLst>
-              <a:ext uri="{FF2B5EF4-FFF2-40B4-BE49-F238E27FC236}">
-                <a16:creationId xmlns:a16="http://schemas.microsoft.com/office/drawing/2014/main" id="{39E5A019-088C-0A7F-9630-07781EE5EAC2}"/>
-              </a:ext>
-            </a:extLst>
-          </p:cNvPr>
-          <p:cNvSpPr>
-            <a:spLocks noGrp="1" noRot="1" noChangeAspect="1"/>
-          </p:cNvSpPr>
-          <p:nvPr>
-            <p:ph type="sldImg"/>
-          </p:nvPr>
-        </p:nvSpPr>
-        <p:spPr/>
-      </p:sp>
-      <p:sp>
-        <p:nvSpPr>
-          <p:cNvPr id="3" name="Marcador de notas 2">
-            <a:extLst>
-              <a:ext uri="{FF2B5EF4-FFF2-40B4-BE49-F238E27FC236}">
-                <a16:creationId xmlns:a16="http://schemas.microsoft.com/office/drawing/2014/main" id="{C773C0A4-7BB0-6298-F2E9-A80EA26537AF}"/>
-              </a:ext>
-            </a:extLst>
-          </p:cNvPr>
-          <p:cNvSpPr>
-            <a:spLocks noGrp="1"/>
-          </p:cNvSpPr>
-          <p:nvPr>
-            <p:ph type="body" idx="1"/>
-          </p:nvPr>
-        </p:nvSpPr>
-        <p:spPr/>
-        <p:txBody>
-          <a:bodyPr/>
-          <a:lstStyle/>
-          <a:p>
-            <a:endParaRPr lang="es-ES" dirty="0"/>
-          </a:p>
-        </p:txBody>
-      </p:sp>
-      <p:sp>
-        <p:nvSpPr>
-          <p:cNvPr id="4" name="Marcador de número de diapositiva 3">
-            <a:extLst>
-              <a:ext uri="{FF2B5EF4-FFF2-40B4-BE49-F238E27FC236}">
-                <a16:creationId xmlns:a16="http://schemas.microsoft.com/office/drawing/2014/main" id="{23B64994-6E1A-B581-2E34-CA7C3C75CE7E}"/>
-              </a:ext>
-            </a:extLst>
-          </p:cNvPr>
-          <p:cNvSpPr>
-            <a:spLocks noGrp="1"/>
-          </p:cNvSpPr>
-          <p:nvPr>
-            <p:ph type="sldNum" sz="quarter" idx="5"/>
-          </p:nvPr>
-        </p:nvSpPr>
-        <p:spPr/>
-        <p:txBody>
-          <a:bodyPr/>
-          <a:lstStyle/>
-          <a:p>
-            <a:fld id="{676223B9-C868-4436-87D9-1A3152E1157A}" type="slidenum">
-              <a:rPr lang="es-ES" smtClean="0"/>
-              <a:t>19</a:t>
-            </a:fld>
-            <a:endParaRPr lang="es-ES"/>
-          </a:p>
-        </p:txBody>
-      </p:sp>
-    </p:spTree>
-    <p:extLst>
-      <p:ext uri="{BB962C8B-B14F-4D97-AF65-F5344CB8AC3E}">
-        <p14:creationId xmlns:p14="http://schemas.microsoft.com/office/powerpoint/2010/main" val="3300330349"/>
-      </p:ext>
-    </p:extLst>
-  </p:cSld>
-  <p:clrMapOvr>
-    <a:masterClrMapping/>
-  </p:clrMapOvr>
-</p:notes>
-</file>
-
-<file path=ppt/notesSlides/notesSlide11.xml><?xml version="1.0" encoding="utf-8"?>
-<p:notes xmlns:a="http://schemas.openxmlformats.org/drawingml/2006/main" xmlns:r="http://schemas.openxmlformats.org/officeDocument/2006/relationships" xmlns:p="http://schemas.openxmlformats.org/presentationml/2006/main">
-  <p:cSld>
-    <p:spTree>
-      <p:nvGrpSpPr>
-        <p:cNvPr id="1" name="">
-          <a:extLst>
-            <a:ext uri="{FF2B5EF4-FFF2-40B4-BE49-F238E27FC236}">
               <a16:creationId xmlns:a16="http://schemas.microsoft.com/office/drawing/2014/main" id="{C2D2E23A-4399-03CE-714F-6A674F8DBDAC}"/>
             </a:ext>
           </a:extLst>
@@ -971,7 +862,7 @@
           <a:p>
             <a:fld id="{676223B9-C868-4436-87D9-1A3152E1157A}" type="slidenum">
               <a:rPr lang="es-ES" smtClean="0"/>
-              <a:t>20</a:t>
+              <a:t>19</a:t>
             </a:fld>
             <a:endParaRPr lang="es-ES"/>
           </a:p>
@@ -991,114 +882,6 @@
 </file>
 
 <file path=ppt/notesSlides/notesSlide2.xml><?xml version="1.0" encoding="utf-8"?>
-<p:notes xmlns:a="http://schemas.openxmlformats.org/drawingml/2006/main" xmlns:r="http://schemas.openxmlformats.org/officeDocument/2006/relationships" xmlns:p="http://schemas.openxmlformats.org/presentationml/2006/main">
-  <p:cSld>
-    <p:spTree>
-      <p:nvGrpSpPr>
-        <p:cNvPr id="1" name="">
-          <a:extLst>
-            <a:ext uri="{FF2B5EF4-FFF2-40B4-BE49-F238E27FC236}">
-              <a16:creationId xmlns:a16="http://schemas.microsoft.com/office/drawing/2014/main" id="{36ADFB9C-03BF-189F-4B7D-96A8609DEB31}"/>
-            </a:ext>
-          </a:extLst>
-        </p:cNvPr>
-        <p:cNvGrpSpPr/>
-        <p:nvPr/>
-      </p:nvGrpSpPr>
-      <p:grpSpPr>
-        <a:xfrm>
-          <a:off x="0" y="0"/>
-          <a:ext cx="0" cy="0"/>
-          <a:chOff x="0" y="0"/>
-          <a:chExt cx="0" cy="0"/>
-        </a:xfrm>
-      </p:grpSpPr>
-      <p:sp>
-        <p:nvSpPr>
-          <p:cNvPr id="2" name="Marcador de imagen de diapositiva 1">
-            <a:extLst>
-              <a:ext uri="{FF2B5EF4-FFF2-40B4-BE49-F238E27FC236}">
-                <a16:creationId xmlns:a16="http://schemas.microsoft.com/office/drawing/2014/main" id="{99063C73-9002-7ABE-B66A-8BAF50655087}"/>
-              </a:ext>
-            </a:extLst>
-          </p:cNvPr>
-          <p:cNvSpPr>
-            <a:spLocks noGrp="1" noRot="1" noChangeAspect="1"/>
-          </p:cNvSpPr>
-          <p:nvPr>
-            <p:ph type="sldImg"/>
-          </p:nvPr>
-        </p:nvSpPr>
-        <p:spPr/>
-      </p:sp>
-      <p:sp>
-        <p:nvSpPr>
-          <p:cNvPr id="3" name="Marcador de notas 2">
-            <a:extLst>
-              <a:ext uri="{FF2B5EF4-FFF2-40B4-BE49-F238E27FC236}">
-                <a16:creationId xmlns:a16="http://schemas.microsoft.com/office/drawing/2014/main" id="{B0BCFE0A-E55D-2E46-AFF3-F808EB942341}"/>
-              </a:ext>
-            </a:extLst>
-          </p:cNvPr>
-          <p:cNvSpPr>
-            <a:spLocks noGrp="1"/>
-          </p:cNvSpPr>
-          <p:nvPr>
-            <p:ph type="body" idx="1"/>
-          </p:nvPr>
-        </p:nvSpPr>
-        <p:spPr/>
-        <p:txBody>
-          <a:bodyPr/>
-          <a:lstStyle/>
-          <a:p>
-            <a:endParaRPr lang="es-ES" dirty="0"/>
-          </a:p>
-        </p:txBody>
-      </p:sp>
-      <p:sp>
-        <p:nvSpPr>
-          <p:cNvPr id="4" name="Marcador de número de diapositiva 3">
-            <a:extLst>
-              <a:ext uri="{FF2B5EF4-FFF2-40B4-BE49-F238E27FC236}">
-                <a16:creationId xmlns:a16="http://schemas.microsoft.com/office/drawing/2014/main" id="{7764D7AD-5C62-B1B4-40D5-3DBB613EB923}"/>
-              </a:ext>
-            </a:extLst>
-          </p:cNvPr>
-          <p:cNvSpPr>
-            <a:spLocks noGrp="1"/>
-          </p:cNvSpPr>
-          <p:nvPr>
-            <p:ph type="sldNum" sz="quarter" idx="5"/>
-          </p:nvPr>
-        </p:nvSpPr>
-        <p:spPr/>
-        <p:txBody>
-          <a:bodyPr/>
-          <a:lstStyle/>
-          <a:p>
-            <a:fld id="{676223B9-C868-4436-87D9-1A3152E1157A}" type="slidenum">
-              <a:rPr lang="es-ES" smtClean="0"/>
-              <a:t>4</a:t>
-            </a:fld>
-            <a:endParaRPr lang="es-ES"/>
-          </a:p>
-        </p:txBody>
-      </p:sp>
-    </p:spTree>
-    <p:extLst>
-      <p:ext uri="{BB962C8B-B14F-4D97-AF65-F5344CB8AC3E}">
-        <p14:creationId xmlns:p14="http://schemas.microsoft.com/office/powerpoint/2010/main" val="546609528"/>
-      </p:ext>
-    </p:extLst>
-  </p:cSld>
-  <p:clrMapOvr>
-    <a:masterClrMapping/>
-  </p:clrMapOvr>
-</p:notes>
-</file>
-
-<file path=ppt/notesSlides/notesSlide3.xml><?xml version="1.0" encoding="utf-8"?>
 <p:notes xmlns:a="http://schemas.openxmlformats.org/drawingml/2006/main" xmlns:r="http://schemas.openxmlformats.org/officeDocument/2006/relationships" xmlns:p="http://schemas.openxmlformats.org/presentationml/2006/main">
   <p:cSld>
     <p:spTree>
@@ -1187,7 +970,7 @@
           <a:p>
             <a:fld id="{676223B9-C868-4436-87D9-1A3152E1157A}" type="slidenum">
               <a:rPr lang="es-ES" smtClean="0"/>
-              <a:t>12</a:t>
+              <a:t>11</a:t>
             </a:fld>
             <a:endParaRPr lang="es-ES"/>
           </a:p>
@@ -1206,7 +989,7 @@
 </p:notes>
 </file>
 
-<file path=ppt/notesSlides/notesSlide4.xml><?xml version="1.0" encoding="utf-8"?>
+<file path=ppt/notesSlides/notesSlide3.xml><?xml version="1.0" encoding="utf-8"?>
 <p:notes xmlns:a="http://schemas.openxmlformats.org/drawingml/2006/main" xmlns:r="http://schemas.openxmlformats.org/officeDocument/2006/relationships" xmlns:p="http://schemas.openxmlformats.org/presentationml/2006/main">
   <p:cSld>
     <p:spTree>
@@ -1295,7 +1078,7 @@
           <a:p>
             <a:fld id="{676223B9-C868-4436-87D9-1A3152E1157A}" type="slidenum">
               <a:rPr lang="es-ES" smtClean="0"/>
-              <a:t>13</a:t>
+              <a:t>12</a:t>
             </a:fld>
             <a:endParaRPr lang="es-ES"/>
           </a:p>
@@ -1314,7 +1097,7 @@
 </p:notes>
 </file>
 
-<file path=ppt/notesSlides/notesSlide5.xml><?xml version="1.0" encoding="utf-8"?>
+<file path=ppt/notesSlides/notesSlide4.xml><?xml version="1.0" encoding="utf-8"?>
 <p:notes xmlns:a="http://schemas.openxmlformats.org/drawingml/2006/main" xmlns:r="http://schemas.openxmlformats.org/officeDocument/2006/relationships" xmlns:p="http://schemas.openxmlformats.org/presentationml/2006/main">
   <p:cSld>
     <p:spTree>
@@ -1403,7 +1186,7 @@
           <a:p>
             <a:fld id="{676223B9-C868-4436-87D9-1A3152E1157A}" type="slidenum">
               <a:rPr lang="es-ES" smtClean="0"/>
-              <a:t>14</a:t>
+              <a:t>13</a:t>
             </a:fld>
             <a:endParaRPr lang="es-ES"/>
           </a:p>
@@ -1422,7 +1205,7 @@
 </p:notes>
 </file>
 
-<file path=ppt/notesSlides/notesSlide6.xml><?xml version="1.0" encoding="utf-8"?>
+<file path=ppt/notesSlides/notesSlide5.xml><?xml version="1.0" encoding="utf-8"?>
 <p:notes xmlns:a="http://schemas.openxmlformats.org/drawingml/2006/main" xmlns:r="http://schemas.openxmlformats.org/officeDocument/2006/relationships" xmlns:p="http://schemas.openxmlformats.org/presentationml/2006/main">
   <p:cSld>
     <p:spTree>
@@ -1511,7 +1294,7 @@
           <a:p>
             <a:fld id="{676223B9-C868-4436-87D9-1A3152E1157A}" type="slidenum">
               <a:rPr lang="es-ES" smtClean="0"/>
-              <a:t>15</a:t>
+              <a:t>14</a:t>
             </a:fld>
             <a:endParaRPr lang="es-ES"/>
           </a:p>
@@ -1530,7 +1313,7 @@
 </p:notes>
 </file>
 
-<file path=ppt/notesSlides/notesSlide7.xml><?xml version="1.0" encoding="utf-8"?>
+<file path=ppt/notesSlides/notesSlide6.xml><?xml version="1.0" encoding="utf-8"?>
 <p:notes xmlns:a="http://schemas.openxmlformats.org/drawingml/2006/main" xmlns:r="http://schemas.openxmlformats.org/officeDocument/2006/relationships" xmlns:p="http://schemas.openxmlformats.org/presentationml/2006/main">
   <p:cSld>
     <p:spTree>
@@ -1619,7 +1402,7 @@
           <a:p>
             <a:fld id="{676223B9-C868-4436-87D9-1A3152E1157A}" type="slidenum">
               <a:rPr lang="es-ES" smtClean="0"/>
-              <a:t>16</a:t>
+              <a:t>15</a:t>
             </a:fld>
             <a:endParaRPr lang="es-ES"/>
           </a:p>
@@ -1638,7 +1421,7 @@
 </p:notes>
 </file>
 
-<file path=ppt/notesSlides/notesSlide8.xml><?xml version="1.0" encoding="utf-8"?>
+<file path=ppt/notesSlides/notesSlide7.xml><?xml version="1.0" encoding="utf-8"?>
 <p:notes xmlns:a="http://schemas.openxmlformats.org/drawingml/2006/main" xmlns:r="http://schemas.openxmlformats.org/officeDocument/2006/relationships" xmlns:p="http://schemas.openxmlformats.org/presentationml/2006/main">
   <p:cSld>
     <p:spTree>
@@ -1727,7 +1510,7 @@
           <a:p>
             <a:fld id="{676223B9-C868-4436-87D9-1A3152E1157A}" type="slidenum">
               <a:rPr lang="es-ES" smtClean="0"/>
-              <a:t>17</a:t>
+              <a:t>16</a:t>
             </a:fld>
             <a:endParaRPr lang="es-ES"/>
           </a:p>
@@ -1746,7 +1529,7 @@
 </p:notes>
 </file>
 
-<file path=ppt/notesSlides/notesSlide9.xml><?xml version="1.0" encoding="utf-8"?>
+<file path=ppt/notesSlides/notesSlide8.xml><?xml version="1.0" encoding="utf-8"?>
 <p:notes xmlns:a="http://schemas.openxmlformats.org/drawingml/2006/main" xmlns:r="http://schemas.openxmlformats.org/officeDocument/2006/relationships" xmlns:p="http://schemas.openxmlformats.org/presentationml/2006/main">
   <p:cSld>
     <p:spTree>
@@ -1835,7 +1618,7 @@
           <a:p>
             <a:fld id="{676223B9-C868-4436-87D9-1A3152E1157A}" type="slidenum">
               <a:rPr lang="es-ES" smtClean="0"/>
-              <a:t>18</a:t>
+              <a:t>17</a:t>
             </a:fld>
             <a:endParaRPr lang="es-ES"/>
           </a:p>
@@ -1845,6 +1628,114 @@
     <p:extLst>
       <p:ext uri="{BB962C8B-B14F-4D97-AF65-F5344CB8AC3E}">
         <p14:creationId xmlns:p14="http://schemas.microsoft.com/office/powerpoint/2010/main" val="2917382716"/>
+      </p:ext>
+    </p:extLst>
+  </p:cSld>
+  <p:clrMapOvr>
+    <a:masterClrMapping/>
+  </p:clrMapOvr>
+</p:notes>
+</file>
+
+<file path=ppt/notesSlides/notesSlide9.xml><?xml version="1.0" encoding="utf-8"?>
+<p:notes xmlns:a="http://schemas.openxmlformats.org/drawingml/2006/main" xmlns:r="http://schemas.openxmlformats.org/officeDocument/2006/relationships" xmlns:p="http://schemas.openxmlformats.org/presentationml/2006/main">
+  <p:cSld>
+    <p:spTree>
+      <p:nvGrpSpPr>
+        <p:cNvPr id="1" name="">
+          <a:extLst>
+            <a:ext uri="{FF2B5EF4-FFF2-40B4-BE49-F238E27FC236}">
+              <a16:creationId xmlns:a16="http://schemas.microsoft.com/office/drawing/2014/main" id="{FEC4E6C5-6855-F1A0-D8D0-56C3AF90C0DF}"/>
+            </a:ext>
+          </a:extLst>
+        </p:cNvPr>
+        <p:cNvGrpSpPr/>
+        <p:nvPr/>
+      </p:nvGrpSpPr>
+      <p:grpSpPr>
+        <a:xfrm>
+          <a:off x="0" y="0"/>
+          <a:ext cx="0" cy="0"/>
+          <a:chOff x="0" y="0"/>
+          <a:chExt cx="0" cy="0"/>
+        </a:xfrm>
+      </p:grpSpPr>
+      <p:sp>
+        <p:nvSpPr>
+          <p:cNvPr id="2" name="Marcador de imagen de diapositiva 1">
+            <a:extLst>
+              <a:ext uri="{FF2B5EF4-FFF2-40B4-BE49-F238E27FC236}">
+                <a16:creationId xmlns:a16="http://schemas.microsoft.com/office/drawing/2014/main" id="{39E5A019-088C-0A7F-9630-07781EE5EAC2}"/>
+              </a:ext>
+            </a:extLst>
+          </p:cNvPr>
+          <p:cNvSpPr>
+            <a:spLocks noGrp="1" noRot="1" noChangeAspect="1"/>
+          </p:cNvSpPr>
+          <p:nvPr>
+            <p:ph type="sldImg"/>
+          </p:nvPr>
+        </p:nvSpPr>
+        <p:spPr/>
+      </p:sp>
+      <p:sp>
+        <p:nvSpPr>
+          <p:cNvPr id="3" name="Marcador de notas 2">
+            <a:extLst>
+              <a:ext uri="{FF2B5EF4-FFF2-40B4-BE49-F238E27FC236}">
+                <a16:creationId xmlns:a16="http://schemas.microsoft.com/office/drawing/2014/main" id="{C773C0A4-7BB0-6298-F2E9-A80EA26537AF}"/>
+              </a:ext>
+            </a:extLst>
+          </p:cNvPr>
+          <p:cNvSpPr>
+            <a:spLocks noGrp="1"/>
+          </p:cNvSpPr>
+          <p:nvPr>
+            <p:ph type="body" idx="1"/>
+          </p:nvPr>
+        </p:nvSpPr>
+        <p:spPr/>
+        <p:txBody>
+          <a:bodyPr/>
+          <a:lstStyle/>
+          <a:p>
+            <a:endParaRPr lang="es-ES" dirty="0"/>
+          </a:p>
+        </p:txBody>
+      </p:sp>
+      <p:sp>
+        <p:nvSpPr>
+          <p:cNvPr id="4" name="Marcador de número de diapositiva 3">
+            <a:extLst>
+              <a:ext uri="{FF2B5EF4-FFF2-40B4-BE49-F238E27FC236}">
+                <a16:creationId xmlns:a16="http://schemas.microsoft.com/office/drawing/2014/main" id="{23B64994-6E1A-B581-2E34-CA7C3C75CE7E}"/>
+              </a:ext>
+            </a:extLst>
+          </p:cNvPr>
+          <p:cNvSpPr>
+            <a:spLocks noGrp="1"/>
+          </p:cNvSpPr>
+          <p:nvPr>
+            <p:ph type="sldNum" sz="quarter" idx="5"/>
+          </p:nvPr>
+        </p:nvSpPr>
+        <p:spPr/>
+        <p:txBody>
+          <a:bodyPr/>
+          <a:lstStyle/>
+          <a:p>
+            <a:fld id="{676223B9-C868-4436-87D9-1A3152E1157A}" type="slidenum">
+              <a:rPr lang="es-ES" smtClean="0"/>
+              <a:t>18</a:t>
+            </a:fld>
+            <a:endParaRPr lang="es-ES"/>
+          </a:p>
+        </p:txBody>
+      </p:sp>
+    </p:spTree>
+    <p:extLst>
+      <p:ext uri="{BB962C8B-B14F-4D97-AF65-F5344CB8AC3E}">
+        <p14:creationId xmlns:p14="http://schemas.microsoft.com/office/powerpoint/2010/main" val="3300330349"/>
       </p:ext>
     </p:extLst>
   </p:cSld>
@@ -3493,489 +3384,6 @@
         <p:cNvPr id="1" name="">
           <a:extLst>
             <a:ext uri="{FF2B5EF4-FFF2-40B4-BE49-F238E27FC236}">
-              <a16:creationId xmlns:a16="http://schemas.microsoft.com/office/drawing/2014/main" id="{A9FFCAF2-4CAF-3724-5E41-A350B5EDA2FD}"/>
-            </a:ext>
-          </a:extLst>
-        </p:cNvPr>
-        <p:cNvGrpSpPr/>
-        <p:nvPr/>
-      </p:nvGrpSpPr>
-      <p:grpSpPr>
-        <a:xfrm>
-          <a:off x="0" y="0"/>
-          <a:ext cx="0" cy="0"/>
-          <a:chOff x="0" y="0"/>
-          <a:chExt cx="0" cy="0"/>
-        </a:xfrm>
-      </p:grpSpPr>
-      <p:sp>
-        <p:nvSpPr>
-          <p:cNvPr id="2" name="Título 1">
-            <a:extLst>
-              <a:ext uri="{FF2B5EF4-FFF2-40B4-BE49-F238E27FC236}">
-                <a16:creationId xmlns:a16="http://schemas.microsoft.com/office/drawing/2014/main" id="{4337D877-2605-BB40-43D4-940E277FCE45}"/>
-              </a:ext>
-            </a:extLst>
-          </p:cNvPr>
-          <p:cNvSpPr>
-            <a:spLocks noGrp="1"/>
-          </p:cNvSpPr>
-          <p:nvPr>
-            <p:ph type="title"/>
-          </p:nvPr>
-        </p:nvSpPr>
-        <p:spPr/>
-        <p:txBody>
-          <a:bodyPr/>
-          <a:lstStyle/>
-          <a:p>
-            <a:r>
-              <a:rPr lang="es-ES" dirty="0" err="1"/>
-              <a:t>Unbalanced</a:t>
-            </a:r>
-            <a:r>
-              <a:rPr lang="es-ES" dirty="0"/>
-              <a:t> </a:t>
-            </a:r>
-            <a:r>
-              <a:rPr lang="es-ES" dirty="0" err="1"/>
-              <a:t>configuration</a:t>
-            </a:r>
-            <a:r>
-              <a:rPr lang="es-ES" dirty="0"/>
-              <a:t> –</a:t>
-            </a:r>
-            <a:r>
-              <a:rPr lang="es-ES" dirty="0" err="1"/>
-              <a:t>Phase</a:t>
-            </a:r>
-            <a:r>
-              <a:rPr lang="es-ES" dirty="0"/>
-              <a:t> </a:t>
-            </a:r>
-            <a:r>
-              <a:rPr lang="es-ES" dirty="0" err="1"/>
-              <a:t>Difference</a:t>
-            </a:r>
-            <a:r>
-              <a:rPr lang="es-ES" dirty="0"/>
-              <a:t> </a:t>
-            </a:r>
-          </a:p>
-        </p:txBody>
-      </p:sp>
-      <p:sp>
-        <p:nvSpPr>
-          <p:cNvPr id="4" name="Marcador de pie de página 3">
-            <a:extLst>
-              <a:ext uri="{FF2B5EF4-FFF2-40B4-BE49-F238E27FC236}">
-                <a16:creationId xmlns:a16="http://schemas.microsoft.com/office/drawing/2014/main" id="{E952A2EF-B619-D84B-C41B-713072E0CB84}"/>
-              </a:ext>
-            </a:extLst>
-          </p:cNvPr>
-          <p:cNvSpPr>
-            <a:spLocks noGrp="1"/>
-          </p:cNvSpPr>
-          <p:nvPr>
-            <p:ph type="ftr" sz="quarter" idx="5"/>
-          </p:nvPr>
-        </p:nvSpPr>
-        <p:spPr/>
-        <p:txBody>
-          <a:bodyPr/>
-          <a:lstStyle/>
-          <a:p>
-            <a:pPr marL="12700">
-              <a:spcBef>
-                <a:spcPts val="15"/>
-              </a:spcBef>
-            </a:pPr>
-            <a:r>
-              <a:rPr lang="es-ES" spc="-5"/>
-              <a:t>LAB 3. INTERFEROMETERS I</a:t>
-            </a:r>
-            <a:endParaRPr lang="es-ES" spc="-5" dirty="0"/>
-          </a:p>
-        </p:txBody>
-      </p:sp>
-      <p:sp>
-        <p:nvSpPr>
-          <p:cNvPr id="5" name="Marcador de número de diapositiva 4">
-            <a:extLst>
-              <a:ext uri="{FF2B5EF4-FFF2-40B4-BE49-F238E27FC236}">
-                <a16:creationId xmlns:a16="http://schemas.microsoft.com/office/drawing/2014/main" id="{DBA817EB-9F2F-0DD7-3B41-D3F255B2C785}"/>
-              </a:ext>
-            </a:extLst>
-          </p:cNvPr>
-          <p:cNvSpPr>
-            <a:spLocks noGrp="1"/>
-          </p:cNvSpPr>
-          <p:nvPr>
-            <p:ph type="sldNum" sz="quarter" idx="7"/>
-          </p:nvPr>
-        </p:nvSpPr>
-        <p:spPr/>
-        <p:txBody>
-          <a:bodyPr/>
-          <a:lstStyle/>
-          <a:p>
-            <a:fld id="{B6F15528-21DE-4FAA-801E-634DDDAF4B2B}" type="slidenum">
-              <a:rPr lang="es-ES" smtClean="0"/>
-              <a:t>10</a:t>
-            </a:fld>
-            <a:endParaRPr lang="es-ES"/>
-          </a:p>
-        </p:txBody>
-      </p:sp>
-      <p:sp>
-        <p:nvSpPr>
-          <p:cNvPr id="9" name="CuadroTexto 8">
-            <a:extLst>
-              <a:ext uri="{FF2B5EF4-FFF2-40B4-BE49-F238E27FC236}">
-                <a16:creationId xmlns:a16="http://schemas.microsoft.com/office/drawing/2014/main" id="{B1B56D5A-D857-F6BF-9581-DE217714D775}"/>
-              </a:ext>
-            </a:extLst>
-          </p:cNvPr>
-          <p:cNvSpPr txBox="1"/>
-          <p:nvPr/>
-        </p:nvSpPr>
-        <p:spPr>
-          <a:xfrm>
-            <a:off x="5426365" y="2133600"/>
-            <a:ext cx="6128326" cy="646331"/>
-          </a:xfrm>
-          <a:prstGeom prst="rect">
-            <a:avLst/>
-          </a:prstGeom>
-          <a:noFill/>
-        </p:spPr>
-        <p:txBody>
-          <a:bodyPr wrap="square">
-            <a:spAutoFit/>
-          </a:bodyPr>
-          <a:lstStyle/>
-          <a:p>
-            <a:endParaRPr lang="en-US" dirty="0"/>
-          </a:p>
-          <a:p>
-            <a:endParaRPr lang="es-ES" dirty="0"/>
-          </a:p>
-        </p:txBody>
-      </p:sp>
-      <p:pic>
-        <p:nvPicPr>
-          <p:cNvPr id="8" name="Imagen 7">
-            <a:extLst>
-              <a:ext uri="{FF2B5EF4-FFF2-40B4-BE49-F238E27FC236}">
-                <a16:creationId xmlns:a16="http://schemas.microsoft.com/office/drawing/2014/main" id="{8FEC3C99-BB92-EE36-CF0A-51CF71688A9E}"/>
-              </a:ext>
-            </a:extLst>
-          </p:cNvPr>
-          <p:cNvPicPr>
-            <a:picLocks noChangeAspect="1"/>
-          </p:cNvPicPr>
-          <p:nvPr/>
-        </p:nvPicPr>
-        <p:blipFill>
-          <a:blip r:embed="rId2">
-            <a:extLst>
-              <a:ext uri="{28A0092B-C50C-407E-A947-70E740481C1C}">
-                <a14:useLocalDpi xmlns:a14="http://schemas.microsoft.com/office/drawing/2010/main" val="0"/>
-              </a:ext>
-            </a:extLst>
-          </a:blip>
-          <a:srcRect/>
-          <a:stretch/>
-        </p:blipFill>
-        <p:spPr>
-          <a:xfrm>
-            <a:off x="305161" y="575600"/>
-            <a:ext cx="10044841" cy="872200"/>
-          </a:xfrm>
-          <a:prstGeom prst="rect">
-            <a:avLst/>
-          </a:prstGeom>
-        </p:spPr>
-      </p:pic>
-      <p:sp>
-        <p:nvSpPr>
-          <p:cNvPr id="10" name="CuadroTexto 9">
-            <a:extLst>
-              <a:ext uri="{FF2B5EF4-FFF2-40B4-BE49-F238E27FC236}">
-                <a16:creationId xmlns:a16="http://schemas.microsoft.com/office/drawing/2014/main" id="{2DB85571-0C8A-62B2-4D04-46C7FCF54DA6}"/>
-              </a:ext>
-            </a:extLst>
-          </p:cNvPr>
-          <p:cNvSpPr txBox="1"/>
-          <p:nvPr/>
-        </p:nvSpPr>
-        <p:spPr>
-          <a:xfrm>
-            <a:off x="609600" y="5061554"/>
-            <a:ext cx="10439400" cy="1200329"/>
-          </a:xfrm>
-          <a:prstGeom prst="rect">
-            <a:avLst/>
-          </a:prstGeom>
-          <a:noFill/>
-        </p:spPr>
-        <p:txBody>
-          <a:bodyPr wrap="square">
-            <a:spAutoFit/>
-          </a:bodyPr>
-          <a:lstStyle/>
-          <a:p>
-            <a:r>
-              <a:rPr lang="en-US" dirty="0"/>
-              <a:t>Al </a:t>
-            </a:r>
-            <a:r>
-              <a:rPr lang="en-US" dirty="0" err="1"/>
-              <a:t>varirar</a:t>
-            </a:r>
-            <a:r>
-              <a:rPr lang="en-US" dirty="0"/>
-              <a:t> </a:t>
-            </a:r>
-            <a:r>
-              <a:rPr lang="en-US" dirty="0" err="1"/>
-              <a:t>el</a:t>
-            </a:r>
-            <a:r>
-              <a:rPr lang="en-US" dirty="0"/>
-              <a:t> </a:t>
-            </a:r>
-            <a:r>
-              <a:rPr lang="en-US" dirty="0" err="1"/>
-              <a:t>índice</a:t>
-            </a:r>
-            <a:r>
-              <a:rPr lang="en-US" dirty="0"/>
-              <a:t> </a:t>
-            </a:r>
-            <a:r>
-              <a:rPr lang="en-US" dirty="0" err="1"/>
-              <a:t>efectivo</a:t>
-            </a:r>
-            <a:r>
-              <a:rPr lang="en-US" dirty="0"/>
-              <a:t> </a:t>
-            </a:r>
-            <a:r>
-              <a:rPr lang="en-US" dirty="0" err="1"/>
-              <a:t>en</a:t>
-            </a:r>
-            <a:r>
-              <a:rPr lang="en-US" dirty="0"/>
-              <a:t> mayor o </a:t>
-            </a:r>
-            <a:r>
-              <a:rPr lang="en-US" dirty="0" err="1"/>
-              <a:t>menor</a:t>
-            </a:r>
-            <a:r>
-              <a:rPr lang="en-US" dirty="0"/>
-              <a:t> </a:t>
-            </a:r>
-            <a:r>
-              <a:rPr lang="en-US" dirty="0" err="1"/>
-              <a:t>medida</a:t>
-            </a:r>
-            <a:r>
-              <a:rPr lang="en-US" dirty="0"/>
-              <a:t> de uno de </a:t>
-            </a:r>
-            <a:r>
-              <a:rPr lang="en-US" dirty="0" err="1"/>
-              <a:t>los</a:t>
-            </a:r>
-            <a:r>
-              <a:rPr lang="en-US" dirty="0"/>
-              <a:t> </a:t>
-            </a:r>
-            <a:r>
-              <a:rPr lang="en-US" dirty="0" err="1"/>
-              <a:t>brazos</a:t>
-            </a:r>
-            <a:r>
-              <a:rPr lang="en-US" dirty="0"/>
-              <a:t>, </a:t>
-            </a:r>
-            <a:r>
-              <a:rPr lang="en-US" dirty="0" err="1"/>
-              <a:t>podemos</a:t>
-            </a:r>
-            <a:r>
-              <a:rPr lang="en-US" dirty="0"/>
-              <a:t> </a:t>
-            </a:r>
-            <a:r>
-              <a:rPr lang="en-US" dirty="0" err="1"/>
-              <a:t>controlar</a:t>
-            </a:r>
-            <a:r>
-              <a:rPr lang="en-US" dirty="0"/>
-              <a:t> la </a:t>
-            </a:r>
-            <a:r>
-              <a:rPr lang="en-US" dirty="0" err="1"/>
-              <a:t>potencia</a:t>
-            </a:r>
-            <a:r>
-              <a:rPr lang="en-US" dirty="0"/>
-              <a:t> </a:t>
-            </a:r>
-            <a:r>
-              <a:rPr lang="en-US" dirty="0" err="1"/>
-              <a:t>que</a:t>
-            </a:r>
-            <a:r>
-              <a:rPr lang="en-US" dirty="0"/>
-              <a:t> sale de </a:t>
-            </a:r>
-            <a:r>
-              <a:rPr lang="en-US" dirty="0" err="1"/>
-              <a:t>los</a:t>
-            </a:r>
-            <a:r>
-              <a:rPr lang="en-US" dirty="0"/>
-              <a:t> </a:t>
-            </a:r>
-            <a:r>
-              <a:rPr lang="en-US" dirty="0" err="1"/>
-              <a:t>puertos</a:t>
-            </a:r>
-            <a:r>
-              <a:rPr lang="en-US" dirty="0"/>
-              <a:t> para </a:t>
-            </a:r>
-            <a:r>
-              <a:rPr lang="en-US" dirty="0" err="1"/>
-              <a:t>una</a:t>
-            </a:r>
-            <a:r>
-              <a:rPr lang="en-US" dirty="0"/>
-              <a:t> </a:t>
-            </a:r>
-            <a:r>
-              <a:rPr lang="en-US" dirty="0" err="1"/>
-              <a:t>determinada</a:t>
-            </a:r>
-            <a:r>
-              <a:rPr lang="en-US" dirty="0"/>
-              <a:t> </a:t>
-            </a:r>
-            <a:r>
-              <a:rPr lang="en-US" dirty="0" err="1"/>
-              <a:t>longitud</a:t>
-            </a:r>
-            <a:r>
-              <a:rPr lang="en-US" dirty="0"/>
-              <a:t> de </a:t>
-            </a:r>
-            <a:r>
-              <a:rPr lang="en-US" dirty="0" err="1"/>
-              <a:t>onda</a:t>
-            </a:r>
-            <a:r>
-              <a:rPr lang="en-US" dirty="0"/>
-              <a:t>.   </a:t>
-            </a:r>
-          </a:p>
-          <a:p>
-            <a:endParaRPr lang="en-US" dirty="0"/>
-          </a:p>
-          <a:p>
-            <a:endParaRPr lang="es-ES" dirty="0"/>
-          </a:p>
-        </p:txBody>
-      </p:sp>
-      <p:pic>
-        <p:nvPicPr>
-          <p:cNvPr id="3" name="Imagen 2">
-            <a:extLst>
-              <a:ext uri="{FF2B5EF4-FFF2-40B4-BE49-F238E27FC236}">
-                <a16:creationId xmlns:a16="http://schemas.microsoft.com/office/drawing/2014/main" id="{0763DAF3-932E-71E0-53E4-8B79009188C8}"/>
-              </a:ext>
-            </a:extLst>
-          </p:cNvPr>
-          <p:cNvPicPr>
-            <a:picLocks noChangeAspect="1"/>
-          </p:cNvPicPr>
-          <p:nvPr/>
-        </p:nvPicPr>
-        <p:blipFill>
-          <a:blip r:embed="rId3"/>
-          <a:stretch>
-            <a:fillRect/>
-          </a:stretch>
-        </p:blipFill>
-        <p:spPr>
-          <a:xfrm>
-            <a:off x="6471228" y="1574149"/>
-            <a:ext cx="4038600" cy="3190214"/>
-          </a:xfrm>
-          <a:prstGeom prst="rect">
-            <a:avLst/>
-          </a:prstGeom>
-        </p:spPr>
-      </p:pic>
-      <p:pic>
-        <p:nvPicPr>
-          <p:cNvPr id="11" name="Imagen 10">
-            <a:extLst>
-              <a:ext uri="{FF2B5EF4-FFF2-40B4-BE49-F238E27FC236}">
-                <a16:creationId xmlns:a16="http://schemas.microsoft.com/office/drawing/2014/main" id="{2F5C511F-3413-3D2F-3F95-259AFCFBCC2C}"/>
-              </a:ext>
-            </a:extLst>
-          </p:cNvPr>
-          <p:cNvPicPr>
-            <a:picLocks noChangeAspect="1"/>
-          </p:cNvPicPr>
-          <p:nvPr/>
-        </p:nvPicPr>
-        <p:blipFill>
-          <a:blip r:embed="rId4">
-            <a:extLst>
-              <a:ext uri="{28A0092B-C50C-407E-A947-70E740481C1C}">
-                <a14:useLocalDpi xmlns:a14="http://schemas.microsoft.com/office/drawing/2010/main" val="0"/>
-              </a:ext>
-            </a:extLst>
-          </a:blip>
-          <a:srcRect t="384" b="384"/>
-          <a:stretch/>
-        </p:blipFill>
-        <p:spPr>
-          <a:xfrm>
-            <a:off x="1066800" y="1508871"/>
-            <a:ext cx="4038599" cy="3239122"/>
-          </a:xfrm>
-          <a:prstGeom prst="rect">
-            <a:avLst/>
-          </a:prstGeom>
-        </p:spPr>
-      </p:pic>
-    </p:spTree>
-    <p:extLst>
-      <p:ext uri="{BB962C8B-B14F-4D97-AF65-F5344CB8AC3E}">
-        <p14:creationId xmlns:p14="http://schemas.microsoft.com/office/powerpoint/2010/main" val="1338821209"/>
-      </p:ext>
-    </p:extLst>
-  </p:cSld>
-  <p:clrMapOvr>
-    <a:masterClrMapping/>
-  </p:clrMapOvr>
-</p:sld>
-</file>
-
-<file path=ppt/slides/slide11.xml><?xml version="1.0" encoding="utf-8"?>
-<p:sld xmlns:a="http://schemas.openxmlformats.org/drawingml/2006/main" xmlns:r="http://schemas.openxmlformats.org/officeDocument/2006/relationships" xmlns:p="http://schemas.openxmlformats.org/presentationml/2006/main">
-  <p:cSld>
-    <p:spTree>
-      <p:nvGrpSpPr>
-        <p:cNvPr id="1" name="">
-          <a:extLst>
-            <a:ext uri="{FF2B5EF4-FFF2-40B4-BE49-F238E27FC236}">
               <a16:creationId xmlns:a16="http://schemas.microsoft.com/office/drawing/2014/main" id="{5E9815FD-F704-9D26-960A-7D9E91DB3D5C}"/>
             </a:ext>
           </a:extLst>
@@ -4096,7 +3504,7 @@
           <a:p>
             <a:fld id="{B6F15528-21DE-4FAA-801E-634DDDAF4B2B}" type="slidenum">
               <a:rPr lang="es-ES" smtClean="0"/>
-              <a:t>11</a:t>
+              <a:t>10</a:t>
             </a:fld>
             <a:endParaRPr lang="es-ES"/>
           </a:p>
@@ -4623,7 +4031,7 @@
 </p:sld>
 </file>
 
-<file path=ppt/slides/slide12.xml><?xml version="1.0" encoding="utf-8"?>
+<file path=ppt/slides/slide11.xml><?xml version="1.0" encoding="utf-8"?>
 <p:sld xmlns:a="http://schemas.openxmlformats.org/drawingml/2006/main" xmlns:r="http://schemas.openxmlformats.org/officeDocument/2006/relationships" xmlns:p="http://schemas.openxmlformats.org/presentationml/2006/main">
   <p:cSld>
     <p:spTree>
@@ -4838,7 +4246,7 @@
           <a:p>
             <a:fld id="{B6F15528-21DE-4FAA-801E-634DDDAF4B2B}" type="slidenum">
               <a:rPr lang="es-ES" smtClean="0"/>
-              <a:t>12</a:t>
+              <a:t>11</a:t>
             </a:fld>
             <a:endParaRPr lang="es-ES"/>
           </a:p>
@@ -5401,7 +4809,7 @@
 </p:sld>
 </file>
 
-<file path=ppt/slides/slide13.xml><?xml version="1.0" encoding="utf-8"?>
+<file path=ppt/slides/slide12.xml><?xml version="1.0" encoding="utf-8"?>
 <p:sld xmlns:a="http://schemas.openxmlformats.org/drawingml/2006/main" xmlns:r="http://schemas.openxmlformats.org/officeDocument/2006/relationships" xmlns:p="http://schemas.openxmlformats.org/presentationml/2006/main">
   <p:cSld>
     <p:spTree>
@@ -5616,7 +5024,7 @@
           <a:p>
             <a:fld id="{B6F15528-21DE-4FAA-801E-634DDDAF4B2B}" type="slidenum">
               <a:rPr lang="es-ES" smtClean="0"/>
-              <a:t>13</a:t>
+              <a:t>12</a:t>
             </a:fld>
             <a:endParaRPr lang="es-ES"/>
           </a:p>
@@ -7431,7 +6839,7 @@
 </p:sld>
 </file>
 
-<file path=ppt/slides/slide14.xml><?xml version="1.0" encoding="utf-8"?>
+<file path=ppt/slides/slide13.xml><?xml version="1.0" encoding="utf-8"?>
 <p:sld xmlns:a="http://schemas.openxmlformats.org/drawingml/2006/main" xmlns:r="http://schemas.openxmlformats.org/officeDocument/2006/relationships" xmlns:p="http://schemas.openxmlformats.org/presentationml/2006/main">
   <p:cSld>
     <p:spTree>
@@ -7646,7 +7054,7 @@
           <a:p>
             <a:fld id="{B6F15528-21DE-4FAA-801E-634DDDAF4B2B}" type="slidenum">
               <a:rPr lang="es-ES" smtClean="0"/>
-              <a:t>14</a:t>
+              <a:t>13</a:t>
             </a:fld>
             <a:endParaRPr lang="es-ES"/>
           </a:p>
@@ -8070,7 +7478,7 @@
 </p:sld>
 </file>
 
-<file path=ppt/slides/slide15.xml><?xml version="1.0" encoding="utf-8"?>
+<file path=ppt/slides/slide14.xml><?xml version="1.0" encoding="utf-8"?>
 <p:sld xmlns:a="http://schemas.openxmlformats.org/drawingml/2006/main" xmlns:r="http://schemas.openxmlformats.org/officeDocument/2006/relationships" xmlns:p="http://schemas.openxmlformats.org/presentationml/2006/main">
   <p:cSld>
     <p:spTree>
@@ -8285,7 +7693,7 @@
           <a:p>
             <a:fld id="{B6F15528-21DE-4FAA-801E-634DDDAF4B2B}" type="slidenum">
               <a:rPr lang="es-ES" smtClean="0"/>
-              <a:t>15</a:t>
+              <a:t>14</a:t>
             </a:fld>
             <a:endParaRPr lang="es-ES"/>
           </a:p>
@@ -8774,7 +8182,7 @@
 </p:sld>
 </file>
 
-<file path=ppt/slides/slide16.xml><?xml version="1.0" encoding="utf-8"?>
+<file path=ppt/slides/slide15.xml><?xml version="1.0" encoding="utf-8"?>
 <p:sld xmlns:a="http://schemas.openxmlformats.org/drawingml/2006/main" xmlns:r="http://schemas.openxmlformats.org/officeDocument/2006/relationships" xmlns:p="http://schemas.openxmlformats.org/presentationml/2006/main">
   <p:cSld>
     <p:spTree>
@@ -8916,7 +8324,7 @@
           <a:p>
             <a:fld id="{B6F15528-21DE-4FAA-801E-634DDDAF4B2B}" type="slidenum">
               <a:rPr lang="es-ES" smtClean="0"/>
-              <a:t>16</a:t>
+              <a:t>15</a:t>
             </a:fld>
             <a:endParaRPr lang="es-ES"/>
           </a:p>
@@ -9502,7 +8910,7 @@
 </p:sld>
 </file>
 
-<file path=ppt/slides/slide17.xml><?xml version="1.0" encoding="utf-8"?>
+<file path=ppt/slides/slide16.xml><?xml version="1.0" encoding="utf-8"?>
 <p:sld xmlns:a="http://schemas.openxmlformats.org/drawingml/2006/main" xmlns:r="http://schemas.openxmlformats.org/officeDocument/2006/relationships" xmlns:p="http://schemas.openxmlformats.org/presentationml/2006/main">
   <p:cSld>
     <p:spTree>
@@ -9644,7 +9052,7 @@
           <a:p>
             <a:fld id="{B6F15528-21DE-4FAA-801E-634DDDAF4B2B}" type="slidenum">
               <a:rPr lang="es-ES" smtClean="0"/>
-              <a:t>17</a:t>
+              <a:t>16</a:t>
             </a:fld>
             <a:endParaRPr lang="es-ES"/>
           </a:p>
@@ -10042,7 +9450,7 @@
 </p:sld>
 </file>
 
-<file path=ppt/slides/slide18.xml><?xml version="1.0" encoding="utf-8"?>
+<file path=ppt/slides/slide17.xml><?xml version="1.0" encoding="utf-8"?>
 <p:sld xmlns:a="http://schemas.openxmlformats.org/drawingml/2006/main" xmlns:r="http://schemas.openxmlformats.org/officeDocument/2006/relationships" xmlns:p="http://schemas.openxmlformats.org/presentationml/2006/main">
   <p:cSld>
     <p:spTree>
@@ -10174,7 +9582,7 @@
           <a:p>
             <a:fld id="{B6F15528-21DE-4FAA-801E-634DDDAF4B2B}" type="slidenum">
               <a:rPr lang="es-ES" smtClean="0"/>
-              <a:t>18</a:t>
+              <a:t>17</a:t>
             </a:fld>
             <a:endParaRPr lang="es-ES"/>
           </a:p>
@@ -10527,7 +9935,7 @@
 </p:sld>
 </file>
 
-<file path=ppt/slides/slide19.xml><?xml version="1.0" encoding="utf-8"?>
+<file path=ppt/slides/slide18.xml><?xml version="1.0" encoding="utf-8"?>
 <p:sld xmlns:a="http://schemas.openxmlformats.org/drawingml/2006/main" xmlns:r="http://schemas.openxmlformats.org/officeDocument/2006/relationships" xmlns:p="http://schemas.openxmlformats.org/presentationml/2006/main">
   <p:cSld>
     <p:spTree>
@@ -10659,7 +10067,7 @@
           <a:p>
             <a:fld id="{B6F15528-21DE-4FAA-801E-634DDDAF4B2B}" type="slidenum">
               <a:rPr lang="es-ES" smtClean="0"/>
-              <a:t>19</a:t>
+              <a:t>18</a:t>
             </a:fld>
             <a:endParaRPr lang="es-ES"/>
           </a:p>
@@ -10937,6 +10345,626 @@
     <p:extLst>
       <p:ext uri="{BB962C8B-B14F-4D97-AF65-F5344CB8AC3E}">
         <p14:creationId xmlns:p14="http://schemas.microsoft.com/office/powerpoint/2010/main" val="1359720573"/>
+      </p:ext>
+    </p:extLst>
+  </p:cSld>
+  <p:clrMapOvr>
+    <a:masterClrMapping/>
+  </p:clrMapOvr>
+</p:sld>
+</file>
+
+<file path=ppt/slides/slide19.xml><?xml version="1.0" encoding="utf-8"?>
+<p:sld xmlns:a="http://schemas.openxmlformats.org/drawingml/2006/main" xmlns:r="http://schemas.openxmlformats.org/officeDocument/2006/relationships" xmlns:p="http://schemas.openxmlformats.org/presentationml/2006/main">
+  <p:cSld>
+    <p:spTree>
+      <p:nvGrpSpPr>
+        <p:cNvPr id="1" name="">
+          <a:extLst>
+            <a:ext uri="{FF2B5EF4-FFF2-40B4-BE49-F238E27FC236}">
+              <a16:creationId xmlns:a16="http://schemas.microsoft.com/office/drawing/2014/main" id="{63986E8E-397B-1841-9BD3-C75A054EA27F}"/>
+            </a:ext>
+          </a:extLst>
+        </p:cNvPr>
+        <p:cNvGrpSpPr/>
+        <p:nvPr/>
+      </p:nvGrpSpPr>
+      <p:grpSpPr>
+        <a:xfrm>
+          <a:off x="0" y="0"/>
+          <a:ext cx="0" cy="0"/>
+          <a:chOff x="0" y="0"/>
+          <a:chExt cx="0" cy="0"/>
+        </a:xfrm>
+      </p:grpSpPr>
+      <p:sp>
+        <p:nvSpPr>
+          <p:cNvPr id="16" name="object 16">
+            <a:extLst>
+              <a:ext uri="{FF2B5EF4-FFF2-40B4-BE49-F238E27FC236}">
+                <a16:creationId xmlns:a16="http://schemas.microsoft.com/office/drawing/2014/main" id="{716E3C5C-841C-5D62-2A1D-32F5A91EA371}"/>
+              </a:ext>
+            </a:extLst>
+          </p:cNvPr>
+          <p:cNvSpPr txBox="1">
+            <a:spLocks noGrp="1"/>
+          </p:cNvSpPr>
+          <p:nvPr>
+            <p:ph type="title"/>
+          </p:nvPr>
+        </p:nvSpPr>
+        <p:spPr>
+          <a:xfrm>
+            <a:off x="685800" y="408883"/>
+            <a:ext cx="10994410" cy="397545"/>
+          </a:xfrm>
+          <a:prstGeom prst="rect">
+            <a:avLst/>
+          </a:prstGeom>
+        </p:spPr>
+        <p:txBody>
+          <a:bodyPr vert="horz" wrap="square" lIns="0" tIns="12700" rIns="0" bIns="0" rtlCol="0">
+            <a:spAutoFit/>
+          </a:bodyPr>
+          <a:lstStyle/>
+          <a:p>
+            <a:pPr marL="12700">
+              <a:lnSpc>
+                <a:spcPct val="100000"/>
+              </a:lnSpc>
+              <a:spcBef>
+                <a:spcPts val="100"/>
+              </a:spcBef>
+            </a:pPr>
+            <a:r>
+              <a:rPr lang="en-US" sz="2500" dirty="0"/>
+              <a:t>Extra assessments </a:t>
+            </a:r>
+            <a:endParaRPr lang="en-US" sz="2500" b="0" dirty="0">
+              <a:latin typeface="+mj-lt"/>
+              <a:cs typeface="Lucida Sans"/>
+            </a:endParaRPr>
+          </a:p>
+        </p:txBody>
+      </p:sp>
+      <p:pic>
+        <p:nvPicPr>
+          <p:cNvPr id="83" name="Gráfico 82">
+            <a:extLst>
+              <a:ext uri="{FF2B5EF4-FFF2-40B4-BE49-F238E27FC236}">
+                <a16:creationId xmlns:a16="http://schemas.microsoft.com/office/drawing/2014/main" id="{043AAB1D-F7FD-2F8E-6EC0-DDC970F20DF0}"/>
+              </a:ext>
+            </a:extLst>
+          </p:cNvPr>
+          <p:cNvPicPr>
+            <a:picLocks noChangeAspect="1"/>
+          </p:cNvPicPr>
+          <p:nvPr/>
+        </p:nvPicPr>
+        <p:blipFill>
+          <a:blip r:embed="rId3">
+            <a:extLst>
+              <a:ext uri="{96DAC541-7B7A-43D3-8B79-37D633B846F1}">
+                <asvg:svgBlip xmlns:asvg="http://schemas.microsoft.com/office/drawing/2016/SVG/main" r:embed="rId4"/>
+              </a:ext>
+            </a:extLst>
+          </a:blip>
+          <a:stretch>
+            <a:fillRect/>
+          </a:stretch>
+        </p:blipFill>
+        <p:spPr>
+          <a:xfrm>
+            <a:off x="5045006" y="6356057"/>
+            <a:ext cx="6409575" cy="363174"/>
+          </a:xfrm>
+          <a:prstGeom prst="rect">
+            <a:avLst/>
+          </a:prstGeom>
+        </p:spPr>
+      </p:pic>
+      <p:sp>
+        <p:nvSpPr>
+          <p:cNvPr id="84" name="Marcador de número de diapositiva 83">
+            <a:extLst>
+              <a:ext uri="{FF2B5EF4-FFF2-40B4-BE49-F238E27FC236}">
+                <a16:creationId xmlns:a16="http://schemas.microsoft.com/office/drawing/2014/main" id="{B4B7AD11-1FD3-6AC4-BF09-4D589E8382B3}"/>
+              </a:ext>
+            </a:extLst>
+          </p:cNvPr>
+          <p:cNvSpPr>
+            <a:spLocks noGrp="1"/>
+          </p:cNvSpPr>
+          <p:nvPr>
+            <p:ph type="sldNum" sz="quarter" idx="7"/>
+          </p:nvPr>
+        </p:nvSpPr>
+        <p:spPr/>
+        <p:txBody>
+          <a:bodyPr/>
+          <a:lstStyle/>
+          <a:p>
+            <a:fld id="{B6F15528-21DE-4FAA-801E-634DDDAF4B2B}" type="slidenum">
+              <a:rPr lang="es-ES" smtClean="0"/>
+              <a:t>19</a:t>
+            </a:fld>
+            <a:endParaRPr lang="es-ES"/>
+          </a:p>
+        </p:txBody>
+      </p:sp>
+      <p:sp>
+        <p:nvSpPr>
+          <p:cNvPr id="4" name="Marcador de texto 2">
+            <a:extLst>
+              <a:ext uri="{FF2B5EF4-FFF2-40B4-BE49-F238E27FC236}">
+                <a16:creationId xmlns:a16="http://schemas.microsoft.com/office/drawing/2014/main" id="{44469A6A-D3DB-60FE-3A74-3CF213032E6A}"/>
+              </a:ext>
+            </a:extLst>
+          </p:cNvPr>
+          <p:cNvSpPr txBox="1">
+            <a:spLocks/>
+          </p:cNvSpPr>
+          <p:nvPr/>
+        </p:nvSpPr>
+        <p:spPr>
+          <a:xfrm>
+            <a:off x="608012" y="1295400"/>
+            <a:ext cx="11048999" cy="4958137"/>
+          </a:xfrm>
+          <a:prstGeom prst="rect">
+            <a:avLst/>
+          </a:prstGeom>
+        </p:spPr>
+        <p:txBody>
+          <a:bodyPr>
+            <a:normAutofit/>
+          </a:bodyPr>
+          <a:lstStyle>
+            <a:lvl1pPr marL="0">
+              <a:defRPr>
+                <a:latin typeface="+mn-lt"/>
+                <a:ea typeface="+mn-ea"/>
+                <a:cs typeface="+mn-cs"/>
+              </a:defRPr>
+            </a:lvl1pPr>
+            <a:lvl2pPr marL="457200">
+              <a:defRPr>
+                <a:latin typeface="+mn-lt"/>
+                <a:ea typeface="+mn-ea"/>
+                <a:cs typeface="+mn-cs"/>
+              </a:defRPr>
+            </a:lvl2pPr>
+            <a:lvl3pPr marL="914400">
+              <a:defRPr>
+                <a:latin typeface="+mn-lt"/>
+                <a:ea typeface="+mn-ea"/>
+                <a:cs typeface="+mn-cs"/>
+              </a:defRPr>
+            </a:lvl3pPr>
+            <a:lvl4pPr marL="1371600">
+              <a:defRPr>
+                <a:latin typeface="+mn-lt"/>
+                <a:ea typeface="+mn-ea"/>
+                <a:cs typeface="+mn-cs"/>
+              </a:defRPr>
+            </a:lvl4pPr>
+            <a:lvl5pPr marL="1828800">
+              <a:defRPr>
+                <a:latin typeface="+mn-lt"/>
+                <a:ea typeface="+mn-ea"/>
+                <a:cs typeface="+mn-cs"/>
+              </a:defRPr>
+            </a:lvl5pPr>
+            <a:lvl6pPr marL="2286000">
+              <a:defRPr>
+                <a:latin typeface="+mn-lt"/>
+                <a:ea typeface="+mn-ea"/>
+                <a:cs typeface="+mn-cs"/>
+              </a:defRPr>
+            </a:lvl6pPr>
+            <a:lvl7pPr marL="2743200">
+              <a:defRPr>
+                <a:latin typeface="+mn-lt"/>
+                <a:ea typeface="+mn-ea"/>
+                <a:cs typeface="+mn-cs"/>
+              </a:defRPr>
+            </a:lvl7pPr>
+            <a:lvl8pPr marL="3200400">
+              <a:defRPr>
+                <a:latin typeface="+mn-lt"/>
+                <a:ea typeface="+mn-ea"/>
+                <a:cs typeface="+mn-cs"/>
+              </a:defRPr>
+            </a:lvl8pPr>
+            <a:lvl9pPr marL="3657600">
+              <a:defRPr>
+                <a:latin typeface="+mn-lt"/>
+                <a:ea typeface="+mn-ea"/>
+                <a:cs typeface="+mn-cs"/>
+              </a:defRPr>
+            </a:lvl9pPr>
+          </a:lstStyle>
+          <a:p>
+            <a:r>
+              <a:rPr lang="en-US" b="1" dirty="0"/>
+              <a:t>Assessment 5. </a:t>
+            </a:r>
+            <a:r>
+              <a:rPr lang="en-US" dirty="0"/>
+              <a:t>Let's see how the response of the MZI varies with the effective index. Vary the effective index of one of the arms and analyze how the spectrum shifts. To do this, you can use the data provided in the .txt files entitled ‘</a:t>
+            </a:r>
+            <a:r>
+              <a:rPr lang="en-US" dirty="0" err="1"/>
+              <a:t>SiN</a:t>
+            </a:r>
+            <a:r>
+              <a:rPr lang="en-US" dirty="0"/>
+              <a:t>’. Can you give an example of an application where this configuration is used?</a:t>
+            </a:r>
+          </a:p>
+          <a:p>
+            <a:pPr marL="0" indent="0">
+              <a:buNone/>
+            </a:pPr>
+            <a:endParaRPr lang="en-US" dirty="0"/>
+          </a:p>
+          <a:p>
+            <a:pPr algn="just"/>
+            <a:endParaRPr lang="en-US" sz="2000" kern="0" dirty="0">
+              <a:solidFill>
+                <a:sysClr val="windowText" lastClr="000000"/>
+              </a:solidFill>
+            </a:endParaRPr>
+          </a:p>
+        </p:txBody>
+      </p:sp>
+      <p:sp>
+        <p:nvSpPr>
+          <p:cNvPr id="6" name="Marcador de pie de página 2">
+            <a:extLst>
+              <a:ext uri="{FF2B5EF4-FFF2-40B4-BE49-F238E27FC236}">
+                <a16:creationId xmlns:a16="http://schemas.microsoft.com/office/drawing/2014/main" id="{1B0E7D77-C21A-0F71-C8AE-878763F261D0}"/>
+              </a:ext>
+            </a:extLst>
+          </p:cNvPr>
+          <p:cNvSpPr>
+            <a:spLocks noGrp="1"/>
+          </p:cNvSpPr>
+          <p:nvPr>
+            <p:ph type="ftr" sz="quarter" idx="5"/>
+          </p:nvPr>
+        </p:nvSpPr>
+        <p:spPr>
+          <a:xfrm>
+            <a:off x="609600" y="6457057"/>
+            <a:ext cx="2743200" cy="184666"/>
+          </a:xfrm>
+        </p:spPr>
+        <p:txBody>
+          <a:bodyPr/>
+          <a:lstStyle/>
+          <a:p>
+            <a:pPr marL="12700">
+              <a:spcBef>
+                <a:spcPts val="15"/>
+              </a:spcBef>
+            </a:pPr>
+            <a:r>
+              <a:rPr lang="es-ES" spc="-5"/>
+              <a:t>LAB 3. INTERFEROMETERS I</a:t>
+            </a:r>
+            <a:endParaRPr lang="es-ES" spc="-5" dirty="0"/>
+          </a:p>
+        </p:txBody>
+      </p:sp>
+      <p:pic>
+        <p:nvPicPr>
+          <p:cNvPr id="5" name="Imagen 4" descr="Gráfico, Gráfico de líneas&#10;&#10;El contenido generado por IA puede ser incorrecto.">
+            <a:extLst>
+              <a:ext uri="{FF2B5EF4-FFF2-40B4-BE49-F238E27FC236}">
+                <a16:creationId xmlns:a16="http://schemas.microsoft.com/office/drawing/2014/main" id="{8F3F4BED-B61B-1C9A-F3CC-1970B22EBED1}"/>
+              </a:ext>
+            </a:extLst>
+          </p:cNvPr>
+          <p:cNvPicPr>
+            <a:picLocks noChangeAspect="1"/>
+          </p:cNvPicPr>
+          <p:nvPr/>
+        </p:nvPicPr>
+        <p:blipFill>
+          <a:blip r:embed="rId5"/>
+          <a:stretch>
+            <a:fillRect/>
+          </a:stretch>
+        </p:blipFill>
+        <p:spPr>
+          <a:xfrm>
+            <a:off x="5867399" y="2313629"/>
+            <a:ext cx="3706183" cy="2970167"/>
+          </a:xfrm>
+          <a:prstGeom prst="rect">
+            <a:avLst/>
+          </a:prstGeom>
+        </p:spPr>
+      </p:pic>
+      <p:pic>
+        <p:nvPicPr>
+          <p:cNvPr id="8" name="Imagen 7" descr="Gráfico, Gráfico de líneas&#10;&#10;El contenido generado por IA puede ser incorrecto.">
+            <a:extLst>
+              <a:ext uri="{FF2B5EF4-FFF2-40B4-BE49-F238E27FC236}">
+                <a16:creationId xmlns:a16="http://schemas.microsoft.com/office/drawing/2014/main" id="{91345F26-98A5-C035-E772-CEA063AE2862}"/>
+              </a:ext>
+            </a:extLst>
+          </p:cNvPr>
+          <p:cNvPicPr>
+            <a:picLocks noChangeAspect="1"/>
+          </p:cNvPicPr>
+          <p:nvPr/>
+        </p:nvPicPr>
+        <p:blipFill>
+          <a:blip r:embed="rId6"/>
+          <a:stretch>
+            <a:fillRect/>
+          </a:stretch>
+        </p:blipFill>
+        <p:spPr>
+          <a:xfrm>
+            <a:off x="1841248" y="2265138"/>
+            <a:ext cx="3753498" cy="3018658"/>
+          </a:xfrm>
+          <a:prstGeom prst="rect">
+            <a:avLst/>
+          </a:prstGeom>
+        </p:spPr>
+      </p:pic>
+      <p:sp>
+        <p:nvSpPr>
+          <p:cNvPr id="10" name="CuadroTexto 9">
+            <a:extLst>
+              <a:ext uri="{FF2B5EF4-FFF2-40B4-BE49-F238E27FC236}">
+                <a16:creationId xmlns:a16="http://schemas.microsoft.com/office/drawing/2014/main" id="{7D74DF8F-76E3-0798-6389-07D257E70727}"/>
+              </a:ext>
+            </a:extLst>
+          </p:cNvPr>
+          <p:cNvSpPr txBox="1"/>
+          <p:nvPr/>
+        </p:nvSpPr>
+        <p:spPr>
+          <a:xfrm>
+            <a:off x="381000" y="5487316"/>
+            <a:ext cx="10896600" cy="923330"/>
+          </a:xfrm>
+          <a:prstGeom prst="rect">
+            <a:avLst/>
+          </a:prstGeom>
+          <a:noFill/>
+        </p:spPr>
+        <p:txBody>
+          <a:bodyPr wrap="square">
+            <a:spAutoFit/>
+          </a:bodyPr>
+          <a:lstStyle/>
+          <a:p>
+            <a:r>
+              <a:rPr lang="en-US" dirty="0"/>
+              <a:t>Se produce un </a:t>
+            </a:r>
+            <a:r>
+              <a:rPr lang="en-US" dirty="0" err="1"/>
+              <a:t>desplazamiento</a:t>
+            </a:r>
+            <a:r>
+              <a:rPr lang="en-US" dirty="0"/>
+              <a:t> del </a:t>
+            </a:r>
+            <a:r>
+              <a:rPr lang="en-US" dirty="0" err="1"/>
+              <a:t>espectro</a:t>
+            </a:r>
+            <a:r>
+              <a:rPr lang="en-US" dirty="0"/>
+              <a:t>. Como se ha </a:t>
+            </a:r>
+            <a:r>
+              <a:rPr lang="en-US" dirty="0" err="1"/>
+              <a:t>comentado</a:t>
+            </a:r>
+            <a:r>
+              <a:rPr lang="en-US" dirty="0"/>
+              <a:t> </a:t>
+            </a:r>
+            <a:r>
+              <a:rPr lang="en-US" dirty="0" err="1"/>
+              <a:t>en</a:t>
+            </a:r>
+            <a:r>
+              <a:rPr lang="en-US" dirty="0"/>
+              <a:t> </a:t>
+            </a:r>
+            <a:r>
+              <a:rPr lang="en-US" dirty="0" err="1"/>
+              <a:t>clase</a:t>
+            </a:r>
+            <a:r>
+              <a:rPr lang="en-US" dirty="0"/>
+              <a:t> </a:t>
+            </a:r>
+            <a:r>
+              <a:rPr lang="en-US" dirty="0" err="1"/>
+              <a:t>en</a:t>
+            </a:r>
+            <a:r>
+              <a:rPr lang="en-US" dirty="0"/>
+              <a:t> </a:t>
+            </a:r>
+            <a:r>
+              <a:rPr lang="en-US" dirty="0" err="1"/>
+              <a:t>diferentes</a:t>
+            </a:r>
+            <a:r>
+              <a:rPr lang="en-US" dirty="0"/>
+              <a:t> </a:t>
+            </a:r>
+            <a:r>
+              <a:rPr lang="en-US" dirty="0" err="1"/>
+              <a:t>ocasiones</a:t>
+            </a:r>
+            <a:r>
+              <a:rPr lang="en-US" dirty="0"/>
+              <a:t> se </a:t>
+            </a:r>
+            <a:r>
+              <a:rPr lang="en-US" dirty="0" err="1"/>
+              <a:t>puede</a:t>
+            </a:r>
+            <a:r>
+              <a:rPr lang="en-US" dirty="0"/>
+              <a:t> </a:t>
+            </a:r>
+            <a:r>
+              <a:rPr lang="en-US" dirty="0" err="1"/>
+              <a:t>utilizar</a:t>
+            </a:r>
+            <a:r>
+              <a:rPr lang="en-US" dirty="0"/>
+              <a:t> </a:t>
+            </a:r>
+            <a:r>
+              <a:rPr lang="en-US" dirty="0" err="1"/>
+              <a:t>como</a:t>
+            </a:r>
+            <a:r>
+              <a:rPr lang="en-US" dirty="0"/>
+              <a:t> detector de </a:t>
+            </a:r>
+            <a:r>
+              <a:rPr lang="en-US" dirty="0" err="1"/>
+              <a:t>substancias</a:t>
+            </a:r>
+            <a:r>
+              <a:rPr lang="en-US" dirty="0"/>
+              <a:t>, </a:t>
+            </a:r>
+            <a:r>
+              <a:rPr lang="en-US" dirty="0" err="1"/>
+              <a:t>ya</a:t>
+            </a:r>
+            <a:r>
+              <a:rPr lang="en-US" dirty="0"/>
+              <a:t> </a:t>
+            </a:r>
+            <a:r>
+              <a:rPr lang="en-US" dirty="0" err="1"/>
+              <a:t>que</a:t>
+            </a:r>
+            <a:r>
+              <a:rPr lang="en-US" dirty="0"/>
+              <a:t> la </a:t>
+            </a:r>
+            <a:r>
+              <a:rPr lang="en-US" dirty="0" err="1"/>
+              <a:t>presencia</a:t>
+            </a:r>
+            <a:r>
+              <a:rPr lang="en-US" dirty="0"/>
+              <a:t> de </a:t>
+            </a:r>
+            <a:r>
+              <a:rPr lang="en-US" dirty="0" err="1"/>
+              <a:t>cierta</a:t>
+            </a:r>
+            <a:r>
+              <a:rPr lang="en-US" dirty="0"/>
+              <a:t> </a:t>
+            </a:r>
+            <a:r>
+              <a:rPr lang="en-US" dirty="0" err="1"/>
+              <a:t>substancia</a:t>
+            </a:r>
+            <a:r>
+              <a:rPr lang="en-US" dirty="0"/>
+              <a:t> altera </a:t>
+            </a:r>
+            <a:r>
+              <a:rPr lang="en-US" dirty="0" err="1"/>
+              <a:t>el</a:t>
+            </a:r>
+            <a:r>
+              <a:rPr lang="en-US" dirty="0"/>
+              <a:t> </a:t>
+            </a:r>
+            <a:r>
+              <a:rPr lang="en-US" dirty="0" err="1"/>
+              <a:t>neff</a:t>
+            </a:r>
+            <a:r>
+              <a:rPr lang="en-US" dirty="0"/>
+              <a:t>, y </a:t>
+            </a:r>
+            <a:r>
+              <a:rPr lang="en-US" dirty="0" err="1"/>
+              <a:t>por</a:t>
+            </a:r>
+            <a:r>
+              <a:rPr lang="en-US" dirty="0"/>
+              <a:t> </a:t>
+            </a:r>
+            <a:r>
+              <a:rPr lang="en-US" dirty="0" err="1"/>
+              <a:t>ende</a:t>
+            </a:r>
+            <a:r>
+              <a:rPr lang="en-US" dirty="0"/>
+              <a:t> la </a:t>
+            </a:r>
+            <a:r>
+              <a:rPr lang="en-US" dirty="0" err="1"/>
+              <a:t>respuesta</a:t>
+            </a:r>
+            <a:r>
+              <a:rPr lang="en-US" dirty="0"/>
+              <a:t>, </a:t>
+            </a:r>
+            <a:r>
+              <a:rPr lang="en-US" dirty="0" err="1"/>
+              <a:t>pudiendo</a:t>
+            </a:r>
+            <a:r>
+              <a:rPr lang="en-US" dirty="0"/>
+              <a:t> </a:t>
+            </a:r>
+            <a:r>
+              <a:rPr lang="en-US" dirty="0" err="1"/>
+              <a:t>así</a:t>
+            </a:r>
+            <a:r>
+              <a:rPr lang="en-US" dirty="0"/>
+              <a:t> </a:t>
+            </a:r>
+            <a:r>
+              <a:rPr lang="en-US" dirty="0" err="1"/>
+              <a:t>obtener</a:t>
+            </a:r>
+            <a:r>
+              <a:rPr lang="en-US" dirty="0"/>
+              <a:t> </a:t>
+            </a:r>
+            <a:r>
+              <a:rPr lang="en-US" dirty="0" err="1"/>
+              <a:t>información</a:t>
+            </a:r>
+            <a:r>
+              <a:rPr lang="en-US" dirty="0"/>
+              <a:t>. </a:t>
+            </a:r>
+            <a:endParaRPr lang="es-ES" dirty="0"/>
+          </a:p>
+        </p:txBody>
+      </p:sp>
+    </p:spTree>
+    <p:extLst>
+      <p:ext uri="{BB962C8B-B14F-4D97-AF65-F5344CB8AC3E}">
+        <p14:creationId xmlns:p14="http://schemas.microsoft.com/office/powerpoint/2010/main" val="3577319862"/>
       </p:ext>
     </p:extLst>
   </p:cSld>
@@ -12546,626 +12574,6 @@
   <p:cSld>
     <p:spTree>
       <p:nvGrpSpPr>
-        <p:cNvPr id="1" name="">
-          <a:extLst>
-            <a:ext uri="{FF2B5EF4-FFF2-40B4-BE49-F238E27FC236}">
-              <a16:creationId xmlns:a16="http://schemas.microsoft.com/office/drawing/2014/main" id="{63986E8E-397B-1841-9BD3-C75A054EA27F}"/>
-            </a:ext>
-          </a:extLst>
-        </p:cNvPr>
-        <p:cNvGrpSpPr/>
-        <p:nvPr/>
-      </p:nvGrpSpPr>
-      <p:grpSpPr>
-        <a:xfrm>
-          <a:off x="0" y="0"/>
-          <a:ext cx="0" cy="0"/>
-          <a:chOff x="0" y="0"/>
-          <a:chExt cx="0" cy="0"/>
-        </a:xfrm>
-      </p:grpSpPr>
-      <p:sp>
-        <p:nvSpPr>
-          <p:cNvPr id="16" name="object 16">
-            <a:extLst>
-              <a:ext uri="{FF2B5EF4-FFF2-40B4-BE49-F238E27FC236}">
-                <a16:creationId xmlns:a16="http://schemas.microsoft.com/office/drawing/2014/main" id="{716E3C5C-841C-5D62-2A1D-32F5A91EA371}"/>
-              </a:ext>
-            </a:extLst>
-          </p:cNvPr>
-          <p:cNvSpPr txBox="1">
-            <a:spLocks noGrp="1"/>
-          </p:cNvSpPr>
-          <p:nvPr>
-            <p:ph type="title"/>
-          </p:nvPr>
-        </p:nvSpPr>
-        <p:spPr>
-          <a:xfrm>
-            <a:off x="685800" y="408883"/>
-            <a:ext cx="10994410" cy="397545"/>
-          </a:xfrm>
-          <a:prstGeom prst="rect">
-            <a:avLst/>
-          </a:prstGeom>
-        </p:spPr>
-        <p:txBody>
-          <a:bodyPr vert="horz" wrap="square" lIns="0" tIns="12700" rIns="0" bIns="0" rtlCol="0">
-            <a:spAutoFit/>
-          </a:bodyPr>
-          <a:lstStyle/>
-          <a:p>
-            <a:pPr marL="12700">
-              <a:lnSpc>
-                <a:spcPct val="100000"/>
-              </a:lnSpc>
-              <a:spcBef>
-                <a:spcPts val="100"/>
-              </a:spcBef>
-            </a:pPr>
-            <a:r>
-              <a:rPr lang="en-US" sz="2500" dirty="0"/>
-              <a:t>Extra assessments </a:t>
-            </a:r>
-            <a:endParaRPr lang="en-US" sz="2500" b="0" dirty="0">
-              <a:latin typeface="+mj-lt"/>
-              <a:cs typeface="Lucida Sans"/>
-            </a:endParaRPr>
-          </a:p>
-        </p:txBody>
-      </p:sp>
-      <p:pic>
-        <p:nvPicPr>
-          <p:cNvPr id="83" name="Gráfico 82">
-            <a:extLst>
-              <a:ext uri="{FF2B5EF4-FFF2-40B4-BE49-F238E27FC236}">
-                <a16:creationId xmlns:a16="http://schemas.microsoft.com/office/drawing/2014/main" id="{043AAB1D-F7FD-2F8E-6EC0-DDC970F20DF0}"/>
-              </a:ext>
-            </a:extLst>
-          </p:cNvPr>
-          <p:cNvPicPr>
-            <a:picLocks noChangeAspect="1"/>
-          </p:cNvPicPr>
-          <p:nvPr/>
-        </p:nvPicPr>
-        <p:blipFill>
-          <a:blip r:embed="rId3">
-            <a:extLst>
-              <a:ext uri="{96DAC541-7B7A-43D3-8B79-37D633B846F1}">
-                <asvg:svgBlip xmlns:asvg="http://schemas.microsoft.com/office/drawing/2016/SVG/main" r:embed="rId4"/>
-              </a:ext>
-            </a:extLst>
-          </a:blip>
-          <a:stretch>
-            <a:fillRect/>
-          </a:stretch>
-        </p:blipFill>
-        <p:spPr>
-          <a:xfrm>
-            <a:off x="5045006" y="6356057"/>
-            <a:ext cx="6409575" cy="363174"/>
-          </a:xfrm>
-          <a:prstGeom prst="rect">
-            <a:avLst/>
-          </a:prstGeom>
-        </p:spPr>
-      </p:pic>
-      <p:sp>
-        <p:nvSpPr>
-          <p:cNvPr id="84" name="Marcador de número de diapositiva 83">
-            <a:extLst>
-              <a:ext uri="{FF2B5EF4-FFF2-40B4-BE49-F238E27FC236}">
-                <a16:creationId xmlns:a16="http://schemas.microsoft.com/office/drawing/2014/main" id="{B4B7AD11-1FD3-6AC4-BF09-4D589E8382B3}"/>
-              </a:ext>
-            </a:extLst>
-          </p:cNvPr>
-          <p:cNvSpPr>
-            <a:spLocks noGrp="1"/>
-          </p:cNvSpPr>
-          <p:nvPr>
-            <p:ph type="sldNum" sz="quarter" idx="7"/>
-          </p:nvPr>
-        </p:nvSpPr>
-        <p:spPr/>
-        <p:txBody>
-          <a:bodyPr/>
-          <a:lstStyle/>
-          <a:p>
-            <a:fld id="{B6F15528-21DE-4FAA-801E-634DDDAF4B2B}" type="slidenum">
-              <a:rPr lang="es-ES" smtClean="0"/>
-              <a:t>20</a:t>
-            </a:fld>
-            <a:endParaRPr lang="es-ES"/>
-          </a:p>
-        </p:txBody>
-      </p:sp>
-      <p:sp>
-        <p:nvSpPr>
-          <p:cNvPr id="4" name="Marcador de texto 2">
-            <a:extLst>
-              <a:ext uri="{FF2B5EF4-FFF2-40B4-BE49-F238E27FC236}">
-                <a16:creationId xmlns:a16="http://schemas.microsoft.com/office/drawing/2014/main" id="{44469A6A-D3DB-60FE-3A74-3CF213032E6A}"/>
-              </a:ext>
-            </a:extLst>
-          </p:cNvPr>
-          <p:cNvSpPr txBox="1">
-            <a:spLocks/>
-          </p:cNvSpPr>
-          <p:nvPr/>
-        </p:nvSpPr>
-        <p:spPr>
-          <a:xfrm>
-            <a:off x="608012" y="1295400"/>
-            <a:ext cx="11048999" cy="4958137"/>
-          </a:xfrm>
-          <a:prstGeom prst="rect">
-            <a:avLst/>
-          </a:prstGeom>
-        </p:spPr>
-        <p:txBody>
-          <a:bodyPr>
-            <a:normAutofit/>
-          </a:bodyPr>
-          <a:lstStyle>
-            <a:lvl1pPr marL="0">
-              <a:defRPr>
-                <a:latin typeface="+mn-lt"/>
-                <a:ea typeface="+mn-ea"/>
-                <a:cs typeface="+mn-cs"/>
-              </a:defRPr>
-            </a:lvl1pPr>
-            <a:lvl2pPr marL="457200">
-              <a:defRPr>
-                <a:latin typeface="+mn-lt"/>
-                <a:ea typeface="+mn-ea"/>
-                <a:cs typeface="+mn-cs"/>
-              </a:defRPr>
-            </a:lvl2pPr>
-            <a:lvl3pPr marL="914400">
-              <a:defRPr>
-                <a:latin typeface="+mn-lt"/>
-                <a:ea typeface="+mn-ea"/>
-                <a:cs typeface="+mn-cs"/>
-              </a:defRPr>
-            </a:lvl3pPr>
-            <a:lvl4pPr marL="1371600">
-              <a:defRPr>
-                <a:latin typeface="+mn-lt"/>
-                <a:ea typeface="+mn-ea"/>
-                <a:cs typeface="+mn-cs"/>
-              </a:defRPr>
-            </a:lvl4pPr>
-            <a:lvl5pPr marL="1828800">
-              <a:defRPr>
-                <a:latin typeface="+mn-lt"/>
-                <a:ea typeface="+mn-ea"/>
-                <a:cs typeface="+mn-cs"/>
-              </a:defRPr>
-            </a:lvl5pPr>
-            <a:lvl6pPr marL="2286000">
-              <a:defRPr>
-                <a:latin typeface="+mn-lt"/>
-                <a:ea typeface="+mn-ea"/>
-                <a:cs typeface="+mn-cs"/>
-              </a:defRPr>
-            </a:lvl6pPr>
-            <a:lvl7pPr marL="2743200">
-              <a:defRPr>
-                <a:latin typeface="+mn-lt"/>
-                <a:ea typeface="+mn-ea"/>
-                <a:cs typeface="+mn-cs"/>
-              </a:defRPr>
-            </a:lvl7pPr>
-            <a:lvl8pPr marL="3200400">
-              <a:defRPr>
-                <a:latin typeface="+mn-lt"/>
-                <a:ea typeface="+mn-ea"/>
-                <a:cs typeface="+mn-cs"/>
-              </a:defRPr>
-            </a:lvl8pPr>
-            <a:lvl9pPr marL="3657600">
-              <a:defRPr>
-                <a:latin typeface="+mn-lt"/>
-                <a:ea typeface="+mn-ea"/>
-                <a:cs typeface="+mn-cs"/>
-              </a:defRPr>
-            </a:lvl9pPr>
-          </a:lstStyle>
-          <a:p>
-            <a:r>
-              <a:rPr lang="en-US" b="1" dirty="0"/>
-              <a:t>Assessment 5. </a:t>
-            </a:r>
-            <a:r>
-              <a:rPr lang="en-US" dirty="0"/>
-              <a:t>Let's see how the response of the MZI varies with the effective index. Vary the effective index of one of the arms and analyze how the spectrum shifts. To do this, you can use the data provided in the .txt files entitled ‘</a:t>
-            </a:r>
-            <a:r>
-              <a:rPr lang="en-US" dirty="0" err="1"/>
-              <a:t>SiN</a:t>
-            </a:r>
-            <a:r>
-              <a:rPr lang="en-US" dirty="0"/>
-              <a:t>’. Can you give an example of an application where this configuration is used?</a:t>
-            </a:r>
-          </a:p>
-          <a:p>
-            <a:pPr marL="0" indent="0">
-              <a:buNone/>
-            </a:pPr>
-            <a:endParaRPr lang="en-US" dirty="0"/>
-          </a:p>
-          <a:p>
-            <a:pPr algn="just"/>
-            <a:endParaRPr lang="en-US" sz="2000" kern="0" dirty="0">
-              <a:solidFill>
-                <a:sysClr val="windowText" lastClr="000000"/>
-              </a:solidFill>
-            </a:endParaRPr>
-          </a:p>
-        </p:txBody>
-      </p:sp>
-      <p:sp>
-        <p:nvSpPr>
-          <p:cNvPr id="6" name="Marcador de pie de página 2">
-            <a:extLst>
-              <a:ext uri="{FF2B5EF4-FFF2-40B4-BE49-F238E27FC236}">
-                <a16:creationId xmlns:a16="http://schemas.microsoft.com/office/drawing/2014/main" id="{1B0E7D77-C21A-0F71-C8AE-878763F261D0}"/>
-              </a:ext>
-            </a:extLst>
-          </p:cNvPr>
-          <p:cNvSpPr>
-            <a:spLocks noGrp="1"/>
-          </p:cNvSpPr>
-          <p:nvPr>
-            <p:ph type="ftr" sz="quarter" idx="5"/>
-          </p:nvPr>
-        </p:nvSpPr>
-        <p:spPr>
-          <a:xfrm>
-            <a:off x="609600" y="6457057"/>
-            <a:ext cx="2743200" cy="184666"/>
-          </a:xfrm>
-        </p:spPr>
-        <p:txBody>
-          <a:bodyPr/>
-          <a:lstStyle/>
-          <a:p>
-            <a:pPr marL="12700">
-              <a:spcBef>
-                <a:spcPts val="15"/>
-              </a:spcBef>
-            </a:pPr>
-            <a:r>
-              <a:rPr lang="es-ES" spc="-5"/>
-              <a:t>LAB 3. INTERFEROMETERS I</a:t>
-            </a:r>
-            <a:endParaRPr lang="es-ES" spc="-5" dirty="0"/>
-          </a:p>
-        </p:txBody>
-      </p:sp>
-      <p:pic>
-        <p:nvPicPr>
-          <p:cNvPr id="5" name="Imagen 4" descr="Gráfico, Gráfico de líneas&#10;&#10;El contenido generado por IA puede ser incorrecto.">
-            <a:extLst>
-              <a:ext uri="{FF2B5EF4-FFF2-40B4-BE49-F238E27FC236}">
-                <a16:creationId xmlns:a16="http://schemas.microsoft.com/office/drawing/2014/main" id="{8F3F4BED-B61B-1C9A-F3CC-1970B22EBED1}"/>
-              </a:ext>
-            </a:extLst>
-          </p:cNvPr>
-          <p:cNvPicPr>
-            <a:picLocks noChangeAspect="1"/>
-          </p:cNvPicPr>
-          <p:nvPr/>
-        </p:nvPicPr>
-        <p:blipFill>
-          <a:blip r:embed="rId5"/>
-          <a:stretch>
-            <a:fillRect/>
-          </a:stretch>
-        </p:blipFill>
-        <p:spPr>
-          <a:xfrm>
-            <a:off x="5867399" y="2313629"/>
-            <a:ext cx="3706183" cy="2970167"/>
-          </a:xfrm>
-          <a:prstGeom prst="rect">
-            <a:avLst/>
-          </a:prstGeom>
-        </p:spPr>
-      </p:pic>
-      <p:pic>
-        <p:nvPicPr>
-          <p:cNvPr id="8" name="Imagen 7" descr="Gráfico, Gráfico de líneas&#10;&#10;El contenido generado por IA puede ser incorrecto.">
-            <a:extLst>
-              <a:ext uri="{FF2B5EF4-FFF2-40B4-BE49-F238E27FC236}">
-                <a16:creationId xmlns:a16="http://schemas.microsoft.com/office/drawing/2014/main" id="{91345F26-98A5-C035-E772-CEA063AE2862}"/>
-              </a:ext>
-            </a:extLst>
-          </p:cNvPr>
-          <p:cNvPicPr>
-            <a:picLocks noChangeAspect="1"/>
-          </p:cNvPicPr>
-          <p:nvPr/>
-        </p:nvPicPr>
-        <p:blipFill>
-          <a:blip r:embed="rId6"/>
-          <a:stretch>
-            <a:fillRect/>
-          </a:stretch>
-        </p:blipFill>
-        <p:spPr>
-          <a:xfrm>
-            <a:off x="1841248" y="2265138"/>
-            <a:ext cx="3753498" cy="3018658"/>
-          </a:xfrm>
-          <a:prstGeom prst="rect">
-            <a:avLst/>
-          </a:prstGeom>
-        </p:spPr>
-      </p:pic>
-      <p:sp>
-        <p:nvSpPr>
-          <p:cNvPr id="10" name="CuadroTexto 9">
-            <a:extLst>
-              <a:ext uri="{FF2B5EF4-FFF2-40B4-BE49-F238E27FC236}">
-                <a16:creationId xmlns:a16="http://schemas.microsoft.com/office/drawing/2014/main" id="{7D74DF8F-76E3-0798-6389-07D257E70727}"/>
-              </a:ext>
-            </a:extLst>
-          </p:cNvPr>
-          <p:cNvSpPr txBox="1"/>
-          <p:nvPr/>
-        </p:nvSpPr>
-        <p:spPr>
-          <a:xfrm>
-            <a:off x="381000" y="5487316"/>
-            <a:ext cx="10896600" cy="923330"/>
-          </a:xfrm>
-          <a:prstGeom prst="rect">
-            <a:avLst/>
-          </a:prstGeom>
-          <a:noFill/>
-        </p:spPr>
-        <p:txBody>
-          <a:bodyPr wrap="square">
-            <a:spAutoFit/>
-          </a:bodyPr>
-          <a:lstStyle/>
-          <a:p>
-            <a:r>
-              <a:rPr lang="en-US" dirty="0"/>
-              <a:t>Se produce un </a:t>
-            </a:r>
-            <a:r>
-              <a:rPr lang="en-US" dirty="0" err="1"/>
-              <a:t>desplazamiento</a:t>
-            </a:r>
-            <a:r>
-              <a:rPr lang="en-US" dirty="0"/>
-              <a:t> del </a:t>
-            </a:r>
-            <a:r>
-              <a:rPr lang="en-US" dirty="0" err="1"/>
-              <a:t>espectro</a:t>
-            </a:r>
-            <a:r>
-              <a:rPr lang="en-US" dirty="0"/>
-              <a:t>. Como se ha </a:t>
-            </a:r>
-            <a:r>
-              <a:rPr lang="en-US" dirty="0" err="1"/>
-              <a:t>comentado</a:t>
-            </a:r>
-            <a:r>
-              <a:rPr lang="en-US" dirty="0"/>
-              <a:t> </a:t>
-            </a:r>
-            <a:r>
-              <a:rPr lang="en-US" dirty="0" err="1"/>
-              <a:t>en</a:t>
-            </a:r>
-            <a:r>
-              <a:rPr lang="en-US" dirty="0"/>
-              <a:t> </a:t>
-            </a:r>
-            <a:r>
-              <a:rPr lang="en-US" dirty="0" err="1"/>
-              <a:t>clase</a:t>
-            </a:r>
-            <a:r>
-              <a:rPr lang="en-US" dirty="0"/>
-              <a:t> </a:t>
-            </a:r>
-            <a:r>
-              <a:rPr lang="en-US" dirty="0" err="1"/>
-              <a:t>en</a:t>
-            </a:r>
-            <a:r>
-              <a:rPr lang="en-US" dirty="0"/>
-              <a:t> </a:t>
-            </a:r>
-            <a:r>
-              <a:rPr lang="en-US" dirty="0" err="1"/>
-              <a:t>diferentes</a:t>
-            </a:r>
-            <a:r>
-              <a:rPr lang="en-US" dirty="0"/>
-              <a:t> </a:t>
-            </a:r>
-            <a:r>
-              <a:rPr lang="en-US" dirty="0" err="1"/>
-              <a:t>ocasiones</a:t>
-            </a:r>
-            <a:r>
-              <a:rPr lang="en-US" dirty="0"/>
-              <a:t> se </a:t>
-            </a:r>
-            <a:r>
-              <a:rPr lang="en-US" dirty="0" err="1"/>
-              <a:t>puede</a:t>
-            </a:r>
-            <a:r>
-              <a:rPr lang="en-US" dirty="0"/>
-              <a:t> </a:t>
-            </a:r>
-            <a:r>
-              <a:rPr lang="en-US" dirty="0" err="1"/>
-              <a:t>utilizar</a:t>
-            </a:r>
-            <a:r>
-              <a:rPr lang="en-US" dirty="0"/>
-              <a:t> </a:t>
-            </a:r>
-            <a:r>
-              <a:rPr lang="en-US" dirty="0" err="1"/>
-              <a:t>como</a:t>
-            </a:r>
-            <a:r>
-              <a:rPr lang="en-US" dirty="0"/>
-              <a:t> detector de </a:t>
-            </a:r>
-            <a:r>
-              <a:rPr lang="en-US" dirty="0" err="1"/>
-              <a:t>substancias</a:t>
-            </a:r>
-            <a:r>
-              <a:rPr lang="en-US" dirty="0"/>
-              <a:t>, </a:t>
-            </a:r>
-            <a:r>
-              <a:rPr lang="en-US" dirty="0" err="1"/>
-              <a:t>ya</a:t>
-            </a:r>
-            <a:r>
-              <a:rPr lang="en-US" dirty="0"/>
-              <a:t> </a:t>
-            </a:r>
-            <a:r>
-              <a:rPr lang="en-US" dirty="0" err="1"/>
-              <a:t>que</a:t>
-            </a:r>
-            <a:r>
-              <a:rPr lang="en-US" dirty="0"/>
-              <a:t> la </a:t>
-            </a:r>
-            <a:r>
-              <a:rPr lang="en-US" dirty="0" err="1"/>
-              <a:t>presencia</a:t>
-            </a:r>
-            <a:r>
-              <a:rPr lang="en-US" dirty="0"/>
-              <a:t> de </a:t>
-            </a:r>
-            <a:r>
-              <a:rPr lang="en-US" dirty="0" err="1"/>
-              <a:t>cierta</a:t>
-            </a:r>
-            <a:r>
-              <a:rPr lang="en-US" dirty="0"/>
-              <a:t> </a:t>
-            </a:r>
-            <a:r>
-              <a:rPr lang="en-US" dirty="0" err="1"/>
-              <a:t>substancia</a:t>
-            </a:r>
-            <a:r>
-              <a:rPr lang="en-US" dirty="0"/>
-              <a:t> altera </a:t>
-            </a:r>
-            <a:r>
-              <a:rPr lang="en-US" dirty="0" err="1"/>
-              <a:t>el</a:t>
-            </a:r>
-            <a:r>
-              <a:rPr lang="en-US" dirty="0"/>
-              <a:t> </a:t>
-            </a:r>
-            <a:r>
-              <a:rPr lang="en-US" dirty="0" err="1"/>
-              <a:t>neff</a:t>
-            </a:r>
-            <a:r>
-              <a:rPr lang="en-US" dirty="0"/>
-              <a:t>, y </a:t>
-            </a:r>
-            <a:r>
-              <a:rPr lang="en-US" dirty="0" err="1"/>
-              <a:t>por</a:t>
-            </a:r>
-            <a:r>
-              <a:rPr lang="en-US" dirty="0"/>
-              <a:t> </a:t>
-            </a:r>
-            <a:r>
-              <a:rPr lang="en-US" dirty="0" err="1"/>
-              <a:t>ende</a:t>
-            </a:r>
-            <a:r>
-              <a:rPr lang="en-US" dirty="0"/>
-              <a:t> la </a:t>
-            </a:r>
-            <a:r>
-              <a:rPr lang="en-US" dirty="0" err="1"/>
-              <a:t>respuesta</a:t>
-            </a:r>
-            <a:r>
-              <a:rPr lang="en-US" dirty="0"/>
-              <a:t>, </a:t>
-            </a:r>
-            <a:r>
-              <a:rPr lang="en-US" dirty="0" err="1"/>
-              <a:t>pudiendo</a:t>
-            </a:r>
-            <a:r>
-              <a:rPr lang="en-US" dirty="0"/>
-              <a:t> </a:t>
-            </a:r>
-            <a:r>
-              <a:rPr lang="en-US" dirty="0" err="1"/>
-              <a:t>así</a:t>
-            </a:r>
-            <a:r>
-              <a:rPr lang="en-US" dirty="0"/>
-              <a:t> </a:t>
-            </a:r>
-            <a:r>
-              <a:rPr lang="en-US" dirty="0" err="1"/>
-              <a:t>obtener</a:t>
-            </a:r>
-            <a:r>
-              <a:rPr lang="en-US" dirty="0"/>
-              <a:t> </a:t>
-            </a:r>
-            <a:r>
-              <a:rPr lang="en-US" dirty="0" err="1"/>
-              <a:t>información</a:t>
-            </a:r>
-            <a:r>
-              <a:rPr lang="en-US" dirty="0"/>
-              <a:t>. </a:t>
-            </a:r>
-            <a:endParaRPr lang="es-ES" dirty="0"/>
-          </a:p>
-        </p:txBody>
-      </p:sp>
-    </p:spTree>
-    <p:extLst>
-      <p:ext uri="{BB962C8B-B14F-4D97-AF65-F5344CB8AC3E}">
-        <p14:creationId xmlns:p14="http://schemas.microsoft.com/office/powerpoint/2010/main" val="3577319862"/>
-      </p:ext>
-    </p:extLst>
-  </p:cSld>
-  <p:clrMapOvr>
-    <a:masterClrMapping/>
-  </p:clrMapOvr>
-</p:sld>
-</file>
-
-<file path=ppt/slides/slide21.xml><?xml version="1.0" encoding="utf-8"?>
-<p:sld xmlns:a="http://schemas.openxmlformats.org/drawingml/2006/main" xmlns:r="http://schemas.openxmlformats.org/officeDocument/2006/relationships" xmlns:p="http://schemas.openxmlformats.org/presentationml/2006/main">
-  <p:cSld>
-    <p:spTree>
-      <p:nvGrpSpPr>
         <p:cNvPr id="1" name=""/>
         <p:cNvGrpSpPr/>
         <p:nvPr/>
@@ -13300,7 +12708,7 @@
           <a:p>
             <a:fld id="{B6F15528-21DE-4FAA-801E-634DDDAF4B2B}" type="slidenum">
               <a:rPr lang="es-ES" smtClean="0"/>
-              <a:t>21</a:t>
+              <a:t>20</a:t>
             </a:fld>
             <a:endParaRPr lang="es-ES"/>
           </a:p>
@@ -13879,469 +13287,6 @@
         <p:cNvPr id="1" name="">
           <a:extLst>
             <a:ext uri="{FF2B5EF4-FFF2-40B4-BE49-F238E27FC236}">
-              <a16:creationId xmlns:a16="http://schemas.microsoft.com/office/drawing/2014/main" id="{874C5730-D260-7D68-D0E4-1843EA66C000}"/>
-            </a:ext>
-          </a:extLst>
-        </p:cNvPr>
-        <p:cNvGrpSpPr/>
-        <p:nvPr/>
-      </p:nvGrpSpPr>
-      <p:grpSpPr>
-        <a:xfrm>
-          <a:off x="0" y="0"/>
-          <a:ext cx="0" cy="0"/>
-          <a:chOff x="0" y="0"/>
-          <a:chExt cx="0" cy="0"/>
-        </a:xfrm>
-      </p:grpSpPr>
-      <p:sp>
-        <p:nvSpPr>
-          <p:cNvPr id="16" name="object 16">
-            <a:extLst>
-              <a:ext uri="{FF2B5EF4-FFF2-40B4-BE49-F238E27FC236}">
-                <a16:creationId xmlns:a16="http://schemas.microsoft.com/office/drawing/2014/main" id="{E5455A44-AED2-5EB4-2AEC-F450E1C062AC}"/>
-              </a:ext>
-            </a:extLst>
-          </p:cNvPr>
-          <p:cNvSpPr txBox="1">
-            <a:spLocks noGrp="1"/>
-          </p:cNvSpPr>
-          <p:nvPr>
-            <p:ph type="title"/>
-          </p:nvPr>
-        </p:nvSpPr>
-        <p:spPr>
-          <a:xfrm>
-            <a:off x="685800" y="408883"/>
-            <a:ext cx="10994410" cy="782265"/>
-          </a:xfrm>
-          <a:prstGeom prst="rect">
-            <a:avLst/>
-          </a:prstGeom>
-        </p:spPr>
-        <p:txBody>
-          <a:bodyPr vert="horz" wrap="square" lIns="0" tIns="12700" rIns="0" bIns="0" rtlCol="0">
-            <a:spAutoFit/>
-          </a:bodyPr>
-          <a:lstStyle/>
-          <a:p>
-            <a:pPr marL="12700">
-              <a:lnSpc>
-                <a:spcPct val="100000"/>
-              </a:lnSpc>
-              <a:spcBef>
-                <a:spcPts val="100"/>
-              </a:spcBef>
-            </a:pPr>
-            <a:r>
-              <a:rPr lang="en-US" sz="2400" b="1" dirty="0">
-                <a:solidFill>
-                  <a:srgbClr val="FF0000"/>
-                </a:solidFill>
-              </a:rPr>
-              <a:t>AVISO</a:t>
-            </a:r>
-            <a:br>
-              <a:rPr lang="es-ES" sz="2500" spc="-5" dirty="0">
-                <a:latin typeface="+mj-lt"/>
-                <a:cs typeface="Lucida Sans"/>
-              </a:rPr>
-            </a:br>
-            <a:endParaRPr sz="2500" b="0" dirty="0">
-              <a:latin typeface="+mj-lt"/>
-              <a:cs typeface="Lucida Sans"/>
-            </a:endParaRPr>
-          </a:p>
-        </p:txBody>
-      </p:sp>
-      <p:pic>
-        <p:nvPicPr>
-          <p:cNvPr id="83" name="Gráfico 82">
-            <a:extLst>
-              <a:ext uri="{FF2B5EF4-FFF2-40B4-BE49-F238E27FC236}">
-                <a16:creationId xmlns:a16="http://schemas.microsoft.com/office/drawing/2014/main" id="{42DDFE63-EF43-E1E3-8AA6-8627BB9A494F}"/>
-              </a:ext>
-            </a:extLst>
-          </p:cNvPr>
-          <p:cNvPicPr>
-            <a:picLocks noChangeAspect="1"/>
-          </p:cNvPicPr>
-          <p:nvPr/>
-        </p:nvPicPr>
-        <p:blipFill>
-          <a:blip r:embed="rId3">
-            <a:extLst>
-              <a:ext uri="{96DAC541-7B7A-43D3-8B79-37D633B846F1}">
-                <asvg:svgBlip xmlns:asvg="http://schemas.microsoft.com/office/drawing/2016/SVG/main" r:embed="rId4"/>
-              </a:ext>
-            </a:extLst>
-          </a:blip>
-          <a:stretch>
-            <a:fillRect/>
-          </a:stretch>
-        </p:blipFill>
-        <p:spPr>
-          <a:xfrm>
-            <a:off x="5045006" y="6356057"/>
-            <a:ext cx="6409575" cy="363174"/>
-          </a:xfrm>
-          <a:prstGeom prst="rect">
-            <a:avLst/>
-          </a:prstGeom>
-        </p:spPr>
-      </p:pic>
-      <p:sp>
-        <p:nvSpPr>
-          <p:cNvPr id="84" name="Marcador de número de diapositiva 83">
-            <a:extLst>
-              <a:ext uri="{FF2B5EF4-FFF2-40B4-BE49-F238E27FC236}">
-                <a16:creationId xmlns:a16="http://schemas.microsoft.com/office/drawing/2014/main" id="{A39F5085-AAE1-5079-C135-A48EED0B0CA1}"/>
-              </a:ext>
-            </a:extLst>
-          </p:cNvPr>
-          <p:cNvSpPr>
-            <a:spLocks noGrp="1"/>
-          </p:cNvSpPr>
-          <p:nvPr>
-            <p:ph type="sldNum" sz="quarter" idx="7"/>
-          </p:nvPr>
-        </p:nvSpPr>
-        <p:spPr/>
-        <p:txBody>
-          <a:bodyPr/>
-          <a:lstStyle/>
-          <a:p>
-            <a:fld id="{B6F15528-21DE-4FAA-801E-634DDDAF4B2B}" type="slidenum">
-              <a:rPr lang="es-ES" smtClean="0"/>
-              <a:t>4</a:t>
-            </a:fld>
-            <a:endParaRPr lang="es-ES"/>
-          </a:p>
-        </p:txBody>
-      </p:sp>
-      <p:sp>
-        <p:nvSpPr>
-          <p:cNvPr id="4" name="Marcador de texto 2">
-            <a:extLst>
-              <a:ext uri="{FF2B5EF4-FFF2-40B4-BE49-F238E27FC236}">
-                <a16:creationId xmlns:a16="http://schemas.microsoft.com/office/drawing/2014/main" id="{CFF91A30-7BFC-BAF3-6451-A19C30730A23}"/>
-              </a:ext>
-            </a:extLst>
-          </p:cNvPr>
-          <p:cNvSpPr txBox="1">
-            <a:spLocks/>
-          </p:cNvSpPr>
-          <p:nvPr/>
-        </p:nvSpPr>
-        <p:spPr>
-          <a:xfrm>
-            <a:off x="608012" y="1295400"/>
-            <a:ext cx="11048999" cy="4958137"/>
-          </a:xfrm>
-          <a:prstGeom prst="rect">
-            <a:avLst/>
-          </a:prstGeom>
-        </p:spPr>
-        <p:txBody>
-          <a:bodyPr>
-            <a:normAutofit/>
-          </a:bodyPr>
-          <a:lstStyle>
-            <a:lvl1pPr marL="0">
-              <a:defRPr>
-                <a:latin typeface="+mn-lt"/>
-                <a:ea typeface="+mn-ea"/>
-                <a:cs typeface="+mn-cs"/>
-              </a:defRPr>
-            </a:lvl1pPr>
-            <a:lvl2pPr marL="457200">
-              <a:defRPr>
-                <a:latin typeface="+mn-lt"/>
-                <a:ea typeface="+mn-ea"/>
-                <a:cs typeface="+mn-cs"/>
-              </a:defRPr>
-            </a:lvl2pPr>
-            <a:lvl3pPr marL="914400">
-              <a:defRPr>
-                <a:latin typeface="+mn-lt"/>
-                <a:ea typeface="+mn-ea"/>
-                <a:cs typeface="+mn-cs"/>
-              </a:defRPr>
-            </a:lvl3pPr>
-            <a:lvl4pPr marL="1371600">
-              <a:defRPr>
-                <a:latin typeface="+mn-lt"/>
-                <a:ea typeface="+mn-ea"/>
-                <a:cs typeface="+mn-cs"/>
-              </a:defRPr>
-            </a:lvl4pPr>
-            <a:lvl5pPr marL="1828800">
-              <a:defRPr>
-                <a:latin typeface="+mn-lt"/>
-                <a:ea typeface="+mn-ea"/>
-                <a:cs typeface="+mn-cs"/>
-              </a:defRPr>
-            </a:lvl5pPr>
-            <a:lvl6pPr marL="2286000">
-              <a:defRPr>
-                <a:latin typeface="+mn-lt"/>
-                <a:ea typeface="+mn-ea"/>
-                <a:cs typeface="+mn-cs"/>
-              </a:defRPr>
-            </a:lvl6pPr>
-            <a:lvl7pPr marL="2743200">
-              <a:defRPr>
-                <a:latin typeface="+mn-lt"/>
-                <a:ea typeface="+mn-ea"/>
-                <a:cs typeface="+mn-cs"/>
-              </a:defRPr>
-            </a:lvl7pPr>
-            <a:lvl8pPr marL="3200400">
-              <a:defRPr>
-                <a:latin typeface="+mn-lt"/>
-                <a:ea typeface="+mn-ea"/>
-                <a:cs typeface="+mn-cs"/>
-              </a:defRPr>
-            </a:lvl8pPr>
-            <a:lvl9pPr marL="3657600">
-              <a:defRPr>
-                <a:latin typeface="+mn-lt"/>
-                <a:ea typeface="+mn-ea"/>
-                <a:cs typeface="+mn-cs"/>
-              </a:defRPr>
-            </a:lvl9pPr>
-          </a:lstStyle>
-          <a:p>
-            <a:r>
-              <a:rPr lang="en-US" sz="2000" dirty="0"/>
-              <a:t> </a:t>
-            </a:r>
-          </a:p>
-          <a:p>
-            <a:pPr algn="just"/>
-            <a:endParaRPr lang="en-US" sz="2000" dirty="0"/>
-          </a:p>
-          <a:p>
-            <a:pPr algn="just"/>
-            <a:endParaRPr lang="en-US" sz="2000" b="1" i="1" dirty="0"/>
-          </a:p>
-          <a:p>
-            <a:pPr algn="just"/>
-            <a:endParaRPr lang="en-US" sz="2000" kern="0" dirty="0">
-              <a:solidFill>
-                <a:sysClr val="windowText" lastClr="000000"/>
-              </a:solidFill>
-            </a:endParaRPr>
-          </a:p>
-          <a:p>
-            <a:endParaRPr lang="en-US" sz="2000" kern="0" dirty="0">
-              <a:solidFill>
-                <a:sysClr val="windowText" lastClr="000000"/>
-              </a:solidFill>
-            </a:endParaRPr>
-          </a:p>
-        </p:txBody>
-      </p:sp>
-      <p:sp>
-        <p:nvSpPr>
-          <p:cNvPr id="5" name="Marcador de pie de página 2">
-            <a:extLst>
-              <a:ext uri="{FF2B5EF4-FFF2-40B4-BE49-F238E27FC236}">
-                <a16:creationId xmlns:a16="http://schemas.microsoft.com/office/drawing/2014/main" id="{4D59972F-9803-FEC0-FFF5-F0494C510B38}"/>
-              </a:ext>
-            </a:extLst>
-          </p:cNvPr>
-          <p:cNvSpPr>
-            <a:spLocks noGrp="1"/>
-          </p:cNvSpPr>
-          <p:nvPr>
-            <p:ph type="ftr" sz="quarter" idx="5"/>
-          </p:nvPr>
-        </p:nvSpPr>
-        <p:spPr>
-          <a:xfrm>
-            <a:off x="609600" y="6457057"/>
-            <a:ext cx="2743200" cy="184666"/>
-          </a:xfrm>
-        </p:spPr>
-        <p:txBody>
-          <a:bodyPr/>
-          <a:lstStyle/>
-          <a:p>
-            <a:pPr marL="12700">
-              <a:spcBef>
-                <a:spcPts val="15"/>
-              </a:spcBef>
-            </a:pPr>
-            <a:r>
-              <a:rPr lang="es-ES" spc="-5"/>
-              <a:t>LAB 3. INTERFEROMETERS I</a:t>
-            </a:r>
-            <a:endParaRPr lang="es-ES" spc="-5" dirty="0"/>
-          </a:p>
-        </p:txBody>
-      </p:sp>
-      <p:sp>
-        <p:nvSpPr>
-          <p:cNvPr id="6" name="CuadroTexto 5">
-            <a:extLst>
-              <a:ext uri="{FF2B5EF4-FFF2-40B4-BE49-F238E27FC236}">
-                <a16:creationId xmlns:a16="http://schemas.microsoft.com/office/drawing/2014/main" id="{005BC3B3-D2A2-8533-E92A-F93E406086A3}"/>
-              </a:ext>
-            </a:extLst>
-          </p:cNvPr>
-          <p:cNvSpPr txBox="1"/>
-          <p:nvPr/>
-        </p:nvSpPr>
-        <p:spPr>
-          <a:xfrm>
-            <a:off x="733423" y="1524000"/>
-            <a:ext cx="10898188" cy="646331"/>
-          </a:xfrm>
-          <a:prstGeom prst="rect">
-            <a:avLst/>
-          </a:prstGeom>
-          <a:noFill/>
-        </p:spPr>
-        <p:txBody>
-          <a:bodyPr wrap="square">
-            <a:spAutoFit/>
-          </a:bodyPr>
-          <a:lstStyle/>
-          <a:p>
-            <a:r>
-              <a:rPr lang="en-US" sz="1800" dirty="0"/>
-              <a:t>A la hora de </a:t>
-            </a:r>
-            <a:r>
-              <a:rPr lang="en-US" sz="1800" dirty="0" err="1"/>
-              <a:t>subir</a:t>
-            </a:r>
-            <a:r>
-              <a:rPr lang="en-US" sz="1800" dirty="0"/>
-              <a:t> la </a:t>
-            </a:r>
-            <a:r>
-              <a:rPr lang="en-US" sz="1800" dirty="0" err="1"/>
-              <a:t>tarea</a:t>
-            </a:r>
-            <a:r>
-              <a:rPr lang="en-US" sz="1800" dirty="0"/>
-              <a:t> me he dado </a:t>
-            </a:r>
-            <a:r>
-              <a:rPr lang="en-US" sz="1800" dirty="0" err="1"/>
-              <a:t>cuenta</a:t>
-            </a:r>
-            <a:r>
-              <a:rPr lang="en-US" sz="1800" dirty="0"/>
-              <a:t> de </a:t>
-            </a:r>
-            <a:r>
-              <a:rPr lang="en-US" sz="1800" dirty="0" err="1"/>
-              <a:t>que</a:t>
-            </a:r>
-            <a:r>
-              <a:rPr lang="en-US" sz="1800" dirty="0"/>
-              <a:t> </a:t>
-            </a:r>
-            <a:r>
-              <a:rPr lang="en-US" sz="1800" dirty="0" err="1"/>
-              <a:t>en</a:t>
-            </a:r>
-            <a:r>
-              <a:rPr lang="en-US" sz="1800" dirty="0"/>
-              <a:t> </a:t>
-            </a:r>
-            <a:r>
-              <a:rPr lang="en-US" sz="1800" dirty="0" err="1"/>
-              <a:t>todas</a:t>
-            </a:r>
-            <a:r>
-              <a:rPr lang="en-US" sz="1800" dirty="0"/>
-              <a:t> las </a:t>
-            </a:r>
-            <a:r>
-              <a:rPr lang="en-US" sz="1800" dirty="0" err="1"/>
-              <a:t>gráficas</a:t>
-            </a:r>
-            <a:r>
-              <a:rPr lang="en-US" sz="1800" dirty="0"/>
-              <a:t> he </a:t>
-            </a:r>
-            <a:r>
-              <a:rPr lang="en-US" sz="1800" dirty="0" err="1"/>
-              <a:t>puesto</a:t>
-            </a:r>
-            <a:r>
-              <a:rPr lang="en-US" sz="1800" dirty="0"/>
-              <a:t> </a:t>
-            </a:r>
-            <a:r>
-              <a:rPr lang="en-US" sz="1800" dirty="0" err="1"/>
-              <a:t>el</a:t>
-            </a:r>
-            <a:r>
-              <a:rPr lang="en-US" sz="1800" dirty="0"/>
-              <a:t> </a:t>
-            </a:r>
-            <a:r>
-              <a:rPr lang="en-US" sz="1800" dirty="0" err="1"/>
-              <a:t>eje</a:t>
-            </a:r>
-            <a:r>
-              <a:rPr lang="en-US" sz="1800" dirty="0"/>
-              <a:t> x </a:t>
-            </a:r>
-            <a:r>
-              <a:rPr lang="en-US" sz="1800" dirty="0" err="1"/>
-              <a:t>en</a:t>
-            </a:r>
-            <a:r>
-              <a:rPr lang="en-US" sz="1800" dirty="0"/>
-              <a:t> um, </a:t>
-            </a:r>
-            <a:r>
-              <a:rPr lang="en-US" sz="1800" dirty="0" err="1"/>
-              <a:t>cuando</a:t>
-            </a:r>
-            <a:r>
-              <a:rPr lang="en-US" sz="1800" dirty="0"/>
-              <a:t> </a:t>
-            </a:r>
-            <a:r>
-              <a:rPr lang="en-US" sz="1800" dirty="0" err="1"/>
-              <a:t>deberían</a:t>
-            </a:r>
-            <a:r>
-              <a:rPr lang="en-US" sz="1800" dirty="0"/>
-              <a:t> ser nm. </a:t>
-            </a:r>
-            <a:endParaRPr lang="es-ES" dirty="0"/>
-          </a:p>
-        </p:txBody>
-      </p:sp>
-    </p:spTree>
-    <p:extLst>
-      <p:ext uri="{BB962C8B-B14F-4D97-AF65-F5344CB8AC3E}">
-        <p14:creationId xmlns:p14="http://schemas.microsoft.com/office/powerpoint/2010/main" val="3622345811"/>
-      </p:ext>
-    </p:extLst>
-  </p:cSld>
-  <p:clrMapOvr>
-    <a:masterClrMapping/>
-  </p:clrMapOvr>
-</p:sld>
-</file>
-
-<file path=ppt/slides/slide5.xml><?xml version="1.0" encoding="utf-8"?>
-<p:sld xmlns:a="http://schemas.openxmlformats.org/drawingml/2006/main" xmlns:r="http://schemas.openxmlformats.org/officeDocument/2006/relationships" xmlns:p="http://schemas.openxmlformats.org/presentationml/2006/main">
-  <p:cSld>
-    <p:spTree>
-      <p:nvGrpSpPr>
-        <p:cNvPr id="1" name="">
-          <a:extLst>
-            <a:ext uri="{FF2B5EF4-FFF2-40B4-BE49-F238E27FC236}">
               <a16:creationId xmlns:a16="http://schemas.microsoft.com/office/drawing/2014/main" id="{D923F582-340E-9B96-CF1D-8C7138583BA8}"/>
             </a:ext>
           </a:extLst>
@@ -14454,7 +13399,7 @@
           <a:p>
             <a:fld id="{B6F15528-21DE-4FAA-801E-634DDDAF4B2B}" type="slidenum">
               <a:rPr lang="es-ES" smtClean="0"/>
-              <a:t>5</a:t>
+              <a:t>4</a:t>
             </a:fld>
             <a:endParaRPr lang="es-ES"/>
           </a:p>
@@ -14568,7 +13513,7 @@
 </p:sld>
 </file>
 
-<file path=ppt/slides/slide6.xml><?xml version="1.0" encoding="utf-8"?>
+<file path=ppt/slides/slide5.xml><?xml version="1.0" encoding="utf-8"?>
 <p:sld xmlns:a="http://schemas.openxmlformats.org/drawingml/2006/main" xmlns:r="http://schemas.openxmlformats.org/officeDocument/2006/relationships" xmlns:p="http://schemas.openxmlformats.org/presentationml/2006/main">
   <p:cSld>
     <p:spTree>
@@ -14688,7 +13633,7 @@
           <a:p>
             <a:fld id="{B6F15528-21DE-4FAA-801E-634DDDAF4B2B}" type="slidenum">
               <a:rPr lang="es-ES" smtClean="0"/>
-              <a:t>6</a:t>
+              <a:t>5</a:t>
             </a:fld>
             <a:endParaRPr lang="es-ES"/>
           </a:p>
@@ -14893,7 +13838,7 @@
 </p:sld>
 </file>
 
-<file path=ppt/slides/slide7.xml><?xml version="1.0" encoding="utf-8"?>
+<file path=ppt/slides/slide6.xml><?xml version="1.0" encoding="utf-8"?>
 <p:sld xmlns:a="http://schemas.openxmlformats.org/drawingml/2006/main" xmlns:r="http://schemas.openxmlformats.org/officeDocument/2006/relationships" xmlns:p="http://schemas.openxmlformats.org/presentationml/2006/main">
   <p:cSld>
     <p:spTree>
@@ -15013,7 +13958,7 @@
           <a:p>
             <a:fld id="{B6F15528-21DE-4FAA-801E-634DDDAF4B2B}" type="slidenum">
               <a:rPr lang="es-ES" smtClean="0"/>
-              <a:t>7</a:t>
+              <a:t>6</a:t>
             </a:fld>
             <a:endParaRPr lang="es-ES"/>
           </a:p>
@@ -15168,7 +14113,7 @@
 </p:sld>
 </file>
 
-<file path=ppt/slides/slide8.xml><?xml version="1.0" encoding="utf-8"?>
+<file path=ppt/slides/slide7.xml><?xml version="1.0" encoding="utf-8"?>
 <p:sld xmlns:a="http://schemas.openxmlformats.org/drawingml/2006/main" xmlns:r="http://schemas.openxmlformats.org/officeDocument/2006/relationships" xmlns:p="http://schemas.openxmlformats.org/presentationml/2006/main">
   <p:cSld>
     <p:spTree>
@@ -15304,7 +14249,7 @@
           <a:p>
             <a:fld id="{B6F15528-21DE-4FAA-801E-634DDDAF4B2B}" type="slidenum">
               <a:rPr lang="es-ES" smtClean="0"/>
-              <a:t>8</a:t>
+              <a:t>7</a:t>
             </a:fld>
             <a:endParaRPr lang="es-ES"/>
           </a:p>
@@ -15888,7 +14833,7 @@
 </p:sld>
 </file>
 
-<file path=ppt/slides/slide9.xml><?xml version="1.0" encoding="utf-8"?>
+<file path=ppt/slides/slide8.xml><?xml version="1.0" encoding="utf-8"?>
 <p:sld xmlns:a="http://schemas.openxmlformats.org/drawingml/2006/main" xmlns:r="http://schemas.openxmlformats.org/officeDocument/2006/relationships" xmlns:p="http://schemas.openxmlformats.org/presentationml/2006/main">
   <p:cSld>
     <p:spTree>
@@ -16024,7 +14969,7 @@
           <a:p>
             <a:fld id="{B6F15528-21DE-4FAA-801E-634DDDAF4B2B}" type="slidenum">
               <a:rPr lang="es-ES" smtClean="0"/>
-              <a:t>9</a:t>
+              <a:t>8</a:t>
             </a:fld>
             <a:endParaRPr lang="es-ES"/>
           </a:p>
@@ -16367,6 +15312,489 @@
     <p:extLst>
       <p:ext uri="{BB962C8B-B14F-4D97-AF65-F5344CB8AC3E}">
         <p14:creationId xmlns:p14="http://schemas.microsoft.com/office/powerpoint/2010/main" val="2971445483"/>
+      </p:ext>
+    </p:extLst>
+  </p:cSld>
+  <p:clrMapOvr>
+    <a:masterClrMapping/>
+  </p:clrMapOvr>
+</p:sld>
+</file>
+
+<file path=ppt/slides/slide9.xml><?xml version="1.0" encoding="utf-8"?>
+<p:sld xmlns:a="http://schemas.openxmlformats.org/drawingml/2006/main" xmlns:r="http://schemas.openxmlformats.org/officeDocument/2006/relationships" xmlns:p="http://schemas.openxmlformats.org/presentationml/2006/main">
+  <p:cSld>
+    <p:spTree>
+      <p:nvGrpSpPr>
+        <p:cNvPr id="1" name="">
+          <a:extLst>
+            <a:ext uri="{FF2B5EF4-FFF2-40B4-BE49-F238E27FC236}">
+              <a16:creationId xmlns:a16="http://schemas.microsoft.com/office/drawing/2014/main" id="{A9FFCAF2-4CAF-3724-5E41-A350B5EDA2FD}"/>
+            </a:ext>
+          </a:extLst>
+        </p:cNvPr>
+        <p:cNvGrpSpPr/>
+        <p:nvPr/>
+      </p:nvGrpSpPr>
+      <p:grpSpPr>
+        <a:xfrm>
+          <a:off x="0" y="0"/>
+          <a:ext cx="0" cy="0"/>
+          <a:chOff x="0" y="0"/>
+          <a:chExt cx="0" cy="0"/>
+        </a:xfrm>
+      </p:grpSpPr>
+      <p:sp>
+        <p:nvSpPr>
+          <p:cNvPr id="2" name="Título 1">
+            <a:extLst>
+              <a:ext uri="{FF2B5EF4-FFF2-40B4-BE49-F238E27FC236}">
+                <a16:creationId xmlns:a16="http://schemas.microsoft.com/office/drawing/2014/main" id="{4337D877-2605-BB40-43D4-940E277FCE45}"/>
+              </a:ext>
+            </a:extLst>
+          </p:cNvPr>
+          <p:cNvSpPr>
+            <a:spLocks noGrp="1"/>
+          </p:cNvSpPr>
+          <p:nvPr>
+            <p:ph type="title"/>
+          </p:nvPr>
+        </p:nvSpPr>
+        <p:spPr/>
+        <p:txBody>
+          <a:bodyPr/>
+          <a:lstStyle/>
+          <a:p>
+            <a:r>
+              <a:rPr lang="es-ES" dirty="0" err="1"/>
+              <a:t>Unbalanced</a:t>
+            </a:r>
+            <a:r>
+              <a:rPr lang="es-ES" dirty="0"/>
+              <a:t> </a:t>
+            </a:r>
+            <a:r>
+              <a:rPr lang="es-ES" dirty="0" err="1"/>
+              <a:t>configuration</a:t>
+            </a:r>
+            <a:r>
+              <a:rPr lang="es-ES" dirty="0"/>
+              <a:t> –</a:t>
+            </a:r>
+            <a:r>
+              <a:rPr lang="es-ES" dirty="0" err="1"/>
+              <a:t>Phase</a:t>
+            </a:r>
+            <a:r>
+              <a:rPr lang="es-ES" dirty="0"/>
+              <a:t> </a:t>
+            </a:r>
+            <a:r>
+              <a:rPr lang="es-ES" dirty="0" err="1"/>
+              <a:t>Difference</a:t>
+            </a:r>
+            <a:r>
+              <a:rPr lang="es-ES" dirty="0"/>
+              <a:t> </a:t>
+            </a:r>
+          </a:p>
+        </p:txBody>
+      </p:sp>
+      <p:sp>
+        <p:nvSpPr>
+          <p:cNvPr id="4" name="Marcador de pie de página 3">
+            <a:extLst>
+              <a:ext uri="{FF2B5EF4-FFF2-40B4-BE49-F238E27FC236}">
+                <a16:creationId xmlns:a16="http://schemas.microsoft.com/office/drawing/2014/main" id="{E952A2EF-B619-D84B-C41B-713072E0CB84}"/>
+              </a:ext>
+            </a:extLst>
+          </p:cNvPr>
+          <p:cNvSpPr>
+            <a:spLocks noGrp="1"/>
+          </p:cNvSpPr>
+          <p:nvPr>
+            <p:ph type="ftr" sz="quarter" idx="5"/>
+          </p:nvPr>
+        </p:nvSpPr>
+        <p:spPr/>
+        <p:txBody>
+          <a:bodyPr/>
+          <a:lstStyle/>
+          <a:p>
+            <a:pPr marL="12700">
+              <a:spcBef>
+                <a:spcPts val="15"/>
+              </a:spcBef>
+            </a:pPr>
+            <a:r>
+              <a:rPr lang="es-ES" spc="-5"/>
+              <a:t>LAB 3. INTERFEROMETERS I</a:t>
+            </a:r>
+            <a:endParaRPr lang="es-ES" spc="-5" dirty="0"/>
+          </a:p>
+        </p:txBody>
+      </p:sp>
+      <p:sp>
+        <p:nvSpPr>
+          <p:cNvPr id="5" name="Marcador de número de diapositiva 4">
+            <a:extLst>
+              <a:ext uri="{FF2B5EF4-FFF2-40B4-BE49-F238E27FC236}">
+                <a16:creationId xmlns:a16="http://schemas.microsoft.com/office/drawing/2014/main" id="{DBA817EB-9F2F-0DD7-3B41-D3F255B2C785}"/>
+              </a:ext>
+            </a:extLst>
+          </p:cNvPr>
+          <p:cNvSpPr>
+            <a:spLocks noGrp="1"/>
+          </p:cNvSpPr>
+          <p:nvPr>
+            <p:ph type="sldNum" sz="quarter" idx="7"/>
+          </p:nvPr>
+        </p:nvSpPr>
+        <p:spPr/>
+        <p:txBody>
+          <a:bodyPr/>
+          <a:lstStyle/>
+          <a:p>
+            <a:fld id="{B6F15528-21DE-4FAA-801E-634DDDAF4B2B}" type="slidenum">
+              <a:rPr lang="es-ES" smtClean="0"/>
+              <a:t>9</a:t>
+            </a:fld>
+            <a:endParaRPr lang="es-ES"/>
+          </a:p>
+        </p:txBody>
+      </p:sp>
+      <p:sp>
+        <p:nvSpPr>
+          <p:cNvPr id="9" name="CuadroTexto 8">
+            <a:extLst>
+              <a:ext uri="{FF2B5EF4-FFF2-40B4-BE49-F238E27FC236}">
+                <a16:creationId xmlns:a16="http://schemas.microsoft.com/office/drawing/2014/main" id="{B1B56D5A-D857-F6BF-9581-DE217714D775}"/>
+              </a:ext>
+            </a:extLst>
+          </p:cNvPr>
+          <p:cNvSpPr txBox="1"/>
+          <p:nvPr/>
+        </p:nvSpPr>
+        <p:spPr>
+          <a:xfrm>
+            <a:off x="5426365" y="2133600"/>
+            <a:ext cx="6128326" cy="646331"/>
+          </a:xfrm>
+          <a:prstGeom prst="rect">
+            <a:avLst/>
+          </a:prstGeom>
+          <a:noFill/>
+        </p:spPr>
+        <p:txBody>
+          <a:bodyPr wrap="square">
+            <a:spAutoFit/>
+          </a:bodyPr>
+          <a:lstStyle/>
+          <a:p>
+            <a:endParaRPr lang="en-US" dirty="0"/>
+          </a:p>
+          <a:p>
+            <a:endParaRPr lang="es-ES" dirty="0"/>
+          </a:p>
+        </p:txBody>
+      </p:sp>
+      <p:pic>
+        <p:nvPicPr>
+          <p:cNvPr id="8" name="Imagen 7">
+            <a:extLst>
+              <a:ext uri="{FF2B5EF4-FFF2-40B4-BE49-F238E27FC236}">
+                <a16:creationId xmlns:a16="http://schemas.microsoft.com/office/drawing/2014/main" id="{8FEC3C99-BB92-EE36-CF0A-51CF71688A9E}"/>
+              </a:ext>
+            </a:extLst>
+          </p:cNvPr>
+          <p:cNvPicPr>
+            <a:picLocks noChangeAspect="1"/>
+          </p:cNvPicPr>
+          <p:nvPr/>
+        </p:nvPicPr>
+        <p:blipFill>
+          <a:blip r:embed="rId2">
+            <a:extLst>
+              <a:ext uri="{28A0092B-C50C-407E-A947-70E740481C1C}">
+                <a14:useLocalDpi xmlns:a14="http://schemas.microsoft.com/office/drawing/2010/main" val="0"/>
+              </a:ext>
+            </a:extLst>
+          </a:blip>
+          <a:srcRect/>
+          <a:stretch/>
+        </p:blipFill>
+        <p:spPr>
+          <a:xfrm>
+            <a:off x="305161" y="575600"/>
+            <a:ext cx="10044841" cy="872200"/>
+          </a:xfrm>
+          <a:prstGeom prst="rect">
+            <a:avLst/>
+          </a:prstGeom>
+        </p:spPr>
+      </p:pic>
+      <p:sp>
+        <p:nvSpPr>
+          <p:cNvPr id="10" name="CuadroTexto 9">
+            <a:extLst>
+              <a:ext uri="{FF2B5EF4-FFF2-40B4-BE49-F238E27FC236}">
+                <a16:creationId xmlns:a16="http://schemas.microsoft.com/office/drawing/2014/main" id="{2DB85571-0C8A-62B2-4D04-46C7FCF54DA6}"/>
+              </a:ext>
+            </a:extLst>
+          </p:cNvPr>
+          <p:cNvSpPr txBox="1"/>
+          <p:nvPr/>
+        </p:nvSpPr>
+        <p:spPr>
+          <a:xfrm>
+            <a:off x="609600" y="5061554"/>
+            <a:ext cx="10439400" cy="1200329"/>
+          </a:xfrm>
+          <a:prstGeom prst="rect">
+            <a:avLst/>
+          </a:prstGeom>
+          <a:noFill/>
+        </p:spPr>
+        <p:txBody>
+          <a:bodyPr wrap="square">
+            <a:spAutoFit/>
+          </a:bodyPr>
+          <a:lstStyle/>
+          <a:p>
+            <a:r>
+              <a:rPr lang="en-US" dirty="0"/>
+              <a:t>Al </a:t>
+            </a:r>
+            <a:r>
+              <a:rPr lang="en-US" dirty="0" err="1"/>
+              <a:t>varirar</a:t>
+            </a:r>
+            <a:r>
+              <a:rPr lang="en-US" dirty="0"/>
+              <a:t> </a:t>
+            </a:r>
+            <a:r>
+              <a:rPr lang="en-US" dirty="0" err="1"/>
+              <a:t>el</a:t>
+            </a:r>
+            <a:r>
+              <a:rPr lang="en-US" dirty="0"/>
+              <a:t> </a:t>
+            </a:r>
+            <a:r>
+              <a:rPr lang="en-US" dirty="0" err="1"/>
+              <a:t>índice</a:t>
+            </a:r>
+            <a:r>
+              <a:rPr lang="en-US" dirty="0"/>
+              <a:t> </a:t>
+            </a:r>
+            <a:r>
+              <a:rPr lang="en-US" dirty="0" err="1"/>
+              <a:t>efectivo</a:t>
+            </a:r>
+            <a:r>
+              <a:rPr lang="en-US" dirty="0"/>
+              <a:t> </a:t>
+            </a:r>
+            <a:r>
+              <a:rPr lang="en-US" dirty="0" err="1"/>
+              <a:t>en</a:t>
+            </a:r>
+            <a:r>
+              <a:rPr lang="en-US" dirty="0"/>
+              <a:t> mayor o </a:t>
+            </a:r>
+            <a:r>
+              <a:rPr lang="en-US" dirty="0" err="1"/>
+              <a:t>menor</a:t>
+            </a:r>
+            <a:r>
+              <a:rPr lang="en-US" dirty="0"/>
+              <a:t> </a:t>
+            </a:r>
+            <a:r>
+              <a:rPr lang="en-US" dirty="0" err="1"/>
+              <a:t>medida</a:t>
+            </a:r>
+            <a:r>
+              <a:rPr lang="en-US" dirty="0"/>
+              <a:t> de uno de </a:t>
+            </a:r>
+            <a:r>
+              <a:rPr lang="en-US" dirty="0" err="1"/>
+              <a:t>los</a:t>
+            </a:r>
+            <a:r>
+              <a:rPr lang="en-US" dirty="0"/>
+              <a:t> </a:t>
+            </a:r>
+            <a:r>
+              <a:rPr lang="en-US" dirty="0" err="1"/>
+              <a:t>brazos</a:t>
+            </a:r>
+            <a:r>
+              <a:rPr lang="en-US" dirty="0"/>
+              <a:t>, </a:t>
+            </a:r>
+            <a:r>
+              <a:rPr lang="en-US" dirty="0" err="1"/>
+              <a:t>podemos</a:t>
+            </a:r>
+            <a:r>
+              <a:rPr lang="en-US" dirty="0"/>
+              <a:t> </a:t>
+            </a:r>
+            <a:r>
+              <a:rPr lang="en-US" dirty="0" err="1"/>
+              <a:t>controlar</a:t>
+            </a:r>
+            <a:r>
+              <a:rPr lang="en-US" dirty="0"/>
+              <a:t> la </a:t>
+            </a:r>
+            <a:r>
+              <a:rPr lang="en-US" dirty="0" err="1"/>
+              <a:t>potencia</a:t>
+            </a:r>
+            <a:r>
+              <a:rPr lang="en-US" dirty="0"/>
+              <a:t> </a:t>
+            </a:r>
+            <a:r>
+              <a:rPr lang="en-US" dirty="0" err="1"/>
+              <a:t>que</a:t>
+            </a:r>
+            <a:r>
+              <a:rPr lang="en-US" dirty="0"/>
+              <a:t> sale de </a:t>
+            </a:r>
+            <a:r>
+              <a:rPr lang="en-US" dirty="0" err="1"/>
+              <a:t>los</a:t>
+            </a:r>
+            <a:r>
+              <a:rPr lang="en-US" dirty="0"/>
+              <a:t> </a:t>
+            </a:r>
+            <a:r>
+              <a:rPr lang="en-US" dirty="0" err="1"/>
+              <a:t>puertos</a:t>
+            </a:r>
+            <a:r>
+              <a:rPr lang="en-US" dirty="0"/>
+              <a:t> para </a:t>
+            </a:r>
+            <a:r>
+              <a:rPr lang="en-US" dirty="0" err="1"/>
+              <a:t>una</a:t>
+            </a:r>
+            <a:r>
+              <a:rPr lang="en-US" dirty="0"/>
+              <a:t> </a:t>
+            </a:r>
+            <a:r>
+              <a:rPr lang="en-US" dirty="0" err="1"/>
+              <a:t>determinada</a:t>
+            </a:r>
+            <a:r>
+              <a:rPr lang="en-US" dirty="0"/>
+              <a:t> </a:t>
+            </a:r>
+            <a:r>
+              <a:rPr lang="en-US" dirty="0" err="1"/>
+              <a:t>longitud</a:t>
+            </a:r>
+            <a:r>
+              <a:rPr lang="en-US" dirty="0"/>
+              <a:t> de </a:t>
+            </a:r>
+            <a:r>
+              <a:rPr lang="en-US" dirty="0" err="1"/>
+              <a:t>onda</a:t>
+            </a:r>
+            <a:r>
+              <a:rPr lang="en-US" dirty="0"/>
+              <a:t>.   </a:t>
+            </a:r>
+          </a:p>
+          <a:p>
+            <a:endParaRPr lang="en-US" dirty="0"/>
+          </a:p>
+          <a:p>
+            <a:endParaRPr lang="es-ES" dirty="0"/>
+          </a:p>
+        </p:txBody>
+      </p:sp>
+      <p:pic>
+        <p:nvPicPr>
+          <p:cNvPr id="3" name="Imagen 2">
+            <a:extLst>
+              <a:ext uri="{FF2B5EF4-FFF2-40B4-BE49-F238E27FC236}">
+                <a16:creationId xmlns:a16="http://schemas.microsoft.com/office/drawing/2014/main" id="{0763DAF3-932E-71E0-53E4-8B79009188C8}"/>
+              </a:ext>
+            </a:extLst>
+          </p:cNvPr>
+          <p:cNvPicPr>
+            <a:picLocks noChangeAspect="1"/>
+          </p:cNvPicPr>
+          <p:nvPr/>
+        </p:nvPicPr>
+        <p:blipFill>
+          <a:blip r:embed="rId3"/>
+          <a:stretch>
+            <a:fillRect/>
+          </a:stretch>
+        </p:blipFill>
+        <p:spPr>
+          <a:xfrm>
+            <a:off x="6471228" y="1574149"/>
+            <a:ext cx="4038600" cy="3190214"/>
+          </a:xfrm>
+          <a:prstGeom prst="rect">
+            <a:avLst/>
+          </a:prstGeom>
+        </p:spPr>
+      </p:pic>
+      <p:pic>
+        <p:nvPicPr>
+          <p:cNvPr id="11" name="Imagen 10">
+            <a:extLst>
+              <a:ext uri="{FF2B5EF4-FFF2-40B4-BE49-F238E27FC236}">
+                <a16:creationId xmlns:a16="http://schemas.microsoft.com/office/drawing/2014/main" id="{2F5C511F-3413-3D2F-3F95-259AFCFBCC2C}"/>
+              </a:ext>
+            </a:extLst>
+          </p:cNvPr>
+          <p:cNvPicPr>
+            <a:picLocks noChangeAspect="1"/>
+          </p:cNvPicPr>
+          <p:nvPr/>
+        </p:nvPicPr>
+        <p:blipFill>
+          <a:blip r:embed="rId4">
+            <a:extLst>
+              <a:ext uri="{28A0092B-C50C-407E-A947-70E740481C1C}">
+                <a14:useLocalDpi xmlns:a14="http://schemas.microsoft.com/office/drawing/2010/main" val="0"/>
+              </a:ext>
+            </a:extLst>
+          </a:blip>
+          <a:srcRect t="384" b="384"/>
+          <a:stretch/>
+        </p:blipFill>
+        <p:spPr>
+          <a:xfrm>
+            <a:off x="1066800" y="1508871"/>
+            <a:ext cx="4038599" cy="3239122"/>
+          </a:xfrm>
+          <a:prstGeom prst="rect">
+            <a:avLst/>
+          </a:prstGeom>
+        </p:spPr>
+      </p:pic>
+    </p:spTree>
+    <p:extLst>
+      <p:ext uri="{BB962C8B-B14F-4D97-AF65-F5344CB8AC3E}">
+        <p14:creationId xmlns:p14="http://schemas.microsoft.com/office/powerpoint/2010/main" val="1338821209"/>
       </p:ext>
     </p:extLst>
   </p:cSld>
